--- a/Presentation.pptx
+++ b/Presentation.pptx
@@ -6271,7 +6271,7 @@
         </p:nvSpPr>
         <p:spPr>
           <a:xfrm>
-            <a:off x="508000" y="457200"/>
+            <a:off x="303275" y="451065"/>
             <a:ext cx="3048000" cy="355600"/>
           </a:xfrm>
           <a:prstGeom prst="roundRect">
@@ -6314,13 +6314,13 @@
         </p:nvSpPr>
         <p:spPr>
           <a:xfrm>
-            <a:off x="330200" y="1142999"/>
-            <a:ext cx="6527800" cy="3662681"/>
+            <a:off x="309480" y="1411955"/>
+            <a:ext cx="6466306" cy="3468803"/>
           </a:xfrm>
         </p:spPr>
         <p:txBody>
           <a:bodyPr wrap="square" lIns="0" tIns="0" rIns="0" bIns="0" anchor="t">
-            <a:normAutofit/>
+            <a:normAutofit fontScale="90000"/>
           </a:bodyPr>
           <a:lstStyle/>
           <a:p>
@@ -6335,7 +6335,7 @@
                   <a:srgbClr val="FFFFFF"/>
                 </a:solidFill>
               </a:rPr>
-              <a:t>Building </a:t>
+              <a:t>Building an </a:t>
             </a:r>
             <a:br>
               <a:rPr lang="en-US" b="1" dirty="0">
@@ -6350,22 +6350,37 @@
                   <a:srgbClr val="FFFFFF"/>
                 </a:solidFill>
               </a:rPr>
-              <a:t>AI-Powered</a:t>
-            </a:r>
-          </a:p>
-          <a:p>
-            <a:pPr algn="l">
-              <a:lnSpc>
-                <a:spcPct val="100000"/>
-              </a:lnSpc>
-            </a:pPr>
-            <a:r>
+              <a:t>AI-Powered </a:t>
+            </a:r>
+            <a:br>
               <a:rPr lang="en-US" b="1" dirty="0">
                 <a:solidFill>
                   <a:srgbClr val="FFFFFF"/>
                 </a:solidFill>
               </a:rPr>
-              <a:t>Reporting with </a:t>
+            </a:br>
+            <a:r>
+              <a:rPr lang="en-US" b="1" dirty="0">
+                <a:solidFill>
+                  <a:srgbClr val="FFFFFF"/>
+                </a:solidFill>
+              </a:rPr>
+              <a:t>Query Generator </a:t>
+            </a:r>
+            <a:br>
+              <a:rPr lang="en-US" b="1" dirty="0">
+                <a:solidFill>
+                  <a:srgbClr val="FFFFFF"/>
+                </a:solidFill>
+              </a:rPr>
+            </a:br>
+            <a:r>
+              <a:rPr lang="en-US" b="1" dirty="0">
+                <a:solidFill>
+                  <a:srgbClr val="FFFFFF"/>
+                </a:solidFill>
+              </a:rPr>
+              <a:t>with </a:t>
             </a:r>
             <a:r>
               <a:rPr lang="en-US" b="1" dirty="0">
@@ -7024,7 +7039,7 @@
         <p:spPr>
           <a:xfrm>
             <a:off x="635000" y="1669140"/>
-            <a:ext cx="5334000" cy="4191000"/>
+            <a:ext cx="5461000" cy="4191000"/>
           </a:xfrm>
           <a:prstGeom prst="roundRect">
             <a:avLst>
@@ -7107,7 +7122,7 @@
                   <a:srgbClr val="334155"/>
                 </a:solidFill>
               </a:rPr>
-              <a:t> Block DELETE / UPDATE / DROP</a:t>
+              <a:t> Block DELETE, UPDATE, DROP</a:t>
             </a:r>
           </a:p>
           <a:p>
@@ -7620,7 +7635,7 @@
         </p:nvSpPr>
         <p:spPr>
           <a:xfrm>
-            <a:off x="801914" y="1890486"/>
+            <a:off x="623786" y="1985488"/>
             <a:ext cx="889000" cy="889000"/>
           </a:xfrm>
           <a:prstGeom prst="ellipse">
@@ -7659,8 +7674,8 @@
         </p:nvSpPr>
         <p:spPr>
           <a:xfrm>
-            <a:off x="1872344" y="1905000"/>
-            <a:ext cx="3302000" cy="889000"/>
+            <a:off x="1599215" y="2000002"/>
+            <a:ext cx="3590305" cy="889000"/>
           </a:xfrm>
           <a:prstGeom prst="rect">
             <a:avLst/>
@@ -7693,7 +7708,7 @@
                   <a:srgbClr val="7B4F05"/>
                 </a:solidFill>
               </a:rPr>
-              <a:t>Understand what the user asked</a:t>
+              <a:t>Understand the user question</a:t>
             </a:r>
           </a:p>
         </p:txBody>
@@ -7706,7 +7721,7 @@
         </p:nvSpPr>
         <p:spPr>
           <a:xfrm>
-            <a:off x="5334000" y="2032000"/>
+            <a:off x="5284520" y="2127002"/>
             <a:ext cx="2032000" cy="635000"/>
           </a:xfrm>
           <a:prstGeom prst="roundRect">
@@ -7747,8 +7762,8 @@
         </p:nvSpPr>
         <p:spPr>
           <a:xfrm>
-            <a:off x="7620000" y="2032000"/>
-            <a:ext cx="2032000" cy="635000"/>
+            <a:off x="7715000" y="2137888"/>
+            <a:ext cx="2286000" cy="635000"/>
           </a:xfrm>
           <a:prstGeom prst="roundRect">
             <a:avLst>
@@ -7788,7 +7803,7 @@
         </p:nvSpPr>
         <p:spPr>
           <a:xfrm>
-            <a:off x="801914" y="3175000"/>
+            <a:off x="623786" y="3270002"/>
             <a:ext cx="889000" cy="889000"/>
           </a:xfrm>
           <a:prstGeom prst="ellipse">
@@ -7825,7 +7840,7 @@
         </p:nvSpPr>
         <p:spPr>
           <a:xfrm>
-            <a:off x="1872344" y="3175000"/>
+            <a:off x="1599216" y="3270002"/>
             <a:ext cx="3302000" cy="889000"/>
           </a:xfrm>
           <a:prstGeom prst="rect">
@@ -7872,8 +7887,8 @@
         </p:nvSpPr>
         <p:spPr>
           <a:xfrm>
-            <a:off x="5334000" y="3302000"/>
-            <a:ext cx="2032000" cy="635000"/>
+            <a:off x="5284520" y="3397002"/>
+            <a:ext cx="2176480" cy="635000"/>
           </a:xfrm>
           <a:prstGeom prst="roundRect">
             <a:avLst>
@@ -7913,7 +7928,7 @@
         </p:nvSpPr>
         <p:spPr>
           <a:xfrm>
-            <a:off x="7620000" y="3302000"/>
+            <a:off x="7715000" y="3397002"/>
             <a:ext cx="2032000" cy="635000"/>
           </a:xfrm>
           <a:prstGeom prst="roundRect">
@@ -7954,7 +7969,7 @@
         </p:nvSpPr>
         <p:spPr>
           <a:xfrm>
-            <a:off x="9906000" y="3302000"/>
+            <a:off x="10001000" y="3397002"/>
             <a:ext cx="2032000" cy="635000"/>
           </a:xfrm>
           <a:prstGeom prst="roundRect">
@@ -7995,7 +8010,7 @@
         </p:nvSpPr>
         <p:spPr>
           <a:xfrm>
-            <a:off x="801914" y="4445000"/>
+            <a:off x="623786" y="4540002"/>
             <a:ext cx="889000" cy="889000"/>
           </a:xfrm>
           <a:prstGeom prst="ellipse">
@@ -8032,7 +8047,7 @@
         </p:nvSpPr>
         <p:spPr>
           <a:xfrm>
-            <a:off x="1872344" y="4445000"/>
+            <a:off x="1599216" y="4540002"/>
             <a:ext cx="3302000" cy="889000"/>
           </a:xfrm>
           <a:prstGeom prst="rect">
@@ -8079,7 +8094,7 @@
         </p:nvSpPr>
         <p:spPr>
           <a:xfrm>
-            <a:off x="5334000" y="4572000"/>
+            <a:off x="5284520" y="4667002"/>
             <a:ext cx="2032000" cy="635000"/>
           </a:xfrm>
           <a:prstGeom prst="roundRect">
@@ -8120,7 +8135,7 @@
         </p:nvSpPr>
         <p:spPr>
           <a:xfrm>
-            <a:off x="7620000" y="4572000"/>
+            <a:off x="7715000" y="4667002"/>
             <a:ext cx="2032000" cy="635000"/>
           </a:xfrm>
           <a:prstGeom prst="roundRect">
@@ -8161,7 +8176,7 @@
         </p:nvSpPr>
         <p:spPr>
           <a:xfrm>
-            <a:off x="9906000" y="4572000"/>
+            <a:off x="10001000" y="4667002"/>
             <a:ext cx="2032000" cy="635000"/>
           </a:xfrm>
           <a:prstGeom prst="roundRect">
@@ -8190,45 +8205,6 @@
                 </a:solidFill>
               </a:rPr>
               <a:t>Exporter</a:t>
-            </a:r>
-          </a:p>
-        </p:txBody>
-      </p:sp>
-      <p:sp>
-        <p:nvSpPr>
-          <p:cNvPr id="996" name="Insight"/>
-          <p:cNvSpPr/>
-          <p:nvPr/>
-        </p:nvSpPr>
-        <p:spPr>
-          <a:xfrm>
-            <a:off x="635000" y="5778500"/>
-            <a:ext cx="10922000" cy="457200"/>
-          </a:xfrm>
-          <a:prstGeom prst="roundRect">
-            <a:avLst>
-              <a:gd name="adj" fmla="val 50000"/>
-            </a:avLst>
-          </a:prstGeom>
-          <a:solidFill>
-            <a:srgbClr val="F1F5F9"/>
-          </a:solidFill>
-          <a:ln>
-            <a:noFill/>
-          </a:ln>
-        </p:spPr>
-        <p:txBody>
-          <a:bodyPr wrap="square" lIns="180000" tIns="0" rIns="180000" bIns="0" anchor="ctr"/>
-          <a:lstStyle/>
-          <a:p>
-            <a:pPr algn="ctr"/>
-            <a:r>
-              <a:rPr lang="en-US" dirty="0">
-                <a:solidFill>
-                  <a:srgbClr val="475569"/>
-                </a:solidFill>
-              </a:rPr>
-              <a:t>Swap the LLM, swap the database, swap the UI — the contract between layers stays the same.</a:t>
             </a:r>
           </a:p>
         </p:txBody>
@@ -8249,7 +8225,7 @@
         </p:nvCxnSpPr>
         <p:spPr>
           <a:xfrm>
-            <a:off x="635000" y="2975429"/>
+            <a:off x="635000" y="3070431"/>
             <a:ext cx="11557000" cy="0"/>
           </a:xfrm>
           <a:prstGeom prst="line">
@@ -8296,7 +8272,7 @@
         </p:nvCxnSpPr>
         <p:spPr>
           <a:xfrm>
-            <a:off x="635000" y="4230915"/>
+            <a:off x="635000" y="4325917"/>
             <a:ext cx="11557000" cy="0"/>
           </a:xfrm>
           <a:prstGeom prst="line">
@@ -8948,7 +8924,15 @@
                   <a:srgbClr val="22D3EE"/>
                 </a:solidFill>
               </a:rPr>
-              <a:t>real product</a:t>
+              <a:t>real  </a:t>
+            </a:r>
+            <a:r>
+              <a:rPr lang="en-US" sz="7200" b="1" dirty="0">
+                <a:solidFill>
+                  <a:srgbClr val="22D3EE"/>
+                </a:solidFill>
+              </a:rPr>
+              <a:t>product</a:t>
             </a:r>
           </a:p>
         </p:txBody>
@@ -10415,7 +10399,7 @@
           <a:p>
             <a:pPr algn="l"/>
             <a:r>
-              <a:rPr lang="en-US" sz="4000" b="1" dirty="0">
+              <a:rPr lang="en-US" sz="3600" b="1" dirty="0">
                 <a:solidFill>
                   <a:srgbClr val="22D3EE"/>
                 </a:solidFill>
@@ -10423,7 +10407,7 @@
               <a:t>▣  </a:t>
             </a:r>
             <a:r>
-              <a:rPr lang="en-US" sz="2800" b="1" dirty="0">
+              <a:rPr lang="en-US" sz="2400" b="1" dirty="0">
                 <a:solidFill>
                   <a:srgbClr val="0F172A"/>
                 </a:solidFill>
@@ -10438,7 +10422,7 @@
               </a:spcBef>
             </a:pPr>
             <a:r>
-              <a:rPr lang="en-US" sz="2000" i="1" dirty="0">
+              <a:rPr lang="en-US" i="1" dirty="0">
                 <a:solidFill>
                   <a:srgbClr val="64748B"/>
                 </a:solidFill>
@@ -10479,7 +10463,7 @@
           <a:p>
             <a:pPr algn="l"/>
             <a:r>
-              <a:rPr lang="en-US" sz="4000" b="1" dirty="0">
+              <a:rPr lang="en-US" sz="3600" b="1" dirty="0">
                 <a:solidFill>
                   <a:srgbClr val="6366F1"/>
                 </a:solidFill>
@@ -10487,7 +10471,7 @@
               <a:t>◉  </a:t>
             </a:r>
             <a:r>
-              <a:rPr lang="en-US" sz="2800" b="1" dirty="0">
+              <a:rPr lang="en-US" sz="2400" b="1" dirty="0">
                 <a:solidFill>
                   <a:srgbClr val="0F172A"/>
                 </a:solidFill>
@@ -10502,7 +10486,7 @@
               </a:spcBef>
             </a:pPr>
             <a:r>
-              <a:rPr lang="en-US" sz="2000" i="1" dirty="0">
+              <a:rPr lang="en-US" i="1" dirty="0">
                 <a:solidFill>
                   <a:srgbClr val="64748B"/>
                 </a:solidFill>
@@ -10543,7 +10527,7 @@
           <a:p>
             <a:pPr algn="l"/>
             <a:r>
-              <a:rPr lang="en-US" sz="4000" b="1" dirty="0">
+              <a:rPr lang="en-US" sz="3600" b="1" dirty="0">
                 <a:solidFill>
                   <a:srgbClr val="10B981"/>
                 </a:solidFill>
@@ -10551,7 +10535,7 @@
               <a:t>⚡  </a:t>
             </a:r>
             <a:r>
-              <a:rPr lang="en-US" sz="2800" b="1" dirty="0">
+              <a:rPr lang="en-US" sz="2400" b="1" dirty="0">
                 <a:solidFill>
                   <a:srgbClr val="0F172A"/>
                 </a:solidFill>
@@ -10566,7 +10550,7 @@
               </a:spcBef>
             </a:pPr>
             <a:r>
-              <a:rPr lang="en-US" sz="2000" i="1" dirty="0">
+              <a:rPr lang="en-US" i="1" dirty="0">
                 <a:solidFill>
                   <a:srgbClr val="64748B"/>
                 </a:solidFill>
@@ -10607,7 +10591,7 @@
           <a:p>
             <a:pPr algn="l"/>
             <a:r>
-              <a:rPr lang="en-US" sz="4000" b="1" dirty="0">
+              <a:rPr lang="en-US" sz="3600" b="1" dirty="0">
                 <a:solidFill>
                   <a:srgbClr val="F43F5E"/>
                 </a:solidFill>
@@ -10615,7 +10599,7 @@
               <a:t>📊  </a:t>
             </a:r>
             <a:r>
-              <a:rPr lang="en-US" sz="2800" b="1" dirty="0">
+              <a:rPr lang="en-US" sz="2400" b="1" dirty="0">
                 <a:solidFill>
                   <a:srgbClr val="0F172A"/>
                 </a:solidFill>
@@ -10630,7 +10614,7 @@
               </a:spcBef>
             </a:pPr>
             <a:r>
-              <a:rPr lang="en-US" sz="2000" i="1" dirty="0">
+              <a:rPr lang="en-US" i="1" dirty="0">
                 <a:solidFill>
                   <a:srgbClr val="64748B"/>
                 </a:solidFill>
@@ -10671,23 +10655,23 @@
           <a:p>
             <a:pPr algn="l"/>
             <a:r>
+              <a:rPr lang="en-US" sz="3200" b="1" dirty="0">
+                <a:solidFill>
+                  <a:srgbClr val="F59E0B"/>
+                </a:solidFill>
+              </a:rPr>
+              <a:t>🔍</a:t>
+            </a:r>
+            <a:r>
               <a:rPr lang="en-US" sz="3600" b="1" dirty="0">
                 <a:solidFill>
                   <a:srgbClr val="F59E0B"/>
                 </a:solidFill>
               </a:rPr>
-              <a:t>🔍</a:t>
-            </a:r>
-            <a:r>
-              <a:rPr lang="en-US" sz="4000" b="1" dirty="0">
-                <a:solidFill>
-                  <a:srgbClr val="F59E0B"/>
-                </a:solidFill>
-              </a:rPr>
               <a:t>  </a:t>
             </a:r>
             <a:r>
-              <a:rPr lang="en-US" sz="2800" b="1" dirty="0">
+              <a:rPr lang="en-US" sz="2400" b="1" dirty="0">
                 <a:solidFill>
                   <a:srgbClr val="0F172A"/>
                 </a:solidFill>
@@ -10702,7 +10686,7 @@
               </a:spcBef>
             </a:pPr>
             <a:r>
-              <a:rPr lang="en-US" sz="2000" i="1" dirty="0">
+              <a:rPr lang="en-US" i="1" dirty="0">
                 <a:solidFill>
                   <a:srgbClr val="64748B"/>
                 </a:solidFill>
@@ -10743,7 +10727,7 @@
           <a:p>
             <a:pPr algn="l"/>
             <a:r>
-              <a:rPr lang="en-US" sz="4000" b="1" dirty="0">
+              <a:rPr lang="en-US" sz="3600" b="1" dirty="0">
                 <a:solidFill>
                   <a:srgbClr val="A78BFA"/>
                 </a:solidFill>
@@ -10751,7 +10735,7 @@
               <a:t>📈  </a:t>
             </a:r>
             <a:r>
-              <a:rPr lang="en-US" sz="2800" b="1" dirty="0">
+              <a:rPr lang="en-US" sz="2400" b="1" dirty="0">
                 <a:solidFill>
                   <a:srgbClr val="0F172A"/>
                 </a:solidFill>
@@ -10766,7 +10750,7 @@
               </a:spcBef>
             </a:pPr>
             <a:r>
-              <a:rPr lang="en-US" sz="2000" i="1" dirty="0">
+              <a:rPr lang="en-US" i="1" dirty="0">
                 <a:solidFill>
                   <a:srgbClr val="64748B"/>
                 </a:solidFill>
@@ -10813,7 +10797,7 @@
           </a:lstStyle>
           <a:p>
             <a:r>
-              <a:rPr lang="en-US" dirty="0"/>
+              <a:rPr lang="en-US" sz="2000" dirty="0"/>
               <a:t>Anywhere a JIRA ticket asks a developer to write a SELECT.</a:t>
             </a:r>
           </a:p>
@@ -12386,12 +12370,20 @@
                 </a:spcBef>
               </a:pPr>
               <a:r>
+                <a:rPr lang="en-US" sz="2700">
+                  <a:solidFill>
+                    <a:srgbClr val="FFFFFF"/>
+                  </a:solidFill>
+                </a:rPr>
+                <a:t>Until now we </a:t>
+              </a:r>
+              <a:r>
                 <a:rPr lang="en-US" sz="2700" dirty="0">
                   <a:solidFill>
                     <a:srgbClr val="FFFFFF"/>
                   </a:solidFill>
                 </a:rPr>
-                <a:t>We learnt programming languages to talk with computers</a:t>
+                <a:t>learnt programming languages to talk with computers</a:t>
               </a:r>
               <a:endParaRPr lang="en-US" sz="2700" dirty="0">
                 <a:solidFill>
@@ -13232,7 +13224,7 @@
         </p:nvSpPr>
         <p:spPr>
           <a:xfrm>
-            <a:off x="503990" y="1143000"/>
+            <a:off x="563367" y="739239"/>
             <a:ext cx="885423" cy="1291442"/>
           </a:xfrm>
           <a:prstGeom prst="rect">
@@ -13265,8 +13257,8 @@
         </p:nvSpPr>
         <p:spPr>
           <a:xfrm>
-            <a:off x="889000" y="2222500"/>
-            <a:ext cx="10414000" cy="2159000"/>
+            <a:off x="1006078" y="1856426"/>
+            <a:ext cx="7876665" cy="3145147"/>
           </a:xfrm>
           <a:prstGeom prst="rect">
             <a:avLst/>
@@ -13288,11 +13280,26 @@
                   <a:srgbClr val="0F172A"/>
                 </a:solidFill>
               </a:rPr>
-              <a:t>What if you could just </a:t>
-            </a:r>
-            <a:r>
+              <a:t>What if you could </a:t>
+            </a:r>
+            <a:br>
               <a:rPr lang="en-US" sz="6600" b="1" dirty="0">
                 <a:solidFill>
+                  <a:srgbClr val="0F172A"/>
+                </a:solidFill>
+              </a:rPr>
+            </a:br>
+            <a:r>
+              <a:rPr lang="en-US" sz="6600" b="1" dirty="0">
+                <a:solidFill>
+                  <a:srgbClr val="0F172A"/>
+                </a:solidFill>
+              </a:rPr>
+              <a:t>just </a:t>
+            </a:r>
+            <a:r>
+              <a:rPr lang="en-US" sz="6600" b="1" dirty="0">
+                <a:solidFill>
                   <a:srgbClr val="0891B2"/>
                 </a:solidFill>
               </a:rPr>
@@ -13304,154 +13311,22 @@
                   <a:srgbClr val="0F172A"/>
                 </a:solidFill>
               </a:rPr>
-              <a:t> your database?</a:t>
-            </a:r>
-          </a:p>
-        </p:txBody>
-      </p:sp>
-      <p:sp>
-        <p:nvSpPr>
-          <p:cNvPr id="310" name="Chip310"/>
-          <p:cNvSpPr/>
-          <p:nvPr/>
-        </p:nvSpPr>
-        <p:spPr>
-          <a:xfrm>
-            <a:off x="888999" y="4953000"/>
-            <a:ext cx="3526589" cy="889000"/>
-          </a:xfrm>
-          <a:prstGeom prst="roundRect">
-            <a:avLst>
-              <a:gd name="adj" fmla="val 20000"/>
-            </a:avLst>
-          </a:prstGeom>
-          <a:solidFill>
-            <a:srgbClr val="FFFFFF"/>
-          </a:solidFill>
-          <a:ln w="12700">
-            <a:solidFill>
-              <a:srgbClr val="A5F3FC"/>
-            </a:solidFill>
-          </a:ln>
-        </p:spPr>
-        <p:txBody>
-          <a:bodyPr wrap="square" lIns="180000" tIns="100000" rIns="180000" bIns="100000" anchor="ctr"/>
-          <a:lstStyle/>
-          <a:p>
-            <a:pPr algn="ctr"/>
-            <a:r>
-              <a:rPr lang="en-US" sz="2400" dirty="0">
-                <a:solidFill>
-                  <a:srgbClr val="0891B2"/>
-                </a:solidFill>
-              </a:rPr>
-              <a:t>→  </a:t>
-            </a:r>
-            <a:r>
-              <a:rPr lang="en-US" dirty="0">
+              <a:t> </a:t>
+            </a:r>
+            <a:br>
+              <a:rPr lang="en-US" sz="6600" b="1" dirty="0">
                 <a:solidFill>
                   <a:srgbClr val="0F172A"/>
                 </a:solidFill>
               </a:rPr>
-              <a:t>Natural language → insights</a:t>
-            </a:r>
-          </a:p>
-        </p:txBody>
-      </p:sp>
-      <p:sp>
-        <p:nvSpPr>
-          <p:cNvPr id="311" name="Chip311"/>
-          <p:cNvSpPr/>
-          <p:nvPr/>
-        </p:nvSpPr>
-        <p:spPr>
-          <a:xfrm>
-            <a:off x="4547937" y="4953000"/>
-            <a:ext cx="3332747" cy="889000"/>
-          </a:xfrm>
-          <a:prstGeom prst="roundRect">
-            <a:avLst>
-              <a:gd name="adj" fmla="val 20000"/>
-            </a:avLst>
-          </a:prstGeom>
-          <a:solidFill>
-            <a:srgbClr val="FFFFFF"/>
-          </a:solidFill>
-          <a:ln w="12700">
-            <a:solidFill>
-              <a:srgbClr val="A5F3FC"/>
-            </a:solidFill>
-          </a:ln>
-        </p:spPr>
-        <p:txBody>
-          <a:bodyPr wrap="square" lIns="180000" tIns="100000" rIns="180000" bIns="100000" anchor="ctr"/>
-          <a:lstStyle/>
-          <a:p>
-            <a:pPr algn="ctr"/>
-            <a:r>
-              <a:rPr lang="en-US" sz="2800" dirty="0">
-                <a:solidFill>
-                  <a:srgbClr val="0891B2"/>
-                </a:solidFill>
-              </a:rPr>
-              <a:t>✓  </a:t>
-            </a:r>
-            <a:r>
-              <a:rPr lang="en-US" sz="2000" dirty="0">
+            </a:br>
+            <a:r>
+              <a:rPr lang="en-US" sz="6600" b="1" dirty="0">
                 <a:solidFill>
                   <a:srgbClr val="0F172A"/>
                 </a:solidFill>
               </a:rPr>
-              <a:t>No SQL required</a:t>
-            </a:r>
-          </a:p>
-        </p:txBody>
-      </p:sp>
-      <p:sp>
-        <p:nvSpPr>
-          <p:cNvPr id="312" name="Chip312"/>
-          <p:cNvSpPr/>
-          <p:nvPr/>
-        </p:nvSpPr>
-        <p:spPr>
-          <a:xfrm>
-            <a:off x="8000999" y="4953000"/>
-            <a:ext cx="3526589" cy="889000"/>
-          </a:xfrm>
-          <a:prstGeom prst="roundRect">
-            <a:avLst>
-              <a:gd name="adj" fmla="val 20000"/>
-            </a:avLst>
-          </a:prstGeom>
-          <a:solidFill>
-            <a:srgbClr val="FFFFFF"/>
-          </a:solidFill>
-          <a:ln w="12700">
-            <a:solidFill>
-              <a:srgbClr val="A5F3FC"/>
-            </a:solidFill>
-          </a:ln>
-        </p:spPr>
-        <p:txBody>
-          <a:bodyPr wrap="square" lIns="180000" tIns="100000" rIns="180000" bIns="100000" anchor="ctr"/>
-          <a:lstStyle/>
-          <a:p>
-            <a:pPr algn="ctr"/>
-            <a:r>
-              <a:rPr lang="en-US" sz="2800" dirty="0">
-                <a:solidFill>
-                  <a:srgbClr val="0891B2"/>
-                </a:solidFill>
-              </a:rPr>
-              <a:t>◎  </a:t>
-            </a:r>
-            <a:r>
-              <a:rPr lang="en-US" sz="2000" dirty="0">
-                <a:solidFill>
-                  <a:srgbClr val="0F172A"/>
-                </a:solidFill>
-              </a:rPr>
-              <a:t>Devs AND business users</a:t>
+              <a:t>your database?</a:t>
             </a:r>
           </a:p>
         </p:txBody>
@@ -13470,8 +13345,8 @@
         </p:nvSpPr>
         <p:spPr>
           <a:xfrm>
-            <a:off x="9183793" y="3429000"/>
-            <a:ext cx="945859" cy="1214252"/>
+            <a:off x="8267310" y="4200896"/>
+            <a:ext cx="1230866" cy="1238004"/>
           </a:xfrm>
           <a:prstGeom prst="rect">
             <a:avLst/>
@@ -15129,14 +15004,14 @@
           <p:cNvCxnSpPr>
             <a:cxnSpLocks/>
             <a:stCxn id="5" idx="1"/>
-            <a:endCxn id="803" idx="2"/>
+            <a:endCxn id="802" idx="2"/>
           </p:cNvCxnSpPr>
           <p:nvPr/>
         </p:nvCxnSpPr>
         <p:spPr>
           <a:xfrm rot="10800000">
-            <a:off x="7048501" y="3323968"/>
-            <a:ext cx="2994797" cy="808512"/>
+            <a:off x="5143501" y="3323968"/>
+            <a:ext cx="4899797" cy="808512"/>
           </a:xfrm>
           <a:prstGeom prst="bentConnector2">
             <a:avLst/>

--- a/Presentation.pptx
+++ b/Presentation.pptx
@@ -13,7 +13,7 @@
     <p:sldId id="308" r:id="rId4"/>
     <p:sldId id="309" r:id="rId5"/>
     <p:sldId id="310" r:id="rId6"/>
-    <p:sldId id="311" r:id="rId7"/>
+    <p:sldId id="330" r:id="rId7"/>
     <p:sldId id="299" r:id="rId8"/>
     <p:sldId id="312" r:id="rId9"/>
     <p:sldId id="313" r:id="rId10"/>
@@ -216,7 +216,7 @@
           <a:p>
             <a:fld id="{BC660078-77E7-46A7-9649-B3FD62DAD7B9}" type="datetimeFigureOut">
               <a:rPr lang="tr-TR" smtClean="0"/>
-              <a:t>22.04.2026</a:t>
+              <a:t>26.04.2026</a:t>
             </a:fld>
             <a:endParaRPr lang="tr-TR"/>
           </a:p>
@@ -1049,48 +1049,9 @@
             </a:r>
           </a:p>
           <a:p>
-            <a:endParaRPr lang="en-US" dirty="0"/>
-          </a:p>
-          <a:p>
             <a:r>
               <a:rPr lang="en-US" dirty="0"/>
-              <a:t>'Then you inject IReportingService wherever you want to use it.'</a:t>
-            </a:r>
-          </a:p>
-          <a:p>
-            <a:endParaRPr lang="en-US" dirty="0"/>
-          </a:p>
-          <a:p>
-            <a:r>
-              <a:rPr lang="en-US" dirty="0"/>
-              <a:t>[RIGHT] Tap the three target cards:</a:t>
-            </a:r>
-          </a:p>
-          <a:p>
-            <a:r>
-              <a:rPr lang="en-US" dirty="0"/>
-              <a:t>- ASP.NET API — expose as an HTTP endpoint for integrations</a:t>
-            </a:r>
-          </a:p>
-          <a:p>
-            <a:r>
-              <a:rPr lang="en-US" dirty="0"/>
-              <a:t>- Blazor or MAUI — what we'll see next</a:t>
-            </a:r>
-          </a:p>
-          <a:p>
-            <a:r>
-              <a:rPr lang="en-US" dirty="0"/>
-              <a:t>- Worker or CLI — schedule it, pipe results to email or Slack</a:t>
-            </a:r>
-          </a:p>
-          <a:p>
-            <a:endParaRPr lang="en-US" dirty="0"/>
-          </a:p>
-          <a:p>
-            <a:r>
-              <a:rPr lang="en-US" dirty="0"/>
-              <a:t>[EMPHASIZE] 'One module, three lines of setup, any .NET app.'</a:t>
+              <a:t>:</a:t>
             </a:r>
           </a:p>
           <a:p>
@@ -1643,7 +1604,76 @@
           <a:p>
             <a:r>
               <a:rPr lang="en-US" dirty="0"/>
-              <a:t>[EMPHASIZE] 'Every company you've worked at had this need. You just didn't have the tools to solve it cheaply. Now you do.'</a:t>
+              <a:t>[EMPHASIZE] 'Every company you've worked at had this need. You just didn't have the tools to solve it cheaply. Now you do.’</a:t>
+            </a:r>
+          </a:p>
+          <a:p>
+            <a:endParaRPr lang="en-US" dirty="0"/>
+          </a:p>
+          <a:p>
+            <a:r>
+              <a:rPr lang="en-US" b="1" dirty="0"/>
+              <a:t>ACTIONS:</a:t>
+            </a:r>
+          </a:p>
+          <a:p>
+            <a:pPr marL="171450" indent="-171450">
+              <a:buFont typeface="Arial" panose="020B0604020202020204" pitchFamily="34" charset="0"/>
+              <a:buChar char="•"/>
+            </a:pPr>
+            <a:r>
+              <a:rPr lang="en-US" dirty="0"/>
+              <a:t>Create reservations </a:t>
+            </a:r>
+          </a:p>
+          <a:p>
+            <a:pPr marL="171450" indent="-171450">
+              <a:buFont typeface="Arial" panose="020B0604020202020204" pitchFamily="34" charset="0"/>
+              <a:buChar char="•"/>
+            </a:pPr>
+            <a:r>
+              <a:rPr lang="en-US" dirty="0"/>
+              <a:t>Remove spam users </a:t>
+            </a:r>
+          </a:p>
+          <a:p>
+            <a:pPr marL="171450" indent="-171450">
+              <a:buFont typeface="Arial" panose="020B0604020202020204" pitchFamily="34" charset="0"/>
+              <a:buChar char="•"/>
+            </a:pPr>
+            <a:r>
+              <a:rPr lang="en-US" dirty="0"/>
+              <a:t>Add/update products</a:t>
+            </a:r>
+          </a:p>
+          <a:p>
+            <a:pPr marL="171450" indent="-171450">
+              <a:buFont typeface="Arial" panose="020B0604020202020204" pitchFamily="34" charset="0"/>
+              <a:buChar char="•"/>
+            </a:pPr>
+            <a:r>
+              <a:rPr lang="en-US" dirty="0"/>
+              <a:t>merge duplicate records</a:t>
+            </a:r>
+          </a:p>
+          <a:p>
+            <a:pPr marL="171450" indent="-171450">
+              <a:buFont typeface="Arial" panose="020B0604020202020204" pitchFamily="34" charset="0"/>
+              <a:buChar char="•"/>
+            </a:pPr>
+            <a:r>
+              <a:rPr lang="en-US" dirty="0"/>
+              <a:t>Fix invalid phone numbers</a:t>
+            </a:r>
+          </a:p>
+          <a:p>
+            <a:pPr marL="171450" indent="-171450">
+              <a:buFont typeface="Arial" panose="020B0604020202020204" pitchFamily="34" charset="0"/>
+              <a:buChar char="•"/>
+            </a:pPr>
+            <a:r>
+              <a:rPr lang="en-US" dirty="0"/>
+              <a:t>Auto create campaigns based on my sales</a:t>
             </a:r>
           </a:p>
           <a:p>
@@ -2064,6 +2094,52 @@
           <a:bodyPr/>
           <a:lstStyle/>
           <a:p>
+            <a:pPr marL="0" marR="0" lvl="0" indent="0" algn="l" defTabSz="914400" rtl="0" eaLnBrk="1" fontAlgn="auto" latinLnBrk="0" hangingPunct="1">
+              <a:lnSpc>
+                <a:spcPct val="100000"/>
+              </a:lnSpc>
+              <a:spcBef>
+                <a:spcPts val="0"/>
+              </a:spcBef>
+              <a:spcAft>
+                <a:spcPts val="0"/>
+              </a:spcAft>
+              <a:buClrTx/>
+              <a:buSzTx/>
+              <a:buFontTx/>
+              <a:buNone/>
+              <a:tabLst/>
+              <a:defRPr/>
+            </a:pPr>
+            <a:r>
+              <a:rPr lang="en-US" sz="1200" i="1" dirty="0">
+                <a:solidFill>
+                  <a:srgbClr val="0891B2"/>
+                </a:solidFill>
+              </a:rPr>
+              <a:t>Now imagine your PM doing that… </a:t>
+            </a:r>
+            <a:r>
+              <a:rPr lang="en-US" sz="1200" b="1" i="1" dirty="0">
+                <a:solidFill>
+                  <a:srgbClr val="0891B2"/>
+                </a:solidFill>
+              </a:rPr>
+              <a:t>without you</a:t>
+            </a:r>
+            <a:r>
+              <a:rPr lang="en-US" sz="1200" i="1" dirty="0">
+                <a:solidFill>
+                  <a:srgbClr val="0891B2"/>
+                </a:solidFill>
+              </a:rPr>
+              <a:t>.</a:t>
+            </a:r>
+          </a:p>
+          <a:p>
+            <a:endParaRPr lang="en-US" dirty="0"/>
+          </a:p>
+          <a:p>
             <a:r>
               <a:rPr lang="en-US" dirty="0"/>
               <a:t>Walk them through each pain point briefly — don't read every word on the slide, just tap each one:</a:t>
@@ -2345,7 +2421,13 @@
   <p:cSld>
     <p:spTree>
       <p:nvGrpSpPr>
-        <p:cNvPr id="1" name=""/>
+        <p:cNvPr id="1" name="">
+          <a:extLst>
+            <a:ext uri="{FF2B5EF4-FFF2-40B4-BE49-F238E27FC236}">
+              <a16:creationId xmlns:a16="http://schemas.microsoft.com/office/drawing/2014/main" id="{91D0EC0F-DA0D-0A76-E806-8E6CBDDFF505}"/>
+            </a:ext>
+          </a:extLst>
+        </p:cNvPr>
         <p:cNvGrpSpPr/>
         <p:nvPr/>
       </p:nvGrpSpPr>
@@ -2359,7 +2441,13 @@
       </p:grpSpPr>
       <p:sp>
         <p:nvSpPr>
-          <p:cNvPr id="2" name="Slide Image Placeholder 1"/>
+          <p:cNvPr id="2" name="Slide Image Placeholder 1">
+            <a:extLst>
+              <a:ext uri="{FF2B5EF4-FFF2-40B4-BE49-F238E27FC236}">
+                <a16:creationId xmlns:a16="http://schemas.microsoft.com/office/drawing/2014/main" id="{B8861CA3-11A4-AE5B-BC7E-4E722A78CFF6}"/>
+              </a:ext>
+            </a:extLst>
+          </p:cNvPr>
           <p:cNvSpPr>
             <a:spLocks noGrp="1" noRot="1" noChangeAspect="1"/>
           </p:cNvSpPr>
@@ -2371,7 +2459,13 @@
       </p:sp>
       <p:sp>
         <p:nvSpPr>
-          <p:cNvPr id="3" name="Notes Placeholder 2"/>
+          <p:cNvPr id="3" name="Notes Placeholder 2">
+            <a:extLst>
+              <a:ext uri="{FF2B5EF4-FFF2-40B4-BE49-F238E27FC236}">
+                <a16:creationId xmlns:a16="http://schemas.microsoft.com/office/drawing/2014/main" id="{097DEF67-09CC-E136-C2C8-BC26E99D71A9}"/>
+              </a:ext>
+            </a:extLst>
+          </p:cNvPr>
           <p:cNvSpPr>
             <a:spLocks noGrp="1"/>
           </p:cNvSpPr>
@@ -2419,6 +2513,11 @@
         </p:txBody>
       </p:sp>
     </p:spTree>
+    <p:extLst>
+      <p:ext uri="{BB962C8B-B14F-4D97-AF65-F5344CB8AC3E}">
+        <p14:creationId xmlns:p14="http://schemas.microsoft.com/office/powerpoint/2010/main" val="1339754710"/>
+      </p:ext>
+    </p:extLst>
   </p:cSld>
   <p:clrMapOvr>
     <a:masterClrMapping/>
@@ -2944,7 +3043,7 @@
           <a:p>
             <a:fld id="{3EF59CCF-2F75-48E0-B827-F930E918C137}" type="datetimeFigureOut">
               <a:rPr lang="tr-TR" smtClean="0"/>
-              <a:t>22.04.2026</a:t>
+              <a:t>26.04.2026</a:t>
             </a:fld>
             <a:endParaRPr lang="tr-TR"/>
           </a:p>
@@ -3144,7 +3243,7 @@
           <a:p>
             <a:fld id="{3EF59CCF-2F75-48E0-B827-F930E918C137}" type="datetimeFigureOut">
               <a:rPr lang="tr-TR" smtClean="0"/>
-              <a:t>22.04.2026</a:t>
+              <a:t>26.04.2026</a:t>
             </a:fld>
             <a:endParaRPr lang="tr-TR"/>
           </a:p>
@@ -3354,7 +3453,7 @@
           <a:p>
             <a:fld id="{3EF59CCF-2F75-48E0-B827-F930E918C137}" type="datetimeFigureOut">
               <a:rPr lang="tr-TR" smtClean="0"/>
-              <a:t>22.04.2026</a:t>
+              <a:t>26.04.2026</a:t>
             </a:fld>
             <a:endParaRPr lang="tr-TR"/>
           </a:p>
@@ -3554,7 +3653,7 @@
           <a:p>
             <a:fld id="{3EF59CCF-2F75-48E0-B827-F930E918C137}" type="datetimeFigureOut">
               <a:rPr lang="tr-TR" smtClean="0"/>
-              <a:t>22.04.2026</a:t>
+              <a:t>26.04.2026</a:t>
             </a:fld>
             <a:endParaRPr lang="tr-TR"/>
           </a:p>
@@ -3830,7 +3929,7 @@
           <a:p>
             <a:fld id="{3EF59CCF-2F75-48E0-B827-F930E918C137}" type="datetimeFigureOut">
               <a:rPr lang="tr-TR" smtClean="0"/>
-              <a:t>22.04.2026</a:t>
+              <a:t>26.04.2026</a:t>
             </a:fld>
             <a:endParaRPr lang="tr-TR"/>
           </a:p>
@@ -4098,7 +4197,7 @@
           <a:p>
             <a:fld id="{3EF59CCF-2F75-48E0-B827-F930E918C137}" type="datetimeFigureOut">
               <a:rPr lang="tr-TR" smtClean="0"/>
-              <a:t>22.04.2026</a:t>
+              <a:t>26.04.2026</a:t>
             </a:fld>
             <a:endParaRPr lang="tr-TR"/>
           </a:p>
@@ -4513,7 +4612,7 @@
           <a:p>
             <a:fld id="{3EF59CCF-2F75-48E0-B827-F930E918C137}" type="datetimeFigureOut">
               <a:rPr lang="tr-TR" smtClean="0"/>
-              <a:t>22.04.2026</a:t>
+              <a:t>26.04.2026</a:t>
             </a:fld>
             <a:endParaRPr lang="tr-TR"/>
           </a:p>
@@ -4655,7 +4754,7 @@
           <a:p>
             <a:fld id="{3EF59CCF-2F75-48E0-B827-F930E918C137}" type="datetimeFigureOut">
               <a:rPr lang="tr-TR" smtClean="0"/>
-              <a:t>22.04.2026</a:t>
+              <a:t>26.04.2026</a:t>
             </a:fld>
             <a:endParaRPr lang="tr-TR"/>
           </a:p>
@@ -4768,7 +4867,7 @@
           <a:p>
             <a:fld id="{3EF59CCF-2F75-48E0-B827-F930E918C137}" type="datetimeFigureOut">
               <a:rPr lang="tr-TR" smtClean="0"/>
-              <a:t>22.04.2026</a:t>
+              <a:t>26.04.2026</a:t>
             </a:fld>
             <a:endParaRPr lang="tr-TR"/>
           </a:p>
@@ -5081,7 +5180,7 @@
           <a:p>
             <a:fld id="{3EF59CCF-2F75-48E0-B827-F930E918C137}" type="datetimeFigureOut">
               <a:rPr lang="tr-TR" smtClean="0"/>
-              <a:t>22.04.2026</a:t>
+              <a:t>26.04.2026</a:t>
             </a:fld>
             <a:endParaRPr lang="tr-TR"/>
           </a:p>
@@ -5370,7 +5469,7 @@
           <a:p>
             <a:fld id="{3EF59CCF-2F75-48E0-B827-F930E918C137}" type="datetimeFigureOut">
               <a:rPr lang="tr-TR" smtClean="0"/>
-              <a:t>22.04.2026</a:t>
+              <a:t>26.04.2026</a:t>
             </a:fld>
             <a:endParaRPr lang="tr-TR"/>
           </a:p>
@@ -5616,7 +5715,7 @@
           <a:p>
             <a:fld id="{3EF59CCF-2F75-48E0-B827-F930E918C137}" type="datetimeFigureOut">
               <a:rPr lang="tr-TR" smtClean="0"/>
-              <a:t>22.04.2026</a:t>
+              <a:t>26.04.2026</a:t>
             </a:fld>
             <a:endParaRPr lang="tr-TR"/>
           </a:p>
@@ -7349,6 +7448,18 @@
               </a:rPr>
               <a:t>Log every query</a:t>
             </a:r>
+            <a:br>
+              <a:rPr lang="en-US" sz="2400" dirty="0">
+                <a:solidFill>
+                  <a:srgbClr val="334155"/>
+                </a:solidFill>
+              </a:rPr>
+            </a:br>
+            <a:endParaRPr lang="en-US" sz="2400" dirty="0">
+              <a:solidFill>
+                <a:srgbClr val="334155"/>
+              </a:solidFill>
+            </a:endParaRPr>
           </a:p>
           <a:p>
             <a:pPr>
@@ -8226,7 +8337,7 @@
         <p:spPr>
           <a:xfrm>
             <a:off x="635000" y="3070431"/>
-            <a:ext cx="11557000" cy="0"/>
+            <a:ext cx="10800000" cy="0"/>
           </a:xfrm>
           <a:prstGeom prst="line">
             <a:avLst/>
@@ -8273,7 +8384,7 @@
         <p:spPr>
           <a:xfrm>
             <a:off x="635000" y="4325917"/>
-            <a:ext cx="11557000" cy="0"/>
+            <a:ext cx="10800000" cy="0"/>
           </a:xfrm>
           <a:prstGeom prst="line">
             <a:avLst/>
@@ -8361,15 +8472,15 @@
           </a:bodyPr>
           <a:lstStyle/>
           <a:p>
-            <a:pPr algn="l"/>
-            <a:r>
-              <a:rPr lang="en-US" sz="4800" b="1" dirty="0">
-                <a:solidFill>
-                  <a:srgbClr val="0F172A"/>
-                </a:solidFill>
-              </a:rPr>
-              <a:t>One Module. Any .NET App.</a:t>
-            </a:r>
+            <a:r>
+              <a:rPr lang="en-US" sz="4800" b="1" dirty="0"/>
+              <a:t>The Whole Setup</a:t>
+            </a:r>
+            <a:endParaRPr lang="en-US" sz="4800" b="1" dirty="0">
+              <a:solidFill>
+                <a:srgbClr val="0F172A"/>
+              </a:solidFill>
+            </a:endParaRPr>
           </a:p>
         </p:txBody>
       </p:sp>
@@ -8382,7 +8493,7 @@
         <p:spPr>
           <a:xfrm>
             <a:off x="635000" y="1651000"/>
-            <a:ext cx="6731000" cy="4064000"/>
+            <a:ext cx="10515600" cy="4064000"/>
           </a:xfrm>
           <a:prstGeom prst="roundRect">
             <a:avLst>
@@ -8400,24 +8511,13 @@
           <a:bodyPr wrap="square" lIns="240000" tIns="200000" rIns="240000" bIns="200000" anchor="t"/>
           <a:lstStyle/>
           <a:p>
-            <a:pPr algn="l"/>
-            <a:r>
-              <a:rPr lang="en-US" b="1" spc="300" dirty="0">
-                <a:solidFill>
-                  <a:srgbClr val="22D3EE"/>
-                </a:solidFill>
-              </a:rPr>
-              <a:t>PROGRAM.CS</a:t>
-            </a:r>
-          </a:p>
-          <a:p>
             <a:pPr>
               <a:spcBef>
                 <a:spcPts val="500"/>
               </a:spcBef>
             </a:pPr>
             <a:r>
-              <a:rPr lang="en-US" sz="2000" dirty="0">
+              <a:rPr lang="en-US" sz="3200" dirty="0" err="1">
                 <a:solidFill>
                   <a:srgbClr val="A78BFA"/>
                 </a:solidFill>
@@ -8426,7 +8526,7 @@
               <a:t>builder.Services.</a:t>
             </a:r>
             <a:r>
-              <a:rPr lang="en-US" sz="2000" dirty="0">
+              <a:rPr lang="en-US" sz="3200" dirty="0" err="1">
                 <a:solidFill>
                   <a:srgbClr val="22D3EE"/>
                 </a:solidFill>
@@ -8435,7 +8535,7 @@
               <a:t>AddAiReporting</a:t>
             </a:r>
             <a:r>
-              <a:rPr lang="en-US" sz="2000" dirty="0">
+              <a:rPr lang="en-US" sz="3200" dirty="0">
                 <a:solidFill>
                   <a:srgbClr val="E2E8F0"/>
                 </a:solidFill>
@@ -8451,7 +8551,7 @@
               </a:spcBef>
             </a:pPr>
             <a:r>
-              <a:rPr lang="en-US" sz="2000" dirty="0">
+              <a:rPr lang="en-US" sz="3200" dirty="0">
                 <a:solidFill>
                   <a:srgbClr val="E2E8F0"/>
                 </a:solidFill>
@@ -8467,7 +8567,7 @@
               </a:spcBef>
             </a:pPr>
             <a:r>
-              <a:rPr lang="en-US" sz="2000" dirty="0">
+              <a:rPr lang="en-US" sz="3200" dirty="0">
                 <a:solidFill>
                   <a:srgbClr val="E2E8F0"/>
                 </a:solidFill>
@@ -8476,7 +8576,7 @@
               <a:t>    opt.ConnectionString = cfg[</a:t>
             </a:r>
             <a:r>
-              <a:rPr lang="en-US" sz="2000" dirty="0">
+              <a:rPr lang="en-US" sz="3200" dirty="0">
                 <a:solidFill>
                   <a:srgbClr val="10B981"/>
                 </a:solidFill>
@@ -8485,7 +8585,7 @@
               <a:t>"Db"</a:t>
             </a:r>
             <a:r>
-              <a:rPr lang="en-US" sz="2000" dirty="0">
+              <a:rPr lang="en-US" sz="3200" dirty="0">
                 <a:solidFill>
                   <a:srgbClr val="E2E8F0"/>
                 </a:solidFill>
@@ -8501,16 +8601,34 @@
               </a:spcBef>
             </a:pPr>
             <a:r>
-              <a:rPr lang="en-US" sz="2000" dirty="0">
+              <a:rPr lang="en-US" sz="3200" dirty="0">
                 <a:solidFill>
                   <a:srgbClr val="E2E8F0"/>
                 </a:solidFill>
                 <a:latin typeface="Consolas"/>
               </a:rPr>
-              <a:t>    opt.LlmProvider   = </a:t>
-            </a:r>
-            <a:r>
-              <a:rPr lang="en-US" sz="2000" dirty="0">
+              <a:t>    </a:t>
+            </a:r>
+            <a:r>
+              <a:rPr lang="en-US" sz="3200" dirty="0" err="1">
+                <a:solidFill>
+                  <a:srgbClr val="E2E8F0"/>
+                </a:solidFill>
+                <a:latin typeface="Consolas"/>
+              </a:rPr>
+              <a:t>opt.LlmProvider</a:t>
+            </a:r>
+            <a:r>
+              <a:rPr lang="en-US" sz="3200" dirty="0">
+                <a:solidFill>
+                  <a:srgbClr val="E2E8F0"/>
+                </a:solidFill>
+                <a:latin typeface="Consolas"/>
+              </a:rPr>
+              <a:t>   = {</a:t>
+            </a:r>
+            <a:r>
+              <a:rPr lang="en-US" sz="3200" dirty="0">
                 <a:solidFill>
                   <a:srgbClr val="10B981"/>
                 </a:solidFill>
@@ -8519,13 +8637,31 @@
               <a:t>"OpenAI"</a:t>
             </a:r>
             <a:r>
-              <a:rPr lang="en-US" sz="2000" dirty="0">
+              <a:rPr lang="en-US" sz="3200" dirty="0">
                 <a:solidFill>
                   <a:srgbClr val="E2E8F0"/>
                 </a:solidFill>
                 <a:latin typeface="Consolas"/>
               </a:rPr>
-              <a:t>;</a:t>
+              <a:t>, </a:t>
+            </a:r>
+            <a:r>
+              <a:rPr lang="en-US" sz="3200" dirty="0" err="1">
+                <a:solidFill>
+                  <a:srgbClr val="E2E8F0"/>
+                </a:solidFill>
+                <a:latin typeface="Consolas"/>
+              </a:rPr>
+              <a:t>ApiKey</a:t>
+            </a:r>
+            <a:r>
+              <a:rPr lang="en-US" sz="3200" dirty="0">
+                <a:solidFill>
+                  <a:srgbClr val="E2E8F0"/>
+                </a:solidFill>
+                <a:latin typeface="Consolas"/>
+              </a:rPr>
+              <a:t>}</a:t>
             </a:r>
           </a:p>
           <a:p>
@@ -8535,7 +8671,7 @@
               </a:spcBef>
             </a:pPr>
             <a:r>
-              <a:rPr lang="en-US" sz="2000" dirty="0">
+              <a:rPr lang="en-US" sz="3200" dirty="0">
                 <a:solidFill>
                   <a:srgbClr val="E2E8F0"/>
                 </a:solidFill>
@@ -8544,7 +8680,7 @@
               <a:t>    opt.ReadOnly      = </a:t>
             </a:r>
             <a:r>
-              <a:rPr lang="en-US" sz="2000" dirty="0">
+              <a:rPr lang="en-US" sz="3200" dirty="0">
                 <a:solidFill>
                   <a:srgbClr val="A78BFA"/>
                 </a:solidFill>
@@ -8553,7 +8689,7 @@
               <a:t>true</a:t>
             </a:r>
             <a:r>
-              <a:rPr lang="en-US" sz="2000" dirty="0">
+              <a:rPr lang="en-US" sz="3200" dirty="0">
                 <a:solidFill>
                   <a:srgbClr val="E2E8F0"/>
                 </a:solidFill>
@@ -8569,7 +8705,7 @@
               </a:spcBef>
             </a:pPr>
             <a:r>
-              <a:rPr lang="en-US" sz="2000" dirty="0">
+              <a:rPr lang="en-US" sz="3200" dirty="0">
                 <a:solidFill>
                   <a:srgbClr val="E2E8F0"/>
                 </a:solidFill>
@@ -8577,214 +8713,12 @@
               </a:rPr>
               <a:t>});</a:t>
             </a:r>
-          </a:p>
-          <a:p>
-            <a:pPr>
-              <a:spcBef>
-                <a:spcPts val="600"/>
-              </a:spcBef>
-            </a:pPr>
-            <a:r>
-              <a:rPr lang="en-US" dirty="0">
-                <a:solidFill>
-                  <a:srgbClr val="64748B"/>
-                </a:solidFill>
-                <a:latin typeface="Consolas"/>
-              </a:rPr>
-              <a:t>// inject IReportingService anywhere</a:t>
-            </a:r>
-          </a:p>
-        </p:txBody>
-      </p:sp>
-      <p:sp>
-        <p:nvSpPr>
-          <p:cNvPr id="910" name="T"/>
-          <p:cNvSpPr/>
-          <p:nvPr/>
-        </p:nvSpPr>
-        <p:spPr>
-          <a:xfrm>
-            <a:off x="7620000" y="1651000"/>
-            <a:ext cx="4064000" cy="1206500"/>
-          </a:xfrm>
-          <a:prstGeom prst="roundRect">
-            <a:avLst>
-              <a:gd name="adj" fmla="val 6000"/>
-            </a:avLst>
-          </a:prstGeom>
-          <a:solidFill>
-            <a:srgbClr val="FFFFFF"/>
-          </a:solidFill>
-          <a:ln w="12700">
-            <a:solidFill>
-              <a:srgbClr val="E2E8F0"/>
-            </a:solidFill>
-          </a:ln>
-        </p:spPr>
-        <p:txBody>
-          <a:bodyPr wrap="square" lIns="180000" tIns="140000" rIns="180000" bIns="140000" anchor="t"/>
-          <a:lstStyle/>
-          <a:p>
-            <a:pPr algn="l"/>
-            <a:r>
-              <a:rPr lang="en-US" sz="3200" b="1" dirty="0">
-                <a:solidFill>
-                  <a:srgbClr val="22D3EE"/>
-                </a:solidFill>
-              </a:rPr>
-              <a:t>▣  </a:t>
-            </a:r>
-            <a:r>
-              <a:rPr lang="en-US" sz="2800" b="1" dirty="0">
-                <a:solidFill>
-                  <a:srgbClr val="0F172A"/>
-                </a:solidFill>
-              </a:rPr>
-              <a:t>ASP.NET API</a:t>
-            </a:r>
-          </a:p>
-          <a:p>
-            <a:pPr algn="l">
-              <a:spcBef>
-                <a:spcPts val="300"/>
-              </a:spcBef>
-            </a:pPr>
-            <a:r>
-              <a:rPr lang="en-US" sz="2000" dirty="0">
-                <a:solidFill>
-                  <a:srgbClr val="64748B"/>
-                </a:solidFill>
-              </a:rPr>
-              <a:t>Expose as HTTP endpoint</a:t>
-            </a:r>
-          </a:p>
-        </p:txBody>
-      </p:sp>
-      <p:sp>
-        <p:nvSpPr>
-          <p:cNvPr id="911" name="T"/>
-          <p:cNvSpPr/>
-          <p:nvPr/>
-        </p:nvSpPr>
-        <p:spPr>
-          <a:xfrm>
-            <a:off x="7620000" y="2984500"/>
-            <a:ext cx="4064000" cy="1206500"/>
-          </a:xfrm>
-          <a:prstGeom prst="roundRect">
-            <a:avLst>
-              <a:gd name="adj" fmla="val 6000"/>
-            </a:avLst>
-          </a:prstGeom>
-          <a:solidFill>
-            <a:srgbClr val="FFFFFF"/>
-          </a:solidFill>
-          <a:ln w="12700">
-            <a:solidFill>
-              <a:srgbClr val="E2E8F0"/>
-            </a:solidFill>
-          </a:ln>
-        </p:spPr>
-        <p:txBody>
-          <a:bodyPr wrap="square" lIns="180000" tIns="140000" rIns="180000" bIns="140000" anchor="t"/>
-          <a:lstStyle/>
-          <a:p>
-            <a:pPr algn="l"/>
-            <a:r>
-              <a:rPr lang="en-US" sz="3200" b="1" dirty="0">
-                <a:solidFill>
-                  <a:srgbClr val="22D3EE"/>
-                </a:solidFill>
-              </a:rPr>
-              <a:t>◉  </a:t>
-            </a:r>
-            <a:r>
-              <a:rPr lang="en-US" sz="2800" b="1" dirty="0">
-                <a:solidFill>
-                  <a:srgbClr val="0F172A"/>
-                </a:solidFill>
-              </a:rPr>
-              <a:t>Blazor / MAUI</a:t>
-            </a:r>
-          </a:p>
-          <a:p>
-            <a:pPr algn="l">
-              <a:spcBef>
-                <a:spcPts val="300"/>
-              </a:spcBef>
-            </a:pPr>
-            <a:r>
-              <a:rPr lang="en-US" sz="2000" dirty="0">
-                <a:solidFill>
-                  <a:srgbClr val="64748B"/>
-                </a:solidFill>
-              </a:rPr>
-              <a:t>Ship with real UX</a:t>
-            </a:r>
-          </a:p>
-        </p:txBody>
-      </p:sp>
-      <p:sp>
-        <p:nvSpPr>
-          <p:cNvPr id="912" name="T"/>
-          <p:cNvSpPr/>
-          <p:nvPr/>
-        </p:nvSpPr>
-        <p:spPr>
-          <a:xfrm>
-            <a:off x="7620000" y="4318000"/>
-            <a:ext cx="4064000" cy="1206500"/>
-          </a:xfrm>
-          <a:prstGeom prst="roundRect">
-            <a:avLst>
-              <a:gd name="adj" fmla="val 6000"/>
-            </a:avLst>
-          </a:prstGeom>
-          <a:solidFill>
-            <a:srgbClr val="FFFFFF"/>
-          </a:solidFill>
-          <a:ln w="12700">
-            <a:solidFill>
-              <a:srgbClr val="E2E8F0"/>
-            </a:solidFill>
-          </a:ln>
-        </p:spPr>
-        <p:txBody>
-          <a:bodyPr wrap="square" lIns="180000" tIns="140000" rIns="180000" bIns="140000" anchor="t"/>
-          <a:lstStyle/>
-          <a:p>
-            <a:pPr algn="l"/>
-            <a:r>
-              <a:rPr lang="en-US" sz="3200" b="1" dirty="0">
-                <a:solidFill>
-                  <a:srgbClr val="22D3EE"/>
-                </a:solidFill>
-              </a:rPr>
-              <a:t>⚡  </a:t>
-            </a:r>
-            <a:r>
-              <a:rPr lang="en-US" sz="2800" b="1" dirty="0">
-                <a:solidFill>
-                  <a:srgbClr val="0F172A"/>
-                </a:solidFill>
-              </a:rPr>
-              <a:t>Worker / CLI</a:t>
-            </a:r>
-          </a:p>
-          <a:p>
-            <a:pPr algn="l">
-              <a:spcBef>
-                <a:spcPts val="300"/>
-              </a:spcBef>
-            </a:pPr>
-            <a:r>
-              <a:rPr lang="en-US" sz="2000" dirty="0">
-                <a:solidFill>
-                  <a:srgbClr val="64748B"/>
-                </a:solidFill>
-              </a:rPr>
-              <a:t>Run on a schedule</a:t>
-            </a:r>
+            <a:endParaRPr lang="en-US" sz="2800" dirty="0">
+              <a:solidFill>
+                <a:srgbClr val="64748B"/>
+              </a:solidFill>
+              <a:latin typeface="Consolas"/>
+            </a:endParaRPr>
           </a:p>
         </p:txBody>
       </p:sp>
@@ -8855,14 +8789,14 @@
       </p:sp>
       <p:sp>
         <p:nvSpPr>
-          <p:cNvPr id="1001" name="Lbl"/>
+          <p:cNvPr id="1002" name="Q"/>
           <p:cNvSpPr txBox="1"/>
           <p:nvPr/>
         </p:nvSpPr>
         <p:spPr>
           <a:xfrm>
-            <a:off x="1016000" y="1778000"/>
-            <a:ext cx="10160000" cy="381000"/>
+            <a:off x="1016000" y="2603500"/>
+            <a:ext cx="10160000" cy="2032000"/>
           </a:xfrm>
           <a:prstGeom prst="rect">
             <a:avLst/>
@@ -8873,28 +8807,63 @@
           <a:bodyPr wrap="square" anchor="t"/>
           <a:lstStyle/>
           <a:p>
-            <a:pPr algn="l"/>
-            <a:r>
-              <a:rPr lang="en-US" b="1" spc="400" dirty="0">
+            <a:pPr algn="l">
+              <a:lnSpc>
+                <a:spcPct val="105000"/>
+              </a:lnSpc>
+            </a:pPr>
+            <a:r>
+              <a:rPr lang="en-US" sz="7200" b="1" dirty="0">
+                <a:solidFill>
+                  <a:srgbClr val="FFFFFF"/>
+                </a:solidFill>
+              </a:rPr>
+              <a:t>Let's turn this </a:t>
+            </a:r>
+            <a:br>
+              <a:rPr lang="en-US" sz="7200" b="1" dirty="0">
+                <a:solidFill>
+                  <a:srgbClr val="FFFFFF"/>
+                </a:solidFill>
+              </a:rPr>
+            </a:br>
+            <a:r>
+              <a:rPr lang="en-US" sz="7200" b="1" dirty="0">
+                <a:solidFill>
+                  <a:srgbClr val="FFFFFF"/>
+                </a:solidFill>
+              </a:rPr>
+              <a:t>into a </a:t>
+            </a:r>
+            <a:r>
+              <a:rPr lang="en-US" sz="7200" b="1" i="1" dirty="0">
                 <a:solidFill>
                   <a:srgbClr val="22D3EE"/>
                 </a:solidFill>
               </a:rPr>
-              <a:t>DEMO 2  ·  THE PRODUCT</a:t>
-            </a:r>
-          </a:p>
-        </p:txBody>
-      </p:sp>
-      <p:sp>
-        <p:nvSpPr>
-          <p:cNvPr id="1002" name="Q"/>
+              <a:t>real  </a:t>
+            </a:r>
+            <a:r>
+              <a:rPr lang="en-US" sz="7200" b="1" dirty="0">
+                <a:solidFill>
+                  <a:srgbClr val="22D3EE"/>
+                </a:solidFill>
+              </a:rPr>
+              <a:t>product</a:t>
+            </a:r>
+          </a:p>
+        </p:txBody>
+      </p:sp>
+      <p:sp>
+        <p:nvSpPr>
+          <p:cNvPr id="1003" name="Sub"/>
           <p:cNvSpPr txBox="1"/>
           <p:nvPr/>
         </p:nvSpPr>
         <p:spPr>
           <a:xfrm>
-            <a:off x="1016000" y="2603500"/>
-            <a:ext cx="10160000" cy="2032000"/>
+            <a:off x="1016000" y="5080000"/>
+            <a:ext cx="10160000" cy="508000"/>
           </a:xfrm>
           <a:prstGeom prst="rect">
             <a:avLst/>
@@ -8905,67 +8874,313 @@
           <a:bodyPr wrap="square" anchor="t"/>
           <a:lstStyle/>
           <a:p>
-            <a:pPr algn="l">
-              <a:lnSpc>
-                <a:spcPct val="105000"/>
-              </a:lnSpc>
-            </a:pPr>
-            <a:r>
-              <a:rPr lang="en-US" sz="7200" b="1" dirty="0">
-                <a:solidFill>
-                  <a:srgbClr val="FFFFFF"/>
-                </a:solidFill>
-              </a:rPr>
-              <a:t>Now let's turn this into a </a:t>
-            </a:r>
-            <a:r>
-              <a:rPr lang="en-US" sz="7200" b="1" i="1" dirty="0">
-                <a:solidFill>
-                  <a:srgbClr val="22D3EE"/>
-                </a:solidFill>
-              </a:rPr>
-              <a:t>real  </a:t>
-            </a:r>
-            <a:r>
-              <a:rPr lang="en-US" sz="7200" b="1" dirty="0">
-                <a:solidFill>
-                  <a:srgbClr val="22D3EE"/>
-                </a:solidFill>
-              </a:rPr>
-              <a:t>product</a:t>
-            </a:r>
-          </a:p>
-        </p:txBody>
-      </p:sp>
-      <p:sp>
-        <p:nvSpPr>
-          <p:cNvPr id="1003" name="Sub"/>
-          <p:cNvSpPr txBox="1"/>
+            <a:pPr algn="l"/>
+            <a:r>
+              <a:rPr lang="en-US" sz="1800" dirty="0">
+                <a:solidFill>
+                  <a:srgbClr val="94A3B8"/>
+                </a:solidFill>
+              </a:rPr>
+              <a:t>Same backend</a:t>
+            </a:r>
+            <a:r>
+              <a:rPr lang="en-US" dirty="0">
+                <a:solidFill>
+                  <a:srgbClr val="94A3B8"/>
+                </a:solidFill>
+              </a:rPr>
+              <a:t> with </a:t>
+            </a:r>
+            <a:r>
+              <a:rPr lang="en-US" b="1" dirty="0">
+                <a:solidFill>
+                  <a:srgbClr val="94A3B8"/>
+                </a:solidFill>
+              </a:rPr>
+              <a:t>V</a:t>
+            </a:r>
+            <a:r>
+              <a:rPr lang="en-US" sz="1800" b="1" dirty="0">
+                <a:solidFill>
+                  <a:srgbClr val="94A3B8"/>
+                </a:solidFill>
+              </a:rPr>
+              <a:t>oice</a:t>
+            </a:r>
+            <a:r>
+              <a:rPr lang="en-US" sz="1800" dirty="0">
+                <a:solidFill>
+                  <a:srgbClr val="94A3B8"/>
+                </a:solidFill>
+              </a:rPr>
+              <a:t> + </a:t>
+            </a:r>
+            <a:r>
+              <a:rPr lang="en-US" sz="1800" b="1" dirty="0">
+                <a:solidFill>
+                  <a:srgbClr val="94A3B8"/>
+                </a:solidFill>
+              </a:rPr>
+              <a:t>Charts</a:t>
+            </a:r>
+            <a:r>
+              <a:rPr lang="en-US" sz="1800" dirty="0">
+                <a:solidFill>
+                  <a:srgbClr val="94A3B8"/>
+                </a:solidFill>
+              </a:rPr>
+              <a:t> + </a:t>
+            </a:r>
+            <a:r>
+              <a:rPr lang="en-US" sz="1800" b="1" dirty="0">
+                <a:solidFill>
+                  <a:srgbClr val="94A3B8"/>
+                </a:solidFill>
+              </a:rPr>
+              <a:t>Excel</a:t>
+            </a:r>
+          </a:p>
+        </p:txBody>
+      </p:sp>
+      <p:sp>
+        <p:nvSpPr>
+          <p:cNvPr id="3" name="Text Placeholder 2">
+            <a:extLst>
+              <a:ext uri="{FF2B5EF4-FFF2-40B4-BE49-F238E27FC236}">
+                <a16:creationId xmlns:a16="http://schemas.microsoft.com/office/drawing/2014/main" id="{77D537CD-F344-9285-D1DE-69928DF5BEA5}"/>
+              </a:ext>
+            </a:extLst>
+          </p:cNvPr>
+          <p:cNvSpPr txBox="1">
+            <a:spLocks/>
+          </p:cNvSpPr>
           <p:nvPr/>
         </p:nvSpPr>
         <p:spPr>
           <a:xfrm>
-            <a:off x="1016000" y="5080000"/>
-            <a:ext cx="10160000" cy="508000"/>
+            <a:off x="1016000" y="1875027"/>
+            <a:ext cx="2930596" cy="558799"/>
           </a:xfrm>
           <a:prstGeom prst="rect">
             <a:avLst/>
           </a:prstGeom>
-          <a:noFill/>
         </p:spPr>
         <p:txBody>
-          <a:bodyPr wrap="square" anchor="t"/>
-          <a:lstStyle/>
-          <a:p>
-            <a:pPr algn="l"/>
-            <a:r>
-              <a:rPr lang="en-US" sz="1800" i="1" dirty="0">
-                <a:solidFill>
-                  <a:srgbClr val="94A3B8"/>
-                </a:solidFill>
-              </a:rPr>
-              <a:t>Same backend. Voice input. Charts. Excel export.</a:t>
-            </a:r>
+          <a:bodyPr>
+            <a:normAutofit/>
+          </a:bodyPr>
+          <a:lstStyle>
+            <a:lvl1pPr marL="228600" indent="-228600" algn="l" defTabSz="914400" rtl="0" eaLnBrk="1" latinLnBrk="0" hangingPunct="1">
+              <a:lnSpc>
+                <a:spcPct val="90000"/>
+              </a:lnSpc>
+              <a:spcBef>
+                <a:spcPts val="1000"/>
+              </a:spcBef>
+              <a:buFont typeface="Arial" panose="020B0604020202020204" pitchFamily="34" charset="0"/>
+              <a:buChar char="•"/>
+              <a:defRPr sz="2800" kern="1200">
+                <a:solidFill>
+                  <a:srgbClr val="334155"/>
+                </a:solidFill>
+                <a:latin typeface="+mn-lt"/>
+                <a:ea typeface="+mn-ea"/>
+                <a:cs typeface="+mn-cs"/>
+              </a:defRPr>
+            </a:lvl1pPr>
+            <a:lvl2pPr marL="685800" indent="-228600" algn="l" defTabSz="914400" rtl="0" eaLnBrk="1" latinLnBrk="0" hangingPunct="1">
+              <a:lnSpc>
+                <a:spcPct val="90000"/>
+              </a:lnSpc>
+              <a:spcBef>
+                <a:spcPts val="500"/>
+              </a:spcBef>
+              <a:buFont typeface="Arial" panose="020B0604020202020204" pitchFamily="34" charset="0"/>
+              <a:buChar char="•"/>
+              <a:defRPr sz="2400" kern="1200">
+                <a:solidFill>
+                  <a:schemeClr val="tx1"/>
+                </a:solidFill>
+                <a:latin typeface="+mn-lt"/>
+                <a:ea typeface="+mn-ea"/>
+                <a:cs typeface="+mn-cs"/>
+              </a:defRPr>
+            </a:lvl2pPr>
+            <a:lvl3pPr marL="1143000" indent="-228600" algn="l" defTabSz="914400" rtl="0" eaLnBrk="1" latinLnBrk="0" hangingPunct="1">
+              <a:lnSpc>
+                <a:spcPct val="90000"/>
+              </a:lnSpc>
+              <a:spcBef>
+                <a:spcPts val="500"/>
+              </a:spcBef>
+              <a:buFont typeface="Arial" panose="020B0604020202020204" pitchFamily="34" charset="0"/>
+              <a:buChar char="•"/>
+              <a:defRPr sz="2000" kern="1200">
+                <a:solidFill>
+                  <a:schemeClr val="tx1"/>
+                </a:solidFill>
+                <a:latin typeface="+mn-lt"/>
+                <a:ea typeface="+mn-ea"/>
+                <a:cs typeface="+mn-cs"/>
+              </a:defRPr>
+            </a:lvl3pPr>
+            <a:lvl4pPr marL="1600200" indent="-228600" algn="l" defTabSz="914400" rtl="0" eaLnBrk="1" latinLnBrk="0" hangingPunct="1">
+              <a:lnSpc>
+                <a:spcPct val="90000"/>
+              </a:lnSpc>
+              <a:spcBef>
+                <a:spcPts val="500"/>
+              </a:spcBef>
+              <a:buFont typeface="Arial" panose="020B0604020202020204" pitchFamily="34" charset="0"/>
+              <a:buChar char="•"/>
+              <a:defRPr sz="1800" kern="1200">
+                <a:solidFill>
+                  <a:schemeClr val="tx1"/>
+                </a:solidFill>
+                <a:latin typeface="+mn-lt"/>
+                <a:ea typeface="+mn-ea"/>
+                <a:cs typeface="+mn-cs"/>
+              </a:defRPr>
+            </a:lvl4pPr>
+            <a:lvl5pPr marL="2057400" indent="-228600" algn="l" defTabSz="914400" rtl="0" eaLnBrk="1" latinLnBrk="0" hangingPunct="1">
+              <a:lnSpc>
+                <a:spcPct val="90000"/>
+              </a:lnSpc>
+              <a:spcBef>
+                <a:spcPts val="500"/>
+              </a:spcBef>
+              <a:buFont typeface="Arial" panose="020B0604020202020204" pitchFamily="34" charset="0"/>
+              <a:buChar char="•"/>
+              <a:defRPr sz="1800" kern="1200">
+                <a:solidFill>
+                  <a:schemeClr val="tx1"/>
+                </a:solidFill>
+                <a:latin typeface="+mn-lt"/>
+                <a:ea typeface="+mn-ea"/>
+                <a:cs typeface="+mn-cs"/>
+              </a:defRPr>
+            </a:lvl5pPr>
+            <a:lvl6pPr marL="2514600" indent="-228600" algn="l" defTabSz="914400" rtl="0" eaLnBrk="1" latinLnBrk="0" hangingPunct="1">
+              <a:lnSpc>
+                <a:spcPct val="90000"/>
+              </a:lnSpc>
+              <a:spcBef>
+                <a:spcPts val="500"/>
+              </a:spcBef>
+              <a:buFont typeface="Arial" panose="020B0604020202020204" pitchFamily="34" charset="0"/>
+              <a:buChar char="•"/>
+              <a:defRPr sz="1800" kern="1200">
+                <a:solidFill>
+                  <a:schemeClr val="tx1"/>
+                </a:solidFill>
+                <a:latin typeface="+mn-lt"/>
+                <a:ea typeface="+mn-ea"/>
+                <a:cs typeface="+mn-cs"/>
+              </a:defRPr>
+            </a:lvl6pPr>
+            <a:lvl7pPr marL="2971800" indent="-228600" algn="l" defTabSz="914400" rtl="0" eaLnBrk="1" latinLnBrk="0" hangingPunct="1">
+              <a:lnSpc>
+                <a:spcPct val="90000"/>
+              </a:lnSpc>
+              <a:spcBef>
+                <a:spcPts val="500"/>
+              </a:spcBef>
+              <a:buFont typeface="Arial" panose="020B0604020202020204" pitchFamily="34" charset="0"/>
+              <a:buChar char="•"/>
+              <a:defRPr sz="1800" kern="1200">
+                <a:solidFill>
+                  <a:schemeClr val="tx1"/>
+                </a:solidFill>
+                <a:latin typeface="+mn-lt"/>
+                <a:ea typeface="+mn-ea"/>
+                <a:cs typeface="+mn-cs"/>
+              </a:defRPr>
+            </a:lvl7pPr>
+            <a:lvl8pPr marL="3429000" indent="-228600" algn="l" defTabSz="914400" rtl="0" eaLnBrk="1" latinLnBrk="0" hangingPunct="1">
+              <a:lnSpc>
+                <a:spcPct val="90000"/>
+              </a:lnSpc>
+              <a:spcBef>
+                <a:spcPts val="500"/>
+              </a:spcBef>
+              <a:buFont typeface="Arial" panose="020B0604020202020204" pitchFamily="34" charset="0"/>
+              <a:buChar char="•"/>
+              <a:defRPr sz="1800" kern="1200">
+                <a:solidFill>
+                  <a:schemeClr val="tx1"/>
+                </a:solidFill>
+                <a:latin typeface="+mn-lt"/>
+                <a:ea typeface="+mn-ea"/>
+                <a:cs typeface="+mn-cs"/>
+              </a:defRPr>
+            </a:lvl8pPr>
+            <a:lvl9pPr marL="3886200" indent="-228600" algn="l" defTabSz="914400" rtl="0" eaLnBrk="1" latinLnBrk="0" hangingPunct="1">
+              <a:lnSpc>
+                <a:spcPct val="90000"/>
+              </a:lnSpc>
+              <a:spcBef>
+                <a:spcPts val="500"/>
+              </a:spcBef>
+              <a:buFont typeface="Arial" panose="020B0604020202020204" pitchFamily="34" charset="0"/>
+              <a:buChar char="•"/>
+              <a:defRPr sz="1800" kern="1200">
+                <a:solidFill>
+                  <a:schemeClr val="tx1"/>
+                </a:solidFill>
+                <a:latin typeface="+mn-lt"/>
+                <a:ea typeface="+mn-ea"/>
+                <a:cs typeface="+mn-cs"/>
+              </a:defRPr>
+            </a:lvl9pPr>
+          </a:lstStyle>
+          <a:p>
+            <a:pPr>
+              <a:buFont typeface="Arial" panose="020B0604020202020204" pitchFamily="34" charset="0"/>
+              <a:buNone/>
+            </a:pPr>
+            <a:r>
+              <a:rPr lang="en-US" sz="3200" b="1" spc="400" dirty="0">
+                <a:solidFill>
+                  <a:srgbClr val="22D3EE"/>
+                </a:solidFill>
+              </a:rPr>
+              <a:t>PART 2</a:t>
+            </a:r>
+          </a:p>
+        </p:txBody>
+      </p:sp>
+      <p:sp>
+        <p:nvSpPr>
+          <p:cNvPr id="4" name="AccentBar">
+            <a:extLst>
+              <a:ext uri="{FF2B5EF4-FFF2-40B4-BE49-F238E27FC236}">
+                <a16:creationId xmlns:a16="http://schemas.microsoft.com/office/drawing/2014/main" id="{8160ADC7-A2E8-EA22-303B-688EC857D850}"/>
+              </a:ext>
+            </a:extLst>
+          </p:cNvPr>
+          <p:cNvSpPr/>
+          <p:nvPr/>
+        </p:nvSpPr>
+        <p:spPr>
+          <a:xfrm>
+            <a:off x="1114631" y="1784351"/>
+            <a:ext cx="1224000" cy="76200"/>
+          </a:xfrm>
+          <a:prstGeom prst="rect">
+            <a:avLst/>
+          </a:prstGeom>
+          <a:solidFill>
+            <a:srgbClr val="22D3EE"/>
+          </a:solidFill>
+          <a:ln>
+            <a:noFill/>
+          </a:ln>
+        </p:spPr>
+        <p:txBody>
+          <a:bodyPr/>
+          <a:lstStyle/>
+          <a:p>
+            <a:endParaRPr lang="en-US" dirty="0"/>
           </a:p>
         </p:txBody>
       </p:sp>
@@ -9018,16 +9233,15 @@
         <p:spPr>
           <a:xfrm>
             <a:off x="647700" y="353218"/>
-            <a:ext cx="10515600" cy="1325563"/>
+            <a:ext cx="10909300" cy="1325563"/>
           </a:xfrm>
         </p:spPr>
         <p:txBody>
           <a:bodyPr>
-            <a:normAutofit/>
+            <a:normAutofit fontScale="90000"/>
           </a:bodyPr>
           <a:lstStyle/>
           <a:p>
-            <a:pPr algn="l"/>
             <a:r>
               <a:rPr lang="en-US" sz="4800" b="1" dirty="0">
                 <a:solidFill>
@@ -9042,16 +9256,17 @@
                   <a:srgbClr val="0F172A"/>
                 </a:solidFill>
               </a:rPr>
-              <a:t>Little Bit</a:t>
-            </a:r>
-            <a:r>
-              <a:rPr lang="en-US" sz="4800" b="1" dirty="0">
-                <a:solidFill>
-                  <a:srgbClr val="0F172A"/>
-                </a:solidFill>
-              </a:rPr>
-              <a:t> Better UX</a:t>
-            </a:r>
+              <a:t>Closer to a </a:t>
+            </a:r>
+            <a:r>
+              <a:rPr lang="en-US" sz="4800" b="1" dirty="0"/>
+              <a:t>Real Product</a:t>
+            </a:r>
+            <a:endParaRPr lang="en-US" sz="4800" b="1" dirty="0">
+              <a:solidFill>
+                <a:srgbClr val="0F172A"/>
+              </a:solidFill>
+            </a:endParaRPr>
           </a:p>
         </p:txBody>
       </p:sp>
@@ -9319,7 +9534,7 @@
                   <a:srgbClr val="0F172A"/>
                 </a:solidFill>
               </a:rPr>
-              <a:t>Excel export</a:t>
+              <a:t>Excel</a:t>
             </a:r>
           </a:p>
           <a:p>
@@ -9388,7 +9603,22 @@
                   <a:srgbClr val="FFFFFF"/>
                 </a:solidFill>
               </a:rPr>
-              <a:t>Blazor reuses the exact same module. The frontend is where </a:t>
+              <a:t>Blazor reuses the exact same module. </a:t>
+            </a:r>
+            <a:br>
+              <a:rPr lang="en-US" sz="2400" dirty="0">
+                <a:solidFill>
+                  <a:srgbClr val="FFFFFF"/>
+                </a:solidFill>
+              </a:rPr>
+            </a:br>
+            <a:r>
+              <a:rPr lang="en-US" sz="2400" dirty="0">
+                <a:solidFill>
+                  <a:srgbClr val="FFFFFF"/>
+                </a:solidFill>
+              </a:rPr>
+              <a:t>The frontend is where </a:t>
             </a:r>
             <a:r>
               <a:rPr lang="en-US" sz="2400" i="1" dirty="0">
@@ -9487,8 +9717,8 @@
         </p:nvSpPr>
         <p:spPr>
           <a:xfrm>
-            <a:off x="635000" y="2159000"/>
-            <a:ext cx="2872014" cy="3302000"/>
+            <a:off x="635000" y="2158999"/>
+            <a:ext cx="2872014" cy="3517405"/>
           </a:xfrm>
           <a:prstGeom prst="roundRect">
             <a:avLst>
@@ -9508,11 +9738,10 @@
           <a:bodyPr wrap="square" lIns="180000" tIns="200000" rIns="180000" bIns="200000" anchor="t"/>
           <a:lstStyle/>
           <a:p>
-            <a:pPr algn="l"/>
             <a:r>
               <a:rPr lang="en-US" sz="2400" b="1" spc="300" dirty="0">
                 <a:solidFill>
-                  <a:srgbClr val="F43F5E"/>
+                  <a:srgbClr val="10B981"/>
                 </a:solidFill>
               </a:rPr>
               <a:t>STEP 1</a:t>
@@ -9573,8 +9802,8 @@
         </p:nvSpPr>
         <p:spPr>
           <a:xfrm>
-            <a:off x="3321958" y="2159000"/>
-            <a:ext cx="2872014" cy="3302000"/>
+            <a:off x="3321958" y="2158999"/>
+            <a:ext cx="2872014" cy="3517405"/>
           </a:xfrm>
           <a:prstGeom prst="roundRect">
             <a:avLst>
@@ -9582,7 +9811,7 @@
             </a:avLst>
           </a:prstGeom>
           <a:solidFill>
-            <a:srgbClr val="FFFFFF"/>
+            <a:srgbClr val="EAEAEA"/>
           </a:solidFill>
           <a:ln w="12700">
             <a:solidFill>
@@ -9659,8 +9888,8 @@
         </p:nvSpPr>
         <p:spPr>
           <a:xfrm>
-            <a:off x="6052458" y="2159000"/>
-            <a:ext cx="2872014" cy="3302000"/>
+            <a:off x="6052458" y="2158999"/>
+            <a:ext cx="2872014" cy="3517405"/>
           </a:xfrm>
           <a:prstGeom prst="roundRect">
             <a:avLst>
@@ -9668,7 +9897,7 @@
             </a:avLst>
           </a:prstGeom>
           <a:solidFill>
-            <a:srgbClr val="FFFFFF"/>
+            <a:srgbClr val="C0C0C0"/>
           </a:solidFill>
           <a:ln w="12700">
             <a:solidFill>
@@ -9729,10 +9958,10 @@
             <a:r>
               <a:rPr lang="en-US" sz="2400" i="1" dirty="0">
                 <a:solidFill>
-                  <a:srgbClr val="64748B"/>
-                </a:solidFill>
-              </a:rPr>
-              <a:t>Table + chart, side by side.</a:t>
+                  <a:schemeClr val="bg1"/>
+                </a:solidFill>
+              </a:rPr>
+              <a:t>Table + chart</a:t>
             </a:r>
           </a:p>
         </p:txBody>
@@ -9745,8 +9974,8 @@
         </p:nvSpPr>
         <p:spPr>
           <a:xfrm>
-            <a:off x="8782958" y="2159000"/>
-            <a:ext cx="2872014" cy="3302000"/>
+            <a:off x="8782958" y="2158999"/>
+            <a:ext cx="2872014" cy="3517405"/>
           </a:xfrm>
           <a:prstGeom prst="roundRect">
             <a:avLst>
@@ -9754,7 +9983,7 @@
             </a:avLst>
           </a:prstGeom>
           <a:solidFill>
-            <a:srgbClr val="FFFFFF"/>
+            <a:srgbClr val="9D9D9D"/>
           </a:solidFill>
           <a:ln w="12700">
             <a:solidFill>
@@ -9766,11 +9995,10 @@
           <a:bodyPr wrap="square" lIns="180000" tIns="200000" rIns="180000" bIns="200000" anchor="t"/>
           <a:lstStyle/>
           <a:p>
-            <a:pPr algn="l"/>
             <a:r>
               <a:rPr lang="en-US" sz="2400" b="1" spc="300" dirty="0">
                 <a:solidFill>
-                  <a:srgbClr val="10B981"/>
+                  <a:srgbClr val="F43F5E"/>
                 </a:solidFill>
               </a:rPr>
               <a:t>STEP 4</a:t>
@@ -9815,10 +10043,10 @@
             <a:r>
               <a:rPr lang="en-US" sz="2400" i="1" dirty="0">
                 <a:solidFill>
-                  <a:srgbClr val="64748B"/>
-                </a:solidFill>
-              </a:rPr>
-              <a:t>One click → Excel report.</a:t>
+                  <a:schemeClr val="bg1"/>
+                </a:solidFill>
+              </a:rPr>
+              <a:t>Excel report.</a:t>
             </a:r>
           </a:p>
         </p:txBody>
@@ -9954,10 +10182,10 @@
             <p:nvPr/>
           </p:nvPicPr>
           <p:blipFill>
-            <a:blip>
+            <a:blip r:embed="rId3">
               <a:extLst>
                 <a:ext uri="{96DAC541-7B7A-43D3-8B79-37D633B846F1}">
-                  <asvg:svgBlip xmlns:asvg="http://schemas.microsoft.com/office/drawing/2016/SVG/main" r:embed="rId3"/>
+                  <asvg:svgBlip xmlns:asvg="http://schemas.microsoft.com/office/drawing/2016/SVG/main" r:embed="rId4"/>
                 </a:ext>
               </a:extLst>
             </a:blip>
@@ -10041,7 +10269,7 @@
                   <a:srgbClr val="0F172A"/>
                 </a:solidFill>
               </a:rPr>
-              <a:t>UX Is the Product</a:t>
+              <a:t>The LLM is 20% of the work. </a:t>
             </a:r>
           </a:p>
         </p:txBody>
@@ -10055,7 +10283,7 @@
         <p:spPr>
           <a:xfrm>
             <a:off x="635000" y="1778000"/>
-            <a:ext cx="3492500" cy="3810000"/>
+            <a:ext cx="3492500" cy="3340265"/>
           </a:xfrm>
           <a:prstGeom prst="roundRect">
             <a:avLst>
@@ -10126,7 +10354,7 @@
         <p:spPr>
           <a:xfrm>
             <a:off x="4343400" y="1778000"/>
-            <a:ext cx="3492500" cy="3810000"/>
+            <a:ext cx="3492500" cy="3340265"/>
           </a:xfrm>
           <a:prstGeom prst="roundRect">
             <a:avLst>
@@ -10197,7 +10425,7 @@
         <p:spPr>
           <a:xfrm>
             <a:off x="8051800" y="1778000"/>
-            <a:ext cx="3492500" cy="3810000"/>
+            <a:ext cx="3492500" cy="3340265"/>
           </a:xfrm>
           <a:prstGeom prst="roundRect">
             <a:avLst>
@@ -10267,8 +10495,8 @@
         </p:nvSpPr>
         <p:spPr>
           <a:xfrm>
-            <a:off x="635000" y="5778500"/>
-            <a:ext cx="10922000" cy="457200"/>
+            <a:off x="635000" y="5308270"/>
+            <a:ext cx="10922000" cy="927430"/>
           </a:xfrm>
           <a:prstGeom prst="roundRect">
             <a:avLst>
@@ -10288,12 +10516,27 @@
           <a:p>
             <a:pPr algn="ctr"/>
             <a:r>
-              <a:rPr lang="en-US" sz="2400" i="1" dirty="0">
+              <a:rPr lang="en-US" sz="2400" dirty="0">
                 <a:solidFill>
                   <a:srgbClr val="475569"/>
                 </a:solidFill>
               </a:rPr>
-              <a:t>The LLM is 20% of the work. The UX is the rest!</a:t>
+              <a:t>The LLM 20% of the work. </a:t>
+            </a:r>
+            <a:br>
+              <a:rPr lang="en-US" sz="2400" dirty="0">
+                <a:solidFill>
+                  <a:srgbClr val="475569"/>
+                </a:solidFill>
+              </a:rPr>
+            </a:br>
+            <a:r>
+              <a:rPr lang="en-US" sz="2400" dirty="0">
+                <a:solidFill>
+                  <a:srgbClr val="475569"/>
+                </a:solidFill>
+              </a:rPr>
+              <a:t>The rest is just connecting the pieces.</a:t>
             </a:r>
           </a:p>
         </p:txBody>
@@ -10440,7 +10683,7 @@
         </p:nvSpPr>
         <p:spPr>
           <a:xfrm>
-            <a:off x="4343400" y="1651000"/>
+            <a:off x="4236525" y="1651000"/>
             <a:ext cx="3600000" cy="1944000"/>
           </a:xfrm>
           <a:prstGeom prst="roundRect">
@@ -10504,7 +10747,7 @@
         </p:nvSpPr>
         <p:spPr>
           <a:xfrm>
-            <a:off x="8124370" y="1651000"/>
+            <a:off x="7910620" y="1651000"/>
             <a:ext cx="3600000" cy="1944000"/>
           </a:xfrm>
           <a:prstGeom prst="roundRect">
@@ -10568,7 +10811,7 @@
         </p:nvSpPr>
         <p:spPr>
           <a:xfrm>
-            <a:off x="562430" y="3726542"/>
+            <a:off x="562430" y="3643417"/>
             <a:ext cx="3600000" cy="1944000"/>
           </a:xfrm>
           <a:prstGeom prst="roundRect">
@@ -10632,7 +10875,7 @@
         </p:nvSpPr>
         <p:spPr>
           <a:xfrm>
-            <a:off x="4343400" y="3726542"/>
+            <a:off x="4236525" y="3643417"/>
             <a:ext cx="3600000" cy="1944000"/>
           </a:xfrm>
           <a:prstGeom prst="roundRect">
@@ -10704,7 +10947,7 @@
         </p:nvSpPr>
         <p:spPr>
           <a:xfrm>
-            <a:off x="8124370" y="3726542"/>
+            <a:off x="7910620" y="3643417"/>
             <a:ext cx="3600000" cy="1944000"/>
           </a:xfrm>
           <a:prstGeom prst="roundRect">
@@ -10762,17 +11005,25 @@
       </p:sp>
       <p:sp>
         <p:nvSpPr>
-          <p:cNvPr id="1420" name="Q"/>
-          <p:cNvSpPr txBox="1"/>
+          <p:cNvPr id="3" name="BQ">
+            <a:extLst>
+              <a:ext uri="{FF2B5EF4-FFF2-40B4-BE49-F238E27FC236}">
+                <a16:creationId xmlns:a16="http://schemas.microsoft.com/office/drawing/2014/main" id="{3922238F-AA9D-112C-25C6-0B9544A29EDE}"/>
+              </a:ext>
+            </a:extLst>
+          </p:cNvPr>
+          <p:cNvSpPr/>
           <p:nvPr/>
         </p:nvSpPr>
         <p:spPr>
           <a:xfrm>
-            <a:off x="635000" y="5842000"/>
-            <a:ext cx="10922000" cy="381000"/>
-          </a:xfrm>
-          <a:prstGeom prst="rect">
-            <a:avLst/>
+            <a:off x="843147" y="5388429"/>
+            <a:ext cx="10307453" cy="927430"/>
+          </a:xfrm>
+          <a:prstGeom prst="roundRect">
+            <a:avLst>
+              <a:gd name="adj" fmla="val 50000"/>
+            </a:avLst>
           </a:prstGeom>
           <a:solidFill>
             <a:srgbClr val="F1F5F9"/>
@@ -10783,22 +11034,24 @@
         </p:spPr>
         <p:txBody>
           <a:bodyPr wrap="square" lIns="180000" tIns="0" rIns="180000" bIns="0" anchor="ctr"/>
-          <a:lstStyle>
-            <a:defPPr>
-              <a:defRPr lang="tr-TR"/>
-            </a:defPPr>
-            <a:lvl1pPr algn="ctr">
-              <a:defRPr sz="2400" i="1">
+          <a:lstStyle/>
+          <a:p>
+            <a:pPr algn="ctr"/>
+            <a:r>
+              <a:rPr lang="en-US" sz="2400" b="1" dirty="0">
                 <a:solidFill>
                   <a:srgbClr val="475569"/>
                 </a:solidFill>
-              </a:defRPr>
-            </a:lvl1pPr>
-          </a:lstStyle>
-          <a:p>
-            <a:r>
-              <a:rPr lang="en-US" sz="2000" dirty="0"/>
-              <a:t>Anywhere a JIRA ticket asks a developer to write a SELECT.</a:t>
+              </a:rPr>
+              <a:t>Hold-on!</a:t>
+            </a:r>
+            <a:r>
+              <a:rPr lang="en-US" sz="2400" dirty="0">
+                <a:solidFill>
+                  <a:srgbClr val="475569"/>
+                </a:solidFill>
+              </a:rPr>
+              <a:t> How about actual works instead of just reporting!</a:t>
             </a:r>
           </a:p>
         </p:txBody>
@@ -12497,8 +12750,8 @@
         </p:nvSpPr>
         <p:spPr>
           <a:xfrm>
-            <a:off x="5153525" y="5504190"/>
-            <a:ext cx="2695850" cy="830997"/>
+            <a:off x="5884853" y="5426501"/>
+            <a:ext cx="2422352" cy="830997"/>
           </a:xfrm>
           <a:prstGeom prst="rect">
             <a:avLst/>
@@ -12533,7 +12786,7 @@
                   <a:srgbClr val="94A3B8"/>
                 </a:solidFill>
               </a:rPr>
-              <a:t>Source-code</a:t>
+              <a:t>Demo projects</a:t>
             </a:r>
             <a:endParaRPr lang="tr-TR" sz="2400" i="1" dirty="0"/>
           </a:p>
@@ -12555,8 +12808,8 @@
         </p:nvCxnSpPr>
         <p:spPr>
           <a:xfrm flipV="1">
-            <a:off x="7876269" y="5192160"/>
-            <a:ext cx="1333045" cy="727529"/>
+            <a:off x="8251418" y="5192160"/>
+            <a:ext cx="957896" cy="649840"/>
           </a:xfrm>
           <a:prstGeom prst="curvedConnector3">
             <a:avLst/>
@@ -12692,108 +12945,109 @@
       </p:sp>
       <p:sp>
         <p:nvSpPr>
-          <p:cNvPr id="18" name="Rectangle 1">
+          <p:cNvPr id="6" name="Rectangle: Rounded Corners 5">
             <a:extLst>
               <a:ext uri="{FF2B5EF4-FFF2-40B4-BE49-F238E27FC236}">
-                <a16:creationId xmlns:a16="http://schemas.microsoft.com/office/drawing/2014/main" id="{FB9B4569-51E9-BCD9-9F8D-73705F246D87}"/>
+                <a16:creationId xmlns:a16="http://schemas.microsoft.com/office/drawing/2014/main" id="{13B697C2-CD1F-7168-5C03-4D94888C954B}"/>
               </a:ext>
             </a:extLst>
           </p:cNvPr>
-          <p:cNvSpPr>
-            <a:spLocks noChangeArrowheads="1"/>
-          </p:cNvSpPr>
+          <p:cNvSpPr/>
           <p:nvPr/>
         </p:nvSpPr>
-        <p:spPr bwMode="auto">
+        <p:spPr>
           <a:xfrm>
-            <a:off x="0" y="0"/>
-            <a:ext cx="12192000" cy="0"/>
-          </a:xfrm>
-          <a:prstGeom prst="rect">
+            <a:off x="653927" y="5105523"/>
+            <a:ext cx="3953699" cy="1433739"/>
+          </a:xfrm>
+          <a:prstGeom prst="roundRect">
             <a:avLst/>
           </a:prstGeom>
           <a:noFill/>
-          <a:ln>
-            <a:noFill/>
+          <a:ln w="9525" cap="flat" cmpd="sng" algn="ctr">
+            <a:solidFill>
+              <a:schemeClr val="accent1"/>
+            </a:solidFill>
+            <a:prstDash val="solid"/>
+            <a:round/>
+            <a:headEnd type="none" w="med" len="med"/>
+            <a:tailEnd type="none" w="med" len="med"/>
           </a:ln>
-          <a:effectLst/>
-          <a:extLst>
-            <a:ext uri="{909E8E84-426E-40DD-AFC4-6F175D3DCCD1}">
-              <a14:hiddenFill xmlns:a14="http://schemas.microsoft.com/office/drawing/2010/main">
-                <a:solidFill>
-                  <a:schemeClr val="accent1"/>
-                </a:solidFill>
-              </a14:hiddenFill>
-            </a:ext>
-            <a:ext uri="{91240B29-F687-4F45-9708-019B960494DF}">
-              <a14:hiddenLine xmlns:a14="http://schemas.microsoft.com/office/drawing/2010/main" w="9525">
-                <a:solidFill>
-                  <a:schemeClr val="tx1"/>
-                </a:solidFill>
-                <a:miter lim="800000"/>
-                <a:headEnd/>
-                <a:tailEnd/>
-              </a14:hiddenLine>
-            </a:ext>
-            <a:ext uri="{AF507438-7753-43E0-B8FC-AC1667EBCBE1}">
-              <a14:hiddenEffects xmlns:a14="http://schemas.microsoft.com/office/drawing/2010/main">
-                <a:effectLst>
-                  <a:outerShdw dist="35921" dir="2700000" algn="ctr" rotWithShape="0">
-                    <a:schemeClr val="bg2"/>
-                  </a:outerShdw>
-                </a:effectLst>
-              </a14:hiddenEffects>
-            </a:ext>
-          </a:extLst>
         </p:spPr>
-        <p:txBody>
-          <a:bodyPr vert="horz" wrap="none" lIns="91440" tIns="45720" rIns="91440" bIns="45720" numCol="1" anchor="ctr" anchorCtr="0" compatLnSpc="1">
-            <a:prstTxWarp prst="textNoShape">
-              <a:avLst/>
-            </a:prstTxWarp>
-            <a:spAutoFit/>
-          </a:bodyPr>
-          <a:lstStyle/>
-          <a:p>
-            <a:pPr marL="0" marR="0" lvl="0" indent="0" algn="l" defTabSz="914400" rtl="0" eaLnBrk="0" fontAlgn="base" latinLnBrk="0" hangingPunct="0">
-              <a:lnSpc>
-                <a:spcPct val="100000"/>
-              </a:lnSpc>
-              <a:spcBef>
-                <a:spcPct val="0"/>
-              </a:spcBef>
-              <a:spcAft>
-                <a:spcPct val="0"/>
-              </a:spcAft>
-              <a:buClrTx/>
-              <a:buSzTx/>
-              <a:buFontTx/>
-              <a:buNone/>
-              <a:tabLst/>
-            </a:pPr>
-            <a:r>
-              <a:rPr kumimoji="0" lang="tr-TR" altLang="tr-TR" sz="1100" b="0" i="0" u="none" strike="noStrike" cap="none" normalizeH="0" baseline="0">
-                <a:ln>
-                  <a:noFill/>
-                </a:ln>
-                <a:solidFill>
-                  <a:srgbClr val="000000"/>
-                </a:solidFill>
-                <a:effectLst/>
-                <a:latin typeface="Google Sans Text"/>
-              </a:rPr>
-              <a:t>Until now we learnt programming languages to talk with computers</a:t>
-            </a:r>
-            <a:endParaRPr kumimoji="0" lang="tr-TR" altLang="tr-TR" sz="1800" b="0" i="0" u="none" strike="noStrike" cap="none" normalizeH="0" baseline="0">
-              <a:ln>
-                <a:noFill/>
-              </a:ln>
-              <a:solidFill>
-                <a:schemeClr val="tx1"/>
-              </a:solidFill>
-              <a:effectLst/>
-              <a:latin typeface="Arial" panose="020B0604020202020204" pitchFamily="34" charset="0"/>
-            </a:endParaRPr>
+        <p:style>
+          <a:lnRef idx="0">
+            <a:scrgbClr r="0" g="0" b="0"/>
+          </a:lnRef>
+          <a:fillRef idx="0">
+            <a:scrgbClr r="0" g="0" b="0"/>
+          </a:fillRef>
+          <a:effectRef idx="0">
+            <a:scrgbClr r="0" g="0" b="0"/>
+          </a:effectRef>
+          <a:fontRef idx="minor">
+            <a:schemeClr val="accent1"/>
+          </a:fontRef>
+        </p:style>
+        <p:txBody>
+          <a:bodyPr rtlCol="0" anchor="ctr"/>
+          <a:lstStyle/>
+          <a:p>
+            <a:pPr algn="ctr"/>
+            <a:endParaRPr lang="tr-TR" dirty="0"/>
+          </a:p>
+        </p:txBody>
+      </p:sp>
+      <p:sp>
+        <p:nvSpPr>
+          <p:cNvPr id="8" name="Rectangle: Rounded Corners 7">
+            <a:extLst>
+              <a:ext uri="{FF2B5EF4-FFF2-40B4-BE49-F238E27FC236}">
+                <a16:creationId xmlns:a16="http://schemas.microsoft.com/office/drawing/2014/main" id="{3D0AE1AA-7E4C-A120-28E1-6595708F20F9}"/>
+              </a:ext>
+            </a:extLst>
+          </p:cNvPr>
+          <p:cNvSpPr/>
+          <p:nvPr/>
+        </p:nvSpPr>
+        <p:spPr>
+          <a:xfrm>
+            <a:off x="5884853" y="4643252"/>
+            <a:ext cx="5277952" cy="1995054"/>
+          </a:xfrm>
+          <a:prstGeom prst="roundRect">
+            <a:avLst/>
+          </a:prstGeom>
+          <a:noFill/>
+          <a:ln w="9525" cap="flat" cmpd="sng" algn="ctr">
+            <a:solidFill>
+              <a:schemeClr val="accent1"/>
+            </a:solidFill>
+            <a:prstDash val="solid"/>
+            <a:round/>
+            <a:headEnd type="none" w="med" len="med"/>
+            <a:tailEnd type="none" w="med" len="med"/>
+          </a:ln>
+        </p:spPr>
+        <p:style>
+          <a:lnRef idx="0">
+            <a:scrgbClr r="0" g="0" b="0"/>
+          </a:lnRef>
+          <a:fillRef idx="0">
+            <a:scrgbClr r="0" g="0" b="0"/>
+          </a:fillRef>
+          <a:effectRef idx="0">
+            <a:scrgbClr r="0" g="0" b="0"/>
+          </a:effectRef>
+          <a:fontRef idx="minor">
+            <a:schemeClr val="accent1"/>
+          </a:fontRef>
+        </p:style>
+        <p:txBody>
+          <a:bodyPr rtlCol="0" anchor="ctr"/>
+          <a:lstStyle/>
+          <a:p>
+            <a:pPr algn="ctr"/>
+            <a:endParaRPr lang="tr-TR" dirty="0"/>
           </a:p>
         </p:txBody>
       </p:sp>
@@ -12901,33 +13155,6 @@
               <a:t>How many of you have written SQL before?</a:t>
             </a:r>
           </a:p>
-          <a:p>
-            <a:pPr algn="l"/>
-            <a:r>
-              <a:rPr lang="en-US" sz="2400" i="1" dirty="0">
-                <a:solidFill>
-                  <a:srgbClr val="0891B2"/>
-                </a:solidFill>
-              </a:rPr>
-              <a:t>Now imagine your PM doing that… </a:t>
-            </a:r>
-            <a:r>
-              <a:rPr lang="en-US" sz="2400" b="1" i="1" dirty="0">
-                <a:solidFill>
-                  <a:srgbClr val="0891B2"/>
-                </a:solidFill>
-              </a:rPr>
-              <a:t>without you</a:t>
-            </a:r>
-            <a:r>
-              <a:rPr lang="en-US" sz="2400" i="1" dirty="0">
-                <a:solidFill>
-                  <a:srgbClr val="0891B2"/>
-                </a:solidFill>
-              </a:rPr>
-              <a:t>.</a:t>
-            </a:r>
-          </a:p>
         </p:txBody>
       </p:sp>
       <p:sp>
@@ -13870,7 +14097,13 @@
   <p:cSld>
     <p:spTree>
       <p:nvGrpSpPr>
-        <p:cNvPr id="1" name=""/>
+        <p:cNvPr id="1" name="">
+          <a:extLst>
+            <a:ext uri="{FF2B5EF4-FFF2-40B4-BE49-F238E27FC236}">
+              <a16:creationId xmlns:a16="http://schemas.microsoft.com/office/drawing/2014/main" id="{5D2C07A3-A506-91E2-776A-A29FCBDFCAB7}"/>
+            </a:ext>
+          </a:extLst>
+        </p:cNvPr>
         <p:cNvGrpSpPr/>
         <p:nvPr/>
       </p:nvGrpSpPr>
@@ -13884,7 +14117,13 @@
       </p:grpSpPr>
       <p:sp>
         <p:nvSpPr>
-          <p:cNvPr id="700" name="Panel"/>
+          <p:cNvPr id="700" name="Panel">
+            <a:extLst>
+              <a:ext uri="{FF2B5EF4-FFF2-40B4-BE49-F238E27FC236}">
+                <a16:creationId xmlns:a16="http://schemas.microsoft.com/office/drawing/2014/main" id="{18B2B528-04D2-2150-B806-041B393ED26A}"/>
+              </a:ext>
+            </a:extLst>
+          </p:cNvPr>
           <p:cNvSpPr/>
           <p:nvPr/>
         </p:nvSpPr>
@@ -13913,14 +14152,20 @@
       </p:sp>
       <p:sp>
         <p:nvSpPr>
-          <p:cNvPr id="701" name="AccentBar"/>
+          <p:cNvPr id="701" name="AccentBar">
+            <a:extLst>
+              <a:ext uri="{FF2B5EF4-FFF2-40B4-BE49-F238E27FC236}">
+                <a16:creationId xmlns:a16="http://schemas.microsoft.com/office/drawing/2014/main" id="{C728586D-EB19-12D4-4F3F-29D6CB3CC6F8}"/>
+              </a:ext>
+            </a:extLst>
+          </p:cNvPr>
           <p:cNvSpPr/>
           <p:nvPr/>
         </p:nvSpPr>
         <p:spPr>
           <a:xfrm>
-            <a:off x="889000" y="1968500"/>
-            <a:ext cx="1016000" cy="76200"/>
+            <a:off x="948375" y="1968500"/>
+            <a:ext cx="1224000" cy="76200"/>
           </a:xfrm>
           <a:prstGeom prst="rect">
             <a:avLst/>
@@ -13945,7 +14190,7 @@
           <p:cNvPr id="2" name="Title 1">
             <a:extLst>
               <a:ext uri="{FF2B5EF4-FFF2-40B4-BE49-F238E27FC236}">
-                <a16:creationId xmlns:a16="http://schemas.microsoft.com/office/drawing/2014/main" id="{66F91E33-3D7D-A8AE-07EA-1012F711A17C}"/>
+                <a16:creationId xmlns:a16="http://schemas.microsoft.com/office/drawing/2014/main" id="{11C53B48-EF36-6340-82E8-458E3E0A9C22}"/>
               </a:ext>
             </a:extLst>
           </p:cNvPr>
@@ -13972,7 +14217,7 @@
                   <a:srgbClr val="FFFFFF"/>
                 </a:solidFill>
               </a:rPr>
-              <a:t>The Pipeline</a:t>
+              <a:t>Live Demo</a:t>
             </a:r>
           </a:p>
           <a:p>
@@ -13995,7 +14240,7 @@
           <p:cNvPr id="3" name="Text Placeholder 2">
             <a:extLst>
               <a:ext uri="{FF2B5EF4-FFF2-40B4-BE49-F238E27FC236}">
-                <a16:creationId xmlns:a16="http://schemas.microsoft.com/office/drawing/2014/main" id="{97129D77-BA5C-9191-1558-B33FEC2D221A}"/>
+                <a16:creationId xmlns:a16="http://schemas.microsoft.com/office/drawing/2014/main" id="{CE123229-FD34-7833-06A8-F4C0CCC872CD}"/>
               </a:ext>
             </a:extLst>
           </p:cNvPr>
@@ -14006,7 +14251,12 @@
             <p:ph type="body" idx="1"/>
           </p:nvPr>
         </p:nvSpPr>
-        <p:spPr/>
+        <p:spPr>
+          <a:xfrm>
+            <a:off x="831850" y="2050663"/>
+            <a:ext cx="2930596" cy="558799"/>
+          </a:xfrm>
+        </p:spPr>
         <p:txBody>
           <a:bodyPr>
             <a:normAutofit/>
@@ -14017,12 +14267,12 @@
               <a:buNone/>
             </a:pPr>
             <a:r>
-              <a:rPr lang="en-US" sz="2000" b="1" spc="400" dirty="0">
+              <a:rPr lang="en-US" sz="3200" b="1" spc="400" dirty="0">
                 <a:solidFill>
                   <a:srgbClr val="22D3EE"/>
                 </a:solidFill>
               </a:rPr>
-              <a:t>PART 1  ·  LIVE DEMO</a:t>
+              <a:t>PART 1</a:t>
             </a:r>
           </a:p>
         </p:txBody>
@@ -14030,7 +14280,7 @@
     </p:spTree>
     <p:extLst>
       <p:ext uri="{BB962C8B-B14F-4D97-AF65-F5344CB8AC3E}">
-        <p14:creationId xmlns:p14="http://schemas.microsoft.com/office/powerpoint/2010/main" val="3761643423"/>
+        <p14:creationId xmlns:p14="http://schemas.microsoft.com/office/powerpoint/2010/main" val="3914748982"/>
       </p:ext>
     </p:extLst>
   </p:cSld>
@@ -14834,7 +15084,7 @@
                   <a:srgbClr val="64748B"/>
                 </a:solidFill>
               </a:rPr>
-              <a:t>results</a:t>
+              <a:t>Results </a:t>
             </a:r>
           </a:p>
         </p:txBody>
@@ -14970,7 +15220,7 @@
                   <a:schemeClr val="accent5"/>
                 </a:solidFill>
               </a:rPr>
-              <a:t>On Error</a:t>
+              <a:t>Error</a:t>
             </a:r>
             <a:endParaRPr lang="en-US" sz="2800" b="1" dirty="0">
               <a:solidFill>
@@ -15016,7 +15266,7 @@
           <a:prstGeom prst="bentConnector2">
             <a:avLst/>
           </a:prstGeom>
-          <a:ln w="76200">
+          <a:ln w="98425">
             <a:solidFill>
               <a:srgbClr val="CBD5E1"/>
             </a:solidFill>
@@ -15073,6 +15323,83 @@
           <a:lstStyle/>
           <a:p>
             <a:endParaRPr lang="en-US"/>
+          </a:p>
+        </p:txBody>
+      </p:sp>
+      <p:sp>
+        <p:nvSpPr>
+          <p:cNvPr id="10" name="TextBox 9">
+            <a:extLst>
+              <a:ext uri="{FF2B5EF4-FFF2-40B4-BE49-F238E27FC236}">
+                <a16:creationId xmlns:a16="http://schemas.microsoft.com/office/drawing/2014/main" id="{BB4B9F97-4E80-486C-FE7C-DC6DC5520893}"/>
+              </a:ext>
+            </a:extLst>
+          </p:cNvPr>
+          <p:cNvSpPr txBox="1"/>
+          <p:nvPr/>
+        </p:nvSpPr>
+        <p:spPr>
+          <a:xfrm>
+            <a:off x="10649644" y="2694396"/>
+            <a:ext cx="580808" cy="369332"/>
+          </a:xfrm>
+          <a:prstGeom prst="rect">
+            <a:avLst/>
+          </a:prstGeom>
+          <a:noFill/>
+        </p:spPr>
+        <p:txBody>
+          <a:bodyPr wrap="square">
+            <a:spAutoFit/>
+          </a:bodyPr>
+          <a:lstStyle/>
+          <a:p>
+            <a:r>
+              <a:rPr lang="en-US" b="0" i="0" dirty="0">
+                <a:solidFill>
+                  <a:srgbClr val="F3F4F6"/>
+                </a:solidFill>
+                <a:effectLst/>
+                <a:latin typeface="Apple Color Emoji"/>
+              </a:rPr>
+              <a:t>✅</a:t>
+            </a:r>
+            <a:endParaRPr lang="en-US" dirty="0"/>
+          </a:p>
+        </p:txBody>
+      </p:sp>
+      <p:sp>
+        <p:nvSpPr>
+          <p:cNvPr id="15" name="TextBox 14">
+            <a:extLst>
+              <a:ext uri="{FF2B5EF4-FFF2-40B4-BE49-F238E27FC236}">
+                <a16:creationId xmlns:a16="http://schemas.microsoft.com/office/drawing/2014/main" id="{1539840D-3579-C6D4-75CA-F1F3C5465DE1}"/>
+              </a:ext>
+            </a:extLst>
+          </p:cNvPr>
+          <p:cNvSpPr txBox="1"/>
+          <p:nvPr/>
+        </p:nvSpPr>
+        <p:spPr>
+          <a:xfrm>
+            <a:off x="10892548" y="4006502"/>
+            <a:ext cx="580808" cy="369332"/>
+          </a:xfrm>
+          <a:prstGeom prst="rect">
+            <a:avLst/>
+          </a:prstGeom>
+          <a:noFill/>
+        </p:spPr>
+        <p:txBody>
+          <a:bodyPr wrap="square">
+            <a:spAutoFit/>
+          </a:bodyPr>
+          <a:lstStyle/>
+          <a:p>
+            <a:r>
+              <a:rPr lang="en-US" dirty="0"/>
+              <a:t>❌</a:t>
+            </a:r>
           </a:p>
         </p:txBody>
       </p:sp>
@@ -15187,7 +15514,7 @@
               </a:spcBef>
             </a:pPr>
             <a:r>
-              <a:rPr lang="en-US" sz="3600" b="1" dirty="0">
+              <a:rPr lang="en-US" sz="2800" b="1" dirty="0">
                 <a:solidFill>
                   <a:srgbClr val="0F172A"/>
                 </a:solidFill>
@@ -15262,6 +15589,18 @@
               </a:rPr>
               <a:t>Optional: sample values</a:t>
             </a:r>
+            <a:br>
+              <a:rPr lang="en-US" sz="2400" dirty="0">
+                <a:solidFill>
+                  <a:srgbClr val="334155"/>
+                </a:solidFill>
+              </a:rPr>
+            </a:br>
+            <a:endParaRPr lang="en-US" sz="2400" dirty="0">
+              <a:solidFill>
+                <a:srgbClr val="334155"/>
+              </a:solidFill>
+            </a:endParaRPr>
           </a:p>
           <a:p>
             <a:pPr>
@@ -15275,7 +15614,7 @@
                   <a:srgbClr val="64748B"/>
                 </a:solidFill>
               </a:rPr>
-              <a:t>Without schema, the LLM is guessing.</a:t>
+              <a:t>Without schema, the LLM is guessing!</a:t>
             </a:r>
           </a:p>
         </p:txBody>
@@ -15324,7 +15663,7 @@
               </a:spcBef>
             </a:pPr>
             <a:r>
-              <a:rPr lang="en-US" sz="3600" b="1" dirty="0">
+              <a:rPr lang="en-US" sz="2800" b="1" dirty="0">
                 <a:solidFill>
                   <a:srgbClr val="FFFFFF"/>
                 </a:solidFill>
@@ -15968,10 +16307,10 @@
             <p:nvPr/>
           </p:nvPicPr>
           <p:blipFill>
-            <a:blip>
+            <a:blip r:embed="rId3">
               <a:extLst>
                 <a:ext uri="{96DAC541-7B7A-43D3-8B79-37D633B846F1}">
-                  <asvg:svgBlip xmlns:asvg="http://schemas.microsoft.com/office/drawing/2016/SVG/main" r:embed="rId3"/>
+                  <asvg:svgBlip xmlns:asvg="http://schemas.microsoft.com/office/drawing/2016/SVG/main" r:embed="rId4"/>
                 </a:ext>
               </a:extLst>
             </a:blip>

--- a/Presentation.pptx
+++ b/Presentation.pptx
@@ -5,7 +5,7 @@
     <p:sldMasterId id="2147483684" r:id="rId1"/>
   </p:sldMasterIdLst>
   <p:notesMasterIdLst>
-    <p:notesMasterId r:id="rId22"/>
+    <p:notesMasterId r:id="rId23"/>
   </p:notesMasterIdLst>
   <p:sldIdLst>
     <p:sldId id="328" r:id="rId2"/>
@@ -27,7 +27,8 @@
     <p:sldId id="321" r:id="rId18"/>
     <p:sldId id="322" r:id="rId19"/>
     <p:sldId id="323" r:id="rId20"/>
-    <p:sldId id="324" r:id="rId21"/>
+    <p:sldId id="332" r:id="rId21"/>
+    <p:sldId id="324" r:id="rId22"/>
   </p:sldIdLst>
   <p:sldSz cx="12192000" cy="6858000"/>
   <p:notesSz cx="6858000" cy="9144000"/>
@@ -216,7 +217,7 @@
           <a:p>
             <a:fld id="{BC660078-77E7-46A7-9649-B3FD62DAD7B9}" type="datetimeFigureOut">
               <a:rPr lang="tr-TR" smtClean="0"/>
-              <a:t>26.04.2026</a:t>
+              <a:t>29.04.2026</a:t>
             </a:fld>
             <a:endParaRPr lang="tr-TR"/>
           </a:p>
@@ -1039,13 +1040,13 @@
           <a:p>
             <a:r>
               <a:rPr lang="en-US" dirty="0"/>
-              <a:t>- LLM provider — OpenAI, Azure OpenAI, local model, whatever</a:t>
+              <a:t>- LLM provider — OpenAI, Azure OpenAI, Claude, local model, whatever</a:t>
             </a:r>
           </a:p>
           <a:p>
             <a:r>
               <a:rPr lang="en-US" dirty="0"/>
-              <a:t>- ReadOnly flag — belt and suspenders on top of the validator</a:t>
+              <a:t>- ReadOnly flag — seat belt and suspenders on top of the validator</a:t>
             </a:r>
           </a:p>
           <a:p>
@@ -1918,6 +1919,125 @@
   <p:cSld>
     <p:spTree>
       <p:nvGrpSpPr>
+        <p:cNvPr id="1" name="">
+          <a:extLst>
+            <a:ext uri="{FF2B5EF4-FFF2-40B4-BE49-F238E27FC236}">
+              <a16:creationId xmlns:a16="http://schemas.microsoft.com/office/drawing/2014/main" id="{BB5B04BD-6229-5249-EE25-4823CBADA422}"/>
+            </a:ext>
+          </a:extLst>
+        </p:cNvPr>
+        <p:cNvGrpSpPr/>
+        <p:nvPr/>
+      </p:nvGrpSpPr>
+      <p:grpSpPr>
+        <a:xfrm>
+          <a:off x="0" y="0"/>
+          <a:ext cx="0" cy="0"/>
+          <a:chOff x="0" y="0"/>
+          <a:chExt cx="0" cy="0"/>
+        </a:xfrm>
+      </p:grpSpPr>
+      <p:sp>
+        <p:nvSpPr>
+          <p:cNvPr id="2" name="Slide Image Placeholder 1">
+            <a:extLst>
+              <a:ext uri="{FF2B5EF4-FFF2-40B4-BE49-F238E27FC236}">
+                <a16:creationId xmlns:a16="http://schemas.microsoft.com/office/drawing/2014/main" id="{45CE44DB-5DE9-BDFC-FB4F-DD1CE6F68E22}"/>
+              </a:ext>
+            </a:extLst>
+          </p:cNvPr>
+          <p:cNvSpPr>
+            <a:spLocks noGrp="1" noRot="1" noChangeAspect="1"/>
+          </p:cNvSpPr>
+          <p:nvPr>
+            <p:ph type="sldImg"/>
+          </p:nvPr>
+        </p:nvSpPr>
+        <p:spPr/>
+      </p:sp>
+      <p:sp>
+        <p:nvSpPr>
+          <p:cNvPr id="3" name="Notes Placeholder 2">
+            <a:extLst>
+              <a:ext uri="{FF2B5EF4-FFF2-40B4-BE49-F238E27FC236}">
+                <a16:creationId xmlns:a16="http://schemas.microsoft.com/office/drawing/2014/main" id="{14E79A91-5D21-567F-24C1-A268E9366472}"/>
+              </a:ext>
+            </a:extLst>
+          </p:cNvPr>
+          <p:cNvSpPr>
+            <a:spLocks noGrp="1"/>
+          </p:cNvSpPr>
+          <p:nvPr>
+            <p:ph type="body" idx="1"/>
+          </p:nvPr>
+        </p:nvSpPr>
+        <p:spPr/>
+        <p:txBody>
+          <a:bodyPr/>
+          <a:lstStyle/>
+          <a:p>
+            <a:pPr marL="171450" indent="-171450">
+              <a:buFont typeface="Arial" panose="020B0604020202020204" pitchFamily="34" charset="0"/>
+              <a:buChar char="•"/>
+            </a:pPr>
+            <a:r>
+              <a:rPr lang="en-US" dirty="0"/>
+              <a:t>Create a new customer </a:t>
+            </a:r>
+          </a:p>
+          <a:p>
+            <a:pPr marL="171450" indent="-171450">
+              <a:buFont typeface="Arial" panose="020B0604020202020204" pitchFamily="34" charset="0"/>
+              <a:buChar char="•"/>
+            </a:pPr>
+            <a:r>
+              <a:rPr lang="en-US" dirty="0"/>
+              <a:t>Delete duplicate records</a:t>
+            </a:r>
+          </a:p>
+          <a:p>
+            <a:pPr marL="171450" indent="-171450">
+              <a:buFont typeface="Arial" panose="020B0604020202020204" pitchFamily="34" charset="0"/>
+              <a:buChar char="•"/>
+            </a:pPr>
+            <a:r>
+              <a:rPr lang="en-US" dirty="0"/>
+              <a:t>Update order status </a:t>
+            </a:r>
+          </a:p>
+          <a:p>
+            <a:pPr marL="171450" indent="-171450">
+              <a:buFont typeface="Arial" panose="020B0604020202020204" pitchFamily="34" charset="0"/>
+              <a:buChar char="•"/>
+            </a:pPr>
+            <a:r>
+              <a:rPr lang="en-US" dirty="0"/>
+              <a:t>Clean up spam or inactive records</a:t>
+            </a:r>
+          </a:p>
+          <a:p>
+            <a:endParaRPr lang="en-US" dirty="0"/>
+          </a:p>
+        </p:txBody>
+      </p:sp>
+    </p:spTree>
+    <p:extLst>
+      <p:ext uri="{BB962C8B-B14F-4D97-AF65-F5344CB8AC3E}">
+        <p14:creationId xmlns:p14="http://schemas.microsoft.com/office/powerpoint/2010/main" val="3881110336"/>
+      </p:ext>
+    </p:extLst>
+  </p:cSld>
+  <p:clrMapOvr>
+    <a:masterClrMapping/>
+  </p:clrMapOvr>
+</p:notes>
+</file>
+
+<file path=ppt/notesSlides/notesSlide21.xml><?xml version="1.0" encoding="utf-8"?>
+<p:notes xmlns:a="http://schemas.openxmlformats.org/drawingml/2006/main" xmlns:r="http://schemas.openxmlformats.org/officeDocument/2006/relationships" xmlns:p="http://schemas.openxmlformats.org/presentationml/2006/main">
+  <p:cSld>
+    <p:spTree>
+      <p:nvGrpSpPr>
         <p:cNvPr id="1" name=""/>
         <p:cNvGrpSpPr/>
         <p:nvPr/>
@@ -2331,12 +2451,6 @@
           </a:p>
           <a:p>
             <a:endParaRPr lang="en-US" dirty="0"/>
-          </a:p>
-          <a:p>
-            <a:r>
-              <a:rPr lang="en-US" dirty="0"/>
-              <a:t>Five capabilities — walk through them quickly:</a:t>
-            </a:r>
           </a:p>
           <a:p>
             <a:r>
@@ -2580,7 +2694,7 @@
           <a:p>
             <a:r>
               <a:rPr lang="en-US" dirty="0"/>
-              <a:t>This is the whole system in five boxes. Every time you hear me talk about a 'pipeline' today, come back to this slide in your head.</a:t>
+              <a:t>This is the whole system in 7 boxes. Every time you hear me talk about a 'pipeline' today, come back to this slide in your head.</a:t>
             </a:r>
           </a:p>
           <a:p>
@@ -2702,6 +2816,25 @@
           <a:p>
             <a:r>
               <a:rPr lang="en-US" dirty="0"/>
+              <a:t>- Extra info DDL (</a:t>
+            </a:r>
+            <a:r>
+              <a:rPr lang="en-US" sz="1200" b="0" i="0" kern="1200" dirty="0">
+                <a:solidFill>
+                  <a:schemeClr val="tx1"/>
+                </a:solidFill>
+                <a:effectLst/>
+                <a:latin typeface="+mn-lt"/>
+                <a:ea typeface="+mn-ea"/>
+                <a:cs typeface="+mn-cs"/>
+              </a:rPr>
+              <a:t>Data Definition Language)</a:t>
+            </a:r>
+            <a:endParaRPr lang="en-US" dirty="0"/>
+          </a:p>
+          <a:p>
+            <a:r>
+              <a:rPr lang="en-US" dirty="0"/>
               <a:t>- Without this, the LLM is guessing. With it, it is translating.</a:t>
             </a:r>
           </a:p>
@@ -2726,8 +2859,14 @@
           <a:p>
             <a:r>
               <a:rPr lang="en-US" dirty="0"/>
-              <a:t>'You are a SQL assistant. Rules: SELECT only. No DELETE, UPDATE, or DROP. Return SQL only. Use the schema above.'</a:t>
-            </a:r>
+              <a:t>'You are a SQL assistant. Rules: SELECT only. No DELETE, UPDATE, or DROP. Return SQL only. Use the schema above.’</a:t>
+            </a:r>
+          </a:p>
+          <a:p>
+            <a:endParaRPr lang="en-US" dirty="0"/>
+          </a:p>
+          <a:p>
+            <a:endParaRPr lang="en-US" dirty="0"/>
           </a:p>
           <a:p>
             <a:endParaRPr lang="en-US" dirty="0"/>
@@ -3043,7 +3182,7 @@
           <a:p>
             <a:fld id="{3EF59CCF-2F75-48E0-B827-F930E918C137}" type="datetimeFigureOut">
               <a:rPr lang="tr-TR" smtClean="0"/>
-              <a:t>26.04.2026</a:t>
+              <a:t>29.04.2026</a:t>
             </a:fld>
             <a:endParaRPr lang="tr-TR"/>
           </a:p>
@@ -3243,7 +3382,7 @@
           <a:p>
             <a:fld id="{3EF59CCF-2F75-48E0-B827-F930E918C137}" type="datetimeFigureOut">
               <a:rPr lang="tr-TR" smtClean="0"/>
-              <a:t>26.04.2026</a:t>
+              <a:t>29.04.2026</a:t>
             </a:fld>
             <a:endParaRPr lang="tr-TR"/>
           </a:p>
@@ -3453,7 +3592,7 @@
           <a:p>
             <a:fld id="{3EF59CCF-2F75-48E0-B827-F930E918C137}" type="datetimeFigureOut">
               <a:rPr lang="tr-TR" smtClean="0"/>
-              <a:t>26.04.2026</a:t>
+              <a:t>29.04.2026</a:t>
             </a:fld>
             <a:endParaRPr lang="tr-TR"/>
           </a:p>
@@ -3653,7 +3792,7 @@
           <a:p>
             <a:fld id="{3EF59CCF-2F75-48E0-B827-F930E918C137}" type="datetimeFigureOut">
               <a:rPr lang="tr-TR" smtClean="0"/>
-              <a:t>26.04.2026</a:t>
+              <a:t>29.04.2026</a:t>
             </a:fld>
             <a:endParaRPr lang="tr-TR"/>
           </a:p>
@@ -3929,7 +4068,7 @@
           <a:p>
             <a:fld id="{3EF59CCF-2F75-48E0-B827-F930E918C137}" type="datetimeFigureOut">
               <a:rPr lang="tr-TR" smtClean="0"/>
-              <a:t>26.04.2026</a:t>
+              <a:t>29.04.2026</a:t>
             </a:fld>
             <a:endParaRPr lang="tr-TR"/>
           </a:p>
@@ -4197,7 +4336,7 @@
           <a:p>
             <a:fld id="{3EF59CCF-2F75-48E0-B827-F930E918C137}" type="datetimeFigureOut">
               <a:rPr lang="tr-TR" smtClean="0"/>
-              <a:t>26.04.2026</a:t>
+              <a:t>29.04.2026</a:t>
             </a:fld>
             <a:endParaRPr lang="tr-TR"/>
           </a:p>
@@ -4612,7 +4751,7 @@
           <a:p>
             <a:fld id="{3EF59CCF-2F75-48E0-B827-F930E918C137}" type="datetimeFigureOut">
               <a:rPr lang="tr-TR" smtClean="0"/>
-              <a:t>26.04.2026</a:t>
+              <a:t>29.04.2026</a:t>
             </a:fld>
             <a:endParaRPr lang="tr-TR"/>
           </a:p>
@@ -4754,7 +4893,7 @@
           <a:p>
             <a:fld id="{3EF59CCF-2F75-48E0-B827-F930E918C137}" type="datetimeFigureOut">
               <a:rPr lang="tr-TR" smtClean="0"/>
-              <a:t>26.04.2026</a:t>
+              <a:t>29.04.2026</a:t>
             </a:fld>
             <a:endParaRPr lang="tr-TR"/>
           </a:p>
@@ -4867,7 +5006,7 @@
           <a:p>
             <a:fld id="{3EF59CCF-2F75-48E0-B827-F930E918C137}" type="datetimeFigureOut">
               <a:rPr lang="tr-TR" smtClean="0"/>
-              <a:t>26.04.2026</a:t>
+              <a:t>29.04.2026</a:t>
             </a:fld>
             <a:endParaRPr lang="tr-TR"/>
           </a:p>
@@ -5180,7 +5319,7 @@
           <a:p>
             <a:fld id="{3EF59CCF-2F75-48E0-B827-F930E918C137}" type="datetimeFigureOut">
               <a:rPr lang="tr-TR" smtClean="0"/>
-              <a:t>26.04.2026</a:t>
+              <a:t>29.04.2026</a:t>
             </a:fld>
             <a:endParaRPr lang="tr-TR"/>
           </a:p>
@@ -5469,7 +5608,7 @@
           <a:p>
             <a:fld id="{3EF59CCF-2F75-48E0-B827-F930E918C137}" type="datetimeFigureOut">
               <a:rPr lang="tr-TR" smtClean="0"/>
-              <a:t>26.04.2026</a:t>
+              <a:t>29.04.2026</a:t>
             </a:fld>
             <a:endParaRPr lang="tr-TR"/>
           </a:p>
@@ -5715,7 +5854,7 @@
           <a:p>
             <a:fld id="{3EF59CCF-2F75-48E0-B827-F930E918C137}" type="datetimeFigureOut">
               <a:rPr lang="tr-TR" smtClean="0"/>
-              <a:t>26.04.2026</a:t>
+              <a:t>29.04.2026</a:t>
             </a:fld>
             <a:endParaRPr lang="tr-TR"/>
           </a:p>
@@ -8695,7 +8834,7 @@
                 </a:solidFill>
                 <a:latin typeface="Consolas"/>
               </a:rPr>
-              <a:t>;</a:t>
+              <a:t>; //optional</a:t>
             </a:r>
           </a:p>
           <a:p>
@@ -10482,7 +10621,7 @@
                   <a:srgbClr val="475569"/>
                 </a:solidFill>
               </a:rPr>
-              <a:t>Always show the SQL. Let users verify before they believe.</a:t>
+              <a:t>Always show the SQL. Let users verify before they believe. And save</a:t>
             </a:r>
           </a:p>
         </p:txBody>
@@ -12441,6 +12580,198 @@
   <p:cSld>
     <p:spTree>
       <p:nvGrpSpPr>
+        <p:cNvPr id="1" name="">
+          <a:extLst>
+            <a:ext uri="{FF2B5EF4-FFF2-40B4-BE49-F238E27FC236}">
+              <a16:creationId xmlns:a16="http://schemas.microsoft.com/office/drawing/2014/main" id="{190DE38D-6D72-586F-A672-EC9CD8B062AF}"/>
+            </a:ext>
+          </a:extLst>
+        </p:cNvPr>
+        <p:cNvGrpSpPr/>
+        <p:nvPr/>
+      </p:nvGrpSpPr>
+      <p:grpSpPr>
+        <a:xfrm>
+          <a:off x="0" y="0"/>
+          <a:ext cx="0" cy="0"/>
+          <a:chOff x="0" y="0"/>
+          <a:chExt cx="0" cy="0"/>
+        </a:xfrm>
+      </p:grpSpPr>
+      <p:sp>
+        <p:nvSpPr>
+          <p:cNvPr id="7" name="Panel">
+            <a:extLst>
+              <a:ext uri="{FF2B5EF4-FFF2-40B4-BE49-F238E27FC236}">
+                <a16:creationId xmlns:a16="http://schemas.microsoft.com/office/drawing/2014/main" id="{B05FC43A-919B-6C85-31C9-D03E8F18B296}"/>
+              </a:ext>
+            </a:extLst>
+          </p:cNvPr>
+          <p:cNvSpPr/>
+          <p:nvPr/>
+        </p:nvSpPr>
+        <p:spPr>
+          <a:xfrm>
+            <a:off x="73026" y="2612571"/>
+            <a:ext cx="12118974" cy="3064329"/>
+          </a:xfrm>
+          <a:prstGeom prst="rect">
+            <a:avLst/>
+          </a:prstGeom>
+          <a:solidFill>
+            <a:srgbClr val="0F172A"/>
+          </a:solidFill>
+          <a:ln>
+            <a:noFill/>
+          </a:ln>
+        </p:spPr>
+        <p:txBody>
+          <a:bodyPr/>
+          <a:lstStyle/>
+          <a:p>
+            <a:endParaRPr lang="en-US" sz="3200"/>
+          </a:p>
+        </p:txBody>
+      </p:sp>
+      <p:sp>
+        <p:nvSpPr>
+          <p:cNvPr id="8" name="Q">
+            <a:extLst>
+              <a:ext uri="{FF2B5EF4-FFF2-40B4-BE49-F238E27FC236}">
+                <a16:creationId xmlns:a16="http://schemas.microsoft.com/office/drawing/2014/main" id="{B9C6DB59-7B03-2063-5030-5346636B1400}"/>
+              </a:ext>
+            </a:extLst>
+          </p:cNvPr>
+          <p:cNvSpPr txBox="1"/>
+          <p:nvPr/>
+        </p:nvSpPr>
+        <p:spPr>
+          <a:xfrm>
+            <a:off x="407987" y="1266825"/>
+            <a:ext cx="11376025" cy="1219200"/>
+          </a:xfrm>
+          <a:prstGeom prst="rect">
+            <a:avLst/>
+          </a:prstGeom>
+          <a:noFill/>
+        </p:spPr>
+        <p:txBody>
+          <a:bodyPr wrap="square" anchor="t"/>
+          <a:lstStyle/>
+          <a:p>
+            <a:pPr>
+              <a:lnSpc>
+                <a:spcPct val="105000"/>
+              </a:lnSpc>
+            </a:pPr>
+            <a:r>
+              <a:rPr lang="en-US" sz="7200" b="1" dirty="0">
+                <a:solidFill>
+                  <a:srgbClr val="0F172A"/>
+                </a:solidFill>
+              </a:rPr>
+              <a:t>1 step </a:t>
+            </a:r>
+            <a:r>
+              <a:rPr lang="en-US" sz="7200" b="1">
+                <a:solidFill>
+                  <a:srgbClr val="0F172A"/>
+                </a:solidFill>
+              </a:rPr>
+              <a:t>further </a:t>
+            </a:r>
+            <a:r>
+              <a:rPr lang="en-US" sz="6600" b="1">
+                <a:solidFill>
+                  <a:srgbClr val="0F172A"/>
+                </a:solidFill>
+              </a:rPr>
+              <a:t>🤔</a:t>
+            </a:r>
+            <a:endParaRPr lang="en-US" sz="6600" b="1" dirty="0">
+              <a:solidFill>
+                <a:srgbClr val="0F172A"/>
+              </a:solidFill>
+            </a:endParaRPr>
+          </a:p>
+        </p:txBody>
+      </p:sp>
+      <p:sp>
+        <p:nvSpPr>
+          <p:cNvPr id="9" name="Q">
+            <a:extLst>
+              <a:ext uri="{FF2B5EF4-FFF2-40B4-BE49-F238E27FC236}">
+                <a16:creationId xmlns:a16="http://schemas.microsoft.com/office/drawing/2014/main" id="{1AB057A2-73DE-48D4-8534-77FBCD65A14A}"/>
+              </a:ext>
+            </a:extLst>
+          </p:cNvPr>
+          <p:cNvSpPr txBox="1"/>
+          <p:nvPr/>
+        </p:nvSpPr>
+        <p:spPr>
+          <a:xfrm>
+            <a:off x="444500" y="2881312"/>
+            <a:ext cx="11376025" cy="2400300"/>
+          </a:xfrm>
+          <a:prstGeom prst="rect">
+            <a:avLst/>
+          </a:prstGeom>
+          <a:noFill/>
+        </p:spPr>
+        <p:txBody>
+          <a:bodyPr wrap="square" anchor="t"/>
+          <a:lstStyle/>
+          <a:p>
+            <a:pPr algn="l">
+              <a:lnSpc>
+                <a:spcPct val="105000"/>
+              </a:lnSpc>
+            </a:pPr>
+            <a:r>
+              <a:rPr lang="en-US" sz="6600" b="1" dirty="0">
+                <a:solidFill>
+                  <a:srgbClr val="FFFFFF"/>
+                </a:solidFill>
+              </a:rPr>
+              <a:t>How about </a:t>
+            </a:r>
+            <a:r>
+              <a:rPr lang="en-US" sz="6600" b="1" u="sng" dirty="0">
+                <a:solidFill>
+                  <a:srgbClr val="FFFFFF"/>
+                </a:solidFill>
+              </a:rPr>
+              <a:t>taking action</a:t>
+            </a:r>
+            <a:r>
+              <a:rPr lang="en-US" sz="6600" b="1" dirty="0">
+                <a:solidFill>
+                  <a:srgbClr val="FFFFFF"/>
+                </a:solidFill>
+              </a:rPr>
+              <a:t> instead of just reporting?!</a:t>
+            </a:r>
+          </a:p>
+        </p:txBody>
+      </p:sp>
+    </p:spTree>
+    <p:extLst>
+      <p:ext uri="{BB962C8B-B14F-4D97-AF65-F5344CB8AC3E}">
+        <p14:creationId xmlns:p14="http://schemas.microsoft.com/office/powerpoint/2010/main" val="1603450424"/>
+      </p:ext>
+    </p:extLst>
+  </p:cSld>
+  <p:clrMapOvr>
+    <a:masterClrMapping/>
+  </p:clrMapOvr>
+</p:sld>
+</file>
+
+<file path=ppt/slides/slide21.xml><?xml version="1.0" encoding="utf-8"?>
+<p:sld xmlns:a="http://schemas.openxmlformats.org/drawingml/2006/main" xmlns:r="http://schemas.openxmlformats.org/officeDocument/2006/relationships" xmlns:p="http://schemas.openxmlformats.org/presentationml/2006/main">
+  <p:cSld>
+    <p:spTree>
+      <p:nvGrpSpPr>
         <p:cNvPr id="1" name=""/>
         <p:cNvGrpSpPr/>
         <p:nvPr/>
@@ -13689,7 +14020,23 @@
                   <a:srgbClr val="475569"/>
                 </a:solidFill>
               </a:rPr>
-              <a:t>Five capabilities working together</a:t>
+              <a:t>Main steps of </a:t>
+            </a:r>
+            <a:r>
+              <a:rPr lang="en-US" dirty="0">
+                <a:solidFill>
+                  <a:srgbClr val="475569"/>
+                </a:solidFill>
+              </a:rPr>
+              <a:t>the </a:t>
+            </a:r>
+            <a:r>
+              <a:rPr lang="en-US" sz="1800" dirty="0">
+                <a:solidFill>
+                  <a:srgbClr val="475569"/>
+                </a:solidFill>
+              </a:rPr>
+              <a:t>solution</a:t>
             </a:r>
           </a:p>
         </p:txBody>
@@ -14609,7 +14956,10 @@
             <a:r>
               <a:rPr lang="en-US" sz="1200" b="1" spc="300" dirty="0">
                 <a:solidFill>
-                  <a:srgbClr val="0891B2"/>
+                  <a:schemeClr val="accent6">
+                    <a:lumMod val="90000"/>
+                    <a:lumOff val="10000"/>
+                  </a:schemeClr>
                 </a:solidFill>
               </a:rPr>
               <a:t>02</a:t>
@@ -14622,11 +14972,7 @@
               </a:spcBef>
             </a:pPr>
             <a:r>
-              <a:rPr lang="en-US" sz="2400" b="1" dirty="0">
-                <a:solidFill>
-                  <a:srgbClr val="0F172A"/>
-                </a:solidFill>
-              </a:rPr>
+              <a:rPr lang="en-US" sz="2400" b="1" dirty="0"/>
               <a:t>Prompt</a:t>
             </a:r>
           </a:p>
@@ -15084,7 +15430,7 @@
                   <a:srgbClr val="64748B"/>
                 </a:solidFill>
               </a:rPr>
-              <a:t>Results </a:t>
+              <a:t>results </a:t>
             </a:r>
           </a:p>
         </p:txBody>
@@ -15476,8 +15822,8 @@
         </p:nvSpPr>
         <p:spPr>
           <a:xfrm>
-            <a:off x="635000" y="1524000"/>
-            <a:ext cx="5334000" cy="4064000"/>
+            <a:off x="635000" y="1466850"/>
+            <a:ext cx="5334000" cy="4438650"/>
           </a:xfrm>
           <a:prstGeom prst="roundRect">
             <a:avLst>
@@ -15587,7 +15933,41 @@
                   <a:srgbClr val="334155"/>
                 </a:solidFill>
               </a:rPr>
+              <a:t>Enum Values</a:t>
+            </a:r>
+          </a:p>
+          <a:p>
+            <a:pPr marL="228600" indent="-228600">
+              <a:spcBef>
+                <a:spcPts val="400"/>
+              </a:spcBef>
+              <a:buFont typeface="Arial"/>
+              <a:buChar char="•"/>
+            </a:pPr>
+            <a:r>
+              <a:rPr lang="en-US" sz="2400" dirty="0">
+                <a:solidFill>
+                  <a:srgbClr val="334155"/>
+                </a:solidFill>
+              </a:rPr>
               <a:t>Optional: sample values</a:t>
+            </a:r>
+          </a:p>
+          <a:p>
+            <a:pPr marL="228600" indent="-228600">
+              <a:spcBef>
+                <a:spcPts val="400"/>
+              </a:spcBef>
+              <a:buFont typeface="Arial"/>
+              <a:buChar char="•"/>
+            </a:pPr>
+            <a:r>
+              <a:rPr lang="en-US" sz="2400" dirty="0">
+                <a:solidFill>
+                  <a:srgbClr val="334155"/>
+                </a:solidFill>
+              </a:rPr>
+              <a:t>Optional: extra DDL info</a:t>
             </a:r>
             <a:br>
               <a:rPr lang="en-US" sz="2400" dirty="0">
@@ -15627,8 +16007,8 @@
         </p:nvSpPr>
         <p:spPr>
           <a:xfrm>
-            <a:off x="6223000" y="1524000"/>
-            <a:ext cx="5334000" cy="4064000"/>
+            <a:off x="6223000" y="1466850"/>
+            <a:ext cx="5334000" cy="4438650"/>
           </a:xfrm>
           <a:prstGeom prst="roundRect">
             <a:avLst>
@@ -15781,38 +16161,6 @@
                 <a:latin typeface="Consolas"/>
               </a:rPr>
               <a:t>• Use the schema above</a:t>
-            </a:r>
-          </a:p>
-        </p:txBody>
-      </p:sp>
-      <p:sp>
-        <p:nvSpPr>
-          <p:cNvPr id="402" name="Note"/>
-          <p:cNvSpPr txBox="1"/>
-          <p:nvPr/>
-        </p:nvSpPr>
-        <p:spPr>
-          <a:xfrm>
-            <a:off x="889000" y="5791200"/>
-            <a:ext cx="10414000" cy="381000"/>
-          </a:xfrm>
-          <a:prstGeom prst="rect">
-            <a:avLst/>
-          </a:prstGeom>
-          <a:noFill/>
-        </p:spPr>
-        <p:txBody>
-          <a:bodyPr wrap="square" anchor="t"/>
-          <a:lstStyle/>
-          <a:p>
-            <a:pPr algn="ctr"/>
-            <a:r>
-              <a:rPr lang="en-US" i="1" dirty="0">
-                <a:solidFill>
-                  <a:srgbClr val="64748B"/>
-                </a:solidFill>
-              </a:rPr>
-              <a:t>Good schema + strict prompt = reliable SQL</a:t>
             </a:r>
           </a:p>
         </p:txBody>

--- a/Presentation.pptx
+++ b/Presentation.pptx
@@ -217,7 +217,7 @@
           <a:p>
             <a:fld id="{BC660078-77E7-46A7-9649-B3FD62DAD7B9}" type="datetimeFigureOut">
               <a:rPr lang="tr-TR" smtClean="0"/>
-              <a:t>29.04.2026</a:t>
+              <a:t>30.04.2026</a:t>
             </a:fld>
             <a:endParaRPr lang="tr-TR"/>
           </a:p>
@@ -576,8 +576,209 @@
           <a:p>
             <a:r>
               <a:rPr lang="en-US" dirty="0"/>
-              <a:t>[TRANSITION] 'That's exactly the problem we're solving.'</a:t>
-            </a:r>
+              <a:t>[TRANSITION] 'That's exactly the problem we're solving.’</a:t>
+            </a:r>
+          </a:p>
+          <a:p>
+            <a:r>
+              <a:rPr lang="en-US"/>
+              <a:t>//////////////////////////</a:t>
+            </a:r>
+            <a:endParaRPr lang="en-US" dirty="0"/>
+          </a:p>
+          <a:p>
+            <a:endParaRPr lang="en-US" dirty="0"/>
+          </a:p>
+          <a:p>
+            <a:r>
+              <a:rPr lang="en-US" dirty="0"/>
+              <a:t>5. slide </a:t>
+            </a:r>
+            <a:r>
+              <a:rPr lang="en-US" dirty="0" err="1"/>
+              <a:t>sil</a:t>
+            </a:r>
+            <a:endParaRPr lang="en-US" dirty="0"/>
+          </a:p>
+          <a:p>
+            <a:r>
+              <a:rPr lang="en-US" dirty="0"/>
+              <a:t>6. </a:t>
+            </a:r>
+            <a:r>
+              <a:rPr lang="en-US" dirty="0" err="1"/>
+              <a:t>sil</a:t>
+            </a:r>
+            <a:endParaRPr lang="en-US" dirty="0"/>
+          </a:p>
+          <a:p>
+            <a:r>
+              <a:rPr lang="en-US" dirty="0"/>
+              <a:t>8. daha </a:t>
+            </a:r>
+            <a:r>
+              <a:rPr lang="en-US" dirty="0" err="1"/>
+              <a:t>az</a:t>
+            </a:r>
+            <a:r>
+              <a:rPr lang="en-US" dirty="0"/>
+              <a:t> zaman</a:t>
+            </a:r>
+          </a:p>
+          <a:p>
+            <a:r>
+              <a:rPr lang="en-US" dirty="0"/>
+              <a:t>9. </a:t>
+            </a:r>
+            <a:r>
+              <a:rPr lang="en-US" dirty="0" err="1"/>
+              <a:t>ile</a:t>
+            </a:r>
+            <a:r>
+              <a:rPr lang="en-US" dirty="0"/>
+              <a:t> 6. </a:t>
+            </a:r>
+            <a:r>
+              <a:rPr lang="en-US" dirty="0" err="1"/>
+              <a:t>yer</a:t>
+            </a:r>
+            <a:r>
+              <a:rPr lang="en-US" dirty="0"/>
+              <a:t> </a:t>
+            </a:r>
+            <a:r>
+              <a:rPr lang="en-US" dirty="0" err="1"/>
+              <a:t>değiştir</a:t>
+            </a:r>
+            <a:endParaRPr lang="en-US" dirty="0"/>
+          </a:p>
+          <a:p>
+            <a:r>
+              <a:rPr lang="en-US" dirty="0"/>
+              <a:t>12. 15. 16. 17. </a:t>
+            </a:r>
+            <a:r>
+              <a:rPr lang="en-US" dirty="0" err="1"/>
+              <a:t>sil</a:t>
+            </a:r>
+            <a:endParaRPr lang="en-US" dirty="0"/>
+          </a:p>
+          <a:p>
+            <a:endParaRPr lang="en-US" dirty="0"/>
+          </a:p>
+          <a:p>
+            <a:endParaRPr lang="en-US" dirty="0"/>
+          </a:p>
+          <a:p>
+            <a:r>
+              <a:rPr lang="en-US" dirty="0"/>
+              <a:t>7 slide 10sn </a:t>
+            </a:r>
+            <a:r>
+              <a:rPr lang="en-US" dirty="0" err="1"/>
+              <a:t>göster</a:t>
+            </a:r>
+            <a:endParaRPr lang="en-US" dirty="0"/>
+          </a:p>
+          <a:p>
+            <a:r>
+              <a:rPr lang="en-US" dirty="0" err="1"/>
+              <a:t>sunum</a:t>
+            </a:r>
+            <a:r>
+              <a:rPr lang="en-US" dirty="0"/>
+              <a:t> </a:t>
+            </a:r>
+            <a:r>
+              <a:rPr lang="en-US" dirty="0" err="1"/>
+              <a:t>tarafını</a:t>
+            </a:r>
+            <a:r>
+              <a:rPr lang="en-US" dirty="0"/>
+              <a:t> </a:t>
+            </a:r>
+            <a:r>
+              <a:rPr lang="en-US" dirty="0" err="1"/>
+              <a:t>mümkün</a:t>
+            </a:r>
+            <a:r>
+              <a:rPr lang="en-US" dirty="0"/>
+              <a:t> </a:t>
+            </a:r>
+            <a:r>
+              <a:rPr lang="en-US" dirty="0" err="1"/>
+              <a:t>olduğunca</a:t>
+            </a:r>
+            <a:r>
+              <a:rPr lang="en-US" dirty="0"/>
+              <a:t> </a:t>
+            </a:r>
+            <a:r>
+              <a:rPr lang="en-US" dirty="0" err="1"/>
+              <a:t>azalt</a:t>
+            </a:r>
+            <a:endParaRPr lang="en-US" dirty="0"/>
+          </a:p>
+          <a:p>
+            <a:r>
+              <a:rPr lang="en-US" dirty="0"/>
+              <a:t>console </a:t>
+            </a:r>
+            <a:r>
+              <a:rPr lang="en-US" dirty="0" err="1"/>
+              <a:t>uygulamasını</a:t>
+            </a:r>
+            <a:r>
+              <a:rPr lang="en-US" dirty="0"/>
+              <a:t> 1 </a:t>
+            </a:r>
+            <a:r>
+              <a:rPr lang="en-US" dirty="0" err="1"/>
+              <a:t>kez</a:t>
+            </a:r>
+            <a:r>
+              <a:rPr lang="en-US" dirty="0"/>
+              <a:t> </a:t>
+            </a:r>
+            <a:r>
+              <a:rPr lang="en-US" dirty="0" err="1"/>
+              <a:t>çalıştır</a:t>
+            </a:r>
+            <a:endParaRPr lang="en-US" dirty="0"/>
+          </a:p>
+          <a:p>
+            <a:r>
+              <a:rPr lang="en-US" dirty="0" err="1"/>
+              <a:t>soru</a:t>
+            </a:r>
+            <a:r>
+              <a:rPr lang="en-US" dirty="0"/>
+              <a:t> </a:t>
+            </a:r>
+            <a:r>
+              <a:rPr lang="en-US" dirty="0" err="1"/>
+              <a:t>seçimlerini</a:t>
+            </a:r>
+            <a:r>
+              <a:rPr lang="en-US" dirty="0"/>
+              <a:t> </a:t>
+            </a:r>
+            <a:r>
+              <a:rPr lang="en-US" dirty="0" err="1"/>
+              <a:t>baştan</a:t>
+            </a:r>
+            <a:r>
+              <a:rPr lang="en-US" dirty="0"/>
+              <a:t> </a:t>
+            </a:r>
+            <a:r>
+              <a:rPr lang="en-US" dirty="0" err="1"/>
+              <a:t>ayarla</a:t>
+            </a:r>
+            <a:endParaRPr lang="en-US" dirty="0"/>
+          </a:p>
+          <a:p>
+            <a:endParaRPr lang="en-US" dirty="0"/>
           </a:p>
         </p:txBody>
       </p:sp>
@@ -3182,7 +3383,7 @@
           <a:p>
             <a:fld id="{3EF59CCF-2F75-48E0-B827-F930E918C137}" type="datetimeFigureOut">
               <a:rPr lang="tr-TR" smtClean="0"/>
-              <a:t>29.04.2026</a:t>
+              <a:t>30.04.2026</a:t>
             </a:fld>
             <a:endParaRPr lang="tr-TR"/>
           </a:p>
@@ -3382,7 +3583,7 @@
           <a:p>
             <a:fld id="{3EF59CCF-2F75-48E0-B827-F930E918C137}" type="datetimeFigureOut">
               <a:rPr lang="tr-TR" smtClean="0"/>
-              <a:t>29.04.2026</a:t>
+              <a:t>30.04.2026</a:t>
             </a:fld>
             <a:endParaRPr lang="tr-TR"/>
           </a:p>
@@ -3592,7 +3793,7 @@
           <a:p>
             <a:fld id="{3EF59CCF-2F75-48E0-B827-F930E918C137}" type="datetimeFigureOut">
               <a:rPr lang="tr-TR" smtClean="0"/>
-              <a:t>29.04.2026</a:t>
+              <a:t>30.04.2026</a:t>
             </a:fld>
             <a:endParaRPr lang="tr-TR"/>
           </a:p>
@@ -3792,7 +3993,7 @@
           <a:p>
             <a:fld id="{3EF59CCF-2F75-48E0-B827-F930E918C137}" type="datetimeFigureOut">
               <a:rPr lang="tr-TR" smtClean="0"/>
-              <a:t>29.04.2026</a:t>
+              <a:t>30.04.2026</a:t>
             </a:fld>
             <a:endParaRPr lang="tr-TR"/>
           </a:p>
@@ -4068,7 +4269,7 @@
           <a:p>
             <a:fld id="{3EF59CCF-2F75-48E0-B827-F930E918C137}" type="datetimeFigureOut">
               <a:rPr lang="tr-TR" smtClean="0"/>
-              <a:t>29.04.2026</a:t>
+              <a:t>30.04.2026</a:t>
             </a:fld>
             <a:endParaRPr lang="tr-TR"/>
           </a:p>
@@ -4336,7 +4537,7 @@
           <a:p>
             <a:fld id="{3EF59CCF-2F75-48E0-B827-F930E918C137}" type="datetimeFigureOut">
               <a:rPr lang="tr-TR" smtClean="0"/>
-              <a:t>29.04.2026</a:t>
+              <a:t>30.04.2026</a:t>
             </a:fld>
             <a:endParaRPr lang="tr-TR"/>
           </a:p>
@@ -4751,7 +4952,7 @@
           <a:p>
             <a:fld id="{3EF59CCF-2F75-48E0-B827-F930E918C137}" type="datetimeFigureOut">
               <a:rPr lang="tr-TR" smtClean="0"/>
-              <a:t>29.04.2026</a:t>
+              <a:t>30.04.2026</a:t>
             </a:fld>
             <a:endParaRPr lang="tr-TR"/>
           </a:p>
@@ -4893,7 +5094,7 @@
           <a:p>
             <a:fld id="{3EF59CCF-2F75-48E0-B827-F930E918C137}" type="datetimeFigureOut">
               <a:rPr lang="tr-TR" smtClean="0"/>
-              <a:t>29.04.2026</a:t>
+              <a:t>30.04.2026</a:t>
             </a:fld>
             <a:endParaRPr lang="tr-TR"/>
           </a:p>
@@ -5006,7 +5207,7 @@
           <a:p>
             <a:fld id="{3EF59CCF-2F75-48E0-B827-F930E918C137}" type="datetimeFigureOut">
               <a:rPr lang="tr-TR" smtClean="0"/>
-              <a:t>29.04.2026</a:t>
+              <a:t>30.04.2026</a:t>
             </a:fld>
             <a:endParaRPr lang="tr-TR"/>
           </a:p>
@@ -5319,7 +5520,7 @@
           <a:p>
             <a:fld id="{3EF59CCF-2F75-48E0-B827-F930E918C137}" type="datetimeFigureOut">
               <a:rPr lang="tr-TR" smtClean="0"/>
-              <a:t>29.04.2026</a:t>
+              <a:t>30.04.2026</a:t>
             </a:fld>
             <a:endParaRPr lang="tr-TR"/>
           </a:p>
@@ -5608,7 +5809,7 @@
           <a:p>
             <a:fld id="{3EF59CCF-2F75-48E0-B827-F930E918C137}" type="datetimeFigureOut">
               <a:rPr lang="tr-TR" smtClean="0"/>
-              <a:t>29.04.2026</a:t>
+              <a:t>30.04.2026</a:t>
             </a:fld>
             <a:endParaRPr lang="tr-TR"/>
           </a:p>
@@ -5854,7 +6055,7 @@
           <a:p>
             <a:fld id="{3EF59CCF-2F75-48E0-B827-F930E918C137}" type="datetimeFigureOut">
               <a:rPr lang="tr-TR" smtClean="0"/>
-              <a:t>29.04.2026</a:t>
+              <a:t>30.04.2026</a:t>
             </a:fld>
             <a:endParaRPr lang="tr-TR"/>
           </a:p>
@@ -8631,8 +8832,8 @@
         </p:nvSpPr>
         <p:spPr>
           <a:xfrm>
-            <a:off x="635000" y="1651000"/>
-            <a:ext cx="10515600" cy="4064000"/>
+            <a:off x="635000" y="1940367"/>
+            <a:ext cx="10515600" cy="3355051"/>
           </a:xfrm>
           <a:prstGeom prst="roundRect">
             <a:avLst>
@@ -8801,40 +9002,6 @@
                 <a:latin typeface="Consolas"/>
               </a:rPr>
               <a:t>}</a:t>
-            </a:r>
-          </a:p>
-          <a:p>
-            <a:pPr>
-              <a:spcBef>
-                <a:spcPts val="200"/>
-              </a:spcBef>
-            </a:pPr>
-            <a:r>
-              <a:rPr lang="en-US" sz="3200" dirty="0">
-                <a:solidFill>
-                  <a:srgbClr val="E2E8F0"/>
-                </a:solidFill>
-                <a:latin typeface="Consolas"/>
-              </a:rPr>
-              <a:t>    opt.ReadOnly      = </a:t>
-            </a:r>
-            <a:r>
-              <a:rPr lang="en-US" sz="3200" dirty="0">
-                <a:solidFill>
-                  <a:srgbClr val="A78BFA"/>
-                </a:solidFill>
-                <a:latin typeface="Consolas"/>
-              </a:rPr>
-              <a:t>true</a:t>
-            </a:r>
-            <a:r>
-              <a:rPr lang="en-US" sz="3200" dirty="0">
-                <a:solidFill>
-                  <a:srgbClr val="E2E8F0"/>
-                </a:solidFill>
-                <a:latin typeface="Consolas"/>
-              </a:rPr>
-              <a:t>; //optional</a:t>
             </a:r>
           </a:p>
           <a:p>
@@ -10758,7 +10925,7 @@
         </p:nvSpPr>
         <p:spPr>
           <a:xfrm>
-            <a:off x="562430" y="1651000"/>
+            <a:off x="562430" y="1853554"/>
             <a:ext cx="3600000" cy="1944000"/>
           </a:xfrm>
           <a:prstGeom prst="roundRect">
@@ -10822,7 +10989,7 @@
         </p:nvSpPr>
         <p:spPr>
           <a:xfrm>
-            <a:off x="4236525" y="1651000"/>
+            <a:off x="4236525" y="1853554"/>
             <a:ext cx="3600000" cy="1944000"/>
           </a:xfrm>
           <a:prstGeom prst="roundRect">
@@ -10886,7 +11053,7 @@
         </p:nvSpPr>
         <p:spPr>
           <a:xfrm>
-            <a:off x="7910620" y="1651000"/>
+            <a:off x="7910620" y="1853554"/>
             <a:ext cx="3600000" cy="1944000"/>
           </a:xfrm>
           <a:prstGeom prst="roundRect">
@@ -10950,7 +11117,7 @@
         </p:nvSpPr>
         <p:spPr>
           <a:xfrm>
-            <a:off x="562430" y="3643417"/>
+            <a:off x="562430" y="4094829"/>
             <a:ext cx="3600000" cy="1944000"/>
           </a:xfrm>
           <a:prstGeom prst="roundRect">
@@ -11014,7 +11181,7 @@
         </p:nvSpPr>
         <p:spPr>
           <a:xfrm>
-            <a:off x="4236525" y="3643417"/>
+            <a:off x="4236525" y="4094829"/>
             <a:ext cx="3600000" cy="1944000"/>
           </a:xfrm>
           <a:prstGeom prst="roundRect">
@@ -11086,7 +11253,7 @@
         </p:nvSpPr>
         <p:spPr>
           <a:xfrm>
-            <a:off x="7910620" y="3643417"/>
+            <a:off x="7910620" y="4094829"/>
             <a:ext cx="3600000" cy="1944000"/>
           </a:xfrm>
           <a:prstGeom prst="roundRect">
@@ -11138,59 +11305,6 @@
                 </a:solidFill>
               </a:rPr>
               <a:t>"Top 20 SKUs by margin this year."</a:t>
-            </a:r>
-          </a:p>
-        </p:txBody>
-      </p:sp>
-      <p:sp>
-        <p:nvSpPr>
-          <p:cNvPr id="3" name="BQ">
-            <a:extLst>
-              <a:ext uri="{FF2B5EF4-FFF2-40B4-BE49-F238E27FC236}">
-                <a16:creationId xmlns:a16="http://schemas.microsoft.com/office/drawing/2014/main" id="{3922238F-AA9D-112C-25C6-0B9544A29EDE}"/>
-              </a:ext>
-            </a:extLst>
-          </p:cNvPr>
-          <p:cNvSpPr/>
-          <p:nvPr/>
-        </p:nvSpPr>
-        <p:spPr>
-          <a:xfrm>
-            <a:off x="843147" y="5388429"/>
-            <a:ext cx="10307453" cy="927430"/>
-          </a:xfrm>
-          <a:prstGeom prst="roundRect">
-            <a:avLst>
-              <a:gd name="adj" fmla="val 50000"/>
-            </a:avLst>
-          </a:prstGeom>
-          <a:solidFill>
-            <a:srgbClr val="F1F5F9"/>
-          </a:solidFill>
-          <a:ln>
-            <a:noFill/>
-          </a:ln>
-        </p:spPr>
-        <p:txBody>
-          <a:bodyPr wrap="square" lIns="180000" tIns="0" rIns="180000" bIns="0" anchor="ctr"/>
-          <a:lstStyle/>
-          <a:p>
-            <a:pPr algn="ctr"/>
-            <a:r>
-              <a:rPr lang="en-US" sz="2400" b="1" dirty="0">
-                <a:solidFill>
-                  <a:srgbClr val="475569"/>
-                </a:solidFill>
-              </a:rPr>
-              <a:t>Hold-on!</a:t>
-            </a:r>
-            <a:r>
-              <a:rPr lang="en-US" sz="2400" dirty="0">
-                <a:solidFill>
-                  <a:srgbClr val="475569"/>
-                </a:solidFill>
-              </a:rPr>
-              <a:t> How about actual works instead of just reporting!</a:t>
             </a:r>
           </a:p>
         </p:txBody>

--- a/Presentation.pptx
+++ b/Presentation.pptx
@@ -581,10 +581,9 @@
           </a:p>
           <a:p>
             <a:r>
-              <a:rPr lang="en-US"/>
+              <a:rPr lang="en-US" dirty="0"/>
               <a:t>//////////////////////////</a:t>
             </a:r>
-            <a:endParaRPr lang="en-US" dirty="0"/>
           </a:p>
           <a:p>
             <a:endParaRPr lang="en-US" dirty="0"/>
@@ -779,6 +778,48 @@
           </a:p>
           <a:p>
             <a:endParaRPr lang="en-US" dirty="0"/>
+          </a:p>
+          <a:p>
+            <a:endParaRPr lang="en-US" dirty="0"/>
+          </a:p>
+          <a:p>
+            <a:r>
+              <a:rPr lang="en-US" b="1" dirty="0" err="1"/>
+              <a:t>Başlangıçta</a:t>
+            </a:r>
+            <a:r>
+              <a:rPr lang="en-US" b="1" dirty="0"/>
+              <a:t> </a:t>
+            </a:r>
+            <a:r>
+              <a:rPr lang="en-US" b="1" dirty="0" err="1"/>
+              <a:t>aç</a:t>
+            </a:r>
+            <a:r>
+              <a:rPr lang="en-US" b="1" dirty="0"/>
+              <a:t> -&gt;</a:t>
+            </a:r>
+            <a:br>
+              <a:rPr lang="en-US" dirty="0"/>
+            </a:br>
+            <a:r>
+              <a:rPr lang="en-US" dirty="0"/>
+              <a:t>D:\github\alper\chat-with-your-data-conference\Chat.Console\bin\Debug\net10.0\Output</a:t>
+            </a:r>
+            <a:br>
+              <a:rPr lang="en-US" dirty="0"/>
+            </a:br>
+            <a:r>
+              <a:rPr lang="en-US" dirty="0"/>
+              <a:t>how-to-get-your-db-schema.png </a:t>
+            </a:r>
+            <a:br>
+              <a:rPr lang="en-US" dirty="0"/>
+            </a:br>
+            <a:r>
+              <a:rPr lang="en-US" dirty="0"/>
+              <a:t>DB Browser</a:t>
+            </a:r>
           </a:p>
         </p:txBody>
       </p:sp>

--- a/Presentation.pptx
+++ b/Presentation.pptx
@@ -2474,70 +2474,146 @@
               <a:defRPr/>
             </a:pPr>
             <a:r>
-              <a:rPr lang="en-US" sz="1200" i="1" dirty="0">
-                <a:solidFill>
-                  <a:srgbClr val="0891B2"/>
-                </a:solidFill>
-              </a:rPr>
-              <a:t>Now imagine your PM doing that… </a:t>
-            </a:r>
-            <a:r>
-              <a:rPr lang="en-US" sz="1200" b="1" i="1" dirty="0">
-                <a:solidFill>
-                  <a:srgbClr val="0891B2"/>
-                </a:solidFill>
-              </a:rPr>
-              <a:t>without you</a:t>
-            </a:r>
-            <a:r>
-              <a:rPr lang="en-US" sz="1200" i="1" dirty="0">
-                <a:solidFill>
-                  <a:srgbClr val="0891B2"/>
-                </a:solidFill>
-              </a:rPr>
-              <a:t>.</a:t>
-            </a:r>
-          </a:p>
-          <a:p>
+              <a:rPr lang="en-US" sz="1200" b="1" dirty="0">
+                <a:solidFill>
+                  <a:srgbClr val="0F172A"/>
+                </a:solidFill>
+                <a:sym typeface="Wingdings" panose="05000000000000000000" pitchFamily="2" charset="2"/>
+              </a:rPr>
+              <a:t> </a:t>
+            </a:r>
+            <a:r>
+              <a:rPr lang="en-US" sz="1200" b="1" dirty="0">
+                <a:solidFill>
+                  <a:srgbClr val="0F172A"/>
+                </a:solidFill>
+              </a:rPr>
+              <a:t>How many of you have written SQL before?</a:t>
+            </a:r>
+          </a:p>
+          <a:p>
+            <a:pPr marL="0" marR="0" lvl="0" indent="0" algn="l" defTabSz="914400" rtl="0" eaLnBrk="1" fontAlgn="auto" latinLnBrk="0" hangingPunct="1">
+              <a:lnSpc>
+                <a:spcPct val="100000"/>
+              </a:lnSpc>
+              <a:spcBef>
+                <a:spcPts val="0"/>
+              </a:spcBef>
+              <a:spcAft>
+                <a:spcPts val="0"/>
+              </a:spcAft>
+              <a:buClrTx/>
+              <a:buSzTx/>
+              <a:buFontTx/>
+              <a:buNone/>
+              <a:tabLst/>
+              <a:defRPr/>
+            </a:pPr>
             <a:endParaRPr lang="en-US" dirty="0"/>
           </a:p>
           <a:p>
-            <a:r>
-              <a:rPr lang="en-US" dirty="0"/>
-              <a:t>Walk them through each pain point briefly — don't read every word on the slide, just tap each one:</a:t>
-            </a:r>
-          </a:p>
-          <a:p>
+            <a:pPr marL="0" marR="0" lvl="0" indent="0" algn="l" defTabSz="914400" rtl="0" eaLnBrk="1" fontAlgn="auto" latinLnBrk="0" hangingPunct="1">
+              <a:lnSpc>
+                <a:spcPct val="100000"/>
+              </a:lnSpc>
+              <a:spcBef>
+                <a:spcPts val="0"/>
+              </a:spcBef>
+              <a:spcAft>
+                <a:spcPts val="0"/>
+              </a:spcAft>
+              <a:buClrTx/>
+              <a:buSzTx/>
+              <a:buFontTx/>
+              <a:buNone/>
+              <a:tabLst/>
+              <a:defRPr/>
+            </a:pPr>
+            <a:r>
+              <a:rPr lang="en-US" dirty="0"/>
+              <a:t>1. Traditional BI tools are rigid — every new question needs a new report</a:t>
+            </a:r>
+          </a:p>
+          <a:p>
+            <a:pPr marL="0" marR="0" lvl="0" indent="0" algn="l" defTabSz="914400" rtl="0" eaLnBrk="1" fontAlgn="auto" latinLnBrk="0" hangingPunct="1">
+              <a:lnSpc>
+                <a:spcPct val="100000"/>
+              </a:lnSpc>
+              <a:spcBef>
+                <a:spcPts val="0"/>
+              </a:spcBef>
+              <a:spcAft>
+                <a:spcPts val="0"/>
+              </a:spcAft>
+              <a:buClrTx/>
+              <a:buSzTx/>
+              <a:buFontTx/>
+              <a:buNone/>
+              <a:tabLst/>
+              <a:defRPr/>
+            </a:pPr>
+            <a:r>
+              <a:rPr lang="en-US" dirty="0"/>
+              <a:t>2. </a:t>
+            </a:r>
+          </a:p>
+          <a:p>
+            <a:pPr marL="0" marR="0" lvl="0" indent="0" algn="l" defTabSz="914400" rtl="0" eaLnBrk="1" fontAlgn="auto" latinLnBrk="0" hangingPunct="1">
+              <a:lnSpc>
+                <a:spcPct val="100000"/>
+              </a:lnSpc>
+              <a:spcBef>
+                <a:spcPts val="0"/>
+              </a:spcBef>
+              <a:spcAft>
+                <a:spcPts val="0"/>
+              </a:spcAft>
+              <a:buClrTx/>
+              <a:buSzTx/>
+              <a:buFontTx/>
+              <a:buNone/>
+              <a:tabLst/>
+              <a:defRPr/>
+            </a:pPr>
+            <a:r>
+              <a:rPr lang="en-US" dirty="0"/>
+              <a:t>- Business users wait days for answers they could have in seconds</a:t>
+            </a:r>
+          </a:p>
+          <a:p>
+            <a:pPr marL="0" indent="0">
+              <a:buFontTx/>
+              <a:buNone/>
+            </a:pPr>
             <a:r>
               <a:rPr lang="en-US" dirty="0"/>
               <a:t>- SQL is slow to write, especially for ad-hoc questions</a:t>
             </a:r>
           </a:p>
           <a:p>
-            <a:r>
-              <a:rPr lang="en-US" dirty="0"/>
-              <a:t>- Business users wait days for answers they could have in seconds</a:t>
-            </a:r>
-          </a:p>
-          <a:p>
-            <a:r>
-              <a:rPr lang="en-US" dirty="0"/>
-              <a:t>- Traditional BI tools are rigid — every new question needs a new report</a:t>
-            </a:r>
-          </a:p>
-          <a:p>
-            <a:r>
-              <a:rPr lang="en-US" dirty="0"/>
-              <a:t>- And the result: data is locked behind technical gatekeepers</a:t>
-            </a:r>
-          </a:p>
-          <a:p>
+            <a:pPr marL="0" indent="0">
+              <a:buFontTx/>
+              <a:buNone/>
+            </a:pPr>
+            <a:r>
+              <a:rPr lang="en-US" dirty="0"/>
+              <a:t>- Test, Deployment needs after new report screen.</a:t>
+            </a:r>
+          </a:p>
+          <a:p>
+            <a:pPr marL="0" indent="0">
+              <a:buFontTx/>
+              <a:buNone/>
+            </a:pPr>
             <a:endParaRPr lang="en-US" dirty="0"/>
           </a:p>
           <a:p>
-            <a:r>
-              <a:rPr lang="en-US" dirty="0"/>
-              <a:t>[EMPHASIZE] 'We are the bottleneck. And today we are going to remove ourselves.'</a:t>
+            <a:endParaRPr lang="en-US" dirty="0"/>
+          </a:p>
+          <a:p>
+            <a:r>
+              <a:rPr lang="en-US" b="1" dirty="0"/>
+              <a:t>We, developers are the bottleneck. And today we are going to remove ourselves.</a:t>
             </a:r>
           </a:p>
           <a:p>
@@ -9306,7 +9382,7 @@
         <p:spPr>
           <a:xfrm>
             <a:off x="1016000" y="1875027"/>
-            <a:ext cx="2930596" cy="558799"/>
+            <a:ext cx="5270500" cy="558799"/>
           </a:xfrm>
           <a:prstGeom prst="rect">
             <a:avLst/>
@@ -9314,7 +9390,7 @@
         </p:spPr>
         <p:txBody>
           <a:bodyPr>
-            <a:normAutofit/>
+            <a:normAutofit fontScale="92500"/>
           </a:bodyPr>
           <a:lstStyle>
             <a:lvl1pPr marL="228600" indent="-228600" algn="l" defTabSz="914400" rtl="0" eaLnBrk="1" latinLnBrk="0" hangingPunct="1">
@@ -9491,7 +9567,7 @@
                   <a:srgbClr val="22D3EE"/>
                 </a:solidFill>
               </a:rPr>
-              <a:t>PART 2</a:t>
+              <a:t>TALK TO YOUR DATA</a:t>
             </a:r>
           </a:p>
         </p:txBody>
@@ -9510,8 +9586,8 @@
         </p:nvSpPr>
         <p:spPr>
           <a:xfrm>
-            <a:off x="1114631" y="1784351"/>
-            <a:ext cx="1224000" cy="76200"/>
+            <a:off x="1095581" y="1784351"/>
+            <a:ext cx="4860000" cy="76200"/>
           </a:xfrm>
           <a:prstGeom prst="rect">
             <a:avLst/>
@@ -12767,7 +12843,7 @@
         </p:nvSpPr>
         <p:spPr>
           <a:xfrm>
-            <a:off x="73026" y="2612571"/>
+            <a:off x="73026" y="2822121"/>
             <a:ext cx="12118974" cy="3064329"/>
           </a:xfrm>
           <a:prstGeom prst="rect">
@@ -12802,8 +12878,8 @@
         </p:nvSpPr>
         <p:spPr>
           <a:xfrm>
-            <a:off x="407987" y="1266825"/>
-            <a:ext cx="11376025" cy="1219200"/>
+            <a:off x="444500" y="566738"/>
+            <a:ext cx="11376025" cy="2255383"/>
           </a:xfrm>
           <a:prstGeom prst="rect">
             <a:avLst/>
@@ -12820,34 +12896,36 @@
               </a:lnSpc>
             </a:pPr>
             <a:r>
-              <a:rPr lang="en-US" sz="7200" b="1" dirty="0">
+              <a:rPr lang="en-US" sz="6000" b="1" dirty="0">
                 <a:solidFill>
                   <a:srgbClr val="0F172A"/>
                 </a:solidFill>
               </a:rPr>
-              <a:t>1 step </a:t>
-            </a:r>
-            <a:r>
-              <a:rPr lang="en-US" sz="7200" b="1">
+              <a:t>If we used 100% of our </a:t>
+            </a:r>
+            <a:br>
+              <a:rPr lang="en-US" sz="6000" b="1" dirty="0">
                 <a:solidFill>
                   <a:srgbClr val="0F172A"/>
                 </a:solidFill>
               </a:rPr>
-              <a:t>further </a:t>
-            </a:r>
-            <a:r>
-              <a:rPr lang="en-US" sz="6600" b="1">
+            </a:br>
+            <a:r>
+              <a:rPr lang="en-US" sz="6000" b="1" dirty="0">
                 <a:solidFill>
                   <a:srgbClr val="0F172A"/>
                 </a:solidFill>
               </a:rPr>
+              <a:t>DB’s potential</a:t>
+            </a:r>
+            <a:r>
+              <a:rPr lang="en-US" sz="5400" b="1" dirty="0">
+                <a:solidFill>
+                  <a:srgbClr val="0F172A"/>
+                </a:solidFill>
+              </a:rPr>
               <a:t>🤔</a:t>
             </a:r>
-            <a:endParaRPr lang="en-US" sz="6600" b="1" dirty="0">
-              <a:solidFill>
-                <a:srgbClr val="0F172A"/>
-              </a:solidFill>
-            </a:endParaRPr>
           </a:p>
         </p:txBody>
       </p:sp>
@@ -12865,7 +12943,7 @@
         </p:nvSpPr>
         <p:spPr>
           <a:xfrm>
-            <a:off x="444500" y="2881312"/>
+            <a:off x="444500" y="3090862"/>
             <a:ext cx="11376025" cy="2400300"/>
           </a:xfrm>
           <a:prstGeom prst="rect">
@@ -12883,28 +12961,35 @@
               </a:lnSpc>
             </a:pPr>
             <a:r>
+              <a:rPr lang="en-US" sz="6600" b="1" u="sng" dirty="0">
+                <a:solidFill>
+                  <a:srgbClr val="FFFFFF"/>
+                </a:solidFill>
+              </a:rPr>
+              <a:t>Taking actions</a:t>
+            </a:r>
+            <a:r>
               <a:rPr lang="en-US" sz="6600" b="1" dirty="0">
                 <a:solidFill>
                   <a:srgbClr val="FFFFFF"/>
                 </a:solidFill>
               </a:rPr>
-              <a:t>How about </a:t>
-            </a:r>
-            <a:r>
-              <a:rPr lang="en-US" sz="6600" b="1" u="sng" dirty="0">
+              <a:t> </a:t>
+            </a:r>
+            <a:br>
+              <a:rPr lang="en-US" sz="6600" b="1" dirty="0">
                 <a:solidFill>
                   <a:srgbClr val="FFFFFF"/>
                 </a:solidFill>
               </a:rPr>
-              <a:t>taking action</a:t>
-            </a:r>
+            </a:br>
             <a:r>
               <a:rPr lang="en-US" sz="6600" b="1" dirty="0">
                 <a:solidFill>
                   <a:srgbClr val="FFFFFF"/>
                 </a:solidFill>
               </a:rPr>
-              <a:t> instead of just reporting?!</a:t>
+              <a:t>instead of just reporting!</a:t>
             </a:r>
           </a:p>
         </p:txBody>
@@ -13610,8 +13695,8 @@
         </p:nvSpPr>
         <p:spPr>
           <a:xfrm>
-            <a:off x="889000" y="1460500"/>
-            <a:ext cx="10414000" cy="1397000"/>
+            <a:off x="9129251" y="1650540"/>
+            <a:ext cx="2767779" cy="3983344"/>
           </a:xfrm>
           <a:prstGeom prst="roundRect">
             <a:avLst>
@@ -13631,28 +13716,44 @@
           <a:bodyPr wrap="square" lIns="260000" tIns="140000" rIns="260000" bIns="140000" anchor="ctr"/>
           <a:lstStyle/>
           <a:p>
-            <a:pPr algn="l"/>
-            <a:r>
-              <a:rPr lang="en-US" sz="2800" b="1" dirty="0">
+            <a:pPr algn="r"/>
+            <a:r>
+              <a:rPr lang="en-US" sz="3600" b="1" dirty="0">
                 <a:solidFill>
                   <a:srgbClr val="0F172A"/>
                 </a:solidFill>
               </a:rPr>
-              <a:t>How many of you have written SQL before?</a:t>
-            </a:r>
-          </a:p>
-        </p:txBody>
-      </p:sp>
-      <p:sp>
-        <p:nvSpPr>
-          <p:cNvPr id="201" name="Pain201"/>
+              <a:t>Data is </a:t>
+            </a:r>
+            <a:r>
+              <a:rPr lang="en-US" sz="3600" b="1" dirty="0">
+                <a:solidFill>
+                  <a:srgbClr val="FF0000"/>
+                </a:solidFill>
+              </a:rPr>
+              <a:t>locked</a:t>
+            </a:r>
+            <a:r>
+              <a:rPr lang="en-US" sz="3600" b="1" dirty="0">
+                <a:solidFill>
+                  <a:srgbClr val="0F172A"/>
+                </a:solidFill>
+              </a:rPr>
+              <a:t> behind technical curtains</a:t>
+            </a:r>
+          </a:p>
+        </p:txBody>
+      </p:sp>
+      <p:sp>
+        <p:nvSpPr>
+          <p:cNvPr id="202" name="Pain202"/>
           <p:cNvSpPr/>
           <p:nvPr/>
         </p:nvSpPr>
         <p:spPr>
           <a:xfrm>
-            <a:off x="889000" y="3175000"/>
-            <a:ext cx="5080000" cy="1143000"/>
+            <a:off x="602232" y="4490884"/>
+            <a:ext cx="8143566" cy="1143000"/>
           </a:xfrm>
           <a:prstGeom prst="roundRect">
             <a:avLst>
@@ -13676,10 +13777,10 @@
             <a:r>
               <a:rPr lang="en-US" b="1" dirty="0">
                 <a:solidFill>
-                  <a:srgbClr val="0891B2"/>
-                </a:solidFill>
-              </a:rPr>
-              <a:t>01  </a:t>
+                  <a:srgbClr val="F59E0B"/>
+                </a:solidFill>
+              </a:rPr>
+              <a:t>02  </a:t>
             </a:r>
             <a:r>
               <a:rPr lang="en-US" sz="2400" b="1" dirty="0">
@@ -13687,7 +13788,15 @@
                   <a:srgbClr val="0F172A"/>
                 </a:solidFill>
               </a:rPr>
-              <a:t>Writing SQL is slow</a:t>
+              <a:t>Developers are </a:t>
+            </a:r>
+            <a:r>
+              <a:rPr lang="en-US" sz="2400" b="1" u="sng" dirty="0">
+                <a:solidFill>
+                  <a:srgbClr val="0F172A"/>
+                </a:solidFill>
+              </a:rPr>
+              <a:t>bottleneck</a:t>
             </a:r>
           </a:p>
           <a:p>
@@ -13702,21 +13811,21 @@
                   <a:srgbClr val="475569"/>
                 </a:solidFill>
               </a:rPr>
-              <a:t>Even simple reports take hours</a:t>
-            </a:r>
-          </a:p>
-        </p:txBody>
-      </p:sp>
-      <p:sp>
-        <p:nvSpPr>
-          <p:cNvPr id="202" name="Pain202"/>
+              <a:t>Business waits on engineers</a:t>
+            </a:r>
+          </a:p>
+        </p:txBody>
+      </p:sp>
+      <p:sp>
+        <p:nvSpPr>
+          <p:cNvPr id="203" name="Pain203"/>
           <p:cNvSpPr/>
           <p:nvPr/>
         </p:nvSpPr>
         <p:spPr>
           <a:xfrm>
-            <a:off x="6223000" y="3175000"/>
-            <a:ext cx="5080000" cy="1143000"/>
+            <a:off x="602231" y="1650540"/>
+            <a:ext cx="8143567" cy="1143000"/>
           </a:xfrm>
           <a:prstGeom prst="roundRect">
             <a:avLst>
@@ -13740,10 +13849,10 @@
             <a:r>
               <a:rPr lang="en-US" b="1" dirty="0">
                 <a:solidFill>
-                  <a:srgbClr val="F59E0B"/>
-                </a:solidFill>
-              </a:rPr>
-              <a:t>02  </a:t>
+                  <a:srgbClr val="F43F5E"/>
+                </a:solidFill>
+              </a:rPr>
+              <a:t>01  </a:t>
             </a:r>
             <a:r>
               <a:rPr lang="en-US" sz="2400" b="1" dirty="0">
@@ -13751,7 +13860,15 @@
                   <a:srgbClr val="0F172A"/>
                 </a:solidFill>
               </a:rPr>
-              <a:t>Dev bottleneck</a:t>
+              <a:t>Reporting tools are </a:t>
+            </a:r>
+            <a:r>
+              <a:rPr lang="en-US" sz="2400" b="1" u="sng" dirty="0">
+                <a:solidFill>
+                  <a:srgbClr val="0F172A"/>
+                </a:solidFill>
+              </a:rPr>
+              <a:t>rigid</a:t>
             </a:r>
           </a:p>
           <a:p>
@@ -13766,21 +13883,21 @@
                   <a:srgbClr val="475569"/>
                 </a:solidFill>
               </a:rPr>
-              <a:t>Business waits on engineers</a:t>
-            </a:r>
-          </a:p>
-        </p:txBody>
-      </p:sp>
-      <p:sp>
-        <p:nvSpPr>
-          <p:cNvPr id="203" name="Pain203"/>
+              <a:t>Every new question = new ticket</a:t>
+            </a:r>
+          </a:p>
+        </p:txBody>
+      </p:sp>
+      <p:sp>
+        <p:nvSpPr>
+          <p:cNvPr id="204" name="Pain204"/>
           <p:cNvSpPr/>
           <p:nvPr/>
         </p:nvSpPr>
         <p:spPr>
           <a:xfrm>
-            <a:off x="889000" y="4572000"/>
-            <a:ext cx="5080000" cy="1143000"/>
+            <a:off x="602232" y="3079878"/>
+            <a:ext cx="8143568" cy="1143000"/>
           </a:xfrm>
           <a:prstGeom prst="roundRect">
             <a:avLst>
@@ -13804,7 +13921,7 @@
             <a:r>
               <a:rPr lang="en-US" b="1" dirty="0">
                 <a:solidFill>
-                  <a:srgbClr val="F43F5E"/>
+                  <a:srgbClr val="10B981"/>
                 </a:solidFill>
               </a:rPr>
               <a:t>03  </a:t>
@@ -13815,7 +13932,7 @@
                   <a:srgbClr val="0F172A"/>
                 </a:solidFill>
               </a:rPr>
-              <a:t>Rigid reporting tools</a:t>
+              <a:t>Writing SQL, Page Design, Testing, Deployment</a:t>
             </a:r>
           </a:p>
           <a:p>
@@ -13830,71 +13947,7 @@
                   <a:srgbClr val="475569"/>
                 </a:solidFill>
               </a:rPr>
-              <a:t>Every new question = new ticket</a:t>
-            </a:r>
-          </a:p>
-        </p:txBody>
-      </p:sp>
-      <p:sp>
-        <p:nvSpPr>
-          <p:cNvPr id="204" name="Pain204"/>
-          <p:cNvSpPr/>
-          <p:nvPr/>
-        </p:nvSpPr>
-        <p:spPr>
-          <a:xfrm>
-            <a:off x="6223000" y="4572000"/>
-            <a:ext cx="5080000" cy="1143000"/>
-          </a:xfrm>
-          <a:prstGeom prst="roundRect">
-            <a:avLst>
-              <a:gd name="adj" fmla="val 8000"/>
-            </a:avLst>
-          </a:prstGeom>
-          <a:solidFill>
-            <a:srgbClr val="FFFFFF"/>
-          </a:solidFill>
-          <a:ln w="12700">
-            <a:solidFill>
-              <a:srgbClr val="E2E8F0"/>
-            </a:solidFill>
-          </a:ln>
-        </p:spPr>
-        <p:txBody>
-          <a:bodyPr wrap="square" lIns="180000" tIns="140000" rIns="180000" bIns="140000" anchor="ctr"/>
-          <a:lstStyle/>
-          <a:p>
-            <a:pPr algn="l"/>
-            <a:r>
-              <a:rPr lang="en-US" b="1" dirty="0">
-                <a:solidFill>
-                  <a:srgbClr val="10B981"/>
-                </a:solidFill>
-              </a:rPr>
-              <a:t>04  </a:t>
-            </a:r>
-            <a:r>
-              <a:rPr lang="en-US" sz="2400" b="1" dirty="0">
-                <a:solidFill>
-                  <a:srgbClr val="0F172A"/>
-                </a:solidFill>
-              </a:rPr>
-              <a:t>Data is locked away</a:t>
-            </a:r>
-          </a:p>
-          <a:p>
-            <a:pPr algn="l">
-              <a:spcBef>
-                <a:spcPts val="400"/>
-              </a:spcBef>
-            </a:pPr>
-            <a:r>
-              <a:rPr lang="en-US" dirty="0">
-                <a:solidFill>
-                  <a:srgbClr val="475569"/>
-                </a:solidFill>
-              </a:rPr>
-              <a:t>The value is trapped behind SQL</a:t>
+              <a:t>The real value is trapped behind technical gatekeepers</a:t>
             </a:r>
           </a:p>
         </p:txBody>
@@ -14666,8 +14719,8 @@
         </p:nvSpPr>
         <p:spPr>
           <a:xfrm>
-            <a:off x="948375" y="1968500"/>
-            <a:ext cx="1224000" cy="76200"/>
+            <a:off x="929325" y="1911350"/>
+            <a:ext cx="4752000" cy="76200"/>
           </a:xfrm>
           <a:prstGeom prst="rect">
             <a:avLst/>
@@ -14756,12 +14809,12 @@
         <p:spPr>
           <a:xfrm>
             <a:off x="831850" y="2050663"/>
-            <a:ext cx="2930596" cy="558799"/>
+            <a:ext cx="5016500" cy="558799"/>
           </a:xfrm>
         </p:spPr>
         <p:txBody>
           <a:bodyPr>
-            <a:normAutofit/>
+            <a:normAutofit fontScale="77500" lnSpcReduction="20000"/>
           </a:bodyPr>
           <a:lstStyle/>
           <a:p>
@@ -14774,7 +14827,7 @@
                   <a:srgbClr val="22D3EE"/>
                 </a:solidFill>
               </a:rPr>
-              <a:t>PART 1</a:t>
+              <a:t>CHAT WITH YOUR DATA</a:t>
             </a:r>
           </a:p>
         </p:txBody>

--- a/Presentation.pptx
+++ b/Presentation.pptx
@@ -13,17 +13,17 @@
     <p:sldId id="308" r:id="rId4"/>
     <p:sldId id="309" r:id="rId5"/>
     <p:sldId id="310" r:id="rId6"/>
-    <p:sldId id="330" r:id="rId7"/>
-    <p:sldId id="299" r:id="rId8"/>
-    <p:sldId id="312" r:id="rId9"/>
+    <p:sldId id="299" r:id="rId7"/>
+    <p:sldId id="312" r:id="rId8"/>
+    <p:sldId id="330" r:id="rId9"/>
     <p:sldId id="313" r:id="rId10"/>
     <p:sldId id="314" r:id="rId11"/>
     <p:sldId id="315" r:id="rId12"/>
     <p:sldId id="316" r:id="rId13"/>
     <p:sldId id="317" r:id="rId14"/>
-    <p:sldId id="318" r:id="rId15"/>
-    <p:sldId id="319" r:id="rId16"/>
-    <p:sldId id="320" r:id="rId17"/>
+    <p:sldId id="320" r:id="rId15"/>
+    <p:sldId id="318" r:id="rId16"/>
+    <p:sldId id="319" r:id="rId17"/>
     <p:sldId id="321" r:id="rId18"/>
     <p:sldId id="322" r:id="rId19"/>
     <p:sldId id="323" r:id="rId20"/>
@@ -591,28 +591,6 @@
           <a:p>
             <a:r>
               <a:rPr lang="en-US" dirty="0"/>
-              <a:t>5. slide </a:t>
-            </a:r>
-            <a:r>
-              <a:rPr lang="en-US" dirty="0" err="1"/>
-              <a:t>sil</a:t>
-            </a:r>
-            <a:endParaRPr lang="en-US" dirty="0"/>
-          </a:p>
-          <a:p>
-            <a:r>
-              <a:rPr lang="en-US" dirty="0"/>
-              <a:t>6. </a:t>
-            </a:r>
-            <a:r>
-              <a:rPr lang="en-US" dirty="0" err="1"/>
-              <a:t>sil</a:t>
-            </a:r>
-            <a:endParaRPr lang="en-US" dirty="0"/>
-          </a:p>
-          <a:p>
-            <a:r>
-              <a:rPr lang="en-US" dirty="0"/>
               <a:t>8. daha </a:t>
             </a:r>
             <a:r>
@@ -1362,7 +1340,7 @@
           <a:p>
             <a:r>
               <a:rPr lang="en-US" dirty="0"/>
-              <a:t>[DIVIDER] Brief pacing slide — 10 seconds.</a:t>
+              <a:t>[LIVE DEMO] Switch to the Blazor browser window. Make sure the mic permission is already granted before the talk.</a:t>
             </a:r>
           </a:p>
           <a:p>
@@ -1371,7 +1349,7 @@
           <a:p>
             <a:r>
               <a:rPr lang="en-US" dirty="0"/>
-              <a:t>'Second demo: the product. Same backend, but now with voice input, live charts, and Excel export. This is what you'd actually ship to business users.'</a:t>
+              <a:t>Demo script — roughly 4 minutes total:</a:t>
             </a:r>
           </a:p>
           <a:p>
@@ -1380,7 +1358,37 @@
           <a:p>
             <a:r>
               <a:rPr lang="en-US" dirty="0"/>
-              <a:t>[STAGE] Take a breath. Check the room. Walk to the other side of the stage if possible.</a:t>
+              <a:t>1. Click the mic button. Say clearly: 'Show me sales trends for the last six months.'</a:t>
+            </a:r>
+          </a:p>
+          <a:p>
+            <a:r>
+              <a:rPr lang="en-US" dirty="0"/>
+              <a:t>2. Let the audience watch the transcription appear.</a:t>
+            </a:r>
+          </a:p>
+          <a:p>
+            <a:r>
+              <a:rPr lang="en-US" dirty="0"/>
+              <a:t>3. Show the SQL it generated (same pipeline as before — point this out).</a:t>
+            </a:r>
+          </a:p>
+          <a:p>
+            <a:r>
+              <a:rPr lang="en-US" dirty="0"/>
+              <a:t>4. Watch the table render.</a:t>
+            </a:r>
+          </a:p>
+          <a:p>
+            <a:r>
+              <a:rPr lang="en-US" dirty="0"/>
+              <a:t>5. Switch to the chart tab — the 'wow' moment.</a:t>
+            </a:r>
+          </a:p>
+          <a:p>
+            <a:r>
+              <a:rPr lang="en-US" dirty="0"/>
+              <a:t>6. Click Export to Excel. Open the file briefly so they see it's real.</a:t>
             </a:r>
           </a:p>
           <a:p>
@@ -1389,7 +1397,25 @@
           <a:p>
             <a:r>
               <a:rPr lang="en-US" dirty="0"/>
-              <a:t>[TRANSITION] 'Let me show you the pieces.'</a:t>
+              <a:t>[EMPHASIZE] 'Voice in. Chart out. Spreadsheet in my downloads folder. Zero SQL.'</a:t>
+            </a:r>
+          </a:p>
+          <a:p>
+            <a:endParaRPr lang="en-US" dirty="0"/>
+          </a:p>
+          <a:p>
+            <a:r>
+              <a:rPr lang="en-US" dirty="0"/>
+              <a:t>[FALLBACK] If the mic fails, just type the query. Don't panic. Say: 'Let me type this instead.'</a:t>
+            </a:r>
+          </a:p>
+          <a:p>
+            <a:endParaRPr lang="en-US" dirty="0"/>
+          </a:p>
+          <a:p>
+            <a:r>
+              <a:rPr lang="en-US" dirty="0"/>
+              <a:t>[TRANSITION] Return to slides. 'Why does this feel different from the console? Let's talk about UX.'</a:t>
             </a:r>
           </a:p>
         </p:txBody>
@@ -1448,7 +1474,7 @@
           <a:p>
             <a:r>
               <a:rPr lang="en-US" dirty="0"/>
-              <a:t>[SETUP] This slide introduces the second demo. Frame it as 'same engine, different car.'</a:t>
+              <a:t>[DIVIDER] Brief pacing slide — 10 seconds.</a:t>
             </a:r>
           </a:p>
           <a:p>
@@ -1457,7 +1483,7 @@
           <a:p>
             <a:r>
               <a:rPr lang="en-US" dirty="0"/>
-              <a:t>'The console app proved the pipeline works. But business users don't open a terminal — they want to click, talk, and see a chart.'</a:t>
+              <a:t>'Second demo: the product. Same backend, but now with voice input, live charts, and Excel export. This is what you'd actually ship to business users.'</a:t>
             </a:r>
           </a:p>
           <a:p>
@@ -1466,25 +1492,7 @@
           <a:p>
             <a:r>
               <a:rPr lang="en-US" dirty="0"/>
-              <a:t>Walk through the three upgrades briefly:</a:t>
-            </a:r>
-          </a:p>
-          <a:p>
-            <a:r>
-              <a:rPr lang="en-US" dirty="0"/>
-              <a:t>- Voice input — you literally speak your question</a:t>
-            </a:r>
-          </a:p>
-          <a:p>
-            <a:r>
-              <a:rPr lang="en-US" dirty="0"/>
-              <a:t>- Live charts — results render as tables AND as visualizations</a:t>
-            </a:r>
-          </a:p>
-          <a:p>
-            <a:r>
-              <a:rPr lang="en-US" dirty="0"/>
-              <a:t>- One-click Excel export — because half of all reporting ends in Excel anyway</a:t>
+              <a:t>[STAGE] Take a breath. Check the room. Walk to the other side of the stage if possible.</a:t>
             </a:r>
           </a:p>
           <a:p>
@@ -1493,16 +1501,7 @@
           <a:p>
             <a:r>
               <a:rPr lang="en-US" dirty="0"/>
-              <a:t>[EMPHASIZE] 'The backend code? Identical. We just swapped the UI.'</a:t>
-            </a:r>
-          </a:p>
-          <a:p>
-            <a:endParaRPr lang="en-US" dirty="0"/>
-          </a:p>
-          <a:p>
-            <a:r>
-              <a:rPr lang="en-US" dirty="0"/>
-              <a:t>[TRANSITION] 'Let me show you.'</a:t>
+              <a:t>[TRANSITION] 'Let me show you the pieces.'</a:t>
             </a:r>
           </a:p>
         </p:txBody>
@@ -1561,7 +1560,7 @@
           <a:p>
             <a:r>
               <a:rPr lang="en-US" dirty="0"/>
-              <a:t>[LIVE DEMO] Switch to the Blazor browser window. Make sure the mic permission is already granted before the talk.</a:t>
+              <a:t>[SETUP] This slide introduces the second demo. Frame it as 'same engine, different car.'</a:t>
             </a:r>
           </a:p>
           <a:p>
@@ -1570,7 +1569,7 @@
           <a:p>
             <a:r>
               <a:rPr lang="en-US" dirty="0"/>
-              <a:t>Demo script — roughly 4 minutes total:</a:t>
+              <a:t>'The console app proved the pipeline works. But business users don't open a terminal — they want to click, talk, and see a chart.'</a:t>
             </a:r>
           </a:p>
           <a:p>
@@ -1579,37 +1578,25 @@
           <a:p>
             <a:r>
               <a:rPr lang="en-US" dirty="0"/>
-              <a:t>1. Click the mic button. Say clearly: 'Show me sales trends for the last six months.'</a:t>
-            </a:r>
-          </a:p>
-          <a:p>
-            <a:r>
-              <a:rPr lang="en-US" dirty="0"/>
-              <a:t>2. Let the audience watch the transcription appear.</a:t>
-            </a:r>
-          </a:p>
-          <a:p>
-            <a:r>
-              <a:rPr lang="en-US" dirty="0"/>
-              <a:t>3. Show the SQL it generated (same pipeline as before — point this out).</a:t>
-            </a:r>
-          </a:p>
-          <a:p>
-            <a:r>
-              <a:rPr lang="en-US" dirty="0"/>
-              <a:t>4. Watch the table render.</a:t>
-            </a:r>
-          </a:p>
-          <a:p>
-            <a:r>
-              <a:rPr lang="en-US" dirty="0"/>
-              <a:t>5. Switch to the chart tab — the 'wow' moment.</a:t>
-            </a:r>
-          </a:p>
-          <a:p>
-            <a:r>
-              <a:rPr lang="en-US" dirty="0"/>
-              <a:t>6. Click Export to Excel. Open the file briefly so they see it's real.</a:t>
+              <a:t>Walk through the three upgrades briefly:</a:t>
+            </a:r>
+          </a:p>
+          <a:p>
+            <a:r>
+              <a:rPr lang="en-US" dirty="0"/>
+              <a:t>- Voice input — you literally speak your question</a:t>
+            </a:r>
+          </a:p>
+          <a:p>
+            <a:r>
+              <a:rPr lang="en-US" dirty="0"/>
+              <a:t>- Live charts — results render as tables AND as visualizations</a:t>
+            </a:r>
+          </a:p>
+          <a:p>
+            <a:r>
+              <a:rPr lang="en-US" dirty="0"/>
+              <a:t>- One-click Excel export — because half of all reporting ends in Excel anyway</a:t>
             </a:r>
           </a:p>
           <a:p>
@@ -1618,7 +1605,7 @@
           <a:p>
             <a:r>
               <a:rPr lang="en-US" dirty="0"/>
-              <a:t>[EMPHASIZE] 'Voice in. Chart out. Spreadsheet in my downloads folder. Zero SQL.'</a:t>
+              <a:t>[EMPHASIZE] 'The backend code? Identical. We just swapped the UI.'</a:t>
             </a:r>
           </a:p>
           <a:p>
@@ -1627,16 +1614,7 @@
           <a:p>
             <a:r>
               <a:rPr lang="en-US" dirty="0"/>
-              <a:t>[FALLBACK] If the mic fails, just type the query. Don't panic. Say: 'Let me type this instead.'</a:t>
-            </a:r>
-          </a:p>
-          <a:p>
-            <a:endParaRPr lang="en-US" dirty="0"/>
-          </a:p>
-          <a:p>
-            <a:r>
-              <a:rPr lang="en-US" dirty="0"/>
-              <a:t>[TRANSITION] Return to slides. 'Why does this feel different from the console? Let's talk about UX.'</a:t>
+              <a:t>[TRANSITION] 'Let me show you.'</a:t>
             </a:r>
           </a:p>
         </p:txBody>
@@ -2488,124 +2466,8 @@
                   <a:srgbClr val="0F172A"/>
                 </a:solidFill>
               </a:rPr>
-              <a:t>How many of you have written SQL before?</a:t>
-            </a:r>
-          </a:p>
-          <a:p>
-            <a:pPr marL="0" marR="0" lvl="0" indent="0" algn="l" defTabSz="914400" rtl="0" eaLnBrk="1" fontAlgn="auto" latinLnBrk="0" hangingPunct="1">
-              <a:lnSpc>
-                <a:spcPct val="100000"/>
-              </a:lnSpc>
-              <a:spcBef>
-                <a:spcPts val="0"/>
-              </a:spcBef>
-              <a:spcAft>
-                <a:spcPts val="0"/>
-              </a:spcAft>
-              <a:buClrTx/>
-              <a:buSzTx/>
-              <a:buFontTx/>
-              <a:buNone/>
-              <a:tabLst/>
-              <a:defRPr/>
-            </a:pPr>
-            <a:endParaRPr lang="en-US" dirty="0"/>
-          </a:p>
-          <a:p>
-            <a:pPr marL="0" marR="0" lvl="0" indent="0" algn="l" defTabSz="914400" rtl="0" eaLnBrk="1" fontAlgn="auto" latinLnBrk="0" hangingPunct="1">
-              <a:lnSpc>
-                <a:spcPct val="100000"/>
-              </a:lnSpc>
-              <a:spcBef>
-                <a:spcPts val="0"/>
-              </a:spcBef>
-              <a:spcAft>
-                <a:spcPts val="0"/>
-              </a:spcAft>
-              <a:buClrTx/>
-              <a:buSzTx/>
-              <a:buFontTx/>
-              <a:buNone/>
-              <a:tabLst/>
-              <a:defRPr/>
-            </a:pPr>
-            <a:r>
-              <a:rPr lang="en-US" dirty="0"/>
-              <a:t>1. Traditional BI tools are rigid — every new question needs a new report</a:t>
-            </a:r>
-          </a:p>
-          <a:p>
-            <a:pPr marL="0" marR="0" lvl="0" indent="0" algn="l" defTabSz="914400" rtl="0" eaLnBrk="1" fontAlgn="auto" latinLnBrk="0" hangingPunct="1">
-              <a:lnSpc>
-                <a:spcPct val="100000"/>
-              </a:lnSpc>
-              <a:spcBef>
-                <a:spcPts val="0"/>
-              </a:spcBef>
-              <a:spcAft>
-                <a:spcPts val="0"/>
-              </a:spcAft>
-              <a:buClrTx/>
-              <a:buSzTx/>
-              <a:buFontTx/>
-              <a:buNone/>
-              <a:tabLst/>
-              <a:defRPr/>
-            </a:pPr>
-            <a:r>
-              <a:rPr lang="en-US" dirty="0"/>
-              <a:t>2. </a:t>
-            </a:r>
-          </a:p>
-          <a:p>
-            <a:pPr marL="0" marR="0" lvl="0" indent="0" algn="l" defTabSz="914400" rtl="0" eaLnBrk="1" fontAlgn="auto" latinLnBrk="0" hangingPunct="1">
-              <a:lnSpc>
-                <a:spcPct val="100000"/>
-              </a:lnSpc>
-              <a:spcBef>
-                <a:spcPts val="0"/>
-              </a:spcBef>
-              <a:spcAft>
-                <a:spcPts val="0"/>
-              </a:spcAft>
-              <a:buClrTx/>
-              <a:buSzTx/>
-              <a:buFontTx/>
-              <a:buNone/>
-              <a:tabLst/>
-              <a:defRPr/>
-            </a:pPr>
-            <a:r>
-              <a:rPr lang="en-US" dirty="0"/>
-              <a:t>- Business users wait days for answers they could have in seconds</a:t>
-            </a:r>
-          </a:p>
-          <a:p>
-            <a:pPr marL="0" indent="0">
-              <a:buFontTx/>
-              <a:buNone/>
-            </a:pPr>
-            <a:r>
-              <a:rPr lang="en-US" dirty="0"/>
-              <a:t>- SQL is slow to write, especially for ad-hoc questions</a:t>
-            </a:r>
-          </a:p>
-          <a:p>
-            <a:pPr marL="0" indent="0">
-              <a:buFontTx/>
-              <a:buNone/>
-            </a:pPr>
-            <a:r>
-              <a:rPr lang="en-US" dirty="0"/>
-              <a:t>- Test, Deployment needs after new report screen.</a:t>
-            </a:r>
-          </a:p>
-          <a:p>
-            <a:pPr marL="0" indent="0">
-              <a:buFontTx/>
-              <a:buNone/>
-            </a:pPr>
-            <a:endParaRPr lang="en-US" dirty="0"/>
+              <a:t>How many of you have written SQL before? Or create a reporting screen?</a:t>
+            </a:r>
           </a:p>
           <a:p>
             <a:endParaRPr lang="en-US" dirty="0"/>
@@ -2853,13 +2715,7 @@
   <p:cSld>
     <p:spTree>
       <p:nvGrpSpPr>
-        <p:cNvPr id="1" name="">
-          <a:extLst>
-            <a:ext uri="{FF2B5EF4-FFF2-40B4-BE49-F238E27FC236}">
-              <a16:creationId xmlns:a16="http://schemas.microsoft.com/office/drawing/2014/main" id="{91D0EC0F-DA0D-0A76-E806-8E6CBDDFF505}"/>
-            </a:ext>
-          </a:extLst>
-        </p:cNvPr>
+        <p:cNvPr id="1" name=""/>
         <p:cNvGrpSpPr/>
         <p:nvPr/>
       </p:nvGrpSpPr>
@@ -2873,13 +2729,7 @@
       </p:grpSpPr>
       <p:sp>
         <p:nvSpPr>
-          <p:cNvPr id="2" name="Slide Image Placeholder 1">
-            <a:extLst>
-              <a:ext uri="{FF2B5EF4-FFF2-40B4-BE49-F238E27FC236}">
-                <a16:creationId xmlns:a16="http://schemas.microsoft.com/office/drawing/2014/main" id="{B8861CA3-11A4-AE5B-BC7E-4E722A78CFF6}"/>
-              </a:ext>
-            </a:extLst>
-          </p:cNvPr>
+          <p:cNvPr id="2" name="Slide Image Placeholder 1"/>
           <p:cNvSpPr>
             <a:spLocks noGrp="1" noRot="1" noChangeAspect="1"/>
           </p:cNvSpPr>
@@ -2891,13 +2741,7 @@
       </p:sp>
       <p:sp>
         <p:nvSpPr>
-          <p:cNvPr id="3" name="Notes Placeholder 2">
-            <a:extLst>
-              <a:ext uri="{FF2B5EF4-FFF2-40B4-BE49-F238E27FC236}">
-                <a16:creationId xmlns:a16="http://schemas.microsoft.com/office/drawing/2014/main" id="{097DEF67-09CC-E136-C2C8-BC26E99D71A9}"/>
-              </a:ext>
-            </a:extLst>
-          </p:cNvPr>
+          <p:cNvPr id="3" name="Notes Placeholder 2"/>
           <p:cNvSpPr>
             <a:spLocks noGrp="1"/>
           </p:cNvSpPr>
@@ -2911,45 +2755,28 @@
           <a:lstStyle/>
           <a:p>
             <a:r>
-              <a:rPr lang="en-US" dirty="0"/>
-              <a:t>[DIVIDER] This is a pacing slide — 10 seconds maximum. It exists to let the audience breathe.</a:t>
-            </a:r>
-          </a:p>
-          <a:p>
-            <a:endParaRPr lang="en-US" dirty="0"/>
-          </a:p>
-          <a:p>
-            <a:r>
-              <a:rPr lang="en-US" dirty="0"/>
-              <a:t>'First demo: the console. We are going to see every stage of the pipeline explicitly.'</a:t>
-            </a:r>
-          </a:p>
-          <a:p>
-            <a:endParaRPr lang="en-US" dirty="0"/>
-          </a:p>
-          <a:p>
-            <a:r>
-              <a:rPr lang="en-US" dirty="0"/>
-              <a:t>[STAGE] Walk two steps closer to the screen before clicking forward.</a:t>
-            </a:r>
-          </a:p>
-          <a:p>
-            <a:endParaRPr lang="en-US" dirty="0"/>
-          </a:p>
-          <a:p>
-            <a:r>
-              <a:rPr lang="en-US" dirty="0"/>
-              <a:t>[TRANSITION] 'Let us start at the beginning — the pipeline itself.'</a:t>
+              <a:rPr lang="en-US" u="sng" dirty="0"/>
+              <a:t>!!! 30 seconds for this slide</a:t>
+            </a:r>
+          </a:p>
+          <a:p>
+            <a:endParaRPr lang="en-US" u="sng" dirty="0"/>
+          </a:p>
+          <a:p>
+            <a:r>
+              <a:rPr lang="en-US" dirty="0"/>
+              <a:t>This is the whole system in 7 boxes. </a:t>
+            </a:r>
+          </a:p>
+          <a:p>
+            <a:r>
+              <a:rPr lang="en-US" dirty="0"/>
+              <a:t>User types → we build the prompt → LLM writes SQL → validator checks it → we execute. </a:t>
             </a:r>
           </a:p>
         </p:txBody>
       </p:sp>
     </p:spTree>
-    <p:extLst>
-      <p:ext uri="{BB962C8B-B14F-4D97-AF65-F5344CB8AC3E}">
-        <p14:creationId xmlns:p14="http://schemas.microsoft.com/office/powerpoint/2010/main" val="1339754710"/>
-      </p:ext>
-    </p:extLst>
   </p:cSld>
   <p:clrMapOvr>
     <a:masterClrMapping/>
@@ -3003,7 +2830,7 @@
           <a:p>
             <a:r>
               <a:rPr lang="en-US" dirty="0"/>
-              <a:t>[STAGE] Step back from the podium. Point at the diagram.</a:t>
+              <a:t>[DETAIL] This is where the quality of the system is decided. Spend about 2 minutes here.</a:t>
             </a:r>
           </a:p>
           <a:p>
@@ -3012,16 +2839,44 @@
           <a:p>
             <a:r>
               <a:rPr lang="en-US" dirty="0"/>
-              <a:t>This is the whole system in 7 boxes. Every time you hear me talk about a 'pipeline' today, come back to this slide in your head.</a:t>
-            </a:r>
-          </a:p>
-          <a:p>
+              <a:t>Schema first. Walk through the left card:</a:t>
+            </a:r>
+          </a:p>
+          <a:p>
+            <a:r>
+              <a:rPr lang="en-US" dirty="0"/>
+              <a:t>- We extract tables, columns, relationships, and types from the database</a:t>
+            </a:r>
+          </a:p>
+          <a:p>
+            <a:r>
+              <a:rPr lang="en-US" dirty="0"/>
+              <a:t>- Optionally sample values help the LLM understand content, not just structure</a:t>
+            </a:r>
+          </a:p>
+          <a:p>
+            <a:r>
+              <a:rPr lang="en-US" dirty="0"/>
+              <a:t>- Extra info DDL (</a:t>
+            </a:r>
+            <a:r>
+              <a:rPr lang="en-US" sz="1200" b="0" i="0" kern="1200" dirty="0">
+                <a:solidFill>
+                  <a:schemeClr val="tx1"/>
+                </a:solidFill>
+                <a:effectLst/>
+                <a:latin typeface="+mn-lt"/>
+                <a:ea typeface="+mn-ea"/>
+                <a:cs typeface="+mn-cs"/>
+              </a:rPr>
+              <a:t>Data Definition Language)</a:t>
+            </a:r>
             <a:endParaRPr lang="en-US" dirty="0"/>
           </a:p>
           <a:p>
             <a:r>
               <a:rPr lang="en-US" dirty="0"/>
-              <a:t>[EMPHASIZE] User types → we build the prompt → LLM writes SQL → validator checks it → we execute. That's it. That's the whole trick.</a:t>
+              <a:t>- Without this, the LLM is guessing. With it, it is translating.</a:t>
             </a:r>
           </a:p>
           <a:p>
@@ -3030,7 +2885,7 @@
           <a:p>
             <a:r>
               <a:rPr lang="en-US" dirty="0"/>
-              <a:t>[PAUSE 2s]</a:t>
+              <a:t>[PAUSE] Then pivot to the right card.</a:t>
             </a:r>
           </a:p>
           <a:p>
@@ -3039,16 +2894,37 @@
           <a:p>
             <a:r>
               <a:rPr lang="en-US" dirty="0"/>
-              <a:t>The anchor chip in the corner says PIPELINE for a reason. When we break into the console in a minute, I'll point back to this slide as each stage happens so you know where you are.</a:t>
+              <a:t>The prompt is where we write the rules — in plain English. Read the code block out loud:</a:t>
+            </a:r>
+          </a:p>
+          <a:p>
+            <a:r>
+              <a:rPr lang="en-US" dirty="0"/>
+              <a:t>'You are a SQL assistant. Rules: SELECT only. No DELETE, UPDATE, or DROP. Return SQL only. Use the schema above.’</a:t>
             </a:r>
           </a:p>
           <a:p>
             <a:endParaRPr lang="en-US" dirty="0"/>
           </a:p>
           <a:p>
-            <a:r>
-              <a:rPr lang="en-US" dirty="0"/>
-              <a:t>[TRANSITION] Let's zoom into stages 1 and 2 — schema and prompt — because that's where 80% of the quality comes from.</a:t>
+            <a:endParaRPr lang="en-US" dirty="0"/>
+          </a:p>
+          <a:p>
+            <a:endParaRPr lang="en-US" dirty="0"/>
+          </a:p>
+          <a:p>
+            <a:r>
+              <a:rPr lang="en-US" dirty="0"/>
+              <a:t>[EMPHASIZE] 'Good schema plus strict prompt equals boring, reliable SQL. That is exactly what we want.'</a:t>
+            </a:r>
+          </a:p>
+          <a:p>
+            <a:endParaRPr lang="en-US" dirty="0"/>
+          </a:p>
+          <a:p>
+            <a:r>
+              <a:rPr lang="en-US" dirty="0"/>
+              <a:t>[TRANSITION] 'Let me show you this running live.'</a:t>
             </a:r>
           </a:p>
         </p:txBody>
@@ -3066,7 +2942,13 @@
   <p:cSld>
     <p:spTree>
       <p:nvGrpSpPr>
-        <p:cNvPr id="1" name=""/>
+        <p:cNvPr id="1" name="">
+          <a:extLst>
+            <a:ext uri="{FF2B5EF4-FFF2-40B4-BE49-F238E27FC236}">
+              <a16:creationId xmlns:a16="http://schemas.microsoft.com/office/drawing/2014/main" id="{91D0EC0F-DA0D-0A76-E806-8E6CBDDFF505}"/>
+            </a:ext>
+          </a:extLst>
+        </p:cNvPr>
         <p:cNvGrpSpPr/>
         <p:nvPr/>
       </p:nvGrpSpPr>
@@ -3080,7 +2962,13 @@
       </p:grpSpPr>
       <p:sp>
         <p:nvSpPr>
-          <p:cNvPr id="2" name="Slide Image Placeholder 1"/>
+          <p:cNvPr id="2" name="Slide Image Placeholder 1">
+            <a:extLst>
+              <a:ext uri="{FF2B5EF4-FFF2-40B4-BE49-F238E27FC236}">
+                <a16:creationId xmlns:a16="http://schemas.microsoft.com/office/drawing/2014/main" id="{B8861CA3-11A4-AE5B-BC7E-4E722A78CFF6}"/>
+              </a:ext>
+            </a:extLst>
+          </p:cNvPr>
           <p:cNvSpPr>
             <a:spLocks noGrp="1" noRot="1" noChangeAspect="1"/>
           </p:cNvSpPr>
@@ -3092,7 +2980,13 @@
       </p:sp>
       <p:sp>
         <p:nvSpPr>
-          <p:cNvPr id="3" name="Notes Placeholder 2"/>
+          <p:cNvPr id="3" name="Notes Placeholder 2">
+            <a:extLst>
+              <a:ext uri="{FF2B5EF4-FFF2-40B4-BE49-F238E27FC236}">
+                <a16:creationId xmlns:a16="http://schemas.microsoft.com/office/drawing/2014/main" id="{097DEF67-09CC-E136-C2C8-BC26E99D71A9}"/>
+              </a:ext>
+            </a:extLst>
+          </p:cNvPr>
           <p:cNvSpPr>
             <a:spLocks noGrp="1"/>
           </p:cNvSpPr>
@@ -3107,7 +3001,7 @@
           <a:p>
             <a:r>
               <a:rPr lang="en-US" dirty="0"/>
-              <a:t>[DETAIL] This is where the quality of the system is decided. Spend about 2 minutes here.</a:t>
+              <a:t>[DIVIDER] This is a pacing slide — 10 seconds maximum. It exists to let the audience breathe.</a:t>
             </a:r>
           </a:p>
           <a:p>
@@ -3116,44 +3010,16 @@
           <a:p>
             <a:r>
               <a:rPr lang="en-US" dirty="0"/>
-              <a:t>Schema first. Walk through the left card:</a:t>
-            </a:r>
-          </a:p>
-          <a:p>
-            <a:r>
-              <a:rPr lang="en-US" dirty="0"/>
-              <a:t>- We extract tables, columns, relationships, and types from the database</a:t>
-            </a:r>
-          </a:p>
-          <a:p>
-            <a:r>
-              <a:rPr lang="en-US" dirty="0"/>
-              <a:t>- Optionally sample values help the LLM understand content, not just structure</a:t>
-            </a:r>
-          </a:p>
-          <a:p>
-            <a:r>
-              <a:rPr lang="en-US" dirty="0"/>
-              <a:t>- Extra info DDL (</a:t>
-            </a:r>
-            <a:r>
-              <a:rPr lang="en-US" sz="1200" b="0" i="0" kern="1200" dirty="0">
-                <a:solidFill>
-                  <a:schemeClr val="tx1"/>
-                </a:solidFill>
-                <a:effectLst/>
-                <a:latin typeface="+mn-lt"/>
-                <a:ea typeface="+mn-ea"/>
-                <a:cs typeface="+mn-cs"/>
-              </a:rPr>
-              <a:t>Data Definition Language)</a:t>
-            </a:r>
+              <a:t>'First demo: the console. We are going to see every stage of the pipeline explicitly.'</a:t>
+            </a:r>
+          </a:p>
+          <a:p>
             <a:endParaRPr lang="en-US" dirty="0"/>
           </a:p>
           <a:p>
             <a:r>
               <a:rPr lang="en-US" dirty="0"/>
-              <a:t>- Without this, the LLM is guessing. With it, it is translating.</a:t>
+              <a:t>[STAGE] Walk two steps closer to the screen before clicking forward.</a:t>
             </a:r>
           </a:p>
           <a:p>
@@ -3162,51 +3028,17 @@
           <a:p>
             <a:r>
               <a:rPr lang="en-US" dirty="0"/>
-              <a:t>[PAUSE] Then pivot to the right card.</a:t>
-            </a:r>
-          </a:p>
-          <a:p>
-            <a:endParaRPr lang="en-US" dirty="0"/>
-          </a:p>
-          <a:p>
-            <a:r>
-              <a:rPr lang="en-US" dirty="0"/>
-              <a:t>The prompt is where we write the rules — in plain English. Read the code block out loud:</a:t>
-            </a:r>
-          </a:p>
-          <a:p>
-            <a:r>
-              <a:rPr lang="en-US" dirty="0"/>
-              <a:t>'You are a SQL assistant. Rules: SELECT only. No DELETE, UPDATE, or DROP. Return SQL only. Use the schema above.’</a:t>
-            </a:r>
-          </a:p>
-          <a:p>
-            <a:endParaRPr lang="en-US" dirty="0"/>
-          </a:p>
-          <a:p>
-            <a:endParaRPr lang="en-US" dirty="0"/>
-          </a:p>
-          <a:p>
-            <a:endParaRPr lang="en-US" dirty="0"/>
-          </a:p>
-          <a:p>
-            <a:r>
-              <a:rPr lang="en-US" dirty="0"/>
-              <a:t>[EMPHASIZE] 'Good schema plus strict prompt equals boring, reliable SQL. That is exactly what we want.'</a:t>
-            </a:r>
-          </a:p>
-          <a:p>
-            <a:endParaRPr lang="en-US" dirty="0"/>
-          </a:p>
-          <a:p>
-            <a:r>
-              <a:rPr lang="en-US" dirty="0"/>
-              <a:t>[TRANSITION] 'Let me show you this running live.'</a:t>
+              <a:t>[TRANSITION] 'Let us start at the beginning — the pipeline itself.'</a:t>
             </a:r>
           </a:p>
         </p:txBody>
       </p:sp>
     </p:spTree>
+    <p:extLst>
+      <p:ext uri="{BB962C8B-B14F-4D97-AF65-F5344CB8AC3E}">
+        <p14:creationId xmlns:p14="http://schemas.microsoft.com/office/powerpoint/2010/main" val="1339754710"/>
+      </p:ext>
+    </p:extLst>
   </p:cSld>
   <p:clrMapOvr>
     <a:masterClrMapping/>
@@ -7239,13 +7071,13 @@
         </p:nvSpPr>
         <p:spPr>
           <a:xfrm>
-            <a:off x="303275" y="5364479"/>
+            <a:off x="343903" y="5361379"/>
             <a:ext cx="4744453" cy="508000"/>
           </a:xfrm>
         </p:spPr>
         <p:txBody>
           <a:bodyPr wrap="square" lIns="0" tIns="0" rIns="0" bIns="0" anchor="t">
-            <a:normAutofit/>
+            <a:normAutofit fontScale="92500"/>
           </a:bodyPr>
           <a:lstStyle/>
           <a:p>
@@ -7253,265 +7085,12 @@
               <a:buNone/>
             </a:pPr>
             <a:r>
-              <a:rPr lang="en-US" dirty="0">
+              <a:rPr lang="en-US" sz="4000" dirty="0">
                 <a:solidFill>
                   <a:srgbClr val="94A3B8"/>
                 </a:solidFill>
               </a:rPr>
-              <a:t>From Your Native Language</a:t>
-            </a:r>
-          </a:p>
-        </p:txBody>
-      </p:sp>
-      <p:sp>
-        <p:nvSpPr>
-          <p:cNvPr id="10" name="Arrow: Right 9">
-            <a:extLst>
-              <a:ext uri="{FF2B5EF4-FFF2-40B4-BE49-F238E27FC236}">
-                <a16:creationId xmlns:a16="http://schemas.microsoft.com/office/drawing/2014/main" id="{F0C04564-E4C0-F5EF-41C0-C360D063978F}"/>
-              </a:ext>
-            </a:extLst>
-          </p:cNvPr>
-          <p:cNvSpPr/>
-          <p:nvPr/>
-        </p:nvSpPr>
-        <p:spPr>
-          <a:xfrm>
-            <a:off x="4476133" y="5347904"/>
-            <a:ext cx="516440" cy="424180"/>
-          </a:xfrm>
-          <a:prstGeom prst="rightArrow">
-            <a:avLst/>
-          </a:prstGeom>
-          <a:ln>
-            <a:noFill/>
-          </a:ln>
-        </p:spPr>
-        <p:style>
-          <a:lnRef idx="2">
-            <a:schemeClr val="accent1">
-              <a:shade val="15000"/>
-            </a:schemeClr>
-          </a:lnRef>
-          <a:fillRef idx="1">
-            <a:schemeClr val="accent1"/>
-          </a:fillRef>
-          <a:effectRef idx="0">
-            <a:schemeClr val="accent1"/>
-          </a:effectRef>
-          <a:fontRef idx="minor">
-            <a:schemeClr val="lt1"/>
-          </a:fontRef>
-        </p:style>
-        <p:txBody>
-          <a:bodyPr rtlCol="0" anchor="ctr"/>
-          <a:lstStyle/>
-          <a:p>
-            <a:pPr algn="ctr"/>
-            <a:endParaRPr lang="tr-TR" dirty="0"/>
-          </a:p>
-        </p:txBody>
-      </p:sp>
-      <p:sp>
-        <p:nvSpPr>
-          <p:cNvPr id="12" name="Subtitle 2">
-            <a:extLst>
-              <a:ext uri="{FF2B5EF4-FFF2-40B4-BE49-F238E27FC236}">
-                <a16:creationId xmlns:a16="http://schemas.microsoft.com/office/drawing/2014/main" id="{8346BC4F-555E-4279-9796-2E03531A4D9E}"/>
-              </a:ext>
-            </a:extLst>
-          </p:cNvPr>
-          <p:cNvSpPr txBox="1">
-            <a:spLocks/>
-          </p:cNvSpPr>
-          <p:nvPr/>
-        </p:nvSpPr>
-        <p:spPr>
-          <a:xfrm>
-            <a:off x="5127228" y="5364479"/>
-            <a:ext cx="1180447" cy="508000"/>
-          </a:xfrm>
-          <a:prstGeom prst="rect">
-            <a:avLst/>
-          </a:prstGeom>
-        </p:spPr>
-        <p:txBody>
-          <a:bodyPr vert="horz" wrap="square" lIns="0" tIns="0" rIns="0" bIns="0" rtlCol="0" anchor="t">
-            <a:normAutofit/>
-          </a:bodyPr>
-          <a:lstStyle>
-            <a:lvl1pPr marL="0" indent="0" algn="ctr" defTabSz="914400" rtl="0" eaLnBrk="1" latinLnBrk="0" hangingPunct="1">
-              <a:lnSpc>
-                <a:spcPct val="90000"/>
-              </a:lnSpc>
-              <a:spcBef>
-                <a:spcPts val="1000"/>
-              </a:spcBef>
-              <a:buFont typeface="Arial" panose="020B0604020202020204" pitchFamily="34" charset="0"/>
-              <a:buNone/>
-              <a:defRPr sz="2400" kern="1200">
-                <a:solidFill>
-                  <a:srgbClr val="334155"/>
-                </a:solidFill>
-                <a:latin typeface="+mn-lt"/>
-                <a:ea typeface="+mn-ea"/>
-                <a:cs typeface="+mn-cs"/>
-              </a:defRPr>
-            </a:lvl1pPr>
-            <a:lvl2pPr marL="457200" indent="0" algn="ctr" defTabSz="914400" rtl="0" eaLnBrk="1" latinLnBrk="0" hangingPunct="1">
-              <a:lnSpc>
-                <a:spcPct val="90000"/>
-              </a:lnSpc>
-              <a:spcBef>
-                <a:spcPts val="500"/>
-              </a:spcBef>
-              <a:buFont typeface="Arial" panose="020B0604020202020204" pitchFamily="34" charset="0"/>
-              <a:buNone/>
-              <a:defRPr sz="2000" kern="1200">
-                <a:solidFill>
-                  <a:schemeClr val="tx1"/>
-                </a:solidFill>
-                <a:latin typeface="+mn-lt"/>
-                <a:ea typeface="+mn-ea"/>
-                <a:cs typeface="+mn-cs"/>
-              </a:defRPr>
-            </a:lvl2pPr>
-            <a:lvl3pPr marL="914400" indent="0" algn="ctr" defTabSz="914400" rtl="0" eaLnBrk="1" latinLnBrk="0" hangingPunct="1">
-              <a:lnSpc>
-                <a:spcPct val="90000"/>
-              </a:lnSpc>
-              <a:spcBef>
-                <a:spcPts val="500"/>
-              </a:spcBef>
-              <a:buFont typeface="Arial" panose="020B0604020202020204" pitchFamily="34" charset="0"/>
-              <a:buNone/>
-              <a:defRPr sz="1800" kern="1200">
-                <a:solidFill>
-                  <a:schemeClr val="tx1"/>
-                </a:solidFill>
-                <a:latin typeface="+mn-lt"/>
-                <a:ea typeface="+mn-ea"/>
-                <a:cs typeface="+mn-cs"/>
-              </a:defRPr>
-            </a:lvl3pPr>
-            <a:lvl4pPr marL="1371600" indent="0" algn="ctr" defTabSz="914400" rtl="0" eaLnBrk="1" latinLnBrk="0" hangingPunct="1">
-              <a:lnSpc>
-                <a:spcPct val="90000"/>
-              </a:lnSpc>
-              <a:spcBef>
-                <a:spcPts val="500"/>
-              </a:spcBef>
-              <a:buFont typeface="Arial" panose="020B0604020202020204" pitchFamily="34" charset="0"/>
-              <a:buNone/>
-              <a:defRPr sz="1600" kern="1200">
-                <a:solidFill>
-                  <a:schemeClr val="tx1"/>
-                </a:solidFill>
-                <a:latin typeface="+mn-lt"/>
-                <a:ea typeface="+mn-ea"/>
-                <a:cs typeface="+mn-cs"/>
-              </a:defRPr>
-            </a:lvl4pPr>
-            <a:lvl5pPr marL="1828800" indent="0" algn="ctr" defTabSz="914400" rtl="0" eaLnBrk="1" latinLnBrk="0" hangingPunct="1">
-              <a:lnSpc>
-                <a:spcPct val="90000"/>
-              </a:lnSpc>
-              <a:spcBef>
-                <a:spcPts val="500"/>
-              </a:spcBef>
-              <a:buFont typeface="Arial" panose="020B0604020202020204" pitchFamily="34" charset="0"/>
-              <a:buNone/>
-              <a:defRPr sz="1600" kern="1200">
-                <a:solidFill>
-                  <a:schemeClr val="tx1"/>
-                </a:solidFill>
-                <a:latin typeface="+mn-lt"/>
-                <a:ea typeface="+mn-ea"/>
-                <a:cs typeface="+mn-cs"/>
-              </a:defRPr>
-            </a:lvl5pPr>
-            <a:lvl6pPr marL="2286000" indent="0" algn="ctr" defTabSz="914400" rtl="0" eaLnBrk="1" latinLnBrk="0" hangingPunct="1">
-              <a:lnSpc>
-                <a:spcPct val="90000"/>
-              </a:lnSpc>
-              <a:spcBef>
-                <a:spcPts val="500"/>
-              </a:spcBef>
-              <a:buFont typeface="Arial" panose="020B0604020202020204" pitchFamily="34" charset="0"/>
-              <a:buNone/>
-              <a:defRPr sz="1600" kern="1200">
-                <a:solidFill>
-                  <a:schemeClr val="tx1"/>
-                </a:solidFill>
-                <a:latin typeface="+mn-lt"/>
-                <a:ea typeface="+mn-ea"/>
-                <a:cs typeface="+mn-cs"/>
-              </a:defRPr>
-            </a:lvl6pPr>
-            <a:lvl7pPr marL="2743200" indent="0" algn="ctr" defTabSz="914400" rtl="0" eaLnBrk="1" latinLnBrk="0" hangingPunct="1">
-              <a:lnSpc>
-                <a:spcPct val="90000"/>
-              </a:lnSpc>
-              <a:spcBef>
-                <a:spcPts val="500"/>
-              </a:spcBef>
-              <a:buFont typeface="Arial" panose="020B0604020202020204" pitchFamily="34" charset="0"/>
-              <a:buNone/>
-              <a:defRPr sz="1600" kern="1200">
-                <a:solidFill>
-                  <a:schemeClr val="tx1"/>
-                </a:solidFill>
-                <a:latin typeface="+mn-lt"/>
-                <a:ea typeface="+mn-ea"/>
-                <a:cs typeface="+mn-cs"/>
-              </a:defRPr>
-            </a:lvl7pPr>
-            <a:lvl8pPr marL="3200400" indent="0" algn="ctr" defTabSz="914400" rtl="0" eaLnBrk="1" latinLnBrk="0" hangingPunct="1">
-              <a:lnSpc>
-                <a:spcPct val="90000"/>
-              </a:lnSpc>
-              <a:spcBef>
-                <a:spcPts val="500"/>
-              </a:spcBef>
-              <a:buFont typeface="Arial" panose="020B0604020202020204" pitchFamily="34" charset="0"/>
-              <a:buNone/>
-              <a:defRPr sz="1600" kern="1200">
-                <a:solidFill>
-                  <a:schemeClr val="tx1"/>
-                </a:solidFill>
-                <a:latin typeface="+mn-lt"/>
-                <a:ea typeface="+mn-ea"/>
-                <a:cs typeface="+mn-cs"/>
-              </a:defRPr>
-            </a:lvl8pPr>
-            <a:lvl9pPr marL="3657600" indent="0" algn="ctr" defTabSz="914400" rtl="0" eaLnBrk="1" latinLnBrk="0" hangingPunct="1">
-              <a:lnSpc>
-                <a:spcPct val="90000"/>
-              </a:lnSpc>
-              <a:spcBef>
-                <a:spcPts val="500"/>
-              </a:spcBef>
-              <a:buFont typeface="Arial" panose="020B0604020202020204" pitchFamily="34" charset="0"/>
-              <a:buNone/>
-              <a:defRPr sz="1600" kern="1200">
-                <a:solidFill>
-                  <a:schemeClr val="tx1"/>
-                </a:solidFill>
-                <a:latin typeface="+mn-lt"/>
-                <a:ea typeface="+mn-ea"/>
-                <a:cs typeface="+mn-cs"/>
-              </a:defRPr>
-            </a:lvl9pPr>
-          </a:lstStyle>
-          <a:p>
-            <a:pPr algn="l"/>
-            <a:r>
-              <a:rPr lang="en-US" sz="2800" dirty="0">
-                <a:solidFill>
-                  <a:srgbClr val="94A3B8"/>
-                </a:solidFill>
-              </a:rPr>
-              <a:t>Report</a:t>
+              <a:t>Chat With Your Data</a:t>
             </a:r>
           </a:p>
         </p:txBody>
@@ -7564,7 +7143,7 @@
         </p:nvSpPr>
         <p:spPr>
           <a:xfrm>
-            <a:off x="711200" y="343577"/>
+            <a:off x="635000" y="343577"/>
             <a:ext cx="10515600" cy="1325563"/>
           </a:xfrm>
         </p:spPr>
@@ -8107,7 +7686,7 @@
 </file>
 
 <file path=ppt/slides/slide12.xml><?xml version="1.0" encoding="utf-8"?>
-<p:sld xmlns:a="http://schemas.openxmlformats.org/drawingml/2006/main" xmlns:r="http://schemas.openxmlformats.org/officeDocument/2006/relationships" xmlns:p="http://schemas.openxmlformats.org/presentationml/2006/main">
+<p:sld xmlns:a="http://schemas.openxmlformats.org/drawingml/2006/main" xmlns:r="http://schemas.openxmlformats.org/officeDocument/2006/relationships" xmlns:p="http://schemas.openxmlformats.org/presentationml/2006/main" show="0">
   <p:cSld>
     <p:spTree>
       <p:nvGrpSpPr>
@@ -8931,7 +8510,7 @@
           <a:p>
             <a:r>
               <a:rPr lang="en-US" sz="4800" b="1" dirty="0"/>
-              <a:t>The Whole Setup</a:t>
+              <a:t>The Whole Setup 👌🏻 </a:t>
             </a:r>
             <a:endParaRPr lang="en-US" sz="4800" b="1" dirty="0">
               <a:solidFill>
@@ -9030,7 +8609,7 @@
                 </a:solidFill>
                 <a:latin typeface="Consolas"/>
               </a:rPr>
-              <a:t>    opt.ConnectionString = cfg[</a:t>
+              <a:t>    opt.ConnectionString = config[</a:t>
             </a:r>
             <a:r>
               <a:rPr lang="en-US" sz="3200" dirty="0">
@@ -9105,7 +8684,7 @@
             <a:r>
               <a:rPr lang="en-US" sz="3200" dirty="0" err="1">
                 <a:solidFill>
-                  <a:srgbClr val="E2E8F0"/>
+                  <a:srgbClr val="22D3EE"/>
                 </a:solidFill>
                 <a:latin typeface="Consolas"/>
               </a:rPr>
@@ -9159,7 +8738,7 @@
 </file>
 
 <file path=ppt/slides/slide14.xml><?xml version="1.0" encoding="utf-8"?>
-<p:sld xmlns:a="http://schemas.openxmlformats.org/drawingml/2006/main" xmlns:r="http://schemas.openxmlformats.org/officeDocument/2006/relationships" xmlns:p="http://schemas.openxmlformats.org/presentationml/2006/main">
+<p:sld xmlns:a="http://schemas.openxmlformats.org/drawingml/2006/main" xmlns:r="http://schemas.openxmlformats.org/officeDocument/2006/relationships" xmlns:p="http://schemas.openxmlformats.org/presentationml/2006/main" show="0">
   <p:cSld>
     <p:spTree>
       <p:nvGrpSpPr>
@@ -9177,440 +8756,390 @@
       </p:grpSpPr>
       <p:sp>
         <p:nvSpPr>
-          <p:cNvPr id="2" name="Panel">
+          <p:cNvPr id="2" name="Title 1">
             <a:extLst>
               <a:ext uri="{FF2B5EF4-FFF2-40B4-BE49-F238E27FC236}">
-                <a16:creationId xmlns:a16="http://schemas.microsoft.com/office/drawing/2014/main" id="{BAA9BBAE-549B-363A-B2DE-7B82682E01A1}"/>
+                <a16:creationId xmlns:a16="http://schemas.microsoft.com/office/drawing/2014/main" id="{B78787CF-88FF-1DB2-F78F-BF6C35A2271B}"/>
               </a:ext>
             </a:extLst>
           </p:cNvPr>
+          <p:cNvSpPr>
+            <a:spLocks noGrp="1"/>
+          </p:cNvSpPr>
+          <p:nvPr>
+            <p:ph type="title"/>
+          </p:nvPr>
+        </p:nvSpPr>
+        <p:spPr>
+          <a:xfrm>
+            <a:off x="635000" y="300037"/>
+            <a:ext cx="10515600" cy="1325563"/>
+          </a:xfrm>
+        </p:spPr>
+        <p:txBody>
+          <a:bodyPr>
+            <a:normAutofit/>
+          </a:bodyPr>
+          <a:lstStyle/>
+          <a:p>
+            <a:pPr algn="l"/>
+            <a:r>
+              <a:rPr lang="en-US" sz="4800" b="1" dirty="0">
+                <a:solidFill>
+                  <a:srgbClr val="0F172A"/>
+                </a:solidFill>
+              </a:rPr>
+              <a:t>Live Demo 2 — Blazor Web App</a:t>
+            </a:r>
+          </a:p>
+        </p:txBody>
+      </p:sp>
+      <p:sp>
+        <p:nvSpPr>
+          <p:cNvPr id="1210" name="S"/>
           <p:cNvSpPr/>
           <p:nvPr/>
         </p:nvSpPr>
         <p:spPr>
           <a:xfrm>
-            <a:off x="73026" y="1270000"/>
-            <a:ext cx="12118974" cy="4318000"/>
-          </a:xfrm>
-          <a:prstGeom prst="rect">
-            <a:avLst/>
+            <a:off x="635000" y="2158999"/>
+            <a:ext cx="2872014" cy="3517405"/>
+          </a:xfrm>
+          <a:prstGeom prst="roundRect">
+            <a:avLst>
+              <a:gd name="adj" fmla="val 5000"/>
+            </a:avLst>
           </a:prstGeom>
           <a:solidFill>
-            <a:srgbClr val="0F172A"/>
+            <a:srgbClr val="FFFFFF"/>
           </a:solidFill>
-          <a:ln>
-            <a:noFill/>
+          <a:ln w="12700">
+            <a:solidFill>
+              <a:srgbClr val="E2E8F0"/>
+            </a:solidFill>
           </a:ln>
         </p:spPr>
         <p:txBody>
-          <a:bodyPr/>
-          <a:lstStyle/>
-          <a:p>
-            <a:endParaRPr lang="en-US" sz="3200"/>
-          </a:p>
-        </p:txBody>
-      </p:sp>
-      <p:sp>
-        <p:nvSpPr>
-          <p:cNvPr id="1002" name="Q"/>
-          <p:cNvSpPr txBox="1"/>
-          <p:nvPr/>
-        </p:nvSpPr>
-        <p:spPr>
-          <a:xfrm>
-            <a:off x="1016000" y="2603500"/>
-            <a:ext cx="10160000" cy="2032000"/>
-          </a:xfrm>
-          <a:prstGeom prst="rect">
-            <a:avLst/>
-          </a:prstGeom>
-          <a:noFill/>
-        </p:spPr>
-        <p:txBody>
-          <a:bodyPr wrap="square" anchor="t"/>
-          <a:lstStyle/>
+          <a:bodyPr wrap="square" lIns="180000" tIns="200000" rIns="180000" bIns="200000" anchor="t"/>
+          <a:lstStyle/>
+          <a:p>
+            <a:r>
+              <a:rPr lang="en-US" sz="2400" b="1" spc="300" dirty="0">
+                <a:solidFill>
+                  <a:srgbClr val="10B981"/>
+                </a:solidFill>
+              </a:rPr>
+              <a:t>STEP 1</a:t>
+            </a:r>
+          </a:p>
           <a:p>
             <a:pPr algn="l">
-              <a:lnSpc>
-                <a:spcPct val="105000"/>
-              </a:lnSpc>
+              <a:spcBef>
+                <a:spcPts val="400"/>
+              </a:spcBef>
             </a:pPr>
             <a:r>
-              <a:rPr lang="en-US" sz="7200" b="1" dirty="0">
-                <a:solidFill>
-                  <a:srgbClr val="FFFFFF"/>
-                </a:solidFill>
-              </a:rPr>
-              <a:t>Let's turn this </a:t>
-            </a:r>
-            <a:br>
-              <a:rPr lang="en-US" sz="7200" b="1" dirty="0">
-                <a:solidFill>
-                  <a:srgbClr val="FFFFFF"/>
-                </a:solidFill>
-              </a:rPr>
-            </a:br>
-            <a:r>
-              <a:rPr lang="en-US" sz="7200" b="1" dirty="0">
-                <a:solidFill>
-                  <a:srgbClr val="FFFFFF"/>
-                </a:solidFill>
-              </a:rPr>
-              <a:t>into a </a:t>
-            </a:r>
-            <a:r>
-              <a:rPr lang="en-US" sz="7200" b="1" i="1" dirty="0">
-                <a:solidFill>
-                  <a:srgbClr val="22D3EE"/>
-                </a:solidFill>
-              </a:rPr>
-              <a:t>real  </a:t>
-            </a:r>
-            <a:r>
-              <a:rPr lang="en-US" sz="7200" b="1" dirty="0">
-                <a:solidFill>
-                  <a:srgbClr val="22D3EE"/>
-                </a:solidFill>
-              </a:rPr>
-              <a:t>product</a:t>
-            </a:r>
-          </a:p>
-        </p:txBody>
-      </p:sp>
-      <p:sp>
-        <p:nvSpPr>
-          <p:cNvPr id="1003" name="Sub"/>
-          <p:cNvSpPr txBox="1"/>
-          <p:nvPr/>
-        </p:nvSpPr>
-        <p:spPr>
-          <a:xfrm>
-            <a:off x="1016000" y="5080000"/>
-            <a:ext cx="10160000" cy="508000"/>
-          </a:xfrm>
-          <a:prstGeom prst="rect">
-            <a:avLst/>
-          </a:prstGeom>
-          <a:noFill/>
-        </p:spPr>
-        <p:txBody>
-          <a:bodyPr wrap="square" anchor="t"/>
-          <a:lstStyle/>
-          <a:p>
-            <a:pPr algn="l"/>
-            <a:r>
-              <a:rPr lang="en-US" sz="1800" dirty="0">
-                <a:solidFill>
-                  <a:srgbClr val="94A3B8"/>
-                </a:solidFill>
-              </a:rPr>
-              <a:t>Same backend</a:t>
-            </a:r>
-            <a:r>
-              <a:rPr lang="en-US" dirty="0">
-                <a:solidFill>
-                  <a:srgbClr val="94A3B8"/>
-                </a:solidFill>
-              </a:rPr>
-              <a:t> with </a:t>
-            </a:r>
-            <a:r>
-              <a:rPr lang="en-US" b="1" dirty="0">
-                <a:solidFill>
-                  <a:srgbClr val="94A3B8"/>
-                </a:solidFill>
-              </a:rPr>
-              <a:t>V</a:t>
-            </a:r>
-            <a:r>
-              <a:rPr lang="en-US" sz="1800" b="1" dirty="0">
-                <a:solidFill>
-                  <a:srgbClr val="94A3B8"/>
-                </a:solidFill>
-              </a:rPr>
-              <a:t>oice</a:t>
-            </a:r>
-            <a:r>
-              <a:rPr lang="en-US" sz="1800" dirty="0">
-                <a:solidFill>
-                  <a:srgbClr val="94A3B8"/>
-                </a:solidFill>
-              </a:rPr>
-              <a:t> + </a:t>
-            </a:r>
-            <a:r>
-              <a:rPr lang="en-US" sz="1800" b="1" dirty="0">
-                <a:solidFill>
-                  <a:srgbClr val="94A3B8"/>
-                </a:solidFill>
-              </a:rPr>
-              <a:t>Charts</a:t>
-            </a:r>
-            <a:r>
-              <a:rPr lang="en-US" sz="1800" dirty="0">
-                <a:solidFill>
-                  <a:srgbClr val="94A3B8"/>
-                </a:solidFill>
-              </a:rPr>
-              <a:t> + </a:t>
-            </a:r>
-            <a:r>
-              <a:rPr lang="en-US" sz="1800" b="1" dirty="0">
-                <a:solidFill>
-                  <a:srgbClr val="94A3B8"/>
-                </a:solidFill>
-              </a:rPr>
-              <a:t>Excel</a:t>
-            </a:r>
-          </a:p>
-        </p:txBody>
-      </p:sp>
-      <p:sp>
-        <p:nvSpPr>
-          <p:cNvPr id="3" name="Text Placeholder 2">
-            <a:extLst>
-              <a:ext uri="{FF2B5EF4-FFF2-40B4-BE49-F238E27FC236}">
-                <a16:creationId xmlns:a16="http://schemas.microsoft.com/office/drawing/2014/main" id="{77D537CD-F344-9285-D1DE-69928DF5BEA5}"/>
-              </a:ext>
-            </a:extLst>
-          </p:cNvPr>
-          <p:cNvSpPr txBox="1">
-            <a:spLocks/>
-          </p:cNvSpPr>
-          <p:nvPr/>
-        </p:nvSpPr>
-        <p:spPr>
-          <a:xfrm>
-            <a:off x="1016000" y="1875027"/>
-            <a:ext cx="5270500" cy="558799"/>
-          </a:xfrm>
-          <a:prstGeom prst="rect">
-            <a:avLst/>
-          </a:prstGeom>
-        </p:spPr>
-        <p:txBody>
-          <a:bodyPr>
-            <a:normAutofit fontScale="92500"/>
-          </a:bodyPr>
-          <a:lstStyle>
-            <a:lvl1pPr marL="228600" indent="-228600" algn="l" defTabSz="914400" rtl="0" eaLnBrk="1" latinLnBrk="0" hangingPunct="1">
-              <a:lnSpc>
-                <a:spcPct val="90000"/>
-              </a:lnSpc>
-              <a:spcBef>
-                <a:spcPts val="1000"/>
-              </a:spcBef>
-              <a:buFont typeface="Arial" panose="020B0604020202020204" pitchFamily="34" charset="0"/>
-              <a:buChar char="•"/>
-              <a:defRPr sz="2800" kern="1200">
-                <a:solidFill>
-                  <a:srgbClr val="334155"/>
-                </a:solidFill>
-                <a:latin typeface="+mn-lt"/>
-                <a:ea typeface="+mn-ea"/>
-                <a:cs typeface="+mn-cs"/>
-              </a:defRPr>
-            </a:lvl1pPr>
-            <a:lvl2pPr marL="685800" indent="-228600" algn="l" defTabSz="914400" rtl="0" eaLnBrk="1" latinLnBrk="0" hangingPunct="1">
-              <a:lnSpc>
-                <a:spcPct val="90000"/>
-              </a:lnSpc>
+              <a:rPr lang="en-US" sz="5400" b="1" dirty="0">
+                <a:solidFill>
+                  <a:srgbClr val="F43F5E"/>
+                </a:solidFill>
+              </a:rPr>
+              <a:t>🎤</a:t>
+            </a:r>
+          </a:p>
+          <a:p>
+            <a:pPr algn="l">
               <a:spcBef>
                 <a:spcPts val="500"/>
               </a:spcBef>
-              <a:buFont typeface="Arial" panose="020B0604020202020204" pitchFamily="34" charset="0"/>
-              <a:buChar char="•"/>
-              <a:defRPr sz="2400" kern="1200">
-                <a:solidFill>
-                  <a:schemeClr val="tx1"/>
-                </a:solidFill>
-                <a:latin typeface="+mn-lt"/>
-                <a:ea typeface="+mn-ea"/>
-                <a:cs typeface="+mn-cs"/>
-              </a:defRPr>
-            </a:lvl2pPr>
-            <a:lvl3pPr marL="1143000" indent="-228600" algn="l" defTabSz="914400" rtl="0" eaLnBrk="1" latinLnBrk="0" hangingPunct="1">
-              <a:lnSpc>
-                <a:spcPct val="90000"/>
-              </a:lnSpc>
+            </a:pPr>
+            <a:r>
+              <a:rPr lang="en-US" sz="3200" b="1" dirty="0">
+                <a:solidFill>
+                  <a:srgbClr val="0F172A"/>
+                </a:solidFill>
+              </a:rPr>
+              <a:t>Speak</a:t>
+            </a:r>
+          </a:p>
+          <a:p>
+            <a:pPr algn="l">
+              <a:spcBef>
+                <a:spcPts val="400"/>
+              </a:spcBef>
+            </a:pPr>
+            <a:r>
+              <a:rPr lang="en-US" sz="2400" i="1" dirty="0">
+                <a:solidFill>
+                  <a:srgbClr val="64748B"/>
+                </a:solidFill>
+              </a:rPr>
+              <a:t>"Show sales trends last 6 months"</a:t>
+            </a:r>
+          </a:p>
+        </p:txBody>
+      </p:sp>
+      <p:sp>
+        <p:nvSpPr>
+          <p:cNvPr id="1211" name="S"/>
+          <p:cNvSpPr/>
+          <p:nvPr/>
+        </p:nvSpPr>
+        <p:spPr>
+          <a:xfrm>
+            <a:off x="3321958" y="2158999"/>
+            <a:ext cx="2872014" cy="3517405"/>
+          </a:xfrm>
+          <a:prstGeom prst="roundRect">
+            <a:avLst>
+              <a:gd name="adj" fmla="val 5000"/>
+            </a:avLst>
+          </a:prstGeom>
+          <a:solidFill>
+            <a:srgbClr val="EAEAEA"/>
+          </a:solidFill>
+          <a:ln w="12700">
+            <a:solidFill>
+              <a:srgbClr val="E2E8F0"/>
+            </a:solidFill>
+          </a:ln>
+        </p:spPr>
+        <p:txBody>
+          <a:bodyPr wrap="square" lIns="180000" tIns="200000" rIns="180000" bIns="200000" anchor="t"/>
+          <a:lstStyle/>
+          <a:p>
+            <a:pPr algn="l"/>
+            <a:r>
+              <a:rPr lang="en-US" sz="2400" b="1" spc="300" dirty="0">
+                <a:solidFill>
+                  <a:srgbClr val="22D3EE"/>
+                </a:solidFill>
+              </a:rPr>
+              <a:t>STEP 2</a:t>
+            </a:r>
+          </a:p>
+          <a:p>
+            <a:pPr algn="l">
+              <a:spcBef>
+                <a:spcPts val="400"/>
+              </a:spcBef>
+            </a:pPr>
+            <a:r>
+              <a:rPr lang="en-US" sz="5400" b="1" dirty="0">
+                <a:solidFill>
+                  <a:srgbClr val="22D3EE"/>
+                </a:solidFill>
+              </a:rPr>
+              <a:t>⚡</a:t>
+            </a:r>
+          </a:p>
+          <a:p>
+            <a:pPr algn="l">
               <a:spcBef>
                 <a:spcPts val="500"/>
               </a:spcBef>
-              <a:buFont typeface="Arial" panose="020B0604020202020204" pitchFamily="34" charset="0"/>
-              <a:buChar char="•"/>
-              <a:defRPr sz="2000" kern="1200">
-                <a:solidFill>
-                  <a:schemeClr val="tx1"/>
-                </a:solidFill>
-                <a:latin typeface="+mn-lt"/>
-                <a:ea typeface="+mn-ea"/>
-                <a:cs typeface="+mn-cs"/>
-              </a:defRPr>
-            </a:lvl3pPr>
-            <a:lvl4pPr marL="1600200" indent="-228600" algn="l" defTabSz="914400" rtl="0" eaLnBrk="1" latinLnBrk="0" hangingPunct="1">
-              <a:lnSpc>
-                <a:spcPct val="90000"/>
-              </a:lnSpc>
+            </a:pPr>
+            <a:r>
+              <a:rPr lang="en-US" sz="3200" b="1" dirty="0">
+                <a:solidFill>
+                  <a:srgbClr val="0F172A"/>
+                </a:solidFill>
+              </a:rPr>
+              <a:t>Query runs</a:t>
+            </a:r>
+          </a:p>
+          <a:p>
+            <a:pPr algn="l">
+              <a:spcBef>
+                <a:spcPts val="400"/>
+              </a:spcBef>
+            </a:pPr>
+            <a:r>
+              <a:rPr lang="en-US" sz="2400" i="1" dirty="0">
+                <a:solidFill>
+                  <a:srgbClr val="64748B"/>
+                </a:solidFill>
+              </a:rPr>
+              <a:t>Same pipeline. Faster feedback.</a:t>
+            </a:r>
+          </a:p>
+        </p:txBody>
+      </p:sp>
+      <p:sp>
+        <p:nvSpPr>
+          <p:cNvPr id="1212" name="S"/>
+          <p:cNvSpPr/>
+          <p:nvPr/>
+        </p:nvSpPr>
+        <p:spPr>
+          <a:xfrm>
+            <a:off x="6052458" y="2158999"/>
+            <a:ext cx="2872014" cy="3517405"/>
+          </a:xfrm>
+          <a:prstGeom prst="roundRect">
+            <a:avLst>
+              <a:gd name="adj" fmla="val 5000"/>
+            </a:avLst>
+          </a:prstGeom>
+          <a:solidFill>
+            <a:srgbClr val="C0C0C0"/>
+          </a:solidFill>
+          <a:ln w="12700">
+            <a:solidFill>
+              <a:srgbClr val="E2E8F0"/>
+            </a:solidFill>
+          </a:ln>
+        </p:spPr>
+        <p:txBody>
+          <a:bodyPr wrap="square" lIns="180000" tIns="200000" rIns="180000" bIns="200000" anchor="t"/>
+          <a:lstStyle/>
+          <a:p>
+            <a:pPr algn="l"/>
+            <a:r>
+              <a:rPr lang="en-US" sz="2400" b="1" spc="300" dirty="0">
+                <a:solidFill>
+                  <a:srgbClr val="6366F1"/>
+                </a:solidFill>
+              </a:rPr>
+              <a:t>STEP 3</a:t>
+            </a:r>
+          </a:p>
+          <a:p>
+            <a:pPr algn="l">
+              <a:spcBef>
+                <a:spcPts val="400"/>
+              </a:spcBef>
+            </a:pPr>
+            <a:r>
+              <a:rPr lang="en-US" sz="5400" b="1" dirty="0">
+                <a:solidFill>
+                  <a:srgbClr val="6366F1"/>
+                </a:solidFill>
+              </a:rPr>
+              <a:t>📊</a:t>
+            </a:r>
+          </a:p>
+          <a:p>
+            <a:pPr algn="l">
               <a:spcBef>
                 <a:spcPts val="500"/>
               </a:spcBef>
-              <a:buFont typeface="Arial" panose="020B0604020202020204" pitchFamily="34" charset="0"/>
-              <a:buChar char="•"/>
-              <a:defRPr sz="1800" kern="1200">
-                <a:solidFill>
-                  <a:schemeClr val="tx1"/>
-                </a:solidFill>
-                <a:latin typeface="+mn-lt"/>
-                <a:ea typeface="+mn-ea"/>
-                <a:cs typeface="+mn-cs"/>
-              </a:defRPr>
-            </a:lvl4pPr>
-            <a:lvl5pPr marL="2057400" indent="-228600" algn="l" defTabSz="914400" rtl="0" eaLnBrk="1" latinLnBrk="0" hangingPunct="1">
-              <a:lnSpc>
-                <a:spcPct val="90000"/>
-              </a:lnSpc>
+            </a:pPr>
+            <a:r>
+              <a:rPr lang="en-US" sz="3200" b="1" dirty="0">
+                <a:solidFill>
+                  <a:srgbClr val="0F172A"/>
+                </a:solidFill>
+              </a:rPr>
+              <a:t>Chart renders</a:t>
+            </a:r>
+          </a:p>
+          <a:p>
+            <a:pPr algn="l">
+              <a:spcBef>
+                <a:spcPts val="400"/>
+              </a:spcBef>
+            </a:pPr>
+            <a:r>
+              <a:rPr lang="en-US" sz="2400" i="1" dirty="0">
+                <a:solidFill>
+                  <a:schemeClr val="bg1"/>
+                </a:solidFill>
+              </a:rPr>
+              <a:t>Table + chart</a:t>
+            </a:r>
+          </a:p>
+        </p:txBody>
+      </p:sp>
+      <p:sp>
+        <p:nvSpPr>
+          <p:cNvPr id="1213" name="S"/>
+          <p:cNvSpPr/>
+          <p:nvPr/>
+        </p:nvSpPr>
+        <p:spPr>
+          <a:xfrm>
+            <a:off x="8782958" y="2158999"/>
+            <a:ext cx="2872014" cy="3517405"/>
+          </a:xfrm>
+          <a:prstGeom prst="roundRect">
+            <a:avLst>
+              <a:gd name="adj" fmla="val 5000"/>
+            </a:avLst>
+          </a:prstGeom>
+          <a:solidFill>
+            <a:srgbClr val="9D9D9D"/>
+          </a:solidFill>
+          <a:ln w="12700">
+            <a:solidFill>
+              <a:srgbClr val="E2E8F0"/>
+            </a:solidFill>
+          </a:ln>
+        </p:spPr>
+        <p:txBody>
+          <a:bodyPr wrap="square" lIns="180000" tIns="200000" rIns="180000" bIns="200000" anchor="t"/>
+          <a:lstStyle/>
+          <a:p>
+            <a:r>
+              <a:rPr lang="en-US" sz="2400" b="1" spc="300" dirty="0">
+                <a:solidFill>
+                  <a:srgbClr val="F43F5E"/>
+                </a:solidFill>
+              </a:rPr>
+              <a:t>STEP 4</a:t>
+            </a:r>
+          </a:p>
+          <a:p>
+            <a:pPr algn="l">
+              <a:spcBef>
+                <a:spcPts val="400"/>
+              </a:spcBef>
+            </a:pPr>
+            <a:r>
+              <a:rPr lang="en-US" sz="5400" b="1" dirty="0">
+                <a:solidFill>
+                  <a:srgbClr val="10B981"/>
+                </a:solidFill>
+              </a:rPr>
+              <a:t>📄</a:t>
+            </a:r>
+          </a:p>
+          <a:p>
+            <a:pPr algn="l">
               <a:spcBef>
                 <a:spcPts val="500"/>
               </a:spcBef>
-              <a:buFont typeface="Arial" panose="020B0604020202020204" pitchFamily="34" charset="0"/>
-              <a:buChar char="•"/>
-              <a:defRPr sz="1800" kern="1200">
-                <a:solidFill>
-                  <a:schemeClr val="tx1"/>
-                </a:solidFill>
-                <a:latin typeface="+mn-lt"/>
-                <a:ea typeface="+mn-ea"/>
-                <a:cs typeface="+mn-cs"/>
-              </a:defRPr>
-            </a:lvl5pPr>
-            <a:lvl6pPr marL="2514600" indent="-228600" algn="l" defTabSz="914400" rtl="0" eaLnBrk="1" latinLnBrk="0" hangingPunct="1">
-              <a:lnSpc>
-                <a:spcPct val="90000"/>
-              </a:lnSpc>
+            </a:pPr>
+            <a:r>
+              <a:rPr lang="en-US" sz="3200" b="1" dirty="0">
+                <a:solidFill>
+                  <a:srgbClr val="0F172A"/>
+                </a:solidFill>
+              </a:rPr>
+              <a:t>Export</a:t>
+            </a:r>
+          </a:p>
+          <a:p>
+            <a:pPr algn="l">
               <a:spcBef>
-                <a:spcPts val="500"/>
+                <a:spcPts val="400"/>
               </a:spcBef>
-              <a:buFont typeface="Arial" panose="020B0604020202020204" pitchFamily="34" charset="0"/>
-              <a:buChar char="•"/>
-              <a:defRPr sz="1800" kern="1200">
-                <a:solidFill>
-                  <a:schemeClr val="tx1"/>
-                </a:solidFill>
-                <a:latin typeface="+mn-lt"/>
-                <a:ea typeface="+mn-ea"/>
-                <a:cs typeface="+mn-cs"/>
-              </a:defRPr>
-            </a:lvl6pPr>
-            <a:lvl7pPr marL="2971800" indent="-228600" algn="l" defTabSz="914400" rtl="0" eaLnBrk="1" latinLnBrk="0" hangingPunct="1">
-              <a:lnSpc>
-                <a:spcPct val="90000"/>
-              </a:lnSpc>
-              <a:spcBef>
-                <a:spcPts val="500"/>
-              </a:spcBef>
-              <a:buFont typeface="Arial" panose="020B0604020202020204" pitchFamily="34" charset="0"/>
-              <a:buChar char="•"/>
-              <a:defRPr sz="1800" kern="1200">
-                <a:solidFill>
-                  <a:schemeClr val="tx1"/>
-                </a:solidFill>
-                <a:latin typeface="+mn-lt"/>
-                <a:ea typeface="+mn-ea"/>
-                <a:cs typeface="+mn-cs"/>
-              </a:defRPr>
-            </a:lvl7pPr>
-            <a:lvl8pPr marL="3429000" indent="-228600" algn="l" defTabSz="914400" rtl="0" eaLnBrk="1" latinLnBrk="0" hangingPunct="1">
-              <a:lnSpc>
-                <a:spcPct val="90000"/>
-              </a:lnSpc>
-              <a:spcBef>
-                <a:spcPts val="500"/>
-              </a:spcBef>
-              <a:buFont typeface="Arial" panose="020B0604020202020204" pitchFamily="34" charset="0"/>
-              <a:buChar char="•"/>
-              <a:defRPr sz="1800" kern="1200">
-                <a:solidFill>
-                  <a:schemeClr val="tx1"/>
-                </a:solidFill>
-                <a:latin typeface="+mn-lt"/>
-                <a:ea typeface="+mn-ea"/>
-                <a:cs typeface="+mn-cs"/>
-              </a:defRPr>
-            </a:lvl8pPr>
-            <a:lvl9pPr marL="3886200" indent="-228600" algn="l" defTabSz="914400" rtl="0" eaLnBrk="1" latinLnBrk="0" hangingPunct="1">
-              <a:lnSpc>
-                <a:spcPct val="90000"/>
-              </a:lnSpc>
-              <a:spcBef>
-                <a:spcPts val="500"/>
-              </a:spcBef>
-              <a:buFont typeface="Arial" panose="020B0604020202020204" pitchFamily="34" charset="0"/>
-              <a:buChar char="•"/>
-              <a:defRPr sz="1800" kern="1200">
-                <a:solidFill>
-                  <a:schemeClr val="tx1"/>
-                </a:solidFill>
-                <a:latin typeface="+mn-lt"/>
-                <a:ea typeface="+mn-ea"/>
-                <a:cs typeface="+mn-cs"/>
-              </a:defRPr>
-            </a:lvl9pPr>
-          </a:lstStyle>
-          <a:p>
-            <a:pPr>
-              <a:buFont typeface="Arial" panose="020B0604020202020204" pitchFamily="34" charset="0"/>
-              <a:buNone/>
             </a:pPr>
             <a:r>
-              <a:rPr lang="en-US" sz="3200" b="1" spc="400" dirty="0">
-                <a:solidFill>
-                  <a:srgbClr val="22D3EE"/>
-                </a:solidFill>
-              </a:rPr>
-              <a:t>TALK TO YOUR DATA</a:t>
-            </a:r>
-          </a:p>
-        </p:txBody>
-      </p:sp>
-      <p:sp>
-        <p:nvSpPr>
-          <p:cNvPr id="4" name="AccentBar">
-            <a:extLst>
-              <a:ext uri="{FF2B5EF4-FFF2-40B4-BE49-F238E27FC236}">
-                <a16:creationId xmlns:a16="http://schemas.microsoft.com/office/drawing/2014/main" id="{8160ADC7-A2E8-EA22-303B-688EC857D850}"/>
-              </a:ext>
-            </a:extLst>
-          </p:cNvPr>
-          <p:cNvSpPr/>
-          <p:nvPr/>
-        </p:nvSpPr>
-        <p:spPr>
-          <a:xfrm>
-            <a:off x="1095581" y="1784351"/>
-            <a:ext cx="4860000" cy="76200"/>
-          </a:xfrm>
-          <a:prstGeom prst="rect">
-            <a:avLst/>
-          </a:prstGeom>
-          <a:solidFill>
-            <a:srgbClr val="22D3EE"/>
-          </a:solidFill>
-          <a:ln>
-            <a:noFill/>
-          </a:ln>
-        </p:spPr>
-        <p:txBody>
-          <a:bodyPr/>
-          <a:lstStyle/>
-          <a:p>
-            <a:endParaRPr lang="en-US" dirty="0"/>
+              <a:rPr lang="en-US" sz="2400" i="1" dirty="0">
+                <a:solidFill>
+                  <a:schemeClr val="bg1"/>
+                </a:solidFill>
+              </a:rPr>
+              <a:t>Excel report.</a:t>
+            </a:r>
           </a:p>
         </p:txBody>
       </p:sp>
     </p:spTree>
     <p:extLst>
       <p:ext uri="{BB962C8B-B14F-4D97-AF65-F5344CB8AC3E}">
-        <p14:creationId xmlns:p14="http://schemas.microsoft.com/office/powerpoint/2010/main" val="2413001557"/>
+        <p14:creationId xmlns:p14="http://schemas.microsoft.com/office/powerpoint/2010/main" val="3483866631"/>
       </p:ext>
     </p:extLst>
   </p:cSld>
@@ -9639,359 +9168,23 @@
       </p:grpSpPr>
       <p:sp>
         <p:nvSpPr>
-          <p:cNvPr id="2" name="Title 1">
+          <p:cNvPr id="2" name="Panel">
             <a:extLst>
               <a:ext uri="{FF2B5EF4-FFF2-40B4-BE49-F238E27FC236}">
-                <a16:creationId xmlns:a16="http://schemas.microsoft.com/office/drawing/2014/main" id="{CF81DA7E-317D-1151-40A8-0BFF0DA66D28}"/>
+                <a16:creationId xmlns:a16="http://schemas.microsoft.com/office/drawing/2014/main" id="{BAA9BBAE-549B-363A-B2DE-7B82682E01A1}"/>
               </a:ext>
             </a:extLst>
           </p:cNvPr>
-          <p:cNvSpPr>
-            <a:spLocks noGrp="1"/>
-          </p:cNvSpPr>
-          <p:nvPr>
-            <p:ph type="title"/>
-          </p:nvPr>
+          <p:cNvSpPr/>
+          <p:nvPr/>
         </p:nvSpPr>
         <p:spPr>
           <a:xfrm>
-            <a:off x="647700" y="353218"/>
-            <a:ext cx="10909300" cy="1325563"/>
-          </a:xfrm>
-        </p:spPr>
-        <p:txBody>
-          <a:bodyPr>
-            <a:normAutofit fontScale="90000"/>
-          </a:bodyPr>
-          <a:lstStyle/>
-          <a:p>
-            <a:r>
-              <a:rPr lang="en-US" sz="4800" b="1" dirty="0">
-                <a:solidFill>
-                  <a:srgbClr val="0F172A"/>
-                </a:solidFill>
-              </a:rPr>
-              <a:t>Same Backend, </a:t>
-            </a:r>
-            <a:r>
-              <a:rPr lang="en-US" sz="4800" dirty="0">
-                <a:solidFill>
-                  <a:srgbClr val="0F172A"/>
-                </a:solidFill>
-              </a:rPr>
-              <a:t>Closer to a </a:t>
-            </a:r>
-            <a:r>
-              <a:rPr lang="en-US" sz="4800" b="1" dirty="0"/>
-              <a:t>Real Product</a:t>
-            </a:r>
-            <a:endParaRPr lang="en-US" sz="4800" b="1" dirty="0">
-              <a:solidFill>
-                <a:srgbClr val="0F172A"/>
-              </a:solidFill>
-            </a:endParaRPr>
-          </a:p>
-        </p:txBody>
-      </p:sp>
-      <p:sp>
-        <p:nvSpPr>
-          <p:cNvPr id="1100" name="F"/>
-          <p:cNvSpPr/>
-          <p:nvPr/>
-        </p:nvSpPr>
-        <p:spPr>
-          <a:xfrm>
-            <a:off x="635000" y="1778000"/>
-            <a:ext cx="2540000" cy="2159000"/>
-          </a:xfrm>
-          <a:prstGeom prst="roundRect">
-            <a:avLst>
-              <a:gd name="adj" fmla="val 6000"/>
-            </a:avLst>
-          </a:prstGeom>
-          <a:solidFill>
-            <a:srgbClr val="FFFFFF"/>
-          </a:solidFill>
-          <a:ln w="12700">
-            <a:solidFill>
-              <a:srgbClr val="E2E8F0"/>
-            </a:solidFill>
-          </a:ln>
-        </p:spPr>
-        <p:txBody>
-          <a:bodyPr wrap="square" lIns="180000" tIns="220000" rIns="180000" bIns="180000" anchor="t"/>
-          <a:lstStyle/>
-          <a:p>
-            <a:pPr algn="l"/>
-            <a:r>
-              <a:rPr lang="en-US" sz="4800" b="1" dirty="0">
-                <a:solidFill>
-                  <a:srgbClr val="F43F5E"/>
-                </a:solidFill>
-              </a:rPr>
-              <a:t>🎤</a:t>
-            </a:r>
-          </a:p>
-          <a:p>
-            <a:pPr algn="l">
-              <a:spcBef>
-                <a:spcPts val="600"/>
-              </a:spcBef>
-            </a:pPr>
-            <a:r>
-              <a:rPr lang="en-US" sz="2800" b="1" dirty="0">
-                <a:solidFill>
-                  <a:srgbClr val="0F172A"/>
-                </a:solidFill>
-              </a:rPr>
-              <a:t>Voice input</a:t>
-            </a:r>
-          </a:p>
-          <a:p>
-            <a:pPr algn="l">
-              <a:spcBef>
-                <a:spcPts val="300"/>
-              </a:spcBef>
-            </a:pPr>
-            <a:r>
-              <a:rPr lang="en-US" sz="2000" dirty="0">
-                <a:solidFill>
-                  <a:srgbClr val="64748B"/>
-                </a:solidFill>
-              </a:rPr>
-              <a:t>Talk to your data</a:t>
-            </a:r>
-          </a:p>
-        </p:txBody>
-      </p:sp>
-      <p:sp>
-        <p:nvSpPr>
-          <p:cNvPr id="1101" name="F"/>
-          <p:cNvSpPr/>
-          <p:nvPr/>
-        </p:nvSpPr>
-        <p:spPr>
-          <a:xfrm>
-            <a:off x="3365499" y="1778000"/>
-            <a:ext cx="2540001" cy="2159000"/>
-          </a:xfrm>
-          <a:prstGeom prst="roundRect">
-            <a:avLst>
-              <a:gd name="adj" fmla="val 6000"/>
-            </a:avLst>
-          </a:prstGeom>
-          <a:solidFill>
-            <a:srgbClr val="FFFFFF"/>
-          </a:solidFill>
-          <a:ln w="12700">
-            <a:solidFill>
-              <a:srgbClr val="E2E8F0"/>
-            </a:solidFill>
-          </a:ln>
-        </p:spPr>
-        <p:txBody>
-          <a:bodyPr wrap="square" lIns="180000" tIns="220000" rIns="180000" bIns="180000" anchor="t"/>
-          <a:lstStyle/>
-          <a:p>
-            <a:pPr algn="l"/>
-            <a:r>
-              <a:rPr lang="en-US" sz="4400" b="1" dirty="0">
-                <a:solidFill>
-                  <a:srgbClr val="22D3EE"/>
-                </a:solidFill>
-              </a:rPr>
-              <a:t>⚡</a:t>
-            </a:r>
-          </a:p>
-          <a:p>
-            <a:pPr algn="l">
-              <a:spcBef>
-                <a:spcPts val="600"/>
-              </a:spcBef>
-            </a:pPr>
-            <a:r>
-              <a:rPr lang="en-US" sz="2800" b="1" dirty="0">
-                <a:solidFill>
-                  <a:srgbClr val="0F172A"/>
-                </a:solidFill>
-              </a:rPr>
-              <a:t>Live query</a:t>
-            </a:r>
-          </a:p>
-          <a:p>
-            <a:pPr algn="l">
-              <a:spcBef>
-                <a:spcPts val="300"/>
-              </a:spcBef>
-            </a:pPr>
-            <a:r>
-              <a:rPr lang="en-US" sz="2000" dirty="0">
-                <a:solidFill>
-                  <a:srgbClr val="64748B"/>
-                </a:solidFill>
-              </a:rPr>
-              <a:t>Real-time to SQL</a:t>
-            </a:r>
-          </a:p>
-        </p:txBody>
-      </p:sp>
-      <p:sp>
-        <p:nvSpPr>
-          <p:cNvPr id="1102" name="F"/>
-          <p:cNvSpPr/>
-          <p:nvPr/>
-        </p:nvSpPr>
-        <p:spPr>
-          <a:xfrm>
-            <a:off x="6096000" y="1778000"/>
-            <a:ext cx="2540000" cy="2159000"/>
-          </a:xfrm>
-          <a:prstGeom prst="roundRect">
-            <a:avLst>
-              <a:gd name="adj" fmla="val 6000"/>
-            </a:avLst>
-          </a:prstGeom>
-          <a:solidFill>
-            <a:srgbClr val="FFFFFF"/>
-          </a:solidFill>
-          <a:ln w="12700">
-            <a:solidFill>
-              <a:srgbClr val="E2E8F0"/>
-            </a:solidFill>
-          </a:ln>
-        </p:spPr>
-        <p:txBody>
-          <a:bodyPr wrap="square" lIns="180000" tIns="220000" rIns="180000" bIns="180000" anchor="t"/>
-          <a:lstStyle/>
-          <a:p>
-            <a:pPr algn="l"/>
-            <a:r>
-              <a:rPr lang="en-US" sz="4800" b="1" dirty="0">
-                <a:solidFill>
-                  <a:srgbClr val="6366F1"/>
-                </a:solidFill>
-              </a:rPr>
-              <a:t>📊</a:t>
-            </a:r>
-          </a:p>
-          <a:p>
-            <a:pPr algn="l">
-              <a:spcBef>
-                <a:spcPts val="600"/>
-              </a:spcBef>
-            </a:pPr>
-            <a:r>
-              <a:rPr lang="en-US" sz="2800" b="1" dirty="0">
-                <a:solidFill>
-                  <a:srgbClr val="0F172A"/>
-                </a:solidFill>
-              </a:rPr>
-              <a:t>Charts</a:t>
-            </a:r>
-          </a:p>
-          <a:p>
-            <a:pPr algn="l">
-              <a:spcBef>
-                <a:spcPts val="300"/>
-              </a:spcBef>
-            </a:pPr>
-            <a:r>
-              <a:rPr lang="en-US" sz="2000" dirty="0">
-                <a:solidFill>
-                  <a:srgbClr val="64748B"/>
-                </a:solidFill>
-              </a:rPr>
-              <a:t>Visualize results</a:t>
-            </a:r>
-          </a:p>
-        </p:txBody>
-      </p:sp>
-      <p:sp>
-        <p:nvSpPr>
-          <p:cNvPr id="1103" name="F"/>
-          <p:cNvSpPr/>
-          <p:nvPr/>
-        </p:nvSpPr>
-        <p:spPr>
-          <a:xfrm>
-            <a:off x="8826500" y="1778000"/>
-            <a:ext cx="2730500" cy="2159000"/>
-          </a:xfrm>
-          <a:prstGeom prst="roundRect">
-            <a:avLst>
-              <a:gd name="adj" fmla="val 6000"/>
-            </a:avLst>
-          </a:prstGeom>
-          <a:solidFill>
-            <a:srgbClr val="FFFFFF"/>
-          </a:solidFill>
-          <a:ln w="12700">
-            <a:solidFill>
-              <a:srgbClr val="E2E8F0"/>
-            </a:solidFill>
-          </a:ln>
-        </p:spPr>
-        <p:txBody>
-          <a:bodyPr wrap="square" lIns="180000" tIns="220000" rIns="180000" bIns="180000" anchor="t"/>
-          <a:lstStyle/>
-          <a:p>
-            <a:pPr algn="l"/>
-            <a:r>
-              <a:rPr lang="en-US" sz="4800" b="1" dirty="0">
-                <a:solidFill>
-                  <a:srgbClr val="10B981"/>
-                </a:solidFill>
-              </a:rPr>
-              <a:t>📄</a:t>
-            </a:r>
-          </a:p>
-          <a:p>
-            <a:pPr algn="l">
-              <a:spcBef>
-                <a:spcPts val="600"/>
-              </a:spcBef>
-            </a:pPr>
-            <a:r>
-              <a:rPr lang="en-US" sz="2800" b="1" dirty="0">
-                <a:solidFill>
-                  <a:srgbClr val="0F172A"/>
-                </a:solidFill>
-              </a:rPr>
-              <a:t>Excel</a:t>
-            </a:r>
-          </a:p>
-          <a:p>
-            <a:pPr algn="l">
-              <a:spcBef>
-                <a:spcPts val="300"/>
-              </a:spcBef>
-            </a:pPr>
-            <a:r>
-              <a:rPr lang="en-US" sz="2000" dirty="0">
-                <a:solidFill>
-                  <a:srgbClr val="64748B"/>
-                </a:solidFill>
-              </a:rPr>
-              <a:t>One click to report</a:t>
-            </a:r>
-          </a:p>
-        </p:txBody>
-      </p:sp>
-      <p:sp>
-        <p:nvSpPr>
-          <p:cNvPr id="1110" name="Banner"/>
-          <p:cNvSpPr/>
-          <p:nvPr/>
-        </p:nvSpPr>
-        <p:spPr>
-          <a:xfrm>
-            <a:off x="635000" y="4318000"/>
-            <a:ext cx="10731500" cy="1524000"/>
-          </a:xfrm>
-          <a:prstGeom prst="roundRect">
-            <a:avLst>
-              <a:gd name="adj" fmla="val 6000"/>
-            </a:avLst>
+            <a:off x="73026" y="1270000"/>
+            <a:ext cx="12118974" cy="4318000"/>
+          </a:xfrm>
+          <a:prstGeom prst="rect">
+            <a:avLst/>
           </a:prstGeom>
           <a:solidFill>
             <a:srgbClr val="0F172A"/>
@@ -10001,495 +9194,23 @@
           </a:ln>
         </p:spPr>
         <p:txBody>
-          <a:bodyPr wrap="square" lIns="280000" tIns="200000" rIns="280000" bIns="200000" anchor="ctr"/>
-          <a:lstStyle/>
-          <a:p>
-            <a:pPr algn="l"/>
-            <a:r>
-              <a:rPr lang="en-US" sz="1400" b="1" spc="300" dirty="0">
-                <a:solidFill>
-                  <a:srgbClr val="22D3EE"/>
-                </a:solidFill>
-              </a:rPr>
-              <a:t>THE BACKEND DIDN'T CHANGE.</a:t>
-            </a:r>
-          </a:p>
-          <a:p>
-            <a:pPr algn="l">
-              <a:spcBef>
-                <a:spcPts val="400"/>
-              </a:spcBef>
-            </a:pPr>
-            <a:r>
-              <a:rPr lang="en-US" sz="2400" dirty="0">
-                <a:solidFill>
-                  <a:srgbClr val="FFFFFF"/>
-                </a:solidFill>
-              </a:rPr>
-              <a:t>Blazor reuses the exact same module. </a:t>
-            </a:r>
-            <a:br>
-              <a:rPr lang="en-US" sz="2400" dirty="0">
-                <a:solidFill>
-                  <a:srgbClr val="FFFFFF"/>
-                </a:solidFill>
-              </a:rPr>
-            </a:br>
-            <a:r>
-              <a:rPr lang="en-US" sz="2400" dirty="0">
-                <a:solidFill>
-                  <a:srgbClr val="FFFFFF"/>
-                </a:solidFill>
-              </a:rPr>
-              <a:t>The frontend is where </a:t>
-            </a:r>
-            <a:r>
-              <a:rPr lang="en-US" sz="2400" i="1" dirty="0">
-                <a:solidFill>
-                  <a:srgbClr val="22D3EE"/>
-                </a:solidFill>
-              </a:rPr>
-              <a:t>the product</a:t>
-            </a:r>
-            <a:r>
-              <a:rPr lang="en-US" sz="2400" dirty="0">
-                <a:solidFill>
-                  <a:srgbClr val="FFFFFF"/>
-                </a:solidFill>
-              </a:rPr>
-              <a:t> lives.</a:t>
-            </a:r>
-          </a:p>
-        </p:txBody>
-      </p:sp>
-    </p:spTree>
-    <p:extLst>
-      <p:ext uri="{BB962C8B-B14F-4D97-AF65-F5344CB8AC3E}">
-        <p14:creationId xmlns:p14="http://schemas.microsoft.com/office/powerpoint/2010/main" val="4276252591"/>
-      </p:ext>
-    </p:extLst>
-  </p:cSld>
-  <p:clrMapOvr>
-    <a:masterClrMapping/>
-  </p:clrMapOvr>
-</p:sld>
-</file>
-
-<file path=ppt/slides/slide16.xml><?xml version="1.0" encoding="utf-8"?>
-<p:sld xmlns:a="http://schemas.openxmlformats.org/drawingml/2006/main" xmlns:r="http://schemas.openxmlformats.org/officeDocument/2006/relationships" xmlns:p="http://schemas.openxmlformats.org/presentationml/2006/main">
-  <p:cSld>
-    <p:spTree>
-      <p:nvGrpSpPr>
-        <p:cNvPr id="1" name=""/>
-        <p:cNvGrpSpPr/>
-        <p:nvPr/>
-      </p:nvGrpSpPr>
-      <p:grpSpPr>
-        <a:xfrm>
-          <a:off x="0" y="0"/>
-          <a:ext cx="0" cy="0"/>
-          <a:chOff x="0" y="0"/>
-          <a:chExt cx="0" cy="0"/>
-        </a:xfrm>
-      </p:grpSpPr>
-      <p:sp>
-        <p:nvSpPr>
-          <p:cNvPr id="2" name="Title 1">
-            <a:extLst>
-              <a:ext uri="{FF2B5EF4-FFF2-40B4-BE49-F238E27FC236}">
-                <a16:creationId xmlns:a16="http://schemas.microsoft.com/office/drawing/2014/main" id="{B78787CF-88FF-1DB2-F78F-BF6C35A2271B}"/>
-              </a:ext>
-            </a:extLst>
-          </p:cNvPr>
-          <p:cNvSpPr>
-            <a:spLocks noGrp="1"/>
-          </p:cNvSpPr>
-          <p:nvPr>
-            <p:ph type="title"/>
-          </p:nvPr>
+          <a:bodyPr/>
+          <a:lstStyle/>
+          <a:p>
+            <a:endParaRPr lang="en-US" sz="3200"/>
+          </a:p>
+        </p:txBody>
+      </p:sp>
+      <p:sp>
+        <p:nvSpPr>
+          <p:cNvPr id="1002" name="Q"/>
+          <p:cNvSpPr txBox="1"/>
+          <p:nvPr/>
         </p:nvSpPr>
         <p:spPr>
           <a:xfrm>
-            <a:off x="635000" y="300037"/>
-            <a:ext cx="10515600" cy="1325563"/>
-          </a:xfrm>
-        </p:spPr>
-        <p:txBody>
-          <a:bodyPr>
-            <a:normAutofit/>
-          </a:bodyPr>
-          <a:lstStyle/>
-          <a:p>
-            <a:pPr algn="l"/>
-            <a:r>
-              <a:rPr lang="en-US" sz="4800" b="1" dirty="0">
-                <a:solidFill>
-                  <a:srgbClr val="0F172A"/>
-                </a:solidFill>
-              </a:rPr>
-              <a:t>Live Demo — Blazor</a:t>
-            </a:r>
-          </a:p>
-        </p:txBody>
-      </p:sp>
-      <p:sp>
-        <p:nvSpPr>
-          <p:cNvPr id="1210" name="S"/>
-          <p:cNvSpPr/>
-          <p:nvPr/>
-        </p:nvSpPr>
-        <p:spPr>
-          <a:xfrm>
-            <a:off x="635000" y="2158999"/>
-            <a:ext cx="2872014" cy="3517405"/>
-          </a:xfrm>
-          <a:prstGeom prst="roundRect">
-            <a:avLst>
-              <a:gd name="adj" fmla="val 5000"/>
-            </a:avLst>
-          </a:prstGeom>
-          <a:solidFill>
-            <a:srgbClr val="FFFFFF"/>
-          </a:solidFill>
-          <a:ln w="12700">
-            <a:solidFill>
-              <a:srgbClr val="E2E8F0"/>
-            </a:solidFill>
-          </a:ln>
-        </p:spPr>
-        <p:txBody>
-          <a:bodyPr wrap="square" lIns="180000" tIns="200000" rIns="180000" bIns="200000" anchor="t"/>
-          <a:lstStyle/>
-          <a:p>
-            <a:r>
-              <a:rPr lang="en-US" sz="2400" b="1" spc="300" dirty="0">
-                <a:solidFill>
-                  <a:srgbClr val="10B981"/>
-                </a:solidFill>
-              </a:rPr>
-              <a:t>STEP 1</a:t>
-            </a:r>
-          </a:p>
-          <a:p>
-            <a:pPr algn="l">
-              <a:spcBef>
-                <a:spcPts val="400"/>
-              </a:spcBef>
-            </a:pPr>
-            <a:r>
-              <a:rPr lang="en-US" sz="5400" b="1" dirty="0">
-                <a:solidFill>
-                  <a:srgbClr val="F43F5E"/>
-                </a:solidFill>
-              </a:rPr>
-              <a:t>🎤</a:t>
-            </a:r>
-          </a:p>
-          <a:p>
-            <a:pPr algn="l">
-              <a:spcBef>
-                <a:spcPts val="500"/>
-              </a:spcBef>
-            </a:pPr>
-            <a:r>
-              <a:rPr lang="en-US" sz="3200" b="1" dirty="0">
-                <a:solidFill>
-                  <a:srgbClr val="0F172A"/>
-                </a:solidFill>
-              </a:rPr>
-              <a:t>Speak</a:t>
-            </a:r>
-          </a:p>
-          <a:p>
-            <a:pPr algn="l">
-              <a:spcBef>
-                <a:spcPts val="400"/>
-              </a:spcBef>
-            </a:pPr>
-            <a:r>
-              <a:rPr lang="en-US" sz="2400" i="1" dirty="0">
-                <a:solidFill>
-                  <a:srgbClr val="64748B"/>
-                </a:solidFill>
-              </a:rPr>
-              <a:t>"Show sales trends last 6 months"</a:t>
-            </a:r>
-          </a:p>
-        </p:txBody>
-      </p:sp>
-      <p:sp>
-        <p:nvSpPr>
-          <p:cNvPr id="1211" name="S"/>
-          <p:cNvSpPr/>
-          <p:nvPr/>
-        </p:nvSpPr>
-        <p:spPr>
-          <a:xfrm>
-            <a:off x="3321958" y="2158999"/>
-            <a:ext cx="2872014" cy="3517405"/>
-          </a:xfrm>
-          <a:prstGeom prst="roundRect">
-            <a:avLst>
-              <a:gd name="adj" fmla="val 5000"/>
-            </a:avLst>
-          </a:prstGeom>
-          <a:solidFill>
-            <a:srgbClr val="EAEAEA"/>
-          </a:solidFill>
-          <a:ln w="12700">
-            <a:solidFill>
-              <a:srgbClr val="E2E8F0"/>
-            </a:solidFill>
-          </a:ln>
-        </p:spPr>
-        <p:txBody>
-          <a:bodyPr wrap="square" lIns="180000" tIns="200000" rIns="180000" bIns="200000" anchor="t"/>
-          <a:lstStyle/>
-          <a:p>
-            <a:pPr algn="l"/>
-            <a:r>
-              <a:rPr lang="en-US" sz="2400" b="1" spc="300" dirty="0">
-                <a:solidFill>
-                  <a:srgbClr val="22D3EE"/>
-                </a:solidFill>
-              </a:rPr>
-              <a:t>STEP 2</a:t>
-            </a:r>
-          </a:p>
-          <a:p>
-            <a:pPr algn="l">
-              <a:spcBef>
-                <a:spcPts val="400"/>
-              </a:spcBef>
-            </a:pPr>
-            <a:r>
-              <a:rPr lang="en-US" sz="5400" b="1" dirty="0">
-                <a:solidFill>
-                  <a:srgbClr val="22D3EE"/>
-                </a:solidFill>
-              </a:rPr>
-              <a:t>⚡</a:t>
-            </a:r>
-          </a:p>
-          <a:p>
-            <a:pPr algn="l">
-              <a:spcBef>
-                <a:spcPts val="500"/>
-              </a:spcBef>
-            </a:pPr>
-            <a:r>
-              <a:rPr lang="en-US" sz="3200" b="1" dirty="0">
-                <a:solidFill>
-                  <a:srgbClr val="0F172A"/>
-                </a:solidFill>
-              </a:rPr>
-              <a:t>Query runs</a:t>
-            </a:r>
-          </a:p>
-          <a:p>
-            <a:pPr algn="l">
-              <a:spcBef>
-                <a:spcPts val="400"/>
-              </a:spcBef>
-            </a:pPr>
-            <a:r>
-              <a:rPr lang="en-US" sz="2400" i="1" dirty="0">
-                <a:solidFill>
-                  <a:srgbClr val="64748B"/>
-                </a:solidFill>
-              </a:rPr>
-              <a:t>Same pipeline. Faster feedback.</a:t>
-            </a:r>
-          </a:p>
-        </p:txBody>
-      </p:sp>
-      <p:sp>
-        <p:nvSpPr>
-          <p:cNvPr id="1212" name="S"/>
-          <p:cNvSpPr/>
-          <p:nvPr/>
-        </p:nvSpPr>
-        <p:spPr>
-          <a:xfrm>
-            <a:off x="6052458" y="2158999"/>
-            <a:ext cx="2872014" cy="3517405"/>
-          </a:xfrm>
-          <a:prstGeom prst="roundRect">
-            <a:avLst>
-              <a:gd name="adj" fmla="val 5000"/>
-            </a:avLst>
-          </a:prstGeom>
-          <a:solidFill>
-            <a:srgbClr val="C0C0C0"/>
-          </a:solidFill>
-          <a:ln w="12700">
-            <a:solidFill>
-              <a:srgbClr val="E2E8F0"/>
-            </a:solidFill>
-          </a:ln>
-        </p:spPr>
-        <p:txBody>
-          <a:bodyPr wrap="square" lIns="180000" tIns="200000" rIns="180000" bIns="200000" anchor="t"/>
-          <a:lstStyle/>
-          <a:p>
-            <a:pPr algn="l"/>
-            <a:r>
-              <a:rPr lang="en-US" sz="2400" b="1" spc="300" dirty="0">
-                <a:solidFill>
-                  <a:srgbClr val="6366F1"/>
-                </a:solidFill>
-              </a:rPr>
-              <a:t>STEP 3</a:t>
-            </a:r>
-          </a:p>
-          <a:p>
-            <a:pPr algn="l">
-              <a:spcBef>
-                <a:spcPts val="400"/>
-              </a:spcBef>
-            </a:pPr>
-            <a:r>
-              <a:rPr lang="en-US" sz="5400" b="1" dirty="0">
-                <a:solidFill>
-                  <a:srgbClr val="6366F1"/>
-                </a:solidFill>
-              </a:rPr>
-              <a:t>📊</a:t>
-            </a:r>
-          </a:p>
-          <a:p>
-            <a:pPr algn="l">
-              <a:spcBef>
-                <a:spcPts val="500"/>
-              </a:spcBef>
-            </a:pPr>
-            <a:r>
-              <a:rPr lang="en-US" sz="3200" b="1" dirty="0">
-                <a:solidFill>
-                  <a:srgbClr val="0F172A"/>
-                </a:solidFill>
-              </a:rPr>
-              <a:t>Chart renders</a:t>
-            </a:r>
-          </a:p>
-          <a:p>
-            <a:pPr algn="l">
-              <a:spcBef>
-                <a:spcPts val="400"/>
-              </a:spcBef>
-            </a:pPr>
-            <a:r>
-              <a:rPr lang="en-US" sz="2400" i="1" dirty="0">
-                <a:solidFill>
-                  <a:schemeClr val="bg1"/>
-                </a:solidFill>
-              </a:rPr>
-              <a:t>Table + chart</a:t>
-            </a:r>
-          </a:p>
-        </p:txBody>
-      </p:sp>
-      <p:sp>
-        <p:nvSpPr>
-          <p:cNvPr id="1213" name="S"/>
-          <p:cNvSpPr/>
-          <p:nvPr/>
-        </p:nvSpPr>
-        <p:spPr>
-          <a:xfrm>
-            <a:off x="8782958" y="2158999"/>
-            <a:ext cx="2872014" cy="3517405"/>
-          </a:xfrm>
-          <a:prstGeom prst="roundRect">
-            <a:avLst>
-              <a:gd name="adj" fmla="val 5000"/>
-            </a:avLst>
-          </a:prstGeom>
-          <a:solidFill>
-            <a:srgbClr val="9D9D9D"/>
-          </a:solidFill>
-          <a:ln w="12700">
-            <a:solidFill>
-              <a:srgbClr val="E2E8F0"/>
-            </a:solidFill>
-          </a:ln>
-        </p:spPr>
-        <p:txBody>
-          <a:bodyPr wrap="square" lIns="180000" tIns="200000" rIns="180000" bIns="200000" anchor="t"/>
-          <a:lstStyle/>
-          <a:p>
-            <a:r>
-              <a:rPr lang="en-US" sz="2400" b="1" spc="300" dirty="0">
-                <a:solidFill>
-                  <a:srgbClr val="F43F5E"/>
-                </a:solidFill>
-              </a:rPr>
-              <a:t>STEP 4</a:t>
-            </a:r>
-          </a:p>
-          <a:p>
-            <a:pPr algn="l">
-              <a:spcBef>
-                <a:spcPts val="400"/>
-              </a:spcBef>
-            </a:pPr>
-            <a:r>
-              <a:rPr lang="en-US" sz="5400" b="1" dirty="0">
-                <a:solidFill>
-                  <a:srgbClr val="10B981"/>
-                </a:solidFill>
-              </a:rPr>
-              <a:t>📄</a:t>
-            </a:r>
-          </a:p>
-          <a:p>
-            <a:pPr algn="l">
-              <a:spcBef>
-                <a:spcPts val="500"/>
-              </a:spcBef>
-            </a:pPr>
-            <a:r>
-              <a:rPr lang="en-US" sz="3200" b="1" dirty="0">
-                <a:solidFill>
-                  <a:srgbClr val="0F172A"/>
-                </a:solidFill>
-              </a:rPr>
-              <a:t>Export</a:t>
-            </a:r>
-          </a:p>
-          <a:p>
-            <a:pPr algn="l">
-              <a:spcBef>
-                <a:spcPts val="400"/>
-              </a:spcBef>
-            </a:pPr>
-            <a:r>
-              <a:rPr lang="en-US" sz="2400" i="1" dirty="0">
-                <a:solidFill>
-                  <a:schemeClr val="bg1"/>
-                </a:solidFill>
-              </a:rPr>
-              <a:t>Excel report.</a:t>
-            </a:r>
-          </a:p>
-        </p:txBody>
-      </p:sp>
-      <p:sp>
-        <p:nvSpPr>
-          <p:cNvPr id="3" name="DemoSub">
-            <a:extLst>
-              <a:ext uri="{FF2B5EF4-FFF2-40B4-BE49-F238E27FC236}">
-                <a16:creationId xmlns:a16="http://schemas.microsoft.com/office/drawing/2014/main" id="{E33DA3B9-8656-E2AF-4324-2D26E49EA3D5}"/>
-              </a:ext>
-            </a:extLst>
-          </p:cNvPr>
-          <p:cNvSpPr txBox="1"/>
-          <p:nvPr/>
-        </p:nvSpPr>
-        <p:spPr>
-          <a:xfrm>
-            <a:off x="2540000" y="1397000"/>
-            <a:ext cx="8890000" cy="457200"/>
+            <a:off x="1016000" y="2603500"/>
+            <a:ext cx="10160000" cy="2032000"/>
           </a:xfrm>
           <a:prstGeom prst="rect">
             <a:avLst/>
@@ -10497,37 +9218,377 @@
           <a:noFill/>
         </p:spPr>
         <p:txBody>
-          <a:bodyPr wrap="square" anchor="ctr"/>
-          <a:lstStyle/>
-          <a:p>
-            <a:pPr algn="l"/>
-            <a:r>
-              <a:rPr lang="en-US" sz="2400" dirty="0">
-                <a:solidFill>
-                  <a:srgbClr val="475569"/>
-                </a:solidFill>
-              </a:rPr>
-              <a:t>&gt;  </a:t>
-            </a:r>
-            <a:r>
-              <a:rPr lang="en-US" sz="2400" dirty="0" err="1">
-                <a:solidFill>
-                  <a:srgbClr val="475569"/>
-                </a:solidFill>
-              </a:rPr>
-              <a:t>Talk.Web</a:t>
-            </a:r>
-            <a:endParaRPr lang="en-US" sz="2400" dirty="0">
+          <a:bodyPr wrap="square" anchor="t"/>
+          <a:lstStyle/>
+          <a:p>
+            <a:pPr algn="l">
+              <a:lnSpc>
+                <a:spcPct val="105000"/>
+              </a:lnSpc>
+            </a:pPr>
+            <a:r>
+              <a:rPr lang="en-US" sz="7200" b="1" dirty="0">
+                <a:solidFill>
+                  <a:srgbClr val="FFFFFF"/>
+                </a:solidFill>
+              </a:rPr>
+              <a:t>Let's turn this </a:t>
+            </a:r>
+            <a:br>
+              <a:rPr lang="en-US" sz="7200" b="1" dirty="0">
+                <a:solidFill>
+                  <a:srgbClr val="FFFFFF"/>
+                </a:solidFill>
+              </a:rPr>
+            </a:br>
+            <a:r>
+              <a:rPr lang="en-US" sz="7200" b="1" dirty="0">
+                <a:solidFill>
+                  <a:srgbClr val="FFFFFF"/>
+                </a:solidFill>
+              </a:rPr>
+              <a:t>into a </a:t>
+            </a:r>
+            <a:r>
+              <a:rPr lang="en-US" sz="7200" b="1" i="1" dirty="0">
+                <a:solidFill>
+                  <a:srgbClr val="22D3EE"/>
+                </a:solidFill>
+              </a:rPr>
+              <a:t>real  </a:t>
+            </a:r>
+            <a:r>
+              <a:rPr lang="en-US" sz="7200" b="1" dirty="0">
+                <a:solidFill>
+                  <a:srgbClr val="22D3EE"/>
+                </a:solidFill>
+              </a:rPr>
+              <a:t>product</a:t>
+            </a:r>
+          </a:p>
+        </p:txBody>
+      </p:sp>
+      <p:sp>
+        <p:nvSpPr>
+          <p:cNvPr id="1003" name="Sub"/>
+          <p:cNvSpPr txBox="1"/>
+          <p:nvPr/>
+        </p:nvSpPr>
+        <p:spPr>
+          <a:xfrm>
+            <a:off x="1016000" y="5080000"/>
+            <a:ext cx="10160000" cy="508000"/>
+          </a:xfrm>
+          <a:prstGeom prst="rect">
+            <a:avLst/>
+          </a:prstGeom>
+          <a:noFill/>
+        </p:spPr>
+        <p:txBody>
+          <a:bodyPr wrap="square" anchor="t"/>
+          <a:lstStyle/>
+          <a:p>
+            <a:r>
+              <a:rPr lang="en-US" sz="1800" dirty="0">
+                <a:solidFill>
+                  <a:srgbClr val="94A3B8"/>
+                </a:solidFill>
+              </a:rPr>
+              <a:t>Same backend</a:t>
+            </a:r>
+            <a:r>
+              <a:rPr lang="en-US" dirty="0">
+                <a:solidFill>
+                  <a:srgbClr val="94A3B8"/>
+                </a:solidFill>
+              </a:rPr>
+              <a:t> with interactive </a:t>
+            </a:r>
+            <a:r>
+              <a:rPr lang="en-US" b="1" dirty="0">
+                <a:solidFill>
+                  <a:srgbClr val="94A3B8"/>
+                </a:solidFill>
+              </a:rPr>
+              <a:t>V</a:t>
+            </a:r>
+            <a:r>
+              <a:rPr lang="en-US" sz="1800" b="1" dirty="0">
+                <a:solidFill>
+                  <a:srgbClr val="94A3B8"/>
+                </a:solidFill>
+              </a:rPr>
+              <a:t>oice</a:t>
+            </a:r>
+            <a:r>
+              <a:rPr lang="en-US" b="1" dirty="0">
+                <a:solidFill>
+                  <a:srgbClr val="94A3B8"/>
+                </a:solidFill>
+              </a:rPr>
+              <a:t> </a:t>
+            </a:r>
+            <a:r>
+              <a:rPr lang="en-US" dirty="0">
+                <a:solidFill>
+                  <a:srgbClr val="94A3B8"/>
+                </a:solidFill>
+              </a:rPr>
+              <a:t>(Blazor Server app)</a:t>
+            </a:r>
+            <a:endParaRPr lang="en-US" sz="1800" dirty="0">
               <a:solidFill>
-                <a:srgbClr val="475569"/>
+                <a:srgbClr val="94A3B8"/>
               </a:solidFill>
             </a:endParaRPr>
           </a:p>
         </p:txBody>
       </p:sp>
+      <p:sp>
+        <p:nvSpPr>
+          <p:cNvPr id="3" name="Text Placeholder 2">
+            <a:extLst>
+              <a:ext uri="{FF2B5EF4-FFF2-40B4-BE49-F238E27FC236}">
+                <a16:creationId xmlns:a16="http://schemas.microsoft.com/office/drawing/2014/main" id="{77D537CD-F344-9285-D1DE-69928DF5BEA5}"/>
+              </a:ext>
+            </a:extLst>
+          </p:cNvPr>
+          <p:cNvSpPr txBox="1">
+            <a:spLocks/>
+          </p:cNvSpPr>
+          <p:nvPr/>
+        </p:nvSpPr>
+        <p:spPr>
+          <a:xfrm>
+            <a:off x="1016000" y="1875027"/>
+            <a:ext cx="5270500" cy="558799"/>
+          </a:xfrm>
+          <a:prstGeom prst="rect">
+            <a:avLst/>
+          </a:prstGeom>
+        </p:spPr>
+        <p:txBody>
+          <a:bodyPr>
+            <a:normAutofit fontScale="92500"/>
+          </a:bodyPr>
+          <a:lstStyle>
+            <a:lvl1pPr marL="228600" indent="-228600" algn="l" defTabSz="914400" rtl="0" eaLnBrk="1" latinLnBrk="0" hangingPunct="1">
+              <a:lnSpc>
+                <a:spcPct val="90000"/>
+              </a:lnSpc>
+              <a:spcBef>
+                <a:spcPts val="1000"/>
+              </a:spcBef>
+              <a:buFont typeface="Arial" panose="020B0604020202020204" pitchFamily="34" charset="0"/>
+              <a:buChar char="•"/>
+              <a:defRPr sz="2800" kern="1200">
+                <a:solidFill>
+                  <a:srgbClr val="334155"/>
+                </a:solidFill>
+                <a:latin typeface="+mn-lt"/>
+                <a:ea typeface="+mn-ea"/>
+                <a:cs typeface="+mn-cs"/>
+              </a:defRPr>
+            </a:lvl1pPr>
+            <a:lvl2pPr marL="685800" indent="-228600" algn="l" defTabSz="914400" rtl="0" eaLnBrk="1" latinLnBrk="0" hangingPunct="1">
+              <a:lnSpc>
+                <a:spcPct val="90000"/>
+              </a:lnSpc>
+              <a:spcBef>
+                <a:spcPts val="500"/>
+              </a:spcBef>
+              <a:buFont typeface="Arial" panose="020B0604020202020204" pitchFamily="34" charset="0"/>
+              <a:buChar char="•"/>
+              <a:defRPr sz="2400" kern="1200">
+                <a:solidFill>
+                  <a:schemeClr val="tx1"/>
+                </a:solidFill>
+                <a:latin typeface="+mn-lt"/>
+                <a:ea typeface="+mn-ea"/>
+                <a:cs typeface="+mn-cs"/>
+              </a:defRPr>
+            </a:lvl2pPr>
+            <a:lvl3pPr marL="1143000" indent="-228600" algn="l" defTabSz="914400" rtl="0" eaLnBrk="1" latinLnBrk="0" hangingPunct="1">
+              <a:lnSpc>
+                <a:spcPct val="90000"/>
+              </a:lnSpc>
+              <a:spcBef>
+                <a:spcPts val="500"/>
+              </a:spcBef>
+              <a:buFont typeface="Arial" panose="020B0604020202020204" pitchFamily="34" charset="0"/>
+              <a:buChar char="•"/>
+              <a:defRPr sz="2000" kern="1200">
+                <a:solidFill>
+                  <a:schemeClr val="tx1"/>
+                </a:solidFill>
+                <a:latin typeface="+mn-lt"/>
+                <a:ea typeface="+mn-ea"/>
+                <a:cs typeface="+mn-cs"/>
+              </a:defRPr>
+            </a:lvl3pPr>
+            <a:lvl4pPr marL="1600200" indent="-228600" algn="l" defTabSz="914400" rtl="0" eaLnBrk="1" latinLnBrk="0" hangingPunct="1">
+              <a:lnSpc>
+                <a:spcPct val="90000"/>
+              </a:lnSpc>
+              <a:spcBef>
+                <a:spcPts val="500"/>
+              </a:spcBef>
+              <a:buFont typeface="Arial" panose="020B0604020202020204" pitchFamily="34" charset="0"/>
+              <a:buChar char="•"/>
+              <a:defRPr sz="1800" kern="1200">
+                <a:solidFill>
+                  <a:schemeClr val="tx1"/>
+                </a:solidFill>
+                <a:latin typeface="+mn-lt"/>
+                <a:ea typeface="+mn-ea"/>
+                <a:cs typeface="+mn-cs"/>
+              </a:defRPr>
+            </a:lvl4pPr>
+            <a:lvl5pPr marL="2057400" indent="-228600" algn="l" defTabSz="914400" rtl="0" eaLnBrk="1" latinLnBrk="0" hangingPunct="1">
+              <a:lnSpc>
+                <a:spcPct val="90000"/>
+              </a:lnSpc>
+              <a:spcBef>
+                <a:spcPts val="500"/>
+              </a:spcBef>
+              <a:buFont typeface="Arial" panose="020B0604020202020204" pitchFamily="34" charset="0"/>
+              <a:buChar char="•"/>
+              <a:defRPr sz="1800" kern="1200">
+                <a:solidFill>
+                  <a:schemeClr val="tx1"/>
+                </a:solidFill>
+                <a:latin typeface="+mn-lt"/>
+                <a:ea typeface="+mn-ea"/>
+                <a:cs typeface="+mn-cs"/>
+              </a:defRPr>
+            </a:lvl5pPr>
+            <a:lvl6pPr marL="2514600" indent="-228600" algn="l" defTabSz="914400" rtl="0" eaLnBrk="1" latinLnBrk="0" hangingPunct="1">
+              <a:lnSpc>
+                <a:spcPct val="90000"/>
+              </a:lnSpc>
+              <a:spcBef>
+                <a:spcPts val="500"/>
+              </a:spcBef>
+              <a:buFont typeface="Arial" panose="020B0604020202020204" pitchFamily="34" charset="0"/>
+              <a:buChar char="•"/>
+              <a:defRPr sz="1800" kern="1200">
+                <a:solidFill>
+                  <a:schemeClr val="tx1"/>
+                </a:solidFill>
+                <a:latin typeface="+mn-lt"/>
+                <a:ea typeface="+mn-ea"/>
+                <a:cs typeface="+mn-cs"/>
+              </a:defRPr>
+            </a:lvl6pPr>
+            <a:lvl7pPr marL="2971800" indent="-228600" algn="l" defTabSz="914400" rtl="0" eaLnBrk="1" latinLnBrk="0" hangingPunct="1">
+              <a:lnSpc>
+                <a:spcPct val="90000"/>
+              </a:lnSpc>
+              <a:spcBef>
+                <a:spcPts val="500"/>
+              </a:spcBef>
+              <a:buFont typeface="Arial" panose="020B0604020202020204" pitchFamily="34" charset="0"/>
+              <a:buChar char="•"/>
+              <a:defRPr sz="1800" kern="1200">
+                <a:solidFill>
+                  <a:schemeClr val="tx1"/>
+                </a:solidFill>
+                <a:latin typeface="+mn-lt"/>
+                <a:ea typeface="+mn-ea"/>
+                <a:cs typeface="+mn-cs"/>
+              </a:defRPr>
+            </a:lvl7pPr>
+            <a:lvl8pPr marL="3429000" indent="-228600" algn="l" defTabSz="914400" rtl="0" eaLnBrk="1" latinLnBrk="0" hangingPunct="1">
+              <a:lnSpc>
+                <a:spcPct val="90000"/>
+              </a:lnSpc>
+              <a:spcBef>
+                <a:spcPts val="500"/>
+              </a:spcBef>
+              <a:buFont typeface="Arial" panose="020B0604020202020204" pitchFamily="34" charset="0"/>
+              <a:buChar char="•"/>
+              <a:defRPr sz="1800" kern="1200">
+                <a:solidFill>
+                  <a:schemeClr val="tx1"/>
+                </a:solidFill>
+                <a:latin typeface="+mn-lt"/>
+                <a:ea typeface="+mn-ea"/>
+                <a:cs typeface="+mn-cs"/>
+              </a:defRPr>
+            </a:lvl8pPr>
+            <a:lvl9pPr marL="3886200" indent="-228600" algn="l" defTabSz="914400" rtl="0" eaLnBrk="1" latinLnBrk="0" hangingPunct="1">
+              <a:lnSpc>
+                <a:spcPct val="90000"/>
+              </a:lnSpc>
+              <a:spcBef>
+                <a:spcPts val="500"/>
+              </a:spcBef>
+              <a:buFont typeface="Arial" panose="020B0604020202020204" pitchFamily="34" charset="0"/>
+              <a:buChar char="•"/>
+              <a:defRPr sz="1800" kern="1200">
+                <a:solidFill>
+                  <a:schemeClr val="tx1"/>
+                </a:solidFill>
+                <a:latin typeface="+mn-lt"/>
+                <a:ea typeface="+mn-ea"/>
+                <a:cs typeface="+mn-cs"/>
+              </a:defRPr>
+            </a:lvl9pPr>
+          </a:lstStyle>
+          <a:p>
+            <a:pPr>
+              <a:buFont typeface="Arial" panose="020B0604020202020204" pitchFamily="34" charset="0"/>
+              <a:buNone/>
+            </a:pPr>
+            <a:r>
+              <a:rPr lang="en-US" sz="3200" b="1" spc="400" dirty="0">
+                <a:solidFill>
+                  <a:srgbClr val="22D3EE"/>
+                </a:solidFill>
+              </a:rPr>
+              <a:t>TALK TO YOUR DATA</a:t>
+            </a:r>
+          </a:p>
+        </p:txBody>
+      </p:sp>
+      <p:sp>
+        <p:nvSpPr>
+          <p:cNvPr id="4" name="AccentBar">
+            <a:extLst>
+              <a:ext uri="{FF2B5EF4-FFF2-40B4-BE49-F238E27FC236}">
+                <a16:creationId xmlns:a16="http://schemas.microsoft.com/office/drawing/2014/main" id="{8160ADC7-A2E8-EA22-303B-688EC857D850}"/>
+              </a:ext>
+            </a:extLst>
+          </p:cNvPr>
+          <p:cNvSpPr/>
+          <p:nvPr/>
+        </p:nvSpPr>
+        <p:spPr>
+          <a:xfrm>
+            <a:off x="1095581" y="1784351"/>
+            <a:ext cx="4860000" cy="76200"/>
+          </a:xfrm>
+          <a:prstGeom prst="rect">
+            <a:avLst/>
+          </a:prstGeom>
+          <a:solidFill>
+            <a:srgbClr val="22D3EE"/>
+          </a:solidFill>
+          <a:ln>
+            <a:noFill/>
+          </a:ln>
+        </p:spPr>
+        <p:txBody>
+          <a:bodyPr/>
+          <a:lstStyle/>
+          <a:p>
+            <a:endParaRPr lang="en-US" dirty="0"/>
+          </a:p>
+        </p:txBody>
+      </p:sp>
       <p:grpSp>
         <p:nvGrpSpPr>
-          <p:cNvPr id="4" name="Group 3">
+          <p:cNvPr id="5" name="Group 4">
             <a:extLst>
               <a:ext uri="{FF2B5EF4-FFF2-40B4-BE49-F238E27FC236}">
                 <a16:creationId xmlns:a16="http://schemas.microsoft.com/office/drawing/2014/main" id="{75D02981-EC00-CA24-9A53-841C69148F8E}"/>
@@ -10539,7 +9600,7 @@
         </p:nvGrpSpPr>
         <p:grpSpPr>
           <a:xfrm>
-            <a:off x="635000" y="1397000"/>
+            <a:off x="6152636" y="1822451"/>
             <a:ext cx="1651000" cy="457200"/>
             <a:chOff x="889000" y="1429656"/>
             <a:chExt cx="1651000" cy="457200"/>
@@ -10547,7 +9608,7 @@
         </p:grpSpPr>
         <p:sp>
           <p:nvSpPr>
-            <p:cNvPr id="5" name="LiveBadge">
+            <p:cNvPr id="6" name="LiveBadge">
               <a:extLst>
                 <a:ext uri="{FF2B5EF4-FFF2-40B4-BE49-F238E27FC236}">
                   <a16:creationId xmlns:a16="http://schemas.microsoft.com/office/drawing/2014/main" id="{0F7942F8-37EE-BE0E-CF0A-AFDCE5AED565}"/>
@@ -10592,7 +9653,7 @@
         </p:sp>
         <p:pic>
           <p:nvPicPr>
-            <p:cNvPr id="6" name="Graphic 5" descr="Presentation with media with solid fill">
+            <p:cNvPr id="7" name="Graphic 6" descr="Presentation with media with solid fill">
               <a:extLst>
                 <a:ext uri="{FF2B5EF4-FFF2-40B4-BE49-F238E27FC236}">
                   <a16:creationId xmlns:a16="http://schemas.microsoft.com/office/drawing/2014/main" id="{44BF11B1-A87D-0E81-4EF5-B50F0A9C05B3}"/>
@@ -10630,7 +9691,7 @@
     </p:spTree>
     <p:extLst>
       <p:ext uri="{BB962C8B-B14F-4D97-AF65-F5344CB8AC3E}">
-        <p14:creationId xmlns:p14="http://schemas.microsoft.com/office/powerpoint/2010/main" val="3483866631"/>
+        <p14:creationId xmlns:p14="http://schemas.microsoft.com/office/powerpoint/2010/main" val="2413001557"/>
       </p:ext>
     </p:extLst>
   </p:cSld>
@@ -10640,8 +9701,8 @@
 </p:sld>
 </file>
 
-<file path=ppt/slides/slide17.xml><?xml version="1.0" encoding="utf-8"?>
-<p:sld xmlns:a="http://schemas.openxmlformats.org/drawingml/2006/main" xmlns:r="http://schemas.openxmlformats.org/officeDocument/2006/relationships" xmlns:p="http://schemas.openxmlformats.org/presentationml/2006/main">
+<file path=ppt/slides/slide16.xml><?xml version="1.0" encoding="utf-8"?>
+<p:sld xmlns:a="http://schemas.openxmlformats.org/drawingml/2006/main" xmlns:r="http://schemas.openxmlformats.org/officeDocument/2006/relationships" xmlns:p="http://schemas.openxmlformats.org/presentationml/2006/main" show="0">
   <p:cSld>
     <p:spTree>
       <p:nvGrpSpPr>
@@ -10662,6 +9723,461 @@
           <p:cNvPr id="2" name="Title 1">
             <a:extLst>
               <a:ext uri="{FF2B5EF4-FFF2-40B4-BE49-F238E27FC236}">
+                <a16:creationId xmlns:a16="http://schemas.microsoft.com/office/drawing/2014/main" id="{CF81DA7E-317D-1151-40A8-0BFF0DA66D28}"/>
+              </a:ext>
+            </a:extLst>
+          </p:cNvPr>
+          <p:cNvSpPr>
+            <a:spLocks noGrp="1"/>
+          </p:cNvSpPr>
+          <p:nvPr>
+            <p:ph type="title"/>
+          </p:nvPr>
+        </p:nvSpPr>
+        <p:spPr>
+          <a:xfrm>
+            <a:off x="647700" y="353218"/>
+            <a:ext cx="10909300" cy="1325563"/>
+          </a:xfrm>
+        </p:spPr>
+        <p:txBody>
+          <a:bodyPr>
+            <a:normAutofit fontScale="90000"/>
+          </a:bodyPr>
+          <a:lstStyle/>
+          <a:p>
+            <a:r>
+              <a:rPr lang="en-US" sz="4800" b="1" dirty="0">
+                <a:solidFill>
+                  <a:srgbClr val="0F172A"/>
+                </a:solidFill>
+              </a:rPr>
+              <a:t>Same Backend, </a:t>
+            </a:r>
+            <a:r>
+              <a:rPr lang="en-US" sz="4800" dirty="0">
+                <a:solidFill>
+                  <a:srgbClr val="0F172A"/>
+                </a:solidFill>
+              </a:rPr>
+              <a:t>Closer to a </a:t>
+            </a:r>
+            <a:r>
+              <a:rPr lang="en-US" sz="4800" b="1" dirty="0"/>
+              <a:t>Real Product</a:t>
+            </a:r>
+            <a:endParaRPr lang="en-US" sz="4800" b="1" dirty="0">
+              <a:solidFill>
+                <a:srgbClr val="0F172A"/>
+              </a:solidFill>
+            </a:endParaRPr>
+          </a:p>
+        </p:txBody>
+      </p:sp>
+      <p:sp>
+        <p:nvSpPr>
+          <p:cNvPr id="1100" name="F"/>
+          <p:cNvSpPr/>
+          <p:nvPr/>
+        </p:nvSpPr>
+        <p:spPr>
+          <a:xfrm>
+            <a:off x="635000" y="1778000"/>
+            <a:ext cx="2540000" cy="2159000"/>
+          </a:xfrm>
+          <a:prstGeom prst="roundRect">
+            <a:avLst>
+              <a:gd name="adj" fmla="val 6000"/>
+            </a:avLst>
+          </a:prstGeom>
+          <a:solidFill>
+            <a:srgbClr val="FFFFFF"/>
+          </a:solidFill>
+          <a:ln w="12700">
+            <a:solidFill>
+              <a:srgbClr val="E2E8F0"/>
+            </a:solidFill>
+          </a:ln>
+        </p:spPr>
+        <p:txBody>
+          <a:bodyPr wrap="square" lIns="180000" tIns="220000" rIns="180000" bIns="180000" anchor="t"/>
+          <a:lstStyle/>
+          <a:p>
+            <a:pPr algn="l"/>
+            <a:r>
+              <a:rPr lang="en-US" sz="4800" b="1" dirty="0">
+                <a:solidFill>
+                  <a:srgbClr val="F43F5E"/>
+                </a:solidFill>
+              </a:rPr>
+              <a:t>🎤</a:t>
+            </a:r>
+          </a:p>
+          <a:p>
+            <a:pPr algn="l">
+              <a:spcBef>
+                <a:spcPts val="600"/>
+              </a:spcBef>
+            </a:pPr>
+            <a:r>
+              <a:rPr lang="en-US" sz="2800" b="1" dirty="0">
+                <a:solidFill>
+                  <a:srgbClr val="0F172A"/>
+                </a:solidFill>
+              </a:rPr>
+              <a:t>Voice input</a:t>
+            </a:r>
+          </a:p>
+          <a:p>
+            <a:pPr algn="l">
+              <a:spcBef>
+                <a:spcPts val="300"/>
+              </a:spcBef>
+            </a:pPr>
+            <a:r>
+              <a:rPr lang="en-US" sz="2000" dirty="0">
+                <a:solidFill>
+                  <a:srgbClr val="64748B"/>
+                </a:solidFill>
+              </a:rPr>
+              <a:t>Talk to your data</a:t>
+            </a:r>
+          </a:p>
+        </p:txBody>
+      </p:sp>
+      <p:sp>
+        <p:nvSpPr>
+          <p:cNvPr id="1101" name="F"/>
+          <p:cNvSpPr/>
+          <p:nvPr/>
+        </p:nvSpPr>
+        <p:spPr>
+          <a:xfrm>
+            <a:off x="3365499" y="1778000"/>
+            <a:ext cx="2540001" cy="2159000"/>
+          </a:xfrm>
+          <a:prstGeom prst="roundRect">
+            <a:avLst>
+              <a:gd name="adj" fmla="val 6000"/>
+            </a:avLst>
+          </a:prstGeom>
+          <a:solidFill>
+            <a:srgbClr val="FFFFFF"/>
+          </a:solidFill>
+          <a:ln w="12700">
+            <a:solidFill>
+              <a:srgbClr val="E2E8F0"/>
+            </a:solidFill>
+          </a:ln>
+        </p:spPr>
+        <p:txBody>
+          <a:bodyPr wrap="square" lIns="180000" tIns="220000" rIns="180000" bIns="180000" anchor="t"/>
+          <a:lstStyle/>
+          <a:p>
+            <a:pPr algn="l"/>
+            <a:r>
+              <a:rPr lang="en-US" sz="4400" b="1" dirty="0">
+                <a:solidFill>
+                  <a:srgbClr val="22D3EE"/>
+                </a:solidFill>
+              </a:rPr>
+              <a:t>⚡</a:t>
+            </a:r>
+          </a:p>
+          <a:p>
+            <a:pPr algn="l">
+              <a:spcBef>
+                <a:spcPts val="600"/>
+              </a:spcBef>
+            </a:pPr>
+            <a:r>
+              <a:rPr lang="en-US" sz="2800" b="1" dirty="0">
+                <a:solidFill>
+                  <a:srgbClr val="0F172A"/>
+                </a:solidFill>
+              </a:rPr>
+              <a:t>Live query</a:t>
+            </a:r>
+          </a:p>
+          <a:p>
+            <a:pPr algn="l">
+              <a:spcBef>
+                <a:spcPts val="300"/>
+              </a:spcBef>
+            </a:pPr>
+            <a:r>
+              <a:rPr lang="en-US" sz="2000" dirty="0">
+                <a:solidFill>
+                  <a:srgbClr val="64748B"/>
+                </a:solidFill>
+              </a:rPr>
+              <a:t>Real-time to SQL</a:t>
+            </a:r>
+          </a:p>
+        </p:txBody>
+      </p:sp>
+      <p:sp>
+        <p:nvSpPr>
+          <p:cNvPr id="1102" name="F"/>
+          <p:cNvSpPr/>
+          <p:nvPr/>
+        </p:nvSpPr>
+        <p:spPr>
+          <a:xfrm>
+            <a:off x="6096000" y="1778000"/>
+            <a:ext cx="2540000" cy="2159000"/>
+          </a:xfrm>
+          <a:prstGeom prst="roundRect">
+            <a:avLst>
+              <a:gd name="adj" fmla="val 6000"/>
+            </a:avLst>
+          </a:prstGeom>
+          <a:solidFill>
+            <a:srgbClr val="FFFFFF"/>
+          </a:solidFill>
+          <a:ln w="12700">
+            <a:solidFill>
+              <a:srgbClr val="E2E8F0"/>
+            </a:solidFill>
+          </a:ln>
+        </p:spPr>
+        <p:txBody>
+          <a:bodyPr wrap="square" lIns="180000" tIns="220000" rIns="180000" bIns="180000" anchor="t"/>
+          <a:lstStyle/>
+          <a:p>
+            <a:pPr algn="l"/>
+            <a:r>
+              <a:rPr lang="en-US" sz="4800" b="1" dirty="0">
+                <a:solidFill>
+                  <a:srgbClr val="6366F1"/>
+                </a:solidFill>
+              </a:rPr>
+              <a:t>📊</a:t>
+            </a:r>
+          </a:p>
+          <a:p>
+            <a:pPr algn="l">
+              <a:spcBef>
+                <a:spcPts val="600"/>
+              </a:spcBef>
+            </a:pPr>
+            <a:r>
+              <a:rPr lang="en-US" sz="2800" b="1" dirty="0">
+                <a:solidFill>
+                  <a:srgbClr val="0F172A"/>
+                </a:solidFill>
+              </a:rPr>
+              <a:t>Charts</a:t>
+            </a:r>
+          </a:p>
+          <a:p>
+            <a:pPr algn="l">
+              <a:spcBef>
+                <a:spcPts val="300"/>
+              </a:spcBef>
+            </a:pPr>
+            <a:r>
+              <a:rPr lang="en-US" sz="2000" dirty="0">
+                <a:solidFill>
+                  <a:srgbClr val="64748B"/>
+                </a:solidFill>
+              </a:rPr>
+              <a:t>Visualize results</a:t>
+            </a:r>
+          </a:p>
+        </p:txBody>
+      </p:sp>
+      <p:sp>
+        <p:nvSpPr>
+          <p:cNvPr id="1103" name="F"/>
+          <p:cNvSpPr/>
+          <p:nvPr/>
+        </p:nvSpPr>
+        <p:spPr>
+          <a:xfrm>
+            <a:off x="8826500" y="1778000"/>
+            <a:ext cx="2730500" cy="2159000"/>
+          </a:xfrm>
+          <a:prstGeom prst="roundRect">
+            <a:avLst>
+              <a:gd name="adj" fmla="val 6000"/>
+            </a:avLst>
+          </a:prstGeom>
+          <a:solidFill>
+            <a:srgbClr val="FFFFFF"/>
+          </a:solidFill>
+          <a:ln w="12700">
+            <a:solidFill>
+              <a:srgbClr val="E2E8F0"/>
+            </a:solidFill>
+          </a:ln>
+        </p:spPr>
+        <p:txBody>
+          <a:bodyPr wrap="square" lIns="180000" tIns="220000" rIns="180000" bIns="180000" anchor="t"/>
+          <a:lstStyle/>
+          <a:p>
+            <a:pPr algn="l"/>
+            <a:r>
+              <a:rPr lang="en-US" sz="4800" b="1" dirty="0">
+                <a:solidFill>
+                  <a:srgbClr val="10B981"/>
+                </a:solidFill>
+              </a:rPr>
+              <a:t>📄</a:t>
+            </a:r>
+          </a:p>
+          <a:p>
+            <a:pPr algn="l">
+              <a:spcBef>
+                <a:spcPts val="600"/>
+              </a:spcBef>
+            </a:pPr>
+            <a:r>
+              <a:rPr lang="en-US" sz="2800" b="1" dirty="0">
+                <a:solidFill>
+                  <a:srgbClr val="0F172A"/>
+                </a:solidFill>
+              </a:rPr>
+              <a:t>Excel</a:t>
+            </a:r>
+          </a:p>
+          <a:p>
+            <a:pPr algn="l">
+              <a:spcBef>
+                <a:spcPts val="300"/>
+              </a:spcBef>
+            </a:pPr>
+            <a:r>
+              <a:rPr lang="en-US" sz="2000" dirty="0">
+                <a:solidFill>
+                  <a:srgbClr val="64748B"/>
+                </a:solidFill>
+              </a:rPr>
+              <a:t>One click to report</a:t>
+            </a:r>
+          </a:p>
+        </p:txBody>
+      </p:sp>
+      <p:sp>
+        <p:nvSpPr>
+          <p:cNvPr id="1110" name="Banner"/>
+          <p:cNvSpPr/>
+          <p:nvPr/>
+        </p:nvSpPr>
+        <p:spPr>
+          <a:xfrm>
+            <a:off x="635000" y="4318000"/>
+            <a:ext cx="10731500" cy="1524000"/>
+          </a:xfrm>
+          <a:prstGeom prst="roundRect">
+            <a:avLst>
+              <a:gd name="adj" fmla="val 6000"/>
+            </a:avLst>
+          </a:prstGeom>
+          <a:solidFill>
+            <a:srgbClr val="0F172A"/>
+          </a:solidFill>
+          <a:ln>
+            <a:noFill/>
+          </a:ln>
+        </p:spPr>
+        <p:txBody>
+          <a:bodyPr wrap="square" lIns="280000" tIns="200000" rIns="280000" bIns="200000" anchor="ctr"/>
+          <a:lstStyle/>
+          <a:p>
+            <a:pPr algn="l"/>
+            <a:r>
+              <a:rPr lang="en-US" sz="1400" b="1" spc="300" dirty="0">
+                <a:solidFill>
+                  <a:srgbClr val="22D3EE"/>
+                </a:solidFill>
+              </a:rPr>
+              <a:t>THE BACKEND DIDN'T CHANGE.</a:t>
+            </a:r>
+          </a:p>
+          <a:p>
+            <a:pPr algn="l">
+              <a:spcBef>
+                <a:spcPts val="400"/>
+              </a:spcBef>
+            </a:pPr>
+            <a:r>
+              <a:rPr lang="en-US" sz="2400" dirty="0">
+                <a:solidFill>
+                  <a:srgbClr val="FFFFFF"/>
+                </a:solidFill>
+              </a:rPr>
+              <a:t>Blazor reuses the exact same module. </a:t>
+            </a:r>
+            <a:br>
+              <a:rPr lang="en-US" sz="2400" dirty="0">
+                <a:solidFill>
+                  <a:srgbClr val="FFFFFF"/>
+                </a:solidFill>
+              </a:rPr>
+            </a:br>
+            <a:r>
+              <a:rPr lang="en-US" sz="2400" dirty="0">
+                <a:solidFill>
+                  <a:srgbClr val="FFFFFF"/>
+                </a:solidFill>
+              </a:rPr>
+              <a:t>The frontend is where </a:t>
+            </a:r>
+            <a:r>
+              <a:rPr lang="en-US" sz="2400" i="1" dirty="0">
+                <a:solidFill>
+                  <a:srgbClr val="22D3EE"/>
+                </a:solidFill>
+              </a:rPr>
+              <a:t>the product</a:t>
+            </a:r>
+            <a:r>
+              <a:rPr lang="en-US" sz="2400" dirty="0">
+                <a:solidFill>
+                  <a:srgbClr val="FFFFFF"/>
+                </a:solidFill>
+              </a:rPr>
+              <a:t> lives.</a:t>
+            </a:r>
+          </a:p>
+        </p:txBody>
+      </p:sp>
+    </p:spTree>
+    <p:extLst>
+      <p:ext uri="{BB962C8B-B14F-4D97-AF65-F5344CB8AC3E}">
+        <p14:creationId xmlns:p14="http://schemas.microsoft.com/office/powerpoint/2010/main" val="4276252591"/>
+      </p:ext>
+    </p:extLst>
+  </p:cSld>
+  <p:clrMapOvr>
+    <a:masterClrMapping/>
+  </p:clrMapOvr>
+</p:sld>
+</file>
+
+<file path=ppt/slides/slide17.xml><?xml version="1.0" encoding="utf-8"?>
+<p:sld xmlns:a="http://schemas.openxmlformats.org/drawingml/2006/main" xmlns:r="http://schemas.openxmlformats.org/officeDocument/2006/relationships" xmlns:p="http://schemas.openxmlformats.org/presentationml/2006/main" show="0">
+  <p:cSld>
+    <p:spTree>
+      <p:nvGrpSpPr>
+        <p:cNvPr id="1" name=""/>
+        <p:cNvGrpSpPr/>
+        <p:nvPr/>
+      </p:nvGrpSpPr>
+      <p:grpSpPr>
+        <a:xfrm>
+          <a:off x="0" y="0"/>
+          <a:ext cx="0" cy="0"/>
+          <a:chOff x="0" y="0"/>
+          <a:chExt cx="0" cy="0"/>
+        </a:xfrm>
+      </p:grpSpPr>
+      <p:sp>
+        <p:nvSpPr>
+          <p:cNvPr id="2" name="Title 1">
+            <a:extLst>
+              <a:ext uri="{FF2B5EF4-FFF2-40B4-BE49-F238E27FC236}">
                 <a16:creationId xmlns:a16="http://schemas.microsoft.com/office/drawing/2014/main" id="{74528FAF-AB4F-A00A-4E74-5574F01509F7}"/>
               </a:ext>
             </a:extLst>
@@ -10675,7 +10191,7 @@
         </p:nvSpPr>
         <p:spPr>
           <a:xfrm>
-            <a:off x="647700" y="350611"/>
+            <a:off x="635000" y="357434"/>
             <a:ext cx="10515600" cy="1325563"/>
           </a:xfrm>
         </p:spPr>
@@ -11012,7 +10528,7 @@
         </p:nvSpPr>
         <p:spPr>
           <a:xfrm>
-            <a:off x="635000" y="325437"/>
+            <a:off x="412955" y="325437"/>
             <a:ext cx="10515600" cy="1325563"/>
           </a:xfrm>
         </p:spPr>
@@ -11042,8 +10558,8 @@
         </p:nvSpPr>
         <p:spPr>
           <a:xfrm>
-            <a:off x="562430" y="1853554"/>
-            <a:ext cx="3600000" cy="1944000"/>
+            <a:off x="412955" y="1853554"/>
+            <a:ext cx="3749475" cy="1944000"/>
           </a:xfrm>
           <a:prstGeom prst="roundRect">
             <a:avLst>
@@ -11070,7 +10586,7 @@
                   <a:srgbClr val="22D3EE"/>
                 </a:solidFill>
               </a:rPr>
-              <a:t>▣  </a:t>
+              <a:t>▣ </a:t>
             </a:r>
             <a:r>
               <a:rPr lang="en-US" sz="2400" b="1" dirty="0">
@@ -11134,7 +10650,7 @@
                   <a:srgbClr val="6366F1"/>
                 </a:solidFill>
               </a:rPr>
-              <a:t>◉  </a:t>
+              <a:t>◉ </a:t>
             </a:r>
             <a:r>
               <a:rPr lang="en-US" sz="2400" b="1" dirty="0">
@@ -11198,7 +10714,7 @@
                   <a:srgbClr val="10B981"/>
                 </a:solidFill>
               </a:rPr>
-              <a:t>⚡  </a:t>
+              <a:t>⚡</a:t>
             </a:r>
             <a:r>
               <a:rPr lang="en-US" sz="2400" b="1" dirty="0">
@@ -11234,8 +10750,8 @@
         </p:nvSpPr>
         <p:spPr>
           <a:xfrm>
-            <a:off x="562430" y="4094829"/>
-            <a:ext cx="3600000" cy="1944000"/>
+            <a:off x="412955" y="4000108"/>
+            <a:ext cx="3749475" cy="1944000"/>
           </a:xfrm>
           <a:prstGeom prst="roundRect">
             <a:avLst>
@@ -11262,7 +10778,7 @@
                   <a:srgbClr val="F43F5E"/>
                 </a:solidFill>
               </a:rPr>
-              <a:t>📊  </a:t>
+              <a:t>📊</a:t>
             </a:r>
             <a:r>
               <a:rPr lang="en-US" sz="2400" b="1" dirty="0">
@@ -11298,7 +10814,7 @@
         </p:nvSpPr>
         <p:spPr>
           <a:xfrm>
-            <a:off x="4236525" y="4094829"/>
+            <a:off x="4236525" y="4000108"/>
             <a:ext cx="3600000" cy="1944000"/>
           </a:xfrm>
           <a:prstGeom prst="roundRect">
@@ -11326,15 +10842,7 @@
                   <a:srgbClr val="F59E0B"/>
                 </a:solidFill>
               </a:rPr>
-              <a:t>🔍</a:t>
-            </a:r>
-            <a:r>
-              <a:rPr lang="en-US" sz="3600" b="1" dirty="0">
-                <a:solidFill>
-                  <a:srgbClr val="F59E0B"/>
-                </a:solidFill>
-              </a:rPr>
-              <a:t>  </a:t>
+              <a:t>🔍 </a:t>
             </a:r>
             <a:r>
               <a:rPr lang="en-US" sz="2400" b="1" dirty="0">
@@ -11370,7 +10878,7 @@
         </p:nvSpPr>
         <p:spPr>
           <a:xfrm>
-            <a:off x="7910620" y="4094829"/>
+            <a:off x="7910620" y="4000108"/>
             <a:ext cx="3600000" cy="1944000"/>
           </a:xfrm>
           <a:prstGeom prst="roundRect">
@@ -11398,7 +10906,7 @@
                   <a:srgbClr val="A78BFA"/>
                 </a:solidFill>
               </a:rPr>
-              <a:t>📈  </a:t>
+              <a:t>📈</a:t>
             </a:r>
             <a:r>
               <a:rPr lang="en-US" sz="2400" b="1" dirty="0">
@@ -11472,7 +10980,12 @@
             <p:ph type="title"/>
           </p:nvPr>
         </p:nvSpPr>
-        <p:spPr/>
+        <p:spPr>
+          <a:xfrm>
+            <a:off x="635000" y="291383"/>
+            <a:ext cx="10515600" cy="1325563"/>
+          </a:xfrm>
+        </p:spPr>
         <p:txBody>
           <a:bodyPr>
             <a:normAutofit/>
@@ -11499,8 +11012,8 @@
         </p:nvSpPr>
         <p:spPr>
           <a:xfrm>
-            <a:off x="635000" y="1524000"/>
-            <a:ext cx="5334000" cy="4191000"/>
+            <a:off x="635000" y="1804219"/>
+            <a:ext cx="5334000" cy="3859161"/>
           </a:xfrm>
           <a:prstGeom prst="roundRect">
             <a:avLst>
@@ -11694,8 +11207,8 @@
         </p:nvSpPr>
         <p:spPr>
           <a:xfrm>
-            <a:off x="6223000" y="1524000"/>
-            <a:ext cx="5334000" cy="4191000"/>
+            <a:off x="6222999" y="1804219"/>
+            <a:ext cx="5472471" cy="3859161"/>
           </a:xfrm>
           <a:prstGeom prst="roundRect">
             <a:avLst>
@@ -12901,7 +12414,7 @@
                   <a:srgbClr val="0F172A"/>
                 </a:solidFill>
               </a:rPr>
-              <a:t>If we used 100% of our </a:t>
+              <a:t>What if we used 100% of our </a:t>
             </a:r>
             <a:br>
               <a:rPr lang="en-US" sz="6000" b="1" dirty="0">
@@ -13178,7 +12691,9 @@
               </a:avLst>
             </a:prstGeom>
             <a:solidFill>
-              <a:srgbClr val="1E293B"/>
+              <a:schemeClr val="bg1">
+                <a:lumMod val="50000"/>
+              </a:schemeClr>
             </a:solidFill>
             <a:ln>
               <a:noFill/>
@@ -13194,20 +12709,12 @@
                 </a:spcBef>
               </a:pPr>
               <a:r>
-                <a:rPr lang="en-US" sz="2700">
-                  <a:solidFill>
-                    <a:srgbClr val="FFFFFF"/>
-                  </a:solidFill>
-                </a:rPr>
-                <a:t>Until now we </a:t>
-              </a:r>
-              <a:r>
                 <a:rPr lang="en-US" sz="2700" dirty="0">
                   <a:solidFill>
                     <a:srgbClr val="FFFFFF"/>
                   </a:solidFill>
                 </a:rPr>
-                <a:t>learnt programming languages to talk with computers</a:t>
+                <a:t>Until now we learnt programming languages to talk with computers</a:t>
               </a:r>
               <a:endParaRPr lang="en-US" sz="2700" dirty="0">
                 <a:solidFill>
@@ -13246,7 +12753,7 @@
             <a:p>
               <a:pPr algn="l"/>
               <a:r>
-                <a:rPr lang="en-US" sz="2800" spc="300" dirty="0">
+                <a:rPr lang="en-US" sz="2800" b="1" spc="300" dirty="0">
                   <a:solidFill>
                     <a:srgbClr val="1E293B"/>
                   </a:solidFill>
@@ -13254,21 +12761,21 @@
                 <a:t>now they learnt</a:t>
               </a:r>
               <a:br>
-                <a:rPr lang="en-US" sz="2800" spc="300" dirty="0">
+                <a:rPr lang="en-US" sz="2800" b="1" spc="300" dirty="0">
                   <a:solidFill>
                     <a:srgbClr val="1E293B"/>
                   </a:solidFill>
                 </a:rPr>
               </a:br>
               <a:r>
-                <a:rPr lang="en-US" sz="2800" spc="300" dirty="0">
+                <a:rPr lang="en-US" sz="2800" b="1" spc="300" dirty="0">
                   <a:solidFill>
                     <a:srgbClr val="1E293B"/>
                   </a:solidFill>
                 </a:rPr>
                 <a:t>our language</a:t>
               </a:r>
-              <a:endParaRPr lang="en-US" sz="2800" dirty="0">
+              <a:endParaRPr lang="en-US" sz="2800" b="1" dirty="0">
                 <a:solidFill>
                   <a:srgbClr val="1E293B"/>
                 </a:solidFill>
@@ -13321,8 +12828,8 @@
         </p:nvSpPr>
         <p:spPr>
           <a:xfrm>
-            <a:off x="5884853" y="5426501"/>
-            <a:ext cx="2422352" cy="830997"/>
+            <a:off x="5884853" y="5092994"/>
+            <a:ext cx="2422352" cy="1200329"/>
           </a:xfrm>
           <a:prstGeom prst="rect">
             <a:avLst/>
@@ -13336,6 +12843,21 @@
           <a:lstStyle/>
           <a:p>
             <a:pPr algn="r"/>
+            <a:r>
+              <a:rPr lang="en-US" sz="2400" i="1" dirty="0">
+                <a:solidFill>
+                  <a:srgbClr val="94A3B8"/>
+                </a:solidFill>
+              </a:rPr>
+              <a:t>Download</a:t>
+            </a:r>
+            <a:br>
+              <a:rPr lang="en-US" sz="2400" i="1" dirty="0">
+                <a:solidFill>
+                  <a:srgbClr val="94A3B8"/>
+                </a:solidFill>
+              </a:rPr>
+            </a:br>
             <a:r>
               <a:rPr lang="en-US" sz="2400" i="1" dirty="0">
                 <a:solidFill>
@@ -13668,7 +13190,12 @@
             <p:ph type="title"/>
           </p:nvPr>
         </p:nvSpPr>
-        <p:spPr/>
+        <p:spPr>
+          <a:xfrm>
+            <a:off x="294968" y="365125"/>
+            <a:ext cx="10515600" cy="1325563"/>
+          </a:xfrm>
+        </p:spPr>
         <p:txBody>
           <a:bodyPr>
             <a:normAutofit/>
@@ -13689,14 +13216,212 @@
       </p:sp>
       <p:sp>
         <p:nvSpPr>
-          <p:cNvPr id="100" name="HookCard"/>
+          <p:cNvPr id="202" name="Pain202"/>
           <p:cNvSpPr/>
           <p:nvPr/>
         </p:nvSpPr>
         <p:spPr>
           <a:xfrm>
-            <a:off x="9129251" y="1650540"/>
-            <a:ext cx="2767779" cy="3983344"/>
+            <a:off x="294970" y="4362335"/>
+            <a:ext cx="9000000" cy="1143000"/>
+          </a:xfrm>
+          <a:prstGeom prst="roundRect">
+            <a:avLst>
+              <a:gd name="adj" fmla="val 8000"/>
+            </a:avLst>
+          </a:prstGeom>
+          <a:solidFill>
+            <a:srgbClr val="FFFFFF"/>
+          </a:solidFill>
+          <a:ln w="12700">
+            <a:solidFill>
+              <a:srgbClr val="E2E8F0"/>
+            </a:solidFill>
+          </a:ln>
+        </p:spPr>
+        <p:txBody>
+          <a:bodyPr wrap="square" lIns="180000" tIns="140000" rIns="180000" bIns="140000" anchor="ctr"/>
+          <a:lstStyle/>
+          <a:p>
+            <a:pPr algn="l"/>
+            <a:r>
+              <a:rPr lang="en-US" sz="2400" b="1" dirty="0">
+                <a:solidFill>
+                  <a:srgbClr val="0F172A"/>
+                </a:solidFill>
+              </a:rPr>
+              <a:t>Developers are </a:t>
+            </a:r>
+            <a:r>
+              <a:rPr lang="en-US" sz="2400" b="1" u="sng" dirty="0">
+                <a:solidFill>
+                  <a:srgbClr val="0F172A"/>
+                </a:solidFill>
+              </a:rPr>
+              <a:t>bottleneck</a:t>
+            </a:r>
+          </a:p>
+          <a:p>
+            <a:pPr algn="l">
+              <a:spcBef>
+                <a:spcPts val="400"/>
+              </a:spcBef>
+            </a:pPr>
+            <a:r>
+              <a:rPr lang="en-US" dirty="0">
+                <a:solidFill>
+                  <a:srgbClr val="475569"/>
+                </a:solidFill>
+              </a:rPr>
+              <a:t>Business waits on engineers</a:t>
+            </a:r>
+          </a:p>
+        </p:txBody>
+      </p:sp>
+      <p:sp>
+        <p:nvSpPr>
+          <p:cNvPr id="203" name="Pain203"/>
+          <p:cNvSpPr/>
+          <p:nvPr/>
+        </p:nvSpPr>
+        <p:spPr>
+          <a:xfrm>
+            <a:off x="294968" y="1690688"/>
+            <a:ext cx="9000000" cy="1143000"/>
+          </a:xfrm>
+          <a:prstGeom prst="roundRect">
+            <a:avLst>
+              <a:gd name="adj" fmla="val 8000"/>
+            </a:avLst>
+          </a:prstGeom>
+          <a:solidFill>
+            <a:srgbClr val="FFFFFF"/>
+          </a:solidFill>
+          <a:ln w="12700">
+            <a:solidFill>
+              <a:srgbClr val="E2E8F0"/>
+            </a:solidFill>
+          </a:ln>
+        </p:spPr>
+        <p:txBody>
+          <a:bodyPr wrap="square" lIns="180000" tIns="140000" rIns="180000" bIns="140000" anchor="ctr"/>
+          <a:lstStyle/>
+          <a:p>
+            <a:pPr algn="l"/>
+            <a:r>
+              <a:rPr lang="en-US" sz="2400" b="1" dirty="0">
+                <a:solidFill>
+                  <a:srgbClr val="0F172A"/>
+                </a:solidFill>
+              </a:rPr>
+              <a:t>Reporting tools are </a:t>
+            </a:r>
+            <a:r>
+              <a:rPr lang="en-US" sz="2400" b="1" u="sng" dirty="0">
+                <a:solidFill>
+                  <a:srgbClr val="0F172A"/>
+                </a:solidFill>
+              </a:rPr>
+              <a:t>rigid</a:t>
+            </a:r>
+          </a:p>
+          <a:p>
+            <a:pPr algn="l">
+              <a:spcBef>
+                <a:spcPts val="400"/>
+              </a:spcBef>
+            </a:pPr>
+            <a:r>
+              <a:rPr lang="en-US" dirty="0">
+                <a:solidFill>
+                  <a:srgbClr val="475569"/>
+                </a:solidFill>
+              </a:rPr>
+              <a:t>Every new question = new ticket</a:t>
+            </a:r>
+          </a:p>
+        </p:txBody>
+      </p:sp>
+      <p:sp>
+        <p:nvSpPr>
+          <p:cNvPr id="204" name="Pain204"/>
+          <p:cNvSpPr/>
+          <p:nvPr/>
+        </p:nvSpPr>
+        <p:spPr>
+          <a:xfrm>
+            <a:off x="294968" y="3026511"/>
+            <a:ext cx="9000000" cy="1143000"/>
+          </a:xfrm>
+          <a:prstGeom prst="roundRect">
+            <a:avLst>
+              <a:gd name="adj" fmla="val 8000"/>
+            </a:avLst>
+          </a:prstGeom>
+          <a:solidFill>
+            <a:srgbClr val="FFFFFF"/>
+          </a:solidFill>
+          <a:ln w="12700">
+            <a:solidFill>
+              <a:srgbClr val="E2E8F0"/>
+            </a:solidFill>
+          </a:ln>
+        </p:spPr>
+        <p:txBody>
+          <a:bodyPr wrap="square" lIns="180000" tIns="140000" rIns="180000" bIns="140000" anchor="ctr"/>
+          <a:lstStyle/>
+          <a:p>
+            <a:pPr algn="l"/>
+            <a:r>
+              <a:rPr lang="en-US" sz="2400" b="1" dirty="0">
+                <a:solidFill>
+                  <a:srgbClr val="0F172A"/>
+                </a:solidFill>
+              </a:rPr>
+              <a:t>Writing SQL, Page Design, Testing, Deployment are </a:t>
+            </a:r>
+            <a:r>
+              <a:rPr lang="en-US" sz="2400" b="1" u="sng" dirty="0">
+                <a:solidFill>
+                  <a:srgbClr val="0F172A"/>
+                </a:solidFill>
+              </a:rPr>
+              <a:t>slow</a:t>
+            </a:r>
+          </a:p>
+          <a:p>
+            <a:pPr algn="l">
+              <a:spcBef>
+                <a:spcPts val="400"/>
+              </a:spcBef>
+            </a:pPr>
+            <a:r>
+              <a:rPr lang="en-US" dirty="0">
+                <a:solidFill>
+                  <a:srgbClr val="475569"/>
+                </a:solidFill>
+              </a:rPr>
+              <a:t>The real value is trapped behind technical gatekeepers</a:t>
+            </a:r>
+          </a:p>
+        </p:txBody>
+      </p:sp>
+      <p:sp>
+        <p:nvSpPr>
+          <p:cNvPr id="3" name="HookCard">
+            <a:extLst>
+              <a:ext uri="{FF2B5EF4-FFF2-40B4-BE49-F238E27FC236}">
+                <a16:creationId xmlns:a16="http://schemas.microsoft.com/office/drawing/2014/main" id="{83DB4F90-329A-712C-5DB7-1C0CE558FAFF}"/>
+              </a:ext>
+            </a:extLst>
+          </p:cNvPr>
+          <p:cNvSpPr/>
+          <p:nvPr/>
+        </p:nvSpPr>
+        <p:spPr>
+          <a:xfrm>
+            <a:off x="9438968" y="1606339"/>
+            <a:ext cx="2458062" cy="3983344"/>
           </a:xfrm>
           <a:prstGeom prst="roundRect">
             <a:avLst>
@@ -13717,237 +13442,66 @@
           <a:lstStyle/>
           <a:p>
             <a:pPr algn="r"/>
-            <a:r>
-              <a:rPr lang="en-US" sz="3600" b="1" dirty="0">
-                <a:solidFill>
-                  <a:srgbClr val="0F172A"/>
-                </a:solidFill>
-              </a:rPr>
-              <a:t>Data is </a:t>
-            </a:r>
-            <a:r>
-              <a:rPr lang="en-US" sz="3600" b="1" dirty="0">
-                <a:solidFill>
-                  <a:srgbClr val="FF0000"/>
-                </a:solidFill>
-              </a:rPr>
-              <a:t>locked</a:t>
-            </a:r>
-            <a:r>
-              <a:rPr lang="en-US" sz="3600" b="1" dirty="0">
-                <a:solidFill>
-                  <a:srgbClr val="0F172A"/>
-                </a:solidFill>
-              </a:rPr>
-              <a:t> behind technical curtains</a:t>
-            </a:r>
-          </a:p>
-        </p:txBody>
-      </p:sp>
-      <p:sp>
-        <p:nvSpPr>
-          <p:cNvPr id="202" name="Pain202"/>
-          <p:cNvSpPr/>
+            <a:endParaRPr lang="en-US" sz="3600" b="1" dirty="0">
+              <a:solidFill>
+                <a:srgbClr val="0F172A"/>
+              </a:solidFill>
+            </a:endParaRPr>
+          </a:p>
+        </p:txBody>
+      </p:sp>
+      <p:sp>
+        <p:nvSpPr>
+          <p:cNvPr id="5" name="TextBox 4">
+            <a:extLst>
+              <a:ext uri="{FF2B5EF4-FFF2-40B4-BE49-F238E27FC236}">
+                <a16:creationId xmlns:a16="http://schemas.microsoft.com/office/drawing/2014/main" id="{D6520705-57EF-7347-2A93-B973F7CDFB64}"/>
+              </a:ext>
+            </a:extLst>
+          </p:cNvPr>
+          <p:cNvSpPr txBox="1"/>
           <p:nvPr/>
         </p:nvSpPr>
         <p:spPr>
           <a:xfrm>
-            <a:off x="602232" y="4490884"/>
-            <a:ext cx="8143566" cy="1143000"/>
-          </a:xfrm>
-          <a:prstGeom prst="roundRect">
-            <a:avLst>
-              <a:gd name="adj" fmla="val 8000"/>
-            </a:avLst>
+            <a:off x="9438968" y="2166850"/>
+            <a:ext cx="2602062" cy="2862322"/>
+          </a:xfrm>
+          <a:prstGeom prst="rect">
+            <a:avLst/>
           </a:prstGeom>
-          <a:solidFill>
-            <a:srgbClr val="FFFFFF"/>
-          </a:solidFill>
-          <a:ln w="12700">
-            <a:solidFill>
-              <a:srgbClr val="E2E8F0"/>
-            </a:solidFill>
-          </a:ln>
+          <a:noFill/>
         </p:spPr>
         <p:txBody>
-          <a:bodyPr wrap="square" lIns="180000" tIns="140000" rIns="180000" bIns="140000" anchor="ctr"/>
-          <a:lstStyle/>
-          <a:p>
-            <a:pPr algn="l"/>
-            <a:r>
-              <a:rPr lang="en-US" b="1" dirty="0">
-                <a:solidFill>
-                  <a:srgbClr val="F59E0B"/>
-                </a:solidFill>
-              </a:rPr>
-              <a:t>02  </a:t>
-            </a:r>
-            <a:r>
-              <a:rPr lang="en-US" sz="2400" b="1" dirty="0">
+          <a:bodyPr wrap="square">
+            <a:spAutoFit/>
+          </a:bodyPr>
+          <a:lstStyle/>
+          <a:p>
+            <a:pPr algn="ctr"/>
+            <a:r>
+              <a:rPr lang="en-US" sz="3600" b="1" dirty="0">
                 <a:solidFill>
                   <a:srgbClr val="0F172A"/>
                 </a:solidFill>
               </a:rPr>
-              <a:t>Developers are </a:t>
-            </a:r>
-            <a:r>
-              <a:rPr lang="en-US" sz="2400" b="1" u="sng" dirty="0">
+              <a:t>Data is </a:t>
+            </a:r>
+            <a:r>
+              <a:rPr lang="en-US" sz="3600" b="1" dirty="0">
+                <a:solidFill>
+                  <a:srgbClr val="FF0000"/>
+                </a:solidFill>
+              </a:rPr>
+              <a:t>locked</a:t>
+            </a:r>
+            <a:r>
+              <a:rPr lang="en-US" sz="3600" b="1" dirty="0">
                 <a:solidFill>
                   <a:srgbClr val="0F172A"/>
                 </a:solidFill>
               </a:rPr>
-              <a:t>bottleneck</a:t>
-            </a:r>
-          </a:p>
-          <a:p>
-            <a:pPr algn="l">
-              <a:spcBef>
-                <a:spcPts val="400"/>
-              </a:spcBef>
-            </a:pPr>
-            <a:r>
-              <a:rPr lang="en-US" dirty="0">
-                <a:solidFill>
-                  <a:srgbClr val="475569"/>
-                </a:solidFill>
-              </a:rPr>
-              <a:t>Business waits on engineers</a:t>
-            </a:r>
-          </a:p>
-        </p:txBody>
-      </p:sp>
-      <p:sp>
-        <p:nvSpPr>
-          <p:cNvPr id="203" name="Pain203"/>
-          <p:cNvSpPr/>
-          <p:nvPr/>
-        </p:nvSpPr>
-        <p:spPr>
-          <a:xfrm>
-            <a:off x="602231" y="1650540"/>
-            <a:ext cx="8143567" cy="1143000"/>
-          </a:xfrm>
-          <a:prstGeom prst="roundRect">
-            <a:avLst>
-              <a:gd name="adj" fmla="val 8000"/>
-            </a:avLst>
-          </a:prstGeom>
-          <a:solidFill>
-            <a:srgbClr val="FFFFFF"/>
-          </a:solidFill>
-          <a:ln w="12700">
-            <a:solidFill>
-              <a:srgbClr val="E2E8F0"/>
-            </a:solidFill>
-          </a:ln>
-        </p:spPr>
-        <p:txBody>
-          <a:bodyPr wrap="square" lIns="180000" tIns="140000" rIns="180000" bIns="140000" anchor="ctr"/>
-          <a:lstStyle/>
-          <a:p>
-            <a:pPr algn="l"/>
-            <a:r>
-              <a:rPr lang="en-US" b="1" dirty="0">
-                <a:solidFill>
-                  <a:srgbClr val="F43F5E"/>
-                </a:solidFill>
-              </a:rPr>
-              <a:t>01  </a:t>
-            </a:r>
-            <a:r>
-              <a:rPr lang="en-US" sz="2400" b="1" dirty="0">
-                <a:solidFill>
-                  <a:srgbClr val="0F172A"/>
-                </a:solidFill>
-              </a:rPr>
-              <a:t>Reporting tools are </a:t>
-            </a:r>
-            <a:r>
-              <a:rPr lang="en-US" sz="2400" b="1" u="sng" dirty="0">
-                <a:solidFill>
-                  <a:srgbClr val="0F172A"/>
-                </a:solidFill>
-              </a:rPr>
-              <a:t>rigid</a:t>
-            </a:r>
-          </a:p>
-          <a:p>
-            <a:pPr algn="l">
-              <a:spcBef>
-                <a:spcPts val="400"/>
-              </a:spcBef>
-            </a:pPr>
-            <a:r>
-              <a:rPr lang="en-US" dirty="0">
-                <a:solidFill>
-                  <a:srgbClr val="475569"/>
-                </a:solidFill>
-              </a:rPr>
-              <a:t>Every new question = new ticket</a:t>
-            </a:r>
-          </a:p>
-        </p:txBody>
-      </p:sp>
-      <p:sp>
-        <p:nvSpPr>
-          <p:cNvPr id="204" name="Pain204"/>
-          <p:cNvSpPr/>
-          <p:nvPr/>
-        </p:nvSpPr>
-        <p:spPr>
-          <a:xfrm>
-            <a:off x="602232" y="3079878"/>
-            <a:ext cx="8143568" cy="1143000"/>
-          </a:xfrm>
-          <a:prstGeom prst="roundRect">
-            <a:avLst>
-              <a:gd name="adj" fmla="val 8000"/>
-            </a:avLst>
-          </a:prstGeom>
-          <a:solidFill>
-            <a:srgbClr val="FFFFFF"/>
-          </a:solidFill>
-          <a:ln w="12700">
-            <a:solidFill>
-              <a:srgbClr val="E2E8F0"/>
-            </a:solidFill>
-          </a:ln>
-        </p:spPr>
-        <p:txBody>
-          <a:bodyPr wrap="square" lIns="180000" tIns="140000" rIns="180000" bIns="140000" anchor="ctr"/>
-          <a:lstStyle/>
-          <a:p>
-            <a:pPr algn="l"/>
-            <a:r>
-              <a:rPr lang="en-US" b="1" dirty="0">
-                <a:solidFill>
-                  <a:srgbClr val="10B981"/>
-                </a:solidFill>
-              </a:rPr>
-              <a:t>03  </a:t>
-            </a:r>
-            <a:r>
-              <a:rPr lang="en-US" sz="2400" b="1" dirty="0">
-                <a:solidFill>
-                  <a:srgbClr val="0F172A"/>
-                </a:solidFill>
-              </a:rPr>
-              <a:t>Writing SQL, Page Design, Testing, Deployment</a:t>
-            </a:r>
-          </a:p>
-          <a:p>
-            <a:pPr algn="l">
-              <a:spcBef>
-                <a:spcPts val="400"/>
-              </a:spcBef>
-            </a:pPr>
-            <a:r>
-              <a:rPr lang="en-US" dirty="0">
-                <a:solidFill>
-                  <a:srgbClr val="475569"/>
-                </a:solidFill>
-              </a:rPr>
-              <a:t>The real value is trapped behind technical gatekeepers</a:t>
+              <a:t> behind technical curtains!</a:t>
             </a:r>
           </a:p>
         </p:txBody>
@@ -13984,14 +13538,49 @@
       </p:grpSpPr>
       <p:sp>
         <p:nvSpPr>
-          <p:cNvPr id="300" name="QMark"/>
+          <p:cNvPr id="2" name="Panel">
+            <a:extLst>
+              <a:ext uri="{FF2B5EF4-FFF2-40B4-BE49-F238E27FC236}">
+                <a16:creationId xmlns:a16="http://schemas.microsoft.com/office/drawing/2014/main" id="{74421564-AFB6-A882-9D32-6CFD32A6A777}"/>
+              </a:ext>
+            </a:extLst>
+          </p:cNvPr>
+          <p:cNvSpPr/>
+          <p:nvPr/>
+        </p:nvSpPr>
+        <p:spPr>
+          <a:xfrm>
+            <a:off x="73744" y="911168"/>
+            <a:ext cx="12118256" cy="4527732"/>
+          </a:xfrm>
+          <a:prstGeom prst="rect">
+            <a:avLst/>
+          </a:prstGeom>
+          <a:solidFill>
+            <a:srgbClr val="0F172A"/>
+          </a:solidFill>
+          <a:ln>
+            <a:noFill/>
+          </a:ln>
+        </p:spPr>
+        <p:txBody>
+          <a:bodyPr/>
+          <a:lstStyle/>
+          <a:p>
+            <a:endParaRPr lang="en-US" sz="3200"/>
+          </a:p>
+        </p:txBody>
+      </p:sp>
+      <p:sp>
+        <p:nvSpPr>
+          <p:cNvPr id="301" name="Quote"/>
           <p:cNvSpPr txBox="1"/>
           <p:nvPr/>
         </p:nvSpPr>
         <p:spPr>
           <a:xfrm>
-            <a:off x="563367" y="739239"/>
-            <a:ext cx="885423" cy="1291442"/>
+            <a:off x="1006078" y="1856426"/>
+            <a:ext cx="7876665" cy="3145147"/>
           </a:xfrm>
           <a:prstGeom prst="rect">
             <a:avLst/>
@@ -14002,39 +13591,6 @@
           <a:bodyPr wrap="square" anchor="t"/>
           <a:lstStyle/>
           <a:p>
-            <a:pPr algn="l"/>
-            <a:r>
-              <a:rPr lang="en-US" sz="14400" b="1" dirty="0">
-                <a:solidFill>
-                  <a:srgbClr val="22D3EE"/>
-                </a:solidFill>
-                <a:latin typeface="Inter"/>
-              </a:rPr>
-              <a:t>"</a:t>
-            </a:r>
-          </a:p>
-        </p:txBody>
-      </p:sp>
-      <p:sp>
-        <p:nvSpPr>
-          <p:cNvPr id="301" name="Quote"/>
-          <p:cNvSpPr txBox="1"/>
-          <p:nvPr/>
-        </p:nvSpPr>
-        <p:spPr>
-          <a:xfrm>
-            <a:off x="1006078" y="1856426"/>
-            <a:ext cx="7876665" cy="3145147"/>
-          </a:xfrm>
-          <a:prstGeom prst="rect">
-            <a:avLst/>
-          </a:prstGeom>
-          <a:noFill/>
-        </p:spPr>
-        <p:txBody>
-          <a:bodyPr wrap="square" anchor="t"/>
-          <a:lstStyle/>
-          <a:p>
             <a:pPr algn="l">
               <a:lnSpc>
                 <a:spcPct val="105000"/>
@@ -14043,7 +13599,7 @@
             <a:r>
               <a:rPr lang="en-US" sz="6600" b="1" dirty="0">
                 <a:solidFill>
-                  <a:srgbClr val="0F172A"/>
+                  <a:schemeClr val="bg1"/>
                 </a:solidFill>
               </a:rPr>
               <a:t>What if you could </a:t>
@@ -14051,14 +13607,14 @@
             <a:br>
               <a:rPr lang="en-US" sz="6600" b="1" dirty="0">
                 <a:solidFill>
-                  <a:srgbClr val="0F172A"/>
+                  <a:schemeClr val="bg1"/>
                 </a:solidFill>
               </a:rPr>
             </a:br>
             <a:r>
               <a:rPr lang="en-US" sz="6600" b="1" dirty="0">
                 <a:solidFill>
-                  <a:srgbClr val="0F172A"/>
+                  <a:schemeClr val="bg1"/>
                 </a:solidFill>
               </a:rPr>
               <a:t>just </a:t>
@@ -14089,49 +13645,10 @@
             <a:r>
               <a:rPr lang="en-US" sz="6600" b="1" dirty="0">
                 <a:solidFill>
-                  <a:srgbClr val="0F172A"/>
+                  <a:schemeClr val="bg1"/>
                 </a:solidFill>
               </a:rPr>
               <a:t>your database?</a:t>
-            </a:r>
-          </a:p>
-        </p:txBody>
-      </p:sp>
-      <p:sp>
-        <p:nvSpPr>
-          <p:cNvPr id="4" name="QMark">
-            <a:extLst>
-              <a:ext uri="{FF2B5EF4-FFF2-40B4-BE49-F238E27FC236}">
-                <a16:creationId xmlns:a16="http://schemas.microsoft.com/office/drawing/2014/main" id="{75D887ED-F9DA-3A3C-1FFA-A57CEDCF23B0}"/>
-              </a:ext>
-            </a:extLst>
-          </p:cNvPr>
-          <p:cNvSpPr txBox="1"/>
-          <p:nvPr/>
-        </p:nvSpPr>
-        <p:spPr>
-          <a:xfrm>
-            <a:off x="8267310" y="4200896"/>
-            <a:ext cx="1230866" cy="1238004"/>
-          </a:xfrm>
-          <a:prstGeom prst="rect">
-            <a:avLst/>
-          </a:prstGeom>
-          <a:noFill/>
-        </p:spPr>
-        <p:txBody>
-          <a:bodyPr wrap="square" anchor="t"/>
-          <a:lstStyle/>
-          <a:p>
-            <a:pPr algn="l"/>
-            <a:r>
-              <a:rPr lang="en-US" sz="14400" b="1" dirty="0">
-                <a:solidFill>
-                  <a:srgbClr val="22D3EE"/>
-                </a:solidFill>
-                <a:latin typeface="Inter"/>
-              </a:rPr>
-              <a:t>"</a:t>
             </a:r>
           </a:p>
         </p:txBody>
@@ -14150,7 +13667,7 @@
 </file>
 
 <file path=ppt/slides/slide5.xml><?xml version="1.0" encoding="utf-8"?>
-<p:sld xmlns:a="http://schemas.openxmlformats.org/drawingml/2006/main" xmlns:r="http://schemas.openxmlformats.org/officeDocument/2006/relationships" xmlns:p="http://schemas.openxmlformats.org/presentationml/2006/main">
+<p:sld xmlns:a="http://schemas.openxmlformats.org/drawingml/2006/main" xmlns:r="http://schemas.openxmlformats.org/officeDocument/2006/relationships" xmlns:p="http://schemas.openxmlformats.org/presentationml/2006/main" show="0">
   <p:cSld>
     <p:spTree>
       <p:nvGrpSpPr>
@@ -14652,13 +14169,7 @@
   <p:cSld>
     <p:spTree>
       <p:nvGrpSpPr>
-        <p:cNvPr id="1" name="">
-          <a:extLst>
-            <a:ext uri="{FF2B5EF4-FFF2-40B4-BE49-F238E27FC236}">
-              <a16:creationId xmlns:a16="http://schemas.microsoft.com/office/drawing/2014/main" id="{5D2C07A3-A506-91E2-776A-A29FCBDFCAB7}"/>
-            </a:ext>
-          </a:extLst>
-        </p:cNvPr>
+        <p:cNvPr id="1" name=""/>
         <p:cNvGrpSpPr/>
         <p:nvPr/>
       </p:nvGrpSpPr>
@@ -14672,10 +14183,10 @@
       </p:grpSpPr>
       <p:sp>
         <p:nvSpPr>
-          <p:cNvPr id="700" name="Panel">
+          <p:cNvPr id="20" name="Stage0">
             <a:extLst>
               <a:ext uri="{FF2B5EF4-FFF2-40B4-BE49-F238E27FC236}">
-                <a16:creationId xmlns:a16="http://schemas.microsoft.com/office/drawing/2014/main" id="{18B2B528-04D2-2150-B806-041B393ED26A}"/>
+                <a16:creationId xmlns:a16="http://schemas.microsoft.com/office/drawing/2014/main" id="{C88B0937-7522-BCEA-AD17-C53A61AD7815}"/>
               </a:ext>
             </a:extLst>
           </p:cNvPr>
@@ -14684,33 +14195,54 @@
         </p:nvSpPr>
         <p:spPr>
           <a:xfrm>
-            <a:off x="73026" y="1270000"/>
-            <a:ext cx="12118974" cy="4318000"/>
-          </a:xfrm>
-          <a:prstGeom prst="rect">
-            <a:avLst/>
+            <a:off x="9804400" y="3323967"/>
+            <a:ext cx="2106862" cy="1519881"/>
+          </a:xfrm>
+          <a:prstGeom prst="roundRect">
+            <a:avLst>
+              <a:gd name="adj" fmla="val 10000"/>
+            </a:avLst>
           </a:prstGeom>
           <a:solidFill>
-            <a:srgbClr val="0F172A"/>
+            <a:srgbClr val="FEF3C7"/>
           </a:solidFill>
           <a:ln>
             <a:noFill/>
           </a:ln>
         </p:spPr>
-        <p:txBody>
-          <a:bodyPr/>
-          <a:lstStyle/>
-          <a:p>
-            <a:endParaRPr lang="en-US" sz="3200"/>
-          </a:p>
-        </p:txBody>
-      </p:sp>
-      <p:sp>
-        <p:nvSpPr>
-          <p:cNvPr id="701" name="AccentBar">
+        <p:style>
+          <a:lnRef idx="0">
+            <a:scrgbClr r="0" g="0" b="0"/>
+          </a:lnRef>
+          <a:fillRef idx="0">
+            <a:scrgbClr r="0" g="0" b="0"/>
+          </a:fillRef>
+          <a:effectRef idx="0">
+            <a:scrgbClr r="0" g="0" b="0"/>
+          </a:effectRef>
+          <a:fontRef idx="minor">
+            <a:schemeClr val="lt1"/>
+          </a:fontRef>
+        </p:style>
+        <p:txBody>
+          <a:bodyPr wrap="square" lIns="90000" tIns="90000" rIns="90000" bIns="90000" anchor="t"/>
+          <a:lstStyle/>
+          <a:p>
+            <a:pPr algn="l"/>
+            <a:endParaRPr lang="en-US" sz="1100" dirty="0">
+              <a:solidFill>
+                <a:srgbClr val="64748B"/>
+              </a:solidFill>
+            </a:endParaRPr>
+          </a:p>
+        </p:txBody>
+      </p:sp>
+      <p:sp>
+        <p:nvSpPr>
+          <p:cNvPr id="3" name="Stage0">
             <a:extLst>
               <a:ext uri="{FF2B5EF4-FFF2-40B4-BE49-F238E27FC236}">
-                <a16:creationId xmlns:a16="http://schemas.microsoft.com/office/drawing/2014/main" id="{C728586D-EB19-12D4-4F3F-29D6CB3CC6F8}"/>
+                <a16:creationId xmlns:a16="http://schemas.microsoft.com/office/drawing/2014/main" id="{8861DE56-5964-C0B4-16CE-5227DA7D9A2C}"/>
               </a:ext>
             </a:extLst>
           </p:cNvPr>
@@ -14719,24 +14251,45 @@
         </p:nvSpPr>
         <p:spPr>
           <a:xfrm>
-            <a:off x="929325" y="1911350"/>
-            <a:ext cx="4752000" cy="76200"/>
-          </a:xfrm>
-          <a:prstGeom prst="rect">
-            <a:avLst/>
+            <a:off x="279399" y="1779372"/>
+            <a:ext cx="11631863" cy="1791731"/>
+          </a:xfrm>
+          <a:prstGeom prst="roundRect">
+            <a:avLst>
+              <a:gd name="adj" fmla="val 10000"/>
+            </a:avLst>
           </a:prstGeom>
           <a:solidFill>
-            <a:srgbClr val="22D3EE"/>
+            <a:srgbClr val="FEF3C7"/>
           </a:solidFill>
           <a:ln>
             <a:noFill/>
           </a:ln>
         </p:spPr>
-        <p:txBody>
-          <a:bodyPr/>
-          <a:lstStyle/>
-          <a:p>
-            <a:endParaRPr lang="en-US"/>
+        <p:style>
+          <a:lnRef idx="0">
+            <a:scrgbClr r="0" g="0" b="0"/>
+          </a:lnRef>
+          <a:fillRef idx="0">
+            <a:scrgbClr r="0" g="0" b="0"/>
+          </a:fillRef>
+          <a:effectRef idx="0">
+            <a:scrgbClr r="0" g="0" b="0"/>
+          </a:effectRef>
+          <a:fontRef idx="minor">
+            <a:schemeClr val="lt1"/>
+          </a:fontRef>
+        </p:style>
+        <p:txBody>
+          <a:bodyPr wrap="square" lIns="90000" tIns="90000" rIns="90000" bIns="90000" anchor="t"/>
+          <a:lstStyle/>
+          <a:p>
+            <a:pPr algn="l"/>
+            <a:endParaRPr lang="en-US" sz="1100" dirty="0">
+              <a:solidFill>
+                <a:srgbClr val="64748B"/>
+              </a:solidFill>
+            </a:endParaRPr>
           </a:p>
         </p:txBody>
       </p:sp>
@@ -14745,7 +14298,7 @@
           <p:cNvPr id="2" name="Title 1">
             <a:extLst>
               <a:ext uri="{FF2B5EF4-FFF2-40B4-BE49-F238E27FC236}">
-                <a16:creationId xmlns:a16="http://schemas.microsoft.com/office/drawing/2014/main" id="{11C53B48-EF36-6340-82E8-458E3E0A9C22}"/>
+                <a16:creationId xmlns:a16="http://schemas.microsoft.com/office/drawing/2014/main" id="{586D80D3-1267-47C8-5022-51711533C2A1}"/>
               </a:ext>
             </a:extLst>
           </p:cNvPr>
@@ -14756,78 +14309,982 @@
             <p:ph type="title"/>
           </p:nvPr>
         </p:nvSpPr>
-        <p:spPr/>
+        <p:spPr>
+          <a:xfrm>
+            <a:off x="342231" y="306214"/>
+            <a:ext cx="10515600" cy="1325563"/>
+          </a:xfrm>
+        </p:spPr>
+        <p:txBody>
+          <a:bodyPr>
+            <a:normAutofit/>
+          </a:bodyPr>
+          <a:lstStyle/>
+          <a:p>
+            <a:pPr algn="l"/>
+            <a:r>
+              <a:rPr lang="en-US" sz="4800" b="1" dirty="0">
+                <a:solidFill>
+                  <a:srgbClr val="0F172A"/>
+                </a:solidFill>
+              </a:rPr>
+              <a:t>The Pipeline</a:t>
+            </a:r>
+            <a:endParaRPr lang="en-US" sz="4800" b="1" dirty="0">
+              <a:solidFill>
+                <a:srgbClr val="94A3B8"/>
+              </a:solidFill>
+            </a:endParaRPr>
+          </a:p>
+        </p:txBody>
+      </p:sp>
+      <p:sp>
+        <p:nvSpPr>
+          <p:cNvPr id="800" name="Stage0"/>
+          <p:cNvSpPr/>
+          <p:nvPr/>
+        </p:nvSpPr>
+        <p:spPr>
+          <a:xfrm>
+            <a:off x="508000" y="2033372"/>
+            <a:ext cx="1651000" cy="1290596"/>
+          </a:xfrm>
+          <a:prstGeom prst="roundRect">
+            <a:avLst>
+              <a:gd name="adj" fmla="val 10000"/>
+            </a:avLst>
+          </a:prstGeom>
+          <a:solidFill>
+            <a:srgbClr val="FFFFFF"/>
+          </a:solidFill>
+          <a:ln w="19050">
+            <a:solidFill>
+              <a:srgbClr val="0891B2"/>
+            </a:solidFill>
+          </a:ln>
+          <a:effectLst>
+            <a:outerShdw blurRad="50000" dist="15000" dir="5400000" algn="t" rotWithShape="0">
+              <a:srgbClr val="0F172A">
+                <a:alpha val="10000"/>
+              </a:srgbClr>
+            </a:outerShdw>
+          </a:effectLst>
+        </p:spPr>
+        <p:txBody>
+          <a:bodyPr wrap="square" lIns="90000" tIns="90000" rIns="90000" bIns="90000" anchor="t"/>
+          <a:lstStyle/>
+          <a:p>
+            <a:pPr algn="l"/>
+            <a:r>
+              <a:rPr lang="en-US" sz="1200" b="1" spc="300" dirty="0">
+                <a:solidFill>
+                  <a:srgbClr val="0891B2"/>
+                </a:solidFill>
+              </a:rPr>
+              <a:t>01</a:t>
+            </a:r>
+          </a:p>
+          <a:p>
+            <a:pPr algn="l">
+              <a:spcBef>
+                <a:spcPts val="400"/>
+              </a:spcBef>
+            </a:pPr>
+            <a:r>
+              <a:rPr lang="en-US" sz="2400" b="1" dirty="0">
+                <a:solidFill>
+                  <a:srgbClr val="0F172A"/>
+                </a:solidFill>
+              </a:rPr>
+              <a:t>User</a:t>
+            </a:r>
+          </a:p>
+          <a:p>
+            <a:pPr algn="l">
+              <a:spcBef>
+                <a:spcPts val="300"/>
+              </a:spcBef>
+            </a:pPr>
+            <a:r>
+              <a:rPr lang="en-US" sz="1200" dirty="0">
+                <a:solidFill>
+                  <a:srgbClr val="64748B"/>
+                </a:solidFill>
+              </a:rPr>
+              <a:t>natural language</a:t>
+            </a:r>
+          </a:p>
+        </p:txBody>
+      </p:sp>
+      <p:sp>
+        <p:nvSpPr>
+          <p:cNvPr id="850" name="Arr0"/>
+          <p:cNvSpPr/>
+          <p:nvPr/>
+        </p:nvSpPr>
+        <p:spPr>
+          <a:xfrm>
+            <a:off x="2184400" y="2668372"/>
+            <a:ext cx="203200" cy="254000"/>
+          </a:xfrm>
+          <a:prstGeom prst="rightArrow">
+            <a:avLst>
+              <a:gd name="adj1" fmla="val 50000"/>
+              <a:gd name="adj2" fmla="val 50000"/>
+            </a:avLst>
+          </a:prstGeom>
+          <a:solidFill>
+            <a:srgbClr val="CBD5E1"/>
+          </a:solidFill>
+          <a:ln>
+            <a:noFill/>
+          </a:ln>
+        </p:spPr>
         <p:txBody>
           <a:bodyPr/>
           <a:lstStyle/>
           <a:p>
+            <a:endParaRPr lang="en-US"/>
+          </a:p>
+        </p:txBody>
+      </p:sp>
+      <p:sp>
+        <p:nvSpPr>
+          <p:cNvPr id="801" name="Stage1"/>
+          <p:cNvSpPr/>
+          <p:nvPr/>
+        </p:nvSpPr>
+        <p:spPr>
+          <a:xfrm>
+            <a:off x="2413000" y="2033372"/>
+            <a:ext cx="1651000" cy="1290596"/>
+          </a:xfrm>
+          <a:prstGeom prst="roundRect">
+            <a:avLst>
+              <a:gd name="adj" fmla="val 10000"/>
+            </a:avLst>
+          </a:prstGeom>
+          <a:solidFill>
+            <a:srgbClr val="FFFFFF"/>
+          </a:solidFill>
+          <a:ln w="19050">
+            <a:solidFill>
+              <a:srgbClr val="0891B2"/>
+            </a:solidFill>
+          </a:ln>
+          <a:effectLst>
+            <a:outerShdw blurRad="50000" dist="15000" dir="5400000" algn="t" rotWithShape="0">
+              <a:srgbClr val="0F172A">
+                <a:alpha val="10000"/>
+              </a:srgbClr>
+            </a:outerShdw>
+          </a:effectLst>
+        </p:spPr>
+        <p:txBody>
+          <a:bodyPr wrap="square" lIns="90000" tIns="90000" rIns="90000" bIns="90000" anchor="t"/>
+          <a:lstStyle/>
+          <a:p>
+            <a:pPr algn="l"/>
+            <a:r>
+              <a:rPr lang="en-US" sz="1200" b="1" spc="300" dirty="0">
+                <a:solidFill>
+                  <a:schemeClr val="accent6">
+                    <a:lumMod val="90000"/>
+                    <a:lumOff val="10000"/>
+                  </a:schemeClr>
+                </a:solidFill>
+              </a:rPr>
+              <a:t>02</a:t>
+            </a:r>
+          </a:p>
+          <a:p>
             <a:pPr algn="l">
-              <a:lnSpc>
-                <a:spcPct val="100000"/>
-              </a:lnSpc>
+              <a:spcBef>
+                <a:spcPts val="400"/>
+              </a:spcBef>
             </a:pPr>
             <a:r>
-              <a:rPr lang="en-US" sz="8000" b="1" dirty="0">
-                <a:solidFill>
-                  <a:srgbClr val="FFFFFF"/>
-                </a:solidFill>
-              </a:rPr>
-              <a:t>Live Demo</a:t>
+              <a:rPr lang="en-US" sz="2400" b="1" dirty="0"/>
+              <a:t>Prompt</a:t>
             </a:r>
           </a:p>
           <a:p>
             <a:pPr algn="l">
-              <a:buNone/>
+              <a:spcBef>
+                <a:spcPts val="300"/>
+              </a:spcBef>
             </a:pPr>
             <a:r>
-              <a:rPr lang="en-US" sz="2800" dirty="0">
+              <a:rPr lang="en-US" sz="1200" dirty="0">
+                <a:solidFill>
+                  <a:srgbClr val="64748B"/>
+                </a:solidFill>
+              </a:rPr>
+              <a:t>schema + rules</a:t>
+            </a:r>
+          </a:p>
+        </p:txBody>
+      </p:sp>
+      <p:sp>
+        <p:nvSpPr>
+          <p:cNvPr id="851" name="Arr1"/>
+          <p:cNvSpPr/>
+          <p:nvPr/>
+        </p:nvSpPr>
+        <p:spPr>
+          <a:xfrm>
+            <a:off x="4089400" y="2668372"/>
+            <a:ext cx="203200" cy="254000"/>
+          </a:xfrm>
+          <a:prstGeom prst="rightArrow">
+            <a:avLst>
+              <a:gd name="adj1" fmla="val 50000"/>
+              <a:gd name="adj2" fmla="val 50000"/>
+            </a:avLst>
+          </a:prstGeom>
+          <a:solidFill>
+            <a:srgbClr val="CBD5E1"/>
+          </a:solidFill>
+          <a:ln>
+            <a:noFill/>
+          </a:ln>
+        </p:spPr>
+        <p:txBody>
+          <a:bodyPr/>
+          <a:lstStyle/>
+          <a:p>
+            <a:endParaRPr lang="en-US"/>
+          </a:p>
+        </p:txBody>
+      </p:sp>
+      <p:sp>
+        <p:nvSpPr>
+          <p:cNvPr id="802" name="Stage2"/>
+          <p:cNvSpPr/>
+          <p:nvPr/>
+        </p:nvSpPr>
+        <p:spPr>
+          <a:xfrm>
+            <a:off x="4318000" y="2033372"/>
+            <a:ext cx="1651000" cy="1290596"/>
+          </a:xfrm>
+          <a:prstGeom prst="roundRect">
+            <a:avLst>
+              <a:gd name="adj" fmla="val 10000"/>
+            </a:avLst>
+          </a:prstGeom>
+          <a:solidFill>
+            <a:srgbClr val="FFFFFF"/>
+          </a:solidFill>
+          <a:ln w="19050">
+            <a:solidFill>
+              <a:srgbClr val="22D3EE"/>
+            </a:solidFill>
+          </a:ln>
+          <a:effectLst>
+            <a:outerShdw blurRad="50000" dist="15000" dir="5400000" algn="t" rotWithShape="0">
+              <a:srgbClr val="0F172A">
+                <a:alpha val="10000"/>
+              </a:srgbClr>
+            </a:outerShdw>
+          </a:effectLst>
+        </p:spPr>
+        <p:txBody>
+          <a:bodyPr wrap="square" lIns="90000" tIns="90000" rIns="90000" bIns="90000" anchor="t"/>
+          <a:lstStyle/>
+          <a:p>
+            <a:pPr algn="l"/>
+            <a:r>
+              <a:rPr lang="en-US" sz="1200" b="1" spc="300" dirty="0">
+                <a:solidFill>
+                  <a:srgbClr val="22D3EE"/>
+                </a:solidFill>
+              </a:rPr>
+              <a:t>03</a:t>
+            </a:r>
+          </a:p>
+          <a:p>
+            <a:pPr algn="l">
+              <a:spcBef>
+                <a:spcPts val="400"/>
+              </a:spcBef>
+            </a:pPr>
+            <a:r>
+              <a:rPr lang="en-US" sz="2400" b="1" dirty="0">
+                <a:solidFill>
+                  <a:srgbClr val="0F172A"/>
+                </a:solidFill>
+              </a:rPr>
+              <a:t>LLM</a:t>
+            </a:r>
+          </a:p>
+          <a:p>
+            <a:pPr algn="l">
+              <a:spcBef>
+                <a:spcPts val="300"/>
+              </a:spcBef>
+            </a:pPr>
+            <a:r>
+              <a:rPr lang="en-US" sz="1200" dirty="0">
+                <a:solidFill>
+                  <a:srgbClr val="64748B"/>
+                </a:solidFill>
+              </a:rPr>
+              <a:t>reasoning</a:t>
+            </a:r>
+          </a:p>
+        </p:txBody>
+      </p:sp>
+      <p:sp>
+        <p:nvSpPr>
+          <p:cNvPr id="852" name="Arr2"/>
+          <p:cNvSpPr/>
+          <p:nvPr/>
+        </p:nvSpPr>
+        <p:spPr>
+          <a:xfrm>
+            <a:off x="5994400" y="2668372"/>
+            <a:ext cx="203200" cy="254000"/>
+          </a:xfrm>
+          <a:prstGeom prst="rightArrow">
+            <a:avLst>
+              <a:gd name="adj1" fmla="val 50000"/>
+              <a:gd name="adj2" fmla="val 50000"/>
+            </a:avLst>
+          </a:prstGeom>
+          <a:solidFill>
+            <a:srgbClr val="CBD5E1"/>
+          </a:solidFill>
+          <a:ln>
+            <a:noFill/>
+          </a:ln>
+        </p:spPr>
+        <p:txBody>
+          <a:bodyPr/>
+          <a:lstStyle/>
+          <a:p>
+            <a:endParaRPr lang="en-US"/>
+          </a:p>
+        </p:txBody>
+      </p:sp>
+      <p:sp>
+        <p:nvSpPr>
+          <p:cNvPr id="803" name="Stage3"/>
+          <p:cNvSpPr/>
+          <p:nvPr/>
+        </p:nvSpPr>
+        <p:spPr>
+          <a:xfrm>
+            <a:off x="6223000" y="2033372"/>
+            <a:ext cx="1651000" cy="1290596"/>
+          </a:xfrm>
+          <a:prstGeom prst="roundRect">
+            <a:avLst>
+              <a:gd name="adj" fmla="val 10000"/>
+            </a:avLst>
+          </a:prstGeom>
+          <a:solidFill>
+            <a:srgbClr val="FFFFFF"/>
+          </a:solidFill>
+          <a:ln w="19050">
+            <a:solidFill>
+              <a:srgbClr val="10B981"/>
+            </a:solidFill>
+          </a:ln>
+          <a:effectLst>
+            <a:outerShdw blurRad="50000" dist="15000" dir="5400000" algn="t" rotWithShape="0">
+              <a:srgbClr val="0F172A">
+                <a:alpha val="10000"/>
+              </a:srgbClr>
+            </a:outerShdw>
+          </a:effectLst>
+        </p:spPr>
+        <p:txBody>
+          <a:bodyPr wrap="square" lIns="90000" tIns="90000" rIns="90000" bIns="90000" anchor="t"/>
+          <a:lstStyle/>
+          <a:p>
+            <a:pPr algn="l"/>
+            <a:r>
+              <a:rPr lang="en-US" sz="1200" b="1" spc="300" dirty="0">
+                <a:solidFill>
+                  <a:srgbClr val="10B981"/>
+                </a:solidFill>
+              </a:rPr>
+              <a:t>04</a:t>
+            </a:r>
+          </a:p>
+          <a:p>
+            <a:pPr algn="l">
+              <a:spcBef>
+                <a:spcPts val="400"/>
+              </a:spcBef>
+            </a:pPr>
+            <a:r>
+              <a:rPr lang="en-US" sz="2400" b="1" dirty="0">
+                <a:solidFill>
+                  <a:srgbClr val="0F172A"/>
+                </a:solidFill>
+              </a:rPr>
+              <a:t>SQL</a:t>
+            </a:r>
+          </a:p>
+          <a:p>
+            <a:pPr algn="l">
+              <a:spcBef>
+                <a:spcPts val="300"/>
+              </a:spcBef>
+            </a:pPr>
+            <a:r>
+              <a:rPr lang="en-US" sz="1200" dirty="0">
+                <a:solidFill>
+                  <a:srgbClr val="64748B"/>
+                </a:solidFill>
+              </a:rPr>
+              <a:t>generated query</a:t>
+            </a:r>
+          </a:p>
+        </p:txBody>
+      </p:sp>
+      <p:sp>
+        <p:nvSpPr>
+          <p:cNvPr id="853" name="Arr3"/>
+          <p:cNvSpPr/>
+          <p:nvPr/>
+        </p:nvSpPr>
+        <p:spPr>
+          <a:xfrm>
+            <a:off x="7899400" y="2668372"/>
+            <a:ext cx="203200" cy="254000"/>
+          </a:xfrm>
+          <a:prstGeom prst="rightArrow">
+            <a:avLst>
+              <a:gd name="adj1" fmla="val 50000"/>
+              <a:gd name="adj2" fmla="val 50000"/>
+            </a:avLst>
+          </a:prstGeom>
+          <a:solidFill>
+            <a:srgbClr val="CBD5E1"/>
+          </a:solidFill>
+          <a:ln>
+            <a:noFill/>
+          </a:ln>
+        </p:spPr>
+        <p:txBody>
+          <a:bodyPr/>
+          <a:lstStyle/>
+          <a:p>
+            <a:endParaRPr lang="en-US"/>
+          </a:p>
+        </p:txBody>
+      </p:sp>
+      <p:sp>
+        <p:nvSpPr>
+          <p:cNvPr id="804" name="Stage4"/>
+          <p:cNvSpPr/>
+          <p:nvPr/>
+        </p:nvSpPr>
+        <p:spPr>
+          <a:xfrm>
+            <a:off x="8128000" y="2033372"/>
+            <a:ext cx="1651000" cy="1290596"/>
+          </a:xfrm>
+          <a:prstGeom prst="roundRect">
+            <a:avLst>
+              <a:gd name="adj" fmla="val 10000"/>
+            </a:avLst>
+          </a:prstGeom>
+          <a:solidFill>
+            <a:srgbClr val="FFFFFF"/>
+          </a:solidFill>
+          <a:ln w="19050">
+            <a:solidFill>
+              <a:schemeClr val="accent3">
+                <a:lumMod val="75000"/>
+              </a:schemeClr>
+            </a:solidFill>
+          </a:ln>
+          <a:effectLst>
+            <a:outerShdw blurRad="50000" dist="15000" dir="5400000" algn="t" rotWithShape="0">
+              <a:srgbClr val="0F172A">
+                <a:alpha val="10000"/>
+              </a:srgbClr>
+            </a:outerShdw>
+          </a:effectLst>
+        </p:spPr>
+        <p:txBody>
+          <a:bodyPr wrap="square" lIns="90000" tIns="90000" rIns="90000" bIns="90000" anchor="t"/>
+          <a:lstStyle/>
+          <a:p>
+            <a:pPr algn="l"/>
+            <a:r>
+              <a:rPr lang="en-US" sz="1200" b="1" spc="300" dirty="0">
+                <a:solidFill>
+                  <a:srgbClr val="7B4F05"/>
+                </a:solidFill>
+              </a:rPr>
+              <a:t>05</a:t>
+            </a:r>
+          </a:p>
+          <a:p>
+            <a:pPr algn="l">
+              <a:spcBef>
+                <a:spcPts val="400"/>
+              </a:spcBef>
+            </a:pPr>
+            <a:r>
+              <a:rPr lang="en-US" sz="2400" b="1" dirty="0">
+                <a:solidFill>
+                  <a:srgbClr val="0F172A"/>
+                </a:solidFill>
+              </a:rPr>
+              <a:t>Validator</a:t>
+            </a:r>
+          </a:p>
+          <a:p>
+            <a:pPr algn="l">
+              <a:spcBef>
+                <a:spcPts val="300"/>
+              </a:spcBef>
+            </a:pPr>
+            <a:r>
+              <a:rPr lang="en-US" sz="1200" dirty="0">
+                <a:solidFill>
+                  <a:srgbClr val="64748B"/>
+                </a:solidFill>
+              </a:rPr>
+              <a:t>safety gate</a:t>
+            </a:r>
+          </a:p>
+        </p:txBody>
+      </p:sp>
+      <p:sp>
+        <p:nvSpPr>
+          <p:cNvPr id="854" name="Arr4"/>
+          <p:cNvSpPr/>
+          <p:nvPr/>
+        </p:nvSpPr>
+        <p:spPr>
+          <a:xfrm>
+            <a:off x="9804400" y="2668372"/>
+            <a:ext cx="203200" cy="254000"/>
+          </a:xfrm>
+          <a:prstGeom prst="rightArrow">
+            <a:avLst>
+              <a:gd name="adj1" fmla="val 50000"/>
+              <a:gd name="adj2" fmla="val 50000"/>
+            </a:avLst>
+          </a:prstGeom>
+          <a:solidFill>
+            <a:srgbClr val="CBD5E1"/>
+          </a:solidFill>
+          <a:ln>
+            <a:noFill/>
+          </a:ln>
+        </p:spPr>
+        <p:txBody>
+          <a:bodyPr/>
+          <a:lstStyle/>
+          <a:p>
+            <a:endParaRPr lang="en-US"/>
+          </a:p>
+        </p:txBody>
+      </p:sp>
+      <p:sp>
+        <p:nvSpPr>
+          <p:cNvPr id="805" name="Stage5"/>
+          <p:cNvSpPr/>
+          <p:nvPr/>
+        </p:nvSpPr>
+        <p:spPr>
+          <a:xfrm>
+            <a:off x="10033000" y="2033372"/>
+            <a:ext cx="1651000" cy="1290596"/>
+          </a:xfrm>
+          <a:prstGeom prst="roundRect">
+            <a:avLst>
+              <a:gd name="adj" fmla="val 10000"/>
+            </a:avLst>
+          </a:prstGeom>
+          <a:solidFill>
+            <a:srgbClr val="FFFFFF"/>
+          </a:solidFill>
+          <a:ln w="19050">
+            <a:solidFill>
+              <a:srgbClr val="F59E0B"/>
+            </a:solidFill>
+          </a:ln>
+          <a:effectLst>
+            <a:outerShdw blurRad="50000" dist="15000" dir="5400000" algn="t" rotWithShape="0">
+              <a:srgbClr val="0F172A">
+                <a:alpha val="10000"/>
+              </a:srgbClr>
+            </a:outerShdw>
+          </a:effectLst>
+        </p:spPr>
+        <p:txBody>
+          <a:bodyPr wrap="square" lIns="90000" tIns="90000" rIns="90000" bIns="90000" anchor="t"/>
+          <a:lstStyle/>
+          <a:p>
+            <a:pPr algn="l"/>
+            <a:r>
+              <a:rPr lang="en-US" sz="1200" b="1" spc="300" dirty="0">
+                <a:solidFill>
+                  <a:srgbClr val="F59E0B"/>
+                </a:solidFill>
+              </a:rPr>
+              <a:t>06</a:t>
+            </a:r>
+          </a:p>
+          <a:p>
+            <a:pPr algn="l">
+              <a:spcBef>
+                <a:spcPts val="400"/>
+              </a:spcBef>
+            </a:pPr>
+            <a:r>
+              <a:rPr lang="en-US" sz="2400" b="1" dirty="0">
+                <a:solidFill>
+                  <a:srgbClr val="0F172A"/>
+                </a:solidFill>
+              </a:rPr>
+              <a:t>Execute</a:t>
+            </a:r>
+          </a:p>
+          <a:p>
+            <a:pPr algn="l">
+              <a:spcBef>
+                <a:spcPts val="300"/>
+              </a:spcBef>
+            </a:pPr>
+            <a:r>
+              <a:rPr lang="en-US" sz="1200" dirty="0">
+                <a:solidFill>
+                  <a:srgbClr val="64748B"/>
+                </a:solidFill>
+              </a:rPr>
+              <a:t>results </a:t>
+            </a:r>
+          </a:p>
+        </p:txBody>
+      </p:sp>
+      <p:sp>
+        <p:nvSpPr>
+          <p:cNvPr id="880" name="Ex"/>
+          <p:cNvSpPr/>
+          <p:nvPr/>
+        </p:nvSpPr>
+        <p:spPr>
+          <a:xfrm>
+            <a:off x="507330" y="4999681"/>
+            <a:ext cx="11176000" cy="1016000"/>
+          </a:xfrm>
+          <a:prstGeom prst="roundRect">
+            <a:avLst>
+              <a:gd name="adj" fmla="val 8000"/>
+            </a:avLst>
+          </a:prstGeom>
+          <a:solidFill>
+            <a:srgbClr val="0F172A"/>
+          </a:solidFill>
+          <a:ln>
+            <a:noFill/>
+          </a:ln>
+        </p:spPr>
+        <p:txBody>
+          <a:bodyPr wrap="square" lIns="240000" tIns="140000" rIns="240000" bIns="140000" anchor="ctr"/>
+          <a:lstStyle/>
+          <a:p>
+            <a:r>
+              <a:rPr lang="en-US" sz="2000" dirty="0">
                 <a:solidFill>
                   <a:srgbClr val="94A3B8"/>
                 </a:solidFill>
-              </a:rPr>
-              <a:t>A Simple Console App </a:t>
-            </a:r>
-          </a:p>
-        </p:txBody>
-      </p:sp>
-      <p:sp>
-        <p:nvSpPr>
-          <p:cNvPr id="3" name="Text Placeholder 2">
+                <a:latin typeface="Consolas"/>
+              </a:rPr>
+              <a:t>User</a:t>
+            </a:r>
+            <a:r>
+              <a:rPr lang="en-US" dirty="0">
+                <a:solidFill>
+                  <a:srgbClr val="94A3B8"/>
+                </a:solidFill>
+                <a:latin typeface="Consolas"/>
+              </a:rPr>
+              <a:t> ✍️ </a:t>
+            </a:r>
+            <a:r>
+              <a:rPr lang="en-US" sz="2000" b="1" dirty="0">
+                <a:solidFill>
+                  <a:srgbClr val="22D3EE"/>
+                </a:solidFill>
+                <a:latin typeface="Consolas"/>
+              </a:rPr>
+              <a:t>"top 10 customers by revenue this year"</a:t>
+            </a:r>
+            <a:r>
+              <a:rPr lang="en-US" dirty="0">
+                <a:solidFill>
+                  <a:srgbClr val="94A3B8"/>
+                </a:solidFill>
+                <a:latin typeface="Consolas"/>
+              </a:rPr>
+              <a:t>   →   </a:t>
+            </a:r>
+            <a:r>
+              <a:rPr lang="en-US" sz="2000" b="1" dirty="0">
+                <a:solidFill>
+                  <a:srgbClr val="10B981"/>
+                </a:solidFill>
+                <a:latin typeface="Consolas"/>
+              </a:rPr>
+              <a:t>SELECT TOP 10 ...</a:t>
+            </a:r>
+          </a:p>
+        </p:txBody>
+      </p:sp>
+      <p:sp>
+        <p:nvSpPr>
+          <p:cNvPr id="5" name="Stage5">
             <a:extLst>
               <a:ext uri="{FF2B5EF4-FFF2-40B4-BE49-F238E27FC236}">
-                <a16:creationId xmlns:a16="http://schemas.microsoft.com/office/drawing/2014/main" id="{CE123229-FD34-7833-06A8-F4C0CCC872CD}"/>
+                <a16:creationId xmlns:a16="http://schemas.microsoft.com/office/drawing/2014/main" id="{169C684F-9C26-86A6-AC1E-ECE5050DAC37}"/>
               </a:ext>
             </a:extLst>
           </p:cNvPr>
-          <p:cNvSpPr>
-            <a:spLocks noGrp="1"/>
-          </p:cNvSpPr>
-          <p:nvPr>
-            <p:ph type="body" idx="1"/>
-          </p:nvPr>
+          <p:cNvSpPr/>
+          <p:nvPr/>
         </p:nvSpPr>
         <p:spPr>
           <a:xfrm>
-            <a:off x="831850" y="2050663"/>
-            <a:ext cx="5016500" cy="558799"/>
-          </a:xfrm>
+            <a:off x="10043297" y="3672191"/>
+            <a:ext cx="1651000" cy="920578"/>
+          </a:xfrm>
+          <a:prstGeom prst="roundRect">
+            <a:avLst>
+              <a:gd name="adj" fmla="val 10000"/>
+            </a:avLst>
+          </a:prstGeom>
+          <a:solidFill>
+            <a:srgbClr val="FFFFFF"/>
+          </a:solidFill>
+          <a:ln w="19050">
+            <a:solidFill>
+              <a:srgbClr val="22D3EE"/>
+            </a:solidFill>
+            <a:prstDash val="sysDash"/>
+          </a:ln>
+          <a:effectLst>
+            <a:outerShdw blurRad="50000" dist="15000" dir="5400000" algn="t" rotWithShape="0">
+              <a:srgbClr val="0F172A">
+                <a:alpha val="10000"/>
+              </a:srgbClr>
+            </a:outerShdw>
+          </a:effectLst>
         </p:spPr>
         <p:txBody>
-          <a:bodyPr>
-            <a:normAutofit fontScale="77500" lnSpcReduction="20000"/>
+          <a:bodyPr wrap="square" lIns="90000" tIns="90000" rIns="90000" bIns="90000" anchor="t"/>
+          <a:lstStyle/>
+          <a:p>
+            <a:r>
+              <a:rPr lang="en-US" sz="1400" b="1" spc="300" dirty="0">
+                <a:solidFill>
+                  <a:srgbClr val="FF0000"/>
+                </a:solidFill>
+              </a:rPr>
+              <a:t>07</a:t>
+            </a:r>
+            <a:br>
+              <a:rPr lang="en-US" sz="1400" b="1" spc="300" dirty="0">
+                <a:solidFill>
+                  <a:srgbClr val="F59E0B"/>
+                </a:solidFill>
+              </a:rPr>
+            </a:br>
+            <a:r>
+              <a:rPr lang="en-US" sz="2400" b="1" dirty="0">
+                <a:solidFill>
+                  <a:schemeClr val="accent5"/>
+                </a:solidFill>
+              </a:rPr>
+              <a:t>Error</a:t>
+            </a:r>
+            <a:endParaRPr lang="en-US" sz="2800" b="1" dirty="0">
+              <a:solidFill>
+                <a:schemeClr val="accent5"/>
+              </a:solidFill>
+            </a:endParaRPr>
+          </a:p>
+          <a:p>
+            <a:pPr algn="l">
+              <a:spcBef>
+                <a:spcPts val="300"/>
+              </a:spcBef>
+            </a:pPr>
+            <a:endParaRPr lang="en-US" sz="1400" dirty="0">
+              <a:solidFill>
+                <a:srgbClr val="64748B"/>
+              </a:solidFill>
+            </a:endParaRPr>
+          </a:p>
+        </p:txBody>
+      </p:sp>
+      <p:cxnSp>
+        <p:nvCxnSpPr>
+          <p:cNvPr id="14" name="Connector: Elbow 13">
+            <a:extLst>
+              <a:ext uri="{FF2B5EF4-FFF2-40B4-BE49-F238E27FC236}">
+                <a16:creationId xmlns:a16="http://schemas.microsoft.com/office/drawing/2014/main" id="{50E5E794-A4F8-C1F4-5248-9B689CAD8735}"/>
+              </a:ext>
+            </a:extLst>
+          </p:cNvPr>
+          <p:cNvCxnSpPr>
+            <a:cxnSpLocks/>
+            <a:stCxn id="5" idx="1"/>
+            <a:endCxn id="802" idx="2"/>
+          </p:cNvCxnSpPr>
+          <p:nvPr/>
+        </p:nvCxnSpPr>
+        <p:spPr>
+          <a:xfrm rot="10800000">
+            <a:off x="5143501" y="3323968"/>
+            <a:ext cx="4899797" cy="808512"/>
+          </a:xfrm>
+          <a:prstGeom prst="bentConnector2">
+            <a:avLst/>
+          </a:prstGeom>
+          <a:ln w="98425">
+            <a:solidFill>
+              <a:srgbClr val="CBD5E1"/>
+            </a:solidFill>
+            <a:tailEnd type="triangle"/>
+          </a:ln>
+        </p:spPr>
+        <p:style>
+          <a:lnRef idx="2">
+            <a:schemeClr val="accent1"/>
+          </a:lnRef>
+          <a:fillRef idx="0">
+            <a:schemeClr val="accent1"/>
+          </a:fillRef>
+          <a:effectRef idx="1">
+            <a:schemeClr val="accent1"/>
+          </a:effectRef>
+          <a:fontRef idx="minor">
+            <a:schemeClr val="tx1"/>
+          </a:fontRef>
+        </p:style>
+      </p:cxnSp>
+      <p:sp>
+        <p:nvSpPr>
+          <p:cNvPr id="18" name="Arr4">
+            <a:extLst>
+              <a:ext uri="{FF2B5EF4-FFF2-40B4-BE49-F238E27FC236}">
+                <a16:creationId xmlns:a16="http://schemas.microsoft.com/office/drawing/2014/main" id="{9286CF5E-7314-85A6-D4EF-063F9CE387DD}"/>
+              </a:ext>
+            </a:extLst>
+          </p:cNvPr>
+          <p:cNvSpPr/>
+          <p:nvPr/>
+        </p:nvSpPr>
+        <p:spPr>
+          <a:xfrm rot="5400000">
+            <a:off x="10710070" y="3359987"/>
+            <a:ext cx="321230" cy="278370"/>
+          </a:xfrm>
+          <a:prstGeom prst="rightArrow">
+            <a:avLst>
+              <a:gd name="adj1" fmla="val 50000"/>
+              <a:gd name="adj2" fmla="val 50000"/>
+            </a:avLst>
+          </a:prstGeom>
+          <a:solidFill>
+            <a:srgbClr val="CBD5E1"/>
+          </a:solidFill>
+          <a:ln>
+            <a:noFill/>
+          </a:ln>
+        </p:spPr>
+        <p:txBody>
+          <a:bodyPr/>
+          <a:lstStyle/>
+          <a:p>
+            <a:endParaRPr lang="en-US"/>
+          </a:p>
+        </p:txBody>
+      </p:sp>
+      <p:sp>
+        <p:nvSpPr>
+          <p:cNvPr id="10" name="TextBox 9">
+            <a:extLst>
+              <a:ext uri="{FF2B5EF4-FFF2-40B4-BE49-F238E27FC236}">
+                <a16:creationId xmlns:a16="http://schemas.microsoft.com/office/drawing/2014/main" id="{BB4B9F97-4E80-486C-FE7C-DC6DC5520893}"/>
+              </a:ext>
+            </a:extLst>
+          </p:cNvPr>
+          <p:cNvSpPr txBox="1"/>
+          <p:nvPr/>
+        </p:nvSpPr>
+        <p:spPr>
+          <a:xfrm>
+            <a:off x="10649644" y="2694396"/>
+            <a:ext cx="580808" cy="369332"/>
+          </a:xfrm>
+          <a:prstGeom prst="rect">
+            <a:avLst/>
+          </a:prstGeom>
+          <a:noFill/>
+        </p:spPr>
+        <p:txBody>
+          <a:bodyPr wrap="square">
+            <a:spAutoFit/>
           </a:bodyPr>
           <a:lstStyle/>
           <a:p>
-            <a:pPr algn="l">
-              <a:buNone/>
-            </a:pPr>
-            <a:r>
-              <a:rPr lang="en-US" sz="3200" b="1" spc="400" dirty="0">
-                <a:solidFill>
-                  <a:srgbClr val="22D3EE"/>
-                </a:solidFill>
-              </a:rPr>
-              <a:t>CHAT WITH YOUR DATA</a:t>
+            <a:r>
+              <a:rPr lang="en-US" b="0" i="0" dirty="0">
+                <a:solidFill>
+                  <a:srgbClr val="F3F4F6"/>
+                </a:solidFill>
+                <a:effectLst/>
+                <a:latin typeface="Apple Color Emoji"/>
+              </a:rPr>
+              <a:t>✅</a:t>
+            </a:r>
+            <a:endParaRPr lang="en-US" dirty="0"/>
+          </a:p>
+        </p:txBody>
+      </p:sp>
+      <p:sp>
+        <p:nvSpPr>
+          <p:cNvPr id="15" name="TextBox 14">
+            <a:extLst>
+              <a:ext uri="{FF2B5EF4-FFF2-40B4-BE49-F238E27FC236}">
+                <a16:creationId xmlns:a16="http://schemas.microsoft.com/office/drawing/2014/main" id="{1539840D-3579-C6D4-75CA-F1F3C5465DE1}"/>
+              </a:ext>
+            </a:extLst>
+          </p:cNvPr>
+          <p:cNvSpPr txBox="1"/>
+          <p:nvPr/>
+        </p:nvSpPr>
+        <p:spPr>
+          <a:xfrm>
+            <a:off x="10892548" y="4006502"/>
+            <a:ext cx="580808" cy="369332"/>
+          </a:xfrm>
+          <a:prstGeom prst="rect">
+            <a:avLst/>
+          </a:prstGeom>
+          <a:noFill/>
+        </p:spPr>
+        <p:txBody>
+          <a:bodyPr wrap="square">
+            <a:spAutoFit/>
+          </a:bodyPr>
+          <a:lstStyle/>
+          <a:p>
+            <a:r>
+              <a:rPr lang="en-US" dirty="0"/>
+              <a:t>❌</a:t>
             </a:r>
           </a:p>
         </p:txBody>
@@ -14835,7 +15292,7 @@
     </p:spTree>
     <p:extLst>
       <p:ext uri="{BB962C8B-B14F-4D97-AF65-F5344CB8AC3E}">
-        <p14:creationId xmlns:p14="http://schemas.microsoft.com/office/powerpoint/2010/main" val="3914748982"/>
+        <p14:creationId xmlns:p14="http://schemas.microsoft.com/office/powerpoint/2010/main" val="411072858"/>
       </p:ext>
     </p:extLst>
   </p:cSld>
@@ -14864,122 +15321,10 @@
       </p:grpSpPr>
       <p:sp>
         <p:nvSpPr>
-          <p:cNvPr id="20" name="Stage0">
-            <a:extLst>
-              <a:ext uri="{FF2B5EF4-FFF2-40B4-BE49-F238E27FC236}">
-                <a16:creationId xmlns:a16="http://schemas.microsoft.com/office/drawing/2014/main" id="{C88B0937-7522-BCEA-AD17-C53A61AD7815}"/>
-              </a:ext>
-            </a:extLst>
-          </p:cNvPr>
-          <p:cNvSpPr/>
-          <p:nvPr/>
-        </p:nvSpPr>
-        <p:spPr>
-          <a:xfrm>
-            <a:off x="9804400" y="3323967"/>
-            <a:ext cx="2106862" cy="1519881"/>
-          </a:xfrm>
-          <a:prstGeom prst="roundRect">
-            <a:avLst>
-              <a:gd name="adj" fmla="val 10000"/>
-            </a:avLst>
-          </a:prstGeom>
-          <a:solidFill>
-            <a:srgbClr val="FEF3C7"/>
-          </a:solidFill>
-          <a:ln>
-            <a:noFill/>
-          </a:ln>
-        </p:spPr>
-        <p:style>
-          <a:lnRef idx="0">
-            <a:scrgbClr r="0" g="0" b="0"/>
-          </a:lnRef>
-          <a:fillRef idx="0">
-            <a:scrgbClr r="0" g="0" b="0"/>
-          </a:fillRef>
-          <a:effectRef idx="0">
-            <a:scrgbClr r="0" g="0" b="0"/>
-          </a:effectRef>
-          <a:fontRef idx="minor">
-            <a:schemeClr val="lt1"/>
-          </a:fontRef>
-        </p:style>
-        <p:txBody>
-          <a:bodyPr wrap="square" lIns="90000" tIns="90000" rIns="90000" bIns="90000" anchor="t"/>
-          <a:lstStyle/>
-          <a:p>
-            <a:pPr algn="l"/>
-            <a:endParaRPr lang="en-US" sz="1100" dirty="0">
-              <a:solidFill>
-                <a:srgbClr val="64748B"/>
-              </a:solidFill>
-            </a:endParaRPr>
-          </a:p>
-        </p:txBody>
-      </p:sp>
-      <p:sp>
-        <p:nvSpPr>
-          <p:cNvPr id="3" name="Stage0">
-            <a:extLst>
-              <a:ext uri="{FF2B5EF4-FFF2-40B4-BE49-F238E27FC236}">
-                <a16:creationId xmlns:a16="http://schemas.microsoft.com/office/drawing/2014/main" id="{8861DE56-5964-C0B4-16CE-5227DA7D9A2C}"/>
-              </a:ext>
-            </a:extLst>
-          </p:cNvPr>
-          <p:cNvSpPr/>
-          <p:nvPr/>
-        </p:nvSpPr>
-        <p:spPr>
-          <a:xfrm>
-            <a:off x="279399" y="1779372"/>
-            <a:ext cx="11631863" cy="1791731"/>
-          </a:xfrm>
-          <a:prstGeom prst="roundRect">
-            <a:avLst>
-              <a:gd name="adj" fmla="val 10000"/>
-            </a:avLst>
-          </a:prstGeom>
-          <a:solidFill>
-            <a:srgbClr val="FEF3C7"/>
-          </a:solidFill>
-          <a:ln>
-            <a:noFill/>
-          </a:ln>
-        </p:spPr>
-        <p:style>
-          <a:lnRef idx="0">
-            <a:scrgbClr r="0" g="0" b="0"/>
-          </a:lnRef>
-          <a:fillRef idx="0">
-            <a:scrgbClr r="0" g="0" b="0"/>
-          </a:fillRef>
-          <a:effectRef idx="0">
-            <a:scrgbClr r="0" g="0" b="0"/>
-          </a:effectRef>
-          <a:fontRef idx="minor">
-            <a:schemeClr val="lt1"/>
-          </a:fontRef>
-        </p:style>
-        <p:txBody>
-          <a:bodyPr wrap="square" lIns="90000" tIns="90000" rIns="90000" bIns="90000" anchor="t"/>
-          <a:lstStyle/>
-          <a:p>
-            <a:pPr algn="l"/>
-            <a:endParaRPr lang="en-US" sz="1100" dirty="0">
-              <a:solidFill>
-                <a:srgbClr val="64748B"/>
-              </a:solidFill>
-            </a:endParaRPr>
-          </a:p>
-        </p:txBody>
-      </p:sp>
-      <p:sp>
-        <p:nvSpPr>
           <p:cNvPr id="2" name="Title 1">
             <a:extLst>
               <a:ext uri="{FF2B5EF4-FFF2-40B4-BE49-F238E27FC236}">
-                <a16:creationId xmlns:a16="http://schemas.microsoft.com/office/drawing/2014/main" id="{586D80D3-1267-47C8-5022-51711533C2A1}"/>
+                <a16:creationId xmlns:a16="http://schemas.microsoft.com/office/drawing/2014/main" id="{8D87719D-6174-6E05-E935-B77F706A866C}"/>
               </a:ext>
             </a:extLst>
           </p:cNvPr>
@@ -14990,7 +15335,12 @@
             <p:ph type="title"/>
           </p:nvPr>
         </p:nvSpPr>
-        <p:spPr/>
+        <p:spPr>
+          <a:xfrm>
+            <a:off x="635000" y="141287"/>
+            <a:ext cx="10515600" cy="1325563"/>
+          </a:xfrm>
+        </p:spPr>
         <p:txBody>
           <a:bodyPr>
             <a:normAutofit/>
@@ -15004,60 +15354,48 @@
                   <a:srgbClr val="0F172A"/>
                 </a:solidFill>
               </a:rPr>
-              <a:t>The Pipeline</a:t>
-            </a:r>
-            <a:endParaRPr lang="en-US" sz="4800" b="1" dirty="0">
-              <a:solidFill>
-                <a:srgbClr val="94A3B8"/>
-              </a:solidFill>
-            </a:endParaRPr>
-          </a:p>
-        </p:txBody>
-      </p:sp>
-      <p:sp>
-        <p:nvSpPr>
-          <p:cNvPr id="800" name="Stage0"/>
+              <a:t>Schema + Prompt Design</a:t>
+            </a:r>
+          </a:p>
+        </p:txBody>
+      </p:sp>
+      <p:sp>
+        <p:nvSpPr>
+          <p:cNvPr id="400" name="LeftCard"/>
           <p:cNvSpPr/>
           <p:nvPr/>
         </p:nvSpPr>
         <p:spPr>
           <a:xfrm>
-            <a:off x="508000" y="2033372"/>
-            <a:ext cx="1651000" cy="1290596"/>
+            <a:off x="635000" y="1466850"/>
+            <a:ext cx="5334000" cy="4438650"/>
           </a:xfrm>
           <a:prstGeom prst="roundRect">
             <a:avLst>
-              <a:gd name="adj" fmla="val 10000"/>
+              <a:gd name="adj" fmla="val 6000"/>
             </a:avLst>
           </a:prstGeom>
           <a:solidFill>
             <a:srgbClr val="FFFFFF"/>
           </a:solidFill>
-          <a:ln w="19050">
+          <a:ln w="12700">
             <a:solidFill>
-              <a:srgbClr val="0891B2"/>
+              <a:srgbClr val="E2E8F0"/>
             </a:solidFill>
           </a:ln>
-          <a:effectLst>
-            <a:outerShdw blurRad="50000" dist="15000" dir="5400000" algn="t" rotWithShape="0">
-              <a:srgbClr val="0F172A">
-                <a:alpha val="10000"/>
-              </a:srgbClr>
-            </a:outerShdw>
-          </a:effectLst>
         </p:spPr>
         <p:txBody>
-          <a:bodyPr wrap="square" lIns="90000" tIns="90000" rIns="90000" bIns="90000" anchor="t"/>
+          <a:bodyPr wrap="square" lIns="240000" tIns="200000" rIns="240000" bIns="200000" anchor="t"/>
           <a:lstStyle/>
           <a:p>
             <a:pPr algn="l"/>
             <a:r>
-              <a:rPr lang="en-US" sz="1200" b="1" spc="300" dirty="0">
+              <a:rPr lang="en-US" b="1" spc="300" dirty="0">
                 <a:solidFill>
                   <a:srgbClr val="0891B2"/>
                 </a:solidFill>
               </a:rPr>
-              <a:t>01</a:t>
+              <a:t>STEP 1  ·  SCHEMA</a:t>
             </a:r>
           </a:p>
           <a:p>
@@ -15067,596 +15405,159 @@
               </a:spcBef>
             </a:pPr>
             <a:r>
-              <a:rPr lang="en-US" sz="2400" b="1" dirty="0">
+              <a:rPr lang="en-US" sz="2800" b="1" dirty="0">
                 <a:solidFill>
                   <a:srgbClr val="0F172A"/>
                 </a:solidFill>
               </a:rPr>
-              <a:t>User</a:t>
-            </a:r>
-          </a:p>
-          <a:p>
-            <a:pPr algn="l">
+              <a:t>Teach the LLM your data</a:t>
+            </a:r>
+          </a:p>
+          <a:p>
+            <a:pPr marL="228600" indent="-228600">
               <a:spcBef>
-                <a:spcPts val="300"/>
+                <a:spcPts val="800"/>
               </a:spcBef>
+              <a:buFont typeface="Arial"/>
+              <a:buChar char="•"/>
             </a:pPr>
             <a:r>
-              <a:rPr lang="en-US" sz="1200" dirty="0">
-                <a:solidFill>
-                  <a:srgbClr val="64748B"/>
-                </a:solidFill>
-              </a:rPr>
-              <a:t>natural language</a:t>
-            </a:r>
-          </a:p>
-        </p:txBody>
-      </p:sp>
-      <p:sp>
-        <p:nvSpPr>
-          <p:cNvPr id="850" name="Arr0"/>
-          <p:cNvSpPr/>
-          <p:nvPr/>
-        </p:nvSpPr>
-        <p:spPr>
-          <a:xfrm>
-            <a:off x="2184400" y="2668372"/>
-            <a:ext cx="203200" cy="254000"/>
-          </a:xfrm>
-          <a:prstGeom prst="rightArrow">
-            <a:avLst>
-              <a:gd name="adj1" fmla="val 50000"/>
-              <a:gd name="adj2" fmla="val 50000"/>
-            </a:avLst>
-          </a:prstGeom>
-          <a:solidFill>
-            <a:srgbClr val="CBD5E1"/>
-          </a:solidFill>
-          <a:ln>
-            <a:noFill/>
-          </a:ln>
-        </p:spPr>
-        <p:txBody>
-          <a:bodyPr/>
-          <a:lstStyle/>
-          <a:p>
-            <a:endParaRPr lang="en-US"/>
-          </a:p>
-        </p:txBody>
-      </p:sp>
-      <p:sp>
-        <p:nvSpPr>
-          <p:cNvPr id="801" name="Stage1"/>
-          <p:cNvSpPr/>
-          <p:nvPr/>
-        </p:nvSpPr>
-        <p:spPr>
-          <a:xfrm>
-            <a:off x="2413000" y="2033372"/>
-            <a:ext cx="1651000" cy="1290596"/>
-          </a:xfrm>
-          <a:prstGeom prst="roundRect">
-            <a:avLst>
-              <a:gd name="adj" fmla="val 10000"/>
-            </a:avLst>
-          </a:prstGeom>
-          <a:solidFill>
-            <a:srgbClr val="FFFFFF"/>
-          </a:solidFill>
-          <a:ln w="19050">
-            <a:solidFill>
-              <a:srgbClr val="0891B2"/>
-            </a:solidFill>
-          </a:ln>
-          <a:effectLst>
-            <a:outerShdw blurRad="50000" dist="15000" dir="5400000" algn="t" rotWithShape="0">
-              <a:srgbClr val="0F172A">
-                <a:alpha val="10000"/>
-              </a:srgbClr>
-            </a:outerShdw>
-          </a:effectLst>
-        </p:spPr>
-        <p:txBody>
-          <a:bodyPr wrap="square" lIns="90000" tIns="90000" rIns="90000" bIns="90000" anchor="t"/>
-          <a:lstStyle/>
-          <a:p>
-            <a:pPr algn="l"/>
-            <a:r>
-              <a:rPr lang="en-US" sz="1200" b="1" spc="300" dirty="0">
-                <a:solidFill>
-                  <a:schemeClr val="accent6">
-                    <a:lumMod val="90000"/>
-                    <a:lumOff val="10000"/>
-                  </a:schemeClr>
-                </a:solidFill>
-              </a:rPr>
-              <a:t>02</a:t>
-            </a:r>
-          </a:p>
-          <a:p>
-            <a:pPr algn="l">
+              <a:rPr lang="en-US" sz="2400" dirty="0">
+                <a:solidFill>
+                  <a:srgbClr val="334155"/>
+                </a:solidFill>
+              </a:rPr>
+              <a:t>Tables &amp; columns</a:t>
+            </a:r>
+          </a:p>
+          <a:p>
+            <a:pPr marL="228600" indent="-228600">
               <a:spcBef>
                 <a:spcPts val="400"/>
               </a:spcBef>
+              <a:buFont typeface="Arial"/>
+              <a:buChar char="•"/>
             </a:pPr>
             <a:r>
-              <a:rPr lang="en-US" sz="2400" b="1" dirty="0"/>
-              <a:t>Prompt</a:t>
-            </a:r>
-          </a:p>
-          <a:p>
-            <a:pPr algn="l">
-              <a:spcBef>
-                <a:spcPts val="300"/>
-              </a:spcBef>
-            </a:pPr>
-            <a:r>
-              <a:rPr lang="en-US" sz="1200" dirty="0">
-                <a:solidFill>
-                  <a:srgbClr val="64748B"/>
-                </a:solidFill>
-              </a:rPr>
-              <a:t>schema + rules</a:t>
-            </a:r>
-          </a:p>
-        </p:txBody>
-      </p:sp>
-      <p:sp>
-        <p:nvSpPr>
-          <p:cNvPr id="851" name="Arr1"/>
-          <p:cNvSpPr/>
-          <p:nvPr/>
-        </p:nvSpPr>
-        <p:spPr>
-          <a:xfrm>
-            <a:off x="4089400" y="2668372"/>
-            <a:ext cx="203200" cy="254000"/>
-          </a:xfrm>
-          <a:prstGeom prst="rightArrow">
-            <a:avLst>
-              <a:gd name="adj1" fmla="val 50000"/>
-              <a:gd name="adj2" fmla="val 50000"/>
-            </a:avLst>
-          </a:prstGeom>
-          <a:solidFill>
-            <a:srgbClr val="CBD5E1"/>
-          </a:solidFill>
-          <a:ln>
-            <a:noFill/>
-          </a:ln>
-        </p:spPr>
-        <p:txBody>
-          <a:bodyPr/>
-          <a:lstStyle/>
-          <a:p>
-            <a:endParaRPr lang="en-US"/>
-          </a:p>
-        </p:txBody>
-      </p:sp>
-      <p:sp>
-        <p:nvSpPr>
-          <p:cNvPr id="802" name="Stage2"/>
-          <p:cNvSpPr/>
-          <p:nvPr/>
-        </p:nvSpPr>
-        <p:spPr>
-          <a:xfrm>
-            <a:off x="4318000" y="2033372"/>
-            <a:ext cx="1651000" cy="1290596"/>
-          </a:xfrm>
-          <a:prstGeom prst="roundRect">
-            <a:avLst>
-              <a:gd name="adj" fmla="val 10000"/>
-            </a:avLst>
-          </a:prstGeom>
-          <a:solidFill>
-            <a:srgbClr val="FFFFFF"/>
-          </a:solidFill>
-          <a:ln w="19050">
-            <a:solidFill>
-              <a:srgbClr val="22D3EE"/>
-            </a:solidFill>
-          </a:ln>
-          <a:effectLst>
-            <a:outerShdw blurRad="50000" dist="15000" dir="5400000" algn="t" rotWithShape="0">
-              <a:srgbClr val="0F172A">
-                <a:alpha val="10000"/>
-              </a:srgbClr>
-            </a:outerShdw>
-          </a:effectLst>
-        </p:spPr>
-        <p:txBody>
-          <a:bodyPr wrap="square" lIns="90000" tIns="90000" rIns="90000" bIns="90000" anchor="t"/>
-          <a:lstStyle/>
-          <a:p>
-            <a:pPr algn="l"/>
-            <a:r>
-              <a:rPr lang="en-US" sz="1200" b="1" spc="300" dirty="0">
-                <a:solidFill>
-                  <a:srgbClr val="22D3EE"/>
-                </a:solidFill>
-              </a:rPr>
-              <a:t>03</a:t>
-            </a:r>
-          </a:p>
-          <a:p>
-            <a:pPr algn="l">
+              <a:rPr lang="en-US" sz="2400" dirty="0">
+                <a:solidFill>
+                  <a:srgbClr val="334155"/>
+                </a:solidFill>
+              </a:rPr>
+              <a:t>Relationships &amp; keys</a:t>
+            </a:r>
+          </a:p>
+          <a:p>
+            <a:pPr marL="228600" indent="-228600">
               <a:spcBef>
                 <a:spcPts val="400"/>
               </a:spcBef>
+              <a:buFont typeface="Arial"/>
+              <a:buChar char="•"/>
             </a:pPr>
             <a:r>
-              <a:rPr lang="en-US" sz="2400" b="1" dirty="0">
-                <a:solidFill>
-                  <a:srgbClr val="0F172A"/>
-                </a:solidFill>
-              </a:rPr>
-              <a:t>LLM</a:t>
-            </a:r>
-          </a:p>
-          <a:p>
-            <a:pPr algn="l">
-              <a:spcBef>
-                <a:spcPts val="300"/>
-              </a:spcBef>
-            </a:pPr>
-            <a:r>
-              <a:rPr lang="en-US" sz="1200" dirty="0">
-                <a:solidFill>
-                  <a:srgbClr val="64748B"/>
-                </a:solidFill>
-              </a:rPr>
-              <a:t>reasoning</a:t>
-            </a:r>
-          </a:p>
-        </p:txBody>
-      </p:sp>
-      <p:sp>
-        <p:nvSpPr>
-          <p:cNvPr id="852" name="Arr2"/>
-          <p:cNvSpPr/>
-          <p:nvPr/>
-        </p:nvSpPr>
-        <p:spPr>
-          <a:xfrm>
-            <a:off x="5994400" y="2668372"/>
-            <a:ext cx="203200" cy="254000"/>
-          </a:xfrm>
-          <a:prstGeom prst="rightArrow">
-            <a:avLst>
-              <a:gd name="adj1" fmla="val 50000"/>
-              <a:gd name="adj2" fmla="val 50000"/>
-            </a:avLst>
-          </a:prstGeom>
-          <a:solidFill>
-            <a:srgbClr val="CBD5E1"/>
-          </a:solidFill>
-          <a:ln>
-            <a:noFill/>
-          </a:ln>
-        </p:spPr>
-        <p:txBody>
-          <a:bodyPr/>
-          <a:lstStyle/>
-          <a:p>
-            <a:endParaRPr lang="en-US"/>
-          </a:p>
-        </p:txBody>
-      </p:sp>
-      <p:sp>
-        <p:nvSpPr>
-          <p:cNvPr id="803" name="Stage3"/>
-          <p:cNvSpPr/>
-          <p:nvPr/>
-        </p:nvSpPr>
-        <p:spPr>
-          <a:xfrm>
-            <a:off x="6223000" y="2033372"/>
-            <a:ext cx="1651000" cy="1290596"/>
-          </a:xfrm>
-          <a:prstGeom prst="roundRect">
-            <a:avLst>
-              <a:gd name="adj" fmla="val 10000"/>
-            </a:avLst>
-          </a:prstGeom>
-          <a:solidFill>
-            <a:srgbClr val="FFFFFF"/>
-          </a:solidFill>
-          <a:ln w="19050">
-            <a:solidFill>
-              <a:srgbClr val="10B981"/>
-            </a:solidFill>
-          </a:ln>
-          <a:effectLst>
-            <a:outerShdw blurRad="50000" dist="15000" dir="5400000" algn="t" rotWithShape="0">
-              <a:srgbClr val="0F172A">
-                <a:alpha val="10000"/>
-              </a:srgbClr>
-            </a:outerShdw>
-          </a:effectLst>
-        </p:spPr>
-        <p:txBody>
-          <a:bodyPr wrap="square" lIns="90000" tIns="90000" rIns="90000" bIns="90000" anchor="t"/>
-          <a:lstStyle/>
-          <a:p>
-            <a:pPr algn="l"/>
-            <a:r>
-              <a:rPr lang="en-US" sz="1200" b="1" spc="300" dirty="0">
-                <a:solidFill>
-                  <a:srgbClr val="10B981"/>
-                </a:solidFill>
-              </a:rPr>
-              <a:t>04</a:t>
-            </a:r>
-          </a:p>
-          <a:p>
-            <a:pPr algn="l">
+              <a:rPr lang="en-US" sz="2400" dirty="0">
+                <a:solidFill>
+                  <a:srgbClr val="334155"/>
+                </a:solidFill>
+              </a:rPr>
+              <a:t>Data types</a:t>
+            </a:r>
+          </a:p>
+          <a:p>
+            <a:pPr marL="228600" indent="-228600">
               <a:spcBef>
                 <a:spcPts val="400"/>
               </a:spcBef>
+              <a:buFont typeface="Arial"/>
+              <a:buChar char="•"/>
             </a:pPr>
             <a:r>
-              <a:rPr lang="en-US" sz="2400" b="1" dirty="0">
-                <a:solidFill>
-                  <a:srgbClr val="0F172A"/>
-                </a:solidFill>
-              </a:rPr>
-              <a:t>SQL</a:t>
-            </a:r>
-          </a:p>
-          <a:p>
-            <a:pPr algn="l">
-              <a:spcBef>
-                <a:spcPts val="300"/>
-              </a:spcBef>
-            </a:pPr>
-            <a:r>
-              <a:rPr lang="en-US" sz="1200" dirty="0">
-                <a:solidFill>
-                  <a:srgbClr val="64748B"/>
-                </a:solidFill>
-              </a:rPr>
-              <a:t>generated query</a:t>
-            </a:r>
-          </a:p>
-        </p:txBody>
-      </p:sp>
-      <p:sp>
-        <p:nvSpPr>
-          <p:cNvPr id="853" name="Arr3"/>
-          <p:cNvSpPr/>
-          <p:nvPr/>
-        </p:nvSpPr>
-        <p:spPr>
-          <a:xfrm>
-            <a:off x="7899400" y="2668372"/>
-            <a:ext cx="203200" cy="254000"/>
-          </a:xfrm>
-          <a:prstGeom prst="rightArrow">
-            <a:avLst>
-              <a:gd name="adj1" fmla="val 50000"/>
-              <a:gd name="adj2" fmla="val 50000"/>
-            </a:avLst>
-          </a:prstGeom>
-          <a:solidFill>
-            <a:srgbClr val="CBD5E1"/>
-          </a:solidFill>
-          <a:ln>
-            <a:noFill/>
-          </a:ln>
-        </p:spPr>
-        <p:txBody>
-          <a:bodyPr/>
-          <a:lstStyle/>
-          <a:p>
-            <a:endParaRPr lang="en-US"/>
-          </a:p>
-        </p:txBody>
-      </p:sp>
-      <p:sp>
-        <p:nvSpPr>
-          <p:cNvPr id="804" name="Stage4"/>
-          <p:cNvSpPr/>
-          <p:nvPr/>
-        </p:nvSpPr>
-        <p:spPr>
-          <a:xfrm>
-            <a:off x="8128000" y="2033372"/>
-            <a:ext cx="1651000" cy="1290596"/>
-          </a:xfrm>
-          <a:prstGeom prst="roundRect">
-            <a:avLst>
-              <a:gd name="adj" fmla="val 10000"/>
-            </a:avLst>
-          </a:prstGeom>
-          <a:solidFill>
-            <a:srgbClr val="FFFFFF"/>
-          </a:solidFill>
-          <a:ln w="19050">
-            <a:solidFill>
-              <a:schemeClr val="accent3">
-                <a:lumMod val="75000"/>
-              </a:schemeClr>
-            </a:solidFill>
-          </a:ln>
-          <a:effectLst>
-            <a:outerShdw blurRad="50000" dist="15000" dir="5400000" algn="t" rotWithShape="0">
-              <a:srgbClr val="0F172A">
-                <a:alpha val="10000"/>
-              </a:srgbClr>
-            </a:outerShdw>
-          </a:effectLst>
-        </p:spPr>
-        <p:txBody>
-          <a:bodyPr wrap="square" lIns="90000" tIns="90000" rIns="90000" bIns="90000" anchor="t"/>
-          <a:lstStyle/>
-          <a:p>
-            <a:pPr algn="l"/>
-            <a:r>
-              <a:rPr lang="en-US" sz="1200" b="1" spc="300" dirty="0">
-                <a:solidFill>
-                  <a:srgbClr val="7B4F05"/>
-                </a:solidFill>
-              </a:rPr>
-              <a:t>05</a:t>
-            </a:r>
-          </a:p>
-          <a:p>
-            <a:pPr algn="l">
+              <a:rPr lang="en-US" sz="2400" dirty="0">
+                <a:solidFill>
+                  <a:srgbClr val="334155"/>
+                </a:solidFill>
+              </a:rPr>
+              <a:t>Enum Values</a:t>
+            </a:r>
+          </a:p>
+          <a:p>
+            <a:pPr marL="228600" indent="-228600">
               <a:spcBef>
                 <a:spcPts val="400"/>
               </a:spcBef>
+              <a:buFont typeface="Arial"/>
+              <a:buChar char="•"/>
             </a:pPr>
             <a:r>
-              <a:rPr lang="en-US" sz="2400" b="1" dirty="0">
-                <a:solidFill>
-                  <a:srgbClr val="0F172A"/>
-                </a:solidFill>
-              </a:rPr>
-              <a:t>Validator</a:t>
-            </a:r>
-          </a:p>
-          <a:p>
-            <a:pPr algn="l">
-              <a:spcBef>
-                <a:spcPts val="300"/>
-              </a:spcBef>
-            </a:pPr>
-            <a:r>
-              <a:rPr lang="en-US" sz="1200" dirty="0">
-                <a:solidFill>
-                  <a:srgbClr val="64748B"/>
-                </a:solidFill>
-              </a:rPr>
-              <a:t>safety gate</a:t>
-            </a:r>
-          </a:p>
-        </p:txBody>
-      </p:sp>
-      <p:sp>
-        <p:nvSpPr>
-          <p:cNvPr id="854" name="Arr4"/>
-          <p:cNvSpPr/>
-          <p:nvPr/>
-        </p:nvSpPr>
-        <p:spPr>
-          <a:xfrm>
-            <a:off x="9804400" y="2668372"/>
-            <a:ext cx="203200" cy="254000"/>
-          </a:xfrm>
-          <a:prstGeom prst="rightArrow">
-            <a:avLst>
-              <a:gd name="adj1" fmla="val 50000"/>
-              <a:gd name="adj2" fmla="val 50000"/>
-            </a:avLst>
-          </a:prstGeom>
-          <a:solidFill>
-            <a:srgbClr val="CBD5E1"/>
-          </a:solidFill>
-          <a:ln>
-            <a:noFill/>
-          </a:ln>
-        </p:spPr>
-        <p:txBody>
-          <a:bodyPr/>
-          <a:lstStyle/>
-          <a:p>
-            <a:endParaRPr lang="en-US"/>
-          </a:p>
-        </p:txBody>
-      </p:sp>
-      <p:sp>
-        <p:nvSpPr>
-          <p:cNvPr id="805" name="Stage5"/>
-          <p:cNvSpPr/>
-          <p:nvPr/>
-        </p:nvSpPr>
-        <p:spPr>
-          <a:xfrm>
-            <a:off x="10033000" y="2033372"/>
-            <a:ext cx="1651000" cy="1290596"/>
-          </a:xfrm>
-          <a:prstGeom prst="roundRect">
-            <a:avLst>
-              <a:gd name="adj" fmla="val 10000"/>
-            </a:avLst>
-          </a:prstGeom>
-          <a:solidFill>
-            <a:srgbClr val="FFFFFF"/>
-          </a:solidFill>
-          <a:ln w="19050">
-            <a:solidFill>
-              <a:srgbClr val="F59E0B"/>
-            </a:solidFill>
-          </a:ln>
-          <a:effectLst>
-            <a:outerShdw blurRad="50000" dist="15000" dir="5400000" algn="t" rotWithShape="0">
-              <a:srgbClr val="0F172A">
-                <a:alpha val="10000"/>
-              </a:srgbClr>
-            </a:outerShdw>
-          </a:effectLst>
-        </p:spPr>
-        <p:txBody>
-          <a:bodyPr wrap="square" lIns="90000" tIns="90000" rIns="90000" bIns="90000" anchor="t"/>
-          <a:lstStyle/>
-          <a:p>
-            <a:pPr algn="l"/>
-            <a:r>
-              <a:rPr lang="en-US" sz="1200" b="1" spc="300" dirty="0">
-                <a:solidFill>
-                  <a:srgbClr val="F59E0B"/>
-                </a:solidFill>
-              </a:rPr>
-              <a:t>06</a:t>
-            </a:r>
-          </a:p>
-          <a:p>
-            <a:pPr algn="l">
+              <a:rPr lang="en-US" sz="2400" dirty="0">
+                <a:solidFill>
+                  <a:srgbClr val="334155"/>
+                </a:solidFill>
+              </a:rPr>
+              <a:t>Optional: sample values</a:t>
+            </a:r>
+          </a:p>
+          <a:p>
+            <a:pPr marL="228600" indent="-228600">
               <a:spcBef>
                 <a:spcPts val="400"/>
               </a:spcBef>
+              <a:buFont typeface="Arial"/>
+              <a:buChar char="•"/>
             </a:pPr>
             <a:r>
-              <a:rPr lang="en-US" sz="2400" b="1" dirty="0">
-                <a:solidFill>
-                  <a:srgbClr val="0F172A"/>
-                </a:solidFill>
-              </a:rPr>
-              <a:t>Execute</a:t>
-            </a:r>
-          </a:p>
-          <a:p>
-            <a:pPr algn="l">
+              <a:rPr lang="en-US" sz="2400" dirty="0">
+                <a:solidFill>
+                  <a:srgbClr val="334155"/>
+                </a:solidFill>
+              </a:rPr>
+              <a:t>Optional: extra DDL info</a:t>
+            </a:r>
+            <a:br>
+              <a:rPr lang="en-US" sz="2400" dirty="0">
+                <a:solidFill>
+                  <a:srgbClr val="334155"/>
+                </a:solidFill>
+              </a:rPr>
+            </a:br>
+            <a:endParaRPr lang="en-US" sz="2400" dirty="0">
+              <a:solidFill>
+                <a:srgbClr val="334155"/>
+              </a:solidFill>
+            </a:endParaRPr>
+          </a:p>
+          <a:p>
+            <a:pPr>
               <a:spcBef>
-                <a:spcPts val="300"/>
+                <a:spcPts val="800"/>
               </a:spcBef>
             </a:pPr>
             <a:r>
-              <a:rPr lang="en-US" sz="1200" dirty="0">
+              <a:rPr lang="en-US" i="1" dirty="0">
                 <a:solidFill>
                   <a:srgbClr val="64748B"/>
                 </a:solidFill>
               </a:rPr>
-              <a:t>results </a:t>
-            </a:r>
-          </a:p>
-        </p:txBody>
-      </p:sp>
-      <p:sp>
-        <p:nvSpPr>
-          <p:cNvPr id="880" name="Ex"/>
+              <a:t>Without schema, the LLM is guessing!</a:t>
+            </a:r>
+          </a:p>
+        </p:txBody>
+      </p:sp>
+      <p:sp>
+        <p:nvSpPr>
+          <p:cNvPr id="401" name="RightCard"/>
           <p:cNvSpPr/>
           <p:nvPr/>
         </p:nvSpPr>
         <p:spPr>
           <a:xfrm>
-            <a:off x="507330" y="4999681"/>
-            <a:ext cx="11176000" cy="1016000"/>
+            <a:off x="6223000" y="1466850"/>
+            <a:ext cx="5334000" cy="4438650"/>
           </a:xfrm>
           <a:prstGeom prst="roundRect">
             <a:avLst>
-              <a:gd name="adj" fmla="val 8000"/>
+              <a:gd name="adj" fmla="val 6000"/>
             </a:avLst>
           </a:prstGeom>
           <a:solidFill>
@@ -15667,292 +15568,144 @@
           </a:ln>
         </p:spPr>
         <p:txBody>
-          <a:bodyPr wrap="square" lIns="240000" tIns="140000" rIns="240000" bIns="140000" anchor="ctr"/>
+          <a:bodyPr wrap="square" lIns="240000" tIns="200000" rIns="240000" bIns="200000" anchor="t"/>
           <a:lstStyle/>
           <a:p>
             <a:pPr algn="l"/>
             <a:r>
+              <a:rPr lang="en-US" b="1" spc="300" dirty="0">
+                <a:solidFill>
+                  <a:srgbClr val="22D3EE"/>
+                </a:solidFill>
+              </a:rPr>
+              <a:t>STEP 2  ·  PROMPT</a:t>
+            </a:r>
+          </a:p>
+          <a:p>
+            <a:pPr algn="l">
+              <a:spcBef>
+                <a:spcPts val="400"/>
+              </a:spcBef>
+            </a:pPr>
+            <a:r>
+              <a:rPr lang="en-US" sz="2800" b="1" dirty="0">
+                <a:solidFill>
+                  <a:srgbClr val="FFFFFF"/>
+                </a:solidFill>
+              </a:rPr>
+              <a:t>Write the rules</a:t>
+            </a:r>
+          </a:p>
+          <a:p>
+            <a:pPr>
+              <a:spcBef>
+                <a:spcPts val="800"/>
+              </a:spcBef>
+            </a:pPr>
+            <a:r>
               <a:rPr lang="en-US" dirty="0">
                 <a:solidFill>
-                  <a:srgbClr val="94A3B8"/>
+                  <a:srgbClr val="64748B"/>
                 </a:solidFill>
                 <a:latin typeface="Consolas"/>
               </a:rPr>
-              <a:t>user:  </a:t>
-            </a:r>
-            <a:r>
-              <a:rPr lang="en-US" sz="2000" b="1" dirty="0">
-                <a:solidFill>
-                  <a:srgbClr val="22D3EE"/>
-                </a:solidFill>
-                <a:latin typeface="Consolas"/>
-              </a:rPr>
-              <a:t>"top 10 customers by revenue this year"</a:t>
-            </a:r>
-            <a:r>
-              <a:rPr lang="en-US" dirty="0">
-                <a:solidFill>
-                  <a:srgbClr val="94A3B8"/>
-                </a:solidFill>
-                <a:latin typeface="Consolas"/>
-              </a:rPr>
-              <a:t>   →   </a:t>
-            </a:r>
-            <a:r>
-              <a:rPr lang="en-US" sz="2000" b="1" dirty="0">
-                <a:solidFill>
-                  <a:srgbClr val="10B981"/>
-                </a:solidFill>
-                <a:latin typeface="Consolas"/>
-              </a:rPr>
-              <a:t>SELECT TOP 10 ...</a:t>
-            </a:r>
-          </a:p>
-        </p:txBody>
-      </p:sp>
-      <p:sp>
-        <p:nvSpPr>
-          <p:cNvPr id="5" name="Stage5">
-            <a:extLst>
-              <a:ext uri="{FF2B5EF4-FFF2-40B4-BE49-F238E27FC236}">
-                <a16:creationId xmlns:a16="http://schemas.microsoft.com/office/drawing/2014/main" id="{169C684F-9C26-86A6-AC1E-ECE5050DAC37}"/>
-              </a:ext>
-            </a:extLst>
-          </p:cNvPr>
-          <p:cNvSpPr/>
-          <p:nvPr/>
-        </p:nvSpPr>
-        <p:spPr>
-          <a:xfrm>
-            <a:off x="10043297" y="3672191"/>
-            <a:ext cx="1651000" cy="920578"/>
-          </a:xfrm>
-          <a:prstGeom prst="roundRect">
-            <a:avLst>
-              <a:gd name="adj" fmla="val 10000"/>
-            </a:avLst>
-          </a:prstGeom>
-          <a:solidFill>
-            <a:srgbClr val="FFFFFF"/>
-          </a:solidFill>
-          <a:ln w="19050">
-            <a:solidFill>
-              <a:srgbClr val="22D3EE"/>
-            </a:solidFill>
-            <a:prstDash val="sysDash"/>
-          </a:ln>
-          <a:effectLst>
-            <a:outerShdw blurRad="50000" dist="15000" dir="5400000" algn="t" rotWithShape="0">
-              <a:srgbClr val="0F172A">
-                <a:alpha val="10000"/>
-              </a:srgbClr>
-            </a:outerShdw>
-          </a:effectLst>
-        </p:spPr>
-        <p:txBody>
-          <a:bodyPr wrap="square" lIns="90000" tIns="90000" rIns="90000" bIns="90000" anchor="t"/>
-          <a:lstStyle/>
-          <a:p>
-            <a:r>
-              <a:rPr lang="en-US" sz="1400" b="1" spc="300" dirty="0">
-                <a:solidFill>
-                  <a:srgbClr val="FF0000"/>
-                </a:solidFill>
-              </a:rPr>
-              <a:t>07</a:t>
-            </a:r>
-            <a:br>
-              <a:rPr lang="en-US" sz="1400" b="1" spc="300" dirty="0">
-                <a:solidFill>
-                  <a:srgbClr val="F59E0B"/>
-                </a:solidFill>
-              </a:rPr>
-            </a:br>
-            <a:r>
-              <a:rPr lang="en-US" sz="2400" b="1" dirty="0">
-                <a:solidFill>
-                  <a:schemeClr val="accent5"/>
-                </a:solidFill>
-              </a:rPr>
-              <a:t>Error</a:t>
-            </a:r>
-            <a:endParaRPr lang="en-US" sz="2800" b="1" dirty="0">
-              <a:solidFill>
-                <a:schemeClr val="accent5"/>
-              </a:solidFill>
-            </a:endParaRPr>
-          </a:p>
-          <a:p>
-            <a:pPr algn="l">
+              <a:t>// system prompt</a:t>
+            </a:r>
+          </a:p>
+          <a:p>
+            <a:pPr>
               <a:spcBef>
                 <a:spcPts val="300"/>
               </a:spcBef>
             </a:pPr>
-            <a:endParaRPr lang="en-US" sz="1400" dirty="0">
-              <a:solidFill>
-                <a:srgbClr val="64748B"/>
-              </a:solidFill>
-            </a:endParaRPr>
-          </a:p>
-        </p:txBody>
-      </p:sp>
-      <p:cxnSp>
-        <p:nvCxnSpPr>
-          <p:cNvPr id="14" name="Connector: Elbow 13">
-            <a:extLst>
-              <a:ext uri="{FF2B5EF4-FFF2-40B4-BE49-F238E27FC236}">
-                <a16:creationId xmlns:a16="http://schemas.microsoft.com/office/drawing/2014/main" id="{50E5E794-A4F8-C1F4-5248-9B689CAD8735}"/>
-              </a:ext>
-            </a:extLst>
-          </p:cNvPr>
-          <p:cNvCxnSpPr>
-            <a:cxnSpLocks/>
-            <a:stCxn id="5" idx="1"/>
-            <a:endCxn id="802" idx="2"/>
-          </p:cNvCxnSpPr>
-          <p:nvPr/>
-        </p:nvCxnSpPr>
-        <p:spPr>
-          <a:xfrm rot="10800000">
-            <a:off x="5143501" y="3323968"/>
-            <a:ext cx="4899797" cy="808512"/>
-          </a:xfrm>
-          <a:prstGeom prst="bentConnector2">
-            <a:avLst/>
-          </a:prstGeom>
-          <a:ln w="98425">
-            <a:solidFill>
-              <a:srgbClr val="CBD5E1"/>
-            </a:solidFill>
-            <a:tailEnd type="triangle"/>
-          </a:ln>
-        </p:spPr>
-        <p:style>
-          <a:lnRef idx="2">
-            <a:schemeClr val="accent1"/>
-          </a:lnRef>
-          <a:fillRef idx="0">
-            <a:schemeClr val="accent1"/>
-          </a:fillRef>
-          <a:effectRef idx="1">
-            <a:schemeClr val="accent1"/>
-          </a:effectRef>
-          <a:fontRef idx="minor">
-            <a:schemeClr val="tx1"/>
-          </a:fontRef>
-        </p:style>
-      </p:cxnSp>
-      <p:sp>
-        <p:nvSpPr>
-          <p:cNvPr id="18" name="Arr4">
-            <a:extLst>
-              <a:ext uri="{FF2B5EF4-FFF2-40B4-BE49-F238E27FC236}">
-                <a16:creationId xmlns:a16="http://schemas.microsoft.com/office/drawing/2014/main" id="{9286CF5E-7314-85A6-D4EF-063F9CE387DD}"/>
-              </a:ext>
-            </a:extLst>
-          </p:cNvPr>
-          <p:cNvSpPr/>
-          <p:nvPr/>
-        </p:nvSpPr>
-        <p:spPr>
-          <a:xfrm rot="5400000">
-            <a:off x="10710070" y="3359987"/>
-            <a:ext cx="321230" cy="278370"/>
-          </a:xfrm>
-          <a:prstGeom prst="rightArrow">
-            <a:avLst>
-              <a:gd name="adj1" fmla="val 50000"/>
-              <a:gd name="adj2" fmla="val 50000"/>
-            </a:avLst>
-          </a:prstGeom>
-          <a:solidFill>
-            <a:srgbClr val="CBD5E1"/>
-          </a:solidFill>
-          <a:ln>
-            <a:noFill/>
-          </a:ln>
-        </p:spPr>
-        <p:txBody>
-          <a:bodyPr/>
-          <a:lstStyle/>
-          <a:p>
-            <a:endParaRPr lang="en-US"/>
-          </a:p>
-        </p:txBody>
-      </p:sp>
-      <p:sp>
-        <p:nvSpPr>
-          <p:cNvPr id="10" name="TextBox 9">
-            <a:extLst>
-              <a:ext uri="{FF2B5EF4-FFF2-40B4-BE49-F238E27FC236}">
-                <a16:creationId xmlns:a16="http://schemas.microsoft.com/office/drawing/2014/main" id="{BB4B9F97-4E80-486C-FE7C-DC6DC5520893}"/>
-              </a:ext>
-            </a:extLst>
-          </p:cNvPr>
-          <p:cNvSpPr txBox="1"/>
-          <p:nvPr/>
-        </p:nvSpPr>
-        <p:spPr>
-          <a:xfrm>
-            <a:off x="10649644" y="2694396"/>
-            <a:ext cx="580808" cy="369332"/>
-          </a:xfrm>
-          <a:prstGeom prst="rect">
-            <a:avLst/>
-          </a:prstGeom>
-          <a:noFill/>
-        </p:spPr>
-        <p:txBody>
-          <a:bodyPr wrap="square">
-            <a:spAutoFit/>
-          </a:bodyPr>
-          <a:lstStyle/>
-          <a:p>
-            <a:r>
-              <a:rPr lang="en-US" b="0" i="0" dirty="0">
-                <a:solidFill>
-                  <a:srgbClr val="F3F4F6"/>
-                </a:solidFill>
-                <a:effectLst/>
-                <a:latin typeface="Apple Color Emoji"/>
-              </a:rPr>
-              <a:t>✅</a:t>
-            </a:r>
-            <a:endParaRPr lang="en-US" dirty="0"/>
-          </a:p>
-        </p:txBody>
-      </p:sp>
-      <p:sp>
-        <p:nvSpPr>
-          <p:cNvPr id="15" name="TextBox 14">
-            <a:extLst>
-              <a:ext uri="{FF2B5EF4-FFF2-40B4-BE49-F238E27FC236}">
-                <a16:creationId xmlns:a16="http://schemas.microsoft.com/office/drawing/2014/main" id="{1539840D-3579-C6D4-75CA-F1F3C5465DE1}"/>
-              </a:ext>
-            </a:extLst>
-          </p:cNvPr>
-          <p:cNvSpPr txBox="1"/>
-          <p:nvPr/>
-        </p:nvSpPr>
-        <p:spPr>
-          <a:xfrm>
-            <a:off x="10892548" y="4006502"/>
-            <a:ext cx="580808" cy="369332"/>
-          </a:xfrm>
-          <a:prstGeom prst="rect">
-            <a:avLst/>
-          </a:prstGeom>
-          <a:noFill/>
-        </p:spPr>
-        <p:txBody>
-          <a:bodyPr wrap="square">
-            <a:spAutoFit/>
-          </a:bodyPr>
-          <a:lstStyle/>
-          <a:p>
-            <a:r>
-              <a:rPr lang="en-US" dirty="0"/>
-              <a:t>❌</a:t>
+            <a:r>
+              <a:rPr lang="en-US" sz="2000" dirty="0">
+                <a:solidFill>
+                  <a:srgbClr val="E2E8F0"/>
+                </a:solidFill>
+                <a:latin typeface="Consolas"/>
+              </a:rPr>
+              <a:t>You are a SQL assistant.</a:t>
+            </a:r>
+          </a:p>
+          <a:p>
+            <a:pPr>
+              <a:spcBef>
+                <a:spcPts val="200"/>
+              </a:spcBef>
+            </a:pPr>
+            <a:r>
+              <a:rPr lang="en-US" sz="2000" dirty="0">
+                <a:solidFill>
+                  <a:srgbClr val="22D3EE"/>
+                </a:solidFill>
+                <a:latin typeface="Consolas"/>
+              </a:rPr>
+              <a:t>RULES:</a:t>
+            </a:r>
+          </a:p>
+          <a:p>
+            <a:pPr>
+              <a:spcBef>
+                <a:spcPts val="200"/>
+              </a:spcBef>
+            </a:pPr>
+            <a:r>
+              <a:rPr lang="en-US" sz="2000" dirty="0">
+                <a:solidFill>
+                  <a:srgbClr val="E2E8F0"/>
+                </a:solidFill>
+                <a:latin typeface="Consolas"/>
+              </a:rPr>
+              <a:t>• SELECT only</a:t>
+            </a:r>
+          </a:p>
+          <a:p>
+            <a:pPr>
+              <a:spcBef>
+                <a:spcPts val="200"/>
+              </a:spcBef>
+            </a:pPr>
+            <a:r>
+              <a:rPr lang="en-US" sz="2000" dirty="0">
+                <a:solidFill>
+                  <a:srgbClr val="E2E8F0"/>
+                </a:solidFill>
+                <a:latin typeface="Consolas"/>
+              </a:rPr>
+              <a:t>• No DELETE/UPDATE/DROP</a:t>
+            </a:r>
+          </a:p>
+          <a:p>
+            <a:pPr>
+              <a:spcBef>
+                <a:spcPts val="200"/>
+              </a:spcBef>
+            </a:pPr>
+            <a:r>
+              <a:rPr lang="en-US" sz="2000" dirty="0">
+                <a:solidFill>
+                  <a:srgbClr val="E2E8F0"/>
+                </a:solidFill>
+                <a:latin typeface="Consolas"/>
+              </a:rPr>
+              <a:t>• Return SQL only</a:t>
+            </a:r>
+          </a:p>
+          <a:p>
+            <a:pPr>
+              <a:spcBef>
+                <a:spcPts val="200"/>
+              </a:spcBef>
+            </a:pPr>
+            <a:r>
+              <a:rPr lang="en-US" sz="2000" dirty="0">
+                <a:solidFill>
+                  <a:srgbClr val="E2E8F0"/>
+                </a:solidFill>
+                <a:latin typeface="Consolas"/>
+              </a:rPr>
+              <a:t>• Use the schema above</a:t>
             </a:r>
           </a:p>
         </p:txBody>
@@ -15960,7 +15713,7 @@
     </p:spTree>
     <p:extLst>
       <p:ext uri="{BB962C8B-B14F-4D97-AF65-F5344CB8AC3E}">
-        <p14:creationId xmlns:p14="http://schemas.microsoft.com/office/powerpoint/2010/main" val="411072858"/>
+        <p14:creationId xmlns:p14="http://schemas.microsoft.com/office/powerpoint/2010/main" val="2819277455"/>
       </p:ext>
     </p:extLst>
   </p:cSld>
@@ -15975,7 +15728,13 @@
   <p:cSld>
     <p:spTree>
       <p:nvGrpSpPr>
-        <p:cNvPr id="1" name=""/>
+        <p:cNvPr id="1" name="">
+          <a:extLst>
+            <a:ext uri="{FF2B5EF4-FFF2-40B4-BE49-F238E27FC236}">
+              <a16:creationId xmlns:a16="http://schemas.microsoft.com/office/drawing/2014/main" id="{5D2C07A3-A506-91E2-776A-A29FCBDFCAB7}"/>
+            </a:ext>
+          </a:extLst>
+        </p:cNvPr>
         <p:cNvGrpSpPr/>
         <p:nvPr/>
       </p:nvGrpSpPr>
@@ -15989,10 +15748,80 @@
       </p:grpSpPr>
       <p:sp>
         <p:nvSpPr>
+          <p:cNvPr id="700" name="Panel">
+            <a:extLst>
+              <a:ext uri="{FF2B5EF4-FFF2-40B4-BE49-F238E27FC236}">
+                <a16:creationId xmlns:a16="http://schemas.microsoft.com/office/drawing/2014/main" id="{18B2B528-04D2-2150-B806-041B393ED26A}"/>
+              </a:ext>
+            </a:extLst>
+          </p:cNvPr>
+          <p:cNvSpPr/>
+          <p:nvPr/>
+        </p:nvSpPr>
+        <p:spPr>
+          <a:xfrm>
+            <a:off x="73026" y="1270000"/>
+            <a:ext cx="12118974" cy="4318000"/>
+          </a:xfrm>
+          <a:prstGeom prst="rect">
+            <a:avLst/>
+          </a:prstGeom>
+          <a:solidFill>
+            <a:srgbClr val="0F172A"/>
+          </a:solidFill>
+          <a:ln>
+            <a:noFill/>
+          </a:ln>
+        </p:spPr>
+        <p:txBody>
+          <a:bodyPr/>
+          <a:lstStyle/>
+          <a:p>
+            <a:endParaRPr lang="en-US" sz="3200"/>
+          </a:p>
+        </p:txBody>
+      </p:sp>
+      <p:sp>
+        <p:nvSpPr>
+          <p:cNvPr id="701" name="AccentBar">
+            <a:extLst>
+              <a:ext uri="{FF2B5EF4-FFF2-40B4-BE49-F238E27FC236}">
+                <a16:creationId xmlns:a16="http://schemas.microsoft.com/office/drawing/2014/main" id="{C728586D-EB19-12D4-4F3F-29D6CB3CC6F8}"/>
+              </a:ext>
+            </a:extLst>
+          </p:cNvPr>
+          <p:cNvSpPr/>
+          <p:nvPr/>
+        </p:nvSpPr>
+        <p:spPr>
+          <a:xfrm>
+            <a:off x="929325" y="1911350"/>
+            <a:ext cx="4752000" cy="76200"/>
+          </a:xfrm>
+          <a:prstGeom prst="rect">
+            <a:avLst/>
+          </a:prstGeom>
+          <a:solidFill>
+            <a:srgbClr val="22D3EE"/>
+          </a:solidFill>
+          <a:ln>
+            <a:noFill/>
+          </a:ln>
+        </p:spPr>
+        <p:txBody>
+          <a:bodyPr/>
+          <a:lstStyle/>
+          <a:p>
+            <a:endParaRPr lang="en-US"/>
+          </a:p>
+        </p:txBody>
+      </p:sp>
+      <p:sp>
+        <p:nvSpPr>
           <p:cNvPr id="2" name="Title 1">
             <a:extLst>
               <a:ext uri="{FF2B5EF4-FFF2-40B4-BE49-F238E27FC236}">
-                <a16:creationId xmlns:a16="http://schemas.microsoft.com/office/drawing/2014/main" id="{8D87719D-6174-6E05-E935-B77F706A866C}"/>
+                <a16:creationId xmlns:a16="http://schemas.microsoft.com/office/drawing/2014/main" id="{11C53B48-EF36-6340-82E8-458E3E0A9C22}"/>
               </a:ext>
             </a:extLst>
           </p:cNvPr>
@@ -16005,378 +15834,186 @@
         </p:nvSpPr>
         <p:spPr/>
         <p:txBody>
-          <a:bodyPr>
-            <a:normAutofit/>
-          </a:bodyPr>
-          <a:lstStyle/>
-          <a:p>
-            <a:pPr algn="l"/>
-            <a:r>
-              <a:rPr lang="en-US" sz="4800" b="1" dirty="0">
-                <a:solidFill>
-                  <a:srgbClr val="0F172A"/>
-                </a:solidFill>
-              </a:rPr>
-              <a:t>Schema + Prompt Design</a:t>
-            </a:r>
-          </a:p>
-        </p:txBody>
-      </p:sp>
-      <p:sp>
-        <p:nvSpPr>
-          <p:cNvPr id="400" name="LeftCard"/>
-          <p:cNvSpPr/>
-          <p:nvPr/>
+          <a:bodyPr/>
+          <a:lstStyle/>
+          <a:p>
+            <a:pPr algn="l">
+              <a:lnSpc>
+                <a:spcPct val="100000"/>
+              </a:lnSpc>
+            </a:pPr>
+            <a:r>
+              <a:rPr lang="en-US" sz="8000" b="1" dirty="0">
+                <a:solidFill>
+                  <a:srgbClr val="FFFFFF"/>
+                </a:solidFill>
+              </a:rPr>
+              <a:t>Demo</a:t>
+            </a:r>
+          </a:p>
+          <a:p>
+            <a:pPr algn="l">
+              <a:buNone/>
+            </a:pPr>
+            <a:r>
+              <a:rPr lang="en-US" sz="2800" dirty="0">
+                <a:solidFill>
+                  <a:srgbClr val="94A3B8"/>
+                </a:solidFill>
+              </a:rPr>
+              <a:t>A Simple .NET Console App </a:t>
+            </a:r>
+          </a:p>
+        </p:txBody>
+      </p:sp>
+      <p:sp>
+        <p:nvSpPr>
+          <p:cNvPr id="3" name="Text Placeholder 2">
+            <a:extLst>
+              <a:ext uri="{FF2B5EF4-FFF2-40B4-BE49-F238E27FC236}">
+                <a16:creationId xmlns:a16="http://schemas.microsoft.com/office/drawing/2014/main" id="{CE123229-FD34-7833-06A8-F4C0CCC872CD}"/>
+              </a:ext>
+            </a:extLst>
+          </p:cNvPr>
+          <p:cNvSpPr>
+            <a:spLocks noGrp="1"/>
+          </p:cNvSpPr>
+          <p:nvPr>
+            <p:ph type="body" idx="1"/>
+          </p:nvPr>
         </p:nvSpPr>
         <p:spPr>
           <a:xfrm>
-            <a:off x="635000" y="1466850"/>
-            <a:ext cx="5334000" cy="4438650"/>
-          </a:xfrm>
-          <a:prstGeom prst="roundRect">
-            <a:avLst>
-              <a:gd name="adj" fmla="val 6000"/>
-            </a:avLst>
-          </a:prstGeom>
-          <a:solidFill>
-            <a:srgbClr val="FFFFFF"/>
-          </a:solidFill>
-          <a:ln w="12700">
+            <a:off x="831850" y="2050663"/>
+            <a:ext cx="5016500" cy="558799"/>
+          </a:xfrm>
+        </p:spPr>
+        <p:txBody>
+          <a:bodyPr>
+            <a:normAutofit fontScale="77500" lnSpcReduction="20000"/>
+          </a:bodyPr>
+          <a:lstStyle/>
+          <a:p>
+            <a:pPr algn="l">
+              <a:buNone/>
+            </a:pPr>
+            <a:r>
+              <a:rPr lang="en-US" sz="3200" b="1" spc="400" dirty="0">
+                <a:solidFill>
+                  <a:srgbClr val="22D3EE"/>
+                </a:solidFill>
+              </a:rPr>
+              <a:t>CHAT WITH YOUR DATA</a:t>
+            </a:r>
+          </a:p>
+        </p:txBody>
+      </p:sp>
+      <p:grpSp>
+        <p:nvGrpSpPr>
+          <p:cNvPr id="11" name="Group 10">
+            <a:extLst>
+              <a:ext uri="{FF2B5EF4-FFF2-40B4-BE49-F238E27FC236}">
+                <a16:creationId xmlns:a16="http://schemas.microsoft.com/office/drawing/2014/main" id="{88BF4189-844E-C8D9-D73B-DD7B8585FBE3}"/>
+              </a:ext>
+            </a:extLst>
+          </p:cNvPr>
+          <p:cNvGrpSpPr/>
+          <p:nvPr/>
+        </p:nvGrpSpPr>
+        <p:grpSpPr>
+          <a:xfrm>
+            <a:off x="4030325" y="3357368"/>
+            <a:ext cx="1651000" cy="457200"/>
+            <a:chOff x="889000" y="1429656"/>
+            <a:chExt cx="1651000" cy="457200"/>
+          </a:xfrm>
+        </p:grpSpPr>
+        <p:sp>
+          <p:nvSpPr>
+            <p:cNvPr id="12" name="LiveBadge">
+              <a:extLst>
+                <a:ext uri="{FF2B5EF4-FFF2-40B4-BE49-F238E27FC236}">
+                  <a16:creationId xmlns:a16="http://schemas.microsoft.com/office/drawing/2014/main" id="{B1DE4706-7C9E-FB03-11A8-AD13184D2821}"/>
+                </a:ext>
+              </a:extLst>
+            </p:cNvPr>
+            <p:cNvSpPr/>
+            <p:nvPr/>
+          </p:nvSpPr>
+          <p:spPr>
+            <a:xfrm>
+              <a:off x="889000" y="1429656"/>
+              <a:ext cx="1651000" cy="457200"/>
+            </a:xfrm>
+            <a:prstGeom prst="roundRect">
+              <a:avLst>
+                <a:gd name="adj" fmla="val 50000"/>
+              </a:avLst>
+            </a:prstGeom>
             <a:solidFill>
-              <a:srgbClr val="E2E8F0"/>
+              <a:srgbClr val="F43F5E"/>
             </a:solidFill>
-          </a:ln>
-        </p:spPr>
-        <p:txBody>
-          <a:bodyPr wrap="square" lIns="240000" tIns="200000" rIns="240000" bIns="200000" anchor="t"/>
-          <a:lstStyle/>
-          <a:p>
-            <a:pPr algn="l"/>
-            <a:r>
-              <a:rPr lang="en-US" b="1" spc="300" dirty="0">
-                <a:solidFill>
-                  <a:srgbClr val="0891B2"/>
-                </a:solidFill>
-              </a:rPr>
-              <a:t>STEP 1  ·  SCHEMA</a:t>
-            </a:r>
-          </a:p>
-          <a:p>
-            <a:pPr algn="l">
-              <a:spcBef>
-                <a:spcPts val="400"/>
-              </a:spcBef>
-            </a:pPr>
-            <a:r>
-              <a:rPr lang="en-US" sz="2800" b="1" dirty="0">
-                <a:solidFill>
-                  <a:srgbClr val="0F172A"/>
-                </a:solidFill>
-              </a:rPr>
-              <a:t>Teach the LLM your data</a:t>
-            </a:r>
-          </a:p>
-          <a:p>
-            <a:pPr marL="228600" indent="-228600">
-              <a:spcBef>
-                <a:spcPts val="800"/>
-              </a:spcBef>
-              <a:buFont typeface="Arial"/>
-              <a:buChar char="•"/>
-            </a:pPr>
-            <a:r>
-              <a:rPr lang="en-US" sz="2400" dirty="0">
-                <a:solidFill>
-                  <a:srgbClr val="334155"/>
-                </a:solidFill>
-              </a:rPr>
-              <a:t>Tables &amp; columns</a:t>
-            </a:r>
-          </a:p>
-          <a:p>
-            <a:pPr marL="228600" indent="-228600">
-              <a:spcBef>
-                <a:spcPts val="400"/>
-              </a:spcBef>
-              <a:buFont typeface="Arial"/>
-              <a:buChar char="•"/>
-            </a:pPr>
-            <a:r>
-              <a:rPr lang="en-US" sz="2400" dirty="0">
-                <a:solidFill>
-                  <a:srgbClr val="334155"/>
-                </a:solidFill>
-              </a:rPr>
-              <a:t>Relationships &amp; keys</a:t>
-            </a:r>
-          </a:p>
-          <a:p>
-            <a:pPr marL="228600" indent="-228600">
-              <a:spcBef>
-                <a:spcPts val="400"/>
-              </a:spcBef>
-              <a:buFont typeface="Arial"/>
-              <a:buChar char="•"/>
-            </a:pPr>
-            <a:r>
-              <a:rPr lang="en-US" sz="2400" dirty="0">
-                <a:solidFill>
-                  <a:srgbClr val="334155"/>
-                </a:solidFill>
-              </a:rPr>
-              <a:t>Data types</a:t>
-            </a:r>
-          </a:p>
-          <a:p>
-            <a:pPr marL="228600" indent="-228600">
-              <a:spcBef>
-                <a:spcPts val="400"/>
-              </a:spcBef>
-              <a:buFont typeface="Arial"/>
-              <a:buChar char="•"/>
-            </a:pPr>
-            <a:r>
-              <a:rPr lang="en-US" sz="2400" dirty="0">
-                <a:solidFill>
-                  <a:srgbClr val="334155"/>
-                </a:solidFill>
-              </a:rPr>
-              <a:t>Enum Values</a:t>
-            </a:r>
-          </a:p>
-          <a:p>
-            <a:pPr marL="228600" indent="-228600">
-              <a:spcBef>
-                <a:spcPts val="400"/>
-              </a:spcBef>
-              <a:buFont typeface="Arial"/>
-              <a:buChar char="•"/>
-            </a:pPr>
-            <a:r>
-              <a:rPr lang="en-US" sz="2400" dirty="0">
-                <a:solidFill>
-                  <a:srgbClr val="334155"/>
-                </a:solidFill>
-              </a:rPr>
-              <a:t>Optional: sample values</a:t>
-            </a:r>
-          </a:p>
-          <a:p>
-            <a:pPr marL="228600" indent="-228600">
-              <a:spcBef>
-                <a:spcPts val="400"/>
-              </a:spcBef>
-              <a:buFont typeface="Arial"/>
-              <a:buChar char="•"/>
-            </a:pPr>
-            <a:r>
-              <a:rPr lang="en-US" sz="2400" dirty="0">
-                <a:solidFill>
-                  <a:srgbClr val="334155"/>
-                </a:solidFill>
-              </a:rPr>
-              <a:t>Optional: extra DDL info</a:t>
-            </a:r>
-            <a:br>
-              <a:rPr lang="en-US" sz="2400" dirty="0">
-                <a:solidFill>
-                  <a:srgbClr val="334155"/>
-                </a:solidFill>
-              </a:rPr>
-            </a:br>
-            <a:endParaRPr lang="en-US" sz="2400" dirty="0">
-              <a:solidFill>
-                <a:srgbClr val="334155"/>
-              </a:solidFill>
-            </a:endParaRPr>
-          </a:p>
-          <a:p>
-            <a:pPr>
-              <a:spcBef>
-                <a:spcPts val="800"/>
-              </a:spcBef>
-            </a:pPr>
-            <a:r>
-              <a:rPr lang="en-US" i="1" dirty="0">
-                <a:solidFill>
-                  <a:srgbClr val="64748B"/>
-                </a:solidFill>
-              </a:rPr>
-              <a:t>Without schema, the LLM is guessing!</a:t>
-            </a:r>
-          </a:p>
-        </p:txBody>
-      </p:sp>
-      <p:sp>
-        <p:nvSpPr>
-          <p:cNvPr id="401" name="RightCard"/>
-          <p:cNvSpPr/>
-          <p:nvPr/>
-        </p:nvSpPr>
-        <p:spPr>
-          <a:xfrm>
-            <a:off x="6223000" y="1466850"/>
-            <a:ext cx="5334000" cy="4438650"/>
-          </a:xfrm>
-          <a:prstGeom prst="roundRect">
-            <a:avLst>
-              <a:gd name="adj" fmla="val 6000"/>
-            </a:avLst>
-          </a:prstGeom>
-          <a:solidFill>
-            <a:srgbClr val="0F172A"/>
-          </a:solidFill>
-          <a:ln>
-            <a:noFill/>
-          </a:ln>
-        </p:spPr>
-        <p:txBody>
-          <a:bodyPr wrap="square" lIns="240000" tIns="200000" rIns="240000" bIns="200000" anchor="t"/>
-          <a:lstStyle/>
-          <a:p>
-            <a:pPr algn="l"/>
-            <a:r>
-              <a:rPr lang="en-US" b="1" spc="300" dirty="0">
-                <a:solidFill>
-                  <a:srgbClr val="22D3EE"/>
-                </a:solidFill>
-              </a:rPr>
-              <a:t>STEP 2  ·  PROMPT</a:t>
-            </a:r>
-          </a:p>
-          <a:p>
-            <a:pPr algn="l">
-              <a:spcBef>
-                <a:spcPts val="400"/>
-              </a:spcBef>
-            </a:pPr>
-            <a:r>
-              <a:rPr lang="en-US" sz="2800" b="1" dirty="0">
-                <a:solidFill>
-                  <a:srgbClr val="FFFFFF"/>
-                </a:solidFill>
-              </a:rPr>
-              <a:t>Write the rules</a:t>
-            </a:r>
-          </a:p>
-          <a:p>
-            <a:pPr>
-              <a:spcBef>
-                <a:spcPts val="800"/>
-              </a:spcBef>
-            </a:pPr>
-            <a:r>
-              <a:rPr lang="en-US" dirty="0">
-                <a:solidFill>
-                  <a:srgbClr val="64748B"/>
-                </a:solidFill>
-                <a:latin typeface="Consolas"/>
-              </a:rPr>
-              <a:t>// system prompt</a:t>
-            </a:r>
-          </a:p>
-          <a:p>
-            <a:pPr>
-              <a:spcBef>
-                <a:spcPts val="300"/>
-              </a:spcBef>
-            </a:pPr>
-            <a:r>
-              <a:rPr lang="en-US" sz="2000" dirty="0">
-                <a:solidFill>
-                  <a:srgbClr val="E2E8F0"/>
-                </a:solidFill>
-                <a:latin typeface="Consolas"/>
-              </a:rPr>
-              <a:t>You are a SQL assistant.</a:t>
-            </a:r>
-          </a:p>
-          <a:p>
-            <a:pPr>
-              <a:spcBef>
-                <a:spcPts val="200"/>
-              </a:spcBef>
-            </a:pPr>
-            <a:r>
-              <a:rPr lang="en-US" sz="2000" dirty="0">
-                <a:solidFill>
-                  <a:srgbClr val="22D3EE"/>
-                </a:solidFill>
-                <a:latin typeface="Consolas"/>
-              </a:rPr>
-              <a:t>RULES:</a:t>
-            </a:r>
-          </a:p>
-          <a:p>
-            <a:pPr>
-              <a:spcBef>
-                <a:spcPts val="200"/>
-              </a:spcBef>
-            </a:pPr>
-            <a:r>
-              <a:rPr lang="en-US" sz="2000" dirty="0">
-                <a:solidFill>
-                  <a:srgbClr val="E2E8F0"/>
-                </a:solidFill>
-                <a:latin typeface="Consolas"/>
-              </a:rPr>
-              <a:t>• SELECT only</a:t>
-            </a:r>
-          </a:p>
-          <a:p>
-            <a:pPr>
-              <a:spcBef>
-                <a:spcPts val="200"/>
-              </a:spcBef>
-            </a:pPr>
-            <a:r>
-              <a:rPr lang="en-US" sz="2000" dirty="0">
-                <a:solidFill>
-                  <a:srgbClr val="E2E8F0"/>
-                </a:solidFill>
-                <a:latin typeface="Consolas"/>
-              </a:rPr>
-              <a:t>• No DELETE/UPDATE/DROP</a:t>
-            </a:r>
-          </a:p>
-          <a:p>
-            <a:pPr>
-              <a:spcBef>
-                <a:spcPts val="200"/>
-              </a:spcBef>
-            </a:pPr>
-            <a:r>
-              <a:rPr lang="en-US" sz="2000" dirty="0">
-                <a:solidFill>
-                  <a:srgbClr val="E2E8F0"/>
-                </a:solidFill>
-                <a:latin typeface="Consolas"/>
-              </a:rPr>
-              <a:t>• Return SQL only</a:t>
-            </a:r>
-          </a:p>
-          <a:p>
-            <a:pPr>
-              <a:spcBef>
-                <a:spcPts val="200"/>
-              </a:spcBef>
-            </a:pPr>
-            <a:r>
-              <a:rPr lang="en-US" sz="2000" dirty="0">
-                <a:solidFill>
-                  <a:srgbClr val="E2E8F0"/>
-                </a:solidFill>
-                <a:latin typeface="Consolas"/>
-              </a:rPr>
-              <a:t>• Use the schema above</a:t>
-            </a:r>
-          </a:p>
-        </p:txBody>
-      </p:sp>
+            <a:ln>
+              <a:noFill/>
+            </a:ln>
+          </p:spPr>
+          <p:txBody>
+            <a:bodyPr wrap="square" lIns="91440" tIns="0" rIns="91440" bIns="0" anchor="ctr"/>
+            <a:lstStyle/>
+            <a:p>
+              <a:pPr algn="ctr"/>
+              <a:r>
+                <a:rPr lang="en-US" b="1" spc="300" dirty="0">
+                  <a:solidFill>
+                    <a:srgbClr val="FFFFFF"/>
+                  </a:solidFill>
+                </a:rPr>
+                <a:t>    LIVE</a:t>
+              </a:r>
+            </a:p>
+          </p:txBody>
+        </p:sp>
+        <p:pic>
+          <p:nvPicPr>
+            <p:cNvPr id="13" name="Graphic 12" descr="Presentation with media with solid fill">
+              <a:extLst>
+                <a:ext uri="{FF2B5EF4-FFF2-40B4-BE49-F238E27FC236}">
+                  <a16:creationId xmlns:a16="http://schemas.microsoft.com/office/drawing/2014/main" id="{37193B5B-7B8B-D404-8310-414F52FF0D9E}"/>
+                </a:ext>
+              </a:extLst>
+            </p:cNvPr>
+            <p:cNvPicPr>
+              <a:picLocks noChangeAspect="1"/>
+            </p:cNvPicPr>
+            <p:nvPr/>
+          </p:nvPicPr>
+          <p:blipFill>
+            <a:blip r:embed="rId3">
+              <a:extLst>
+                <a:ext uri="{96DAC541-7B7A-43D3-8B79-37D633B846F1}">
+                  <asvg:svgBlip xmlns:asvg="http://schemas.microsoft.com/office/drawing/2016/SVG/main" r:embed="rId4"/>
+                </a:ext>
+              </a:extLst>
+            </a:blip>
+            <a:stretch>
+              <a:fillRect/>
+            </a:stretch>
+          </p:blipFill>
+          <p:spPr>
+            <a:xfrm>
+              <a:off x="1137503" y="1476895"/>
+              <a:ext cx="394735" cy="394735"/>
+            </a:xfrm>
+            <a:prstGeom prst="rect">
+              <a:avLst/>
+            </a:prstGeom>
+          </p:spPr>
+        </p:pic>
+      </p:grpSp>
     </p:spTree>
     <p:extLst>
       <p:ext uri="{BB962C8B-B14F-4D97-AF65-F5344CB8AC3E}">
-        <p14:creationId xmlns:p14="http://schemas.microsoft.com/office/powerpoint/2010/main" val="2819277455"/>
+        <p14:creationId xmlns:p14="http://schemas.microsoft.com/office/powerpoint/2010/main" val="3914748982"/>
       </p:ext>
     </p:extLst>
   </p:cSld>
@@ -16387,7 +16024,7 @@
 </file>
 
 <file path=ppt/slides/slide9.xml><?xml version="1.0" encoding="utf-8"?>
-<p:sld xmlns:a="http://schemas.openxmlformats.org/drawingml/2006/main" xmlns:r="http://schemas.openxmlformats.org/officeDocument/2006/relationships" xmlns:p="http://schemas.openxmlformats.org/presentationml/2006/main">
+<p:sld xmlns:a="http://schemas.openxmlformats.org/drawingml/2006/main" xmlns:r="http://schemas.openxmlformats.org/officeDocument/2006/relationships" xmlns:p="http://schemas.openxmlformats.org/presentationml/2006/main" show="0">
   <p:cSld>
     <p:spTree>
       <p:nvGrpSpPr>

--- a/Presentation.pptx
+++ b/Presentation.pptx
@@ -5,30 +5,31 @@
     <p:sldMasterId id="2147483684" r:id="rId1"/>
   </p:sldMasterIdLst>
   <p:notesMasterIdLst>
-    <p:notesMasterId r:id="rId23"/>
+    <p:notesMasterId r:id="rId24"/>
   </p:notesMasterIdLst>
   <p:sldIdLst>
     <p:sldId id="328" r:id="rId2"/>
-    <p:sldId id="329" r:id="rId3"/>
-    <p:sldId id="308" r:id="rId4"/>
-    <p:sldId id="309" r:id="rId5"/>
-    <p:sldId id="310" r:id="rId6"/>
-    <p:sldId id="299" r:id="rId7"/>
-    <p:sldId id="312" r:id="rId8"/>
-    <p:sldId id="330" r:id="rId9"/>
-    <p:sldId id="313" r:id="rId10"/>
-    <p:sldId id="314" r:id="rId11"/>
-    <p:sldId id="315" r:id="rId12"/>
-    <p:sldId id="316" r:id="rId13"/>
-    <p:sldId id="317" r:id="rId14"/>
-    <p:sldId id="320" r:id="rId15"/>
-    <p:sldId id="318" r:id="rId16"/>
-    <p:sldId id="319" r:id="rId17"/>
-    <p:sldId id="321" r:id="rId18"/>
-    <p:sldId id="322" r:id="rId19"/>
-    <p:sldId id="323" r:id="rId20"/>
-    <p:sldId id="332" r:id="rId21"/>
-    <p:sldId id="324" r:id="rId22"/>
+    <p:sldId id="333" r:id="rId3"/>
+    <p:sldId id="329" r:id="rId4"/>
+    <p:sldId id="308" r:id="rId5"/>
+    <p:sldId id="309" r:id="rId6"/>
+    <p:sldId id="310" r:id="rId7"/>
+    <p:sldId id="299" r:id="rId8"/>
+    <p:sldId id="312" r:id="rId9"/>
+    <p:sldId id="330" r:id="rId10"/>
+    <p:sldId id="313" r:id="rId11"/>
+    <p:sldId id="314" r:id="rId12"/>
+    <p:sldId id="315" r:id="rId13"/>
+    <p:sldId id="316" r:id="rId14"/>
+    <p:sldId id="317" r:id="rId15"/>
+    <p:sldId id="320" r:id="rId16"/>
+    <p:sldId id="318" r:id="rId17"/>
+    <p:sldId id="319" r:id="rId18"/>
+    <p:sldId id="321" r:id="rId19"/>
+    <p:sldId id="322" r:id="rId20"/>
+    <p:sldId id="323" r:id="rId21"/>
+    <p:sldId id="332" r:id="rId22"/>
+    <p:sldId id="324" r:id="rId23"/>
   </p:sldIdLst>
   <p:sldSz cx="12192000" cy="6858000"/>
   <p:notesSz cx="6858000" cy="9144000"/>
@@ -580,224 +581,7 @@
             </a:r>
           </a:p>
           <a:p>
-            <a:r>
-              <a:rPr lang="en-US" dirty="0"/>
-              <a:t>//////////////////////////</a:t>
-            </a:r>
-          </a:p>
-          <a:p>
             <a:endParaRPr lang="en-US" dirty="0"/>
-          </a:p>
-          <a:p>
-            <a:r>
-              <a:rPr lang="en-US" dirty="0"/>
-              <a:t>8. daha </a:t>
-            </a:r>
-            <a:r>
-              <a:rPr lang="en-US" dirty="0" err="1"/>
-              <a:t>az</a:t>
-            </a:r>
-            <a:r>
-              <a:rPr lang="en-US" dirty="0"/>
-              <a:t> zaman</a:t>
-            </a:r>
-          </a:p>
-          <a:p>
-            <a:r>
-              <a:rPr lang="en-US" dirty="0"/>
-              <a:t>9. </a:t>
-            </a:r>
-            <a:r>
-              <a:rPr lang="en-US" dirty="0" err="1"/>
-              <a:t>ile</a:t>
-            </a:r>
-            <a:r>
-              <a:rPr lang="en-US" dirty="0"/>
-              <a:t> 6. </a:t>
-            </a:r>
-            <a:r>
-              <a:rPr lang="en-US" dirty="0" err="1"/>
-              <a:t>yer</a:t>
-            </a:r>
-            <a:r>
-              <a:rPr lang="en-US" dirty="0"/>
-              <a:t> </a:t>
-            </a:r>
-            <a:r>
-              <a:rPr lang="en-US" dirty="0" err="1"/>
-              <a:t>değiştir</a:t>
-            </a:r>
-            <a:endParaRPr lang="en-US" dirty="0"/>
-          </a:p>
-          <a:p>
-            <a:r>
-              <a:rPr lang="en-US" dirty="0"/>
-              <a:t>12. 15. 16. 17. </a:t>
-            </a:r>
-            <a:r>
-              <a:rPr lang="en-US" dirty="0" err="1"/>
-              <a:t>sil</a:t>
-            </a:r>
-            <a:endParaRPr lang="en-US" dirty="0"/>
-          </a:p>
-          <a:p>
-            <a:endParaRPr lang="en-US" dirty="0"/>
-          </a:p>
-          <a:p>
-            <a:endParaRPr lang="en-US" dirty="0"/>
-          </a:p>
-          <a:p>
-            <a:r>
-              <a:rPr lang="en-US" dirty="0"/>
-              <a:t>7 slide 10sn </a:t>
-            </a:r>
-            <a:r>
-              <a:rPr lang="en-US" dirty="0" err="1"/>
-              <a:t>göster</a:t>
-            </a:r>
-            <a:endParaRPr lang="en-US" dirty="0"/>
-          </a:p>
-          <a:p>
-            <a:r>
-              <a:rPr lang="en-US" dirty="0" err="1"/>
-              <a:t>sunum</a:t>
-            </a:r>
-            <a:r>
-              <a:rPr lang="en-US" dirty="0"/>
-              <a:t> </a:t>
-            </a:r>
-            <a:r>
-              <a:rPr lang="en-US" dirty="0" err="1"/>
-              <a:t>tarafını</a:t>
-            </a:r>
-            <a:r>
-              <a:rPr lang="en-US" dirty="0"/>
-              <a:t> </a:t>
-            </a:r>
-            <a:r>
-              <a:rPr lang="en-US" dirty="0" err="1"/>
-              <a:t>mümkün</a:t>
-            </a:r>
-            <a:r>
-              <a:rPr lang="en-US" dirty="0"/>
-              <a:t> </a:t>
-            </a:r>
-            <a:r>
-              <a:rPr lang="en-US" dirty="0" err="1"/>
-              <a:t>olduğunca</a:t>
-            </a:r>
-            <a:r>
-              <a:rPr lang="en-US" dirty="0"/>
-              <a:t> </a:t>
-            </a:r>
-            <a:r>
-              <a:rPr lang="en-US" dirty="0" err="1"/>
-              <a:t>azalt</a:t>
-            </a:r>
-            <a:endParaRPr lang="en-US" dirty="0"/>
-          </a:p>
-          <a:p>
-            <a:r>
-              <a:rPr lang="en-US" dirty="0"/>
-              <a:t>console </a:t>
-            </a:r>
-            <a:r>
-              <a:rPr lang="en-US" dirty="0" err="1"/>
-              <a:t>uygulamasını</a:t>
-            </a:r>
-            <a:r>
-              <a:rPr lang="en-US" dirty="0"/>
-              <a:t> 1 </a:t>
-            </a:r>
-            <a:r>
-              <a:rPr lang="en-US" dirty="0" err="1"/>
-              <a:t>kez</a:t>
-            </a:r>
-            <a:r>
-              <a:rPr lang="en-US" dirty="0"/>
-              <a:t> </a:t>
-            </a:r>
-            <a:r>
-              <a:rPr lang="en-US" dirty="0" err="1"/>
-              <a:t>çalıştır</a:t>
-            </a:r>
-            <a:endParaRPr lang="en-US" dirty="0"/>
-          </a:p>
-          <a:p>
-            <a:r>
-              <a:rPr lang="en-US" dirty="0" err="1"/>
-              <a:t>soru</a:t>
-            </a:r>
-            <a:r>
-              <a:rPr lang="en-US" dirty="0"/>
-              <a:t> </a:t>
-            </a:r>
-            <a:r>
-              <a:rPr lang="en-US" dirty="0" err="1"/>
-              <a:t>seçimlerini</a:t>
-            </a:r>
-            <a:r>
-              <a:rPr lang="en-US" dirty="0"/>
-              <a:t> </a:t>
-            </a:r>
-            <a:r>
-              <a:rPr lang="en-US" dirty="0" err="1"/>
-              <a:t>baştan</a:t>
-            </a:r>
-            <a:r>
-              <a:rPr lang="en-US" dirty="0"/>
-              <a:t> </a:t>
-            </a:r>
-            <a:r>
-              <a:rPr lang="en-US" dirty="0" err="1"/>
-              <a:t>ayarla</a:t>
-            </a:r>
-            <a:endParaRPr lang="en-US" dirty="0"/>
-          </a:p>
-          <a:p>
-            <a:endParaRPr lang="en-US" dirty="0"/>
-          </a:p>
-          <a:p>
-            <a:endParaRPr lang="en-US" dirty="0"/>
-          </a:p>
-          <a:p>
-            <a:r>
-              <a:rPr lang="en-US" b="1" dirty="0" err="1"/>
-              <a:t>Başlangıçta</a:t>
-            </a:r>
-            <a:r>
-              <a:rPr lang="en-US" b="1" dirty="0"/>
-              <a:t> </a:t>
-            </a:r>
-            <a:r>
-              <a:rPr lang="en-US" b="1" dirty="0" err="1"/>
-              <a:t>aç</a:t>
-            </a:r>
-            <a:r>
-              <a:rPr lang="en-US" b="1" dirty="0"/>
-              <a:t> -&gt;</a:t>
-            </a:r>
-            <a:br>
-              <a:rPr lang="en-US" dirty="0"/>
-            </a:br>
-            <a:r>
-              <a:rPr lang="en-US" dirty="0"/>
-              <a:t>D:\github\alper\chat-with-your-data-conference\Chat.Console\bin\Debug\net10.0\Output</a:t>
-            </a:r>
-            <a:br>
-              <a:rPr lang="en-US" dirty="0"/>
-            </a:br>
-            <a:r>
-              <a:rPr lang="en-US" dirty="0"/>
-              <a:t>how-to-get-your-db-schema.png </a:t>
-            </a:r>
-            <a:br>
-              <a:rPr lang="en-US" dirty="0"/>
-            </a:br>
-            <a:r>
-              <a:rPr lang="en-US" dirty="0"/>
-              <a:t>DB Browser</a:t>
-            </a:r>
           </a:p>
         </p:txBody>
       </p:sp>
@@ -2115,7 +1899,7 @@
           <a:p>
             <a:fld id="{D1473214-2400-4051-BA10-C1E11D206B4D}" type="slidenum">
               <a:rPr lang="tr-TR" smtClean="0"/>
-              <a:t>2</a:t>
+              <a:t>3</a:t>
             </a:fld>
             <a:endParaRPr lang="tr-TR"/>
           </a:p>
@@ -7109,7 +6893,7 @@
 </file>
 
 <file path=ppt/slides/slide10.xml><?xml version="1.0" encoding="utf-8"?>
-<p:sld xmlns:a="http://schemas.openxmlformats.org/drawingml/2006/main" xmlns:r="http://schemas.openxmlformats.org/officeDocument/2006/relationships" xmlns:p="http://schemas.openxmlformats.org/presentationml/2006/main">
+<p:sld xmlns:a="http://schemas.openxmlformats.org/drawingml/2006/main" xmlns:r="http://schemas.openxmlformats.org/officeDocument/2006/relationships" xmlns:p="http://schemas.openxmlformats.org/presentationml/2006/main" show="0">
   <p:cSld>
     <p:spTree>
       <p:nvGrpSpPr>
@@ -7130,7 +6914,7 @@
           <p:cNvPr id="2" name="Title 1">
             <a:extLst>
               <a:ext uri="{FF2B5EF4-FFF2-40B4-BE49-F238E27FC236}">
-                <a16:creationId xmlns:a16="http://schemas.microsoft.com/office/drawing/2014/main" id="{80AFBEB7-C36F-15BC-7D87-2E120220B3F8}"/>
+                <a16:creationId xmlns:a16="http://schemas.microsoft.com/office/drawing/2014/main" id="{EE4C9AD2-1B67-A3D7-680A-E00FA44CAED6}"/>
               </a:ext>
             </a:extLst>
           </p:cNvPr>
@@ -7143,13 +6927,13 @@
         </p:nvSpPr>
         <p:spPr>
           <a:xfrm>
-            <a:off x="635000" y="343577"/>
-            <a:ext cx="10515600" cy="1325563"/>
+            <a:off x="838200" y="365125"/>
+            <a:ext cx="6588211" cy="1325563"/>
           </a:xfrm>
         </p:spPr>
         <p:txBody>
           <a:bodyPr>
-            <a:normAutofit/>
+            <a:normAutofit fontScale="90000"/>
           </a:bodyPr>
           <a:lstStyle/>
           <a:p>
@@ -7160,21 +6944,237 @@
                   <a:srgbClr val="0F172A"/>
                 </a:solidFill>
               </a:rPr>
-              <a:t>Validation + Execution</a:t>
-            </a:r>
-          </a:p>
-        </p:txBody>
-      </p:sp>
-      <p:sp>
-        <p:nvSpPr>
-          <p:cNvPr id="600" name="Validator"/>
+              <a:t>Live Demo — Console</a:t>
+            </a:r>
+          </a:p>
+        </p:txBody>
+      </p:sp>
+      <p:sp>
+        <p:nvSpPr>
+          <p:cNvPr id="501" name="DemoSub"/>
+          <p:cNvSpPr txBox="1"/>
+          <p:nvPr/>
+        </p:nvSpPr>
+        <p:spPr>
+          <a:xfrm>
+            <a:off x="2794000" y="1429656"/>
+            <a:ext cx="8890000" cy="457200"/>
+          </a:xfrm>
+          <a:prstGeom prst="rect">
+            <a:avLst/>
+          </a:prstGeom>
+          <a:noFill/>
+        </p:spPr>
+        <p:txBody>
+          <a:bodyPr wrap="square" anchor="ctr"/>
+          <a:lstStyle/>
+          <a:p>
+            <a:pPr algn="l"/>
+            <a:r>
+              <a:rPr lang="en-US" sz="2400" dirty="0">
+                <a:solidFill>
+                  <a:srgbClr val="475569"/>
+                </a:solidFill>
+              </a:rPr>
+              <a:t>Visual Studio  &gt;  Chat.Console.OpenAI</a:t>
+            </a:r>
+          </a:p>
+        </p:txBody>
+      </p:sp>
+      <p:sp>
+        <p:nvSpPr>
+          <p:cNvPr id="510" name="Terminal"/>
           <p:cNvSpPr/>
           <p:nvPr/>
         </p:nvSpPr>
         <p:spPr>
           <a:xfrm>
-            <a:off x="635000" y="1669140"/>
-            <a:ext cx="5461000" cy="4191000"/>
+            <a:off x="508000" y="2342240"/>
+            <a:ext cx="7112000" cy="3365500"/>
+          </a:xfrm>
+          <a:prstGeom prst="roundRect">
+            <a:avLst>
+              <a:gd name="adj" fmla="val 4000"/>
+            </a:avLst>
+          </a:prstGeom>
+          <a:solidFill>
+            <a:srgbClr val="0F172A"/>
+          </a:solidFill>
+          <a:ln>
+            <a:noFill/>
+          </a:ln>
+          <a:effectLst>
+            <a:outerShdw blurRad="80000" dist="20000" dir="5400000" algn="t" rotWithShape="0">
+              <a:srgbClr val="0F172A">
+                <a:alpha val="20000"/>
+              </a:srgbClr>
+            </a:outerShdw>
+          </a:effectLst>
+        </p:spPr>
+        <p:txBody>
+          <a:bodyPr wrap="square" lIns="240000" tIns="200000" rIns="240000" bIns="200000" anchor="t"/>
+          <a:lstStyle/>
+          <a:p>
+            <a:pPr algn="l"/>
+            <a:r>
+              <a:rPr lang="en-US" sz="1600" dirty="0">
+                <a:solidFill>
+                  <a:srgbClr val="64748B"/>
+                </a:solidFill>
+                <a:latin typeface="Consolas"/>
+              </a:rPr>
+              <a:t>$ dotnet run</a:t>
+            </a:r>
+          </a:p>
+          <a:p>
+            <a:pPr>
+              <a:spcBef>
+                <a:spcPts val="400"/>
+              </a:spcBef>
+            </a:pPr>
+            <a:r>
+              <a:rPr lang="en-US" sz="1600" dirty="0">
+                <a:solidFill>
+                  <a:srgbClr val="94A3B8"/>
+                </a:solidFill>
+                <a:latin typeface="Consolas"/>
+              </a:rPr>
+              <a:t>Ask your database &gt; </a:t>
+            </a:r>
+            <a:r>
+              <a:rPr lang="en-US" sz="2000" b="1" dirty="0">
+                <a:solidFill>
+                  <a:srgbClr val="22D3EE"/>
+                </a:solidFill>
+                <a:latin typeface="Consolas"/>
+              </a:rPr>
+              <a:t>top 10 customers by revenue</a:t>
+            </a:r>
+          </a:p>
+          <a:p>
+            <a:pPr>
+              <a:spcBef>
+                <a:spcPts val="600"/>
+              </a:spcBef>
+            </a:pPr>
+            <a:r>
+              <a:rPr lang="en-US" sz="1600" dirty="0">
+                <a:solidFill>
+                  <a:srgbClr val="64748B"/>
+                </a:solidFill>
+                <a:latin typeface="Consolas"/>
+              </a:rPr>
+              <a:t>// generated SQL</a:t>
+            </a:r>
+          </a:p>
+          <a:p>
+            <a:pPr>
+              <a:spcBef>
+                <a:spcPts val="300"/>
+              </a:spcBef>
+            </a:pPr>
+            <a:r>
+              <a:rPr lang="en-US" dirty="0">
+                <a:solidFill>
+                  <a:srgbClr val="10B981"/>
+                </a:solidFill>
+                <a:latin typeface="Consolas"/>
+              </a:rPr>
+              <a:t>SELECT TOP 10 c.Name,</a:t>
+            </a:r>
+          </a:p>
+          <a:p>
+            <a:pPr>
+              <a:spcBef>
+                <a:spcPts val="100"/>
+              </a:spcBef>
+            </a:pPr>
+            <a:r>
+              <a:rPr lang="en-US" dirty="0">
+                <a:solidFill>
+                  <a:srgbClr val="10B981"/>
+                </a:solidFill>
+                <a:latin typeface="Consolas"/>
+              </a:rPr>
+              <a:t>       SUM(o.Total) AS Revenue</a:t>
+            </a:r>
+          </a:p>
+          <a:p>
+            <a:pPr>
+              <a:spcBef>
+                <a:spcPts val="100"/>
+              </a:spcBef>
+            </a:pPr>
+            <a:r>
+              <a:rPr lang="en-US" dirty="0">
+                <a:solidFill>
+                  <a:srgbClr val="10B981"/>
+                </a:solidFill>
+                <a:latin typeface="Consolas"/>
+              </a:rPr>
+              <a:t>FROM Customers c</a:t>
+            </a:r>
+          </a:p>
+          <a:p>
+            <a:pPr>
+              <a:spcBef>
+                <a:spcPts val="100"/>
+              </a:spcBef>
+            </a:pPr>
+            <a:r>
+              <a:rPr lang="en-US" dirty="0">
+                <a:solidFill>
+                  <a:srgbClr val="10B981"/>
+                </a:solidFill>
+                <a:latin typeface="Consolas"/>
+              </a:rPr>
+              <a:t>JOIN Orders o ON o.CustomerId=c.Id</a:t>
+            </a:r>
+          </a:p>
+          <a:p>
+            <a:pPr>
+              <a:spcBef>
+                <a:spcPts val="100"/>
+              </a:spcBef>
+            </a:pPr>
+            <a:r>
+              <a:rPr lang="en-US" dirty="0">
+                <a:solidFill>
+                  <a:srgbClr val="10B981"/>
+                </a:solidFill>
+                <a:latin typeface="Consolas"/>
+              </a:rPr>
+              <a:t>GROUP BY c.Name</a:t>
+            </a:r>
+          </a:p>
+          <a:p>
+            <a:pPr>
+              <a:spcBef>
+                <a:spcPts val="100"/>
+              </a:spcBef>
+            </a:pPr>
+            <a:r>
+              <a:rPr lang="en-US" dirty="0">
+                <a:solidFill>
+                  <a:srgbClr val="10B981"/>
+                </a:solidFill>
+                <a:latin typeface="Consolas"/>
+              </a:rPr>
+              <a:t>ORDER BY Revenue DESC;</a:t>
+            </a:r>
+          </a:p>
+        </p:txBody>
+      </p:sp>
+      <p:sp>
+        <p:nvSpPr>
+          <p:cNvPr id="520" name="Trust"/>
+          <p:cNvSpPr/>
+          <p:nvPr/>
+        </p:nvSpPr>
+        <p:spPr>
+          <a:xfrm>
+            <a:off x="7874000" y="2342240"/>
+            <a:ext cx="3810000" cy="3365500"/>
           </a:xfrm>
           <a:prstGeom prst="roundRect">
             <a:avLst>
@@ -7182,46 +7182,72 @@
             </a:avLst>
           </a:prstGeom>
           <a:solidFill>
-            <a:srgbClr val="FFFFFF"/>
+            <a:srgbClr val="FEF3C7"/>
           </a:solidFill>
           <a:ln w="12700">
             <a:solidFill>
-              <a:srgbClr val="FECDD3"/>
+              <a:srgbClr val="FCD34D"/>
             </a:solidFill>
           </a:ln>
         </p:spPr>
         <p:txBody>
-          <a:bodyPr wrap="square" lIns="240000" tIns="200000" rIns="240000" bIns="200000" anchor="t"/>
-          <a:lstStyle/>
-          <a:p>
-            <a:pPr algn="l"/>
-            <a:r>
-              <a:rPr lang="en-US" sz="3600" b="1" dirty="0">
-                <a:solidFill>
-                  <a:srgbClr val="F43F5E"/>
-                </a:solidFill>
-              </a:rPr>
-              <a:t>🛡</a:t>
-            </a:r>
-            <a:r>
-              <a:rPr lang="en-US" b="1" spc="300" dirty="0">
-                <a:solidFill>
-                  <a:srgbClr val="9F1239"/>
-                </a:solidFill>
-              </a:rPr>
-              <a:t>  </a:t>
-            </a:r>
-            <a:r>
-              <a:rPr lang="en-US" sz="2800" b="1" spc="300" dirty="0">
-                <a:solidFill>
-                  <a:srgbClr val="9F1239"/>
-                </a:solidFill>
-              </a:rPr>
-              <a:t>VALIDATE</a:t>
-            </a:r>
-            <a:endParaRPr lang="en-US" b="1" spc="300" dirty="0">
+          <a:bodyPr wrap="square" lIns="220000" tIns="200000" rIns="220000" bIns="200000" anchor="t"/>
+          <a:lstStyle/>
+          <a:p>
+            <a:pPr>
+              <a:spcBef>
+                <a:spcPts val="800"/>
+              </a:spcBef>
+            </a:pPr>
+            <a:r>
+              <a:rPr lang="en-US" sz="3200" b="1" spc="300" dirty="0">
+                <a:solidFill>
+                  <a:srgbClr val="92400E"/>
+                </a:solidFill>
+              </a:rPr>
+              <a:t>⏸</a:t>
+            </a:r>
+            <a:r>
+              <a:rPr lang="en-US" sz="2800" b="1" dirty="0">
+                <a:solidFill>
+                  <a:srgbClr val="0F172A"/>
+                </a:solidFill>
+              </a:rPr>
+              <a:t>Would you </a:t>
+            </a:r>
+            <a:br>
+              <a:rPr lang="en-US" sz="2800" b="1" dirty="0">
+                <a:solidFill>
+                  <a:srgbClr val="0F172A"/>
+                </a:solidFill>
+              </a:rPr>
+            </a:br>
+            <a:r>
+              <a:rPr lang="en-US" sz="2800" b="1" dirty="0">
+                <a:solidFill>
+                  <a:srgbClr val="0F172A"/>
+                </a:solidFill>
+              </a:rPr>
+              <a:t>     run this </a:t>
+            </a:r>
+            <a:br>
+              <a:rPr lang="en-US" sz="2800" b="1" dirty="0">
+                <a:solidFill>
+                  <a:srgbClr val="0F172A"/>
+                </a:solidFill>
+              </a:rPr>
+            </a:br>
+            <a:r>
+              <a:rPr lang="en-US" sz="2800" b="1" dirty="0">
+                <a:solidFill>
+                  <a:srgbClr val="0F172A"/>
+                </a:solidFill>
+              </a:rPr>
+              <a:t>     in production?</a:t>
+            </a:r>
+            <a:endParaRPr lang="en-US" sz="3200" b="1" dirty="0">
               <a:solidFill>
-                <a:srgbClr val="9F1239"/>
+                <a:srgbClr val="0F172A"/>
               </a:solidFill>
             </a:endParaRPr>
           </a:p>
@@ -7231,293 +7257,184 @@
                 <a:spcPts val="400"/>
               </a:spcBef>
             </a:pPr>
-            <a:r>
-              <a:rPr lang="en-US" sz="3600" b="1" dirty="0">
-                <a:solidFill>
-                  <a:srgbClr val="0F172A"/>
-                </a:solidFill>
-              </a:rPr>
-              <a:t>Never trust the LLM</a:t>
-            </a:r>
-          </a:p>
-          <a:p>
-            <a:pPr marL="228600" indent="-228600">
-              <a:spcBef>
-                <a:spcPts val="600"/>
-              </a:spcBef>
-              <a:buClr>
-                <a:srgbClr val="FF0000"/>
-              </a:buClr>
-              <a:buFont typeface="Arial"/>
-              <a:buChar char="✕"/>
-            </a:pPr>
-            <a:r>
-              <a:rPr lang="en-US" sz="2400" dirty="0">
-                <a:solidFill>
-                  <a:srgbClr val="334155"/>
-                </a:solidFill>
-              </a:rPr>
-              <a:t> Block DELETE, UPDATE, DROP</a:t>
-            </a:r>
-          </a:p>
-          <a:p>
-            <a:pPr marL="228600" indent="-228600">
-              <a:spcBef>
-                <a:spcPts val="400"/>
-              </a:spcBef>
-              <a:buClr>
-                <a:srgbClr val="FF0000"/>
-              </a:buClr>
-              <a:buFont typeface="Arial"/>
-              <a:buChar char="✕"/>
-            </a:pPr>
-            <a:r>
-              <a:rPr lang="en-US" sz="2400" dirty="0">
-                <a:solidFill>
-                  <a:srgbClr val="334155"/>
-                </a:solidFill>
-              </a:rPr>
-              <a:t> Block multi-statement queries</a:t>
-            </a:r>
-          </a:p>
-          <a:p>
-            <a:pPr marL="228600" indent="-228600">
-              <a:spcBef>
-                <a:spcPts val="400"/>
-              </a:spcBef>
-              <a:buClr>
-                <a:srgbClr val="00B050"/>
-              </a:buClr>
-              <a:buFont typeface="Arial"/>
-              <a:buChar char="✓"/>
-            </a:pPr>
-            <a:r>
-              <a:rPr lang="en-US" sz="2400" dirty="0">
-                <a:solidFill>
-                  <a:srgbClr val="334155"/>
-                </a:solidFill>
-              </a:rPr>
-              <a:t> Allow only SELECT</a:t>
-            </a:r>
-          </a:p>
-          <a:p>
-            <a:pPr marL="228600" indent="-228600">
-              <a:spcBef>
-                <a:spcPts val="400"/>
-              </a:spcBef>
-              <a:buClr>
-                <a:srgbClr val="00B050"/>
-              </a:buClr>
-              <a:buFont typeface="Arial"/>
-              <a:buChar char="✓"/>
-            </a:pPr>
-            <a:r>
-              <a:rPr lang="en-US" sz="2400" dirty="0">
-                <a:solidFill>
-                  <a:srgbClr val="334155"/>
-                </a:solidFill>
-              </a:rPr>
-              <a:t> Enforce row limits</a:t>
-            </a:r>
-          </a:p>
-          <a:p>
-            <a:pPr marL="228600" indent="-228600">
-              <a:spcBef>
-                <a:spcPts val="400"/>
-              </a:spcBef>
-              <a:buClr>
-                <a:srgbClr val="00B050"/>
-              </a:buClr>
-              <a:buFont typeface="Arial"/>
-              <a:buChar char="✓"/>
-            </a:pPr>
-            <a:r>
-              <a:rPr lang="en-US" sz="2400" dirty="0">
-                <a:solidFill>
-                  <a:srgbClr val="334155"/>
-                </a:solidFill>
-              </a:rPr>
-              <a:t> Sanitize identifiers</a:t>
-            </a:r>
-          </a:p>
-        </p:txBody>
-      </p:sp>
-      <p:sp>
-        <p:nvSpPr>
-          <p:cNvPr id="601" name="Exec"/>
-          <p:cNvSpPr/>
-          <p:nvPr/>
-        </p:nvSpPr>
-        <p:spPr>
-          <a:xfrm>
-            <a:off x="6223000" y="1669140"/>
-            <a:ext cx="5334000" cy="4191000"/>
-          </a:xfrm>
-          <a:prstGeom prst="roundRect">
-            <a:avLst>
-              <a:gd name="adj" fmla="val 6000"/>
-            </a:avLst>
-          </a:prstGeom>
-          <a:solidFill>
-            <a:srgbClr val="FFFFFF"/>
-          </a:solidFill>
-          <a:ln w="12700">
-            <a:solidFill>
-              <a:srgbClr val="A7F3D0"/>
-            </a:solidFill>
-          </a:ln>
-        </p:spPr>
-        <p:txBody>
-          <a:bodyPr wrap="square" lIns="240000" tIns="200000" rIns="240000" bIns="200000" anchor="t"/>
-          <a:lstStyle/>
-          <a:p>
-            <a:pPr algn="l"/>
-            <a:r>
-              <a:rPr lang="en-US" sz="3600" b="1" dirty="0">
-                <a:solidFill>
-                  <a:srgbClr val="10B981"/>
-                </a:solidFill>
-              </a:rPr>
-              <a:t>▶</a:t>
-            </a:r>
-            <a:r>
-              <a:rPr lang="en-US" b="1" spc="300" dirty="0">
-                <a:solidFill>
-                  <a:srgbClr val="047857"/>
-                </a:solidFill>
-              </a:rPr>
-              <a:t>  </a:t>
-            </a:r>
-            <a:r>
-              <a:rPr lang="en-US" sz="2800" b="1" spc="300" dirty="0">
-                <a:solidFill>
-                  <a:srgbClr val="047857"/>
-                </a:solidFill>
-              </a:rPr>
-              <a:t>EXECUTE</a:t>
-            </a:r>
-            <a:endParaRPr lang="en-US" b="1" spc="300" dirty="0">
+            <a:br>
+              <a:rPr lang="en-US" dirty="0">
+                <a:solidFill>
+                  <a:srgbClr val="78350F"/>
+                </a:solidFill>
+              </a:rPr>
+            </a:br>
+            <a:br>
+              <a:rPr lang="en-US" dirty="0">
+                <a:solidFill>
+                  <a:srgbClr val="78350F"/>
+                </a:solidFill>
+              </a:rPr>
+            </a:br>
+            <a:r>
+              <a:rPr lang="en-US" dirty="0">
+                <a:solidFill>
+                  <a:srgbClr val="78350F"/>
+                </a:solidFill>
+              </a:rPr>
+              <a:t>        </a:t>
+            </a:r>
+            <a:r>
+              <a:rPr lang="en-US" sz="2400" b="1" dirty="0">
+                <a:solidFill>
+                  <a:srgbClr val="78350F"/>
+                </a:solidFill>
+              </a:rPr>
+              <a:t>The validator → </a:t>
+            </a:r>
+            <a:endParaRPr lang="en-US" b="1" dirty="0">
               <a:solidFill>
-                <a:srgbClr val="047857"/>
+                <a:srgbClr val="78350F"/>
               </a:solidFill>
             </a:endParaRPr>
           </a:p>
-          <a:p>
-            <a:pPr algn="l">
-              <a:spcBef>
-                <a:spcPts val="400"/>
-              </a:spcBef>
-            </a:pPr>
-            <a:r>
-              <a:rPr lang="en-US" sz="3600" b="1" dirty="0">
-                <a:solidFill>
-                  <a:srgbClr val="0F172A"/>
-                </a:solidFill>
-              </a:rPr>
-              <a:t>Run it, return it</a:t>
-            </a:r>
-          </a:p>
-          <a:p>
-            <a:pPr marL="228600" indent="-228600">
-              <a:spcBef>
-                <a:spcPts val="600"/>
-              </a:spcBef>
-              <a:buFont typeface="Arial"/>
-              <a:buChar char="•"/>
-            </a:pPr>
-            <a:r>
-              <a:rPr lang="en-US" sz="2400" dirty="0">
-                <a:solidFill>
-                  <a:srgbClr val="334155"/>
-                </a:solidFill>
-              </a:rPr>
-              <a:t>Read-only connection</a:t>
-            </a:r>
-          </a:p>
-          <a:p>
-            <a:pPr marL="228600" indent="-228600">
-              <a:spcBef>
-                <a:spcPts val="400"/>
-              </a:spcBef>
-              <a:buFont typeface="Arial"/>
-              <a:buChar char="•"/>
-            </a:pPr>
-            <a:r>
-              <a:rPr lang="en-US" sz="2400" dirty="0">
-                <a:solidFill>
-                  <a:srgbClr val="334155"/>
-                </a:solidFill>
-              </a:rPr>
-              <a:t>Timeout guard</a:t>
-            </a:r>
-          </a:p>
-          <a:p>
-            <a:pPr marL="228600" indent="-228600">
-              <a:spcBef>
-                <a:spcPts val="400"/>
-              </a:spcBef>
-              <a:buFont typeface="Arial"/>
-              <a:buChar char="•"/>
-            </a:pPr>
-            <a:r>
-              <a:rPr lang="en-US" sz="2400" dirty="0">
-                <a:solidFill>
-                  <a:srgbClr val="334155"/>
-                </a:solidFill>
-              </a:rPr>
-              <a:t>Return as structured data</a:t>
-            </a:r>
-          </a:p>
-          <a:p>
-            <a:pPr marL="228600" indent="-228600">
-              <a:spcBef>
-                <a:spcPts val="400"/>
-              </a:spcBef>
-              <a:buFont typeface="Arial"/>
-              <a:buChar char="•"/>
-            </a:pPr>
-            <a:r>
-              <a:rPr lang="en-US" sz="2400" dirty="0">
-                <a:solidFill>
-                  <a:srgbClr val="334155"/>
-                </a:solidFill>
-              </a:rPr>
-              <a:t>Log every query</a:t>
-            </a:r>
-            <a:br>
-              <a:rPr lang="en-US" sz="2400" dirty="0">
-                <a:solidFill>
-                  <a:srgbClr val="334155"/>
-                </a:solidFill>
-              </a:rPr>
-            </a:br>
-            <a:endParaRPr lang="en-US" sz="2400" dirty="0">
-              <a:solidFill>
-                <a:srgbClr val="334155"/>
-              </a:solidFill>
-            </a:endParaRPr>
-          </a:p>
-          <a:p>
-            <a:pPr>
-              <a:spcBef>
-                <a:spcPts val="800"/>
-              </a:spcBef>
-            </a:pPr>
-            <a:r>
-              <a:rPr lang="en-US" i="1" dirty="0">
-                <a:solidFill>
-                  <a:srgbClr val="64748B"/>
-                </a:solidFill>
-              </a:rPr>
-              <a:t>The DB user should only SELECT.</a:t>
-            </a:r>
+        </p:txBody>
+      </p:sp>
+      <p:grpSp>
+        <p:nvGrpSpPr>
+          <p:cNvPr id="9" name="Group 8">
+            <a:extLst>
+              <a:ext uri="{FF2B5EF4-FFF2-40B4-BE49-F238E27FC236}">
+                <a16:creationId xmlns:a16="http://schemas.microsoft.com/office/drawing/2014/main" id="{3FE91529-23A7-B9D9-91A9-CD0F5AB4D505}"/>
+              </a:ext>
+            </a:extLst>
+          </p:cNvPr>
+          <p:cNvGrpSpPr/>
+          <p:nvPr/>
+        </p:nvGrpSpPr>
+        <p:grpSpPr>
+          <a:xfrm>
+            <a:off x="889000" y="1429656"/>
+            <a:ext cx="1651000" cy="457200"/>
+            <a:chOff x="889000" y="1429656"/>
+            <a:chExt cx="1651000" cy="457200"/>
+          </a:xfrm>
+        </p:grpSpPr>
+        <p:sp>
+          <p:nvSpPr>
+            <p:cNvPr id="500" name="LiveBadge"/>
+            <p:cNvSpPr/>
+            <p:nvPr/>
+          </p:nvSpPr>
+          <p:spPr>
+            <a:xfrm>
+              <a:off x="889000" y="1429656"/>
+              <a:ext cx="1651000" cy="457200"/>
+            </a:xfrm>
+            <a:prstGeom prst="roundRect">
+              <a:avLst>
+                <a:gd name="adj" fmla="val 50000"/>
+              </a:avLst>
+            </a:prstGeom>
+            <a:solidFill>
+              <a:srgbClr val="F43F5E"/>
+            </a:solidFill>
+            <a:ln>
+              <a:noFill/>
+            </a:ln>
+          </p:spPr>
+          <p:txBody>
+            <a:bodyPr wrap="square" lIns="91440" tIns="0" rIns="91440" bIns="0" anchor="ctr"/>
+            <a:lstStyle/>
+            <a:p>
+              <a:pPr algn="ctr"/>
+              <a:r>
+                <a:rPr lang="en-US" b="1" spc="300" dirty="0">
+                  <a:solidFill>
+                    <a:srgbClr val="FFFFFF"/>
+                  </a:solidFill>
+                </a:rPr>
+                <a:t>    LIVE</a:t>
+              </a:r>
+            </a:p>
+          </p:txBody>
+        </p:sp>
+        <p:pic>
+          <p:nvPicPr>
+            <p:cNvPr id="8" name="Graphic 7" descr="Presentation with media with solid fill">
+              <a:extLst>
+                <a:ext uri="{FF2B5EF4-FFF2-40B4-BE49-F238E27FC236}">
+                  <a16:creationId xmlns:a16="http://schemas.microsoft.com/office/drawing/2014/main" id="{09202127-A8D4-A00F-7BBA-CB4879194B7F}"/>
+                </a:ext>
+              </a:extLst>
+            </p:cNvPr>
+            <p:cNvPicPr>
+              <a:picLocks noChangeAspect="1"/>
+            </p:cNvPicPr>
+            <p:nvPr/>
+          </p:nvPicPr>
+          <p:blipFill>
+            <a:blip r:embed="rId3">
+              <a:extLst>
+                <a:ext uri="{96DAC541-7B7A-43D3-8B79-37D633B846F1}">
+                  <asvg:svgBlip xmlns:asvg="http://schemas.microsoft.com/office/drawing/2016/SVG/main" r:embed="rId4"/>
+                </a:ext>
+              </a:extLst>
+            </a:blip>
+            <a:stretch>
+              <a:fillRect/>
+            </a:stretch>
+          </p:blipFill>
+          <p:spPr>
+            <a:xfrm>
+              <a:off x="1137503" y="1476895"/>
+              <a:ext cx="394735" cy="394735"/>
+            </a:xfrm>
+            <a:prstGeom prst="rect">
+              <a:avLst/>
+            </a:prstGeom>
+          </p:spPr>
+        </p:pic>
+      </p:grpSp>
+      <p:sp>
+        <p:nvSpPr>
+          <p:cNvPr id="4" name="TextBox 3">
+            <a:extLst>
+              <a:ext uri="{FF2B5EF4-FFF2-40B4-BE49-F238E27FC236}">
+                <a16:creationId xmlns:a16="http://schemas.microsoft.com/office/drawing/2014/main" id="{198970D3-6DAB-B756-8ED7-860209BBE762}"/>
+              </a:ext>
+            </a:extLst>
+          </p:cNvPr>
+          <p:cNvSpPr txBox="1"/>
+          <p:nvPr/>
+        </p:nvSpPr>
+        <p:spPr>
+          <a:xfrm>
+            <a:off x="11076710" y="3590941"/>
+            <a:ext cx="442356" cy="584775"/>
+          </a:xfrm>
+          <a:prstGeom prst="rect">
+            <a:avLst/>
+          </a:prstGeom>
+          <a:noFill/>
+        </p:spPr>
+        <p:txBody>
+          <a:bodyPr wrap="square">
+            <a:spAutoFit/>
+          </a:bodyPr>
+          <a:lstStyle/>
+          <a:p>
+            <a:r>
+              <a:rPr lang="en-US" sz="3200" b="1" spc="300" dirty="0">
+                <a:solidFill>
+                  <a:srgbClr val="92400E"/>
+                </a:solidFill>
+              </a:rPr>
+              <a:t>⏸</a:t>
+            </a:r>
+            <a:endParaRPr lang="en-US" sz="3200" dirty="0"/>
           </a:p>
         </p:txBody>
       </p:sp>
     </p:spTree>
     <p:extLst>
       <p:ext uri="{BB962C8B-B14F-4D97-AF65-F5344CB8AC3E}">
-        <p14:creationId xmlns:p14="http://schemas.microsoft.com/office/powerpoint/2010/main" val="3067230371"/>
+        <p14:creationId xmlns:p14="http://schemas.microsoft.com/office/powerpoint/2010/main" val="3575431292"/>
       </p:ext>
     </p:extLst>
   </p:cSld>
@@ -7546,6 +7463,425 @@
       </p:grpSpPr>
       <p:sp>
         <p:nvSpPr>
+          <p:cNvPr id="2" name="Title 1">
+            <a:extLst>
+              <a:ext uri="{FF2B5EF4-FFF2-40B4-BE49-F238E27FC236}">
+                <a16:creationId xmlns:a16="http://schemas.microsoft.com/office/drawing/2014/main" id="{80AFBEB7-C36F-15BC-7D87-2E120220B3F8}"/>
+              </a:ext>
+            </a:extLst>
+          </p:cNvPr>
+          <p:cNvSpPr>
+            <a:spLocks noGrp="1"/>
+          </p:cNvSpPr>
+          <p:nvPr>
+            <p:ph type="title"/>
+          </p:nvPr>
+        </p:nvSpPr>
+        <p:spPr>
+          <a:xfrm>
+            <a:off x="635000" y="343577"/>
+            <a:ext cx="10515600" cy="1325563"/>
+          </a:xfrm>
+        </p:spPr>
+        <p:txBody>
+          <a:bodyPr>
+            <a:normAutofit/>
+          </a:bodyPr>
+          <a:lstStyle/>
+          <a:p>
+            <a:pPr algn="l"/>
+            <a:r>
+              <a:rPr lang="en-US" sz="4800" b="1" dirty="0">
+                <a:solidFill>
+                  <a:srgbClr val="0F172A"/>
+                </a:solidFill>
+              </a:rPr>
+              <a:t>Validation + Execution</a:t>
+            </a:r>
+          </a:p>
+        </p:txBody>
+      </p:sp>
+      <p:sp>
+        <p:nvSpPr>
+          <p:cNvPr id="600" name="Validator"/>
+          <p:cNvSpPr/>
+          <p:nvPr/>
+        </p:nvSpPr>
+        <p:spPr>
+          <a:xfrm>
+            <a:off x="635000" y="1669140"/>
+            <a:ext cx="5461000" cy="4191000"/>
+          </a:xfrm>
+          <a:prstGeom prst="roundRect">
+            <a:avLst>
+              <a:gd name="adj" fmla="val 6000"/>
+            </a:avLst>
+          </a:prstGeom>
+          <a:solidFill>
+            <a:srgbClr val="FFFFFF"/>
+          </a:solidFill>
+          <a:ln w="12700">
+            <a:solidFill>
+              <a:srgbClr val="FECDD3"/>
+            </a:solidFill>
+          </a:ln>
+        </p:spPr>
+        <p:txBody>
+          <a:bodyPr wrap="square" lIns="240000" tIns="200000" rIns="240000" bIns="200000" anchor="t"/>
+          <a:lstStyle/>
+          <a:p>
+            <a:pPr algn="l"/>
+            <a:r>
+              <a:rPr lang="en-US" sz="3600" b="1" dirty="0">
+                <a:solidFill>
+                  <a:srgbClr val="F43F5E"/>
+                </a:solidFill>
+              </a:rPr>
+              <a:t>🛡</a:t>
+            </a:r>
+            <a:r>
+              <a:rPr lang="en-US" b="1" spc="300" dirty="0">
+                <a:solidFill>
+                  <a:srgbClr val="9F1239"/>
+                </a:solidFill>
+              </a:rPr>
+              <a:t>  </a:t>
+            </a:r>
+            <a:r>
+              <a:rPr lang="en-US" sz="2800" b="1" spc="300" dirty="0">
+                <a:solidFill>
+                  <a:srgbClr val="9F1239"/>
+                </a:solidFill>
+              </a:rPr>
+              <a:t>VALIDATE</a:t>
+            </a:r>
+            <a:endParaRPr lang="en-US" b="1" spc="300" dirty="0">
+              <a:solidFill>
+                <a:srgbClr val="9F1239"/>
+              </a:solidFill>
+            </a:endParaRPr>
+          </a:p>
+          <a:p>
+            <a:pPr algn="l">
+              <a:spcBef>
+                <a:spcPts val="400"/>
+              </a:spcBef>
+            </a:pPr>
+            <a:r>
+              <a:rPr lang="en-US" sz="3600" b="1" dirty="0">
+                <a:solidFill>
+                  <a:srgbClr val="0F172A"/>
+                </a:solidFill>
+              </a:rPr>
+              <a:t>Never trust the LLM</a:t>
+            </a:r>
+          </a:p>
+          <a:p>
+            <a:pPr marL="228600" indent="-228600">
+              <a:spcBef>
+                <a:spcPts val="600"/>
+              </a:spcBef>
+              <a:buClr>
+                <a:srgbClr val="FF0000"/>
+              </a:buClr>
+              <a:buFont typeface="Arial"/>
+              <a:buChar char="✕"/>
+            </a:pPr>
+            <a:r>
+              <a:rPr lang="en-US" sz="2400" dirty="0">
+                <a:solidFill>
+                  <a:srgbClr val="334155"/>
+                </a:solidFill>
+              </a:rPr>
+              <a:t> Block DELETE, UPDATE, DROP</a:t>
+            </a:r>
+          </a:p>
+          <a:p>
+            <a:pPr marL="228600" indent="-228600">
+              <a:spcBef>
+                <a:spcPts val="400"/>
+              </a:spcBef>
+              <a:buClr>
+                <a:srgbClr val="FF0000"/>
+              </a:buClr>
+              <a:buFont typeface="Arial"/>
+              <a:buChar char="✕"/>
+            </a:pPr>
+            <a:r>
+              <a:rPr lang="en-US" sz="2400" dirty="0">
+                <a:solidFill>
+                  <a:srgbClr val="334155"/>
+                </a:solidFill>
+              </a:rPr>
+              <a:t> Block multi-statement queries</a:t>
+            </a:r>
+          </a:p>
+          <a:p>
+            <a:pPr marL="228600" indent="-228600">
+              <a:spcBef>
+                <a:spcPts val="400"/>
+              </a:spcBef>
+              <a:buClr>
+                <a:srgbClr val="00B050"/>
+              </a:buClr>
+              <a:buFont typeface="Arial"/>
+              <a:buChar char="✓"/>
+            </a:pPr>
+            <a:r>
+              <a:rPr lang="en-US" sz="2400" dirty="0">
+                <a:solidFill>
+                  <a:srgbClr val="334155"/>
+                </a:solidFill>
+              </a:rPr>
+              <a:t> Allow only SELECT</a:t>
+            </a:r>
+          </a:p>
+          <a:p>
+            <a:pPr marL="228600" indent="-228600">
+              <a:spcBef>
+                <a:spcPts val="400"/>
+              </a:spcBef>
+              <a:buClr>
+                <a:srgbClr val="00B050"/>
+              </a:buClr>
+              <a:buFont typeface="Arial"/>
+              <a:buChar char="✓"/>
+            </a:pPr>
+            <a:r>
+              <a:rPr lang="en-US" sz="2400" dirty="0">
+                <a:solidFill>
+                  <a:srgbClr val="334155"/>
+                </a:solidFill>
+              </a:rPr>
+              <a:t> Enforce row limits</a:t>
+            </a:r>
+          </a:p>
+          <a:p>
+            <a:pPr marL="228600" indent="-228600">
+              <a:spcBef>
+                <a:spcPts val="400"/>
+              </a:spcBef>
+              <a:buClr>
+                <a:srgbClr val="00B050"/>
+              </a:buClr>
+              <a:buFont typeface="Arial"/>
+              <a:buChar char="✓"/>
+            </a:pPr>
+            <a:r>
+              <a:rPr lang="en-US" sz="2400" dirty="0">
+                <a:solidFill>
+                  <a:srgbClr val="334155"/>
+                </a:solidFill>
+              </a:rPr>
+              <a:t> Sanitize identifiers</a:t>
+            </a:r>
+          </a:p>
+        </p:txBody>
+      </p:sp>
+      <p:sp>
+        <p:nvSpPr>
+          <p:cNvPr id="601" name="Exec"/>
+          <p:cNvSpPr/>
+          <p:nvPr/>
+        </p:nvSpPr>
+        <p:spPr>
+          <a:xfrm>
+            <a:off x="6223000" y="1669140"/>
+            <a:ext cx="5334000" cy="4191000"/>
+          </a:xfrm>
+          <a:prstGeom prst="roundRect">
+            <a:avLst>
+              <a:gd name="adj" fmla="val 6000"/>
+            </a:avLst>
+          </a:prstGeom>
+          <a:solidFill>
+            <a:srgbClr val="FFFFFF"/>
+          </a:solidFill>
+          <a:ln w="12700">
+            <a:solidFill>
+              <a:srgbClr val="A7F3D0"/>
+            </a:solidFill>
+          </a:ln>
+        </p:spPr>
+        <p:txBody>
+          <a:bodyPr wrap="square" lIns="240000" tIns="200000" rIns="240000" bIns="200000" anchor="t"/>
+          <a:lstStyle/>
+          <a:p>
+            <a:pPr algn="l"/>
+            <a:r>
+              <a:rPr lang="en-US" sz="3600" b="1" dirty="0">
+                <a:solidFill>
+                  <a:srgbClr val="10B981"/>
+                </a:solidFill>
+              </a:rPr>
+              <a:t>▶</a:t>
+            </a:r>
+            <a:r>
+              <a:rPr lang="en-US" b="1" spc="300" dirty="0">
+                <a:solidFill>
+                  <a:srgbClr val="047857"/>
+                </a:solidFill>
+              </a:rPr>
+              <a:t>  </a:t>
+            </a:r>
+            <a:r>
+              <a:rPr lang="en-US" sz="2800" b="1" spc="300" dirty="0">
+                <a:solidFill>
+                  <a:srgbClr val="047857"/>
+                </a:solidFill>
+              </a:rPr>
+              <a:t>EXECUTE</a:t>
+            </a:r>
+            <a:endParaRPr lang="en-US" b="1" spc="300" dirty="0">
+              <a:solidFill>
+                <a:srgbClr val="047857"/>
+              </a:solidFill>
+            </a:endParaRPr>
+          </a:p>
+          <a:p>
+            <a:pPr algn="l">
+              <a:spcBef>
+                <a:spcPts val="400"/>
+              </a:spcBef>
+            </a:pPr>
+            <a:r>
+              <a:rPr lang="en-US" sz="3600" b="1" dirty="0">
+                <a:solidFill>
+                  <a:srgbClr val="0F172A"/>
+                </a:solidFill>
+              </a:rPr>
+              <a:t>Run it, return it</a:t>
+            </a:r>
+          </a:p>
+          <a:p>
+            <a:pPr marL="228600" indent="-228600">
+              <a:spcBef>
+                <a:spcPts val="600"/>
+              </a:spcBef>
+              <a:buFont typeface="Arial"/>
+              <a:buChar char="•"/>
+            </a:pPr>
+            <a:r>
+              <a:rPr lang="en-US" sz="2400" dirty="0">
+                <a:solidFill>
+                  <a:srgbClr val="334155"/>
+                </a:solidFill>
+              </a:rPr>
+              <a:t>Read-only connection</a:t>
+            </a:r>
+          </a:p>
+          <a:p>
+            <a:pPr marL="228600" indent="-228600">
+              <a:spcBef>
+                <a:spcPts val="400"/>
+              </a:spcBef>
+              <a:buFont typeface="Arial"/>
+              <a:buChar char="•"/>
+            </a:pPr>
+            <a:r>
+              <a:rPr lang="en-US" sz="2400" dirty="0">
+                <a:solidFill>
+                  <a:srgbClr val="334155"/>
+                </a:solidFill>
+              </a:rPr>
+              <a:t>Timeout guard</a:t>
+            </a:r>
+          </a:p>
+          <a:p>
+            <a:pPr marL="228600" indent="-228600">
+              <a:spcBef>
+                <a:spcPts val="400"/>
+              </a:spcBef>
+              <a:buFont typeface="Arial"/>
+              <a:buChar char="•"/>
+            </a:pPr>
+            <a:r>
+              <a:rPr lang="en-US" sz="2400" dirty="0">
+                <a:solidFill>
+                  <a:srgbClr val="334155"/>
+                </a:solidFill>
+              </a:rPr>
+              <a:t>Return as structured data</a:t>
+            </a:r>
+          </a:p>
+          <a:p>
+            <a:pPr marL="228600" indent="-228600">
+              <a:spcBef>
+                <a:spcPts val="400"/>
+              </a:spcBef>
+              <a:buFont typeface="Arial"/>
+              <a:buChar char="•"/>
+            </a:pPr>
+            <a:r>
+              <a:rPr lang="en-US" sz="2400" dirty="0">
+                <a:solidFill>
+                  <a:srgbClr val="334155"/>
+                </a:solidFill>
+              </a:rPr>
+              <a:t>Log every query</a:t>
+            </a:r>
+            <a:br>
+              <a:rPr lang="en-US" sz="2400" dirty="0">
+                <a:solidFill>
+                  <a:srgbClr val="334155"/>
+                </a:solidFill>
+              </a:rPr>
+            </a:br>
+            <a:endParaRPr lang="en-US" sz="2400" dirty="0">
+              <a:solidFill>
+                <a:srgbClr val="334155"/>
+              </a:solidFill>
+            </a:endParaRPr>
+          </a:p>
+          <a:p>
+            <a:pPr>
+              <a:spcBef>
+                <a:spcPts val="800"/>
+              </a:spcBef>
+            </a:pPr>
+            <a:r>
+              <a:rPr lang="en-US" i="1" dirty="0">
+                <a:solidFill>
+                  <a:srgbClr val="64748B"/>
+                </a:solidFill>
+              </a:rPr>
+              <a:t>The DB user should only SELECT.</a:t>
+            </a:r>
+          </a:p>
+        </p:txBody>
+      </p:sp>
+    </p:spTree>
+    <p:extLst>
+      <p:ext uri="{BB962C8B-B14F-4D97-AF65-F5344CB8AC3E}">
+        <p14:creationId xmlns:p14="http://schemas.microsoft.com/office/powerpoint/2010/main" val="3067230371"/>
+      </p:ext>
+    </p:extLst>
+  </p:cSld>
+  <p:clrMapOvr>
+    <a:masterClrMapping/>
+  </p:clrMapOvr>
+</p:sld>
+</file>
+
+<file path=ppt/slides/slide12.xml><?xml version="1.0" encoding="utf-8"?>
+<p:sld xmlns:a="http://schemas.openxmlformats.org/drawingml/2006/main" xmlns:r="http://schemas.openxmlformats.org/officeDocument/2006/relationships" xmlns:p="http://schemas.openxmlformats.org/presentationml/2006/main">
+  <p:cSld>
+    <p:spTree>
+      <p:nvGrpSpPr>
+        <p:cNvPr id="1" name=""/>
+        <p:cNvGrpSpPr/>
+        <p:nvPr/>
+      </p:nvGrpSpPr>
+      <p:grpSpPr>
+        <a:xfrm>
+          <a:off x="0" y="0"/>
+          <a:ext cx="0" cy="0"/>
+          <a:chOff x="0" y="0"/>
+          <a:chExt cx="0" cy="0"/>
+        </a:xfrm>
+      </p:grpSpPr>
+      <p:sp>
+        <p:nvSpPr>
           <p:cNvPr id="700" name="BG"/>
           <p:cNvSpPr/>
           <p:nvPr/>
@@ -7685,7 +8021,7 @@
 </p:sld>
 </file>
 
-<file path=ppt/slides/slide12.xml><?xml version="1.0" encoding="utf-8"?>
+<file path=ppt/slides/slide13.xml><?xml version="1.0" encoding="utf-8"?>
 <p:sld xmlns:a="http://schemas.openxmlformats.org/drawingml/2006/main" xmlns:r="http://schemas.openxmlformats.org/officeDocument/2006/relationships" xmlns:p="http://schemas.openxmlformats.org/presentationml/2006/main" show="0">
   <p:cSld>
     <p:spTree>
@@ -8463,7 +8799,7 @@
 </p:sld>
 </file>
 
-<file path=ppt/slides/slide13.xml><?xml version="1.0" encoding="utf-8"?>
+<file path=ppt/slides/slide14.xml><?xml version="1.0" encoding="utf-8"?>
 <p:sld xmlns:a="http://schemas.openxmlformats.org/drawingml/2006/main" xmlns:r="http://schemas.openxmlformats.org/officeDocument/2006/relationships" xmlns:p="http://schemas.openxmlformats.org/presentationml/2006/main">
   <p:cSld>
     <p:spTree>
@@ -8737,7 +9073,7 @@
 </p:sld>
 </file>
 
-<file path=ppt/slides/slide14.xml><?xml version="1.0" encoding="utf-8"?>
+<file path=ppt/slides/slide15.xml><?xml version="1.0" encoding="utf-8"?>
 <p:sld xmlns:a="http://schemas.openxmlformats.org/drawingml/2006/main" xmlns:r="http://schemas.openxmlformats.org/officeDocument/2006/relationships" xmlns:p="http://schemas.openxmlformats.org/presentationml/2006/main" show="0">
   <p:cSld>
     <p:spTree>
@@ -9149,7 +9485,7 @@
 </p:sld>
 </file>
 
-<file path=ppt/slides/slide15.xml><?xml version="1.0" encoding="utf-8"?>
+<file path=ppt/slides/slide16.xml><?xml version="1.0" encoding="utf-8"?>
 <p:sld xmlns:a="http://schemas.openxmlformats.org/drawingml/2006/main" xmlns:r="http://schemas.openxmlformats.org/officeDocument/2006/relationships" xmlns:p="http://schemas.openxmlformats.org/presentationml/2006/main">
   <p:cSld>
     <p:spTree>
@@ -9701,461 +10037,6 @@
 </p:sld>
 </file>
 
-<file path=ppt/slides/slide16.xml><?xml version="1.0" encoding="utf-8"?>
-<p:sld xmlns:a="http://schemas.openxmlformats.org/drawingml/2006/main" xmlns:r="http://schemas.openxmlformats.org/officeDocument/2006/relationships" xmlns:p="http://schemas.openxmlformats.org/presentationml/2006/main" show="0">
-  <p:cSld>
-    <p:spTree>
-      <p:nvGrpSpPr>
-        <p:cNvPr id="1" name=""/>
-        <p:cNvGrpSpPr/>
-        <p:nvPr/>
-      </p:nvGrpSpPr>
-      <p:grpSpPr>
-        <a:xfrm>
-          <a:off x="0" y="0"/>
-          <a:ext cx="0" cy="0"/>
-          <a:chOff x="0" y="0"/>
-          <a:chExt cx="0" cy="0"/>
-        </a:xfrm>
-      </p:grpSpPr>
-      <p:sp>
-        <p:nvSpPr>
-          <p:cNvPr id="2" name="Title 1">
-            <a:extLst>
-              <a:ext uri="{FF2B5EF4-FFF2-40B4-BE49-F238E27FC236}">
-                <a16:creationId xmlns:a16="http://schemas.microsoft.com/office/drawing/2014/main" id="{CF81DA7E-317D-1151-40A8-0BFF0DA66D28}"/>
-              </a:ext>
-            </a:extLst>
-          </p:cNvPr>
-          <p:cNvSpPr>
-            <a:spLocks noGrp="1"/>
-          </p:cNvSpPr>
-          <p:nvPr>
-            <p:ph type="title"/>
-          </p:nvPr>
-        </p:nvSpPr>
-        <p:spPr>
-          <a:xfrm>
-            <a:off x="647700" y="353218"/>
-            <a:ext cx="10909300" cy="1325563"/>
-          </a:xfrm>
-        </p:spPr>
-        <p:txBody>
-          <a:bodyPr>
-            <a:normAutofit fontScale="90000"/>
-          </a:bodyPr>
-          <a:lstStyle/>
-          <a:p>
-            <a:r>
-              <a:rPr lang="en-US" sz="4800" b="1" dirty="0">
-                <a:solidFill>
-                  <a:srgbClr val="0F172A"/>
-                </a:solidFill>
-              </a:rPr>
-              <a:t>Same Backend, </a:t>
-            </a:r>
-            <a:r>
-              <a:rPr lang="en-US" sz="4800" dirty="0">
-                <a:solidFill>
-                  <a:srgbClr val="0F172A"/>
-                </a:solidFill>
-              </a:rPr>
-              <a:t>Closer to a </a:t>
-            </a:r>
-            <a:r>
-              <a:rPr lang="en-US" sz="4800" b="1" dirty="0"/>
-              <a:t>Real Product</a:t>
-            </a:r>
-            <a:endParaRPr lang="en-US" sz="4800" b="1" dirty="0">
-              <a:solidFill>
-                <a:srgbClr val="0F172A"/>
-              </a:solidFill>
-            </a:endParaRPr>
-          </a:p>
-        </p:txBody>
-      </p:sp>
-      <p:sp>
-        <p:nvSpPr>
-          <p:cNvPr id="1100" name="F"/>
-          <p:cNvSpPr/>
-          <p:nvPr/>
-        </p:nvSpPr>
-        <p:spPr>
-          <a:xfrm>
-            <a:off x="635000" y="1778000"/>
-            <a:ext cx="2540000" cy="2159000"/>
-          </a:xfrm>
-          <a:prstGeom prst="roundRect">
-            <a:avLst>
-              <a:gd name="adj" fmla="val 6000"/>
-            </a:avLst>
-          </a:prstGeom>
-          <a:solidFill>
-            <a:srgbClr val="FFFFFF"/>
-          </a:solidFill>
-          <a:ln w="12700">
-            <a:solidFill>
-              <a:srgbClr val="E2E8F0"/>
-            </a:solidFill>
-          </a:ln>
-        </p:spPr>
-        <p:txBody>
-          <a:bodyPr wrap="square" lIns="180000" tIns="220000" rIns="180000" bIns="180000" anchor="t"/>
-          <a:lstStyle/>
-          <a:p>
-            <a:pPr algn="l"/>
-            <a:r>
-              <a:rPr lang="en-US" sz="4800" b="1" dirty="0">
-                <a:solidFill>
-                  <a:srgbClr val="F43F5E"/>
-                </a:solidFill>
-              </a:rPr>
-              <a:t>🎤</a:t>
-            </a:r>
-          </a:p>
-          <a:p>
-            <a:pPr algn="l">
-              <a:spcBef>
-                <a:spcPts val="600"/>
-              </a:spcBef>
-            </a:pPr>
-            <a:r>
-              <a:rPr lang="en-US" sz="2800" b="1" dirty="0">
-                <a:solidFill>
-                  <a:srgbClr val="0F172A"/>
-                </a:solidFill>
-              </a:rPr>
-              <a:t>Voice input</a:t>
-            </a:r>
-          </a:p>
-          <a:p>
-            <a:pPr algn="l">
-              <a:spcBef>
-                <a:spcPts val="300"/>
-              </a:spcBef>
-            </a:pPr>
-            <a:r>
-              <a:rPr lang="en-US" sz="2000" dirty="0">
-                <a:solidFill>
-                  <a:srgbClr val="64748B"/>
-                </a:solidFill>
-              </a:rPr>
-              <a:t>Talk to your data</a:t>
-            </a:r>
-          </a:p>
-        </p:txBody>
-      </p:sp>
-      <p:sp>
-        <p:nvSpPr>
-          <p:cNvPr id="1101" name="F"/>
-          <p:cNvSpPr/>
-          <p:nvPr/>
-        </p:nvSpPr>
-        <p:spPr>
-          <a:xfrm>
-            <a:off x="3365499" y="1778000"/>
-            <a:ext cx="2540001" cy="2159000"/>
-          </a:xfrm>
-          <a:prstGeom prst="roundRect">
-            <a:avLst>
-              <a:gd name="adj" fmla="val 6000"/>
-            </a:avLst>
-          </a:prstGeom>
-          <a:solidFill>
-            <a:srgbClr val="FFFFFF"/>
-          </a:solidFill>
-          <a:ln w="12700">
-            <a:solidFill>
-              <a:srgbClr val="E2E8F0"/>
-            </a:solidFill>
-          </a:ln>
-        </p:spPr>
-        <p:txBody>
-          <a:bodyPr wrap="square" lIns="180000" tIns="220000" rIns="180000" bIns="180000" anchor="t"/>
-          <a:lstStyle/>
-          <a:p>
-            <a:pPr algn="l"/>
-            <a:r>
-              <a:rPr lang="en-US" sz="4400" b="1" dirty="0">
-                <a:solidFill>
-                  <a:srgbClr val="22D3EE"/>
-                </a:solidFill>
-              </a:rPr>
-              <a:t>⚡</a:t>
-            </a:r>
-          </a:p>
-          <a:p>
-            <a:pPr algn="l">
-              <a:spcBef>
-                <a:spcPts val="600"/>
-              </a:spcBef>
-            </a:pPr>
-            <a:r>
-              <a:rPr lang="en-US" sz="2800" b="1" dirty="0">
-                <a:solidFill>
-                  <a:srgbClr val="0F172A"/>
-                </a:solidFill>
-              </a:rPr>
-              <a:t>Live query</a:t>
-            </a:r>
-          </a:p>
-          <a:p>
-            <a:pPr algn="l">
-              <a:spcBef>
-                <a:spcPts val="300"/>
-              </a:spcBef>
-            </a:pPr>
-            <a:r>
-              <a:rPr lang="en-US" sz="2000" dirty="0">
-                <a:solidFill>
-                  <a:srgbClr val="64748B"/>
-                </a:solidFill>
-              </a:rPr>
-              <a:t>Real-time to SQL</a:t>
-            </a:r>
-          </a:p>
-        </p:txBody>
-      </p:sp>
-      <p:sp>
-        <p:nvSpPr>
-          <p:cNvPr id="1102" name="F"/>
-          <p:cNvSpPr/>
-          <p:nvPr/>
-        </p:nvSpPr>
-        <p:spPr>
-          <a:xfrm>
-            <a:off x="6096000" y="1778000"/>
-            <a:ext cx="2540000" cy="2159000"/>
-          </a:xfrm>
-          <a:prstGeom prst="roundRect">
-            <a:avLst>
-              <a:gd name="adj" fmla="val 6000"/>
-            </a:avLst>
-          </a:prstGeom>
-          <a:solidFill>
-            <a:srgbClr val="FFFFFF"/>
-          </a:solidFill>
-          <a:ln w="12700">
-            <a:solidFill>
-              <a:srgbClr val="E2E8F0"/>
-            </a:solidFill>
-          </a:ln>
-        </p:spPr>
-        <p:txBody>
-          <a:bodyPr wrap="square" lIns="180000" tIns="220000" rIns="180000" bIns="180000" anchor="t"/>
-          <a:lstStyle/>
-          <a:p>
-            <a:pPr algn="l"/>
-            <a:r>
-              <a:rPr lang="en-US" sz="4800" b="1" dirty="0">
-                <a:solidFill>
-                  <a:srgbClr val="6366F1"/>
-                </a:solidFill>
-              </a:rPr>
-              <a:t>📊</a:t>
-            </a:r>
-          </a:p>
-          <a:p>
-            <a:pPr algn="l">
-              <a:spcBef>
-                <a:spcPts val="600"/>
-              </a:spcBef>
-            </a:pPr>
-            <a:r>
-              <a:rPr lang="en-US" sz="2800" b="1" dirty="0">
-                <a:solidFill>
-                  <a:srgbClr val="0F172A"/>
-                </a:solidFill>
-              </a:rPr>
-              <a:t>Charts</a:t>
-            </a:r>
-          </a:p>
-          <a:p>
-            <a:pPr algn="l">
-              <a:spcBef>
-                <a:spcPts val="300"/>
-              </a:spcBef>
-            </a:pPr>
-            <a:r>
-              <a:rPr lang="en-US" sz="2000" dirty="0">
-                <a:solidFill>
-                  <a:srgbClr val="64748B"/>
-                </a:solidFill>
-              </a:rPr>
-              <a:t>Visualize results</a:t>
-            </a:r>
-          </a:p>
-        </p:txBody>
-      </p:sp>
-      <p:sp>
-        <p:nvSpPr>
-          <p:cNvPr id="1103" name="F"/>
-          <p:cNvSpPr/>
-          <p:nvPr/>
-        </p:nvSpPr>
-        <p:spPr>
-          <a:xfrm>
-            <a:off x="8826500" y="1778000"/>
-            <a:ext cx="2730500" cy="2159000"/>
-          </a:xfrm>
-          <a:prstGeom prst="roundRect">
-            <a:avLst>
-              <a:gd name="adj" fmla="val 6000"/>
-            </a:avLst>
-          </a:prstGeom>
-          <a:solidFill>
-            <a:srgbClr val="FFFFFF"/>
-          </a:solidFill>
-          <a:ln w="12700">
-            <a:solidFill>
-              <a:srgbClr val="E2E8F0"/>
-            </a:solidFill>
-          </a:ln>
-        </p:spPr>
-        <p:txBody>
-          <a:bodyPr wrap="square" lIns="180000" tIns="220000" rIns="180000" bIns="180000" anchor="t"/>
-          <a:lstStyle/>
-          <a:p>
-            <a:pPr algn="l"/>
-            <a:r>
-              <a:rPr lang="en-US" sz="4800" b="1" dirty="0">
-                <a:solidFill>
-                  <a:srgbClr val="10B981"/>
-                </a:solidFill>
-              </a:rPr>
-              <a:t>📄</a:t>
-            </a:r>
-          </a:p>
-          <a:p>
-            <a:pPr algn="l">
-              <a:spcBef>
-                <a:spcPts val="600"/>
-              </a:spcBef>
-            </a:pPr>
-            <a:r>
-              <a:rPr lang="en-US" sz="2800" b="1" dirty="0">
-                <a:solidFill>
-                  <a:srgbClr val="0F172A"/>
-                </a:solidFill>
-              </a:rPr>
-              <a:t>Excel</a:t>
-            </a:r>
-          </a:p>
-          <a:p>
-            <a:pPr algn="l">
-              <a:spcBef>
-                <a:spcPts val="300"/>
-              </a:spcBef>
-            </a:pPr>
-            <a:r>
-              <a:rPr lang="en-US" sz="2000" dirty="0">
-                <a:solidFill>
-                  <a:srgbClr val="64748B"/>
-                </a:solidFill>
-              </a:rPr>
-              <a:t>One click to report</a:t>
-            </a:r>
-          </a:p>
-        </p:txBody>
-      </p:sp>
-      <p:sp>
-        <p:nvSpPr>
-          <p:cNvPr id="1110" name="Banner"/>
-          <p:cNvSpPr/>
-          <p:nvPr/>
-        </p:nvSpPr>
-        <p:spPr>
-          <a:xfrm>
-            <a:off x="635000" y="4318000"/>
-            <a:ext cx="10731500" cy="1524000"/>
-          </a:xfrm>
-          <a:prstGeom prst="roundRect">
-            <a:avLst>
-              <a:gd name="adj" fmla="val 6000"/>
-            </a:avLst>
-          </a:prstGeom>
-          <a:solidFill>
-            <a:srgbClr val="0F172A"/>
-          </a:solidFill>
-          <a:ln>
-            <a:noFill/>
-          </a:ln>
-        </p:spPr>
-        <p:txBody>
-          <a:bodyPr wrap="square" lIns="280000" tIns="200000" rIns="280000" bIns="200000" anchor="ctr"/>
-          <a:lstStyle/>
-          <a:p>
-            <a:pPr algn="l"/>
-            <a:r>
-              <a:rPr lang="en-US" sz="1400" b="1" spc="300" dirty="0">
-                <a:solidFill>
-                  <a:srgbClr val="22D3EE"/>
-                </a:solidFill>
-              </a:rPr>
-              <a:t>THE BACKEND DIDN'T CHANGE.</a:t>
-            </a:r>
-          </a:p>
-          <a:p>
-            <a:pPr algn="l">
-              <a:spcBef>
-                <a:spcPts val="400"/>
-              </a:spcBef>
-            </a:pPr>
-            <a:r>
-              <a:rPr lang="en-US" sz="2400" dirty="0">
-                <a:solidFill>
-                  <a:srgbClr val="FFFFFF"/>
-                </a:solidFill>
-              </a:rPr>
-              <a:t>Blazor reuses the exact same module. </a:t>
-            </a:r>
-            <a:br>
-              <a:rPr lang="en-US" sz="2400" dirty="0">
-                <a:solidFill>
-                  <a:srgbClr val="FFFFFF"/>
-                </a:solidFill>
-              </a:rPr>
-            </a:br>
-            <a:r>
-              <a:rPr lang="en-US" sz="2400" dirty="0">
-                <a:solidFill>
-                  <a:srgbClr val="FFFFFF"/>
-                </a:solidFill>
-              </a:rPr>
-              <a:t>The frontend is where </a:t>
-            </a:r>
-            <a:r>
-              <a:rPr lang="en-US" sz="2400" i="1" dirty="0">
-                <a:solidFill>
-                  <a:srgbClr val="22D3EE"/>
-                </a:solidFill>
-              </a:rPr>
-              <a:t>the product</a:t>
-            </a:r>
-            <a:r>
-              <a:rPr lang="en-US" sz="2400" dirty="0">
-                <a:solidFill>
-                  <a:srgbClr val="FFFFFF"/>
-                </a:solidFill>
-              </a:rPr>
-              <a:t> lives.</a:t>
-            </a:r>
-          </a:p>
-        </p:txBody>
-      </p:sp>
-    </p:spTree>
-    <p:extLst>
-      <p:ext uri="{BB962C8B-B14F-4D97-AF65-F5344CB8AC3E}">
-        <p14:creationId xmlns:p14="http://schemas.microsoft.com/office/powerpoint/2010/main" val="4276252591"/>
-      </p:ext>
-    </p:extLst>
-  </p:cSld>
-  <p:clrMapOvr>
-    <a:masterClrMapping/>
-  </p:clrMapOvr>
-</p:sld>
-</file>
-
 <file path=ppt/slides/slide17.xml><?xml version="1.0" encoding="utf-8"?>
 <p:sld xmlns:a="http://schemas.openxmlformats.org/drawingml/2006/main" xmlns:r="http://schemas.openxmlformats.org/officeDocument/2006/relationships" xmlns:p="http://schemas.openxmlformats.org/presentationml/2006/main" show="0">
   <p:cSld>
@@ -10178,7 +10059,7 @@
           <p:cNvPr id="2" name="Title 1">
             <a:extLst>
               <a:ext uri="{FF2B5EF4-FFF2-40B4-BE49-F238E27FC236}">
-                <a16:creationId xmlns:a16="http://schemas.microsoft.com/office/drawing/2014/main" id="{74528FAF-AB4F-A00A-4E74-5574F01509F7}"/>
+                <a16:creationId xmlns:a16="http://schemas.microsoft.com/office/drawing/2014/main" id="{CF81DA7E-317D-1151-40A8-0BFF0DA66D28}"/>
               </a:ext>
             </a:extLst>
           </p:cNvPr>
@@ -10191,42 +10072,58 @@
         </p:nvSpPr>
         <p:spPr>
           <a:xfrm>
-            <a:off x="635000" y="357434"/>
-            <a:ext cx="10515600" cy="1325563"/>
+            <a:off x="647700" y="353218"/>
+            <a:ext cx="10909300" cy="1325563"/>
           </a:xfrm>
         </p:spPr>
         <p:txBody>
           <a:bodyPr>
-            <a:normAutofit/>
+            <a:normAutofit fontScale="90000"/>
           </a:bodyPr>
           <a:lstStyle/>
           <a:p>
-            <a:pPr algn="l"/>
             <a:r>
               <a:rPr lang="en-US" sz="4800" b="1" dirty="0">
                 <a:solidFill>
                   <a:srgbClr val="0F172A"/>
                 </a:solidFill>
               </a:rPr>
-              <a:t>The LLM is 20% of the work. </a:t>
-            </a:r>
-          </a:p>
-        </p:txBody>
-      </p:sp>
-      <p:sp>
-        <p:nvSpPr>
-          <p:cNvPr id="1300" name="P"/>
+              <a:t>Same Backend, </a:t>
+            </a:r>
+            <a:r>
+              <a:rPr lang="en-US" sz="4800" dirty="0">
+                <a:solidFill>
+                  <a:srgbClr val="0F172A"/>
+                </a:solidFill>
+              </a:rPr>
+              <a:t>Closer to a </a:t>
+            </a:r>
+            <a:r>
+              <a:rPr lang="en-US" sz="4800" b="1" dirty="0"/>
+              <a:t>Real Product</a:t>
+            </a:r>
+            <a:endParaRPr lang="en-US" sz="4800" b="1" dirty="0">
+              <a:solidFill>
+                <a:srgbClr val="0F172A"/>
+              </a:solidFill>
+            </a:endParaRPr>
+          </a:p>
+        </p:txBody>
+      </p:sp>
+      <p:sp>
+        <p:nvSpPr>
+          <p:cNvPr id="1100" name="F"/>
           <p:cNvSpPr/>
           <p:nvPr/>
         </p:nvSpPr>
         <p:spPr>
           <a:xfrm>
             <a:off x="635000" y="1778000"/>
-            <a:ext cx="3492500" cy="3340265"/>
+            <a:ext cx="2540000" cy="2159000"/>
           </a:xfrm>
           <a:prstGeom prst="roundRect">
             <a:avLst>
-              <a:gd name="adj" fmla="val 5000"/>
+              <a:gd name="adj" fmla="val 6000"/>
             </a:avLst>
           </a:prstGeom>
           <a:solidFill>
@@ -10239,32 +10136,17 @@
           </a:ln>
         </p:spPr>
         <p:txBody>
-          <a:bodyPr wrap="square" lIns="220000" tIns="240000" rIns="220000" bIns="240000" anchor="t"/>
+          <a:bodyPr wrap="square" lIns="180000" tIns="220000" rIns="180000" bIns="180000" anchor="t"/>
           <a:lstStyle/>
           <a:p>
             <a:pPr algn="l"/>
             <a:r>
-              <a:rPr lang="en-US" b="1" spc="300" dirty="0">
-                <a:solidFill>
-                  <a:srgbClr val="22D3EE"/>
-                </a:solidFill>
-              </a:rPr>
-              <a:t>01</a:t>
-            </a:r>
-          </a:p>
-          <a:p>
-            <a:pPr algn="l">
-              <a:spcBef>
-                <a:spcPts val="400"/>
-              </a:spcBef>
-            </a:pPr>
-            <a:r>
-              <a:rPr lang="en-US" sz="4400" b="1" dirty="0">
-                <a:solidFill>
-                  <a:srgbClr val="22D3EE"/>
-                </a:solidFill>
-              </a:rPr>
-              <a:t>Simplicity</a:t>
+              <a:rPr lang="en-US" sz="4800" b="1" dirty="0">
+                <a:solidFill>
+                  <a:srgbClr val="F43F5E"/>
+                </a:solidFill>
+              </a:rPr>
+              <a:t>🎤</a:t>
             </a:r>
           </a:p>
           <a:p>
@@ -10274,30 +10156,45 @@
               </a:spcBef>
             </a:pPr>
             <a:r>
-              <a:rPr lang="en-US" sz="2400" dirty="0">
-                <a:solidFill>
-                  <a:srgbClr val="475569"/>
-                </a:solidFill>
-              </a:rPr>
-              <a:t>One input. One answer. Hide everything else until they ask.</a:t>
-            </a:r>
-          </a:p>
-        </p:txBody>
-      </p:sp>
-      <p:sp>
-        <p:nvSpPr>
-          <p:cNvPr id="1301" name="P"/>
+              <a:rPr lang="en-US" sz="2800" b="1" dirty="0">
+                <a:solidFill>
+                  <a:srgbClr val="0F172A"/>
+                </a:solidFill>
+              </a:rPr>
+              <a:t>Voice input</a:t>
+            </a:r>
+          </a:p>
+          <a:p>
+            <a:pPr algn="l">
+              <a:spcBef>
+                <a:spcPts val="300"/>
+              </a:spcBef>
+            </a:pPr>
+            <a:r>
+              <a:rPr lang="en-US" sz="2000" dirty="0">
+                <a:solidFill>
+                  <a:srgbClr val="64748B"/>
+                </a:solidFill>
+              </a:rPr>
+              <a:t>Talk to your data</a:t>
+            </a:r>
+          </a:p>
+        </p:txBody>
+      </p:sp>
+      <p:sp>
+        <p:nvSpPr>
+          <p:cNvPr id="1101" name="F"/>
           <p:cNvSpPr/>
           <p:nvPr/>
         </p:nvSpPr>
         <p:spPr>
           <a:xfrm>
-            <a:off x="4343400" y="1778000"/>
-            <a:ext cx="3492500" cy="3340265"/>
+            <a:off x="3365499" y="1778000"/>
+            <a:ext cx="2540001" cy="2159000"/>
           </a:xfrm>
           <a:prstGeom prst="roundRect">
             <a:avLst>
-              <a:gd name="adj" fmla="val 5000"/>
+              <a:gd name="adj" fmla="val 6000"/>
             </a:avLst>
           </a:prstGeom>
           <a:solidFill>
@@ -10310,32 +10207,17 @@
           </a:ln>
         </p:spPr>
         <p:txBody>
-          <a:bodyPr wrap="square" lIns="220000" tIns="240000" rIns="220000" bIns="240000" anchor="t"/>
+          <a:bodyPr wrap="square" lIns="180000" tIns="220000" rIns="180000" bIns="180000" anchor="t"/>
           <a:lstStyle/>
           <a:p>
             <a:pPr algn="l"/>
             <a:r>
-              <a:rPr lang="en-US" b="1" spc="300" dirty="0">
-                <a:solidFill>
-                  <a:srgbClr val="6366F1"/>
-                </a:solidFill>
-              </a:rPr>
-              <a:t>02</a:t>
-            </a:r>
-          </a:p>
-          <a:p>
-            <a:pPr algn="l">
-              <a:spcBef>
-                <a:spcPts val="400"/>
-              </a:spcBef>
-            </a:pPr>
-            <a:r>
               <a:rPr lang="en-US" sz="4400" b="1" dirty="0">
                 <a:solidFill>
-                  <a:srgbClr val="6366F1"/>
-                </a:solidFill>
-              </a:rPr>
-              <a:t>Speed</a:t>
+                  <a:srgbClr val="22D3EE"/>
+                </a:solidFill>
+              </a:rPr>
+              <a:t>⚡</a:t>
             </a:r>
           </a:p>
           <a:p>
@@ -10345,30 +10227,45 @@
               </a:spcBef>
             </a:pPr>
             <a:r>
-              <a:rPr lang="en-US" sz="2400" dirty="0">
-                <a:solidFill>
-                  <a:srgbClr val="475569"/>
-                </a:solidFill>
-              </a:rPr>
-              <a:t>Stream the SQL. Stream the result. No spinners over 2 seconds.</a:t>
-            </a:r>
-          </a:p>
-        </p:txBody>
-      </p:sp>
-      <p:sp>
-        <p:nvSpPr>
-          <p:cNvPr id="1302" name="P"/>
+              <a:rPr lang="en-US" sz="2800" b="1" dirty="0">
+                <a:solidFill>
+                  <a:srgbClr val="0F172A"/>
+                </a:solidFill>
+              </a:rPr>
+              <a:t>Live query</a:t>
+            </a:r>
+          </a:p>
+          <a:p>
+            <a:pPr algn="l">
+              <a:spcBef>
+                <a:spcPts val="300"/>
+              </a:spcBef>
+            </a:pPr>
+            <a:r>
+              <a:rPr lang="en-US" sz="2000" dirty="0">
+                <a:solidFill>
+                  <a:srgbClr val="64748B"/>
+                </a:solidFill>
+              </a:rPr>
+              <a:t>Real-time to SQL</a:t>
+            </a:r>
+          </a:p>
+        </p:txBody>
+      </p:sp>
+      <p:sp>
+        <p:nvSpPr>
+          <p:cNvPr id="1102" name="F"/>
           <p:cNvSpPr/>
           <p:nvPr/>
         </p:nvSpPr>
         <p:spPr>
           <a:xfrm>
-            <a:off x="8051800" y="1778000"/>
-            <a:ext cx="3492500" cy="3340265"/>
+            <a:off x="6096000" y="1778000"/>
+            <a:ext cx="2540000" cy="2159000"/>
           </a:xfrm>
           <a:prstGeom prst="roundRect">
             <a:avLst>
-              <a:gd name="adj" fmla="val 5000"/>
+              <a:gd name="adj" fmla="val 6000"/>
             </a:avLst>
           </a:prstGeom>
           <a:solidFill>
@@ -10381,17 +10278,157 @@
           </a:ln>
         </p:spPr>
         <p:txBody>
-          <a:bodyPr wrap="square" lIns="220000" tIns="240000" rIns="220000" bIns="240000" anchor="t"/>
+          <a:bodyPr wrap="square" lIns="180000" tIns="220000" rIns="180000" bIns="180000" anchor="t"/>
           <a:lstStyle/>
           <a:p>
             <a:pPr algn="l"/>
             <a:r>
-              <a:rPr lang="en-US" b="1" spc="300" dirty="0">
-                <a:solidFill>
-                  <a:srgbClr val="F43F5E"/>
-                </a:solidFill>
-              </a:rPr>
-              <a:t>03</a:t>
+              <a:rPr lang="en-US" sz="4800" b="1" dirty="0">
+                <a:solidFill>
+                  <a:srgbClr val="6366F1"/>
+                </a:solidFill>
+              </a:rPr>
+              <a:t>📊</a:t>
+            </a:r>
+          </a:p>
+          <a:p>
+            <a:pPr algn="l">
+              <a:spcBef>
+                <a:spcPts val="600"/>
+              </a:spcBef>
+            </a:pPr>
+            <a:r>
+              <a:rPr lang="en-US" sz="2800" b="1" dirty="0">
+                <a:solidFill>
+                  <a:srgbClr val="0F172A"/>
+                </a:solidFill>
+              </a:rPr>
+              <a:t>Charts</a:t>
+            </a:r>
+          </a:p>
+          <a:p>
+            <a:pPr algn="l">
+              <a:spcBef>
+                <a:spcPts val="300"/>
+              </a:spcBef>
+            </a:pPr>
+            <a:r>
+              <a:rPr lang="en-US" sz="2000" dirty="0">
+                <a:solidFill>
+                  <a:srgbClr val="64748B"/>
+                </a:solidFill>
+              </a:rPr>
+              <a:t>Visualize results</a:t>
+            </a:r>
+          </a:p>
+        </p:txBody>
+      </p:sp>
+      <p:sp>
+        <p:nvSpPr>
+          <p:cNvPr id="1103" name="F"/>
+          <p:cNvSpPr/>
+          <p:nvPr/>
+        </p:nvSpPr>
+        <p:spPr>
+          <a:xfrm>
+            <a:off x="8826500" y="1778000"/>
+            <a:ext cx="2730500" cy="2159000"/>
+          </a:xfrm>
+          <a:prstGeom prst="roundRect">
+            <a:avLst>
+              <a:gd name="adj" fmla="val 6000"/>
+            </a:avLst>
+          </a:prstGeom>
+          <a:solidFill>
+            <a:srgbClr val="FFFFFF"/>
+          </a:solidFill>
+          <a:ln w="12700">
+            <a:solidFill>
+              <a:srgbClr val="E2E8F0"/>
+            </a:solidFill>
+          </a:ln>
+        </p:spPr>
+        <p:txBody>
+          <a:bodyPr wrap="square" lIns="180000" tIns="220000" rIns="180000" bIns="180000" anchor="t"/>
+          <a:lstStyle/>
+          <a:p>
+            <a:pPr algn="l"/>
+            <a:r>
+              <a:rPr lang="en-US" sz="4800" b="1" dirty="0">
+                <a:solidFill>
+                  <a:srgbClr val="10B981"/>
+                </a:solidFill>
+              </a:rPr>
+              <a:t>📄</a:t>
+            </a:r>
+          </a:p>
+          <a:p>
+            <a:pPr algn="l">
+              <a:spcBef>
+                <a:spcPts val="600"/>
+              </a:spcBef>
+            </a:pPr>
+            <a:r>
+              <a:rPr lang="en-US" sz="2800" b="1" dirty="0">
+                <a:solidFill>
+                  <a:srgbClr val="0F172A"/>
+                </a:solidFill>
+              </a:rPr>
+              <a:t>Excel</a:t>
+            </a:r>
+          </a:p>
+          <a:p>
+            <a:pPr algn="l">
+              <a:spcBef>
+                <a:spcPts val="300"/>
+              </a:spcBef>
+            </a:pPr>
+            <a:r>
+              <a:rPr lang="en-US" sz="2000" dirty="0">
+                <a:solidFill>
+                  <a:srgbClr val="64748B"/>
+                </a:solidFill>
+              </a:rPr>
+              <a:t>One click to report</a:t>
+            </a:r>
+          </a:p>
+        </p:txBody>
+      </p:sp>
+      <p:sp>
+        <p:nvSpPr>
+          <p:cNvPr id="1110" name="Banner"/>
+          <p:cNvSpPr/>
+          <p:nvPr/>
+        </p:nvSpPr>
+        <p:spPr>
+          <a:xfrm>
+            <a:off x="635000" y="4318000"/>
+            <a:ext cx="10731500" cy="1524000"/>
+          </a:xfrm>
+          <a:prstGeom prst="roundRect">
+            <a:avLst>
+              <a:gd name="adj" fmla="val 6000"/>
+            </a:avLst>
+          </a:prstGeom>
+          <a:solidFill>
+            <a:srgbClr val="0F172A"/>
+          </a:solidFill>
+          <a:ln>
+            <a:noFill/>
+          </a:ln>
+        </p:spPr>
+        <p:txBody>
+          <a:bodyPr wrap="square" lIns="280000" tIns="200000" rIns="280000" bIns="200000" anchor="ctr"/>
+          <a:lstStyle/>
+          <a:p>
+            <a:pPr algn="l"/>
+            <a:r>
+              <a:rPr lang="en-US" sz="1400" b="1" spc="300" dirty="0">
+                <a:solidFill>
+                  <a:srgbClr val="22D3EE"/>
+                </a:solidFill>
+              </a:rPr>
+              <a:t>THE BACKEND DIDN'T CHANGE.</a:t>
             </a:r>
           </a:p>
           <a:p>
@@ -10401,81 +10438,43 @@
               </a:spcBef>
             </a:pPr>
             <a:r>
-              <a:rPr lang="en-US" sz="4400" b="1" dirty="0">
-                <a:solidFill>
-                  <a:srgbClr val="F43F5E"/>
-                </a:solidFill>
-              </a:rPr>
-              <a:t>Trust</a:t>
-            </a:r>
-          </a:p>
-          <a:p>
-            <a:pPr algn="l">
-              <a:spcBef>
-                <a:spcPts val="600"/>
-              </a:spcBef>
-            </a:pPr>
-            <a:r>
               <a:rPr lang="en-US" sz="2400" dirty="0">
                 <a:solidFill>
-                  <a:srgbClr val="475569"/>
-                </a:solidFill>
-              </a:rPr>
-              <a:t>Always show the SQL. Let users verify before they believe. And save</a:t>
-            </a:r>
-          </a:p>
-        </p:txBody>
-      </p:sp>
-      <p:sp>
-        <p:nvSpPr>
-          <p:cNvPr id="1310" name="BQ"/>
-          <p:cNvSpPr/>
-          <p:nvPr/>
-        </p:nvSpPr>
-        <p:spPr>
-          <a:xfrm>
-            <a:off x="635000" y="5308270"/>
-            <a:ext cx="10922000" cy="927430"/>
-          </a:xfrm>
-          <a:prstGeom prst="roundRect">
-            <a:avLst>
-              <a:gd name="adj" fmla="val 50000"/>
-            </a:avLst>
-          </a:prstGeom>
-          <a:solidFill>
-            <a:srgbClr val="F1F5F9"/>
-          </a:solidFill>
-          <a:ln>
-            <a:noFill/>
-          </a:ln>
-        </p:spPr>
-        <p:txBody>
-          <a:bodyPr wrap="square" lIns="180000" tIns="0" rIns="180000" bIns="0" anchor="ctr"/>
-          <a:lstStyle/>
-          <a:p>
-            <a:pPr algn="ctr"/>
-            <a:r>
-              <a:rPr lang="en-US" sz="2400" dirty="0">
-                <a:solidFill>
-                  <a:srgbClr val="475569"/>
-                </a:solidFill>
-              </a:rPr>
-              <a:t>The LLM 20% of the work. </a:t>
+                  <a:srgbClr val="FFFFFF"/>
+                </a:solidFill>
+              </a:rPr>
+              <a:t>Blazor reuses the exact same module. </a:t>
             </a:r>
             <a:br>
               <a:rPr lang="en-US" sz="2400" dirty="0">
                 <a:solidFill>
-                  <a:srgbClr val="475569"/>
+                  <a:srgbClr val="FFFFFF"/>
                 </a:solidFill>
               </a:rPr>
             </a:br>
             <a:r>
               <a:rPr lang="en-US" sz="2400" dirty="0">
                 <a:solidFill>
-                  <a:srgbClr val="475569"/>
-                </a:solidFill>
-              </a:rPr>
-              <a:t>The rest is just connecting the pieces.</a:t>
+                  <a:srgbClr val="FFFFFF"/>
+                </a:solidFill>
+              </a:rPr>
+              <a:t>The frontend is where </a:t>
+            </a:r>
+            <a:r>
+              <a:rPr lang="en-US" sz="2400" i="1" dirty="0">
+                <a:solidFill>
+                  <a:srgbClr val="22D3EE"/>
+                </a:solidFill>
+              </a:rPr>
+              <a:t>the product</a:t>
+            </a:r>
+            <a:r>
+              <a:rPr lang="en-US" sz="2400" dirty="0">
+                <a:solidFill>
+                  <a:srgbClr val="FFFFFF"/>
+                </a:solidFill>
+              </a:rPr>
+              <a:t> lives.</a:t>
             </a:r>
           </a:p>
         </p:txBody>
@@ -10483,7 +10482,7 @@
     </p:spTree>
     <p:extLst>
       <p:ext uri="{BB962C8B-B14F-4D97-AF65-F5344CB8AC3E}">
-        <p14:creationId xmlns:p14="http://schemas.microsoft.com/office/powerpoint/2010/main" val="2802800749"/>
+        <p14:creationId xmlns:p14="http://schemas.microsoft.com/office/powerpoint/2010/main" val="4276252591"/>
       </p:ext>
     </p:extLst>
   </p:cSld>
@@ -10494,7 +10493,7 @@
 </file>
 
 <file path=ppt/slides/slide18.xml><?xml version="1.0" encoding="utf-8"?>
-<p:sld xmlns:a="http://schemas.openxmlformats.org/drawingml/2006/main" xmlns:r="http://schemas.openxmlformats.org/officeDocument/2006/relationships" xmlns:p="http://schemas.openxmlformats.org/presentationml/2006/main">
+<p:sld xmlns:a="http://schemas.openxmlformats.org/drawingml/2006/main" xmlns:r="http://schemas.openxmlformats.org/officeDocument/2006/relationships" xmlns:p="http://schemas.openxmlformats.org/presentationml/2006/main" show="0">
   <p:cSld>
     <p:spTree>
       <p:nvGrpSpPr>
@@ -10515,7 +10514,7 @@
           <p:cNvPr id="2" name="Title 1">
             <a:extLst>
               <a:ext uri="{FF2B5EF4-FFF2-40B4-BE49-F238E27FC236}">
-                <a16:creationId xmlns:a16="http://schemas.microsoft.com/office/drawing/2014/main" id="{38F6FFD1-30E3-F282-65BE-DD43E9D8BD6A}"/>
+                <a16:creationId xmlns:a16="http://schemas.microsoft.com/office/drawing/2014/main" id="{74528FAF-AB4F-A00A-4E74-5574F01509F7}"/>
               </a:ext>
             </a:extLst>
           </p:cNvPr>
@@ -10528,7 +10527,7 @@
         </p:nvSpPr>
         <p:spPr>
           <a:xfrm>
-            <a:off x="412955" y="325437"/>
+            <a:off x="635000" y="357434"/>
             <a:ext cx="10515600" cy="1325563"/>
           </a:xfrm>
         </p:spPr>
@@ -10545,25 +10544,25 @@
                   <a:srgbClr val="0F172A"/>
                 </a:solidFill>
               </a:rPr>
-              <a:t>Where This Fits in the Real World</a:t>
-            </a:r>
-          </a:p>
-        </p:txBody>
-      </p:sp>
-      <p:sp>
-        <p:nvSpPr>
-          <p:cNvPr id="1400" name="U"/>
+              <a:t>The LLM is 20% of the work. </a:t>
+            </a:r>
+          </a:p>
+        </p:txBody>
+      </p:sp>
+      <p:sp>
+        <p:nvSpPr>
+          <p:cNvPr id="1300" name="P"/>
           <p:cNvSpPr/>
           <p:nvPr/>
         </p:nvSpPr>
         <p:spPr>
           <a:xfrm>
-            <a:off x="412955" y="1853554"/>
-            <a:ext cx="3749475" cy="1944000"/>
+            <a:off x="635000" y="1778000"/>
+            <a:ext cx="3492500" cy="3340265"/>
           </a:xfrm>
           <a:prstGeom prst="roundRect">
             <a:avLst>
-              <a:gd name="adj" fmla="val 6000"/>
+              <a:gd name="adj" fmla="val 5000"/>
             </a:avLst>
           </a:prstGeom>
           <a:solidFill>
@@ -10576,58 +10575,65 @@
           </a:ln>
         </p:spPr>
         <p:txBody>
-          <a:bodyPr wrap="square" lIns="180000" tIns="160000" rIns="180000" bIns="160000" anchor="t"/>
+          <a:bodyPr wrap="square" lIns="220000" tIns="240000" rIns="220000" bIns="240000" anchor="t"/>
           <a:lstStyle/>
           <a:p>
             <a:pPr algn="l"/>
             <a:r>
-              <a:rPr lang="en-US" sz="3600" b="1" dirty="0">
+              <a:rPr lang="en-US" b="1" spc="300" dirty="0">
                 <a:solidFill>
                   <a:srgbClr val="22D3EE"/>
                 </a:solidFill>
               </a:rPr>
-              <a:t>▣ </a:t>
-            </a:r>
-            <a:r>
-              <a:rPr lang="en-US" sz="2400" b="1" dirty="0">
-                <a:solidFill>
-                  <a:srgbClr val="0F172A"/>
-                </a:solidFill>
-              </a:rPr>
-              <a:t>Admin dashboards</a:t>
+              <a:t>01</a:t>
             </a:r>
           </a:p>
           <a:p>
             <a:pPr algn="l">
               <a:spcBef>
-                <a:spcPts val="500"/>
+                <a:spcPts val="400"/>
               </a:spcBef>
             </a:pPr>
             <a:r>
-              <a:rPr lang="en-US" i="1" dirty="0">
-                <a:solidFill>
-                  <a:srgbClr val="64748B"/>
-                </a:solidFill>
-              </a:rPr>
-              <a:t>"How many new users last week?"</a:t>
-            </a:r>
-          </a:p>
-        </p:txBody>
-      </p:sp>
-      <p:sp>
-        <p:nvSpPr>
-          <p:cNvPr id="1401" name="U"/>
+              <a:rPr lang="en-US" sz="4400" b="1" dirty="0">
+                <a:solidFill>
+                  <a:srgbClr val="22D3EE"/>
+                </a:solidFill>
+              </a:rPr>
+              <a:t>Simplicity</a:t>
+            </a:r>
+          </a:p>
+          <a:p>
+            <a:pPr algn="l">
+              <a:spcBef>
+                <a:spcPts val="600"/>
+              </a:spcBef>
+            </a:pPr>
+            <a:r>
+              <a:rPr lang="en-US" sz="2400" dirty="0">
+                <a:solidFill>
+                  <a:srgbClr val="475569"/>
+                </a:solidFill>
+              </a:rPr>
+              <a:t>One input. One answer. Hide everything else until they ask.</a:t>
+            </a:r>
+          </a:p>
+        </p:txBody>
+      </p:sp>
+      <p:sp>
+        <p:nvSpPr>
+          <p:cNvPr id="1301" name="P"/>
           <p:cNvSpPr/>
           <p:nvPr/>
         </p:nvSpPr>
         <p:spPr>
           <a:xfrm>
-            <a:off x="4236525" y="1853554"/>
-            <a:ext cx="3600000" cy="1944000"/>
+            <a:off x="4343400" y="1778000"/>
+            <a:ext cx="3492500" cy="3340265"/>
           </a:xfrm>
           <a:prstGeom prst="roundRect">
             <a:avLst>
-              <a:gd name="adj" fmla="val 6000"/>
+              <a:gd name="adj" fmla="val 5000"/>
             </a:avLst>
           </a:prstGeom>
           <a:solidFill>
@@ -10640,58 +10646,65 @@
           </a:ln>
         </p:spPr>
         <p:txBody>
-          <a:bodyPr wrap="square" lIns="180000" tIns="160000" rIns="180000" bIns="160000" anchor="t"/>
+          <a:bodyPr wrap="square" lIns="220000" tIns="240000" rIns="220000" bIns="240000" anchor="t"/>
           <a:lstStyle/>
           <a:p>
             <a:pPr algn="l"/>
             <a:r>
-              <a:rPr lang="en-US" sz="3600" b="1" dirty="0">
+              <a:rPr lang="en-US" b="1" spc="300" dirty="0">
                 <a:solidFill>
                   <a:srgbClr val="6366F1"/>
                 </a:solidFill>
               </a:rPr>
-              <a:t>◉ </a:t>
-            </a:r>
-            <a:r>
-              <a:rPr lang="en-US" sz="2400" b="1" dirty="0">
-                <a:solidFill>
-                  <a:srgbClr val="0F172A"/>
-                </a:solidFill>
-              </a:rPr>
-              <a:t>Internal tools</a:t>
+              <a:t>02</a:t>
             </a:r>
           </a:p>
           <a:p>
             <a:pPr algn="l">
               <a:spcBef>
-                <a:spcPts val="500"/>
+                <a:spcPts val="400"/>
               </a:spcBef>
             </a:pPr>
             <a:r>
-              <a:rPr lang="en-US" i="1" dirty="0">
-                <a:solidFill>
-                  <a:srgbClr val="64748B"/>
-                </a:solidFill>
-              </a:rPr>
-              <a:t>"Failed orders from the EU region."</a:t>
-            </a:r>
-          </a:p>
-        </p:txBody>
-      </p:sp>
-      <p:sp>
-        <p:nvSpPr>
-          <p:cNvPr id="1402" name="U"/>
+              <a:rPr lang="en-US" sz="4400" b="1" dirty="0">
+                <a:solidFill>
+                  <a:srgbClr val="6366F1"/>
+                </a:solidFill>
+              </a:rPr>
+              <a:t>Speed</a:t>
+            </a:r>
+          </a:p>
+          <a:p>
+            <a:pPr algn="l">
+              <a:spcBef>
+                <a:spcPts val="600"/>
+              </a:spcBef>
+            </a:pPr>
+            <a:r>
+              <a:rPr lang="en-US" sz="2400" dirty="0">
+                <a:solidFill>
+                  <a:srgbClr val="475569"/>
+                </a:solidFill>
+              </a:rPr>
+              <a:t>Stream the SQL. Stream the result. No spinners over 2 seconds.</a:t>
+            </a:r>
+          </a:p>
+        </p:txBody>
+      </p:sp>
+      <p:sp>
+        <p:nvSpPr>
+          <p:cNvPr id="1302" name="P"/>
           <p:cNvSpPr/>
           <p:nvPr/>
         </p:nvSpPr>
         <p:spPr>
           <a:xfrm>
-            <a:off x="7910620" y="1853554"/>
-            <a:ext cx="3600000" cy="1944000"/>
+            <a:off x="8051800" y="1778000"/>
+            <a:ext cx="3492500" cy="3340265"/>
           </a:xfrm>
           <a:prstGeom prst="roundRect">
             <a:avLst>
-              <a:gd name="adj" fmla="val 6000"/>
+              <a:gd name="adj" fmla="val 5000"/>
             </a:avLst>
           </a:prstGeom>
           <a:solidFill>
@@ -10704,232 +10717,101 @@
           </a:ln>
         </p:spPr>
         <p:txBody>
-          <a:bodyPr wrap="square" lIns="180000" tIns="160000" rIns="180000" bIns="160000" anchor="t"/>
+          <a:bodyPr wrap="square" lIns="220000" tIns="240000" rIns="220000" bIns="240000" anchor="t"/>
           <a:lstStyle/>
           <a:p>
             <a:pPr algn="l"/>
             <a:r>
-              <a:rPr lang="en-US" sz="3600" b="1" dirty="0">
-                <a:solidFill>
-                  <a:srgbClr val="10B981"/>
-                </a:solidFill>
-              </a:rPr>
-              <a:t>⚡</a:t>
-            </a:r>
-            <a:r>
-              <a:rPr lang="en-US" sz="2400" b="1" dirty="0">
-                <a:solidFill>
-                  <a:srgbClr val="0F172A"/>
-                </a:solidFill>
-              </a:rPr>
-              <a:t>Support &amp; ops</a:t>
+              <a:rPr lang="en-US" b="1" spc="300" dirty="0">
+                <a:solidFill>
+                  <a:srgbClr val="F43F5E"/>
+                </a:solidFill>
+              </a:rPr>
+              <a:t>03</a:t>
             </a:r>
           </a:p>
           <a:p>
             <a:pPr algn="l">
               <a:spcBef>
-                <a:spcPts val="500"/>
+                <a:spcPts val="400"/>
               </a:spcBef>
             </a:pPr>
             <a:r>
-              <a:rPr lang="en-US" i="1" dirty="0">
-                <a:solidFill>
-                  <a:srgbClr val="64748B"/>
-                </a:solidFill>
-              </a:rPr>
-              <a:t>"Customers who churned in March."</a:t>
-            </a:r>
-          </a:p>
-        </p:txBody>
-      </p:sp>
-      <p:sp>
-        <p:nvSpPr>
-          <p:cNvPr id="1403" name="U"/>
+              <a:rPr lang="en-US" sz="4400" b="1" dirty="0">
+                <a:solidFill>
+                  <a:srgbClr val="F43F5E"/>
+                </a:solidFill>
+              </a:rPr>
+              <a:t>Trust</a:t>
+            </a:r>
+          </a:p>
+          <a:p>
+            <a:pPr algn="l">
+              <a:spcBef>
+                <a:spcPts val="600"/>
+              </a:spcBef>
+            </a:pPr>
+            <a:r>
+              <a:rPr lang="en-US" sz="2400" dirty="0">
+                <a:solidFill>
+                  <a:srgbClr val="475569"/>
+                </a:solidFill>
+              </a:rPr>
+              <a:t>Always show the SQL. Let users verify before they believe. And save</a:t>
+            </a:r>
+          </a:p>
+        </p:txBody>
+      </p:sp>
+      <p:sp>
+        <p:nvSpPr>
+          <p:cNvPr id="1310" name="BQ"/>
           <p:cNvSpPr/>
           <p:nvPr/>
         </p:nvSpPr>
         <p:spPr>
           <a:xfrm>
-            <a:off x="412955" y="4000108"/>
-            <a:ext cx="3749475" cy="1944000"/>
+            <a:off x="635000" y="5308270"/>
+            <a:ext cx="10922000" cy="927430"/>
           </a:xfrm>
           <a:prstGeom prst="roundRect">
             <a:avLst>
-              <a:gd name="adj" fmla="val 6000"/>
+              <a:gd name="adj" fmla="val 50000"/>
             </a:avLst>
           </a:prstGeom>
           <a:solidFill>
-            <a:srgbClr val="FFFFFF"/>
+            <a:srgbClr val="F1F5F9"/>
           </a:solidFill>
-          <a:ln w="12700">
-            <a:solidFill>
-              <a:srgbClr val="E2E8F0"/>
-            </a:solidFill>
+          <a:ln>
+            <a:noFill/>
           </a:ln>
         </p:spPr>
         <p:txBody>
-          <a:bodyPr wrap="square" lIns="180000" tIns="160000" rIns="180000" bIns="160000" anchor="t"/>
-          <a:lstStyle/>
-          <a:p>
-            <a:pPr algn="l"/>
-            <a:r>
-              <a:rPr lang="en-US" sz="3600" b="1" dirty="0">
-                <a:solidFill>
-                  <a:srgbClr val="F43F5E"/>
-                </a:solidFill>
-              </a:rPr>
-              <a:t>📊</a:t>
-            </a:r>
-            <a:r>
-              <a:rPr lang="en-US" sz="2400" b="1" dirty="0">
-                <a:solidFill>
-                  <a:srgbClr val="0F172A"/>
-                </a:solidFill>
-              </a:rPr>
-              <a:t>Exec reporting</a:t>
-            </a:r>
-          </a:p>
-          <a:p>
-            <a:pPr algn="l">
-              <a:spcBef>
-                <a:spcPts val="500"/>
-              </a:spcBef>
-            </a:pPr>
-            <a:r>
-              <a:rPr lang="en-US" i="1" dirty="0">
-                <a:solidFill>
-                  <a:srgbClr val="64748B"/>
-                </a:solidFill>
-              </a:rPr>
-              <a:t>"Revenue by product, last 4 quarters."</a:t>
-            </a:r>
-          </a:p>
-        </p:txBody>
-      </p:sp>
-      <p:sp>
-        <p:nvSpPr>
-          <p:cNvPr id="1404" name="U"/>
-          <p:cNvSpPr/>
-          <p:nvPr/>
-        </p:nvSpPr>
-        <p:spPr>
-          <a:xfrm>
-            <a:off x="4236525" y="4000108"/>
-            <a:ext cx="3600000" cy="1944000"/>
-          </a:xfrm>
-          <a:prstGeom prst="roundRect">
-            <a:avLst>
-              <a:gd name="adj" fmla="val 6000"/>
-            </a:avLst>
-          </a:prstGeom>
-          <a:solidFill>
-            <a:srgbClr val="FFFFFF"/>
-          </a:solidFill>
-          <a:ln w="12700">
-            <a:solidFill>
-              <a:srgbClr val="E2E8F0"/>
-            </a:solidFill>
-          </a:ln>
-        </p:spPr>
-        <p:txBody>
-          <a:bodyPr wrap="square" lIns="180000" tIns="160000" rIns="180000" bIns="160000" anchor="t"/>
-          <a:lstStyle/>
-          <a:p>
-            <a:pPr algn="l"/>
-            <a:r>
-              <a:rPr lang="en-US" sz="3200" b="1" dirty="0">
-                <a:solidFill>
-                  <a:srgbClr val="F59E0B"/>
-                </a:solidFill>
-              </a:rPr>
-              <a:t>🔍 </a:t>
-            </a:r>
-            <a:r>
-              <a:rPr lang="en-US" sz="2400" b="1" dirty="0">
-                <a:solidFill>
-                  <a:srgbClr val="0F172A"/>
-                </a:solidFill>
-              </a:rPr>
-              <a:t>Ad-hoc analysis</a:t>
-            </a:r>
-          </a:p>
-          <a:p>
-            <a:pPr algn="l">
-              <a:spcBef>
-                <a:spcPts val="500"/>
-              </a:spcBef>
-            </a:pPr>
-            <a:r>
-              <a:rPr lang="en-US" i="1" dirty="0">
-                <a:solidFill>
-                  <a:srgbClr val="64748B"/>
-                </a:solidFill>
-              </a:rPr>
-              <a:t>"Orders over $1k with no shipment."</a:t>
-            </a:r>
-          </a:p>
-        </p:txBody>
-      </p:sp>
-      <p:sp>
-        <p:nvSpPr>
-          <p:cNvPr id="1405" name="U"/>
-          <p:cNvSpPr/>
-          <p:nvPr/>
-        </p:nvSpPr>
-        <p:spPr>
-          <a:xfrm>
-            <a:off x="7910620" y="4000108"/>
-            <a:ext cx="3600000" cy="1944000"/>
-          </a:xfrm>
-          <a:prstGeom prst="roundRect">
-            <a:avLst>
-              <a:gd name="adj" fmla="val 6000"/>
-            </a:avLst>
-          </a:prstGeom>
-          <a:solidFill>
-            <a:srgbClr val="FFFFFF"/>
-          </a:solidFill>
-          <a:ln w="12700">
-            <a:solidFill>
-              <a:srgbClr val="E2E8F0"/>
-            </a:solidFill>
-          </a:ln>
-        </p:spPr>
-        <p:txBody>
-          <a:bodyPr wrap="square" lIns="180000" tIns="160000" rIns="180000" bIns="160000" anchor="t"/>
-          <a:lstStyle/>
-          <a:p>
-            <a:pPr algn="l"/>
-            <a:r>
-              <a:rPr lang="en-US" sz="3600" b="1" dirty="0">
-                <a:solidFill>
-                  <a:srgbClr val="A78BFA"/>
-                </a:solidFill>
-              </a:rPr>
-              <a:t>📈</a:t>
-            </a:r>
-            <a:r>
-              <a:rPr lang="en-US" sz="2400" b="1" dirty="0">
-                <a:solidFill>
-                  <a:srgbClr val="0F172A"/>
-                </a:solidFill>
-              </a:rPr>
-              <a:t>Self-serve BI</a:t>
-            </a:r>
-          </a:p>
-          <a:p>
-            <a:pPr algn="l">
-              <a:spcBef>
-                <a:spcPts val="500"/>
-              </a:spcBef>
-            </a:pPr>
-            <a:r>
-              <a:rPr lang="en-US" i="1" dirty="0">
-                <a:solidFill>
-                  <a:srgbClr val="64748B"/>
-                </a:solidFill>
-              </a:rPr>
-              <a:t>"Top 20 SKUs by margin this year."</a:t>
+          <a:bodyPr wrap="square" lIns="180000" tIns="0" rIns="180000" bIns="0" anchor="ctr"/>
+          <a:lstStyle/>
+          <a:p>
+            <a:pPr algn="ctr"/>
+            <a:r>
+              <a:rPr lang="en-US" sz="2400" dirty="0">
+                <a:solidFill>
+                  <a:srgbClr val="475569"/>
+                </a:solidFill>
+              </a:rPr>
+              <a:t>The LLM 20% of the work. </a:t>
+            </a:r>
+            <a:br>
+              <a:rPr lang="en-US" sz="2400" dirty="0">
+                <a:solidFill>
+                  <a:srgbClr val="475569"/>
+                </a:solidFill>
+              </a:rPr>
+            </a:br>
+            <a:r>
+              <a:rPr lang="en-US" sz="2400" dirty="0">
+                <a:solidFill>
+                  <a:srgbClr val="475569"/>
+                </a:solidFill>
+              </a:rPr>
+              <a:t>The rest is just connecting the pieces.</a:t>
             </a:r>
           </a:p>
         </p:txBody>
@@ -10937,7 +10819,7 @@
     </p:spTree>
     <p:extLst>
       <p:ext uri="{BB962C8B-B14F-4D97-AF65-F5344CB8AC3E}">
-        <p14:creationId xmlns:p14="http://schemas.microsoft.com/office/powerpoint/2010/main" val="4193197474"/>
+        <p14:creationId xmlns:p14="http://schemas.microsoft.com/office/powerpoint/2010/main" val="2802800749"/>
       </p:ext>
     </p:extLst>
   </p:cSld>
@@ -10969,6 +10851,539 @@
           <p:cNvPr id="2" name="Title 1">
             <a:extLst>
               <a:ext uri="{FF2B5EF4-FFF2-40B4-BE49-F238E27FC236}">
+                <a16:creationId xmlns:a16="http://schemas.microsoft.com/office/drawing/2014/main" id="{38F6FFD1-30E3-F282-65BE-DD43E9D8BD6A}"/>
+              </a:ext>
+            </a:extLst>
+          </p:cNvPr>
+          <p:cNvSpPr>
+            <a:spLocks noGrp="1"/>
+          </p:cNvSpPr>
+          <p:nvPr>
+            <p:ph type="title"/>
+          </p:nvPr>
+        </p:nvSpPr>
+        <p:spPr>
+          <a:xfrm>
+            <a:off x="412955" y="325437"/>
+            <a:ext cx="10515600" cy="1325563"/>
+          </a:xfrm>
+        </p:spPr>
+        <p:txBody>
+          <a:bodyPr>
+            <a:normAutofit/>
+          </a:bodyPr>
+          <a:lstStyle/>
+          <a:p>
+            <a:pPr algn="l"/>
+            <a:r>
+              <a:rPr lang="en-US" sz="4800" b="1" dirty="0">
+                <a:solidFill>
+                  <a:srgbClr val="0F172A"/>
+                </a:solidFill>
+              </a:rPr>
+              <a:t>Where This Fits in the Real World</a:t>
+            </a:r>
+          </a:p>
+        </p:txBody>
+      </p:sp>
+      <p:sp>
+        <p:nvSpPr>
+          <p:cNvPr id="1400" name="U"/>
+          <p:cNvSpPr/>
+          <p:nvPr/>
+        </p:nvSpPr>
+        <p:spPr>
+          <a:xfrm>
+            <a:off x="412955" y="1853554"/>
+            <a:ext cx="3749475" cy="1944000"/>
+          </a:xfrm>
+          <a:prstGeom prst="roundRect">
+            <a:avLst>
+              <a:gd name="adj" fmla="val 6000"/>
+            </a:avLst>
+          </a:prstGeom>
+          <a:solidFill>
+            <a:srgbClr val="FFFFFF"/>
+          </a:solidFill>
+          <a:ln w="12700">
+            <a:solidFill>
+              <a:srgbClr val="E2E8F0"/>
+            </a:solidFill>
+          </a:ln>
+        </p:spPr>
+        <p:txBody>
+          <a:bodyPr wrap="square" lIns="180000" tIns="160000" rIns="180000" bIns="160000" anchor="t"/>
+          <a:lstStyle/>
+          <a:p>
+            <a:pPr algn="l"/>
+            <a:r>
+              <a:rPr lang="en-US" sz="3600" b="1" dirty="0">
+                <a:solidFill>
+                  <a:srgbClr val="22D3EE"/>
+                </a:solidFill>
+              </a:rPr>
+              <a:t>▣ </a:t>
+            </a:r>
+            <a:r>
+              <a:rPr lang="en-US" sz="2400" b="1" dirty="0">
+                <a:solidFill>
+                  <a:srgbClr val="0F172A"/>
+                </a:solidFill>
+              </a:rPr>
+              <a:t>Admin dashboards</a:t>
+            </a:r>
+          </a:p>
+          <a:p>
+            <a:pPr algn="l">
+              <a:spcBef>
+                <a:spcPts val="500"/>
+              </a:spcBef>
+            </a:pPr>
+            <a:r>
+              <a:rPr lang="en-US" i="1" dirty="0">
+                <a:solidFill>
+                  <a:srgbClr val="64748B"/>
+                </a:solidFill>
+              </a:rPr>
+              <a:t>"How many new users last week?"</a:t>
+            </a:r>
+          </a:p>
+        </p:txBody>
+      </p:sp>
+      <p:sp>
+        <p:nvSpPr>
+          <p:cNvPr id="1401" name="U"/>
+          <p:cNvSpPr/>
+          <p:nvPr/>
+        </p:nvSpPr>
+        <p:spPr>
+          <a:xfrm>
+            <a:off x="4236525" y="1853554"/>
+            <a:ext cx="3600000" cy="1944000"/>
+          </a:xfrm>
+          <a:prstGeom prst="roundRect">
+            <a:avLst>
+              <a:gd name="adj" fmla="val 6000"/>
+            </a:avLst>
+          </a:prstGeom>
+          <a:solidFill>
+            <a:srgbClr val="FFFFFF"/>
+          </a:solidFill>
+          <a:ln w="12700">
+            <a:solidFill>
+              <a:srgbClr val="E2E8F0"/>
+            </a:solidFill>
+          </a:ln>
+        </p:spPr>
+        <p:txBody>
+          <a:bodyPr wrap="square" lIns="180000" tIns="160000" rIns="180000" bIns="160000" anchor="t"/>
+          <a:lstStyle/>
+          <a:p>
+            <a:pPr algn="l"/>
+            <a:r>
+              <a:rPr lang="en-US" sz="3600" b="1" dirty="0">
+                <a:solidFill>
+                  <a:srgbClr val="6366F1"/>
+                </a:solidFill>
+              </a:rPr>
+              <a:t>◉ </a:t>
+            </a:r>
+            <a:r>
+              <a:rPr lang="en-US" sz="2400" b="1" dirty="0">
+                <a:solidFill>
+                  <a:srgbClr val="0F172A"/>
+                </a:solidFill>
+              </a:rPr>
+              <a:t>Internal tools</a:t>
+            </a:r>
+          </a:p>
+          <a:p>
+            <a:pPr algn="l">
+              <a:spcBef>
+                <a:spcPts val="500"/>
+              </a:spcBef>
+            </a:pPr>
+            <a:r>
+              <a:rPr lang="en-US" i="1" dirty="0">
+                <a:solidFill>
+                  <a:srgbClr val="64748B"/>
+                </a:solidFill>
+              </a:rPr>
+              <a:t>"Failed orders from the EU region."</a:t>
+            </a:r>
+          </a:p>
+        </p:txBody>
+      </p:sp>
+      <p:sp>
+        <p:nvSpPr>
+          <p:cNvPr id="1402" name="U"/>
+          <p:cNvSpPr/>
+          <p:nvPr/>
+        </p:nvSpPr>
+        <p:spPr>
+          <a:xfrm>
+            <a:off x="7910620" y="1853554"/>
+            <a:ext cx="3600000" cy="1944000"/>
+          </a:xfrm>
+          <a:prstGeom prst="roundRect">
+            <a:avLst>
+              <a:gd name="adj" fmla="val 6000"/>
+            </a:avLst>
+          </a:prstGeom>
+          <a:solidFill>
+            <a:srgbClr val="FFFFFF"/>
+          </a:solidFill>
+          <a:ln w="12700">
+            <a:solidFill>
+              <a:srgbClr val="E2E8F0"/>
+            </a:solidFill>
+          </a:ln>
+        </p:spPr>
+        <p:txBody>
+          <a:bodyPr wrap="square" lIns="180000" tIns="160000" rIns="180000" bIns="160000" anchor="t"/>
+          <a:lstStyle/>
+          <a:p>
+            <a:pPr algn="l"/>
+            <a:r>
+              <a:rPr lang="en-US" sz="3600" b="1" dirty="0">
+                <a:solidFill>
+                  <a:srgbClr val="10B981"/>
+                </a:solidFill>
+              </a:rPr>
+              <a:t>⚡</a:t>
+            </a:r>
+            <a:r>
+              <a:rPr lang="en-US" sz="2400" b="1" dirty="0">
+                <a:solidFill>
+                  <a:srgbClr val="0F172A"/>
+                </a:solidFill>
+              </a:rPr>
+              <a:t>Support &amp; ops</a:t>
+            </a:r>
+          </a:p>
+          <a:p>
+            <a:pPr algn="l">
+              <a:spcBef>
+                <a:spcPts val="500"/>
+              </a:spcBef>
+            </a:pPr>
+            <a:r>
+              <a:rPr lang="en-US" i="1" dirty="0">
+                <a:solidFill>
+                  <a:srgbClr val="64748B"/>
+                </a:solidFill>
+              </a:rPr>
+              <a:t>"Customers who churned in March."</a:t>
+            </a:r>
+          </a:p>
+        </p:txBody>
+      </p:sp>
+      <p:sp>
+        <p:nvSpPr>
+          <p:cNvPr id="1403" name="U"/>
+          <p:cNvSpPr/>
+          <p:nvPr/>
+        </p:nvSpPr>
+        <p:spPr>
+          <a:xfrm>
+            <a:off x="412955" y="4000108"/>
+            <a:ext cx="3749475" cy="1944000"/>
+          </a:xfrm>
+          <a:prstGeom prst="roundRect">
+            <a:avLst>
+              <a:gd name="adj" fmla="val 6000"/>
+            </a:avLst>
+          </a:prstGeom>
+          <a:solidFill>
+            <a:srgbClr val="FFFFFF"/>
+          </a:solidFill>
+          <a:ln w="12700">
+            <a:solidFill>
+              <a:srgbClr val="E2E8F0"/>
+            </a:solidFill>
+          </a:ln>
+        </p:spPr>
+        <p:txBody>
+          <a:bodyPr wrap="square" lIns="180000" tIns="160000" rIns="180000" bIns="160000" anchor="t"/>
+          <a:lstStyle/>
+          <a:p>
+            <a:pPr algn="l"/>
+            <a:r>
+              <a:rPr lang="en-US" sz="3600" b="1" dirty="0">
+                <a:solidFill>
+                  <a:srgbClr val="F43F5E"/>
+                </a:solidFill>
+              </a:rPr>
+              <a:t>📊</a:t>
+            </a:r>
+            <a:r>
+              <a:rPr lang="en-US" sz="2400" b="1" dirty="0">
+                <a:solidFill>
+                  <a:srgbClr val="0F172A"/>
+                </a:solidFill>
+              </a:rPr>
+              <a:t>Exec reporting</a:t>
+            </a:r>
+          </a:p>
+          <a:p>
+            <a:pPr algn="l">
+              <a:spcBef>
+                <a:spcPts val="500"/>
+              </a:spcBef>
+            </a:pPr>
+            <a:r>
+              <a:rPr lang="en-US" i="1" dirty="0">
+                <a:solidFill>
+                  <a:srgbClr val="64748B"/>
+                </a:solidFill>
+              </a:rPr>
+              <a:t>"Revenue by product, last 4 quarters."</a:t>
+            </a:r>
+          </a:p>
+        </p:txBody>
+      </p:sp>
+      <p:sp>
+        <p:nvSpPr>
+          <p:cNvPr id="1404" name="U"/>
+          <p:cNvSpPr/>
+          <p:nvPr/>
+        </p:nvSpPr>
+        <p:spPr>
+          <a:xfrm>
+            <a:off x="4236525" y="4000108"/>
+            <a:ext cx="3600000" cy="1944000"/>
+          </a:xfrm>
+          <a:prstGeom prst="roundRect">
+            <a:avLst>
+              <a:gd name="adj" fmla="val 6000"/>
+            </a:avLst>
+          </a:prstGeom>
+          <a:solidFill>
+            <a:srgbClr val="FFFFFF"/>
+          </a:solidFill>
+          <a:ln w="12700">
+            <a:solidFill>
+              <a:srgbClr val="E2E8F0"/>
+            </a:solidFill>
+          </a:ln>
+        </p:spPr>
+        <p:txBody>
+          <a:bodyPr wrap="square" lIns="180000" tIns="160000" rIns="180000" bIns="160000" anchor="t"/>
+          <a:lstStyle/>
+          <a:p>
+            <a:pPr algn="l"/>
+            <a:r>
+              <a:rPr lang="en-US" sz="3200" b="1" dirty="0">
+                <a:solidFill>
+                  <a:srgbClr val="F59E0B"/>
+                </a:solidFill>
+              </a:rPr>
+              <a:t>🔍 </a:t>
+            </a:r>
+            <a:r>
+              <a:rPr lang="en-US" sz="2400" b="1" dirty="0">
+                <a:solidFill>
+                  <a:srgbClr val="0F172A"/>
+                </a:solidFill>
+              </a:rPr>
+              <a:t>Ad-hoc analysis</a:t>
+            </a:r>
+          </a:p>
+          <a:p>
+            <a:pPr algn="l">
+              <a:spcBef>
+                <a:spcPts val="500"/>
+              </a:spcBef>
+            </a:pPr>
+            <a:r>
+              <a:rPr lang="en-US" i="1" dirty="0">
+                <a:solidFill>
+                  <a:srgbClr val="64748B"/>
+                </a:solidFill>
+              </a:rPr>
+              <a:t>"Orders over $1k with no shipment."</a:t>
+            </a:r>
+          </a:p>
+        </p:txBody>
+      </p:sp>
+      <p:sp>
+        <p:nvSpPr>
+          <p:cNvPr id="1405" name="U"/>
+          <p:cNvSpPr/>
+          <p:nvPr/>
+        </p:nvSpPr>
+        <p:spPr>
+          <a:xfrm>
+            <a:off x="7910620" y="4000108"/>
+            <a:ext cx="3600000" cy="1944000"/>
+          </a:xfrm>
+          <a:prstGeom prst="roundRect">
+            <a:avLst>
+              <a:gd name="adj" fmla="val 6000"/>
+            </a:avLst>
+          </a:prstGeom>
+          <a:solidFill>
+            <a:srgbClr val="FFFFFF"/>
+          </a:solidFill>
+          <a:ln w="12700">
+            <a:solidFill>
+              <a:srgbClr val="E2E8F0"/>
+            </a:solidFill>
+          </a:ln>
+        </p:spPr>
+        <p:txBody>
+          <a:bodyPr wrap="square" lIns="180000" tIns="160000" rIns="180000" bIns="160000" anchor="t"/>
+          <a:lstStyle/>
+          <a:p>
+            <a:pPr algn="l"/>
+            <a:r>
+              <a:rPr lang="en-US" sz="3600" b="1" dirty="0">
+                <a:solidFill>
+                  <a:srgbClr val="A78BFA"/>
+                </a:solidFill>
+              </a:rPr>
+              <a:t>📈</a:t>
+            </a:r>
+            <a:r>
+              <a:rPr lang="en-US" sz="2400" b="1" dirty="0">
+                <a:solidFill>
+                  <a:srgbClr val="0F172A"/>
+                </a:solidFill>
+              </a:rPr>
+              <a:t>Self-serve BI</a:t>
+            </a:r>
+          </a:p>
+          <a:p>
+            <a:pPr algn="l">
+              <a:spcBef>
+                <a:spcPts val="500"/>
+              </a:spcBef>
+            </a:pPr>
+            <a:r>
+              <a:rPr lang="en-US" i="1" dirty="0">
+                <a:solidFill>
+                  <a:srgbClr val="64748B"/>
+                </a:solidFill>
+              </a:rPr>
+              <a:t>"Top 20 SKUs by margin this year."</a:t>
+            </a:r>
+          </a:p>
+        </p:txBody>
+      </p:sp>
+    </p:spTree>
+    <p:extLst>
+      <p:ext uri="{BB962C8B-B14F-4D97-AF65-F5344CB8AC3E}">
+        <p14:creationId xmlns:p14="http://schemas.microsoft.com/office/powerpoint/2010/main" val="4193197474"/>
+      </p:ext>
+    </p:extLst>
+  </p:cSld>
+  <p:clrMapOvr>
+    <a:masterClrMapping/>
+  </p:clrMapOvr>
+</p:sld>
+</file>
+
+<file path=ppt/slides/slide2.xml><?xml version="1.0" encoding="utf-8"?>
+<p:sld xmlns:a="http://schemas.openxmlformats.org/drawingml/2006/main" xmlns:r="http://schemas.openxmlformats.org/officeDocument/2006/relationships" xmlns:p="http://schemas.openxmlformats.org/presentationml/2006/main" showMasterSp="0">
+  <p:cSld>
+    <p:bg>
+      <p:bgPr>
+        <a:pattFill prst="pct5">
+          <a:fgClr>
+            <a:srgbClr val="FAFBFC"/>
+          </a:fgClr>
+          <a:bgClr>
+            <a:schemeClr val="bg1"/>
+          </a:bgClr>
+        </a:pattFill>
+        <a:effectLst/>
+      </p:bgPr>
+    </p:bg>
+    <p:spTree>
+      <p:nvGrpSpPr>
+        <p:cNvPr id="1" name=""/>
+        <p:cNvGrpSpPr/>
+        <p:nvPr/>
+      </p:nvGrpSpPr>
+      <p:grpSpPr>
+        <a:xfrm>
+          <a:off x="0" y="0"/>
+          <a:ext cx="0" cy="0"/>
+          <a:chOff x="0" y="0"/>
+          <a:chExt cx="0" cy="0"/>
+        </a:xfrm>
+      </p:grpSpPr>
+      <p:pic>
+        <p:nvPicPr>
+          <p:cNvPr id="9" name="Picture 8">
+            <a:extLst>
+              <a:ext uri="{FF2B5EF4-FFF2-40B4-BE49-F238E27FC236}">
+                <a16:creationId xmlns:a16="http://schemas.microsoft.com/office/drawing/2014/main" id="{56618BC2-5AB4-BD47-EA9D-259BDFF07764}"/>
+              </a:ext>
+            </a:extLst>
+          </p:cNvPr>
+          <p:cNvPicPr>
+            <a:picLocks noChangeAspect="1"/>
+          </p:cNvPicPr>
+          <p:nvPr/>
+        </p:nvPicPr>
+        <p:blipFill>
+          <a:blip r:embed="rId2">
+            <a:extLst>
+              <a:ext uri="{28A0092B-C50C-407E-A947-70E740481C1C}">
+                <a14:useLocalDpi xmlns:a14="http://schemas.microsoft.com/office/drawing/2010/main" val="0"/>
+              </a:ext>
+            </a:extLst>
+          </a:blip>
+          <a:stretch>
+            <a:fillRect/>
+          </a:stretch>
+        </p:blipFill>
+        <p:spPr>
+          <a:xfrm>
+            <a:off x="432619" y="-190038"/>
+            <a:ext cx="11326761" cy="7238076"/>
+          </a:xfrm>
+          <a:prstGeom prst="rect">
+            <a:avLst/>
+          </a:prstGeom>
+        </p:spPr>
+      </p:pic>
+    </p:spTree>
+    <p:extLst>
+      <p:ext uri="{BB962C8B-B14F-4D97-AF65-F5344CB8AC3E}">
+        <p14:creationId xmlns:p14="http://schemas.microsoft.com/office/powerpoint/2010/main" val="1413440985"/>
+      </p:ext>
+    </p:extLst>
+  </p:cSld>
+  <p:clrMapOvr>
+    <a:masterClrMapping/>
+  </p:clrMapOvr>
+</p:sld>
+</file>
+
+<file path=ppt/slides/slide20.xml><?xml version="1.0" encoding="utf-8"?>
+<p:sld xmlns:a="http://schemas.openxmlformats.org/drawingml/2006/main" xmlns:r="http://schemas.openxmlformats.org/officeDocument/2006/relationships" xmlns:p="http://schemas.openxmlformats.org/presentationml/2006/main">
+  <p:cSld>
+    <p:spTree>
+      <p:nvGrpSpPr>
+        <p:cNvPr id="1" name=""/>
+        <p:cNvGrpSpPr/>
+        <p:nvPr/>
+      </p:nvGrpSpPr>
+      <p:grpSpPr>
+        <a:xfrm>
+          <a:off x="0" y="0"/>
+          <a:ext cx="0" cy="0"/>
+          <a:chOff x="0" y="0"/>
+          <a:chExt cx="0" cy="0"/>
+        </a:xfrm>
+      </p:grpSpPr>
+      <p:sp>
+        <p:nvSpPr>
+          <p:cNvPr id="2" name="Title 1">
+            <a:extLst>
+              <a:ext uri="{FF2B5EF4-FFF2-40B4-BE49-F238E27FC236}">
                 <a16:creationId xmlns:a16="http://schemas.microsoft.com/office/drawing/2014/main" id="{6E43E464-4A9F-3D02-3031-A210FB8E2C67}"/>
               </a:ext>
             </a:extLst>
@@ -11407,7 +11822,845 @@
 </p:sld>
 </file>
 
-<file path=ppt/slides/slide2.xml><?xml version="1.0" encoding="utf-8"?>
+<file path=ppt/slides/slide21.xml><?xml version="1.0" encoding="utf-8"?>
+<p:sld xmlns:a="http://schemas.openxmlformats.org/drawingml/2006/main" xmlns:r="http://schemas.openxmlformats.org/officeDocument/2006/relationships" xmlns:p="http://schemas.openxmlformats.org/presentationml/2006/main">
+  <p:cSld>
+    <p:spTree>
+      <p:nvGrpSpPr>
+        <p:cNvPr id="1" name="">
+          <a:extLst>
+            <a:ext uri="{FF2B5EF4-FFF2-40B4-BE49-F238E27FC236}">
+              <a16:creationId xmlns:a16="http://schemas.microsoft.com/office/drawing/2014/main" id="{190DE38D-6D72-586F-A672-EC9CD8B062AF}"/>
+            </a:ext>
+          </a:extLst>
+        </p:cNvPr>
+        <p:cNvGrpSpPr/>
+        <p:nvPr/>
+      </p:nvGrpSpPr>
+      <p:grpSpPr>
+        <a:xfrm>
+          <a:off x="0" y="0"/>
+          <a:ext cx="0" cy="0"/>
+          <a:chOff x="0" y="0"/>
+          <a:chExt cx="0" cy="0"/>
+        </a:xfrm>
+      </p:grpSpPr>
+      <p:sp>
+        <p:nvSpPr>
+          <p:cNvPr id="7" name="Panel">
+            <a:extLst>
+              <a:ext uri="{FF2B5EF4-FFF2-40B4-BE49-F238E27FC236}">
+                <a16:creationId xmlns:a16="http://schemas.microsoft.com/office/drawing/2014/main" id="{B05FC43A-919B-6C85-31C9-D03E8F18B296}"/>
+              </a:ext>
+            </a:extLst>
+          </p:cNvPr>
+          <p:cNvSpPr/>
+          <p:nvPr/>
+        </p:nvSpPr>
+        <p:spPr>
+          <a:xfrm>
+            <a:off x="73026" y="2822121"/>
+            <a:ext cx="12118974" cy="3064329"/>
+          </a:xfrm>
+          <a:prstGeom prst="rect">
+            <a:avLst/>
+          </a:prstGeom>
+          <a:solidFill>
+            <a:srgbClr val="0F172A"/>
+          </a:solidFill>
+          <a:ln>
+            <a:noFill/>
+          </a:ln>
+        </p:spPr>
+        <p:txBody>
+          <a:bodyPr/>
+          <a:lstStyle/>
+          <a:p>
+            <a:endParaRPr lang="en-US" sz="3200"/>
+          </a:p>
+        </p:txBody>
+      </p:sp>
+      <p:sp>
+        <p:nvSpPr>
+          <p:cNvPr id="8" name="Q">
+            <a:extLst>
+              <a:ext uri="{FF2B5EF4-FFF2-40B4-BE49-F238E27FC236}">
+                <a16:creationId xmlns:a16="http://schemas.microsoft.com/office/drawing/2014/main" id="{B9C6DB59-7B03-2063-5030-5346636B1400}"/>
+              </a:ext>
+            </a:extLst>
+          </p:cNvPr>
+          <p:cNvSpPr txBox="1"/>
+          <p:nvPr/>
+        </p:nvSpPr>
+        <p:spPr>
+          <a:xfrm>
+            <a:off x="444500" y="566738"/>
+            <a:ext cx="11376025" cy="2255383"/>
+          </a:xfrm>
+          <a:prstGeom prst="rect">
+            <a:avLst/>
+          </a:prstGeom>
+          <a:noFill/>
+        </p:spPr>
+        <p:txBody>
+          <a:bodyPr wrap="square" anchor="t"/>
+          <a:lstStyle/>
+          <a:p>
+            <a:pPr>
+              <a:lnSpc>
+                <a:spcPct val="105000"/>
+              </a:lnSpc>
+            </a:pPr>
+            <a:r>
+              <a:rPr lang="en-US" sz="6000" b="1" dirty="0">
+                <a:solidFill>
+                  <a:srgbClr val="0F172A"/>
+                </a:solidFill>
+              </a:rPr>
+              <a:t>What if we used 100% of our </a:t>
+            </a:r>
+            <a:br>
+              <a:rPr lang="en-US" sz="6000" b="1" dirty="0">
+                <a:solidFill>
+                  <a:srgbClr val="0F172A"/>
+                </a:solidFill>
+              </a:rPr>
+            </a:br>
+            <a:r>
+              <a:rPr lang="en-US" sz="6000" b="1" dirty="0">
+                <a:solidFill>
+                  <a:srgbClr val="0F172A"/>
+                </a:solidFill>
+              </a:rPr>
+              <a:t>DB’s potential</a:t>
+            </a:r>
+            <a:r>
+              <a:rPr lang="en-US" sz="5400" b="1" dirty="0">
+                <a:solidFill>
+                  <a:srgbClr val="0F172A"/>
+                </a:solidFill>
+              </a:rPr>
+              <a:t>🤔</a:t>
+            </a:r>
+          </a:p>
+        </p:txBody>
+      </p:sp>
+      <p:sp>
+        <p:nvSpPr>
+          <p:cNvPr id="9" name="Q">
+            <a:extLst>
+              <a:ext uri="{FF2B5EF4-FFF2-40B4-BE49-F238E27FC236}">
+                <a16:creationId xmlns:a16="http://schemas.microsoft.com/office/drawing/2014/main" id="{1AB057A2-73DE-48D4-8534-77FBCD65A14A}"/>
+              </a:ext>
+            </a:extLst>
+          </p:cNvPr>
+          <p:cNvSpPr txBox="1"/>
+          <p:nvPr/>
+        </p:nvSpPr>
+        <p:spPr>
+          <a:xfrm>
+            <a:off x="444500" y="3090862"/>
+            <a:ext cx="11376025" cy="2400300"/>
+          </a:xfrm>
+          <a:prstGeom prst="rect">
+            <a:avLst/>
+          </a:prstGeom>
+          <a:noFill/>
+        </p:spPr>
+        <p:txBody>
+          <a:bodyPr wrap="square" anchor="t"/>
+          <a:lstStyle/>
+          <a:p>
+            <a:pPr algn="l">
+              <a:lnSpc>
+                <a:spcPct val="105000"/>
+              </a:lnSpc>
+            </a:pPr>
+            <a:r>
+              <a:rPr lang="en-US" sz="6600" b="1" u="sng" dirty="0">
+                <a:solidFill>
+                  <a:srgbClr val="FFFFFF"/>
+                </a:solidFill>
+              </a:rPr>
+              <a:t>Taking actions</a:t>
+            </a:r>
+            <a:r>
+              <a:rPr lang="en-US" sz="6600" b="1" dirty="0">
+                <a:solidFill>
+                  <a:srgbClr val="FFFFFF"/>
+                </a:solidFill>
+              </a:rPr>
+              <a:t> </a:t>
+            </a:r>
+            <a:br>
+              <a:rPr lang="en-US" sz="6600" b="1" dirty="0">
+                <a:solidFill>
+                  <a:srgbClr val="FFFFFF"/>
+                </a:solidFill>
+              </a:rPr>
+            </a:br>
+            <a:r>
+              <a:rPr lang="en-US" sz="6600" b="1" dirty="0">
+                <a:solidFill>
+                  <a:srgbClr val="FFFFFF"/>
+                </a:solidFill>
+              </a:rPr>
+              <a:t>instead of just reporting!</a:t>
+            </a:r>
+          </a:p>
+        </p:txBody>
+      </p:sp>
+    </p:spTree>
+    <p:extLst>
+      <p:ext uri="{BB962C8B-B14F-4D97-AF65-F5344CB8AC3E}">
+        <p14:creationId xmlns:p14="http://schemas.microsoft.com/office/powerpoint/2010/main" val="1603450424"/>
+      </p:ext>
+    </p:extLst>
+  </p:cSld>
+  <p:clrMapOvr>
+    <a:masterClrMapping/>
+  </p:clrMapOvr>
+</p:sld>
+</file>
+
+<file path=ppt/slides/slide22.xml><?xml version="1.0" encoding="utf-8"?>
+<p:sld xmlns:a="http://schemas.openxmlformats.org/drawingml/2006/main" xmlns:r="http://schemas.openxmlformats.org/officeDocument/2006/relationships" xmlns:p="http://schemas.openxmlformats.org/presentationml/2006/main">
+  <p:cSld>
+    <p:spTree>
+      <p:nvGrpSpPr>
+        <p:cNvPr id="1" name=""/>
+        <p:cNvGrpSpPr/>
+        <p:nvPr/>
+      </p:nvGrpSpPr>
+      <p:grpSpPr>
+        <a:xfrm>
+          <a:off x="0" y="0"/>
+          <a:ext cx="0" cy="0"/>
+          <a:chOff x="0" y="0"/>
+          <a:chExt cx="0" cy="0"/>
+        </a:xfrm>
+      </p:grpSpPr>
+      <p:sp>
+        <p:nvSpPr>
+          <p:cNvPr id="1600" name="BG"/>
+          <p:cNvSpPr/>
+          <p:nvPr/>
+        </p:nvSpPr>
+        <p:spPr>
+          <a:xfrm>
+            <a:off x="76200" y="0"/>
+            <a:ext cx="12115800" cy="6858000"/>
+          </a:xfrm>
+          <a:prstGeom prst="rect">
+            <a:avLst/>
+          </a:prstGeom>
+          <a:solidFill>
+            <a:srgbClr val="0F172A"/>
+          </a:solidFill>
+          <a:ln>
+            <a:noFill/>
+          </a:ln>
+        </p:spPr>
+        <p:txBody>
+          <a:bodyPr/>
+          <a:lstStyle/>
+          <a:p>
+            <a:endParaRPr lang="en-US" dirty="0"/>
+          </a:p>
+        </p:txBody>
+      </p:sp>
+      <p:sp>
+        <p:nvSpPr>
+          <p:cNvPr id="1601" name="Bar"/>
+          <p:cNvSpPr/>
+          <p:nvPr/>
+        </p:nvSpPr>
+        <p:spPr>
+          <a:xfrm>
+            <a:off x="0" y="1016000"/>
+            <a:ext cx="76200" cy="4826000"/>
+          </a:xfrm>
+          <a:prstGeom prst="rect">
+            <a:avLst/>
+          </a:prstGeom>
+          <a:solidFill>
+            <a:srgbClr val="22D3EE"/>
+          </a:solidFill>
+          <a:ln>
+            <a:noFill/>
+          </a:ln>
+        </p:spPr>
+        <p:txBody>
+          <a:bodyPr/>
+          <a:lstStyle/>
+          <a:p>
+            <a:endParaRPr lang="en-US"/>
+          </a:p>
+        </p:txBody>
+      </p:sp>
+      <p:sp>
+        <p:nvSpPr>
+          <p:cNvPr id="1603" name="Q"/>
+          <p:cNvSpPr txBox="1"/>
+          <p:nvPr/>
+        </p:nvSpPr>
+        <p:spPr>
+          <a:xfrm>
+            <a:off x="762000" y="411504"/>
+            <a:ext cx="10668000" cy="2355623"/>
+          </a:xfrm>
+          <a:prstGeom prst="rect">
+            <a:avLst/>
+          </a:prstGeom>
+          <a:noFill/>
+        </p:spPr>
+        <p:txBody>
+          <a:bodyPr wrap="square" anchor="t"/>
+          <a:lstStyle/>
+          <a:p>
+            <a:pPr algn="l">
+              <a:lnSpc>
+                <a:spcPct val="105000"/>
+              </a:lnSpc>
+            </a:pPr>
+            <a:r>
+              <a:rPr lang="en-US" sz="6000" b="1" dirty="0">
+                <a:solidFill>
+                  <a:srgbClr val="FFFFFF"/>
+                </a:solidFill>
+              </a:rPr>
+              <a:t>Start  simple</a:t>
+            </a:r>
+          </a:p>
+          <a:p>
+            <a:pPr algn="l">
+              <a:lnSpc>
+                <a:spcPct val="105000"/>
+              </a:lnSpc>
+            </a:pPr>
+            <a:r>
+              <a:rPr lang="en-US" sz="6000" b="1" dirty="0">
+                <a:solidFill>
+                  <a:srgbClr val="FFFFFF"/>
+                </a:solidFill>
+              </a:rPr>
+              <a:t>Then evolve into a </a:t>
+            </a:r>
+            <a:r>
+              <a:rPr lang="en-US" sz="6000" b="1" i="1" dirty="0">
+                <a:solidFill>
+                  <a:srgbClr val="22D3EE"/>
+                </a:solidFill>
+              </a:rPr>
+              <a:t>product.</a:t>
+            </a:r>
+          </a:p>
+        </p:txBody>
+      </p:sp>
+      <p:grpSp>
+        <p:nvGrpSpPr>
+          <p:cNvPr id="3" name="Group 2">
+            <a:extLst>
+              <a:ext uri="{FF2B5EF4-FFF2-40B4-BE49-F238E27FC236}">
+                <a16:creationId xmlns:a16="http://schemas.microsoft.com/office/drawing/2014/main" id="{C86DDA9F-DD43-59A2-0129-A027E314CDEB}"/>
+              </a:ext>
+            </a:extLst>
+          </p:cNvPr>
+          <p:cNvGrpSpPr/>
+          <p:nvPr/>
+        </p:nvGrpSpPr>
+        <p:grpSpPr>
+          <a:xfrm>
+            <a:off x="743378" y="2838101"/>
+            <a:ext cx="10124672" cy="1524000"/>
+            <a:chOff x="762000" y="3624943"/>
+            <a:chExt cx="6634951" cy="1524000"/>
+          </a:xfrm>
+        </p:grpSpPr>
+        <p:sp>
+          <p:nvSpPr>
+            <p:cNvPr id="1610" name="B"/>
+            <p:cNvSpPr/>
+            <p:nvPr/>
+          </p:nvSpPr>
+          <p:spPr>
+            <a:xfrm>
+              <a:off x="762000" y="3624943"/>
+              <a:ext cx="3773409" cy="1524000"/>
+            </a:xfrm>
+            <a:prstGeom prst="roundRect">
+              <a:avLst>
+                <a:gd name="adj" fmla="val 6000"/>
+              </a:avLst>
+            </a:prstGeom>
+            <a:solidFill>
+              <a:schemeClr val="bg1">
+                <a:lumMod val="50000"/>
+              </a:schemeClr>
+            </a:solidFill>
+            <a:ln>
+              <a:noFill/>
+            </a:ln>
+          </p:spPr>
+          <p:txBody>
+            <a:bodyPr wrap="square" lIns="200000" tIns="200000" rIns="200000" bIns="200000" anchor="t"/>
+            <a:lstStyle/>
+            <a:p>
+              <a:pPr algn="l">
+                <a:spcBef>
+                  <a:spcPts val="300"/>
+                </a:spcBef>
+              </a:pPr>
+              <a:r>
+                <a:rPr lang="en-US" sz="2700" dirty="0">
+                  <a:solidFill>
+                    <a:srgbClr val="FFFFFF"/>
+                  </a:solidFill>
+                </a:rPr>
+                <a:t>Until now we learnt programming languages to talk with computers</a:t>
+              </a:r>
+              <a:endParaRPr lang="en-US" sz="2700" dirty="0">
+                <a:solidFill>
+                  <a:srgbClr val="94A3B8"/>
+                </a:solidFill>
+              </a:endParaRPr>
+            </a:p>
+          </p:txBody>
+        </p:sp>
+        <p:sp>
+          <p:nvSpPr>
+            <p:cNvPr id="1611" name="B"/>
+            <p:cNvSpPr/>
+            <p:nvPr/>
+          </p:nvSpPr>
+          <p:spPr>
+            <a:xfrm>
+              <a:off x="4371599" y="3624943"/>
+              <a:ext cx="3025352" cy="1524000"/>
+            </a:xfrm>
+            <a:prstGeom prst="roundRect">
+              <a:avLst>
+                <a:gd name="adj" fmla="val 6000"/>
+              </a:avLst>
+            </a:prstGeom>
+            <a:solidFill>
+              <a:schemeClr val="bg2"/>
+            </a:solidFill>
+            <a:ln>
+              <a:noFill/>
+            </a:ln>
+          </p:spPr>
+          <p:txBody>
+            <a:bodyPr wrap="square" lIns="200000" tIns="200000" rIns="200000" bIns="200000" anchor="t"/>
+            <a:lstStyle/>
+            <a:p>
+              <a:pPr algn="l"/>
+              <a:r>
+                <a:rPr lang="en-US" sz="2800" b="1" spc="300" dirty="0">
+                  <a:solidFill>
+                    <a:srgbClr val="1E293B"/>
+                  </a:solidFill>
+                </a:rPr>
+                <a:t>now they learnt</a:t>
+              </a:r>
+              <a:br>
+                <a:rPr lang="en-US" sz="2800" b="1" spc="300" dirty="0">
+                  <a:solidFill>
+                    <a:srgbClr val="1E293B"/>
+                  </a:solidFill>
+                </a:rPr>
+              </a:br>
+              <a:r>
+                <a:rPr lang="en-US" sz="2800" b="1" spc="300" dirty="0">
+                  <a:solidFill>
+                    <a:srgbClr val="1E293B"/>
+                  </a:solidFill>
+                </a:rPr>
+                <a:t>our language</a:t>
+              </a:r>
+              <a:endParaRPr lang="en-US" sz="2800" b="1" dirty="0">
+                <a:solidFill>
+                  <a:srgbClr val="1E293B"/>
+                </a:solidFill>
+              </a:endParaRPr>
+            </a:p>
+          </p:txBody>
+        </p:sp>
+      </p:grpSp>
+      <p:pic>
+        <p:nvPicPr>
+          <p:cNvPr id="5" name="Picture 4">
+            <a:extLst>
+              <a:ext uri="{FF2B5EF4-FFF2-40B4-BE49-F238E27FC236}">
+                <a16:creationId xmlns:a16="http://schemas.microsoft.com/office/drawing/2014/main" id="{95D01CF5-3779-C47E-5AA7-7E0126629325}"/>
+              </a:ext>
+            </a:extLst>
+          </p:cNvPr>
+          <p:cNvPicPr>
+            <a:picLocks noChangeAspect="1"/>
+          </p:cNvPicPr>
+          <p:nvPr/>
+        </p:nvPicPr>
+        <p:blipFill>
+          <a:blip r:embed="rId3"/>
+          <a:stretch>
+            <a:fillRect/>
+          </a:stretch>
+        </p:blipFill>
+        <p:spPr>
+          <a:xfrm>
+            <a:off x="9251318" y="4787580"/>
+            <a:ext cx="1735996" cy="1751683"/>
+          </a:xfrm>
+          <a:prstGeom prst="rect">
+            <a:avLst/>
+          </a:prstGeom>
+        </p:spPr>
+      </p:pic>
+      <p:sp>
+        <p:nvSpPr>
+          <p:cNvPr id="7" name="TextBox 6">
+            <a:extLst>
+              <a:ext uri="{FF2B5EF4-FFF2-40B4-BE49-F238E27FC236}">
+                <a16:creationId xmlns:a16="http://schemas.microsoft.com/office/drawing/2014/main" id="{ADAC7983-4AF8-14A4-A44D-2BB81412E54E}"/>
+              </a:ext>
+            </a:extLst>
+          </p:cNvPr>
+          <p:cNvSpPr txBox="1"/>
+          <p:nvPr/>
+        </p:nvSpPr>
+        <p:spPr>
+          <a:xfrm>
+            <a:off x="5884853" y="5092994"/>
+            <a:ext cx="2422352" cy="1200329"/>
+          </a:xfrm>
+          <a:prstGeom prst="rect">
+            <a:avLst/>
+          </a:prstGeom>
+          <a:noFill/>
+        </p:spPr>
+        <p:txBody>
+          <a:bodyPr wrap="square">
+            <a:spAutoFit/>
+          </a:bodyPr>
+          <a:lstStyle/>
+          <a:p>
+            <a:pPr algn="r"/>
+            <a:r>
+              <a:rPr lang="en-US" sz="2400" i="1" dirty="0">
+                <a:solidFill>
+                  <a:srgbClr val="94A3B8"/>
+                </a:solidFill>
+              </a:rPr>
+              <a:t>Download</a:t>
+            </a:r>
+            <a:br>
+              <a:rPr lang="en-US" sz="2400" i="1" dirty="0">
+                <a:solidFill>
+                  <a:srgbClr val="94A3B8"/>
+                </a:solidFill>
+              </a:rPr>
+            </a:br>
+            <a:r>
+              <a:rPr lang="en-US" sz="2400" i="1" dirty="0">
+                <a:solidFill>
+                  <a:srgbClr val="94A3B8"/>
+                </a:solidFill>
+              </a:rPr>
+              <a:t>Presentation</a:t>
+            </a:r>
+            <a:br>
+              <a:rPr lang="en-US" sz="2400" i="1" dirty="0">
+                <a:solidFill>
+                  <a:srgbClr val="94A3B8"/>
+                </a:solidFill>
+              </a:rPr>
+            </a:br>
+            <a:r>
+              <a:rPr lang="en-US" sz="2400" i="1" dirty="0">
+                <a:solidFill>
+                  <a:srgbClr val="94A3B8"/>
+                </a:solidFill>
+              </a:rPr>
+              <a:t>Demo projects</a:t>
+            </a:r>
+            <a:endParaRPr lang="tr-TR" sz="2400" i="1" dirty="0"/>
+          </a:p>
+        </p:txBody>
+      </p:sp>
+      <p:cxnSp>
+        <p:nvCxnSpPr>
+          <p:cNvPr id="9" name="Connector: Curved 8">
+            <a:extLst>
+              <a:ext uri="{FF2B5EF4-FFF2-40B4-BE49-F238E27FC236}">
+                <a16:creationId xmlns:a16="http://schemas.microsoft.com/office/drawing/2014/main" id="{E5D101DB-A4D3-4114-CE0B-9DA7CACA4509}"/>
+              </a:ext>
+            </a:extLst>
+          </p:cNvPr>
+          <p:cNvCxnSpPr>
+            <a:cxnSpLocks/>
+          </p:cNvCxnSpPr>
+          <p:nvPr/>
+        </p:nvCxnSpPr>
+        <p:spPr>
+          <a:xfrm flipV="1">
+            <a:off x="8251418" y="5192160"/>
+            <a:ext cx="957896" cy="649840"/>
+          </a:xfrm>
+          <a:prstGeom prst="curvedConnector3">
+            <a:avLst/>
+          </a:prstGeom>
+          <a:ln w="76200">
+            <a:tailEnd type="triangle"/>
+          </a:ln>
+        </p:spPr>
+        <p:style>
+          <a:lnRef idx="2">
+            <a:schemeClr val="accent1"/>
+          </a:lnRef>
+          <a:fillRef idx="0">
+            <a:schemeClr val="accent1"/>
+          </a:fillRef>
+          <a:effectRef idx="1">
+            <a:schemeClr val="accent1"/>
+          </a:effectRef>
+          <a:fontRef idx="minor">
+            <a:schemeClr val="tx1"/>
+          </a:fontRef>
+        </p:style>
+      </p:cxnSp>
+      <p:sp>
+        <p:nvSpPr>
+          <p:cNvPr id="2" name="SpeakerName">
+            <a:extLst>
+              <a:ext uri="{FF2B5EF4-FFF2-40B4-BE49-F238E27FC236}">
+                <a16:creationId xmlns:a16="http://schemas.microsoft.com/office/drawing/2014/main" id="{B67F7C9D-3984-DFAA-4F75-34BC31E06746}"/>
+              </a:ext>
+            </a:extLst>
+          </p:cNvPr>
+          <p:cNvSpPr txBox="1"/>
+          <p:nvPr/>
+        </p:nvSpPr>
+        <p:spPr>
+          <a:xfrm>
+            <a:off x="778693" y="5243714"/>
+            <a:ext cx="4094385" cy="1153029"/>
+          </a:xfrm>
+          <a:prstGeom prst="rect">
+            <a:avLst/>
+          </a:prstGeom>
+          <a:noFill/>
+        </p:spPr>
+        <p:txBody>
+          <a:bodyPr wrap="square" lIns="0" tIns="0" rIns="0" bIns="0" anchor="t"/>
+          <a:lstStyle/>
+          <a:p>
+            <a:pPr algn="l"/>
+            <a:r>
+              <a:rPr lang="en-US" sz="4000" b="1" dirty="0">
+                <a:solidFill>
+                  <a:schemeClr val="bg1"/>
+                </a:solidFill>
+              </a:rPr>
+              <a:t>Alper Ebicoglu</a:t>
+            </a:r>
+          </a:p>
+          <a:p>
+            <a:r>
+              <a:rPr lang="en-US" sz="2800" dirty="0">
+                <a:solidFill>
+                  <a:schemeClr val="bg1"/>
+                </a:solidFill>
+              </a:rPr>
+              <a:t>x.com/</a:t>
+            </a:r>
+            <a:r>
+              <a:rPr lang="en-US" sz="2800" dirty="0">
+                <a:solidFill>
+                  <a:srgbClr val="22D3EE"/>
+                </a:solidFill>
+              </a:rPr>
+              <a:t>alperebicoglu</a:t>
+            </a:r>
+          </a:p>
+        </p:txBody>
+      </p:sp>
+      <p:sp>
+        <p:nvSpPr>
+          <p:cNvPr id="13" name="Rectangle: Rounded Corners 12">
+            <a:extLst>
+              <a:ext uri="{FF2B5EF4-FFF2-40B4-BE49-F238E27FC236}">
+                <a16:creationId xmlns:a16="http://schemas.microsoft.com/office/drawing/2014/main" id="{17516DB6-9F60-477D-8214-F1524AF1287A}"/>
+              </a:ext>
+            </a:extLst>
+          </p:cNvPr>
+          <p:cNvSpPr/>
+          <p:nvPr/>
+        </p:nvSpPr>
+        <p:spPr>
+          <a:xfrm>
+            <a:off x="2897136" y="449382"/>
+            <a:ext cx="2826769" cy="999408"/>
+          </a:xfrm>
+          <a:prstGeom prst="roundRect">
+            <a:avLst/>
+          </a:prstGeom>
+          <a:noFill/>
+          <a:ln w="9525" cap="flat" cmpd="sng" algn="ctr">
+            <a:solidFill>
+              <a:schemeClr val="accent1"/>
+            </a:solidFill>
+            <a:prstDash val="solid"/>
+            <a:round/>
+            <a:headEnd type="none" w="med" len="med"/>
+            <a:tailEnd type="none" w="med" len="med"/>
+          </a:ln>
+        </p:spPr>
+        <p:style>
+          <a:lnRef idx="0">
+            <a:scrgbClr r="0" g="0" b="0"/>
+          </a:lnRef>
+          <a:fillRef idx="0">
+            <a:scrgbClr r="0" g="0" b="0"/>
+          </a:fillRef>
+          <a:effectRef idx="0">
+            <a:scrgbClr r="0" g="0" b="0"/>
+          </a:effectRef>
+          <a:fontRef idx="minor">
+            <a:schemeClr val="accent1"/>
+          </a:fontRef>
+        </p:style>
+        <p:txBody>
+          <a:bodyPr rtlCol="0" anchor="ctr"/>
+          <a:lstStyle/>
+          <a:p>
+            <a:pPr algn="ctr"/>
+            <a:endParaRPr lang="tr-TR" dirty="0"/>
+          </a:p>
+        </p:txBody>
+      </p:sp>
+      <p:sp>
+        <p:nvSpPr>
+          <p:cNvPr id="6" name="Rectangle: Rounded Corners 5">
+            <a:extLst>
+              <a:ext uri="{FF2B5EF4-FFF2-40B4-BE49-F238E27FC236}">
+                <a16:creationId xmlns:a16="http://schemas.microsoft.com/office/drawing/2014/main" id="{13B697C2-CD1F-7168-5C03-4D94888C954B}"/>
+              </a:ext>
+            </a:extLst>
+          </p:cNvPr>
+          <p:cNvSpPr/>
+          <p:nvPr/>
+        </p:nvSpPr>
+        <p:spPr>
+          <a:xfrm>
+            <a:off x="653927" y="5105523"/>
+            <a:ext cx="3953699" cy="1433739"/>
+          </a:xfrm>
+          <a:prstGeom prst="roundRect">
+            <a:avLst/>
+          </a:prstGeom>
+          <a:noFill/>
+          <a:ln w="9525" cap="flat" cmpd="sng" algn="ctr">
+            <a:solidFill>
+              <a:schemeClr val="accent1"/>
+            </a:solidFill>
+            <a:prstDash val="solid"/>
+            <a:round/>
+            <a:headEnd type="none" w="med" len="med"/>
+            <a:tailEnd type="none" w="med" len="med"/>
+          </a:ln>
+        </p:spPr>
+        <p:style>
+          <a:lnRef idx="0">
+            <a:scrgbClr r="0" g="0" b="0"/>
+          </a:lnRef>
+          <a:fillRef idx="0">
+            <a:scrgbClr r="0" g="0" b="0"/>
+          </a:fillRef>
+          <a:effectRef idx="0">
+            <a:scrgbClr r="0" g="0" b="0"/>
+          </a:effectRef>
+          <a:fontRef idx="minor">
+            <a:schemeClr val="accent1"/>
+          </a:fontRef>
+        </p:style>
+        <p:txBody>
+          <a:bodyPr rtlCol="0" anchor="ctr"/>
+          <a:lstStyle/>
+          <a:p>
+            <a:pPr algn="ctr"/>
+            <a:endParaRPr lang="tr-TR" dirty="0"/>
+          </a:p>
+        </p:txBody>
+      </p:sp>
+      <p:sp>
+        <p:nvSpPr>
+          <p:cNvPr id="8" name="Rectangle: Rounded Corners 7">
+            <a:extLst>
+              <a:ext uri="{FF2B5EF4-FFF2-40B4-BE49-F238E27FC236}">
+                <a16:creationId xmlns:a16="http://schemas.microsoft.com/office/drawing/2014/main" id="{3D0AE1AA-7E4C-A120-28E1-6595708F20F9}"/>
+              </a:ext>
+            </a:extLst>
+          </p:cNvPr>
+          <p:cNvSpPr/>
+          <p:nvPr/>
+        </p:nvSpPr>
+        <p:spPr>
+          <a:xfrm>
+            <a:off x="5884853" y="4643252"/>
+            <a:ext cx="5277952" cy="1995054"/>
+          </a:xfrm>
+          <a:prstGeom prst="roundRect">
+            <a:avLst/>
+          </a:prstGeom>
+          <a:noFill/>
+          <a:ln w="9525" cap="flat" cmpd="sng" algn="ctr">
+            <a:solidFill>
+              <a:schemeClr val="accent1"/>
+            </a:solidFill>
+            <a:prstDash val="solid"/>
+            <a:round/>
+            <a:headEnd type="none" w="med" len="med"/>
+            <a:tailEnd type="none" w="med" len="med"/>
+          </a:ln>
+        </p:spPr>
+        <p:style>
+          <a:lnRef idx="0">
+            <a:scrgbClr r="0" g="0" b="0"/>
+          </a:lnRef>
+          <a:fillRef idx="0">
+            <a:scrgbClr r="0" g="0" b="0"/>
+          </a:fillRef>
+          <a:effectRef idx="0">
+            <a:scrgbClr r="0" g="0" b="0"/>
+          </a:effectRef>
+          <a:fontRef idx="minor">
+            <a:schemeClr val="accent1"/>
+          </a:fontRef>
+        </p:style>
+        <p:txBody>
+          <a:bodyPr rtlCol="0" anchor="ctr"/>
+          <a:lstStyle/>
+          <a:p>
+            <a:pPr algn="ctr"/>
+            <a:endParaRPr lang="tr-TR" dirty="0"/>
+          </a:p>
+        </p:txBody>
+      </p:sp>
+    </p:spTree>
+    <p:extLst>
+      <p:ext uri="{BB962C8B-B14F-4D97-AF65-F5344CB8AC3E}">
+        <p14:creationId xmlns:p14="http://schemas.microsoft.com/office/powerpoint/2010/main" val="3469954536"/>
+      </p:ext>
+    </p:extLst>
+  </p:cSld>
+  <p:clrMapOvr>
+    <a:masterClrMapping/>
+  </p:clrMapOvr>
+</p:sld>
+</file>
+
+<file path=ppt/slides/slide3.xml><?xml version="1.0" encoding="utf-8"?>
 <p:sld xmlns:a="http://schemas.openxmlformats.org/drawingml/2006/main" xmlns:r="http://schemas.openxmlformats.org/officeDocument/2006/relationships" xmlns:p="http://schemas.openxmlformats.org/presentationml/2006/main" showMasterSp="0">
   <p:cSld>
     <p:spTree>
@@ -12319,1206 +13572,6 @@
 </p:sld>
 </file>
 
-<file path=ppt/slides/slide20.xml><?xml version="1.0" encoding="utf-8"?>
-<p:sld xmlns:a="http://schemas.openxmlformats.org/drawingml/2006/main" xmlns:r="http://schemas.openxmlformats.org/officeDocument/2006/relationships" xmlns:p="http://schemas.openxmlformats.org/presentationml/2006/main">
-  <p:cSld>
-    <p:spTree>
-      <p:nvGrpSpPr>
-        <p:cNvPr id="1" name="">
-          <a:extLst>
-            <a:ext uri="{FF2B5EF4-FFF2-40B4-BE49-F238E27FC236}">
-              <a16:creationId xmlns:a16="http://schemas.microsoft.com/office/drawing/2014/main" id="{190DE38D-6D72-586F-A672-EC9CD8B062AF}"/>
-            </a:ext>
-          </a:extLst>
-        </p:cNvPr>
-        <p:cNvGrpSpPr/>
-        <p:nvPr/>
-      </p:nvGrpSpPr>
-      <p:grpSpPr>
-        <a:xfrm>
-          <a:off x="0" y="0"/>
-          <a:ext cx="0" cy="0"/>
-          <a:chOff x="0" y="0"/>
-          <a:chExt cx="0" cy="0"/>
-        </a:xfrm>
-      </p:grpSpPr>
-      <p:sp>
-        <p:nvSpPr>
-          <p:cNvPr id="7" name="Panel">
-            <a:extLst>
-              <a:ext uri="{FF2B5EF4-FFF2-40B4-BE49-F238E27FC236}">
-                <a16:creationId xmlns:a16="http://schemas.microsoft.com/office/drawing/2014/main" id="{B05FC43A-919B-6C85-31C9-D03E8F18B296}"/>
-              </a:ext>
-            </a:extLst>
-          </p:cNvPr>
-          <p:cNvSpPr/>
-          <p:nvPr/>
-        </p:nvSpPr>
-        <p:spPr>
-          <a:xfrm>
-            <a:off x="73026" y="2822121"/>
-            <a:ext cx="12118974" cy="3064329"/>
-          </a:xfrm>
-          <a:prstGeom prst="rect">
-            <a:avLst/>
-          </a:prstGeom>
-          <a:solidFill>
-            <a:srgbClr val="0F172A"/>
-          </a:solidFill>
-          <a:ln>
-            <a:noFill/>
-          </a:ln>
-        </p:spPr>
-        <p:txBody>
-          <a:bodyPr/>
-          <a:lstStyle/>
-          <a:p>
-            <a:endParaRPr lang="en-US" sz="3200"/>
-          </a:p>
-        </p:txBody>
-      </p:sp>
-      <p:sp>
-        <p:nvSpPr>
-          <p:cNvPr id="8" name="Q">
-            <a:extLst>
-              <a:ext uri="{FF2B5EF4-FFF2-40B4-BE49-F238E27FC236}">
-                <a16:creationId xmlns:a16="http://schemas.microsoft.com/office/drawing/2014/main" id="{B9C6DB59-7B03-2063-5030-5346636B1400}"/>
-              </a:ext>
-            </a:extLst>
-          </p:cNvPr>
-          <p:cNvSpPr txBox="1"/>
-          <p:nvPr/>
-        </p:nvSpPr>
-        <p:spPr>
-          <a:xfrm>
-            <a:off x="444500" y="566738"/>
-            <a:ext cx="11376025" cy="2255383"/>
-          </a:xfrm>
-          <a:prstGeom prst="rect">
-            <a:avLst/>
-          </a:prstGeom>
-          <a:noFill/>
-        </p:spPr>
-        <p:txBody>
-          <a:bodyPr wrap="square" anchor="t"/>
-          <a:lstStyle/>
-          <a:p>
-            <a:pPr>
-              <a:lnSpc>
-                <a:spcPct val="105000"/>
-              </a:lnSpc>
-            </a:pPr>
-            <a:r>
-              <a:rPr lang="en-US" sz="6000" b="1" dirty="0">
-                <a:solidFill>
-                  <a:srgbClr val="0F172A"/>
-                </a:solidFill>
-              </a:rPr>
-              <a:t>What if we used 100% of our </a:t>
-            </a:r>
-            <a:br>
-              <a:rPr lang="en-US" sz="6000" b="1" dirty="0">
-                <a:solidFill>
-                  <a:srgbClr val="0F172A"/>
-                </a:solidFill>
-              </a:rPr>
-            </a:br>
-            <a:r>
-              <a:rPr lang="en-US" sz="6000" b="1" dirty="0">
-                <a:solidFill>
-                  <a:srgbClr val="0F172A"/>
-                </a:solidFill>
-              </a:rPr>
-              <a:t>DB’s potential</a:t>
-            </a:r>
-            <a:r>
-              <a:rPr lang="en-US" sz="5400" b="1" dirty="0">
-                <a:solidFill>
-                  <a:srgbClr val="0F172A"/>
-                </a:solidFill>
-              </a:rPr>
-              <a:t>🤔</a:t>
-            </a:r>
-          </a:p>
-        </p:txBody>
-      </p:sp>
-      <p:sp>
-        <p:nvSpPr>
-          <p:cNvPr id="9" name="Q">
-            <a:extLst>
-              <a:ext uri="{FF2B5EF4-FFF2-40B4-BE49-F238E27FC236}">
-                <a16:creationId xmlns:a16="http://schemas.microsoft.com/office/drawing/2014/main" id="{1AB057A2-73DE-48D4-8534-77FBCD65A14A}"/>
-              </a:ext>
-            </a:extLst>
-          </p:cNvPr>
-          <p:cNvSpPr txBox="1"/>
-          <p:nvPr/>
-        </p:nvSpPr>
-        <p:spPr>
-          <a:xfrm>
-            <a:off x="444500" y="3090862"/>
-            <a:ext cx="11376025" cy="2400300"/>
-          </a:xfrm>
-          <a:prstGeom prst="rect">
-            <a:avLst/>
-          </a:prstGeom>
-          <a:noFill/>
-        </p:spPr>
-        <p:txBody>
-          <a:bodyPr wrap="square" anchor="t"/>
-          <a:lstStyle/>
-          <a:p>
-            <a:pPr algn="l">
-              <a:lnSpc>
-                <a:spcPct val="105000"/>
-              </a:lnSpc>
-            </a:pPr>
-            <a:r>
-              <a:rPr lang="en-US" sz="6600" b="1" u="sng" dirty="0">
-                <a:solidFill>
-                  <a:srgbClr val="FFFFFF"/>
-                </a:solidFill>
-              </a:rPr>
-              <a:t>Taking actions</a:t>
-            </a:r>
-            <a:r>
-              <a:rPr lang="en-US" sz="6600" b="1" dirty="0">
-                <a:solidFill>
-                  <a:srgbClr val="FFFFFF"/>
-                </a:solidFill>
-              </a:rPr>
-              <a:t> </a:t>
-            </a:r>
-            <a:br>
-              <a:rPr lang="en-US" sz="6600" b="1" dirty="0">
-                <a:solidFill>
-                  <a:srgbClr val="FFFFFF"/>
-                </a:solidFill>
-              </a:rPr>
-            </a:br>
-            <a:r>
-              <a:rPr lang="en-US" sz="6600" b="1" dirty="0">
-                <a:solidFill>
-                  <a:srgbClr val="FFFFFF"/>
-                </a:solidFill>
-              </a:rPr>
-              <a:t>instead of just reporting!</a:t>
-            </a:r>
-          </a:p>
-        </p:txBody>
-      </p:sp>
-    </p:spTree>
-    <p:extLst>
-      <p:ext uri="{BB962C8B-B14F-4D97-AF65-F5344CB8AC3E}">
-        <p14:creationId xmlns:p14="http://schemas.microsoft.com/office/powerpoint/2010/main" val="1603450424"/>
-      </p:ext>
-    </p:extLst>
-  </p:cSld>
-  <p:clrMapOvr>
-    <a:masterClrMapping/>
-  </p:clrMapOvr>
-</p:sld>
-</file>
-
-<file path=ppt/slides/slide21.xml><?xml version="1.0" encoding="utf-8"?>
-<p:sld xmlns:a="http://schemas.openxmlformats.org/drawingml/2006/main" xmlns:r="http://schemas.openxmlformats.org/officeDocument/2006/relationships" xmlns:p="http://schemas.openxmlformats.org/presentationml/2006/main">
-  <p:cSld>
-    <p:spTree>
-      <p:nvGrpSpPr>
-        <p:cNvPr id="1" name=""/>
-        <p:cNvGrpSpPr/>
-        <p:nvPr/>
-      </p:nvGrpSpPr>
-      <p:grpSpPr>
-        <a:xfrm>
-          <a:off x="0" y="0"/>
-          <a:ext cx="0" cy="0"/>
-          <a:chOff x="0" y="0"/>
-          <a:chExt cx="0" cy="0"/>
-        </a:xfrm>
-      </p:grpSpPr>
-      <p:sp>
-        <p:nvSpPr>
-          <p:cNvPr id="1600" name="BG"/>
-          <p:cNvSpPr/>
-          <p:nvPr/>
-        </p:nvSpPr>
-        <p:spPr>
-          <a:xfrm>
-            <a:off x="76200" y="0"/>
-            <a:ext cx="12115800" cy="6858000"/>
-          </a:xfrm>
-          <a:prstGeom prst="rect">
-            <a:avLst/>
-          </a:prstGeom>
-          <a:solidFill>
-            <a:srgbClr val="0F172A"/>
-          </a:solidFill>
-          <a:ln>
-            <a:noFill/>
-          </a:ln>
-        </p:spPr>
-        <p:txBody>
-          <a:bodyPr/>
-          <a:lstStyle/>
-          <a:p>
-            <a:endParaRPr lang="en-US" dirty="0"/>
-          </a:p>
-        </p:txBody>
-      </p:sp>
-      <p:sp>
-        <p:nvSpPr>
-          <p:cNvPr id="1601" name="Bar"/>
-          <p:cNvSpPr/>
-          <p:nvPr/>
-        </p:nvSpPr>
-        <p:spPr>
-          <a:xfrm>
-            <a:off x="0" y="1016000"/>
-            <a:ext cx="76200" cy="4826000"/>
-          </a:xfrm>
-          <a:prstGeom prst="rect">
-            <a:avLst/>
-          </a:prstGeom>
-          <a:solidFill>
-            <a:srgbClr val="22D3EE"/>
-          </a:solidFill>
-          <a:ln>
-            <a:noFill/>
-          </a:ln>
-        </p:spPr>
-        <p:txBody>
-          <a:bodyPr/>
-          <a:lstStyle/>
-          <a:p>
-            <a:endParaRPr lang="en-US"/>
-          </a:p>
-        </p:txBody>
-      </p:sp>
-      <p:sp>
-        <p:nvSpPr>
-          <p:cNvPr id="1603" name="Q"/>
-          <p:cNvSpPr txBox="1"/>
-          <p:nvPr/>
-        </p:nvSpPr>
-        <p:spPr>
-          <a:xfrm>
-            <a:off x="762000" y="411504"/>
-            <a:ext cx="10668000" cy="2355623"/>
-          </a:xfrm>
-          <a:prstGeom prst="rect">
-            <a:avLst/>
-          </a:prstGeom>
-          <a:noFill/>
-        </p:spPr>
-        <p:txBody>
-          <a:bodyPr wrap="square" anchor="t"/>
-          <a:lstStyle/>
-          <a:p>
-            <a:pPr algn="l">
-              <a:lnSpc>
-                <a:spcPct val="105000"/>
-              </a:lnSpc>
-            </a:pPr>
-            <a:r>
-              <a:rPr lang="en-US" sz="6000" b="1" dirty="0">
-                <a:solidFill>
-                  <a:srgbClr val="FFFFFF"/>
-                </a:solidFill>
-              </a:rPr>
-              <a:t>Start  simple</a:t>
-            </a:r>
-          </a:p>
-          <a:p>
-            <a:pPr algn="l">
-              <a:lnSpc>
-                <a:spcPct val="105000"/>
-              </a:lnSpc>
-            </a:pPr>
-            <a:r>
-              <a:rPr lang="en-US" sz="6000" b="1" dirty="0">
-                <a:solidFill>
-                  <a:srgbClr val="FFFFFF"/>
-                </a:solidFill>
-              </a:rPr>
-              <a:t>Then evolve into a </a:t>
-            </a:r>
-            <a:r>
-              <a:rPr lang="en-US" sz="6000" b="1" i="1" dirty="0">
-                <a:solidFill>
-                  <a:srgbClr val="22D3EE"/>
-                </a:solidFill>
-              </a:rPr>
-              <a:t>product.</a:t>
-            </a:r>
-          </a:p>
-        </p:txBody>
-      </p:sp>
-      <p:grpSp>
-        <p:nvGrpSpPr>
-          <p:cNvPr id="3" name="Group 2">
-            <a:extLst>
-              <a:ext uri="{FF2B5EF4-FFF2-40B4-BE49-F238E27FC236}">
-                <a16:creationId xmlns:a16="http://schemas.microsoft.com/office/drawing/2014/main" id="{C86DDA9F-DD43-59A2-0129-A027E314CDEB}"/>
-              </a:ext>
-            </a:extLst>
-          </p:cNvPr>
-          <p:cNvGrpSpPr/>
-          <p:nvPr/>
-        </p:nvGrpSpPr>
-        <p:grpSpPr>
-          <a:xfrm>
-            <a:off x="743378" y="2838101"/>
-            <a:ext cx="10124672" cy="1524000"/>
-            <a:chOff x="762000" y="3624943"/>
-            <a:chExt cx="6634951" cy="1524000"/>
-          </a:xfrm>
-        </p:grpSpPr>
-        <p:sp>
-          <p:nvSpPr>
-            <p:cNvPr id="1610" name="B"/>
-            <p:cNvSpPr/>
-            <p:nvPr/>
-          </p:nvSpPr>
-          <p:spPr>
-            <a:xfrm>
-              <a:off x="762000" y="3624943"/>
-              <a:ext cx="3773409" cy="1524000"/>
-            </a:xfrm>
-            <a:prstGeom prst="roundRect">
-              <a:avLst>
-                <a:gd name="adj" fmla="val 6000"/>
-              </a:avLst>
-            </a:prstGeom>
-            <a:solidFill>
-              <a:schemeClr val="bg1">
-                <a:lumMod val="50000"/>
-              </a:schemeClr>
-            </a:solidFill>
-            <a:ln>
-              <a:noFill/>
-            </a:ln>
-          </p:spPr>
-          <p:txBody>
-            <a:bodyPr wrap="square" lIns="200000" tIns="200000" rIns="200000" bIns="200000" anchor="t"/>
-            <a:lstStyle/>
-            <a:p>
-              <a:pPr algn="l">
-                <a:spcBef>
-                  <a:spcPts val="300"/>
-                </a:spcBef>
-              </a:pPr>
-              <a:r>
-                <a:rPr lang="en-US" sz="2700" dirty="0">
-                  <a:solidFill>
-                    <a:srgbClr val="FFFFFF"/>
-                  </a:solidFill>
-                </a:rPr>
-                <a:t>Until now we learnt programming languages to talk with computers</a:t>
-              </a:r>
-              <a:endParaRPr lang="en-US" sz="2700" dirty="0">
-                <a:solidFill>
-                  <a:srgbClr val="94A3B8"/>
-                </a:solidFill>
-              </a:endParaRPr>
-            </a:p>
-          </p:txBody>
-        </p:sp>
-        <p:sp>
-          <p:nvSpPr>
-            <p:cNvPr id="1611" name="B"/>
-            <p:cNvSpPr/>
-            <p:nvPr/>
-          </p:nvSpPr>
-          <p:spPr>
-            <a:xfrm>
-              <a:off x="4371599" y="3624943"/>
-              <a:ext cx="3025352" cy="1524000"/>
-            </a:xfrm>
-            <a:prstGeom prst="roundRect">
-              <a:avLst>
-                <a:gd name="adj" fmla="val 6000"/>
-              </a:avLst>
-            </a:prstGeom>
-            <a:solidFill>
-              <a:schemeClr val="bg2"/>
-            </a:solidFill>
-            <a:ln>
-              <a:noFill/>
-            </a:ln>
-          </p:spPr>
-          <p:txBody>
-            <a:bodyPr wrap="square" lIns="200000" tIns="200000" rIns="200000" bIns="200000" anchor="t"/>
-            <a:lstStyle/>
-            <a:p>
-              <a:pPr algn="l"/>
-              <a:r>
-                <a:rPr lang="en-US" sz="2800" b="1" spc="300" dirty="0">
-                  <a:solidFill>
-                    <a:srgbClr val="1E293B"/>
-                  </a:solidFill>
-                </a:rPr>
-                <a:t>now they learnt</a:t>
-              </a:r>
-              <a:br>
-                <a:rPr lang="en-US" sz="2800" b="1" spc="300" dirty="0">
-                  <a:solidFill>
-                    <a:srgbClr val="1E293B"/>
-                  </a:solidFill>
-                </a:rPr>
-              </a:br>
-              <a:r>
-                <a:rPr lang="en-US" sz="2800" b="1" spc="300" dirty="0">
-                  <a:solidFill>
-                    <a:srgbClr val="1E293B"/>
-                  </a:solidFill>
-                </a:rPr>
-                <a:t>our language</a:t>
-              </a:r>
-              <a:endParaRPr lang="en-US" sz="2800" b="1" dirty="0">
-                <a:solidFill>
-                  <a:srgbClr val="1E293B"/>
-                </a:solidFill>
-              </a:endParaRPr>
-            </a:p>
-          </p:txBody>
-        </p:sp>
-      </p:grpSp>
-      <p:pic>
-        <p:nvPicPr>
-          <p:cNvPr id="5" name="Picture 4">
-            <a:extLst>
-              <a:ext uri="{FF2B5EF4-FFF2-40B4-BE49-F238E27FC236}">
-                <a16:creationId xmlns:a16="http://schemas.microsoft.com/office/drawing/2014/main" id="{95D01CF5-3779-C47E-5AA7-7E0126629325}"/>
-              </a:ext>
-            </a:extLst>
-          </p:cNvPr>
-          <p:cNvPicPr>
-            <a:picLocks noChangeAspect="1"/>
-          </p:cNvPicPr>
-          <p:nvPr/>
-        </p:nvPicPr>
-        <p:blipFill>
-          <a:blip r:embed="rId3"/>
-          <a:stretch>
-            <a:fillRect/>
-          </a:stretch>
-        </p:blipFill>
-        <p:spPr>
-          <a:xfrm>
-            <a:off x="9251318" y="4787580"/>
-            <a:ext cx="1735996" cy="1751683"/>
-          </a:xfrm>
-          <a:prstGeom prst="rect">
-            <a:avLst/>
-          </a:prstGeom>
-        </p:spPr>
-      </p:pic>
-      <p:sp>
-        <p:nvSpPr>
-          <p:cNvPr id="7" name="TextBox 6">
-            <a:extLst>
-              <a:ext uri="{FF2B5EF4-FFF2-40B4-BE49-F238E27FC236}">
-                <a16:creationId xmlns:a16="http://schemas.microsoft.com/office/drawing/2014/main" id="{ADAC7983-4AF8-14A4-A44D-2BB81412E54E}"/>
-              </a:ext>
-            </a:extLst>
-          </p:cNvPr>
-          <p:cNvSpPr txBox="1"/>
-          <p:nvPr/>
-        </p:nvSpPr>
-        <p:spPr>
-          <a:xfrm>
-            <a:off x="5884853" y="5092994"/>
-            <a:ext cx="2422352" cy="1200329"/>
-          </a:xfrm>
-          <a:prstGeom prst="rect">
-            <a:avLst/>
-          </a:prstGeom>
-          <a:noFill/>
-        </p:spPr>
-        <p:txBody>
-          <a:bodyPr wrap="square">
-            <a:spAutoFit/>
-          </a:bodyPr>
-          <a:lstStyle/>
-          <a:p>
-            <a:pPr algn="r"/>
-            <a:r>
-              <a:rPr lang="en-US" sz="2400" i="1" dirty="0">
-                <a:solidFill>
-                  <a:srgbClr val="94A3B8"/>
-                </a:solidFill>
-              </a:rPr>
-              <a:t>Download</a:t>
-            </a:r>
-            <a:br>
-              <a:rPr lang="en-US" sz="2400" i="1" dirty="0">
-                <a:solidFill>
-                  <a:srgbClr val="94A3B8"/>
-                </a:solidFill>
-              </a:rPr>
-            </a:br>
-            <a:r>
-              <a:rPr lang="en-US" sz="2400" i="1" dirty="0">
-                <a:solidFill>
-                  <a:srgbClr val="94A3B8"/>
-                </a:solidFill>
-              </a:rPr>
-              <a:t>Presentation</a:t>
-            </a:r>
-            <a:br>
-              <a:rPr lang="en-US" sz="2400" i="1" dirty="0">
-                <a:solidFill>
-                  <a:srgbClr val="94A3B8"/>
-                </a:solidFill>
-              </a:rPr>
-            </a:br>
-            <a:r>
-              <a:rPr lang="en-US" sz="2400" i="1" dirty="0">
-                <a:solidFill>
-                  <a:srgbClr val="94A3B8"/>
-                </a:solidFill>
-              </a:rPr>
-              <a:t>Demo projects</a:t>
-            </a:r>
-            <a:endParaRPr lang="tr-TR" sz="2400" i="1" dirty="0"/>
-          </a:p>
-        </p:txBody>
-      </p:sp>
-      <p:cxnSp>
-        <p:nvCxnSpPr>
-          <p:cNvPr id="9" name="Connector: Curved 8">
-            <a:extLst>
-              <a:ext uri="{FF2B5EF4-FFF2-40B4-BE49-F238E27FC236}">
-                <a16:creationId xmlns:a16="http://schemas.microsoft.com/office/drawing/2014/main" id="{E5D101DB-A4D3-4114-CE0B-9DA7CACA4509}"/>
-              </a:ext>
-            </a:extLst>
-          </p:cNvPr>
-          <p:cNvCxnSpPr>
-            <a:cxnSpLocks/>
-          </p:cNvCxnSpPr>
-          <p:nvPr/>
-        </p:nvCxnSpPr>
-        <p:spPr>
-          <a:xfrm flipV="1">
-            <a:off x="8251418" y="5192160"/>
-            <a:ext cx="957896" cy="649840"/>
-          </a:xfrm>
-          <a:prstGeom prst="curvedConnector3">
-            <a:avLst/>
-          </a:prstGeom>
-          <a:ln w="76200">
-            <a:tailEnd type="triangle"/>
-          </a:ln>
-        </p:spPr>
-        <p:style>
-          <a:lnRef idx="2">
-            <a:schemeClr val="accent1"/>
-          </a:lnRef>
-          <a:fillRef idx="0">
-            <a:schemeClr val="accent1"/>
-          </a:fillRef>
-          <a:effectRef idx="1">
-            <a:schemeClr val="accent1"/>
-          </a:effectRef>
-          <a:fontRef idx="minor">
-            <a:schemeClr val="tx1"/>
-          </a:fontRef>
-        </p:style>
-      </p:cxnSp>
-      <p:sp>
-        <p:nvSpPr>
-          <p:cNvPr id="2" name="SpeakerName">
-            <a:extLst>
-              <a:ext uri="{FF2B5EF4-FFF2-40B4-BE49-F238E27FC236}">
-                <a16:creationId xmlns:a16="http://schemas.microsoft.com/office/drawing/2014/main" id="{B67F7C9D-3984-DFAA-4F75-34BC31E06746}"/>
-              </a:ext>
-            </a:extLst>
-          </p:cNvPr>
-          <p:cNvSpPr txBox="1"/>
-          <p:nvPr/>
-        </p:nvSpPr>
-        <p:spPr>
-          <a:xfrm>
-            <a:off x="778693" y="5243714"/>
-            <a:ext cx="4094385" cy="1153029"/>
-          </a:xfrm>
-          <a:prstGeom prst="rect">
-            <a:avLst/>
-          </a:prstGeom>
-          <a:noFill/>
-        </p:spPr>
-        <p:txBody>
-          <a:bodyPr wrap="square" lIns="0" tIns="0" rIns="0" bIns="0" anchor="t"/>
-          <a:lstStyle/>
-          <a:p>
-            <a:pPr algn="l"/>
-            <a:r>
-              <a:rPr lang="en-US" sz="4000" b="1" dirty="0">
-                <a:solidFill>
-                  <a:schemeClr val="bg1"/>
-                </a:solidFill>
-              </a:rPr>
-              <a:t>Alper Ebicoglu</a:t>
-            </a:r>
-          </a:p>
-          <a:p>
-            <a:r>
-              <a:rPr lang="en-US" sz="2800" dirty="0">
-                <a:solidFill>
-                  <a:schemeClr val="bg1"/>
-                </a:solidFill>
-              </a:rPr>
-              <a:t>x.com/</a:t>
-            </a:r>
-            <a:r>
-              <a:rPr lang="en-US" sz="2800" dirty="0">
-                <a:solidFill>
-                  <a:srgbClr val="22D3EE"/>
-                </a:solidFill>
-              </a:rPr>
-              <a:t>alperebicoglu</a:t>
-            </a:r>
-          </a:p>
-        </p:txBody>
-      </p:sp>
-      <p:sp>
-        <p:nvSpPr>
-          <p:cNvPr id="13" name="Rectangle: Rounded Corners 12">
-            <a:extLst>
-              <a:ext uri="{FF2B5EF4-FFF2-40B4-BE49-F238E27FC236}">
-                <a16:creationId xmlns:a16="http://schemas.microsoft.com/office/drawing/2014/main" id="{17516DB6-9F60-477D-8214-F1524AF1287A}"/>
-              </a:ext>
-            </a:extLst>
-          </p:cNvPr>
-          <p:cNvSpPr/>
-          <p:nvPr/>
-        </p:nvSpPr>
-        <p:spPr>
-          <a:xfrm>
-            <a:off x="2897136" y="449382"/>
-            <a:ext cx="2826769" cy="999408"/>
-          </a:xfrm>
-          <a:prstGeom prst="roundRect">
-            <a:avLst/>
-          </a:prstGeom>
-          <a:noFill/>
-          <a:ln w="9525" cap="flat" cmpd="sng" algn="ctr">
-            <a:solidFill>
-              <a:schemeClr val="accent1"/>
-            </a:solidFill>
-            <a:prstDash val="solid"/>
-            <a:round/>
-            <a:headEnd type="none" w="med" len="med"/>
-            <a:tailEnd type="none" w="med" len="med"/>
-          </a:ln>
-        </p:spPr>
-        <p:style>
-          <a:lnRef idx="0">
-            <a:scrgbClr r="0" g="0" b="0"/>
-          </a:lnRef>
-          <a:fillRef idx="0">
-            <a:scrgbClr r="0" g="0" b="0"/>
-          </a:fillRef>
-          <a:effectRef idx="0">
-            <a:scrgbClr r="0" g="0" b="0"/>
-          </a:effectRef>
-          <a:fontRef idx="minor">
-            <a:schemeClr val="accent1"/>
-          </a:fontRef>
-        </p:style>
-        <p:txBody>
-          <a:bodyPr rtlCol="0" anchor="ctr"/>
-          <a:lstStyle/>
-          <a:p>
-            <a:pPr algn="ctr"/>
-            <a:endParaRPr lang="tr-TR" dirty="0"/>
-          </a:p>
-        </p:txBody>
-      </p:sp>
-      <p:sp>
-        <p:nvSpPr>
-          <p:cNvPr id="6" name="Rectangle: Rounded Corners 5">
-            <a:extLst>
-              <a:ext uri="{FF2B5EF4-FFF2-40B4-BE49-F238E27FC236}">
-                <a16:creationId xmlns:a16="http://schemas.microsoft.com/office/drawing/2014/main" id="{13B697C2-CD1F-7168-5C03-4D94888C954B}"/>
-              </a:ext>
-            </a:extLst>
-          </p:cNvPr>
-          <p:cNvSpPr/>
-          <p:nvPr/>
-        </p:nvSpPr>
-        <p:spPr>
-          <a:xfrm>
-            <a:off x="653927" y="5105523"/>
-            <a:ext cx="3953699" cy="1433739"/>
-          </a:xfrm>
-          <a:prstGeom prst="roundRect">
-            <a:avLst/>
-          </a:prstGeom>
-          <a:noFill/>
-          <a:ln w="9525" cap="flat" cmpd="sng" algn="ctr">
-            <a:solidFill>
-              <a:schemeClr val="accent1"/>
-            </a:solidFill>
-            <a:prstDash val="solid"/>
-            <a:round/>
-            <a:headEnd type="none" w="med" len="med"/>
-            <a:tailEnd type="none" w="med" len="med"/>
-          </a:ln>
-        </p:spPr>
-        <p:style>
-          <a:lnRef idx="0">
-            <a:scrgbClr r="0" g="0" b="0"/>
-          </a:lnRef>
-          <a:fillRef idx="0">
-            <a:scrgbClr r="0" g="0" b="0"/>
-          </a:fillRef>
-          <a:effectRef idx="0">
-            <a:scrgbClr r="0" g="0" b="0"/>
-          </a:effectRef>
-          <a:fontRef idx="minor">
-            <a:schemeClr val="accent1"/>
-          </a:fontRef>
-        </p:style>
-        <p:txBody>
-          <a:bodyPr rtlCol="0" anchor="ctr"/>
-          <a:lstStyle/>
-          <a:p>
-            <a:pPr algn="ctr"/>
-            <a:endParaRPr lang="tr-TR" dirty="0"/>
-          </a:p>
-        </p:txBody>
-      </p:sp>
-      <p:sp>
-        <p:nvSpPr>
-          <p:cNvPr id="8" name="Rectangle: Rounded Corners 7">
-            <a:extLst>
-              <a:ext uri="{FF2B5EF4-FFF2-40B4-BE49-F238E27FC236}">
-                <a16:creationId xmlns:a16="http://schemas.microsoft.com/office/drawing/2014/main" id="{3D0AE1AA-7E4C-A120-28E1-6595708F20F9}"/>
-              </a:ext>
-            </a:extLst>
-          </p:cNvPr>
-          <p:cNvSpPr/>
-          <p:nvPr/>
-        </p:nvSpPr>
-        <p:spPr>
-          <a:xfrm>
-            <a:off x="5884853" y="4643252"/>
-            <a:ext cx="5277952" cy="1995054"/>
-          </a:xfrm>
-          <a:prstGeom prst="roundRect">
-            <a:avLst/>
-          </a:prstGeom>
-          <a:noFill/>
-          <a:ln w="9525" cap="flat" cmpd="sng" algn="ctr">
-            <a:solidFill>
-              <a:schemeClr val="accent1"/>
-            </a:solidFill>
-            <a:prstDash val="solid"/>
-            <a:round/>
-            <a:headEnd type="none" w="med" len="med"/>
-            <a:tailEnd type="none" w="med" len="med"/>
-          </a:ln>
-        </p:spPr>
-        <p:style>
-          <a:lnRef idx="0">
-            <a:scrgbClr r="0" g="0" b="0"/>
-          </a:lnRef>
-          <a:fillRef idx="0">
-            <a:scrgbClr r="0" g="0" b="0"/>
-          </a:fillRef>
-          <a:effectRef idx="0">
-            <a:scrgbClr r="0" g="0" b="0"/>
-          </a:effectRef>
-          <a:fontRef idx="minor">
-            <a:schemeClr val="accent1"/>
-          </a:fontRef>
-        </p:style>
-        <p:txBody>
-          <a:bodyPr rtlCol="0" anchor="ctr"/>
-          <a:lstStyle/>
-          <a:p>
-            <a:pPr algn="ctr"/>
-            <a:endParaRPr lang="tr-TR" dirty="0"/>
-          </a:p>
-        </p:txBody>
-      </p:sp>
-    </p:spTree>
-    <p:extLst>
-      <p:ext uri="{BB962C8B-B14F-4D97-AF65-F5344CB8AC3E}">
-        <p14:creationId xmlns:p14="http://schemas.microsoft.com/office/powerpoint/2010/main" val="3469954536"/>
-      </p:ext>
-    </p:extLst>
-  </p:cSld>
-  <p:clrMapOvr>
-    <a:masterClrMapping/>
-  </p:clrMapOvr>
-</p:sld>
-</file>
-
-<file path=ppt/slides/slide3.xml><?xml version="1.0" encoding="utf-8"?>
-<p:sld xmlns:a="http://schemas.openxmlformats.org/drawingml/2006/main" xmlns:r="http://schemas.openxmlformats.org/officeDocument/2006/relationships" xmlns:p="http://schemas.openxmlformats.org/presentationml/2006/main">
-  <p:cSld>
-    <p:spTree>
-      <p:nvGrpSpPr>
-        <p:cNvPr id="1" name=""/>
-        <p:cNvGrpSpPr/>
-        <p:nvPr/>
-      </p:nvGrpSpPr>
-      <p:grpSpPr>
-        <a:xfrm>
-          <a:off x="0" y="0"/>
-          <a:ext cx="0" cy="0"/>
-          <a:chOff x="0" y="0"/>
-          <a:chExt cx="0" cy="0"/>
-        </a:xfrm>
-      </p:grpSpPr>
-      <p:sp>
-        <p:nvSpPr>
-          <p:cNvPr id="2" name="Title 1">
-            <a:extLst>
-              <a:ext uri="{FF2B5EF4-FFF2-40B4-BE49-F238E27FC236}">
-                <a16:creationId xmlns:a16="http://schemas.microsoft.com/office/drawing/2014/main" id="{9360714B-8540-832E-9FD8-43EEDC04953D}"/>
-              </a:ext>
-            </a:extLst>
-          </p:cNvPr>
-          <p:cNvSpPr>
-            <a:spLocks noGrp="1"/>
-          </p:cNvSpPr>
-          <p:nvPr>
-            <p:ph type="title"/>
-          </p:nvPr>
-        </p:nvSpPr>
-        <p:spPr>
-          <a:xfrm>
-            <a:off x="294968" y="365125"/>
-            <a:ext cx="10515600" cy="1325563"/>
-          </a:xfrm>
-        </p:spPr>
-        <p:txBody>
-          <a:bodyPr>
-            <a:normAutofit/>
-          </a:bodyPr>
-          <a:lstStyle/>
-          <a:p>
-            <a:pPr algn="l"/>
-            <a:r>
-              <a:rPr lang="en-US" sz="4800" b="1" dirty="0">
-                <a:solidFill>
-                  <a:srgbClr val="0F172A"/>
-                </a:solidFill>
-              </a:rPr>
-              <a:t>The Problem</a:t>
-            </a:r>
-          </a:p>
-        </p:txBody>
-      </p:sp>
-      <p:sp>
-        <p:nvSpPr>
-          <p:cNvPr id="202" name="Pain202"/>
-          <p:cNvSpPr/>
-          <p:nvPr/>
-        </p:nvSpPr>
-        <p:spPr>
-          <a:xfrm>
-            <a:off x="294970" y="4362335"/>
-            <a:ext cx="9000000" cy="1143000"/>
-          </a:xfrm>
-          <a:prstGeom prst="roundRect">
-            <a:avLst>
-              <a:gd name="adj" fmla="val 8000"/>
-            </a:avLst>
-          </a:prstGeom>
-          <a:solidFill>
-            <a:srgbClr val="FFFFFF"/>
-          </a:solidFill>
-          <a:ln w="12700">
-            <a:solidFill>
-              <a:srgbClr val="E2E8F0"/>
-            </a:solidFill>
-          </a:ln>
-        </p:spPr>
-        <p:txBody>
-          <a:bodyPr wrap="square" lIns="180000" tIns="140000" rIns="180000" bIns="140000" anchor="ctr"/>
-          <a:lstStyle/>
-          <a:p>
-            <a:pPr algn="l"/>
-            <a:r>
-              <a:rPr lang="en-US" sz="2400" b="1" dirty="0">
-                <a:solidFill>
-                  <a:srgbClr val="0F172A"/>
-                </a:solidFill>
-              </a:rPr>
-              <a:t>Developers are </a:t>
-            </a:r>
-            <a:r>
-              <a:rPr lang="en-US" sz="2400" b="1" u="sng" dirty="0">
-                <a:solidFill>
-                  <a:srgbClr val="0F172A"/>
-                </a:solidFill>
-              </a:rPr>
-              <a:t>bottleneck</a:t>
-            </a:r>
-          </a:p>
-          <a:p>
-            <a:pPr algn="l">
-              <a:spcBef>
-                <a:spcPts val="400"/>
-              </a:spcBef>
-            </a:pPr>
-            <a:r>
-              <a:rPr lang="en-US" dirty="0">
-                <a:solidFill>
-                  <a:srgbClr val="475569"/>
-                </a:solidFill>
-              </a:rPr>
-              <a:t>Business waits on engineers</a:t>
-            </a:r>
-          </a:p>
-        </p:txBody>
-      </p:sp>
-      <p:sp>
-        <p:nvSpPr>
-          <p:cNvPr id="203" name="Pain203"/>
-          <p:cNvSpPr/>
-          <p:nvPr/>
-        </p:nvSpPr>
-        <p:spPr>
-          <a:xfrm>
-            <a:off x="294968" y="1690688"/>
-            <a:ext cx="9000000" cy="1143000"/>
-          </a:xfrm>
-          <a:prstGeom prst="roundRect">
-            <a:avLst>
-              <a:gd name="adj" fmla="val 8000"/>
-            </a:avLst>
-          </a:prstGeom>
-          <a:solidFill>
-            <a:srgbClr val="FFFFFF"/>
-          </a:solidFill>
-          <a:ln w="12700">
-            <a:solidFill>
-              <a:srgbClr val="E2E8F0"/>
-            </a:solidFill>
-          </a:ln>
-        </p:spPr>
-        <p:txBody>
-          <a:bodyPr wrap="square" lIns="180000" tIns="140000" rIns="180000" bIns="140000" anchor="ctr"/>
-          <a:lstStyle/>
-          <a:p>
-            <a:pPr algn="l"/>
-            <a:r>
-              <a:rPr lang="en-US" sz="2400" b="1" dirty="0">
-                <a:solidFill>
-                  <a:srgbClr val="0F172A"/>
-                </a:solidFill>
-              </a:rPr>
-              <a:t>Reporting tools are </a:t>
-            </a:r>
-            <a:r>
-              <a:rPr lang="en-US" sz="2400" b="1" u="sng" dirty="0">
-                <a:solidFill>
-                  <a:srgbClr val="0F172A"/>
-                </a:solidFill>
-              </a:rPr>
-              <a:t>rigid</a:t>
-            </a:r>
-          </a:p>
-          <a:p>
-            <a:pPr algn="l">
-              <a:spcBef>
-                <a:spcPts val="400"/>
-              </a:spcBef>
-            </a:pPr>
-            <a:r>
-              <a:rPr lang="en-US" dirty="0">
-                <a:solidFill>
-                  <a:srgbClr val="475569"/>
-                </a:solidFill>
-              </a:rPr>
-              <a:t>Every new question = new ticket</a:t>
-            </a:r>
-          </a:p>
-        </p:txBody>
-      </p:sp>
-      <p:sp>
-        <p:nvSpPr>
-          <p:cNvPr id="204" name="Pain204"/>
-          <p:cNvSpPr/>
-          <p:nvPr/>
-        </p:nvSpPr>
-        <p:spPr>
-          <a:xfrm>
-            <a:off x="294968" y="3026511"/>
-            <a:ext cx="9000000" cy="1143000"/>
-          </a:xfrm>
-          <a:prstGeom prst="roundRect">
-            <a:avLst>
-              <a:gd name="adj" fmla="val 8000"/>
-            </a:avLst>
-          </a:prstGeom>
-          <a:solidFill>
-            <a:srgbClr val="FFFFFF"/>
-          </a:solidFill>
-          <a:ln w="12700">
-            <a:solidFill>
-              <a:srgbClr val="E2E8F0"/>
-            </a:solidFill>
-          </a:ln>
-        </p:spPr>
-        <p:txBody>
-          <a:bodyPr wrap="square" lIns="180000" tIns="140000" rIns="180000" bIns="140000" anchor="ctr"/>
-          <a:lstStyle/>
-          <a:p>
-            <a:pPr algn="l"/>
-            <a:r>
-              <a:rPr lang="en-US" sz="2400" b="1" dirty="0">
-                <a:solidFill>
-                  <a:srgbClr val="0F172A"/>
-                </a:solidFill>
-              </a:rPr>
-              <a:t>Writing SQL, Page Design, Testing, Deployment are </a:t>
-            </a:r>
-            <a:r>
-              <a:rPr lang="en-US" sz="2400" b="1" u="sng" dirty="0">
-                <a:solidFill>
-                  <a:srgbClr val="0F172A"/>
-                </a:solidFill>
-              </a:rPr>
-              <a:t>slow</a:t>
-            </a:r>
-          </a:p>
-          <a:p>
-            <a:pPr algn="l">
-              <a:spcBef>
-                <a:spcPts val="400"/>
-              </a:spcBef>
-            </a:pPr>
-            <a:r>
-              <a:rPr lang="en-US" dirty="0">
-                <a:solidFill>
-                  <a:srgbClr val="475569"/>
-                </a:solidFill>
-              </a:rPr>
-              <a:t>The real value is trapped behind technical gatekeepers</a:t>
-            </a:r>
-          </a:p>
-        </p:txBody>
-      </p:sp>
-      <p:sp>
-        <p:nvSpPr>
-          <p:cNvPr id="3" name="HookCard">
-            <a:extLst>
-              <a:ext uri="{FF2B5EF4-FFF2-40B4-BE49-F238E27FC236}">
-                <a16:creationId xmlns:a16="http://schemas.microsoft.com/office/drawing/2014/main" id="{83DB4F90-329A-712C-5DB7-1C0CE558FAFF}"/>
-              </a:ext>
-            </a:extLst>
-          </p:cNvPr>
-          <p:cNvSpPr/>
-          <p:nvPr/>
-        </p:nvSpPr>
-        <p:spPr>
-          <a:xfrm>
-            <a:off x="9438968" y="1606339"/>
-            <a:ext cx="2458062" cy="3983344"/>
-          </a:xfrm>
-          <a:prstGeom prst="roundRect">
-            <a:avLst>
-              <a:gd name="adj" fmla="val 6000"/>
-            </a:avLst>
-          </a:prstGeom>
-          <a:solidFill>
-            <a:srgbClr val="ECFEFF"/>
-          </a:solidFill>
-          <a:ln w="12700">
-            <a:solidFill>
-              <a:srgbClr val="A5F3FC"/>
-            </a:solidFill>
-          </a:ln>
-        </p:spPr>
-        <p:txBody>
-          <a:bodyPr wrap="square" lIns="260000" tIns="140000" rIns="260000" bIns="140000" anchor="ctr"/>
-          <a:lstStyle/>
-          <a:p>
-            <a:pPr algn="r"/>
-            <a:endParaRPr lang="en-US" sz="3600" b="1" dirty="0">
-              <a:solidFill>
-                <a:srgbClr val="0F172A"/>
-              </a:solidFill>
-            </a:endParaRPr>
-          </a:p>
-        </p:txBody>
-      </p:sp>
-      <p:sp>
-        <p:nvSpPr>
-          <p:cNvPr id="5" name="TextBox 4">
-            <a:extLst>
-              <a:ext uri="{FF2B5EF4-FFF2-40B4-BE49-F238E27FC236}">
-                <a16:creationId xmlns:a16="http://schemas.microsoft.com/office/drawing/2014/main" id="{D6520705-57EF-7347-2A93-B973F7CDFB64}"/>
-              </a:ext>
-            </a:extLst>
-          </p:cNvPr>
-          <p:cNvSpPr txBox="1"/>
-          <p:nvPr/>
-        </p:nvSpPr>
-        <p:spPr>
-          <a:xfrm>
-            <a:off x="9438968" y="2166850"/>
-            <a:ext cx="2602062" cy="2862322"/>
-          </a:xfrm>
-          <a:prstGeom prst="rect">
-            <a:avLst/>
-          </a:prstGeom>
-          <a:noFill/>
-        </p:spPr>
-        <p:txBody>
-          <a:bodyPr wrap="square">
-            <a:spAutoFit/>
-          </a:bodyPr>
-          <a:lstStyle/>
-          <a:p>
-            <a:pPr algn="ctr"/>
-            <a:r>
-              <a:rPr lang="en-US" sz="3600" b="1" dirty="0">
-                <a:solidFill>
-                  <a:srgbClr val="0F172A"/>
-                </a:solidFill>
-              </a:rPr>
-              <a:t>Data is </a:t>
-            </a:r>
-            <a:r>
-              <a:rPr lang="en-US" sz="3600" b="1" dirty="0">
-                <a:solidFill>
-                  <a:srgbClr val="FF0000"/>
-                </a:solidFill>
-              </a:rPr>
-              <a:t>locked</a:t>
-            </a:r>
-            <a:r>
-              <a:rPr lang="en-US" sz="3600" b="1" dirty="0">
-                <a:solidFill>
-                  <a:srgbClr val="0F172A"/>
-                </a:solidFill>
-              </a:rPr>
-              <a:t> behind technical curtains!</a:t>
-            </a:r>
-          </a:p>
-        </p:txBody>
-      </p:sp>
-    </p:spTree>
-    <p:extLst>
-      <p:ext uri="{BB962C8B-B14F-4D97-AF65-F5344CB8AC3E}">
-        <p14:creationId xmlns:p14="http://schemas.microsoft.com/office/powerpoint/2010/main" val="1966582094"/>
-      </p:ext>
-    </p:extLst>
-  </p:cSld>
-  <p:clrMapOvr>
-    <a:masterClrMapping/>
-  </p:clrMapOvr>
-</p:sld>
-</file>
-
 <file path=ppt/slides/slide4.xml><?xml version="1.0" encoding="utf-8"?>
 <p:sld xmlns:a="http://schemas.openxmlformats.org/drawingml/2006/main" xmlns:r="http://schemas.openxmlformats.org/officeDocument/2006/relationships" xmlns:p="http://schemas.openxmlformats.org/presentationml/2006/main">
   <p:cSld>
@@ -13538,6 +13591,368 @@
       </p:grpSpPr>
       <p:sp>
         <p:nvSpPr>
+          <p:cNvPr id="2" name="Title 1">
+            <a:extLst>
+              <a:ext uri="{FF2B5EF4-FFF2-40B4-BE49-F238E27FC236}">
+                <a16:creationId xmlns:a16="http://schemas.microsoft.com/office/drawing/2014/main" id="{9360714B-8540-832E-9FD8-43EEDC04953D}"/>
+              </a:ext>
+            </a:extLst>
+          </p:cNvPr>
+          <p:cNvSpPr>
+            <a:spLocks noGrp="1"/>
+          </p:cNvSpPr>
+          <p:nvPr>
+            <p:ph type="title"/>
+          </p:nvPr>
+        </p:nvSpPr>
+        <p:spPr>
+          <a:xfrm>
+            <a:off x="294968" y="365125"/>
+            <a:ext cx="10515600" cy="1325563"/>
+          </a:xfrm>
+        </p:spPr>
+        <p:txBody>
+          <a:bodyPr>
+            <a:normAutofit/>
+          </a:bodyPr>
+          <a:lstStyle/>
+          <a:p>
+            <a:pPr algn="l"/>
+            <a:r>
+              <a:rPr lang="en-US" sz="4800" b="1" dirty="0">
+                <a:solidFill>
+                  <a:srgbClr val="0F172A"/>
+                </a:solidFill>
+              </a:rPr>
+              <a:t>The Problem</a:t>
+            </a:r>
+          </a:p>
+        </p:txBody>
+      </p:sp>
+      <p:sp>
+        <p:nvSpPr>
+          <p:cNvPr id="202" name="Pain202"/>
+          <p:cNvSpPr/>
+          <p:nvPr/>
+        </p:nvSpPr>
+        <p:spPr>
+          <a:xfrm>
+            <a:off x="294970" y="4362335"/>
+            <a:ext cx="9000000" cy="1143000"/>
+          </a:xfrm>
+          <a:prstGeom prst="roundRect">
+            <a:avLst>
+              <a:gd name="adj" fmla="val 8000"/>
+            </a:avLst>
+          </a:prstGeom>
+          <a:solidFill>
+            <a:srgbClr val="FFFFFF"/>
+          </a:solidFill>
+          <a:ln w="12700">
+            <a:solidFill>
+              <a:srgbClr val="E2E8F0"/>
+            </a:solidFill>
+          </a:ln>
+        </p:spPr>
+        <p:txBody>
+          <a:bodyPr wrap="square" lIns="180000" tIns="140000" rIns="180000" bIns="140000" anchor="ctr"/>
+          <a:lstStyle/>
+          <a:p>
+            <a:pPr algn="l"/>
+            <a:r>
+              <a:rPr lang="en-US" sz="2400" b="1" dirty="0">
+                <a:solidFill>
+                  <a:srgbClr val="0F172A"/>
+                </a:solidFill>
+              </a:rPr>
+              <a:t>Developers are </a:t>
+            </a:r>
+            <a:r>
+              <a:rPr lang="en-US" sz="2400" b="1" u="sng" dirty="0">
+                <a:solidFill>
+                  <a:srgbClr val="0F172A"/>
+                </a:solidFill>
+              </a:rPr>
+              <a:t>bottleneck</a:t>
+            </a:r>
+          </a:p>
+          <a:p>
+            <a:pPr algn="l">
+              <a:spcBef>
+                <a:spcPts val="400"/>
+              </a:spcBef>
+            </a:pPr>
+            <a:r>
+              <a:rPr lang="en-US" dirty="0">
+                <a:solidFill>
+                  <a:srgbClr val="475569"/>
+                </a:solidFill>
+              </a:rPr>
+              <a:t>Business waits on engineers</a:t>
+            </a:r>
+          </a:p>
+        </p:txBody>
+      </p:sp>
+      <p:sp>
+        <p:nvSpPr>
+          <p:cNvPr id="203" name="Pain203"/>
+          <p:cNvSpPr/>
+          <p:nvPr/>
+        </p:nvSpPr>
+        <p:spPr>
+          <a:xfrm>
+            <a:off x="294968" y="1690688"/>
+            <a:ext cx="9000000" cy="1143000"/>
+          </a:xfrm>
+          <a:prstGeom prst="roundRect">
+            <a:avLst>
+              <a:gd name="adj" fmla="val 8000"/>
+            </a:avLst>
+          </a:prstGeom>
+          <a:solidFill>
+            <a:srgbClr val="FFFFFF"/>
+          </a:solidFill>
+          <a:ln w="12700">
+            <a:solidFill>
+              <a:srgbClr val="E2E8F0"/>
+            </a:solidFill>
+          </a:ln>
+        </p:spPr>
+        <p:txBody>
+          <a:bodyPr wrap="square" lIns="180000" tIns="140000" rIns="180000" bIns="140000" anchor="ctr"/>
+          <a:lstStyle/>
+          <a:p>
+            <a:pPr algn="l"/>
+            <a:r>
+              <a:rPr lang="en-US" sz="2400" b="1" dirty="0">
+                <a:solidFill>
+                  <a:srgbClr val="0F172A"/>
+                </a:solidFill>
+              </a:rPr>
+              <a:t>Reporting tools are </a:t>
+            </a:r>
+            <a:r>
+              <a:rPr lang="en-US" sz="2400" b="1" u="sng" dirty="0">
+                <a:solidFill>
+                  <a:srgbClr val="0F172A"/>
+                </a:solidFill>
+              </a:rPr>
+              <a:t>rigid</a:t>
+            </a:r>
+          </a:p>
+          <a:p>
+            <a:pPr algn="l">
+              <a:spcBef>
+                <a:spcPts val="400"/>
+              </a:spcBef>
+            </a:pPr>
+            <a:r>
+              <a:rPr lang="en-US" dirty="0">
+                <a:solidFill>
+                  <a:srgbClr val="475569"/>
+                </a:solidFill>
+              </a:rPr>
+              <a:t>Every new question = new ticket</a:t>
+            </a:r>
+          </a:p>
+        </p:txBody>
+      </p:sp>
+      <p:sp>
+        <p:nvSpPr>
+          <p:cNvPr id="204" name="Pain204"/>
+          <p:cNvSpPr/>
+          <p:nvPr/>
+        </p:nvSpPr>
+        <p:spPr>
+          <a:xfrm>
+            <a:off x="294968" y="3026511"/>
+            <a:ext cx="9000000" cy="1143000"/>
+          </a:xfrm>
+          <a:prstGeom prst="roundRect">
+            <a:avLst>
+              <a:gd name="adj" fmla="val 8000"/>
+            </a:avLst>
+          </a:prstGeom>
+          <a:solidFill>
+            <a:srgbClr val="FFFFFF"/>
+          </a:solidFill>
+          <a:ln w="12700">
+            <a:solidFill>
+              <a:srgbClr val="E2E8F0"/>
+            </a:solidFill>
+          </a:ln>
+        </p:spPr>
+        <p:txBody>
+          <a:bodyPr wrap="square" lIns="180000" tIns="140000" rIns="180000" bIns="140000" anchor="ctr"/>
+          <a:lstStyle/>
+          <a:p>
+            <a:pPr algn="l"/>
+            <a:r>
+              <a:rPr lang="en-US" sz="2400" b="1" dirty="0">
+                <a:solidFill>
+                  <a:srgbClr val="0F172A"/>
+                </a:solidFill>
+              </a:rPr>
+              <a:t>Writing SQL, Page Design, Testing, Deployment are </a:t>
+            </a:r>
+            <a:r>
+              <a:rPr lang="en-US" sz="2400" b="1" u="sng" dirty="0">
+                <a:solidFill>
+                  <a:srgbClr val="0F172A"/>
+                </a:solidFill>
+              </a:rPr>
+              <a:t>slow</a:t>
+            </a:r>
+          </a:p>
+          <a:p>
+            <a:pPr algn="l">
+              <a:spcBef>
+                <a:spcPts val="400"/>
+              </a:spcBef>
+            </a:pPr>
+            <a:r>
+              <a:rPr lang="en-US" dirty="0">
+                <a:solidFill>
+                  <a:srgbClr val="475569"/>
+                </a:solidFill>
+              </a:rPr>
+              <a:t>The real value is trapped behind technical gatekeepers</a:t>
+            </a:r>
+          </a:p>
+        </p:txBody>
+      </p:sp>
+      <p:sp>
+        <p:nvSpPr>
+          <p:cNvPr id="3" name="HookCard">
+            <a:extLst>
+              <a:ext uri="{FF2B5EF4-FFF2-40B4-BE49-F238E27FC236}">
+                <a16:creationId xmlns:a16="http://schemas.microsoft.com/office/drawing/2014/main" id="{83DB4F90-329A-712C-5DB7-1C0CE558FAFF}"/>
+              </a:ext>
+            </a:extLst>
+          </p:cNvPr>
+          <p:cNvSpPr/>
+          <p:nvPr/>
+        </p:nvSpPr>
+        <p:spPr>
+          <a:xfrm>
+            <a:off x="9438968" y="1606339"/>
+            <a:ext cx="2458062" cy="3983344"/>
+          </a:xfrm>
+          <a:prstGeom prst="roundRect">
+            <a:avLst>
+              <a:gd name="adj" fmla="val 6000"/>
+            </a:avLst>
+          </a:prstGeom>
+          <a:solidFill>
+            <a:srgbClr val="ECFEFF"/>
+          </a:solidFill>
+          <a:ln w="12700">
+            <a:solidFill>
+              <a:srgbClr val="A5F3FC"/>
+            </a:solidFill>
+          </a:ln>
+        </p:spPr>
+        <p:txBody>
+          <a:bodyPr wrap="square" lIns="260000" tIns="140000" rIns="260000" bIns="140000" anchor="ctr"/>
+          <a:lstStyle/>
+          <a:p>
+            <a:pPr algn="r"/>
+            <a:endParaRPr lang="en-US" sz="3600" b="1" dirty="0">
+              <a:solidFill>
+                <a:srgbClr val="0F172A"/>
+              </a:solidFill>
+            </a:endParaRPr>
+          </a:p>
+        </p:txBody>
+      </p:sp>
+      <p:sp>
+        <p:nvSpPr>
+          <p:cNvPr id="5" name="TextBox 4">
+            <a:extLst>
+              <a:ext uri="{FF2B5EF4-FFF2-40B4-BE49-F238E27FC236}">
+                <a16:creationId xmlns:a16="http://schemas.microsoft.com/office/drawing/2014/main" id="{D6520705-57EF-7347-2A93-B973F7CDFB64}"/>
+              </a:ext>
+            </a:extLst>
+          </p:cNvPr>
+          <p:cNvSpPr txBox="1"/>
+          <p:nvPr/>
+        </p:nvSpPr>
+        <p:spPr>
+          <a:xfrm>
+            <a:off x="9438968" y="2166850"/>
+            <a:ext cx="2602062" cy="2862322"/>
+          </a:xfrm>
+          <a:prstGeom prst="rect">
+            <a:avLst/>
+          </a:prstGeom>
+          <a:noFill/>
+        </p:spPr>
+        <p:txBody>
+          <a:bodyPr wrap="square">
+            <a:spAutoFit/>
+          </a:bodyPr>
+          <a:lstStyle/>
+          <a:p>
+            <a:pPr algn="ctr"/>
+            <a:r>
+              <a:rPr lang="en-US" sz="3600" b="1" dirty="0">
+                <a:solidFill>
+                  <a:srgbClr val="0F172A"/>
+                </a:solidFill>
+              </a:rPr>
+              <a:t>Data is </a:t>
+            </a:r>
+            <a:r>
+              <a:rPr lang="en-US" sz="3600" b="1" dirty="0">
+                <a:solidFill>
+                  <a:srgbClr val="FF0000"/>
+                </a:solidFill>
+              </a:rPr>
+              <a:t>locked</a:t>
+            </a:r>
+            <a:r>
+              <a:rPr lang="en-US" sz="3600" b="1" dirty="0">
+                <a:solidFill>
+                  <a:srgbClr val="0F172A"/>
+                </a:solidFill>
+              </a:rPr>
+              <a:t> behind technical curtains!</a:t>
+            </a:r>
+          </a:p>
+        </p:txBody>
+      </p:sp>
+    </p:spTree>
+    <p:extLst>
+      <p:ext uri="{BB962C8B-B14F-4D97-AF65-F5344CB8AC3E}">
+        <p14:creationId xmlns:p14="http://schemas.microsoft.com/office/powerpoint/2010/main" val="1966582094"/>
+      </p:ext>
+    </p:extLst>
+  </p:cSld>
+  <p:clrMapOvr>
+    <a:masterClrMapping/>
+  </p:clrMapOvr>
+</p:sld>
+</file>
+
+<file path=ppt/slides/slide5.xml><?xml version="1.0" encoding="utf-8"?>
+<p:sld xmlns:a="http://schemas.openxmlformats.org/drawingml/2006/main" xmlns:r="http://schemas.openxmlformats.org/officeDocument/2006/relationships" xmlns:p="http://schemas.openxmlformats.org/presentationml/2006/main">
+  <p:cSld>
+    <p:spTree>
+      <p:nvGrpSpPr>
+        <p:cNvPr id="1" name=""/>
+        <p:cNvGrpSpPr/>
+        <p:nvPr/>
+      </p:nvGrpSpPr>
+      <p:grpSpPr>
+        <a:xfrm>
+          <a:off x="0" y="0"/>
+          <a:ext cx="0" cy="0"/>
+          <a:chOff x="0" y="0"/>
+          <a:chExt cx="0" cy="0"/>
+        </a:xfrm>
+      </p:grpSpPr>
+      <p:sp>
+        <p:nvSpPr>
           <p:cNvPr id="2" name="Panel">
             <a:extLst>
               <a:ext uri="{FF2B5EF4-FFF2-40B4-BE49-F238E27FC236}">
@@ -13666,7 +14081,7 @@
 </p:sld>
 </file>
 
-<file path=ppt/slides/slide5.xml><?xml version="1.0" encoding="utf-8"?>
+<file path=ppt/slides/slide6.xml><?xml version="1.0" encoding="utf-8"?>
 <p:sld xmlns:a="http://schemas.openxmlformats.org/drawingml/2006/main" xmlns:r="http://schemas.openxmlformats.org/officeDocument/2006/relationships" xmlns:p="http://schemas.openxmlformats.org/presentationml/2006/main" show="0">
   <p:cSld>
     <p:spTree>
@@ -14164,7 +14579,7 @@
 </p:sld>
 </file>
 
-<file path=ppt/slides/slide6.xml><?xml version="1.0" encoding="utf-8"?>
+<file path=ppt/slides/slide7.xml><?xml version="1.0" encoding="utf-8"?>
 <p:sld xmlns:a="http://schemas.openxmlformats.org/drawingml/2006/main" xmlns:r="http://schemas.openxmlformats.org/officeDocument/2006/relationships" xmlns:p="http://schemas.openxmlformats.org/presentationml/2006/main">
   <p:cSld>
     <p:spTree>
@@ -15302,7 +15717,7 @@
 </p:sld>
 </file>
 
-<file path=ppt/slides/slide7.xml><?xml version="1.0" encoding="utf-8"?>
+<file path=ppt/slides/slide8.xml><?xml version="1.0" encoding="utf-8"?>
 <p:sld xmlns:a="http://schemas.openxmlformats.org/drawingml/2006/main" xmlns:r="http://schemas.openxmlformats.org/officeDocument/2006/relationships" xmlns:p="http://schemas.openxmlformats.org/presentationml/2006/main">
   <p:cSld>
     <p:spTree>
@@ -15723,7 +16138,7 @@
 </p:sld>
 </file>
 
-<file path=ppt/slides/slide8.xml><?xml version="1.0" encoding="utf-8"?>
+<file path=ppt/slides/slide9.xml><?xml version="1.0" encoding="utf-8"?>
 <p:sld xmlns:a="http://schemas.openxmlformats.org/drawingml/2006/main" xmlns:r="http://schemas.openxmlformats.org/officeDocument/2006/relationships" xmlns:p="http://schemas.openxmlformats.org/presentationml/2006/main">
   <p:cSld>
     <p:spTree>
@@ -16014,558 +16429,6 @@
     <p:extLst>
       <p:ext uri="{BB962C8B-B14F-4D97-AF65-F5344CB8AC3E}">
         <p14:creationId xmlns:p14="http://schemas.microsoft.com/office/powerpoint/2010/main" val="3914748982"/>
-      </p:ext>
-    </p:extLst>
-  </p:cSld>
-  <p:clrMapOvr>
-    <a:masterClrMapping/>
-  </p:clrMapOvr>
-</p:sld>
-</file>
-
-<file path=ppt/slides/slide9.xml><?xml version="1.0" encoding="utf-8"?>
-<p:sld xmlns:a="http://schemas.openxmlformats.org/drawingml/2006/main" xmlns:r="http://schemas.openxmlformats.org/officeDocument/2006/relationships" xmlns:p="http://schemas.openxmlformats.org/presentationml/2006/main" show="0">
-  <p:cSld>
-    <p:spTree>
-      <p:nvGrpSpPr>
-        <p:cNvPr id="1" name=""/>
-        <p:cNvGrpSpPr/>
-        <p:nvPr/>
-      </p:nvGrpSpPr>
-      <p:grpSpPr>
-        <a:xfrm>
-          <a:off x="0" y="0"/>
-          <a:ext cx="0" cy="0"/>
-          <a:chOff x="0" y="0"/>
-          <a:chExt cx="0" cy="0"/>
-        </a:xfrm>
-      </p:grpSpPr>
-      <p:sp>
-        <p:nvSpPr>
-          <p:cNvPr id="2" name="Title 1">
-            <a:extLst>
-              <a:ext uri="{FF2B5EF4-FFF2-40B4-BE49-F238E27FC236}">
-                <a16:creationId xmlns:a16="http://schemas.microsoft.com/office/drawing/2014/main" id="{EE4C9AD2-1B67-A3D7-680A-E00FA44CAED6}"/>
-              </a:ext>
-            </a:extLst>
-          </p:cNvPr>
-          <p:cNvSpPr>
-            <a:spLocks noGrp="1"/>
-          </p:cNvSpPr>
-          <p:nvPr>
-            <p:ph type="title"/>
-          </p:nvPr>
-        </p:nvSpPr>
-        <p:spPr>
-          <a:xfrm>
-            <a:off x="838200" y="365125"/>
-            <a:ext cx="6588211" cy="1325563"/>
-          </a:xfrm>
-        </p:spPr>
-        <p:txBody>
-          <a:bodyPr>
-            <a:normAutofit fontScale="90000"/>
-          </a:bodyPr>
-          <a:lstStyle/>
-          <a:p>
-            <a:pPr algn="l"/>
-            <a:r>
-              <a:rPr lang="en-US" sz="4800" b="1" dirty="0">
-                <a:solidFill>
-                  <a:srgbClr val="0F172A"/>
-                </a:solidFill>
-              </a:rPr>
-              <a:t>Live Demo — Console</a:t>
-            </a:r>
-          </a:p>
-        </p:txBody>
-      </p:sp>
-      <p:sp>
-        <p:nvSpPr>
-          <p:cNvPr id="501" name="DemoSub"/>
-          <p:cNvSpPr txBox="1"/>
-          <p:nvPr/>
-        </p:nvSpPr>
-        <p:spPr>
-          <a:xfrm>
-            <a:off x="2794000" y="1429656"/>
-            <a:ext cx="8890000" cy="457200"/>
-          </a:xfrm>
-          <a:prstGeom prst="rect">
-            <a:avLst/>
-          </a:prstGeom>
-          <a:noFill/>
-        </p:spPr>
-        <p:txBody>
-          <a:bodyPr wrap="square" anchor="ctr"/>
-          <a:lstStyle/>
-          <a:p>
-            <a:pPr algn="l"/>
-            <a:r>
-              <a:rPr lang="en-US" sz="2400" dirty="0">
-                <a:solidFill>
-                  <a:srgbClr val="475569"/>
-                </a:solidFill>
-              </a:rPr>
-              <a:t>Visual Studio  &gt;  Chat.Console.OpenAI</a:t>
-            </a:r>
-          </a:p>
-        </p:txBody>
-      </p:sp>
-      <p:sp>
-        <p:nvSpPr>
-          <p:cNvPr id="510" name="Terminal"/>
-          <p:cNvSpPr/>
-          <p:nvPr/>
-        </p:nvSpPr>
-        <p:spPr>
-          <a:xfrm>
-            <a:off x="508000" y="2342240"/>
-            <a:ext cx="7112000" cy="3365500"/>
-          </a:xfrm>
-          <a:prstGeom prst="roundRect">
-            <a:avLst>
-              <a:gd name="adj" fmla="val 4000"/>
-            </a:avLst>
-          </a:prstGeom>
-          <a:solidFill>
-            <a:srgbClr val="0F172A"/>
-          </a:solidFill>
-          <a:ln>
-            <a:noFill/>
-          </a:ln>
-          <a:effectLst>
-            <a:outerShdw blurRad="80000" dist="20000" dir="5400000" algn="t" rotWithShape="0">
-              <a:srgbClr val="0F172A">
-                <a:alpha val="20000"/>
-              </a:srgbClr>
-            </a:outerShdw>
-          </a:effectLst>
-        </p:spPr>
-        <p:txBody>
-          <a:bodyPr wrap="square" lIns="240000" tIns="200000" rIns="240000" bIns="200000" anchor="t"/>
-          <a:lstStyle/>
-          <a:p>
-            <a:pPr algn="l"/>
-            <a:r>
-              <a:rPr lang="en-US" sz="1600" dirty="0">
-                <a:solidFill>
-                  <a:srgbClr val="64748B"/>
-                </a:solidFill>
-                <a:latin typeface="Consolas"/>
-              </a:rPr>
-              <a:t>$ dotnet run</a:t>
-            </a:r>
-          </a:p>
-          <a:p>
-            <a:pPr>
-              <a:spcBef>
-                <a:spcPts val="400"/>
-              </a:spcBef>
-            </a:pPr>
-            <a:r>
-              <a:rPr lang="en-US" sz="1600" dirty="0">
-                <a:solidFill>
-                  <a:srgbClr val="94A3B8"/>
-                </a:solidFill>
-                <a:latin typeface="Consolas"/>
-              </a:rPr>
-              <a:t>Ask your database &gt; </a:t>
-            </a:r>
-            <a:r>
-              <a:rPr lang="en-US" sz="2000" b="1" dirty="0">
-                <a:solidFill>
-                  <a:srgbClr val="22D3EE"/>
-                </a:solidFill>
-                <a:latin typeface="Consolas"/>
-              </a:rPr>
-              <a:t>top 10 customers by revenue</a:t>
-            </a:r>
-          </a:p>
-          <a:p>
-            <a:pPr>
-              <a:spcBef>
-                <a:spcPts val="600"/>
-              </a:spcBef>
-            </a:pPr>
-            <a:r>
-              <a:rPr lang="en-US" sz="1600" dirty="0">
-                <a:solidFill>
-                  <a:srgbClr val="64748B"/>
-                </a:solidFill>
-                <a:latin typeface="Consolas"/>
-              </a:rPr>
-              <a:t>// generated SQL</a:t>
-            </a:r>
-          </a:p>
-          <a:p>
-            <a:pPr>
-              <a:spcBef>
-                <a:spcPts val="300"/>
-              </a:spcBef>
-            </a:pPr>
-            <a:r>
-              <a:rPr lang="en-US" dirty="0">
-                <a:solidFill>
-                  <a:srgbClr val="10B981"/>
-                </a:solidFill>
-                <a:latin typeface="Consolas"/>
-              </a:rPr>
-              <a:t>SELECT TOP 10 c.Name,</a:t>
-            </a:r>
-          </a:p>
-          <a:p>
-            <a:pPr>
-              <a:spcBef>
-                <a:spcPts val="100"/>
-              </a:spcBef>
-            </a:pPr>
-            <a:r>
-              <a:rPr lang="en-US" dirty="0">
-                <a:solidFill>
-                  <a:srgbClr val="10B981"/>
-                </a:solidFill>
-                <a:latin typeface="Consolas"/>
-              </a:rPr>
-              <a:t>       SUM(o.Total) AS Revenue</a:t>
-            </a:r>
-          </a:p>
-          <a:p>
-            <a:pPr>
-              <a:spcBef>
-                <a:spcPts val="100"/>
-              </a:spcBef>
-            </a:pPr>
-            <a:r>
-              <a:rPr lang="en-US" dirty="0">
-                <a:solidFill>
-                  <a:srgbClr val="10B981"/>
-                </a:solidFill>
-                <a:latin typeface="Consolas"/>
-              </a:rPr>
-              <a:t>FROM Customers c</a:t>
-            </a:r>
-          </a:p>
-          <a:p>
-            <a:pPr>
-              <a:spcBef>
-                <a:spcPts val="100"/>
-              </a:spcBef>
-            </a:pPr>
-            <a:r>
-              <a:rPr lang="en-US" dirty="0">
-                <a:solidFill>
-                  <a:srgbClr val="10B981"/>
-                </a:solidFill>
-                <a:latin typeface="Consolas"/>
-              </a:rPr>
-              <a:t>JOIN Orders o ON o.CustomerId=c.Id</a:t>
-            </a:r>
-          </a:p>
-          <a:p>
-            <a:pPr>
-              <a:spcBef>
-                <a:spcPts val="100"/>
-              </a:spcBef>
-            </a:pPr>
-            <a:r>
-              <a:rPr lang="en-US" dirty="0">
-                <a:solidFill>
-                  <a:srgbClr val="10B981"/>
-                </a:solidFill>
-                <a:latin typeface="Consolas"/>
-              </a:rPr>
-              <a:t>GROUP BY c.Name</a:t>
-            </a:r>
-          </a:p>
-          <a:p>
-            <a:pPr>
-              <a:spcBef>
-                <a:spcPts val="100"/>
-              </a:spcBef>
-            </a:pPr>
-            <a:r>
-              <a:rPr lang="en-US" dirty="0">
-                <a:solidFill>
-                  <a:srgbClr val="10B981"/>
-                </a:solidFill>
-                <a:latin typeface="Consolas"/>
-              </a:rPr>
-              <a:t>ORDER BY Revenue DESC;</a:t>
-            </a:r>
-          </a:p>
-        </p:txBody>
-      </p:sp>
-      <p:sp>
-        <p:nvSpPr>
-          <p:cNvPr id="520" name="Trust"/>
-          <p:cNvSpPr/>
-          <p:nvPr/>
-        </p:nvSpPr>
-        <p:spPr>
-          <a:xfrm>
-            <a:off x="7874000" y="2342240"/>
-            <a:ext cx="3810000" cy="3365500"/>
-          </a:xfrm>
-          <a:prstGeom prst="roundRect">
-            <a:avLst>
-              <a:gd name="adj" fmla="val 6000"/>
-            </a:avLst>
-          </a:prstGeom>
-          <a:solidFill>
-            <a:srgbClr val="FEF3C7"/>
-          </a:solidFill>
-          <a:ln w="12700">
-            <a:solidFill>
-              <a:srgbClr val="FCD34D"/>
-            </a:solidFill>
-          </a:ln>
-        </p:spPr>
-        <p:txBody>
-          <a:bodyPr wrap="square" lIns="220000" tIns="200000" rIns="220000" bIns="200000" anchor="t"/>
-          <a:lstStyle/>
-          <a:p>
-            <a:pPr>
-              <a:spcBef>
-                <a:spcPts val="800"/>
-              </a:spcBef>
-            </a:pPr>
-            <a:r>
-              <a:rPr lang="en-US" sz="3200" b="1" spc="300" dirty="0">
-                <a:solidFill>
-                  <a:srgbClr val="92400E"/>
-                </a:solidFill>
-              </a:rPr>
-              <a:t>⏸</a:t>
-            </a:r>
-            <a:r>
-              <a:rPr lang="en-US" sz="2800" b="1" dirty="0">
-                <a:solidFill>
-                  <a:srgbClr val="0F172A"/>
-                </a:solidFill>
-              </a:rPr>
-              <a:t>Would you </a:t>
-            </a:r>
-            <a:br>
-              <a:rPr lang="en-US" sz="2800" b="1" dirty="0">
-                <a:solidFill>
-                  <a:srgbClr val="0F172A"/>
-                </a:solidFill>
-              </a:rPr>
-            </a:br>
-            <a:r>
-              <a:rPr lang="en-US" sz="2800" b="1" dirty="0">
-                <a:solidFill>
-                  <a:srgbClr val="0F172A"/>
-                </a:solidFill>
-              </a:rPr>
-              <a:t>     run this </a:t>
-            </a:r>
-            <a:br>
-              <a:rPr lang="en-US" sz="2800" b="1" dirty="0">
-                <a:solidFill>
-                  <a:srgbClr val="0F172A"/>
-                </a:solidFill>
-              </a:rPr>
-            </a:br>
-            <a:r>
-              <a:rPr lang="en-US" sz="2800" b="1" dirty="0">
-                <a:solidFill>
-                  <a:srgbClr val="0F172A"/>
-                </a:solidFill>
-              </a:rPr>
-              <a:t>     in production?</a:t>
-            </a:r>
-            <a:endParaRPr lang="en-US" sz="3200" b="1" dirty="0">
-              <a:solidFill>
-                <a:srgbClr val="0F172A"/>
-              </a:solidFill>
-            </a:endParaRPr>
-          </a:p>
-          <a:p>
-            <a:pPr algn="l">
-              <a:spcBef>
-                <a:spcPts val="400"/>
-              </a:spcBef>
-            </a:pPr>
-            <a:br>
-              <a:rPr lang="en-US" dirty="0">
-                <a:solidFill>
-                  <a:srgbClr val="78350F"/>
-                </a:solidFill>
-              </a:rPr>
-            </a:br>
-            <a:br>
-              <a:rPr lang="en-US" dirty="0">
-                <a:solidFill>
-                  <a:srgbClr val="78350F"/>
-                </a:solidFill>
-              </a:rPr>
-            </a:br>
-            <a:r>
-              <a:rPr lang="en-US" dirty="0">
-                <a:solidFill>
-                  <a:srgbClr val="78350F"/>
-                </a:solidFill>
-              </a:rPr>
-              <a:t>        </a:t>
-            </a:r>
-            <a:r>
-              <a:rPr lang="en-US" sz="2400" b="1" dirty="0">
-                <a:solidFill>
-                  <a:srgbClr val="78350F"/>
-                </a:solidFill>
-              </a:rPr>
-              <a:t>The validator → </a:t>
-            </a:r>
-            <a:endParaRPr lang="en-US" b="1" dirty="0">
-              <a:solidFill>
-                <a:srgbClr val="78350F"/>
-              </a:solidFill>
-            </a:endParaRPr>
-          </a:p>
-        </p:txBody>
-      </p:sp>
-      <p:grpSp>
-        <p:nvGrpSpPr>
-          <p:cNvPr id="9" name="Group 8">
-            <a:extLst>
-              <a:ext uri="{FF2B5EF4-FFF2-40B4-BE49-F238E27FC236}">
-                <a16:creationId xmlns:a16="http://schemas.microsoft.com/office/drawing/2014/main" id="{3FE91529-23A7-B9D9-91A9-CD0F5AB4D505}"/>
-              </a:ext>
-            </a:extLst>
-          </p:cNvPr>
-          <p:cNvGrpSpPr/>
-          <p:nvPr/>
-        </p:nvGrpSpPr>
-        <p:grpSpPr>
-          <a:xfrm>
-            <a:off x="889000" y="1429656"/>
-            <a:ext cx="1651000" cy="457200"/>
-            <a:chOff x="889000" y="1429656"/>
-            <a:chExt cx="1651000" cy="457200"/>
-          </a:xfrm>
-        </p:grpSpPr>
-        <p:sp>
-          <p:nvSpPr>
-            <p:cNvPr id="500" name="LiveBadge"/>
-            <p:cNvSpPr/>
-            <p:nvPr/>
-          </p:nvSpPr>
-          <p:spPr>
-            <a:xfrm>
-              <a:off x="889000" y="1429656"/>
-              <a:ext cx="1651000" cy="457200"/>
-            </a:xfrm>
-            <a:prstGeom prst="roundRect">
-              <a:avLst>
-                <a:gd name="adj" fmla="val 50000"/>
-              </a:avLst>
-            </a:prstGeom>
-            <a:solidFill>
-              <a:srgbClr val="F43F5E"/>
-            </a:solidFill>
-            <a:ln>
-              <a:noFill/>
-            </a:ln>
-          </p:spPr>
-          <p:txBody>
-            <a:bodyPr wrap="square" lIns="91440" tIns="0" rIns="91440" bIns="0" anchor="ctr"/>
-            <a:lstStyle/>
-            <a:p>
-              <a:pPr algn="ctr"/>
-              <a:r>
-                <a:rPr lang="en-US" b="1" spc="300" dirty="0">
-                  <a:solidFill>
-                    <a:srgbClr val="FFFFFF"/>
-                  </a:solidFill>
-                </a:rPr>
-                <a:t>    LIVE</a:t>
-              </a:r>
-            </a:p>
-          </p:txBody>
-        </p:sp>
-        <p:pic>
-          <p:nvPicPr>
-            <p:cNvPr id="8" name="Graphic 7" descr="Presentation with media with solid fill">
-              <a:extLst>
-                <a:ext uri="{FF2B5EF4-FFF2-40B4-BE49-F238E27FC236}">
-                  <a16:creationId xmlns:a16="http://schemas.microsoft.com/office/drawing/2014/main" id="{09202127-A8D4-A00F-7BBA-CB4879194B7F}"/>
-                </a:ext>
-              </a:extLst>
-            </p:cNvPr>
-            <p:cNvPicPr>
-              <a:picLocks noChangeAspect="1"/>
-            </p:cNvPicPr>
-            <p:nvPr/>
-          </p:nvPicPr>
-          <p:blipFill>
-            <a:blip r:embed="rId3">
-              <a:extLst>
-                <a:ext uri="{96DAC541-7B7A-43D3-8B79-37D633B846F1}">
-                  <asvg:svgBlip xmlns:asvg="http://schemas.microsoft.com/office/drawing/2016/SVG/main" r:embed="rId4"/>
-                </a:ext>
-              </a:extLst>
-            </a:blip>
-            <a:stretch>
-              <a:fillRect/>
-            </a:stretch>
-          </p:blipFill>
-          <p:spPr>
-            <a:xfrm>
-              <a:off x="1137503" y="1476895"/>
-              <a:ext cx="394735" cy="394735"/>
-            </a:xfrm>
-            <a:prstGeom prst="rect">
-              <a:avLst/>
-            </a:prstGeom>
-          </p:spPr>
-        </p:pic>
-      </p:grpSp>
-      <p:sp>
-        <p:nvSpPr>
-          <p:cNvPr id="4" name="TextBox 3">
-            <a:extLst>
-              <a:ext uri="{FF2B5EF4-FFF2-40B4-BE49-F238E27FC236}">
-                <a16:creationId xmlns:a16="http://schemas.microsoft.com/office/drawing/2014/main" id="{198970D3-6DAB-B756-8ED7-860209BBE762}"/>
-              </a:ext>
-            </a:extLst>
-          </p:cNvPr>
-          <p:cNvSpPr txBox="1"/>
-          <p:nvPr/>
-        </p:nvSpPr>
-        <p:spPr>
-          <a:xfrm>
-            <a:off x="11076710" y="3590941"/>
-            <a:ext cx="442356" cy="584775"/>
-          </a:xfrm>
-          <a:prstGeom prst="rect">
-            <a:avLst/>
-          </a:prstGeom>
-          <a:noFill/>
-        </p:spPr>
-        <p:txBody>
-          <a:bodyPr wrap="square">
-            <a:spAutoFit/>
-          </a:bodyPr>
-          <a:lstStyle/>
-          <a:p>
-            <a:r>
-              <a:rPr lang="en-US" sz="3200" b="1" spc="300" dirty="0">
-                <a:solidFill>
-                  <a:srgbClr val="92400E"/>
-                </a:solidFill>
-              </a:rPr>
-              <a:t>⏸</a:t>
-            </a:r>
-            <a:endParaRPr lang="en-US" sz="3200" dirty="0"/>
-          </a:p>
-        </p:txBody>
-      </p:sp>
-    </p:spTree>
-    <p:extLst>
-      <p:ext uri="{BB962C8B-B14F-4D97-AF65-F5344CB8AC3E}">
-        <p14:creationId xmlns:p14="http://schemas.microsoft.com/office/powerpoint/2010/main" val="3575431292"/>
       </p:ext>
     </p:extLst>
   </p:cSld>

--- a/Presentation.pptx
+++ b/Presentation.pptx
@@ -218,7 +218,7 @@
           <a:p>
             <a:fld id="{BC660078-77E7-46A7-9649-B3FD62DAD7B9}" type="datetimeFigureOut">
               <a:rPr lang="tr-TR" smtClean="0"/>
-              <a:t>30.04.2026</a:t>
+              <a:t>2.05.2026</a:t>
             </a:fld>
             <a:endParaRPr lang="tr-TR"/>
           </a:p>
@@ -639,7 +639,7 @@
           <a:p>
             <a:r>
               <a:rPr lang="en-US" dirty="0"/>
-              <a:t>[SECURITY] Slow down on this slide. This is where developers in the room decide if they trust the system.</a:t>
+              <a:t>[LIVE DEMO — Console] Alt-tab to Visual Studio. Make sure Chat.Console.OpenAI is already loaded and the font is LARGE.</a:t>
             </a:r>
           </a:p>
           <a:p>
@@ -648,37 +648,40 @@
           <a:p>
             <a:r>
               <a:rPr lang="en-US" dirty="0"/>
-              <a:t>Left card — the validator:</a:t>
+              <a:t>Step 1: Start the app. Let them see the prompt blink.</a:t>
             </a:r>
           </a:p>
           <a:p>
             <a:r>
               <a:rPr lang="en-US" dirty="0"/>
-              <a:t>- Block all mutating statements: DELETE, UPDATE, DROP, TRUNCATE</a:t>
+              <a:t>Step 2: Type 'top 10 customers by revenue' slowly, so people can read.</a:t>
             </a:r>
           </a:p>
           <a:p>
             <a:r>
               <a:rPr lang="en-US" dirty="0"/>
-              <a:t>- Block multi-statement queries (semicolons)</a:t>
+              <a:t>Step 3: Pause before hitting enter. Ask: 'What SQL do you expect?'</a:t>
             </a:r>
           </a:p>
           <a:p>
             <a:r>
               <a:rPr lang="en-US" dirty="0"/>
-              <a:t>- Allow SELECT only</a:t>
-            </a:r>
+              <a:t>Step 4: Hit enter. The generated SQL appears.</a:t>
+            </a:r>
+          </a:p>
+          <a:p>
+            <a:endParaRPr lang="en-US" dirty="0"/>
           </a:p>
           <a:p>
             <a:r>
               <a:rPr lang="en-US" dirty="0"/>
-              <a:t>- Enforce row limits so nobody accidentally SELECTs 50 million rows</a:t>
+              <a:t>[TRUST MOMENT] Stop. Read the SQL out loud. Then ask the audience:</a:t>
             </a:r>
           </a:p>
           <a:p>
             <a:r>
               <a:rPr lang="en-US" dirty="0"/>
-              <a:t>- Sanitize any identifiers</a:t>
+              <a:t>'Would you run this in production?'</a:t>
             </a:r>
           </a:p>
           <a:p>
@@ -687,7 +690,7 @@
           <a:p>
             <a:r>
               <a:rPr lang="en-US" dirty="0"/>
-              <a:t>[EMPHASIZE] 'The LLM is clever. It is not on your payroll. Treat its output like untrusted user input — because that is what it is.'</a:t>
+              <a:t>[PAUSE 3s] Let them sit with it. Some will say yes, some no.</a:t>
             </a:r>
           </a:p>
           <a:p>
@@ -696,40 +699,25 @@
           <a:p>
             <a:r>
               <a:rPr lang="en-US" dirty="0"/>
-              <a:t>Right card — execution:</a:t>
-            </a:r>
+              <a:t>Then: 'Right — we would not trust it blindly. That is why the next stage is validation.'</a:t>
+            </a:r>
+          </a:p>
+          <a:p>
+            <a:endParaRPr lang="en-US" dirty="0"/>
           </a:p>
           <a:p>
             <a:r>
               <a:rPr lang="en-US" dirty="0"/>
-              <a:t>- Connect with a read-only DB user. Belt and suspenders.</a:t>
-            </a:r>
+              <a:t>[CUE] Point back to the pipeline slide mentally: we just completed Schema → Prompt → LLM → SQL. Validation is next.</a:t>
+            </a:r>
+          </a:p>
+          <a:p>
+            <a:endParaRPr lang="en-US" dirty="0"/>
           </a:p>
           <a:p>
             <a:r>
               <a:rPr lang="en-US" dirty="0"/>
-              <a:t>- Set a query timeout. LLMs occasionally generate Cartesian joins.</a:t>
-            </a:r>
-          </a:p>
-          <a:p>
-            <a:r>
-              <a:rPr lang="en-US" dirty="0"/>
-              <a:t>- Return structured data, not raw rows</a:t>
-            </a:r>
-          </a:p>
-          <a:p>
-            <a:r>
-              <a:rPr lang="en-US" dirty="0"/>
-              <a:t>- Log every single query — you will need this for debugging AND auditing</a:t>
-            </a:r>
-          </a:p>
-          <a:p>
-            <a:endParaRPr lang="en-US" dirty="0"/>
-          </a:p>
-          <a:p>
-            <a:r>
-              <a:rPr lang="en-US" dirty="0"/>
-              <a:t>[TRANSITION] Back to the console demo — run the same query and show the log line.</a:t>
+              <a:t>Keep the console running — we'll use the same session for validation + execution.</a:t>
             </a:r>
           </a:p>
         </p:txBody>
@@ -788,7 +776,7 @@
           <a:p>
             <a:r>
               <a:rPr lang="en-US" dirty="0"/>
-              <a:t>[BIG MOMENT] This is the punchline of Act 1. Own it.</a:t>
+              <a:t>[SECURITY] Slow down on this slide. This is where developers in the room decide if they trust the system.</a:t>
             </a:r>
           </a:p>
           <a:p>
@@ -797,7 +785,37 @@
           <a:p>
             <a:r>
               <a:rPr lang="en-US" dirty="0"/>
-              <a:t>[PAUSE 3s] Stand still. Let the slide breathe.</a:t>
+              <a:t>Left card — the validator:</a:t>
+            </a:r>
+          </a:p>
+          <a:p>
+            <a:r>
+              <a:rPr lang="en-US" dirty="0"/>
+              <a:t>- Block all mutating statements: DELETE, UPDATE, DROP, TRUNCATE</a:t>
+            </a:r>
+          </a:p>
+          <a:p>
+            <a:r>
+              <a:rPr lang="en-US" dirty="0"/>
+              <a:t>- Block multi-statement queries (semicolons)</a:t>
+            </a:r>
+          </a:p>
+          <a:p>
+            <a:r>
+              <a:rPr lang="en-US" dirty="0"/>
+              <a:t>- Allow SELECT only</a:t>
+            </a:r>
+          </a:p>
+          <a:p>
+            <a:r>
+              <a:rPr lang="en-US" dirty="0"/>
+              <a:t>- Enforce row limits so nobody accidentally SELECTs 50 million rows</a:t>
+            </a:r>
+          </a:p>
+          <a:p>
+            <a:r>
+              <a:rPr lang="en-US" dirty="0"/>
+              <a:t>- Sanitize any identifiers</a:t>
             </a:r>
           </a:p>
           <a:p>
@@ -806,7 +824,7 @@
           <a:p>
             <a:r>
               <a:rPr lang="en-US" dirty="0"/>
-              <a:t>Read the quote slowly: 'This is a pipeline — not magic.'</a:t>
+              <a:t>[EMPHASIZE] 'The LLM is clever. It is not on your payroll. Treat its output like untrusted user input — because that is what it is.'</a:t>
             </a:r>
           </a:p>
           <a:p>
@@ -815,7 +833,31 @@
           <a:p>
             <a:r>
               <a:rPr lang="en-US" dirty="0"/>
-              <a:t>[EMPHASIZE] 'Every stage you just saw is inspectable. Testable. Replaceable. You can swap the LLM. You can add a cache in front of it. You can unit-test the validator.'</a:t>
+              <a:t>Right card — execution:</a:t>
+            </a:r>
+          </a:p>
+          <a:p>
+            <a:r>
+              <a:rPr lang="en-US" dirty="0"/>
+              <a:t>- Connect with a read-only DB user. Belt and suspenders.</a:t>
+            </a:r>
+          </a:p>
+          <a:p>
+            <a:r>
+              <a:rPr lang="en-US" dirty="0"/>
+              <a:t>- Set a query timeout. LLMs occasionally generate Cartesian joins.</a:t>
+            </a:r>
+          </a:p>
+          <a:p>
+            <a:r>
+              <a:rPr lang="en-US" dirty="0"/>
+              <a:t>- Return structured data, not raw rows</a:t>
+            </a:r>
+          </a:p>
+          <a:p>
+            <a:r>
+              <a:rPr lang="en-US" dirty="0"/>
+              <a:t>- Log every single query — you will need this for debugging AND auditing</a:t>
             </a:r>
           </a:p>
           <a:p>
@@ -824,25 +866,7 @@
           <a:p>
             <a:r>
               <a:rPr lang="en-US" dirty="0"/>
-              <a:t>'When something goes wrong in production — and it will — you can open a log and see exactly which stage failed.'</a:t>
-            </a:r>
-          </a:p>
-          <a:p>
-            <a:endParaRPr lang="en-US" dirty="0"/>
-          </a:p>
-          <a:p>
-            <a:r>
-              <a:rPr lang="en-US" dirty="0"/>
-              <a:t>[PAUSE] 'That is why this works in an enterprise context. Because it stops being AI and starts being software.'</a:t>
-            </a:r>
-          </a:p>
-          <a:p>
-            <a:endParaRPr lang="en-US" dirty="0"/>
-          </a:p>
-          <a:p>
-            <a:r>
-              <a:rPr lang="en-US" dirty="0"/>
-              <a:t>[TRANSITION] 'Let me zoom out and show you the architecture.'</a:t>
+              <a:t>[TRANSITION] Back to the console demo — run the same query and show the log line.</a:t>
             </a:r>
           </a:p>
         </p:txBody>
@@ -901,7 +925,7 @@
           <a:p>
             <a:r>
               <a:rPr lang="en-US" dirty="0"/>
-              <a:t>[ARCHITECTURE] Architects in the room, this slide is for you.</a:t>
+              <a:t>[BIG MOMENT] This is the punchline of Act 1. Own it.</a:t>
             </a:r>
           </a:p>
           <a:p>
@@ -910,7 +934,7 @@
           <a:p>
             <a:r>
               <a:rPr lang="en-US" dirty="0"/>
-              <a:t>Three layers. Walk through top to bottom:</a:t>
+              <a:t>[PAUSE 3s] Stand still. Let the slide breathe.</a:t>
             </a:r>
           </a:p>
           <a:p>
@@ -919,7 +943,7 @@
           <a:p>
             <a:r>
               <a:rPr lang="en-US" dirty="0"/>
-              <a:t>Layer 1 — Intake. The only layer that touches the user and the database schema. It answers: 'What did they ask, and what do we know about the data?'</a:t>
+              <a:t>Read the quote slowly: 'This is a pipeline — not magic.'</a:t>
             </a:r>
           </a:p>
           <a:p>
@@ -928,7 +952,7 @@
           <a:p>
             <a:r>
               <a:rPr lang="en-US" dirty="0"/>
-              <a:t>Layer 2 — Brain. The LLM lives here, and so does the validator. Input: user intent plus schema. Output: safe SQL. Nothing else gets in or out.</a:t>
+              <a:t>[EMPHASIZE] 'Every stage you just saw is inspectable. Testable. Replaceable. You can swap the LLM. You can add a cache in front of it. You can unit-test the validator.'</a:t>
             </a:r>
           </a:p>
           <a:p>
@@ -937,7 +961,7 @@
           <a:p>
             <a:r>
               <a:rPr lang="en-US" dirty="0"/>
-              <a:t>Layer 3 — Output. Runs the query, formats the results, feeds downstream consumers like Excel or charts.</a:t>
+              <a:t>'When something goes wrong in production — and it will — you can open a log and see exactly which stage failed.'</a:t>
             </a:r>
           </a:p>
           <a:p>
@@ -946,7 +970,7 @@
           <a:p>
             <a:r>
               <a:rPr lang="en-US" dirty="0"/>
-              <a:t>[EMPHASIZE] Read the bottom strip: 'Swap the LLM, swap the database, swap the UI — the contract between layers stays the same.'</a:t>
+              <a:t>[PAUSE] 'That is why this works in an enterprise context. Because it stops being AI and starts being software.'</a:t>
             </a:r>
           </a:p>
           <a:p>
@@ -955,16 +979,7 @@
           <a:p>
             <a:r>
               <a:rPr lang="en-US" dirty="0"/>
-              <a:t>'Which means when OpenAI releases a better model next week, you change one class. When you move from SQL Server to Postgres, you change one class. That is the win.'</a:t>
-            </a:r>
-          </a:p>
-          <a:p>
-            <a:endParaRPr lang="en-US" dirty="0"/>
-          </a:p>
-          <a:p>
-            <a:r>
-              <a:rPr lang="en-US" dirty="0"/>
-              <a:t>[TRANSITION] 'And because the layers are clean, this whole thing fits in one NuGet module.'</a:t>
+              <a:t>[TRANSITION] 'Let me zoom out and show you the architecture.'</a:t>
             </a:r>
           </a:p>
         </p:txBody>
@@ -1023,7 +1038,7 @@
           <a:p>
             <a:r>
               <a:rPr lang="en-US" dirty="0"/>
-              <a:t>[PRACTICAL] Point at the code block on the left.</a:t>
+              <a:t>[ARCHITECTURE] Architects in the room, this slide is for you.</a:t>
             </a:r>
           </a:p>
           <a:p>
@@ -1032,31 +1047,43 @@
           <a:p>
             <a:r>
               <a:rPr lang="en-US" dirty="0"/>
-              <a:t>'This is literally the whole setup. Three lines in Program.cs:'</a:t>
-            </a:r>
+              <a:t>Three layers. Walk through top to bottom:</a:t>
+            </a:r>
+          </a:p>
+          <a:p>
+            <a:endParaRPr lang="en-US" dirty="0"/>
           </a:p>
           <a:p>
             <a:r>
               <a:rPr lang="en-US" dirty="0"/>
-              <a:t>- Connection string — where's your database</a:t>
-            </a:r>
+              <a:t>Layer 1 — Intake. The only layer that touches the user and the database schema. It answers: 'What did they ask, and what do we know about the data?'</a:t>
+            </a:r>
+          </a:p>
+          <a:p>
+            <a:endParaRPr lang="en-US" dirty="0"/>
           </a:p>
           <a:p>
             <a:r>
               <a:rPr lang="en-US" dirty="0"/>
-              <a:t>- LLM provider — OpenAI, Azure OpenAI, Claude, local model, whatever</a:t>
-            </a:r>
+              <a:t>Layer 2 — Brain. The LLM lives here, and so does the validator. Input: user intent plus schema. Output: safe SQL. Nothing else gets in or out.</a:t>
+            </a:r>
+          </a:p>
+          <a:p>
+            <a:endParaRPr lang="en-US" dirty="0"/>
           </a:p>
           <a:p>
             <a:r>
               <a:rPr lang="en-US" dirty="0"/>
-              <a:t>- ReadOnly flag — seat belt and suspenders on top of the validator</a:t>
-            </a:r>
+              <a:t>Layer 3 — Output. Runs the query, formats the results, feeds downstream consumers like Excel or charts.</a:t>
+            </a:r>
+          </a:p>
+          <a:p>
+            <a:endParaRPr lang="en-US" dirty="0"/>
           </a:p>
           <a:p>
             <a:r>
               <a:rPr lang="en-US" dirty="0"/>
-              <a:t>:</a:t>
+              <a:t>[EMPHASIZE] Read the bottom strip: 'Swap the LLM, swap the database, swap the UI — the contract between layers stays the same.'</a:t>
             </a:r>
           </a:p>
           <a:p>
@@ -1065,7 +1092,16 @@
           <a:p>
             <a:r>
               <a:rPr lang="en-US" dirty="0"/>
-              <a:t>[TRANSITION] 'So let us look at what a real product feels like.'</a:t>
+              <a:t>'Which means when OpenAI releases a better model next week, you change one class. When you move from SQL Server to Postgres, you change one class. That is the win.'</a:t>
+            </a:r>
+          </a:p>
+          <a:p>
+            <a:endParaRPr lang="en-US" dirty="0"/>
+          </a:p>
+          <a:p>
+            <a:r>
+              <a:rPr lang="en-US" dirty="0"/>
+              <a:t>[TRANSITION] 'And because the layers are clean, this whole thing fits in one NuGet module.'</a:t>
             </a:r>
           </a:p>
         </p:txBody>
@@ -1124,7 +1160,7 @@
           <a:p>
             <a:r>
               <a:rPr lang="en-US" dirty="0"/>
-              <a:t>[LIVE DEMO] Switch to the Blazor browser window. Make sure the mic permission is already granted before the talk.</a:t>
+              <a:t>[PRACTICAL] Point at the code block on the left.</a:t>
             </a:r>
           </a:p>
           <a:p>
@@ -1133,7 +1169,31 @@
           <a:p>
             <a:r>
               <a:rPr lang="en-US" dirty="0"/>
-              <a:t>Demo script — roughly 4 minutes total:</a:t>
+              <a:t>'This is literally the whole setup. Three lines in Program.cs:'</a:t>
+            </a:r>
+          </a:p>
+          <a:p>
+            <a:r>
+              <a:rPr lang="en-US" dirty="0"/>
+              <a:t>- Connection string — where's your database</a:t>
+            </a:r>
+          </a:p>
+          <a:p>
+            <a:r>
+              <a:rPr lang="en-US" dirty="0"/>
+              <a:t>- LLM provider — OpenAI, Azure OpenAI, Claude, local model, whatever</a:t>
+            </a:r>
+          </a:p>
+          <a:p>
+            <a:r>
+              <a:rPr lang="en-US" dirty="0"/>
+              <a:t>- ReadOnly flag — seat belt and suspenders on top of the validator</a:t>
+            </a:r>
+          </a:p>
+          <a:p>
+            <a:r>
+              <a:rPr lang="en-US" dirty="0"/>
+              <a:t>:</a:t>
             </a:r>
           </a:p>
           <a:p>
@@ -1142,64 +1202,7 @@
           <a:p>
             <a:r>
               <a:rPr lang="en-US" dirty="0"/>
-              <a:t>1. Click the mic button. Say clearly: 'Show me sales trends for the last six months.'</a:t>
-            </a:r>
-          </a:p>
-          <a:p>
-            <a:r>
-              <a:rPr lang="en-US" dirty="0"/>
-              <a:t>2. Let the audience watch the transcription appear.</a:t>
-            </a:r>
-          </a:p>
-          <a:p>
-            <a:r>
-              <a:rPr lang="en-US" dirty="0"/>
-              <a:t>3. Show the SQL it generated (same pipeline as before — point this out).</a:t>
-            </a:r>
-          </a:p>
-          <a:p>
-            <a:r>
-              <a:rPr lang="en-US" dirty="0"/>
-              <a:t>4. Watch the table render.</a:t>
-            </a:r>
-          </a:p>
-          <a:p>
-            <a:r>
-              <a:rPr lang="en-US" dirty="0"/>
-              <a:t>5. Switch to the chart tab — the 'wow' moment.</a:t>
-            </a:r>
-          </a:p>
-          <a:p>
-            <a:r>
-              <a:rPr lang="en-US" dirty="0"/>
-              <a:t>6. Click Export to Excel. Open the file briefly so they see it's real.</a:t>
-            </a:r>
-          </a:p>
-          <a:p>
-            <a:endParaRPr lang="en-US" dirty="0"/>
-          </a:p>
-          <a:p>
-            <a:r>
-              <a:rPr lang="en-US" dirty="0"/>
-              <a:t>[EMPHASIZE] 'Voice in. Chart out. Spreadsheet in my downloads folder. Zero SQL.'</a:t>
-            </a:r>
-          </a:p>
-          <a:p>
-            <a:endParaRPr lang="en-US" dirty="0"/>
-          </a:p>
-          <a:p>
-            <a:r>
-              <a:rPr lang="en-US" dirty="0"/>
-              <a:t>[FALLBACK] If the mic fails, just type the query. Don't panic. Say: 'Let me type this instead.'</a:t>
-            </a:r>
-          </a:p>
-          <a:p>
-            <a:endParaRPr lang="en-US" dirty="0"/>
-          </a:p>
-          <a:p>
-            <a:r>
-              <a:rPr lang="en-US" dirty="0"/>
-              <a:t>[TRANSITION] Return to slides. 'Why does this feel different from the console? Let's talk about UX.'</a:t>
+              <a:t>[TRANSITION] 'So let us look at what a real product feels like.'</a:t>
             </a:r>
           </a:p>
         </p:txBody>
@@ -1258,7 +1261,7 @@
           <a:p>
             <a:r>
               <a:rPr lang="en-US" dirty="0"/>
-              <a:t>[DIVIDER] Brief pacing slide — 10 seconds.</a:t>
+              <a:t>[LIVE DEMO] Switch to the Blazor browser window. Make sure the mic permission is already granted before the talk.</a:t>
             </a:r>
           </a:p>
           <a:p>
@@ -1267,7 +1270,7 @@
           <a:p>
             <a:r>
               <a:rPr lang="en-US" dirty="0"/>
-              <a:t>'Second demo: the product. Same backend, but now with voice input, live charts, and Excel export. This is what you'd actually ship to business users.'</a:t>
+              <a:t>Demo script — roughly 4 minutes total:</a:t>
             </a:r>
           </a:p>
           <a:p>
@@ -1276,7 +1279,37 @@
           <a:p>
             <a:r>
               <a:rPr lang="en-US" dirty="0"/>
-              <a:t>[STAGE] Take a breath. Check the room. Walk to the other side of the stage if possible.</a:t>
+              <a:t>1. Click the mic button. Say clearly: 'Show me sales trends for the last six months.'</a:t>
+            </a:r>
+          </a:p>
+          <a:p>
+            <a:r>
+              <a:rPr lang="en-US" dirty="0"/>
+              <a:t>2. Let the audience watch the transcription appear.</a:t>
+            </a:r>
+          </a:p>
+          <a:p>
+            <a:r>
+              <a:rPr lang="en-US" dirty="0"/>
+              <a:t>3. Show the SQL it generated (same pipeline as before — point this out).</a:t>
+            </a:r>
+          </a:p>
+          <a:p>
+            <a:r>
+              <a:rPr lang="en-US" dirty="0"/>
+              <a:t>4. Watch the table render.</a:t>
+            </a:r>
+          </a:p>
+          <a:p>
+            <a:r>
+              <a:rPr lang="en-US" dirty="0"/>
+              <a:t>5. Switch to the chart tab — the 'wow' moment.</a:t>
+            </a:r>
+          </a:p>
+          <a:p>
+            <a:r>
+              <a:rPr lang="en-US" dirty="0"/>
+              <a:t>6. Click Export to Excel. Open the file briefly so they see it's real.</a:t>
             </a:r>
           </a:p>
           <a:p>
@@ -1285,7 +1318,25 @@
           <a:p>
             <a:r>
               <a:rPr lang="en-US" dirty="0"/>
-              <a:t>[TRANSITION] 'Let me show you the pieces.'</a:t>
+              <a:t>[EMPHASIZE] 'Voice in. Chart out. Spreadsheet in my downloads folder. Zero SQL.'</a:t>
+            </a:r>
+          </a:p>
+          <a:p>
+            <a:endParaRPr lang="en-US" dirty="0"/>
+          </a:p>
+          <a:p>
+            <a:r>
+              <a:rPr lang="en-US" dirty="0"/>
+              <a:t>[FALLBACK] If the mic fails, just type the query. Don't panic. Say: 'Let me type this instead.'</a:t>
+            </a:r>
+          </a:p>
+          <a:p>
+            <a:endParaRPr lang="en-US" dirty="0"/>
+          </a:p>
+          <a:p>
+            <a:r>
+              <a:rPr lang="en-US" dirty="0"/>
+              <a:t>[TRANSITION] Return to slides. 'Why does this feel different from the console? Let's talk about UX.'</a:t>
             </a:r>
           </a:p>
         </p:txBody>
@@ -1344,7 +1395,7 @@
           <a:p>
             <a:r>
               <a:rPr lang="en-US" dirty="0"/>
-              <a:t>[SETUP] This slide introduces the second demo. Frame it as 'same engine, different car.'</a:t>
+              <a:t>[DIVIDER] Brief pacing slide — 10 seconds.</a:t>
             </a:r>
           </a:p>
           <a:p>
@@ -1353,7 +1404,7 @@
           <a:p>
             <a:r>
               <a:rPr lang="en-US" dirty="0"/>
-              <a:t>'The console app proved the pipeline works. But business users don't open a terminal — they want to click, talk, and see a chart.'</a:t>
+              <a:t>'Second demo: the product. Same backend, but now with voice input, live charts, and Excel export. This is what you'd actually ship to business users.'</a:t>
             </a:r>
           </a:p>
           <a:p>
@@ -1362,43 +1413,16 @@
           <a:p>
             <a:r>
               <a:rPr lang="en-US" dirty="0"/>
-              <a:t>Walk through the three upgrades briefly:</a:t>
-            </a:r>
+              <a:t>[STAGE] Take a breath. Check the room. Walk to the other side of the stage if possible.</a:t>
+            </a:r>
+          </a:p>
+          <a:p>
+            <a:endParaRPr lang="en-US" dirty="0"/>
           </a:p>
           <a:p>
             <a:r>
               <a:rPr lang="en-US" dirty="0"/>
-              <a:t>- Voice input — you literally speak your question</a:t>
-            </a:r>
-          </a:p>
-          <a:p>
-            <a:r>
-              <a:rPr lang="en-US" dirty="0"/>
-              <a:t>- Live charts — results render as tables AND as visualizations</a:t>
-            </a:r>
-          </a:p>
-          <a:p>
-            <a:r>
-              <a:rPr lang="en-US" dirty="0"/>
-              <a:t>- One-click Excel export — because half of all reporting ends in Excel anyway</a:t>
-            </a:r>
-          </a:p>
-          <a:p>
-            <a:endParaRPr lang="en-US" dirty="0"/>
-          </a:p>
-          <a:p>
-            <a:r>
-              <a:rPr lang="en-US" dirty="0"/>
-              <a:t>[EMPHASIZE] 'The backend code? Identical. We just swapped the UI.'</a:t>
-            </a:r>
-          </a:p>
-          <a:p>
-            <a:endParaRPr lang="en-US" dirty="0"/>
-          </a:p>
-          <a:p>
-            <a:r>
-              <a:rPr lang="en-US" dirty="0"/>
-              <a:t>[TRANSITION] 'Let me show you.'</a:t>
+              <a:t>[TRANSITION] 'Let me show you the pieces.'</a:t>
             </a:r>
           </a:p>
         </p:txBody>
@@ -1457,7 +1481,7 @@
           <a:p>
             <a:r>
               <a:rPr lang="en-US" dirty="0"/>
-              <a:t>[REFLECTION] Slow down here. The audience just saw something cool — give them a moment to integrate it.</a:t>
+              <a:t>[SETUP] This slide introduces the second demo. Frame it as 'same engine, different car.'</a:t>
             </a:r>
           </a:p>
           <a:p>
@@ -1466,7 +1490,7 @@
           <a:p>
             <a:r>
               <a:rPr lang="en-US" dirty="0"/>
-              <a:t>Three UX truths this project taught me:</a:t>
+              <a:t>'The console app proved the pipeline works. But business users don't open a terminal — they want to click, talk, and see a chart.'</a:t>
             </a:r>
           </a:p>
           <a:p>
@@ -1475,19 +1499,25 @@
           <a:p>
             <a:r>
               <a:rPr lang="en-US" dirty="0"/>
-              <a:t>- Simplicity wins. The user types or speaks. That's it. No dropdowns, no filters, no form fields.</a:t>
+              <a:t>Walk through the three upgrades briefly:</a:t>
             </a:r>
           </a:p>
           <a:p>
             <a:r>
               <a:rPr lang="en-US" dirty="0"/>
-              <a:t>- Instant feedback. Show the SQL. Show the table. Show the chart. Never leave the user staring at a spinner with no context.</a:t>
+              <a:t>- Voice input — you literally speak your question</a:t>
             </a:r>
           </a:p>
           <a:p>
             <a:r>
               <a:rPr lang="en-US" dirty="0"/>
-              <a:t>- Trust in results. Every answer can be inspected — show me the query, show me the row count, let me verify.</a:t>
+              <a:t>- Live charts — results render as tables AND as visualizations</a:t>
+            </a:r>
+          </a:p>
+          <a:p>
+            <a:r>
+              <a:rPr lang="en-US" dirty="0"/>
+              <a:t>- One-click Excel export — because half of all reporting ends in Excel anyway</a:t>
             </a:r>
           </a:p>
           <a:p>
@@ -1496,7 +1526,7 @@
           <a:p>
             <a:r>
               <a:rPr lang="en-US" dirty="0"/>
-              <a:t>[EMPHASIZE] 'The tech is the LLM. The product is the trust.'</a:t>
+              <a:t>[EMPHASIZE] 'The backend code? Identical. We just swapped the UI.'</a:t>
             </a:r>
           </a:p>
           <a:p>
@@ -1505,7 +1535,7 @@
           <a:p>
             <a:r>
               <a:rPr lang="en-US" dirty="0"/>
-              <a:t>[TRANSITION] 'So where does this actually fit in the real world?'</a:t>
+              <a:t>[TRANSITION] 'Let me show you.'</a:t>
             </a:r>
           </a:p>
         </p:txBody>
@@ -1564,7 +1594,7 @@
           <a:p>
             <a:r>
               <a:rPr lang="en-US" dirty="0"/>
-              <a:t>[MAKE IT REAL] This is where you connect the demo to their day job. Tailor the examples to the room if you can — if you know someone works in finance, lean on that one.</a:t>
+              <a:t>[REFLECTION] Slow down here. The audience just saw something cool — give them a moment to integrate it.</a:t>
             </a:r>
           </a:p>
           <a:p>
@@ -1573,7 +1603,7 @@
           <a:p>
             <a:r>
               <a:rPr lang="en-US" dirty="0"/>
-              <a:t>Four places this pattern ships today:</a:t>
+              <a:t>Three UX truths this project taught me:</a:t>
             </a:r>
           </a:p>
           <a:p>
@@ -1582,25 +1612,28 @@
           <a:p>
             <a:r>
               <a:rPr lang="en-US" dirty="0"/>
-              <a:t>- Admin dashboards — internal tools where PMs, ops, and support staff self-serve data</a:t>
+              <a:t>- Simplicity wins. The user types or speaks. That's it. No dropdowns, no filters, no form fields.</a:t>
             </a:r>
           </a:p>
           <a:p>
             <a:r>
               <a:rPr lang="en-US" dirty="0"/>
-              <a:t>- Customer support — '/lookup everything for account 1234' without a Slack ticket to engineering</a:t>
+              <a:t>- Instant feedback. Show the SQL. Show the table. Show the chart. Never leave the user staring at a spinner with no context.</a:t>
             </a:r>
           </a:p>
           <a:p>
             <a:r>
               <a:rPr lang="en-US" dirty="0"/>
-              <a:t>- Finance and BI — replacing half-built Power BI reports that nobody maintains</a:t>
-            </a:r>
+              <a:t>- Trust in results. Every answer can be inspected — show me the query, show me the row count, let me verify.</a:t>
+            </a:r>
+          </a:p>
+          <a:p>
+            <a:endParaRPr lang="en-US" dirty="0"/>
           </a:p>
           <a:p>
             <a:r>
               <a:rPr lang="en-US" dirty="0"/>
-              <a:t>- Sales ops — 'what's my pipeline this quarter?' asked and answered in five seconds</a:t>
+              <a:t>[EMPHASIZE] 'The tech is the LLM. The product is the trust.'</a:t>
             </a:r>
           </a:p>
           <a:p>
@@ -1609,85 +1642,7 @@
           <a:p>
             <a:r>
               <a:rPr lang="en-US" dirty="0"/>
-              <a:t>[EMPHASIZE] 'Every company you've worked at had this need. You just didn't have the tools to solve it cheaply. Now you do.’</a:t>
-            </a:r>
-          </a:p>
-          <a:p>
-            <a:endParaRPr lang="en-US" dirty="0"/>
-          </a:p>
-          <a:p>
-            <a:r>
-              <a:rPr lang="en-US" b="1" dirty="0"/>
-              <a:t>ACTIONS:</a:t>
-            </a:r>
-          </a:p>
-          <a:p>
-            <a:pPr marL="171450" indent="-171450">
-              <a:buFont typeface="Arial" panose="020B0604020202020204" pitchFamily="34" charset="0"/>
-              <a:buChar char="•"/>
-            </a:pPr>
-            <a:r>
-              <a:rPr lang="en-US" dirty="0"/>
-              <a:t>Create reservations </a:t>
-            </a:r>
-          </a:p>
-          <a:p>
-            <a:pPr marL="171450" indent="-171450">
-              <a:buFont typeface="Arial" panose="020B0604020202020204" pitchFamily="34" charset="0"/>
-              <a:buChar char="•"/>
-            </a:pPr>
-            <a:r>
-              <a:rPr lang="en-US" dirty="0"/>
-              <a:t>Remove spam users </a:t>
-            </a:r>
-          </a:p>
-          <a:p>
-            <a:pPr marL="171450" indent="-171450">
-              <a:buFont typeface="Arial" panose="020B0604020202020204" pitchFamily="34" charset="0"/>
-              <a:buChar char="•"/>
-            </a:pPr>
-            <a:r>
-              <a:rPr lang="en-US" dirty="0"/>
-              <a:t>Add/update products</a:t>
-            </a:r>
-          </a:p>
-          <a:p>
-            <a:pPr marL="171450" indent="-171450">
-              <a:buFont typeface="Arial" panose="020B0604020202020204" pitchFamily="34" charset="0"/>
-              <a:buChar char="•"/>
-            </a:pPr>
-            <a:r>
-              <a:rPr lang="en-US" dirty="0"/>
-              <a:t>merge duplicate records</a:t>
-            </a:r>
-          </a:p>
-          <a:p>
-            <a:pPr marL="171450" indent="-171450">
-              <a:buFont typeface="Arial" panose="020B0604020202020204" pitchFamily="34" charset="0"/>
-              <a:buChar char="•"/>
-            </a:pPr>
-            <a:r>
-              <a:rPr lang="en-US" dirty="0"/>
-              <a:t>Fix invalid phone numbers</a:t>
-            </a:r>
-          </a:p>
-          <a:p>
-            <a:pPr marL="171450" indent="-171450">
-              <a:buFont typeface="Arial" panose="020B0604020202020204" pitchFamily="34" charset="0"/>
-              <a:buChar char="•"/>
-            </a:pPr>
-            <a:r>
-              <a:rPr lang="en-US" dirty="0"/>
-              <a:t>Auto create campaigns based on my sales</a:t>
-            </a:r>
-          </a:p>
-          <a:p>
-            <a:endParaRPr lang="en-US" dirty="0"/>
-          </a:p>
-          <a:p>
-            <a:r>
-              <a:rPr lang="en-US" dirty="0"/>
-              <a:t>[TRANSITION] 'Before you go build one — the real talk.'</a:t>
+              <a:t>[TRANSITION] 'So where does this actually fit in the real world?'</a:t>
             </a:r>
           </a:p>
         </p:txBody>
@@ -1746,7 +1701,7 @@
           <a:p>
             <a:r>
               <a:rPr lang="en-US" dirty="0"/>
-              <a:t>[HONEST] Don't skip past this. The audience trusts you more when you admit what's hard.</a:t>
+              <a:t>[MAKE IT REAL] This is where you connect the demo to their day job. Tailor the examples to the room if you can — if you know someone works in finance, lean on that one.</a:t>
             </a:r>
           </a:p>
           <a:p>
@@ -1755,31 +1710,34 @@
           <a:p>
             <a:r>
               <a:rPr lang="en-US" dirty="0"/>
-              <a:t>Challenges you will absolutely hit:</a:t>
-            </a:r>
+              <a:t>Four places this pattern ships today:</a:t>
+            </a:r>
+          </a:p>
+          <a:p>
+            <a:endParaRPr lang="en-US" dirty="0"/>
           </a:p>
           <a:p>
             <a:r>
               <a:rPr lang="en-US" dirty="0"/>
-              <a:t>- Prompt tuning is iterative. Your first prompt will be wrong. Your tenth will still miss edge cases.</a:t>
+              <a:t>- Admin dashboards — internal tools where PMs, ops, and support staff self-serve data</a:t>
             </a:r>
           </a:p>
           <a:p>
             <a:r>
               <a:rPr lang="en-US" dirty="0"/>
-              <a:t>- SQL safety is a moving target — you're not just blocking DROP, you're blocking creative joins that melt the DB.</a:t>
+              <a:t>- Customer support — '/lookup everything for account 1234' without a Slack ticket to engineering</a:t>
             </a:r>
           </a:p>
           <a:p>
             <a:r>
               <a:rPr lang="en-US" dirty="0"/>
-              <a:t>- Performance matters — LLM latency + query latency compounds. Cache aggressively.</a:t>
+              <a:t>- Finance and BI — replacing half-built Power BI reports that nobody maintains</a:t>
             </a:r>
           </a:p>
           <a:p>
             <a:r>
               <a:rPr lang="en-US" dirty="0"/>
-              <a:t>- Edge cases are infinite. 'Show me sales' is easy. 'Compare this quarter to the same quarter two years ago, excluding returns' is not.</a:t>
+              <a:t>- Sales ops — 'what's my pipeline this quarter?' asked and answered in five seconds</a:t>
             </a:r>
           </a:p>
           <a:p>
@@ -1788,31 +1746,76 @@
           <a:p>
             <a:r>
               <a:rPr lang="en-US" dirty="0"/>
-              <a:t>Best practices that actually work:</a:t>
-            </a:r>
-          </a:p>
-          <a:p>
+              <a:t>[EMPHASIZE] 'Every company you've worked at had this need. You just didn't have the tools to solve it cheaply. Now you do.’</a:t>
+            </a:r>
+          </a:p>
+          <a:p>
+            <a:endParaRPr lang="en-US" dirty="0"/>
+          </a:p>
+          <a:p>
+            <a:r>
+              <a:rPr lang="en-US" b="1" dirty="0"/>
+              <a:t>ACTIONS:</a:t>
+            </a:r>
+          </a:p>
+          <a:p>
+            <a:pPr marL="171450" indent="-171450">
+              <a:buFont typeface="Arial" panose="020B0604020202020204" pitchFamily="34" charset="0"/>
+              <a:buChar char="•"/>
+            </a:pPr>
             <a:r>
               <a:rPr lang="en-US" dirty="0"/>
-              <a:t>- Always validate SQL. Twice. Belt and suspenders.</a:t>
-            </a:r>
-          </a:p>
-          <a:p>
+              <a:t>Create reservations </a:t>
+            </a:r>
+          </a:p>
+          <a:p>
+            <a:pPr marL="171450" indent="-171450">
+              <a:buFont typeface="Arial" panose="020B0604020202020204" pitchFamily="34" charset="0"/>
+              <a:buChar char="•"/>
+            </a:pPr>
             <a:r>
               <a:rPr lang="en-US" dirty="0"/>
-              <a:t>- Keep prompts strict — don't try to be clever.</a:t>
-            </a:r>
-          </a:p>
-          <a:p>
+              <a:t>Remove spam users </a:t>
+            </a:r>
+          </a:p>
+          <a:p>
+            <a:pPr marL="171450" indent="-171450">
+              <a:buFont typeface="Arial" panose="020B0604020202020204" pitchFamily="34" charset="0"/>
+              <a:buChar char="•"/>
+            </a:pPr>
             <a:r>
               <a:rPr lang="en-US" dirty="0"/>
-              <a:t>- Log every single query, prompt, and response. You'll need them when a user says 'that number looks wrong.'</a:t>
-            </a:r>
-          </a:p>
-          <a:p>
+              <a:t>Add/update products</a:t>
+            </a:r>
+          </a:p>
+          <a:p>
+            <a:pPr marL="171450" indent="-171450">
+              <a:buFont typeface="Arial" panose="020B0604020202020204" pitchFamily="34" charset="0"/>
+              <a:buChar char="•"/>
+            </a:pPr>
             <a:r>
               <a:rPr lang="en-US" dirty="0"/>
-              <a:t>- Start simple. Ship the ugly version first.</a:t>
+              <a:t>merge duplicate records</a:t>
+            </a:r>
+          </a:p>
+          <a:p>
+            <a:pPr marL="171450" indent="-171450">
+              <a:buFont typeface="Arial" panose="020B0604020202020204" pitchFamily="34" charset="0"/>
+              <a:buChar char="•"/>
+            </a:pPr>
+            <a:r>
+              <a:rPr lang="en-US" dirty="0"/>
+              <a:t>Fix invalid phone numbers</a:t>
+            </a:r>
+          </a:p>
+          <a:p>
+            <a:pPr marL="171450" indent="-171450">
+              <a:buFont typeface="Arial" panose="020B0604020202020204" pitchFamily="34" charset="0"/>
+              <a:buChar char="•"/>
+            </a:pPr>
+            <a:r>
+              <a:rPr lang="en-US" dirty="0"/>
+              <a:t>Auto create campaigns based on my sales</a:t>
             </a:r>
           </a:p>
           <a:p>
@@ -1821,7 +1824,7 @@
           <a:p>
             <a:r>
               <a:rPr lang="en-US" dirty="0"/>
-              <a:t>[TRANSITION] 'Which brings me to the three things I want you to take home.'</a:t>
+              <a:t>[TRANSITION] 'Before you go build one — the real talk.'</a:t>
             </a:r>
           </a:p>
         </p:txBody>
@@ -1878,7 +1881,7 @@
           <a:bodyPr/>
           <a:lstStyle/>
           <a:p>
-            <a:endParaRPr lang="tr-TR" dirty="0"/>
+            <a:endParaRPr lang="en-US" dirty="0"/>
           </a:p>
         </p:txBody>
       </p:sp>
@@ -1899,7 +1902,7 @@
           <a:p>
             <a:fld id="{D1473214-2400-4051-BA10-C1E11D206B4D}" type="slidenum">
               <a:rPr lang="tr-TR" smtClean="0"/>
-              <a:t>3</a:t>
+              <a:t>2</a:t>
             </a:fld>
             <a:endParaRPr lang="tr-TR"/>
           </a:p>
@@ -1908,7 +1911,7 @@
     </p:spTree>
     <p:extLst>
       <p:ext uri="{BB962C8B-B14F-4D97-AF65-F5344CB8AC3E}">
-        <p14:creationId xmlns:p14="http://schemas.microsoft.com/office/powerpoint/2010/main" val="3010510780"/>
+        <p14:creationId xmlns:p14="http://schemas.microsoft.com/office/powerpoint/2010/main" val="144467047"/>
       </p:ext>
     </p:extLst>
   </p:cSld>
@@ -1919,6 +1922,140 @@
 </file>
 
 <file path=ppt/notesSlides/notesSlide20.xml><?xml version="1.0" encoding="utf-8"?>
+<p:notes xmlns:a="http://schemas.openxmlformats.org/drawingml/2006/main" xmlns:r="http://schemas.openxmlformats.org/officeDocument/2006/relationships" xmlns:p="http://schemas.openxmlformats.org/presentationml/2006/main">
+  <p:cSld>
+    <p:spTree>
+      <p:nvGrpSpPr>
+        <p:cNvPr id="1" name=""/>
+        <p:cNvGrpSpPr/>
+        <p:nvPr/>
+      </p:nvGrpSpPr>
+      <p:grpSpPr>
+        <a:xfrm>
+          <a:off x="0" y="0"/>
+          <a:ext cx="0" cy="0"/>
+          <a:chOff x="0" y="0"/>
+          <a:chExt cx="0" cy="0"/>
+        </a:xfrm>
+      </p:grpSpPr>
+      <p:sp>
+        <p:nvSpPr>
+          <p:cNvPr id="2" name="Slide Image Placeholder 1"/>
+          <p:cNvSpPr>
+            <a:spLocks noGrp="1" noRot="1" noChangeAspect="1"/>
+          </p:cNvSpPr>
+          <p:nvPr>
+            <p:ph type="sldImg"/>
+          </p:nvPr>
+        </p:nvSpPr>
+        <p:spPr/>
+      </p:sp>
+      <p:sp>
+        <p:nvSpPr>
+          <p:cNvPr id="3" name="Notes Placeholder 2"/>
+          <p:cNvSpPr>
+            <a:spLocks noGrp="1"/>
+          </p:cNvSpPr>
+          <p:nvPr>
+            <p:ph type="body" idx="1"/>
+          </p:nvPr>
+        </p:nvSpPr>
+        <p:spPr/>
+        <p:txBody>
+          <a:bodyPr/>
+          <a:lstStyle/>
+          <a:p>
+            <a:r>
+              <a:rPr lang="en-US" dirty="0"/>
+              <a:t>[HONEST] Don't skip past this. The audience trusts you more when you admit what's hard.</a:t>
+            </a:r>
+          </a:p>
+          <a:p>
+            <a:endParaRPr lang="en-US" dirty="0"/>
+          </a:p>
+          <a:p>
+            <a:r>
+              <a:rPr lang="en-US" dirty="0"/>
+              <a:t>Challenges you will absolutely hit:</a:t>
+            </a:r>
+          </a:p>
+          <a:p>
+            <a:r>
+              <a:rPr lang="en-US" dirty="0"/>
+              <a:t>- Prompt tuning is iterative. Your first prompt will be wrong. Your tenth will still miss edge cases.</a:t>
+            </a:r>
+          </a:p>
+          <a:p>
+            <a:r>
+              <a:rPr lang="en-US" dirty="0"/>
+              <a:t>- SQL safety is a moving target — you're not just blocking DROP, you're blocking creative joins that melt the DB.</a:t>
+            </a:r>
+          </a:p>
+          <a:p>
+            <a:r>
+              <a:rPr lang="en-US" dirty="0"/>
+              <a:t>- Performance matters — LLM latency + query latency compounds. Cache aggressively.</a:t>
+            </a:r>
+          </a:p>
+          <a:p>
+            <a:r>
+              <a:rPr lang="en-US" dirty="0"/>
+              <a:t>- Edge cases are infinite. 'Show me sales' is easy. 'Compare this quarter to the same quarter two years ago, excluding returns' is not.</a:t>
+            </a:r>
+          </a:p>
+          <a:p>
+            <a:endParaRPr lang="en-US" dirty="0"/>
+          </a:p>
+          <a:p>
+            <a:r>
+              <a:rPr lang="en-US" dirty="0"/>
+              <a:t>Best practices that actually work:</a:t>
+            </a:r>
+          </a:p>
+          <a:p>
+            <a:r>
+              <a:rPr lang="en-US" dirty="0"/>
+              <a:t>- Always validate SQL. Twice. Belt and suspenders.</a:t>
+            </a:r>
+          </a:p>
+          <a:p>
+            <a:r>
+              <a:rPr lang="en-US" dirty="0"/>
+              <a:t>- Keep prompts strict — don't try to be clever.</a:t>
+            </a:r>
+          </a:p>
+          <a:p>
+            <a:r>
+              <a:rPr lang="en-US" dirty="0"/>
+              <a:t>- Log every single query, prompt, and response. You'll need them when a user says 'that number looks wrong.'</a:t>
+            </a:r>
+          </a:p>
+          <a:p>
+            <a:r>
+              <a:rPr lang="en-US" dirty="0"/>
+              <a:t>- Start simple. Ship the ugly version first.</a:t>
+            </a:r>
+          </a:p>
+          <a:p>
+            <a:endParaRPr lang="en-US" dirty="0"/>
+          </a:p>
+          <a:p>
+            <a:r>
+              <a:rPr lang="en-US" dirty="0"/>
+              <a:t>[TRANSITION] 'Which brings me to the three things I want you to take home.'</a:t>
+            </a:r>
+          </a:p>
+        </p:txBody>
+      </p:sp>
+    </p:spTree>
+  </p:cSld>
+  <p:clrMapOvr>
+    <a:masterClrMapping/>
+  </p:clrMapOvr>
+</p:notes>
+</file>
+
+<file path=ppt/notesSlides/notesSlide21.xml><?xml version="1.0" encoding="utf-8"?>
 <p:notes xmlns:a="http://schemas.openxmlformats.org/drawingml/2006/main" xmlns:r="http://schemas.openxmlformats.org/officeDocument/2006/relationships" xmlns:p="http://schemas.openxmlformats.org/presentationml/2006/main">
   <p:cSld>
     <p:spTree>
@@ -2037,7 +2174,7 @@
 </p:notes>
 </file>
 
-<file path=ppt/notesSlides/notesSlide21.xml><?xml version="1.0" encoding="utf-8"?>
+<file path=ppt/notesSlides/notesSlide22.xml><?xml version="1.0" encoding="utf-8"?>
 <p:notes xmlns:a="http://schemas.openxmlformats.org/drawingml/2006/main" xmlns:r="http://schemas.openxmlformats.org/officeDocument/2006/relationships" xmlns:p="http://schemas.openxmlformats.org/presentationml/2006/main">
   <p:cSld>
     <p:spTree>
@@ -2218,56 +2355,39 @@
           <a:bodyPr/>
           <a:lstStyle/>
           <a:p>
-            <a:pPr marL="0" marR="0" lvl="0" indent="0" algn="l" defTabSz="914400" rtl="0" eaLnBrk="1" fontAlgn="auto" latinLnBrk="0" hangingPunct="1">
-              <a:lnSpc>
-                <a:spcPct val="100000"/>
-              </a:lnSpc>
-              <a:spcBef>
-                <a:spcPts val="0"/>
-              </a:spcBef>
-              <a:spcAft>
-                <a:spcPts val="0"/>
-              </a:spcAft>
-              <a:buClrTx/>
-              <a:buSzTx/>
-              <a:buFontTx/>
-              <a:buNone/>
-              <a:tabLst/>
-              <a:defRPr/>
-            </a:pPr>
-            <a:r>
-              <a:rPr lang="en-US" sz="1200" b="1" dirty="0">
-                <a:solidFill>
-                  <a:srgbClr val="0F172A"/>
-                </a:solidFill>
-                <a:sym typeface="Wingdings" panose="05000000000000000000" pitchFamily="2" charset="2"/>
-              </a:rPr>
-              <a:t> </a:t>
-            </a:r>
-            <a:r>
-              <a:rPr lang="en-US" sz="1200" b="1" dirty="0">
-                <a:solidFill>
-                  <a:srgbClr val="0F172A"/>
-                </a:solidFill>
-              </a:rPr>
-              <a:t>How many of you have written SQL before? Or create a reporting screen?</a:t>
-            </a:r>
-          </a:p>
-          <a:p>
-            <a:endParaRPr lang="en-US" dirty="0"/>
-          </a:p>
-          <a:p>
-            <a:r>
-              <a:rPr lang="en-US" b="1" dirty="0"/>
-              <a:t>We, developers are the bottleneck. And today we are going to remove ourselves.</a:t>
-            </a:r>
-          </a:p>
-          <a:p>
-            <a:endParaRPr lang="en-US" dirty="0"/>
+            <a:endParaRPr lang="tr-TR" dirty="0"/>
+          </a:p>
+        </p:txBody>
+      </p:sp>
+      <p:sp>
+        <p:nvSpPr>
+          <p:cNvPr id="4" name="Slide Number Placeholder 3"/>
+          <p:cNvSpPr>
+            <a:spLocks noGrp="1"/>
+          </p:cNvSpPr>
+          <p:nvPr>
+            <p:ph type="sldNum" sz="quarter" idx="5"/>
+          </p:nvPr>
+        </p:nvSpPr>
+        <p:spPr/>
+        <p:txBody>
+          <a:bodyPr/>
+          <a:lstStyle/>
+          <a:p>
+            <a:fld id="{D1473214-2400-4051-BA10-C1E11D206B4D}" type="slidenum">
+              <a:rPr lang="tr-TR" smtClean="0"/>
+              <a:t>3</a:t>
+            </a:fld>
+            <a:endParaRPr lang="tr-TR"/>
           </a:p>
         </p:txBody>
       </p:sp>
     </p:spTree>
+    <p:extLst>
+      <p:ext uri="{BB962C8B-B14F-4D97-AF65-F5344CB8AC3E}">
+        <p14:creationId xmlns:p14="http://schemas.microsoft.com/office/powerpoint/2010/main" val="3010510780"/>
+      </p:ext>
+    </p:extLst>
   </p:cSld>
   <p:clrMapOvr>
     <a:masterClrMapping/>
@@ -2319,9 +2439,39 @@
           <a:bodyPr/>
           <a:lstStyle/>
           <a:p>
-            <a:r>
-              <a:rPr lang="en-US" dirty="0"/>
-              <a:t>By the end of today you will have the pattern to actually build this.</a:t>
+            <a:pPr marL="0" marR="0" lvl="0" indent="0" algn="l" defTabSz="914400" rtl="0" eaLnBrk="1" fontAlgn="auto" latinLnBrk="0" hangingPunct="1">
+              <a:lnSpc>
+                <a:spcPct val="100000"/>
+              </a:lnSpc>
+              <a:spcBef>
+                <a:spcPts val="0"/>
+              </a:spcBef>
+              <a:spcAft>
+                <a:spcPts val="0"/>
+              </a:spcAft>
+              <a:buClrTx/>
+              <a:buSzTx/>
+              <a:buFontTx/>
+              <a:buNone/>
+              <a:tabLst/>
+              <a:defRPr/>
+            </a:pPr>
+            <a:r>
+              <a:rPr lang="en-US" sz="1200" b="1" dirty="0">
+                <a:solidFill>
+                  <a:srgbClr val="0F172A"/>
+                </a:solidFill>
+                <a:sym typeface="Wingdings" panose="05000000000000000000" pitchFamily="2" charset="2"/>
+              </a:rPr>
+              <a:t> </a:t>
+            </a:r>
+            <a:r>
+              <a:rPr lang="en-US" sz="1200" b="1" dirty="0">
+                <a:solidFill>
+                  <a:srgbClr val="0F172A"/>
+                </a:solidFill>
+              </a:rPr>
+              <a:t>How many of you have written SQL before? Or create a reporting screen?</a:t>
             </a:r>
           </a:p>
           <a:p>
@@ -2329,26 +2479,8 @@
           </a:p>
           <a:p>
             <a:r>
-              <a:rPr lang="en-US" dirty="0"/>
-              <a:t>Three promises on this slide:</a:t>
-            </a:r>
-          </a:p>
-          <a:p>
-            <a:r>
-              <a:rPr lang="en-US" dirty="0"/>
-              <a:t>- Natural language in, real data out</a:t>
-            </a:r>
-          </a:p>
-          <a:p>
-            <a:r>
-              <a:rPr lang="en-US" dirty="0"/>
-              <a:t>- No SQL required from the user</a:t>
-            </a:r>
-          </a:p>
-          <a:p>
-            <a:r>
-              <a:rPr lang="en-US" dirty="0"/>
-              <a:t>- And crucially: it works for both us as developers AND for the business users who have been waiting</a:t>
+              <a:rPr lang="en-US" b="1" dirty="0"/>
+              <a:t>We, developers are the bottleneck. And today we are going to remove ourselves.</a:t>
             </a:r>
           </a:p>
           <a:p>
@@ -2410,7 +2542,7 @@
           <a:p>
             <a:r>
               <a:rPr lang="en-US" dirty="0"/>
-              <a:t>[OVERVIEW] This slide is the table of contents for the next 40 minutes. Do not spend long here — 60 seconds max.</a:t>
+              <a:t>By the end of today you will have the pattern to actually build this.</a:t>
             </a:r>
           </a:p>
           <a:p>
@@ -2419,70 +2551,29 @@
           <a:p>
             <a:r>
               <a:rPr lang="en-US" dirty="0"/>
-              <a:t>- Understand intent — </a:t>
-            </a:r>
-            <a:r>
-              <a:rPr lang="en-US" b="1" dirty="0"/>
-              <a:t>parse what the user actually asked</a:t>
+              <a:t>Three promises on this slide:</a:t>
             </a:r>
           </a:p>
           <a:p>
             <a:r>
               <a:rPr lang="en-US" dirty="0"/>
-              <a:t>- Read the schema — </a:t>
-            </a:r>
-            <a:r>
-              <a:rPr lang="en-US" b="1" dirty="0"/>
-              <a:t>the LLM has to know your tables</a:t>
+              <a:t>- Natural language in, real data out</a:t>
             </a:r>
           </a:p>
           <a:p>
             <a:r>
               <a:rPr lang="en-US" dirty="0"/>
-              <a:t>- Generate SQL safely — </a:t>
-            </a:r>
-            <a:r>
-              <a:rPr lang="en-US" b="1" dirty="0"/>
-              <a:t>with validation, not blind trust</a:t>
+              <a:t>- No SQL required from the user</a:t>
             </a:r>
           </a:p>
           <a:p>
             <a:r>
               <a:rPr lang="en-US" dirty="0"/>
-              <a:t>- Execute — </a:t>
-            </a:r>
-            <a:r>
-              <a:rPr lang="en-US" b="1" dirty="0"/>
-              <a:t>run it against the real database</a:t>
-            </a:r>
-          </a:p>
-          <a:p>
-            <a:r>
-              <a:rPr lang="en-US" dirty="0"/>
-              <a:t>- Export — </a:t>
-            </a:r>
-            <a:r>
-              <a:rPr lang="en-US" b="1" dirty="0"/>
-              <a:t>Excel and generating charts, because that is what people actually do with results</a:t>
+              <a:t>- And crucially: it works for both us as developers AND for the business users who have been waiting</a:t>
             </a:r>
           </a:p>
           <a:p>
             <a:endParaRPr lang="en-US" dirty="0"/>
-          </a:p>
-          <a:p>
-            <a:r>
-              <a:rPr lang="en-US" dirty="0"/>
-              <a:t>[EMPHASIZE] 'Each one of these is boring on its own. The magic is the chain.'</a:t>
-            </a:r>
-          </a:p>
-          <a:p>
-            <a:endParaRPr lang="en-US" dirty="0"/>
-          </a:p>
-          <a:p>
-            <a:r>
-              <a:rPr lang="en-US" dirty="0"/>
-              <a:t>[TRANSITION] 'Here is how we will walk through it.'</a:t>
-            </a:r>
           </a:p>
         </p:txBody>
       </p:sp>
@@ -2539,23 +2630,79 @@
           <a:lstStyle/>
           <a:p>
             <a:r>
-              <a:rPr lang="en-US" u="sng" dirty="0"/>
-              <a:t>!!! 30 seconds for this slide</a:t>
-            </a:r>
-          </a:p>
-          <a:p>
-            <a:endParaRPr lang="en-US" u="sng" dirty="0"/>
-          </a:p>
-          <a:p>
-            <a:r>
               <a:rPr lang="en-US" dirty="0"/>
-              <a:t>This is the whole system in 7 boxes. </a:t>
-            </a:r>
+              <a:t>[OVERVIEW] This slide is the table of contents for the next 40 minutes. Do not spend long here — 60 seconds max.</a:t>
+            </a:r>
+          </a:p>
+          <a:p>
+            <a:endParaRPr lang="en-US" dirty="0"/>
           </a:p>
           <a:p>
             <a:r>
               <a:rPr lang="en-US" dirty="0"/>
-              <a:t>User types → we build the prompt → LLM writes SQL → validator checks it → we execute. </a:t>
+              <a:t>- Understand intent — </a:t>
+            </a:r>
+            <a:r>
+              <a:rPr lang="en-US" b="1" dirty="0"/>
+              <a:t>parse what the user actually asked</a:t>
+            </a:r>
+          </a:p>
+          <a:p>
+            <a:r>
+              <a:rPr lang="en-US" dirty="0"/>
+              <a:t>- Read the schema — </a:t>
+            </a:r>
+            <a:r>
+              <a:rPr lang="en-US" b="1" dirty="0"/>
+              <a:t>the LLM has to know your tables</a:t>
+            </a:r>
+          </a:p>
+          <a:p>
+            <a:r>
+              <a:rPr lang="en-US" dirty="0"/>
+              <a:t>- Generate SQL safely — </a:t>
+            </a:r>
+            <a:r>
+              <a:rPr lang="en-US" b="1" dirty="0"/>
+              <a:t>with validation, not blind trust</a:t>
+            </a:r>
+          </a:p>
+          <a:p>
+            <a:r>
+              <a:rPr lang="en-US" dirty="0"/>
+              <a:t>- Execute — </a:t>
+            </a:r>
+            <a:r>
+              <a:rPr lang="en-US" b="1" dirty="0"/>
+              <a:t>run it against the real database</a:t>
+            </a:r>
+          </a:p>
+          <a:p>
+            <a:r>
+              <a:rPr lang="en-US" dirty="0"/>
+              <a:t>- Export — </a:t>
+            </a:r>
+            <a:r>
+              <a:rPr lang="en-US" b="1" dirty="0"/>
+              <a:t>Excel and generating charts, because that is what people actually do with results</a:t>
+            </a:r>
+          </a:p>
+          <a:p>
+            <a:endParaRPr lang="en-US" dirty="0"/>
+          </a:p>
+          <a:p>
+            <a:r>
+              <a:rPr lang="en-US" dirty="0"/>
+              <a:t>[EMPHASIZE] 'Each one of these is boring on its own. The magic is the chain.'</a:t>
+            </a:r>
+          </a:p>
+          <a:p>
+            <a:endParaRPr lang="en-US" dirty="0"/>
+          </a:p>
+          <a:p>
+            <a:r>
+              <a:rPr lang="en-US" dirty="0"/>
+              <a:t>[TRANSITION] 'Here is how we will walk through it.'</a:t>
             </a:r>
           </a:p>
         </p:txBody>
@@ -2613,102 +2760,23 @@
           <a:lstStyle/>
           <a:p>
             <a:r>
+              <a:rPr lang="en-US" u="sng" dirty="0"/>
+              <a:t>!!! 30 seconds for this slide</a:t>
+            </a:r>
+          </a:p>
+          <a:p>
+            <a:endParaRPr lang="en-US" u="sng" dirty="0"/>
+          </a:p>
+          <a:p>
+            <a:r>
               <a:rPr lang="en-US" dirty="0"/>
-              <a:t>[DETAIL] This is where the quality of the system is decided. Spend about 2 minutes here.</a:t>
-            </a:r>
-          </a:p>
-          <a:p>
-            <a:endParaRPr lang="en-US" dirty="0"/>
+              <a:t>This is the whole system in 7 boxes. </a:t>
+            </a:r>
           </a:p>
           <a:p>
             <a:r>
               <a:rPr lang="en-US" dirty="0"/>
-              <a:t>Schema first. Walk through the left card:</a:t>
-            </a:r>
-          </a:p>
-          <a:p>
-            <a:r>
-              <a:rPr lang="en-US" dirty="0"/>
-              <a:t>- We extract tables, columns, relationships, and types from the database</a:t>
-            </a:r>
-          </a:p>
-          <a:p>
-            <a:r>
-              <a:rPr lang="en-US" dirty="0"/>
-              <a:t>- Optionally sample values help the LLM understand content, not just structure</a:t>
-            </a:r>
-          </a:p>
-          <a:p>
-            <a:r>
-              <a:rPr lang="en-US" dirty="0"/>
-              <a:t>- Extra info DDL (</a:t>
-            </a:r>
-            <a:r>
-              <a:rPr lang="en-US" sz="1200" b="0" i="0" kern="1200" dirty="0">
-                <a:solidFill>
-                  <a:schemeClr val="tx1"/>
-                </a:solidFill>
-                <a:effectLst/>
-                <a:latin typeface="+mn-lt"/>
-                <a:ea typeface="+mn-ea"/>
-                <a:cs typeface="+mn-cs"/>
-              </a:rPr>
-              <a:t>Data Definition Language)</a:t>
-            </a:r>
-            <a:endParaRPr lang="en-US" dirty="0"/>
-          </a:p>
-          <a:p>
-            <a:r>
-              <a:rPr lang="en-US" dirty="0"/>
-              <a:t>- Without this, the LLM is guessing. With it, it is translating.</a:t>
-            </a:r>
-          </a:p>
-          <a:p>
-            <a:endParaRPr lang="en-US" dirty="0"/>
-          </a:p>
-          <a:p>
-            <a:r>
-              <a:rPr lang="en-US" dirty="0"/>
-              <a:t>[PAUSE] Then pivot to the right card.</a:t>
-            </a:r>
-          </a:p>
-          <a:p>
-            <a:endParaRPr lang="en-US" dirty="0"/>
-          </a:p>
-          <a:p>
-            <a:r>
-              <a:rPr lang="en-US" dirty="0"/>
-              <a:t>The prompt is where we write the rules — in plain English. Read the code block out loud:</a:t>
-            </a:r>
-          </a:p>
-          <a:p>
-            <a:r>
-              <a:rPr lang="en-US" dirty="0"/>
-              <a:t>'You are a SQL assistant. Rules: SELECT only. No DELETE, UPDATE, or DROP. Return SQL only. Use the schema above.’</a:t>
-            </a:r>
-          </a:p>
-          <a:p>
-            <a:endParaRPr lang="en-US" dirty="0"/>
-          </a:p>
-          <a:p>
-            <a:endParaRPr lang="en-US" dirty="0"/>
-          </a:p>
-          <a:p>
-            <a:endParaRPr lang="en-US" dirty="0"/>
-          </a:p>
-          <a:p>
-            <a:r>
-              <a:rPr lang="en-US" dirty="0"/>
-              <a:t>[EMPHASIZE] 'Good schema plus strict prompt equals boring, reliable SQL. That is exactly what we want.'</a:t>
-            </a:r>
-          </a:p>
-          <a:p>
-            <a:endParaRPr lang="en-US" dirty="0"/>
-          </a:p>
-          <a:p>
-            <a:r>
-              <a:rPr lang="en-US" dirty="0"/>
-              <a:t>[TRANSITION] 'Let me show you this running live.'</a:t>
+              <a:t>User types → we build the prompt → LLM writes SQL → validator checks it → we execute. </a:t>
             </a:r>
           </a:p>
         </p:txBody>
@@ -2722,6 +2790,159 @@
 </file>
 
 <file path=ppt/notesSlides/notesSlide8.xml><?xml version="1.0" encoding="utf-8"?>
+<p:notes xmlns:a="http://schemas.openxmlformats.org/drawingml/2006/main" xmlns:r="http://schemas.openxmlformats.org/officeDocument/2006/relationships" xmlns:p="http://schemas.openxmlformats.org/presentationml/2006/main">
+  <p:cSld>
+    <p:spTree>
+      <p:nvGrpSpPr>
+        <p:cNvPr id="1" name=""/>
+        <p:cNvGrpSpPr/>
+        <p:nvPr/>
+      </p:nvGrpSpPr>
+      <p:grpSpPr>
+        <a:xfrm>
+          <a:off x="0" y="0"/>
+          <a:ext cx="0" cy="0"/>
+          <a:chOff x="0" y="0"/>
+          <a:chExt cx="0" cy="0"/>
+        </a:xfrm>
+      </p:grpSpPr>
+      <p:sp>
+        <p:nvSpPr>
+          <p:cNvPr id="2" name="Slide Image Placeholder 1"/>
+          <p:cNvSpPr>
+            <a:spLocks noGrp="1" noRot="1" noChangeAspect="1"/>
+          </p:cNvSpPr>
+          <p:nvPr>
+            <p:ph type="sldImg"/>
+          </p:nvPr>
+        </p:nvSpPr>
+        <p:spPr/>
+      </p:sp>
+      <p:sp>
+        <p:nvSpPr>
+          <p:cNvPr id="3" name="Notes Placeholder 2"/>
+          <p:cNvSpPr>
+            <a:spLocks noGrp="1"/>
+          </p:cNvSpPr>
+          <p:nvPr>
+            <p:ph type="body" idx="1"/>
+          </p:nvPr>
+        </p:nvSpPr>
+        <p:spPr/>
+        <p:txBody>
+          <a:bodyPr/>
+          <a:lstStyle/>
+          <a:p>
+            <a:r>
+              <a:rPr lang="en-US" dirty="0"/>
+              <a:t>[DETAIL] This is where the quality of the system is decided. Spend about 2 minutes here.</a:t>
+            </a:r>
+          </a:p>
+          <a:p>
+            <a:endParaRPr lang="en-US" dirty="0"/>
+          </a:p>
+          <a:p>
+            <a:r>
+              <a:rPr lang="en-US" dirty="0"/>
+              <a:t>Schema first. Walk through the left card:</a:t>
+            </a:r>
+          </a:p>
+          <a:p>
+            <a:r>
+              <a:rPr lang="en-US" dirty="0"/>
+              <a:t>- We extract tables, columns, relationships, and types from the database</a:t>
+            </a:r>
+          </a:p>
+          <a:p>
+            <a:r>
+              <a:rPr lang="en-US" dirty="0"/>
+              <a:t>- Optionally sample values help the LLM understand content, not just structure</a:t>
+            </a:r>
+          </a:p>
+          <a:p>
+            <a:r>
+              <a:rPr lang="en-US" dirty="0"/>
+              <a:t>- Extra info DDL (</a:t>
+            </a:r>
+            <a:r>
+              <a:rPr lang="en-US" sz="1200" b="0" i="0" kern="1200" dirty="0">
+                <a:solidFill>
+                  <a:schemeClr val="tx1"/>
+                </a:solidFill>
+                <a:effectLst/>
+                <a:latin typeface="+mn-lt"/>
+                <a:ea typeface="+mn-ea"/>
+                <a:cs typeface="+mn-cs"/>
+              </a:rPr>
+              <a:t>Data Definition Language)</a:t>
+            </a:r>
+            <a:endParaRPr lang="en-US" dirty="0"/>
+          </a:p>
+          <a:p>
+            <a:r>
+              <a:rPr lang="en-US" dirty="0"/>
+              <a:t>- Without this, the LLM is guessing. With it, it is translating.</a:t>
+            </a:r>
+          </a:p>
+          <a:p>
+            <a:endParaRPr lang="en-US" dirty="0"/>
+          </a:p>
+          <a:p>
+            <a:r>
+              <a:rPr lang="en-US" dirty="0"/>
+              <a:t>[PAUSE] Then pivot to the right card.</a:t>
+            </a:r>
+          </a:p>
+          <a:p>
+            <a:endParaRPr lang="en-US" dirty="0"/>
+          </a:p>
+          <a:p>
+            <a:r>
+              <a:rPr lang="en-US" dirty="0"/>
+              <a:t>The prompt is where we write the rules — in plain English. Read the code block out loud:</a:t>
+            </a:r>
+          </a:p>
+          <a:p>
+            <a:r>
+              <a:rPr lang="en-US" dirty="0"/>
+              <a:t>'You are a SQL assistant. Rules: SELECT only. No DELETE, UPDATE, or DROP. Return SQL only. Use the schema above.’</a:t>
+            </a:r>
+          </a:p>
+          <a:p>
+            <a:endParaRPr lang="en-US" dirty="0"/>
+          </a:p>
+          <a:p>
+            <a:endParaRPr lang="en-US" dirty="0"/>
+          </a:p>
+          <a:p>
+            <a:endParaRPr lang="en-US" dirty="0"/>
+          </a:p>
+          <a:p>
+            <a:r>
+              <a:rPr lang="en-US" dirty="0"/>
+              <a:t>[EMPHASIZE] 'Good schema plus strict prompt equals boring, reliable SQL. That is exactly what we want.'</a:t>
+            </a:r>
+          </a:p>
+          <a:p>
+            <a:endParaRPr lang="en-US" dirty="0"/>
+          </a:p>
+          <a:p>
+            <a:r>
+              <a:rPr lang="en-US" dirty="0"/>
+              <a:t>[TRANSITION] 'Let me show you this running live.'</a:t>
+            </a:r>
+          </a:p>
+        </p:txBody>
+      </p:sp>
+    </p:spTree>
+  </p:cSld>
+  <p:clrMapOvr>
+    <a:masterClrMapping/>
+  </p:clrMapOvr>
+</p:notes>
+</file>
+
+<file path=ppt/notesSlides/notesSlide9.xml><?xml version="1.0" encoding="utf-8"?>
 <p:notes xmlns:a="http://schemas.openxmlformats.org/drawingml/2006/main" xmlns:r="http://schemas.openxmlformats.org/officeDocument/2006/relationships" xmlns:p="http://schemas.openxmlformats.org/presentationml/2006/main">
   <p:cSld>
     <p:spTree>
@@ -2823,143 +3044,6 @@
         <p14:creationId xmlns:p14="http://schemas.microsoft.com/office/powerpoint/2010/main" val="1339754710"/>
       </p:ext>
     </p:extLst>
-  </p:cSld>
-  <p:clrMapOvr>
-    <a:masterClrMapping/>
-  </p:clrMapOvr>
-</p:notes>
-</file>
-
-<file path=ppt/notesSlides/notesSlide9.xml><?xml version="1.0" encoding="utf-8"?>
-<p:notes xmlns:a="http://schemas.openxmlformats.org/drawingml/2006/main" xmlns:r="http://schemas.openxmlformats.org/officeDocument/2006/relationships" xmlns:p="http://schemas.openxmlformats.org/presentationml/2006/main">
-  <p:cSld>
-    <p:spTree>
-      <p:nvGrpSpPr>
-        <p:cNvPr id="1" name=""/>
-        <p:cNvGrpSpPr/>
-        <p:nvPr/>
-      </p:nvGrpSpPr>
-      <p:grpSpPr>
-        <a:xfrm>
-          <a:off x="0" y="0"/>
-          <a:ext cx="0" cy="0"/>
-          <a:chOff x="0" y="0"/>
-          <a:chExt cx="0" cy="0"/>
-        </a:xfrm>
-      </p:grpSpPr>
-      <p:sp>
-        <p:nvSpPr>
-          <p:cNvPr id="2" name="Slide Image Placeholder 1"/>
-          <p:cNvSpPr>
-            <a:spLocks noGrp="1" noRot="1" noChangeAspect="1"/>
-          </p:cNvSpPr>
-          <p:nvPr>
-            <p:ph type="sldImg"/>
-          </p:nvPr>
-        </p:nvSpPr>
-        <p:spPr/>
-      </p:sp>
-      <p:sp>
-        <p:nvSpPr>
-          <p:cNvPr id="3" name="Notes Placeholder 2"/>
-          <p:cNvSpPr>
-            <a:spLocks noGrp="1"/>
-          </p:cNvSpPr>
-          <p:nvPr>
-            <p:ph type="body" idx="1"/>
-          </p:nvPr>
-        </p:nvSpPr>
-        <p:spPr/>
-        <p:txBody>
-          <a:bodyPr/>
-          <a:lstStyle/>
-          <a:p>
-            <a:r>
-              <a:rPr lang="en-US" dirty="0"/>
-              <a:t>[LIVE DEMO — Console] Alt-tab to Visual Studio. Make sure Chat.Console.OpenAI is already loaded and the font is LARGE.</a:t>
-            </a:r>
-          </a:p>
-          <a:p>
-            <a:endParaRPr lang="en-US" dirty="0"/>
-          </a:p>
-          <a:p>
-            <a:r>
-              <a:rPr lang="en-US" dirty="0"/>
-              <a:t>Step 1: Start the app. Let them see the prompt blink.</a:t>
-            </a:r>
-          </a:p>
-          <a:p>
-            <a:r>
-              <a:rPr lang="en-US" dirty="0"/>
-              <a:t>Step 2: Type 'top 10 customers by revenue' slowly, so people can read.</a:t>
-            </a:r>
-          </a:p>
-          <a:p>
-            <a:r>
-              <a:rPr lang="en-US" dirty="0"/>
-              <a:t>Step 3: Pause before hitting enter. Ask: 'What SQL do you expect?'</a:t>
-            </a:r>
-          </a:p>
-          <a:p>
-            <a:r>
-              <a:rPr lang="en-US" dirty="0"/>
-              <a:t>Step 4: Hit enter. The generated SQL appears.</a:t>
-            </a:r>
-          </a:p>
-          <a:p>
-            <a:endParaRPr lang="en-US" dirty="0"/>
-          </a:p>
-          <a:p>
-            <a:r>
-              <a:rPr lang="en-US" dirty="0"/>
-              <a:t>[TRUST MOMENT] Stop. Read the SQL out loud. Then ask the audience:</a:t>
-            </a:r>
-          </a:p>
-          <a:p>
-            <a:r>
-              <a:rPr lang="en-US" dirty="0"/>
-              <a:t>'Would you run this in production?'</a:t>
-            </a:r>
-          </a:p>
-          <a:p>
-            <a:endParaRPr lang="en-US" dirty="0"/>
-          </a:p>
-          <a:p>
-            <a:r>
-              <a:rPr lang="en-US" dirty="0"/>
-              <a:t>[PAUSE 3s] Let them sit with it. Some will say yes, some no.</a:t>
-            </a:r>
-          </a:p>
-          <a:p>
-            <a:endParaRPr lang="en-US" dirty="0"/>
-          </a:p>
-          <a:p>
-            <a:r>
-              <a:rPr lang="en-US" dirty="0"/>
-              <a:t>Then: 'Right — we would not trust it blindly. That is why the next stage is validation.'</a:t>
-            </a:r>
-          </a:p>
-          <a:p>
-            <a:endParaRPr lang="en-US" dirty="0"/>
-          </a:p>
-          <a:p>
-            <a:r>
-              <a:rPr lang="en-US" dirty="0"/>
-              <a:t>[CUE] Point back to the pipeline slide mentally: we just completed Schema → Prompt → LLM → SQL. Validation is next.</a:t>
-            </a:r>
-          </a:p>
-          <a:p>
-            <a:endParaRPr lang="en-US" dirty="0"/>
-          </a:p>
-          <a:p>
-            <a:r>
-              <a:rPr lang="en-US" dirty="0"/>
-              <a:t>Keep the console running — we'll use the same session for validation + execution.</a:t>
-            </a:r>
-          </a:p>
-        </p:txBody>
-      </p:sp>
-    </p:spTree>
   </p:cSld>
   <p:clrMapOvr>
     <a:masterClrMapping/>
@@ -3116,7 +3200,7 @@
           <a:p>
             <a:fld id="{3EF59CCF-2F75-48E0-B827-F930E918C137}" type="datetimeFigureOut">
               <a:rPr lang="tr-TR" smtClean="0"/>
-              <a:t>30.04.2026</a:t>
+              <a:t>2.05.2026</a:t>
             </a:fld>
             <a:endParaRPr lang="tr-TR"/>
           </a:p>
@@ -3316,7 +3400,7 @@
           <a:p>
             <a:fld id="{3EF59CCF-2F75-48E0-B827-F930E918C137}" type="datetimeFigureOut">
               <a:rPr lang="tr-TR" smtClean="0"/>
-              <a:t>30.04.2026</a:t>
+              <a:t>2.05.2026</a:t>
             </a:fld>
             <a:endParaRPr lang="tr-TR"/>
           </a:p>
@@ -3526,7 +3610,7 @@
           <a:p>
             <a:fld id="{3EF59CCF-2F75-48E0-B827-F930E918C137}" type="datetimeFigureOut">
               <a:rPr lang="tr-TR" smtClean="0"/>
-              <a:t>30.04.2026</a:t>
+              <a:t>2.05.2026</a:t>
             </a:fld>
             <a:endParaRPr lang="tr-TR"/>
           </a:p>
@@ -3726,7 +3810,7 @@
           <a:p>
             <a:fld id="{3EF59CCF-2F75-48E0-B827-F930E918C137}" type="datetimeFigureOut">
               <a:rPr lang="tr-TR" smtClean="0"/>
-              <a:t>30.04.2026</a:t>
+              <a:t>2.05.2026</a:t>
             </a:fld>
             <a:endParaRPr lang="tr-TR"/>
           </a:p>
@@ -4002,7 +4086,7 @@
           <a:p>
             <a:fld id="{3EF59CCF-2F75-48E0-B827-F930E918C137}" type="datetimeFigureOut">
               <a:rPr lang="tr-TR" smtClean="0"/>
-              <a:t>30.04.2026</a:t>
+              <a:t>2.05.2026</a:t>
             </a:fld>
             <a:endParaRPr lang="tr-TR"/>
           </a:p>
@@ -4270,7 +4354,7 @@
           <a:p>
             <a:fld id="{3EF59CCF-2F75-48E0-B827-F930E918C137}" type="datetimeFigureOut">
               <a:rPr lang="tr-TR" smtClean="0"/>
-              <a:t>30.04.2026</a:t>
+              <a:t>2.05.2026</a:t>
             </a:fld>
             <a:endParaRPr lang="tr-TR"/>
           </a:p>
@@ -4685,7 +4769,7 @@
           <a:p>
             <a:fld id="{3EF59CCF-2F75-48E0-B827-F930E918C137}" type="datetimeFigureOut">
               <a:rPr lang="tr-TR" smtClean="0"/>
-              <a:t>30.04.2026</a:t>
+              <a:t>2.05.2026</a:t>
             </a:fld>
             <a:endParaRPr lang="tr-TR"/>
           </a:p>
@@ -4827,7 +4911,7 @@
           <a:p>
             <a:fld id="{3EF59CCF-2F75-48E0-B827-F930E918C137}" type="datetimeFigureOut">
               <a:rPr lang="tr-TR" smtClean="0"/>
-              <a:t>30.04.2026</a:t>
+              <a:t>2.05.2026</a:t>
             </a:fld>
             <a:endParaRPr lang="tr-TR"/>
           </a:p>
@@ -4940,7 +5024,7 @@
           <a:p>
             <a:fld id="{3EF59CCF-2F75-48E0-B827-F930E918C137}" type="datetimeFigureOut">
               <a:rPr lang="tr-TR" smtClean="0"/>
-              <a:t>30.04.2026</a:t>
+              <a:t>2.05.2026</a:t>
             </a:fld>
             <a:endParaRPr lang="tr-TR"/>
           </a:p>
@@ -5253,7 +5337,7 @@
           <a:p>
             <a:fld id="{3EF59CCF-2F75-48E0-B827-F930E918C137}" type="datetimeFigureOut">
               <a:rPr lang="tr-TR" smtClean="0"/>
-              <a:t>30.04.2026</a:t>
+              <a:t>2.05.2026</a:t>
             </a:fld>
             <a:endParaRPr lang="tr-TR"/>
           </a:p>
@@ -5542,7 +5626,7 @@
           <a:p>
             <a:fld id="{3EF59CCF-2F75-48E0-B827-F930E918C137}" type="datetimeFigureOut">
               <a:rPr lang="tr-TR" smtClean="0"/>
-              <a:t>30.04.2026</a:t>
+              <a:t>2.05.2026</a:t>
             </a:fld>
             <a:endParaRPr lang="tr-TR"/>
           </a:p>
@@ -5788,7 +5872,7 @@
           <a:p>
             <a:fld id="{3EF59CCF-2F75-48E0-B827-F930E918C137}" type="datetimeFigureOut">
               <a:rPr lang="tr-TR" smtClean="0"/>
-              <a:t>30.04.2026</a:t>
+              <a:t>2.05.2026</a:t>
             </a:fld>
             <a:endParaRPr lang="tr-TR"/>
           </a:p>
@@ -11315,10 +11399,10 @@
       </p:grpSpPr>
       <p:pic>
         <p:nvPicPr>
-          <p:cNvPr id="9" name="Picture 8">
+          <p:cNvPr id="3" name="Picture 2">
             <a:extLst>
               <a:ext uri="{FF2B5EF4-FFF2-40B4-BE49-F238E27FC236}">
-                <a16:creationId xmlns:a16="http://schemas.microsoft.com/office/drawing/2014/main" id="{56618BC2-5AB4-BD47-EA9D-259BDFF07764}"/>
+                <a16:creationId xmlns:a16="http://schemas.microsoft.com/office/drawing/2014/main" id="{D8D5AF6E-89B6-877C-7960-D5F8849F6877}"/>
               </a:ext>
             </a:extLst>
           </p:cNvPr>
@@ -11328,21 +11412,16 @@
           <p:nvPr/>
         </p:nvPicPr>
         <p:blipFill>
-          <a:blip r:embed="rId2">
-            <a:extLst>
-              <a:ext uri="{28A0092B-C50C-407E-A947-70E740481C1C}">
-                <a14:useLocalDpi xmlns:a14="http://schemas.microsoft.com/office/drawing/2010/main" val="0"/>
-              </a:ext>
-            </a:extLst>
-          </a:blip>
+          <a:blip r:embed="rId3"/>
+          <a:srcRect l="9172" t="6988" r="8671" b="58988"/>
           <a:stretch>
             <a:fillRect/>
           </a:stretch>
         </p:blipFill>
         <p:spPr>
           <a:xfrm>
-            <a:off x="432619" y="-190038"/>
-            <a:ext cx="11326761" cy="7238076"/>
+            <a:off x="523415" y="1828800"/>
+            <a:ext cx="11051757" cy="2875631"/>
           </a:xfrm>
           <a:prstGeom prst="rect">
             <a:avLst/>

--- a/Presentation.pptx
+++ b/Presentation.pptx
@@ -9,8 +9,8 @@
   </p:notesMasterIdLst>
   <p:sldIdLst>
     <p:sldId id="328" r:id="rId2"/>
-    <p:sldId id="333" r:id="rId3"/>
-    <p:sldId id="329" r:id="rId4"/>
+    <p:sldId id="329" r:id="rId3"/>
+    <p:sldId id="333" r:id="rId4"/>
     <p:sldId id="308" r:id="rId5"/>
     <p:sldId id="309" r:id="rId6"/>
     <p:sldId id="310" r:id="rId7"/>
@@ -28,7 +28,7 @@
     <p:sldId id="321" r:id="rId19"/>
     <p:sldId id="322" r:id="rId20"/>
     <p:sldId id="323" r:id="rId21"/>
-    <p:sldId id="332" r:id="rId22"/>
+    <p:sldId id="335" r:id="rId22"/>
     <p:sldId id="324" r:id="rId23"/>
   </p:sldIdLst>
   <p:sldSz cx="12192000" cy="6858000"/>
@@ -218,7 +218,7 @@
           <a:p>
             <a:fld id="{BC660078-77E7-46A7-9649-B3FD62DAD7B9}" type="datetimeFigureOut">
               <a:rPr lang="tr-TR" smtClean="0"/>
-              <a:t>2.05.2026</a:t>
+              <a:t>6.05.2026</a:t>
             </a:fld>
             <a:endParaRPr lang="tr-TR"/>
           </a:p>
@@ -530,57 +530,6 @@
           <a:bodyPr/>
           <a:lstStyle/>
           <a:p>
-            <a:r>
-              <a:rPr lang="en-US" dirty="0"/>
-              <a:t>[OPENING] Smile. Pause. Scan the room for 2 seconds before you start.</a:t>
-            </a:r>
-          </a:p>
-          <a:p>
-            <a:endParaRPr lang="en-US" dirty="0"/>
-          </a:p>
-          <a:p>
-            <a:r>
-              <a:rPr lang="en-US" dirty="0"/>
-              <a:t>Hi everyone — I'm [name], and for the next 45 minutes we're going to build something you've probably wanted for years: a way to ask your database questions in plain English and get back real, trustworthy answers.</a:t>
-            </a:r>
-          </a:p>
-          <a:p>
-            <a:endParaRPr lang="en-US" dirty="0"/>
-          </a:p>
-          <a:p>
-            <a:r>
-              <a:rPr lang="en-US" dirty="0"/>
-              <a:t>We'll do it in .NET, we'll do it with code you can copy, and we'll do it twice — once in a console app so you see every moving part, and once in a Blazor app with voice, charts, and Excel export.</a:t>
-            </a:r>
-          </a:p>
-          <a:p>
-            <a:endParaRPr lang="en-US" dirty="0"/>
-          </a:p>
-          <a:p>
-            <a:r>
-              <a:rPr lang="en-US" dirty="0"/>
-              <a:t>[PAUSE 2s]</a:t>
-            </a:r>
-          </a:p>
-          <a:p>
-            <a:endParaRPr lang="en-US" dirty="0"/>
-          </a:p>
-          <a:p>
-            <a:r>
-              <a:rPr lang="en-US" dirty="0"/>
-              <a:t>Show of hands — who here has written a SELECT this week because a PM asked for numbers?</a:t>
-            </a:r>
-          </a:p>
-          <a:p>
-            <a:endParaRPr lang="en-US" dirty="0"/>
-          </a:p>
-          <a:p>
-            <a:r>
-              <a:rPr lang="en-US" dirty="0"/>
-              <a:t>[TRANSITION] 'That's exactly the problem we're solving.’</a:t>
-            </a:r>
-          </a:p>
-          <a:p>
             <a:endParaRPr lang="en-US" dirty="0"/>
           </a:p>
         </p:txBody>
@@ -1881,7 +1830,7 @@
           <a:bodyPr/>
           <a:lstStyle/>
           <a:p>
-            <a:endParaRPr lang="en-US" dirty="0"/>
+            <a:endParaRPr lang="tr-TR" dirty="0"/>
           </a:p>
         </p:txBody>
       </p:sp>
@@ -1911,7 +1860,7 @@
     </p:spTree>
     <p:extLst>
       <p:ext uri="{BB962C8B-B14F-4D97-AF65-F5344CB8AC3E}">
-        <p14:creationId xmlns:p14="http://schemas.microsoft.com/office/powerpoint/2010/main" val="144467047"/>
+        <p14:creationId xmlns:p14="http://schemas.microsoft.com/office/powerpoint/2010/main" val="3010510780"/>
       </p:ext>
     </p:extLst>
   </p:cSld>
@@ -2063,7 +2012,7 @@
         <p:cNvPr id="1" name="">
           <a:extLst>
             <a:ext uri="{FF2B5EF4-FFF2-40B4-BE49-F238E27FC236}">
-              <a16:creationId xmlns:a16="http://schemas.microsoft.com/office/drawing/2014/main" id="{BB5B04BD-6229-5249-EE25-4823CBADA422}"/>
+              <a16:creationId xmlns:a16="http://schemas.microsoft.com/office/drawing/2014/main" id="{788DACCD-50D9-449C-5E0D-B9DC76464910}"/>
             </a:ext>
           </a:extLst>
         </p:cNvPr>
@@ -2083,7 +2032,7 @@
           <p:cNvPr id="2" name="Slide Image Placeholder 1">
             <a:extLst>
               <a:ext uri="{FF2B5EF4-FFF2-40B4-BE49-F238E27FC236}">
-                <a16:creationId xmlns:a16="http://schemas.microsoft.com/office/drawing/2014/main" id="{45CE44DB-5DE9-BDFC-FB4F-DD1CE6F68E22}"/>
+                <a16:creationId xmlns:a16="http://schemas.microsoft.com/office/drawing/2014/main" id="{EEB8E7DD-B1D7-47D1-28A9-EACCEF105D0C}"/>
               </a:ext>
             </a:extLst>
           </p:cNvPr>
@@ -2101,7 +2050,7 @@
           <p:cNvPr id="3" name="Notes Placeholder 2">
             <a:extLst>
               <a:ext uri="{FF2B5EF4-FFF2-40B4-BE49-F238E27FC236}">
-                <a16:creationId xmlns:a16="http://schemas.microsoft.com/office/drawing/2014/main" id="{14E79A91-5D21-567F-24C1-A268E9366472}"/>
+                <a16:creationId xmlns:a16="http://schemas.microsoft.com/office/drawing/2014/main" id="{B75E8918-788F-0C91-29DB-7E2A9BB9AD78}"/>
               </a:ext>
             </a:extLst>
           </p:cNvPr>
@@ -2117,46 +2066,6 @@
           <a:bodyPr/>
           <a:lstStyle/>
           <a:p>
-            <a:pPr marL="171450" indent="-171450">
-              <a:buFont typeface="Arial" panose="020B0604020202020204" pitchFamily="34" charset="0"/>
-              <a:buChar char="•"/>
-            </a:pPr>
-            <a:r>
-              <a:rPr lang="en-US" dirty="0"/>
-              <a:t>Create a new customer </a:t>
-            </a:r>
-          </a:p>
-          <a:p>
-            <a:pPr marL="171450" indent="-171450">
-              <a:buFont typeface="Arial" panose="020B0604020202020204" pitchFamily="34" charset="0"/>
-              <a:buChar char="•"/>
-            </a:pPr>
-            <a:r>
-              <a:rPr lang="en-US" dirty="0"/>
-              <a:t>Delete duplicate records</a:t>
-            </a:r>
-          </a:p>
-          <a:p>
-            <a:pPr marL="171450" indent="-171450">
-              <a:buFont typeface="Arial" panose="020B0604020202020204" pitchFamily="34" charset="0"/>
-              <a:buChar char="•"/>
-            </a:pPr>
-            <a:r>
-              <a:rPr lang="en-US" dirty="0"/>
-              <a:t>Update order status </a:t>
-            </a:r>
-          </a:p>
-          <a:p>
-            <a:pPr marL="171450" indent="-171450">
-              <a:buFont typeface="Arial" panose="020B0604020202020204" pitchFamily="34" charset="0"/>
-              <a:buChar char="•"/>
-            </a:pPr>
-            <a:r>
-              <a:rPr lang="en-US" dirty="0"/>
-              <a:t>Clean up spam or inactive records</a:t>
-            </a:r>
-          </a:p>
-          <a:p>
             <a:endParaRPr lang="en-US" dirty="0"/>
           </a:p>
         </p:txBody>
@@ -2164,7 +2073,7 @@
     </p:spTree>
     <p:extLst>
       <p:ext uri="{BB962C8B-B14F-4D97-AF65-F5344CB8AC3E}">
-        <p14:creationId xmlns:p14="http://schemas.microsoft.com/office/powerpoint/2010/main" val="3881110336"/>
+        <p14:creationId xmlns:p14="http://schemas.microsoft.com/office/powerpoint/2010/main" val="576146337"/>
       </p:ext>
     </p:extLst>
   </p:cSld>
@@ -2355,7 +2264,7 @@
           <a:bodyPr/>
           <a:lstStyle/>
           <a:p>
-            <a:endParaRPr lang="tr-TR" dirty="0"/>
+            <a:endParaRPr lang="en-US" dirty="0"/>
           </a:p>
         </p:txBody>
       </p:sp>
@@ -2385,7 +2294,7 @@
     </p:spTree>
     <p:extLst>
       <p:ext uri="{BB962C8B-B14F-4D97-AF65-F5344CB8AC3E}">
-        <p14:creationId xmlns:p14="http://schemas.microsoft.com/office/powerpoint/2010/main" val="3010510780"/>
+        <p14:creationId xmlns:p14="http://schemas.microsoft.com/office/powerpoint/2010/main" val="144467047"/>
       </p:ext>
     </p:extLst>
   </p:cSld>
@@ -2833,12 +2742,6 @@
           <a:bodyPr/>
           <a:lstStyle/>
           <a:p>
-            <a:r>
-              <a:rPr lang="en-US" dirty="0"/>
-              <a:t>[DETAIL] This is where the quality of the system is decided. Spend about 2 minutes here.</a:t>
-            </a:r>
-          </a:p>
-          <a:p>
             <a:endParaRPr lang="en-US" dirty="0"/>
           </a:p>
           <a:p>
@@ -2890,15 +2793,6 @@
           <a:p>
             <a:r>
               <a:rPr lang="en-US" dirty="0"/>
-              <a:t>[PAUSE] Then pivot to the right card.</a:t>
-            </a:r>
-          </a:p>
-          <a:p>
-            <a:endParaRPr lang="en-US" dirty="0"/>
-          </a:p>
-          <a:p>
-            <a:r>
-              <a:rPr lang="en-US" dirty="0"/>
               <a:t>The prompt is where we write the rules — in plain English. Read the code block out loud:</a:t>
             </a:r>
           </a:p>
@@ -2925,12 +2819,6 @@
           </a:p>
           <a:p>
             <a:endParaRPr lang="en-US" dirty="0"/>
-          </a:p>
-          <a:p>
-            <a:r>
-              <a:rPr lang="en-US" dirty="0"/>
-              <a:t>[TRANSITION] 'Let me show you this running live.'</a:t>
-            </a:r>
           </a:p>
         </p:txBody>
       </p:sp>
@@ -3200,7 +3088,7 @@
           <a:p>
             <a:fld id="{3EF59CCF-2F75-48E0-B827-F930E918C137}" type="datetimeFigureOut">
               <a:rPr lang="tr-TR" smtClean="0"/>
-              <a:t>2.05.2026</a:t>
+              <a:t>6.05.2026</a:t>
             </a:fld>
             <a:endParaRPr lang="tr-TR"/>
           </a:p>
@@ -3400,7 +3288,7 @@
           <a:p>
             <a:fld id="{3EF59CCF-2F75-48E0-B827-F930E918C137}" type="datetimeFigureOut">
               <a:rPr lang="tr-TR" smtClean="0"/>
-              <a:t>2.05.2026</a:t>
+              <a:t>6.05.2026</a:t>
             </a:fld>
             <a:endParaRPr lang="tr-TR"/>
           </a:p>
@@ -3610,7 +3498,7 @@
           <a:p>
             <a:fld id="{3EF59CCF-2F75-48E0-B827-F930E918C137}" type="datetimeFigureOut">
               <a:rPr lang="tr-TR" smtClean="0"/>
-              <a:t>2.05.2026</a:t>
+              <a:t>6.05.2026</a:t>
             </a:fld>
             <a:endParaRPr lang="tr-TR"/>
           </a:p>
@@ -3810,7 +3698,7 @@
           <a:p>
             <a:fld id="{3EF59CCF-2F75-48E0-B827-F930E918C137}" type="datetimeFigureOut">
               <a:rPr lang="tr-TR" smtClean="0"/>
-              <a:t>2.05.2026</a:t>
+              <a:t>6.05.2026</a:t>
             </a:fld>
             <a:endParaRPr lang="tr-TR"/>
           </a:p>
@@ -4086,7 +3974,7 @@
           <a:p>
             <a:fld id="{3EF59CCF-2F75-48E0-B827-F930E918C137}" type="datetimeFigureOut">
               <a:rPr lang="tr-TR" smtClean="0"/>
-              <a:t>2.05.2026</a:t>
+              <a:t>6.05.2026</a:t>
             </a:fld>
             <a:endParaRPr lang="tr-TR"/>
           </a:p>
@@ -4354,7 +4242,7 @@
           <a:p>
             <a:fld id="{3EF59CCF-2F75-48E0-B827-F930E918C137}" type="datetimeFigureOut">
               <a:rPr lang="tr-TR" smtClean="0"/>
-              <a:t>2.05.2026</a:t>
+              <a:t>6.05.2026</a:t>
             </a:fld>
             <a:endParaRPr lang="tr-TR"/>
           </a:p>
@@ -4769,7 +4657,7 @@
           <a:p>
             <a:fld id="{3EF59CCF-2F75-48E0-B827-F930E918C137}" type="datetimeFigureOut">
               <a:rPr lang="tr-TR" smtClean="0"/>
-              <a:t>2.05.2026</a:t>
+              <a:t>6.05.2026</a:t>
             </a:fld>
             <a:endParaRPr lang="tr-TR"/>
           </a:p>
@@ -4911,7 +4799,7 @@
           <a:p>
             <a:fld id="{3EF59CCF-2F75-48E0-B827-F930E918C137}" type="datetimeFigureOut">
               <a:rPr lang="tr-TR" smtClean="0"/>
-              <a:t>2.05.2026</a:t>
+              <a:t>6.05.2026</a:t>
             </a:fld>
             <a:endParaRPr lang="tr-TR"/>
           </a:p>
@@ -5024,7 +4912,7 @@
           <a:p>
             <a:fld id="{3EF59CCF-2F75-48E0-B827-F930E918C137}" type="datetimeFigureOut">
               <a:rPr lang="tr-TR" smtClean="0"/>
-              <a:t>2.05.2026</a:t>
+              <a:t>6.05.2026</a:t>
             </a:fld>
             <a:endParaRPr lang="tr-TR"/>
           </a:p>
@@ -5337,7 +5225,7 @@
           <a:p>
             <a:fld id="{3EF59CCF-2F75-48E0-B827-F930E918C137}" type="datetimeFigureOut">
               <a:rPr lang="tr-TR" smtClean="0"/>
-              <a:t>2.05.2026</a:t>
+              <a:t>6.05.2026</a:t>
             </a:fld>
             <a:endParaRPr lang="tr-TR"/>
           </a:p>
@@ -5626,7 +5514,7 @@
           <a:p>
             <a:fld id="{3EF59CCF-2F75-48E0-B827-F930E918C137}" type="datetimeFigureOut">
               <a:rPr lang="tr-TR" smtClean="0"/>
-              <a:t>2.05.2026</a:t>
+              <a:t>6.05.2026</a:t>
             </a:fld>
             <a:endParaRPr lang="tr-TR"/>
           </a:p>
@@ -5872,7 +5760,7 @@
           <a:p>
             <a:fld id="{3EF59CCF-2F75-48E0-B827-F930E918C137}" type="datetimeFigureOut">
               <a:rPr lang="tr-TR" smtClean="0"/>
-              <a:t>2.05.2026</a:t>
+              <a:t>6.05.2026</a:t>
             </a:fld>
             <a:endParaRPr lang="tr-TR"/>
           </a:p>
@@ -7529,7 +7417,7 @@
 </file>
 
 <file path=ppt/slides/slide11.xml><?xml version="1.0" encoding="utf-8"?>
-<p:sld xmlns:a="http://schemas.openxmlformats.org/drawingml/2006/main" xmlns:r="http://schemas.openxmlformats.org/officeDocument/2006/relationships" xmlns:p="http://schemas.openxmlformats.org/presentationml/2006/main">
+<p:sld xmlns:a="http://schemas.openxmlformats.org/drawingml/2006/main" xmlns:r="http://schemas.openxmlformats.org/officeDocument/2006/relationships" xmlns:p="http://schemas.openxmlformats.org/presentationml/2006/main" show="0">
   <p:cSld>
     <p:spTree>
       <p:nvGrpSpPr>
@@ -9081,7 +8969,7 @@
                 </a:solidFill>
                 <a:latin typeface="Consolas"/>
               </a:rPr>
-              <a:t>   = {</a:t>
+              <a:t> = {</a:t>
             </a:r>
             <a:r>
               <a:rPr lang="en-US" sz="3200" dirty="0">
@@ -9780,8 +9668,8 @@
         </p:nvSpPr>
         <p:spPr>
           <a:xfrm>
-            <a:off x="1016000" y="1875027"/>
-            <a:ext cx="5270500" cy="558799"/>
+            <a:off x="1016000" y="1869690"/>
+            <a:ext cx="6184900" cy="558799"/>
           </a:xfrm>
           <a:prstGeom prst="rect">
             <a:avLst/>
@@ -9789,7 +9677,7 @@
         </p:spPr>
         <p:txBody>
           <a:bodyPr>
-            <a:normAutofit fontScale="92500"/>
+            <a:normAutofit/>
           </a:bodyPr>
           <a:lstStyle>
             <a:lvl1pPr marL="228600" indent="-228600" algn="l" defTabSz="914400" rtl="0" eaLnBrk="1" latinLnBrk="0" hangingPunct="1">
@@ -10020,7 +9908,7 @@
         </p:nvGrpSpPr>
         <p:grpSpPr>
           <a:xfrm>
-            <a:off x="6152636" y="1822451"/>
+            <a:off x="6813036" y="1822451"/>
             <a:ext cx="1651000" cy="457200"/>
             <a:chOff x="889000" y="1429656"/>
             <a:chExt cx="1651000" cy="457200"/>
@@ -10914,7 +10802,7 @@
 </file>
 
 <file path=ppt/slides/slide19.xml><?xml version="1.0" encoding="utf-8"?>
-<p:sld xmlns:a="http://schemas.openxmlformats.org/drawingml/2006/main" xmlns:r="http://schemas.openxmlformats.org/officeDocument/2006/relationships" xmlns:p="http://schemas.openxmlformats.org/presentationml/2006/main">
+<p:sld xmlns:a="http://schemas.openxmlformats.org/drawingml/2006/main" xmlns:r="http://schemas.openxmlformats.org/officeDocument/2006/relationships" xmlns:p="http://schemas.openxmlformats.org/presentationml/2006/main" show="0">
   <p:cSld>
     <p:spTree>
       <p:nvGrpSpPr>
@@ -11368,1378 +11256,6 @@
 </file>
 
 <file path=ppt/slides/slide2.xml><?xml version="1.0" encoding="utf-8"?>
-<p:sld xmlns:a="http://schemas.openxmlformats.org/drawingml/2006/main" xmlns:r="http://schemas.openxmlformats.org/officeDocument/2006/relationships" xmlns:p="http://schemas.openxmlformats.org/presentationml/2006/main" showMasterSp="0">
-  <p:cSld>
-    <p:bg>
-      <p:bgPr>
-        <a:pattFill prst="pct5">
-          <a:fgClr>
-            <a:srgbClr val="FAFBFC"/>
-          </a:fgClr>
-          <a:bgClr>
-            <a:schemeClr val="bg1"/>
-          </a:bgClr>
-        </a:pattFill>
-        <a:effectLst/>
-      </p:bgPr>
-    </p:bg>
-    <p:spTree>
-      <p:nvGrpSpPr>
-        <p:cNvPr id="1" name=""/>
-        <p:cNvGrpSpPr/>
-        <p:nvPr/>
-      </p:nvGrpSpPr>
-      <p:grpSpPr>
-        <a:xfrm>
-          <a:off x="0" y="0"/>
-          <a:ext cx="0" cy="0"/>
-          <a:chOff x="0" y="0"/>
-          <a:chExt cx="0" cy="0"/>
-        </a:xfrm>
-      </p:grpSpPr>
-      <p:pic>
-        <p:nvPicPr>
-          <p:cNvPr id="3" name="Picture 2">
-            <a:extLst>
-              <a:ext uri="{FF2B5EF4-FFF2-40B4-BE49-F238E27FC236}">
-                <a16:creationId xmlns:a16="http://schemas.microsoft.com/office/drawing/2014/main" id="{D8D5AF6E-89B6-877C-7960-D5F8849F6877}"/>
-              </a:ext>
-            </a:extLst>
-          </p:cNvPr>
-          <p:cNvPicPr>
-            <a:picLocks noChangeAspect="1"/>
-          </p:cNvPicPr>
-          <p:nvPr/>
-        </p:nvPicPr>
-        <p:blipFill>
-          <a:blip r:embed="rId3"/>
-          <a:srcRect l="9172" t="6988" r="8671" b="58988"/>
-          <a:stretch>
-            <a:fillRect/>
-          </a:stretch>
-        </p:blipFill>
-        <p:spPr>
-          <a:xfrm>
-            <a:off x="523415" y="1828800"/>
-            <a:ext cx="11051757" cy="2875631"/>
-          </a:xfrm>
-          <a:prstGeom prst="rect">
-            <a:avLst/>
-          </a:prstGeom>
-        </p:spPr>
-      </p:pic>
-    </p:spTree>
-    <p:extLst>
-      <p:ext uri="{BB962C8B-B14F-4D97-AF65-F5344CB8AC3E}">
-        <p14:creationId xmlns:p14="http://schemas.microsoft.com/office/powerpoint/2010/main" val="1413440985"/>
-      </p:ext>
-    </p:extLst>
-  </p:cSld>
-  <p:clrMapOvr>
-    <a:masterClrMapping/>
-  </p:clrMapOvr>
-</p:sld>
-</file>
-
-<file path=ppt/slides/slide20.xml><?xml version="1.0" encoding="utf-8"?>
-<p:sld xmlns:a="http://schemas.openxmlformats.org/drawingml/2006/main" xmlns:r="http://schemas.openxmlformats.org/officeDocument/2006/relationships" xmlns:p="http://schemas.openxmlformats.org/presentationml/2006/main">
-  <p:cSld>
-    <p:spTree>
-      <p:nvGrpSpPr>
-        <p:cNvPr id="1" name=""/>
-        <p:cNvGrpSpPr/>
-        <p:nvPr/>
-      </p:nvGrpSpPr>
-      <p:grpSpPr>
-        <a:xfrm>
-          <a:off x="0" y="0"/>
-          <a:ext cx="0" cy="0"/>
-          <a:chOff x="0" y="0"/>
-          <a:chExt cx="0" cy="0"/>
-        </a:xfrm>
-      </p:grpSpPr>
-      <p:sp>
-        <p:nvSpPr>
-          <p:cNvPr id="2" name="Title 1">
-            <a:extLst>
-              <a:ext uri="{FF2B5EF4-FFF2-40B4-BE49-F238E27FC236}">
-                <a16:creationId xmlns:a16="http://schemas.microsoft.com/office/drawing/2014/main" id="{6E43E464-4A9F-3D02-3031-A210FB8E2C67}"/>
-              </a:ext>
-            </a:extLst>
-          </p:cNvPr>
-          <p:cNvSpPr>
-            <a:spLocks noGrp="1"/>
-          </p:cNvSpPr>
-          <p:nvPr>
-            <p:ph type="title"/>
-          </p:nvPr>
-        </p:nvSpPr>
-        <p:spPr>
-          <a:xfrm>
-            <a:off x="635000" y="291383"/>
-            <a:ext cx="10515600" cy="1325563"/>
-          </a:xfrm>
-        </p:spPr>
-        <p:txBody>
-          <a:bodyPr>
-            <a:normAutofit/>
-          </a:bodyPr>
-          <a:lstStyle/>
-          <a:p>
-            <a:pPr algn="l"/>
-            <a:r>
-              <a:rPr lang="en-US" sz="4800" b="1" dirty="0">
-                <a:solidFill>
-                  <a:srgbClr val="0F172A"/>
-                </a:solidFill>
-              </a:rPr>
-              <a:t>What to Watch Out For</a:t>
-            </a:r>
-          </a:p>
-        </p:txBody>
-      </p:sp>
-      <p:sp>
-        <p:nvSpPr>
-          <p:cNvPr id="1500" name="Chal"/>
-          <p:cNvSpPr/>
-          <p:nvPr/>
-        </p:nvSpPr>
-        <p:spPr>
-          <a:xfrm>
-            <a:off x="635000" y="1804219"/>
-            <a:ext cx="5334000" cy="3859161"/>
-          </a:xfrm>
-          <a:prstGeom prst="roundRect">
-            <a:avLst>
-              <a:gd name="adj" fmla="val 6000"/>
-            </a:avLst>
-          </a:prstGeom>
-          <a:solidFill>
-            <a:srgbClr val="FEF2F2">
-              <a:alpha val="30000"/>
-            </a:srgbClr>
-          </a:solidFill>
-          <a:ln w="12700">
-            <a:solidFill>
-              <a:srgbClr val="FECDD3"/>
-            </a:solidFill>
-          </a:ln>
-        </p:spPr>
-        <p:txBody>
-          <a:bodyPr wrap="square" lIns="240000" tIns="200000" rIns="240000" bIns="200000" anchor="t"/>
-          <a:lstStyle/>
-          <a:p>
-            <a:pPr algn="l"/>
-            <a:r>
-              <a:rPr lang="en-US" sz="2000" b="1" spc="300" dirty="0">
-                <a:solidFill>
-                  <a:srgbClr val="9F1239"/>
-                </a:solidFill>
-              </a:rPr>
-              <a:t>⚠  CHALLENGES</a:t>
-            </a:r>
-          </a:p>
-          <a:p>
-            <a:pPr algn="l">
-              <a:spcBef>
-                <a:spcPts val="400"/>
-              </a:spcBef>
-            </a:pPr>
-            <a:r>
-              <a:rPr lang="en-US" sz="3200" b="1" dirty="0">
-                <a:solidFill>
-                  <a:srgbClr val="0F172A"/>
-                </a:solidFill>
-              </a:rPr>
-              <a:t>It gets hard fast.</a:t>
-            </a:r>
-            <a:br>
-              <a:rPr lang="en-US" sz="3200" b="1" dirty="0">
-                <a:solidFill>
-                  <a:srgbClr val="0F172A"/>
-                </a:solidFill>
-              </a:rPr>
-            </a:br>
-            <a:endParaRPr lang="en-US" sz="3200" b="1" dirty="0">
-              <a:solidFill>
-                <a:srgbClr val="0F172A"/>
-              </a:solidFill>
-            </a:endParaRPr>
-          </a:p>
-          <a:p>
-            <a:pPr marL="228600" indent="-228600">
-              <a:spcBef>
-                <a:spcPts val="700"/>
-              </a:spcBef>
-              <a:buFont typeface="Arial"/>
-              <a:buChar char="•"/>
-            </a:pPr>
-            <a:r>
-              <a:rPr lang="en-US" sz="2000" b="1" dirty="0">
-                <a:solidFill>
-                  <a:srgbClr val="0F172A"/>
-                </a:solidFill>
-              </a:rPr>
-              <a:t>Prompt drift </a:t>
-            </a:r>
-            <a:r>
-              <a:rPr lang="en-US" dirty="0">
-                <a:solidFill>
-                  <a:srgbClr val="64748B"/>
-                </a:solidFill>
-              </a:rPr>
-              <a:t>as schema grows</a:t>
-            </a:r>
-          </a:p>
-          <a:p>
-            <a:pPr marL="228600" indent="-228600">
-              <a:spcBef>
-                <a:spcPts val="400"/>
-              </a:spcBef>
-              <a:buFont typeface="Arial"/>
-              <a:buChar char="•"/>
-            </a:pPr>
-            <a:r>
-              <a:rPr lang="en-US" sz="2000" b="1" dirty="0">
-                <a:solidFill>
-                  <a:srgbClr val="0F172A"/>
-                </a:solidFill>
-              </a:rPr>
-              <a:t>Ambiguous questions </a:t>
-            </a:r>
-            <a:r>
-              <a:rPr lang="en-US" dirty="0">
-                <a:solidFill>
-                  <a:srgbClr val="64748B"/>
-                </a:solidFill>
-              </a:rPr>
-              <a:t>("last month")</a:t>
-            </a:r>
-          </a:p>
-          <a:p>
-            <a:pPr marL="228600" indent="-228600">
-              <a:spcBef>
-                <a:spcPts val="400"/>
-              </a:spcBef>
-              <a:buFont typeface="Arial"/>
-              <a:buChar char="•"/>
-            </a:pPr>
-            <a:r>
-              <a:rPr lang="en-US" sz="2000" b="1" dirty="0">
-                <a:solidFill>
-                  <a:srgbClr val="0F172A"/>
-                </a:solidFill>
-              </a:rPr>
-              <a:t>Cost &amp; latency </a:t>
-            </a:r>
-            <a:r>
-              <a:rPr lang="en-US" dirty="0">
-                <a:solidFill>
-                  <a:srgbClr val="64748B"/>
-                </a:solidFill>
-              </a:rPr>
-              <a:t>per query</a:t>
-            </a:r>
-          </a:p>
-          <a:p>
-            <a:pPr marL="228600" indent="-228600">
-              <a:spcBef>
-                <a:spcPts val="400"/>
-              </a:spcBef>
-              <a:buFont typeface="Arial"/>
-              <a:buChar char="•"/>
-            </a:pPr>
-            <a:r>
-              <a:rPr lang="en-US" sz="2000" b="1" dirty="0">
-                <a:solidFill>
-                  <a:srgbClr val="0F172A"/>
-                </a:solidFill>
-              </a:rPr>
-              <a:t>Hallucinated columns </a:t>
-            </a:r>
-            <a:r>
-              <a:rPr lang="en-US" dirty="0">
-                <a:solidFill>
-                  <a:srgbClr val="64748B"/>
-                </a:solidFill>
-              </a:rPr>
-              <a:t>&amp; joins</a:t>
-            </a:r>
-          </a:p>
-          <a:p>
-            <a:pPr marL="228600" indent="-228600">
-              <a:spcBef>
-                <a:spcPts val="400"/>
-              </a:spcBef>
-              <a:buFont typeface="Arial"/>
-              <a:buChar char="•"/>
-            </a:pPr>
-            <a:r>
-              <a:rPr lang="en-US" sz="2000" b="1" dirty="0">
-                <a:solidFill>
-                  <a:srgbClr val="0F172A"/>
-                </a:solidFill>
-              </a:rPr>
-              <a:t>Permissions </a:t>
-            </a:r>
-            <a:r>
-              <a:rPr lang="en-US" dirty="0">
-                <a:solidFill>
-                  <a:srgbClr val="64748B"/>
-                </a:solidFill>
-              </a:rPr>
-              <a:t>&amp; row-level security</a:t>
-            </a:r>
-          </a:p>
-        </p:txBody>
-      </p:sp>
-      <p:sp>
-        <p:nvSpPr>
-          <p:cNvPr id="1501" name="BP"/>
-          <p:cNvSpPr/>
-          <p:nvPr/>
-        </p:nvSpPr>
-        <p:spPr>
-          <a:xfrm>
-            <a:off x="6222999" y="1804219"/>
-            <a:ext cx="5472471" cy="3859161"/>
-          </a:xfrm>
-          <a:prstGeom prst="roundRect">
-            <a:avLst>
-              <a:gd name="adj" fmla="val 6000"/>
-            </a:avLst>
-          </a:prstGeom>
-          <a:solidFill>
-            <a:srgbClr val="ECFDF5">
-              <a:alpha val="30000"/>
-            </a:srgbClr>
-          </a:solidFill>
-          <a:ln w="12700">
-            <a:solidFill>
-              <a:srgbClr val="A7F3D0"/>
-            </a:solidFill>
-          </a:ln>
-        </p:spPr>
-        <p:txBody>
-          <a:bodyPr wrap="square" lIns="240000" tIns="200000" rIns="240000" bIns="200000" anchor="t"/>
-          <a:lstStyle/>
-          <a:p>
-            <a:pPr algn="l"/>
-            <a:r>
-              <a:rPr lang="en-US" sz="2000" b="1" spc="300" dirty="0">
-                <a:solidFill>
-                  <a:srgbClr val="047857"/>
-                </a:solidFill>
-              </a:rPr>
-              <a:t>✓  BEST PRACTICES</a:t>
-            </a:r>
-          </a:p>
-          <a:p>
-            <a:pPr algn="l">
-              <a:spcBef>
-                <a:spcPts val="400"/>
-              </a:spcBef>
-            </a:pPr>
-            <a:r>
-              <a:rPr lang="en-US" sz="3200" b="1" dirty="0">
-                <a:solidFill>
-                  <a:srgbClr val="0F172A"/>
-                </a:solidFill>
-              </a:rPr>
-              <a:t>What actually works.</a:t>
-            </a:r>
-            <a:br>
-              <a:rPr lang="en-US" sz="3200" b="1" dirty="0">
-                <a:solidFill>
-                  <a:srgbClr val="0F172A"/>
-                </a:solidFill>
-              </a:rPr>
-            </a:br>
-            <a:endParaRPr lang="en-US" sz="3200" b="1" dirty="0">
-              <a:solidFill>
-                <a:srgbClr val="0F172A"/>
-              </a:solidFill>
-            </a:endParaRPr>
-          </a:p>
-          <a:p>
-            <a:pPr marL="228600" indent="-228600">
-              <a:spcBef>
-                <a:spcPts val="700"/>
-              </a:spcBef>
-              <a:buFont typeface="Arial"/>
-              <a:buChar char="✓"/>
-            </a:pPr>
-            <a:r>
-              <a:rPr lang="en-US" sz="2000" b="1" dirty="0">
-                <a:solidFill>
-                  <a:srgbClr val="0F172A"/>
-                </a:solidFill>
-              </a:rPr>
-              <a:t>Always validate </a:t>
-            </a:r>
-            <a:r>
-              <a:rPr lang="en-US" dirty="0">
-                <a:solidFill>
-                  <a:srgbClr val="475569"/>
-                </a:solidFill>
-              </a:rPr>
-              <a:t>— never trust raw SQL</a:t>
-            </a:r>
-          </a:p>
-          <a:p>
-            <a:pPr marL="228600" indent="-228600">
-              <a:spcBef>
-                <a:spcPts val="400"/>
-              </a:spcBef>
-              <a:buFont typeface="Arial"/>
-              <a:buChar char="✓"/>
-            </a:pPr>
-            <a:r>
-              <a:rPr lang="en-US" sz="2000" b="1" dirty="0">
-                <a:solidFill>
-                  <a:srgbClr val="0F172A"/>
-                </a:solidFill>
-              </a:rPr>
-              <a:t>Keep prompts strict </a:t>
-            </a:r>
-            <a:r>
-              <a:rPr lang="en-US" dirty="0">
-                <a:solidFill>
-                  <a:srgbClr val="475569"/>
-                </a:solidFill>
-              </a:rPr>
-              <a:t>&amp; versioned</a:t>
-            </a:r>
-          </a:p>
-          <a:p>
-            <a:pPr marL="228600" indent="-228600">
-              <a:spcBef>
-                <a:spcPts val="400"/>
-              </a:spcBef>
-              <a:buFont typeface="Arial"/>
-              <a:buChar char="✓"/>
-            </a:pPr>
-            <a:r>
-              <a:rPr lang="en-US" sz="2000" b="1" dirty="0">
-                <a:solidFill>
-                  <a:srgbClr val="0F172A"/>
-                </a:solidFill>
-              </a:rPr>
-              <a:t>Read-only DB user </a:t>
-            </a:r>
-            <a:r>
-              <a:rPr lang="en-US" dirty="0">
-                <a:solidFill>
-                  <a:srgbClr val="475569"/>
-                </a:solidFill>
-              </a:rPr>
-              <a:t>for the pipeline</a:t>
-            </a:r>
-          </a:p>
-          <a:p>
-            <a:pPr marL="228600" indent="-228600">
-              <a:spcBef>
-                <a:spcPts val="400"/>
-              </a:spcBef>
-              <a:buFont typeface="Arial"/>
-              <a:buChar char="✓"/>
-            </a:pPr>
-            <a:r>
-              <a:rPr lang="en-US" sz="2000" b="1" dirty="0">
-                <a:solidFill>
-                  <a:srgbClr val="0F172A"/>
-                </a:solidFill>
-              </a:rPr>
-              <a:t>Log everything </a:t>
-            </a:r>
-            <a:r>
-              <a:rPr lang="en-US" dirty="0">
-                <a:solidFill>
-                  <a:srgbClr val="475569"/>
-                </a:solidFill>
-              </a:rPr>
-              <a:t>— prompt, SQL, result</a:t>
-            </a:r>
-          </a:p>
-          <a:p>
-            <a:pPr marL="228600" indent="-228600">
-              <a:spcBef>
-                <a:spcPts val="400"/>
-              </a:spcBef>
-              <a:buFont typeface="Arial"/>
-              <a:buChar char="✓"/>
-            </a:pPr>
-            <a:r>
-              <a:rPr lang="en-US" sz="2000" b="1" dirty="0">
-                <a:solidFill>
-                  <a:srgbClr val="0F172A"/>
-                </a:solidFill>
-              </a:rPr>
-              <a:t>Start small </a:t>
-            </a:r>
-            <a:r>
-              <a:rPr lang="en-US" dirty="0">
-                <a:solidFill>
-                  <a:srgbClr val="475569"/>
-                </a:solidFill>
-              </a:rPr>
-              <a:t>— one table, one user</a:t>
-            </a:r>
-          </a:p>
-        </p:txBody>
-      </p:sp>
-    </p:spTree>
-    <p:extLst>
-      <p:ext uri="{BB962C8B-B14F-4D97-AF65-F5344CB8AC3E}">
-        <p14:creationId xmlns:p14="http://schemas.microsoft.com/office/powerpoint/2010/main" val="3349061554"/>
-      </p:ext>
-    </p:extLst>
-  </p:cSld>
-  <p:clrMapOvr>
-    <a:masterClrMapping/>
-  </p:clrMapOvr>
-</p:sld>
-</file>
-
-<file path=ppt/slides/slide21.xml><?xml version="1.0" encoding="utf-8"?>
-<p:sld xmlns:a="http://schemas.openxmlformats.org/drawingml/2006/main" xmlns:r="http://schemas.openxmlformats.org/officeDocument/2006/relationships" xmlns:p="http://schemas.openxmlformats.org/presentationml/2006/main">
-  <p:cSld>
-    <p:spTree>
-      <p:nvGrpSpPr>
-        <p:cNvPr id="1" name="">
-          <a:extLst>
-            <a:ext uri="{FF2B5EF4-FFF2-40B4-BE49-F238E27FC236}">
-              <a16:creationId xmlns:a16="http://schemas.microsoft.com/office/drawing/2014/main" id="{190DE38D-6D72-586F-A672-EC9CD8B062AF}"/>
-            </a:ext>
-          </a:extLst>
-        </p:cNvPr>
-        <p:cNvGrpSpPr/>
-        <p:nvPr/>
-      </p:nvGrpSpPr>
-      <p:grpSpPr>
-        <a:xfrm>
-          <a:off x="0" y="0"/>
-          <a:ext cx="0" cy="0"/>
-          <a:chOff x="0" y="0"/>
-          <a:chExt cx="0" cy="0"/>
-        </a:xfrm>
-      </p:grpSpPr>
-      <p:sp>
-        <p:nvSpPr>
-          <p:cNvPr id="7" name="Panel">
-            <a:extLst>
-              <a:ext uri="{FF2B5EF4-FFF2-40B4-BE49-F238E27FC236}">
-                <a16:creationId xmlns:a16="http://schemas.microsoft.com/office/drawing/2014/main" id="{B05FC43A-919B-6C85-31C9-D03E8F18B296}"/>
-              </a:ext>
-            </a:extLst>
-          </p:cNvPr>
-          <p:cNvSpPr/>
-          <p:nvPr/>
-        </p:nvSpPr>
-        <p:spPr>
-          <a:xfrm>
-            <a:off x="73026" y="2822121"/>
-            <a:ext cx="12118974" cy="3064329"/>
-          </a:xfrm>
-          <a:prstGeom prst="rect">
-            <a:avLst/>
-          </a:prstGeom>
-          <a:solidFill>
-            <a:srgbClr val="0F172A"/>
-          </a:solidFill>
-          <a:ln>
-            <a:noFill/>
-          </a:ln>
-        </p:spPr>
-        <p:txBody>
-          <a:bodyPr/>
-          <a:lstStyle/>
-          <a:p>
-            <a:endParaRPr lang="en-US" sz="3200"/>
-          </a:p>
-        </p:txBody>
-      </p:sp>
-      <p:sp>
-        <p:nvSpPr>
-          <p:cNvPr id="8" name="Q">
-            <a:extLst>
-              <a:ext uri="{FF2B5EF4-FFF2-40B4-BE49-F238E27FC236}">
-                <a16:creationId xmlns:a16="http://schemas.microsoft.com/office/drawing/2014/main" id="{B9C6DB59-7B03-2063-5030-5346636B1400}"/>
-              </a:ext>
-            </a:extLst>
-          </p:cNvPr>
-          <p:cNvSpPr txBox="1"/>
-          <p:nvPr/>
-        </p:nvSpPr>
-        <p:spPr>
-          <a:xfrm>
-            <a:off x="444500" y="566738"/>
-            <a:ext cx="11376025" cy="2255383"/>
-          </a:xfrm>
-          <a:prstGeom prst="rect">
-            <a:avLst/>
-          </a:prstGeom>
-          <a:noFill/>
-        </p:spPr>
-        <p:txBody>
-          <a:bodyPr wrap="square" anchor="t"/>
-          <a:lstStyle/>
-          <a:p>
-            <a:pPr>
-              <a:lnSpc>
-                <a:spcPct val="105000"/>
-              </a:lnSpc>
-            </a:pPr>
-            <a:r>
-              <a:rPr lang="en-US" sz="6000" b="1" dirty="0">
-                <a:solidFill>
-                  <a:srgbClr val="0F172A"/>
-                </a:solidFill>
-              </a:rPr>
-              <a:t>What if we used 100% of our </a:t>
-            </a:r>
-            <a:br>
-              <a:rPr lang="en-US" sz="6000" b="1" dirty="0">
-                <a:solidFill>
-                  <a:srgbClr val="0F172A"/>
-                </a:solidFill>
-              </a:rPr>
-            </a:br>
-            <a:r>
-              <a:rPr lang="en-US" sz="6000" b="1" dirty="0">
-                <a:solidFill>
-                  <a:srgbClr val="0F172A"/>
-                </a:solidFill>
-              </a:rPr>
-              <a:t>DB’s potential</a:t>
-            </a:r>
-            <a:r>
-              <a:rPr lang="en-US" sz="5400" b="1" dirty="0">
-                <a:solidFill>
-                  <a:srgbClr val="0F172A"/>
-                </a:solidFill>
-              </a:rPr>
-              <a:t>🤔</a:t>
-            </a:r>
-          </a:p>
-        </p:txBody>
-      </p:sp>
-      <p:sp>
-        <p:nvSpPr>
-          <p:cNvPr id="9" name="Q">
-            <a:extLst>
-              <a:ext uri="{FF2B5EF4-FFF2-40B4-BE49-F238E27FC236}">
-                <a16:creationId xmlns:a16="http://schemas.microsoft.com/office/drawing/2014/main" id="{1AB057A2-73DE-48D4-8534-77FBCD65A14A}"/>
-              </a:ext>
-            </a:extLst>
-          </p:cNvPr>
-          <p:cNvSpPr txBox="1"/>
-          <p:nvPr/>
-        </p:nvSpPr>
-        <p:spPr>
-          <a:xfrm>
-            <a:off x="444500" y="3090862"/>
-            <a:ext cx="11376025" cy="2400300"/>
-          </a:xfrm>
-          <a:prstGeom prst="rect">
-            <a:avLst/>
-          </a:prstGeom>
-          <a:noFill/>
-        </p:spPr>
-        <p:txBody>
-          <a:bodyPr wrap="square" anchor="t"/>
-          <a:lstStyle/>
-          <a:p>
-            <a:pPr algn="l">
-              <a:lnSpc>
-                <a:spcPct val="105000"/>
-              </a:lnSpc>
-            </a:pPr>
-            <a:r>
-              <a:rPr lang="en-US" sz="6600" b="1" u="sng" dirty="0">
-                <a:solidFill>
-                  <a:srgbClr val="FFFFFF"/>
-                </a:solidFill>
-              </a:rPr>
-              <a:t>Taking actions</a:t>
-            </a:r>
-            <a:r>
-              <a:rPr lang="en-US" sz="6600" b="1" dirty="0">
-                <a:solidFill>
-                  <a:srgbClr val="FFFFFF"/>
-                </a:solidFill>
-              </a:rPr>
-              <a:t> </a:t>
-            </a:r>
-            <a:br>
-              <a:rPr lang="en-US" sz="6600" b="1" dirty="0">
-                <a:solidFill>
-                  <a:srgbClr val="FFFFFF"/>
-                </a:solidFill>
-              </a:rPr>
-            </a:br>
-            <a:r>
-              <a:rPr lang="en-US" sz="6600" b="1" dirty="0">
-                <a:solidFill>
-                  <a:srgbClr val="FFFFFF"/>
-                </a:solidFill>
-              </a:rPr>
-              <a:t>instead of just reporting!</a:t>
-            </a:r>
-          </a:p>
-        </p:txBody>
-      </p:sp>
-    </p:spTree>
-    <p:extLst>
-      <p:ext uri="{BB962C8B-B14F-4D97-AF65-F5344CB8AC3E}">
-        <p14:creationId xmlns:p14="http://schemas.microsoft.com/office/powerpoint/2010/main" val="1603450424"/>
-      </p:ext>
-    </p:extLst>
-  </p:cSld>
-  <p:clrMapOvr>
-    <a:masterClrMapping/>
-  </p:clrMapOvr>
-</p:sld>
-</file>
-
-<file path=ppt/slides/slide22.xml><?xml version="1.0" encoding="utf-8"?>
-<p:sld xmlns:a="http://schemas.openxmlformats.org/drawingml/2006/main" xmlns:r="http://schemas.openxmlformats.org/officeDocument/2006/relationships" xmlns:p="http://schemas.openxmlformats.org/presentationml/2006/main">
-  <p:cSld>
-    <p:spTree>
-      <p:nvGrpSpPr>
-        <p:cNvPr id="1" name=""/>
-        <p:cNvGrpSpPr/>
-        <p:nvPr/>
-      </p:nvGrpSpPr>
-      <p:grpSpPr>
-        <a:xfrm>
-          <a:off x="0" y="0"/>
-          <a:ext cx="0" cy="0"/>
-          <a:chOff x="0" y="0"/>
-          <a:chExt cx="0" cy="0"/>
-        </a:xfrm>
-      </p:grpSpPr>
-      <p:sp>
-        <p:nvSpPr>
-          <p:cNvPr id="1600" name="BG"/>
-          <p:cNvSpPr/>
-          <p:nvPr/>
-        </p:nvSpPr>
-        <p:spPr>
-          <a:xfrm>
-            <a:off x="76200" y="0"/>
-            <a:ext cx="12115800" cy="6858000"/>
-          </a:xfrm>
-          <a:prstGeom prst="rect">
-            <a:avLst/>
-          </a:prstGeom>
-          <a:solidFill>
-            <a:srgbClr val="0F172A"/>
-          </a:solidFill>
-          <a:ln>
-            <a:noFill/>
-          </a:ln>
-        </p:spPr>
-        <p:txBody>
-          <a:bodyPr/>
-          <a:lstStyle/>
-          <a:p>
-            <a:endParaRPr lang="en-US" dirty="0"/>
-          </a:p>
-        </p:txBody>
-      </p:sp>
-      <p:sp>
-        <p:nvSpPr>
-          <p:cNvPr id="1601" name="Bar"/>
-          <p:cNvSpPr/>
-          <p:nvPr/>
-        </p:nvSpPr>
-        <p:spPr>
-          <a:xfrm>
-            <a:off x="0" y="1016000"/>
-            <a:ext cx="76200" cy="4826000"/>
-          </a:xfrm>
-          <a:prstGeom prst="rect">
-            <a:avLst/>
-          </a:prstGeom>
-          <a:solidFill>
-            <a:srgbClr val="22D3EE"/>
-          </a:solidFill>
-          <a:ln>
-            <a:noFill/>
-          </a:ln>
-        </p:spPr>
-        <p:txBody>
-          <a:bodyPr/>
-          <a:lstStyle/>
-          <a:p>
-            <a:endParaRPr lang="en-US"/>
-          </a:p>
-        </p:txBody>
-      </p:sp>
-      <p:sp>
-        <p:nvSpPr>
-          <p:cNvPr id="1603" name="Q"/>
-          <p:cNvSpPr txBox="1"/>
-          <p:nvPr/>
-        </p:nvSpPr>
-        <p:spPr>
-          <a:xfrm>
-            <a:off x="762000" y="411504"/>
-            <a:ext cx="10668000" cy="2355623"/>
-          </a:xfrm>
-          <a:prstGeom prst="rect">
-            <a:avLst/>
-          </a:prstGeom>
-          <a:noFill/>
-        </p:spPr>
-        <p:txBody>
-          <a:bodyPr wrap="square" anchor="t"/>
-          <a:lstStyle/>
-          <a:p>
-            <a:pPr algn="l">
-              <a:lnSpc>
-                <a:spcPct val="105000"/>
-              </a:lnSpc>
-            </a:pPr>
-            <a:r>
-              <a:rPr lang="en-US" sz="6000" b="1" dirty="0">
-                <a:solidFill>
-                  <a:srgbClr val="FFFFFF"/>
-                </a:solidFill>
-              </a:rPr>
-              <a:t>Start  simple</a:t>
-            </a:r>
-          </a:p>
-          <a:p>
-            <a:pPr algn="l">
-              <a:lnSpc>
-                <a:spcPct val="105000"/>
-              </a:lnSpc>
-            </a:pPr>
-            <a:r>
-              <a:rPr lang="en-US" sz="6000" b="1" dirty="0">
-                <a:solidFill>
-                  <a:srgbClr val="FFFFFF"/>
-                </a:solidFill>
-              </a:rPr>
-              <a:t>Then evolve into a </a:t>
-            </a:r>
-            <a:r>
-              <a:rPr lang="en-US" sz="6000" b="1" i="1" dirty="0">
-                <a:solidFill>
-                  <a:srgbClr val="22D3EE"/>
-                </a:solidFill>
-              </a:rPr>
-              <a:t>product.</a:t>
-            </a:r>
-          </a:p>
-        </p:txBody>
-      </p:sp>
-      <p:grpSp>
-        <p:nvGrpSpPr>
-          <p:cNvPr id="3" name="Group 2">
-            <a:extLst>
-              <a:ext uri="{FF2B5EF4-FFF2-40B4-BE49-F238E27FC236}">
-                <a16:creationId xmlns:a16="http://schemas.microsoft.com/office/drawing/2014/main" id="{C86DDA9F-DD43-59A2-0129-A027E314CDEB}"/>
-              </a:ext>
-            </a:extLst>
-          </p:cNvPr>
-          <p:cNvGrpSpPr/>
-          <p:nvPr/>
-        </p:nvGrpSpPr>
-        <p:grpSpPr>
-          <a:xfrm>
-            <a:off x="743378" y="2838101"/>
-            <a:ext cx="10124672" cy="1524000"/>
-            <a:chOff x="762000" y="3624943"/>
-            <a:chExt cx="6634951" cy="1524000"/>
-          </a:xfrm>
-        </p:grpSpPr>
-        <p:sp>
-          <p:nvSpPr>
-            <p:cNvPr id="1610" name="B"/>
-            <p:cNvSpPr/>
-            <p:nvPr/>
-          </p:nvSpPr>
-          <p:spPr>
-            <a:xfrm>
-              <a:off x="762000" y="3624943"/>
-              <a:ext cx="3773409" cy="1524000"/>
-            </a:xfrm>
-            <a:prstGeom prst="roundRect">
-              <a:avLst>
-                <a:gd name="adj" fmla="val 6000"/>
-              </a:avLst>
-            </a:prstGeom>
-            <a:solidFill>
-              <a:schemeClr val="bg1">
-                <a:lumMod val="50000"/>
-              </a:schemeClr>
-            </a:solidFill>
-            <a:ln>
-              <a:noFill/>
-            </a:ln>
-          </p:spPr>
-          <p:txBody>
-            <a:bodyPr wrap="square" lIns="200000" tIns="200000" rIns="200000" bIns="200000" anchor="t"/>
-            <a:lstStyle/>
-            <a:p>
-              <a:pPr algn="l">
-                <a:spcBef>
-                  <a:spcPts val="300"/>
-                </a:spcBef>
-              </a:pPr>
-              <a:r>
-                <a:rPr lang="en-US" sz="2700" dirty="0">
-                  <a:solidFill>
-                    <a:srgbClr val="FFFFFF"/>
-                  </a:solidFill>
-                </a:rPr>
-                <a:t>Until now we learnt programming languages to talk with computers</a:t>
-              </a:r>
-              <a:endParaRPr lang="en-US" sz="2700" dirty="0">
-                <a:solidFill>
-                  <a:srgbClr val="94A3B8"/>
-                </a:solidFill>
-              </a:endParaRPr>
-            </a:p>
-          </p:txBody>
-        </p:sp>
-        <p:sp>
-          <p:nvSpPr>
-            <p:cNvPr id="1611" name="B"/>
-            <p:cNvSpPr/>
-            <p:nvPr/>
-          </p:nvSpPr>
-          <p:spPr>
-            <a:xfrm>
-              <a:off x="4371599" y="3624943"/>
-              <a:ext cx="3025352" cy="1524000"/>
-            </a:xfrm>
-            <a:prstGeom prst="roundRect">
-              <a:avLst>
-                <a:gd name="adj" fmla="val 6000"/>
-              </a:avLst>
-            </a:prstGeom>
-            <a:solidFill>
-              <a:schemeClr val="bg2"/>
-            </a:solidFill>
-            <a:ln>
-              <a:noFill/>
-            </a:ln>
-          </p:spPr>
-          <p:txBody>
-            <a:bodyPr wrap="square" lIns="200000" tIns="200000" rIns="200000" bIns="200000" anchor="t"/>
-            <a:lstStyle/>
-            <a:p>
-              <a:pPr algn="l"/>
-              <a:r>
-                <a:rPr lang="en-US" sz="2800" b="1" spc="300" dirty="0">
-                  <a:solidFill>
-                    <a:srgbClr val="1E293B"/>
-                  </a:solidFill>
-                </a:rPr>
-                <a:t>now they learnt</a:t>
-              </a:r>
-              <a:br>
-                <a:rPr lang="en-US" sz="2800" b="1" spc="300" dirty="0">
-                  <a:solidFill>
-                    <a:srgbClr val="1E293B"/>
-                  </a:solidFill>
-                </a:rPr>
-              </a:br>
-              <a:r>
-                <a:rPr lang="en-US" sz="2800" b="1" spc="300" dirty="0">
-                  <a:solidFill>
-                    <a:srgbClr val="1E293B"/>
-                  </a:solidFill>
-                </a:rPr>
-                <a:t>our language</a:t>
-              </a:r>
-              <a:endParaRPr lang="en-US" sz="2800" b="1" dirty="0">
-                <a:solidFill>
-                  <a:srgbClr val="1E293B"/>
-                </a:solidFill>
-              </a:endParaRPr>
-            </a:p>
-          </p:txBody>
-        </p:sp>
-      </p:grpSp>
-      <p:pic>
-        <p:nvPicPr>
-          <p:cNvPr id="5" name="Picture 4">
-            <a:extLst>
-              <a:ext uri="{FF2B5EF4-FFF2-40B4-BE49-F238E27FC236}">
-                <a16:creationId xmlns:a16="http://schemas.microsoft.com/office/drawing/2014/main" id="{95D01CF5-3779-C47E-5AA7-7E0126629325}"/>
-              </a:ext>
-            </a:extLst>
-          </p:cNvPr>
-          <p:cNvPicPr>
-            <a:picLocks noChangeAspect="1"/>
-          </p:cNvPicPr>
-          <p:nvPr/>
-        </p:nvPicPr>
-        <p:blipFill>
-          <a:blip r:embed="rId3"/>
-          <a:stretch>
-            <a:fillRect/>
-          </a:stretch>
-        </p:blipFill>
-        <p:spPr>
-          <a:xfrm>
-            <a:off x="9251318" y="4787580"/>
-            <a:ext cx="1735996" cy="1751683"/>
-          </a:xfrm>
-          <a:prstGeom prst="rect">
-            <a:avLst/>
-          </a:prstGeom>
-        </p:spPr>
-      </p:pic>
-      <p:sp>
-        <p:nvSpPr>
-          <p:cNvPr id="7" name="TextBox 6">
-            <a:extLst>
-              <a:ext uri="{FF2B5EF4-FFF2-40B4-BE49-F238E27FC236}">
-                <a16:creationId xmlns:a16="http://schemas.microsoft.com/office/drawing/2014/main" id="{ADAC7983-4AF8-14A4-A44D-2BB81412E54E}"/>
-              </a:ext>
-            </a:extLst>
-          </p:cNvPr>
-          <p:cNvSpPr txBox="1"/>
-          <p:nvPr/>
-        </p:nvSpPr>
-        <p:spPr>
-          <a:xfrm>
-            <a:off x="5884853" y="5092994"/>
-            <a:ext cx="2422352" cy="1200329"/>
-          </a:xfrm>
-          <a:prstGeom prst="rect">
-            <a:avLst/>
-          </a:prstGeom>
-          <a:noFill/>
-        </p:spPr>
-        <p:txBody>
-          <a:bodyPr wrap="square">
-            <a:spAutoFit/>
-          </a:bodyPr>
-          <a:lstStyle/>
-          <a:p>
-            <a:pPr algn="r"/>
-            <a:r>
-              <a:rPr lang="en-US" sz="2400" i="1" dirty="0">
-                <a:solidFill>
-                  <a:srgbClr val="94A3B8"/>
-                </a:solidFill>
-              </a:rPr>
-              <a:t>Download</a:t>
-            </a:r>
-            <a:br>
-              <a:rPr lang="en-US" sz="2400" i="1" dirty="0">
-                <a:solidFill>
-                  <a:srgbClr val="94A3B8"/>
-                </a:solidFill>
-              </a:rPr>
-            </a:br>
-            <a:r>
-              <a:rPr lang="en-US" sz="2400" i="1" dirty="0">
-                <a:solidFill>
-                  <a:srgbClr val="94A3B8"/>
-                </a:solidFill>
-              </a:rPr>
-              <a:t>Presentation</a:t>
-            </a:r>
-            <a:br>
-              <a:rPr lang="en-US" sz="2400" i="1" dirty="0">
-                <a:solidFill>
-                  <a:srgbClr val="94A3B8"/>
-                </a:solidFill>
-              </a:rPr>
-            </a:br>
-            <a:r>
-              <a:rPr lang="en-US" sz="2400" i="1" dirty="0">
-                <a:solidFill>
-                  <a:srgbClr val="94A3B8"/>
-                </a:solidFill>
-              </a:rPr>
-              <a:t>Demo projects</a:t>
-            </a:r>
-            <a:endParaRPr lang="tr-TR" sz="2400" i="1" dirty="0"/>
-          </a:p>
-        </p:txBody>
-      </p:sp>
-      <p:cxnSp>
-        <p:nvCxnSpPr>
-          <p:cNvPr id="9" name="Connector: Curved 8">
-            <a:extLst>
-              <a:ext uri="{FF2B5EF4-FFF2-40B4-BE49-F238E27FC236}">
-                <a16:creationId xmlns:a16="http://schemas.microsoft.com/office/drawing/2014/main" id="{E5D101DB-A4D3-4114-CE0B-9DA7CACA4509}"/>
-              </a:ext>
-            </a:extLst>
-          </p:cNvPr>
-          <p:cNvCxnSpPr>
-            <a:cxnSpLocks/>
-          </p:cNvCxnSpPr>
-          <p:nvPr/>
-        </p:nvCxnSpPr>
-        <p:spPr>
-          <a:xfrm flipV="1">
-            <a:off x="8251418" y="5192160"/>
-            <a:ext cx="957896" cy="649840"/>
-          </a:xfrm>
-          <a:prstGeom prst="curvedConnector3">
-            <a:avLst/>
-          </a:prstGeom>
-          <a:ln w="76200">
-            <a:tailEnd type="triangle"/>
-          </a:ln>
-        </p:spPr>
-        <p:style>
-          <a:lnRef idx="2">
-            <a:schemeClr val="accent1"/>
-          </a:lnRef>
-          <a:fillRef idx="0">
-            <a:schemeClr val="accent1"/>
-          </a:fillRef>
-          <a:effectRef idx="1">
-            <a:schemeClr val="accent1"/>
-          </a:effectRef>
-          <a:fontRef idx="minor">
-            <a:schemeClr val="tx1"/>
-          </a:fontRef>
-        </p:style>
-      </p:cxnSp>
-      <p:sp>
-        <p:nvSpPr>
-          <p:cNvPr id="2" name="SpeakerName">
-            <a:extLst>
-              <a:ext uri="{FF2B5EF4-FFF2-40B4-BE49-F238E27FC236}">
-                <a16:creationId xmlns:a16="http://schemas.microsoft.com/office/drawing/2014/main" id="{B67F7C9D-3984-DFAA-4F75-34BC31E06746}"/>
-              </a:ext>
-            </a:extLst>
-          </p:cNvPr>
-          <p:cNvSpPr txBox="1"/>
-          <p:nvPr/>
-        </p:nvSpPr>
-        <p:spPr>
-          <a:xfrm>
-            <a:off x="778693" y="5243714"/>
-            <a:ext cx="4094385" cy="1153029"/>
-          </a:xfrm>
-          <a:prstGeom prst="rect">
-            <a:avLst/>
-          </a:prstGeom>
-          <a:noFill/>
-        </p:spPr>
-        <p:txBody>
-          <a:bodyPr wrap="square" lIns="0" tIns="0" rIns="0" bIns="0" anchor="t"/>
-          <a:lstStyle/>
-          <a:p>
-            <a:pPr algn="l"/>
-            <a:r>
-              <a:rPr lang="en-US" sz="4000" b="1" dirty="0">
-                <a:solidFill>
-                  <a:schemeClr val="bg1"/>
-                </a:solidFill>
-              </a:rPr>
-              <a:t>Alper Ebicoglu</a:t>
-            </a:r>
-          </a:p>
-          <a:p>
-            <a:r>
-              <a:rPr lang="en-US" sz="2800" dirty="0">
-                <a:solidFill>
-                  <a:schemeClr val="bg1"/>
-                </a:solidFill>
-              </a:rPr>
-              <a:t>x.com/</a:t>
-            </a:r>
-            <a:r>
-              <a:rPr lang="en-US" sz="2800" dirty="0">
-                <a:solidFill>
-                  <a:srgbClr val="22D3EE"/>
-                </a:solidFill>
-              </a:rPr>
-              <a:t>alperebicoglu</a:t>
-            </a:r>
-          </a:p>
-        </p:txBody>
-      </p:sp>
-      <p:sp>
-        <p:nvSpPr>
-          <p:cNvPr id="13" name="Rectangle: Rounded Corners 12">
-            <a:extLst>
-              <a:ext uri="{FF2B5EF4-FFF2-40B4-BE49-F238E27FC236}">
-                <a16:creationId xmlns:a16="http://schemas.microsoft.com/office/drawing/2014/main" id="{17516DB6-9F60-477D-8214-F1524AF1287A}"/>
-              </a:ext>
-            </a:extLst>
-          </p:cNvPr>
-          <p:cNvSpPr/>
-          <p:nvPr/>
-        </p:nvSpPr>
-        <p:spPr>
-          <a:xfrm>
-            <a:off x="2897136" y="449382"/>
-            <a:ext cx="2826769" cy="999408"/>
-          </a:xfrm>
-          <a:prstGeom prst="roundRect">
-            <a:avLst/>
-          </a:prstGeom>
-          <a:noFill/>
-          <a:ln w="9525" cap="flat" cmpd="sng" algn="ctr">
-            <a:solidFill>
-              <a:schemeClr val="accent1"/>
-            </a:solidFill>
-            <a:prstDash val="solid"/>
-            <a:round/>
-            <a:headEnd type="none" w="med" len="med"/>
-            <a:tailEnd type="none" w="med" len="med"/>
-          </a:ln>
-        </p:spPr>
-        <p:style>
-          <a:lnRef idx="0">
-            <a:scrgbClr r="0" g="0" b="0"/>
-          </a:lnRef>
-          <a:fillRef idx="0">
-            <a:scrgbClr r="0" g="0" b="0"/>
-          </a:fillRef>
-          <a:effectRef idx="0">
-            <a:scrgbClr r="0" g="0" b="0"/>
-          </a:effectRef>
-          <a:fontRef idx="minor">
-            <a:schemeClr val="accent1"/>
-          </a:fontRef>
-        </p:style>
-        <p:txBody>
-          <a:bodyPr rtlCol="0" anchor="ctr"/>
-          <a:lstStyle/>
-          <a:p>
-            <a:pPr algn="ctr"/>
-            <a:endParaRPr lang="tr-TR" dirty="0"/>
-          </a:p>
-        </p:txBody>
-      </p:sp>
-      <p:sp>
-        <p:nvSpPr>
-          <p:cNvPr id="6" name="Rectangle: Rounded Corners 5">
-            <a:extLst>
-              <a:ext uri="{FF2B5EF4-FFF2-40B4-BE49-F238E27FC236}">
-                <a16:creationId xmlns:a16="http://schemas.microsoft.com/office/drawing/2014/main" id="{13B697C2-CD1F-7168-5C03-4D94888C954B}"/>
-              </a:ext>
-            </a:extLst>
-          </p:cNvPr>
-          <p:cNvSpPr/>
-          <p:nvPr/>
-        </p:nvSpPr>
-        <p:spPr>
-          <a:xfrm>
-            <a:off x="653927" y="5105523"/>
-            <a:ext cx="3953699" cy="1433739"/>
-          </a:xfrm>
-          <a:prstGeom prst="roundRect">
-            <a:avLst/>
-          </a:prstGeom>
-          <a:noFill/>
-          <a:ln w="9525" cap="flat" cmpd="sng" algn="ctr">
-            <a:solidFill>
-              <a:schemeClr val="accent1"/>
-            </a:solidFill>
-            <a:prstDash val="solid"/>
-            <a:round/>
-            <a:headEnd type="none" w="med" len="med"/>
-            <a:tailEnd type="none" w="med" len="med"/>
-          </a:ln>
-        </p:spPr>
-        <p:style>
-          <a:lnRef idx="0">
-            <a:scrgbClr r="0" g="0" b="0"/>
-          </a:lnRef>
-          <a:fillRef idx="0">
-            <a:scrgbClr r="0" g="0" b="0"/>
-          </a:fillRef>
-          <a:effectRef idx="0">
-            <a:scrgbClr r="0" g="0" b="0"/>
-          </a:effectRef>
-          <a:fontRef idx="minor">
-            <a:schemeClr val="accent1"/>
-          </a:fontRef>
-        </p:style>
-        <p:txBody>
-          <a:bodyPr rtlCol="0" anchor="ctr"/>
-          <a:lstStyle/>
-          <a:p>
-            <a:pPr algn="ctr"/>
-            <a:endParaRPr lang="tr-TR" dirty="0"/>
-          </a:p>
-        </p:txBody>
-      </p:sp>
-      <p:sp>
-        <p:nvSpPr>
-          <p:cNvPr id="8" name="Rectangle: Rounded Corners 7">
-            <a:extLst>
-              <a:ext uri="{FF2B5EF4-FFF2-40B4-BE49-F238E27FC236}">
-                <a16:creationId xmlns:a16="http://schemas.microsoft.com/office/drawing/2014/main" id="{3D0AE1AA-7E4C-A120-28E1-6595708F20F9}"/>
-              </a:ext>
-            </a:extLst>
-          </p:cNvPr>
-          <p:cNvSpPr/>
-          <p:nvPr/>
-        </p:nvSpPr>
-        <p:spPr>
-          <a:xfrm>
-            <a:off x="5884853" y="4643252"/>
-            <a:ext cx="5277952" cy="1995054"/>
-          </a:xfrm>
-          <a:prstGeom prst="roundRect">
-            <a:avLst/>
-          </a:prstGeom>
-          <a:noFill/>
-          <a:ln w="9525" cap="flat" cmpd="sng" algn="ctr">
-            <a:solidFill>
-              <a:schemeClr val="accent1"/>
-            </a:solidFill>
-            <a:prstDash val="solid"/>
-            <a:round/>
-            <a:headEnd type="none" w="med" len="med"/>
-            <a:tailEnd type="none" w="med" len="med"/>
-          </a:ln>
-        </p:spPr>
-        <p:style>
-          <a:lnRef idx="0">
-            <a:scrgbClr r="0" g="0" b="0"/>
-          </a:lnRef>
-          <a:fillRef idx="0">
-            <a:scrgbClr r="0" g="0" b="0"/>
-          </a:fillRef>
-          <a:effectRef idx="0">
-            <a:scrgbClr r="0" g="0" b="0"/>
-          </a:effectRef>
-          <a:fontRef idx="minor">
-            <a:schemeClr val="accent1"/>
-          </a:fontRef>
-        </p:style>
-        <p:txBody>
-          <a:bodyPr rtlCol="0" anchor="ctr"/>
-          <a:lstStyle/>
-          <a:p>
-            <a:pPr algn="ctr"/>
-            <a:endParaRPr lang="tr-TR" dirty="0"/>
-          </a:p>
-        </p:txBody>
-      </p:sp>
-    </p:spTree>
-    <p:extLst>
-      <p:ext uri="{BB962C8B-B14F-4D97-AF65-F5344CB8AC3E}">
-        <p14:creationId xmlns:p14="http://schemas.microsoft.com/office/powerpoint/2010/main" val="3469954536"/>
-      </p:ext>
-    </p:extLst>
-  </p:cSld>
-  <p:clrMapOvr>
-    <a:masterClrMapping/>
-  </p:clrMapOvr>
-</p:sld>
-</file>
-
-<file path=ppt/slides/slide3.xml><?xml version="1.0" encoding="utf-8"?>
 <p:sld xmlns:a="http://schemas.openxmlformats.org/drawingml/2006/main" xmlns:r="http://schemas.openxmlformats.org/officeDocument/2006/relationships" xmlns:p="http://schemas.openxmlformats.org/presentationml/2006/main" showMasterSp="0">
   <p:cSld>
     <p:spTree>
@@ -13651,6 +12167,1341 @@
 </p:sld>
 </file>
 
+<file path=ppt/slides/slide20.xml><?xml version="1.0" encoding="utf-8"?>
+<p:sld xmlns:a="http://schemas.openxmlformats.org/drawingml/2006/main" xmlns:r="http://schemas.openxmlformats.org/officeDocument/2006/relationships" xmlns:p="http://schemas.openxmlformats.org/presentationml/2006/main">
+  <p:cSld>
+    <p:spTree>
+      <p:nvGrpSpPr>
+        <p:cNvPr id="1" name=""/>
+        <p:cNvGrpSpPr/>
+        <p:nvPr/>
+      </p:nvGrpSpPr>
+      <p:grpSpPr>
+        <a:xfrm>
+          <a:off x="0" y="0"/>
+          <a:ext cx="0" cy="0"/>
+          <a:chOff x="0" y="0"/>
+          <a:chExt cx="0" cy="0"/>
+        </a:xfrm>
+      </p:grpSpPr>
+      <p:sp>
+        <p:nvSpPr>
+          <p:cNvPr id="2" name="Title 1">
+            <a:extLst>
+              <a:ext uri="{FF2B5EF4-FFF2-40B4-BE49-F238E27FC236}">
+                <a16:creationId xmlns:a16="http://schemas.microsoft.com/office/drawing/2014/main" id="{6E43E464-4A9F-3D02-3031-A210FB8E2C67}"/>
+              </a:ext>
+            </a:extLst>
+          </p:cNvPr>
+          <p:cNvSpPr>
+            <a:spLocks noGrp="1"/>
+          </p:cNvSpPr>
+          <p:nvPr>
+            <p:ph type="title"/>
+          </p:nvPr>
+        </p:nvSpPr>
+        <p:spPr>
+          <a:xfrm>
+            <a:off x="635000" y="291383"/>
+            <a:ext cx="10515600" cy="1325563"/>
+          </a:xfrm>
+        </p:spPr>
+        <p:txBody>
+          <a:bodyPr>
+            <a:normAutofit/>
+          </a:bodyPr>
+          <a:lstStyle/>
+          <a:p>
+            <a:pPr algn="l"/>
+            <a:r>
+              <a:rPr lang="en-US" sz="4800" b="1" dirty="0">
+                <a:solidFill>
+                  <a:srgbClr val="0F172A"/>
+                </a:solidFill>
+              </a:rPr>
+              <a:t>What to Watch Out For</a:t>
+            </a:r>
+          </a:p>
+        </p:txBody>
+      </p:sp>
+      <p:sp>
+        <p:nvSpPr>
+          <p:cNvPr id="1500" name="Chal"/>
+          <p:cNvSpPr/>
+          <p:nvPr/>
+        </p:nvSpPr>
+        <p:spPr>
+          <a:xfrm>
+            <a:off x="635000" y="1804219"/>
+            <a:ext cx="5334000" cy="3859161"/>
+          </a:xfrm>
+          <a:prstGeom prst="roundRect">
+            <a:avLst>
+              <a:gd name="adj" fmla="val 6000"/>
+            </a:avLst>
+          </a:prstGeom>
+          <a:solidFill>
+            <a:srgbClr val="FEF2F2">
+              <a:alpha val="30000"/>
+            </a:srgbClr>
+          </a:solidFill>
+          <a:ln w="12700">
+            <a:solidFill>
+              <a:srgbClr val="FECDD3"/>
+            </a:solidFill>
+          </a:ln>
+        </p:spPr>
+        <p:txBody>
+          <a:bodyPr wrap="square" lIns="240000" tIns="200000" rIns="240000" bIns="200000" anchor="t"/>
+          <a:lstStyle/>
+          <a:p>
+            <a:pPr algn="l"/>
+            <a:r>
+              <a:rPr lang="en-US" sz="2000" b="1" spc="300" dirty="0">
+                <a:solidFill>
+                  <a:srgbClr val="9F1239"/>
+                </a:solidFill>
+              </a:rPr>
+              <a:t>⚠  CHALLENGES</a:t>
+            </a:r>
+          </a:p>
+          <a:p>
+            <a:pPr algn="l">
+              <a:spcBef>
+                <a:spcPts val="400"/>
+              </a:spcBef>
+            </a:pPr>
+            <a:r>
+              <a:rPr lang="en-US" sz="3200" b="1" dirty="0">
+                <a:solidFill>
+                  <a:srgbClr val="0F172A"/>
+                </a:solidFill>
+              </a:rPr>
+              <a:t>It gets hard fast.</a:t>
+            </a:r>
+            <a:br>
+              <a:rPr lang="en-US" sz="3200" b="1" dirty="0">
+                <a:solidFill>
+                  <a:srgbClr val="0F172A"/>
+                </a:solidFill>
+              </a:rPr>
+            </a:br>
+            <a:endParaRPr lang="en-US" sz="3200" b="1" dirty="0">
+              <a:solidFill>
+                <a:srgbClr val="0F172A"/>
+              </a:solidFill>
+            </a:endParaRPr>
+          </a:p>
+          <a:p>
+            <a:pPr marL="228600" indent="-228600">
+              <a:spcBef>
+                <a:spcPts val="700"/>
+              </a:spcBef>
+              <a:buFont typeface="Arial"/>
+              <a:buChar char="•"/>
+            </a:pPr>
+            <a:r>
+              <a:rPr lang="en-US" sz="2000" b="1" dirty="0">
+                <a:solidFill>
+                  <a:srgbClr val="0F172A"/>
+                </a:solidFill>
+              </a:rPr>
+              <a:t>Prompt drift </a:t>
+            </a:r>
+            <a:r>
+              <a:rPr lang="en-US" dirty="0">
+                <a:solidFill>
+                  <a:srgbClr val="64748B"/>
+                </a:solidFill>
+              </a:rPr>
+              <a:t>as schema grows</a:t>
+            </a:r>
+          </a:p>
+          <a:p>
+            <a:pPr marL="228600" indent="-228600">
+              <a:spcBef>
+                <a:spcPts val="400"/>
+              </a:spcBef>
+              <a:buFont typeface="Arial"/>
+              <a:buChar char="•"/>
+            </a:pPr>
+            <a:r>
+              <a:rPr lang="en-US" sz="2000" b="1" dirty="0">
+                <a:solidFill>
+                  <a:srgbClr val="0F172A"/>
+                </a:solidFill>
+              </a:rPr>
+              <a:t>Ambiguous questions </a:t>
+            </a:r>
+            <a:r>
+              <a:rPr lang="en-US" dirty="0">
+                <a:solidFill>
+                  <a:srgbClr val="64748B"/>
+                </a:solidFill>
+              </a:rPr>
+              <a:t>("last month")</a:t>
+            </a:r>
+          </a:p>
+          <a:p>
+            <a:pPr marL="228600" indent="-228600">
+              <a:spcBef>
+                <a:spcPts val="400"/>
+              </a:spcBef>
+              <a:buFont typeface="Arial"/>
+              <a:buChar char="•"/>
+            </a:pPr>
+            <a:r>
+              <a:rPr lang="en-US" sz="2000" b="1" dirty="0">
+                <a:solidFill>
+                  <a:srgbClr val="0F172A"/>
+                </a:solidFill>
+              </a:rPr>
+              <a:t>Cost &amp; latency </a:t>
+            </a:r>
+            <a:r>
+              <a:rPr lang="en-US" dirty="0">
+                <a:solidFill>
+                  <a:srgbClr val="64748B"/>
+                </a:solidFill>
+              </a:rPr>
+              <a:t>per query</a:t>
+            </a:r>
+          </a:p>
+          <a:p>
+            <a:pPr marL="228600" indent="-228600">
+              <a:spcBef>
+                <a:spcPts val="400"/>
+              </a:spcBef>
+              <a:buFont typeface="Arial"/>
+              <a:buChar char="•"/>
+            </a:pPr>
+            <a:r>
+              <a:rPr lang="en-US" sz="2000" b="1" dirty="0">
+                <a:solidFill>
+                  <a:srgbClr val="0F172A"/>
+                </a:solidFill>
+              </a:rPr>
+              <a:t>Hallucinated columns </a:t>
+            </a:r>
+            <a:r>
+              <a:rPr lang="en-US" dirty="0">
+                <a:solidFill>
+                  <a:srgbClr val="64748B"/>
+                </a:solidFill>
+              </a:rPr>
+              <a:t>&amp; joins</a:t>
+            </a:r>
+          </a:p>
+          <a:p>
+            <a:pPr marL="228600" indent="-228600">
+              <a:spcBef>
+                <a:spcPts val="400"/>
+              </a:spcBef>
+              <a:buFont typeface="Arial"/>
+              <a:buChar char="•"/>
+            </a:pPr>
+            <a:r>
+              <a:rPr lang="en-US" sz="2000" b="1" dirty="0">
+                <a:solidFill>
+                  <a:srgbClr val="0F172A"/>
+                </a:solidFill>
+              </a:rPr>
+              <a:t>Permissions </a:t>
+            </a:r>
+            <a:r>
+              <a:rPr lang="en-US" dirty="0">
+                <a:solidFill>
+                  <a:srgbClr val="64748B"/>
+                </a:solidFill>
+              </a:rPr>
+              <a:t>&amp; row-level security</a:t>
+            </a:r>
+          </a:p>
+        </p:txBody>
+      </p:sp>
+      <p:sp>
+        <p:nvSpPr>
+          <p:cNvPr id="1501" name="BP"/>
+          <p:cNvSpPr/>
+          <p:nvPr/>
+        </p:nvSpPr>
+        <p:spPr>
+          <a:xfrm>
+            <a:off x="6222999" y="1804219"/>
+            <a:ext cx="5472471" cy="3859161"/>
+          </a:xfrm>
+          <a:prstGeom prst="roundRect">
+            <a:avLst>
+              <a:gd name="adj" fmla="val 6000"/>
+            </a:avLst>
+          </a:prstGeom>
+          <a:solidFill>
+            <a:srgbClr val="ECFDF5">
+              <a:alpha val="30000"/>
+            </a:srgbClr>
+          </a:solidFill>
+          <a:ln w="12700">
+            <a:solidFill>
+              <a:srgbClr val="A7F3D0"/>
+            </a:solidFill>
+          </a:ln>
+        </p:spPr>
+        <p:txBody>
+          <a:bodyPr wrap="square" lIns="240000" tIns="200000" rIns="240000" bIns="200000" anchor="t"/>
+          <a:lstStyle/>
+          <a:p>
+            <a:pPr algn="l"/>
+            <a:r>
+              <a:rPr lang="en-US" sz="2000" b="1" spc="300" dirty="0">
+                <a:solidFill>
+                  <a:srgbClr val="047857"/>
+                </a:solidFill>
+              </a:rPr>
+              <a:t>✓  BEST PRACTICES</a:t>
+            </a:r>
+          </a:p>
+          <a:p>
+            <a:pPr algn="l">
+              <a:spcBef>
+                <a:spcPts val="400"/>
+              </a:spcBef>
+            </a:pPr>
+            <a:r>
+              <a:rPr lang="en-US" sz="3200" b="1" dirty="0">
+                <a:solidFill>
+                  <a:srgbClr val="0F172A"/>
+                </a:solidFill>
+              </a:rPr>
+              <a:t>What actually works.</a:t>
+            </a:r>
+            <a:br>
+              <a:rPr lang="en-US" sz="3200" b="1" dirty="0">
+                <a:solidFill>
+                  <a:srgbClr val="0F172A"/>
+                </a:solidFill>
+              </a:rPr>
+            </a:br>
+            <a:endParaRPr lang="en-US" sz="3200" b="1" dirty="0">
+              <a:solidFill>
+                <a:srgbClr val="0F172A"/>
+              </a:solidFill>
+            </a:endParaRPr>
+          </a:p>
+          <a:p>
+            <a:pPr marL="228600" indent="-228600">
+              <a:spcBef>
+                <a:spcPts val="700"/>
+              </a:spcBef>
+              <a:buFont typeface="Arial"/>
+              <a:buChar char="✓"/>
+            </a:pPr>
+            <a:r>
+              <a:rPr lang="en-US" sz="2000" b="1" dirty="0">
+                <a:solidFill>
+                  <a:srgbClr val="0F172A"/>
+                </a:solidFill>
+              </a:rPr>
+              <a:t>Always validate </a:t>
+            </a:r>
+            <a:r>
+              <a:rPr lang="en-US" dirty="0">
+                <a:solidFill>
+                  <a:srgbClr val="475569"/>
+                </a:solidFill>
+              </a:rPr>
+              <a:t>— never trust raw SQL</a:t>
+            </a:r>
+          </a:p>
+          <a:p>
+            <a:pPr marL="228600" indent="-228600">
+              <a:spcBef>
+                <a:spcPts val="400"/>
+              </a:spcBef>
+              <a:buFont typeface="Arial"/>
+              <a:buChar char="✓"/>
+            </a:pPr>
+            <a:r>
+              <a:rPr lang="en-US" sz="2000" b="1" dirty="0">
+                <a:solidFill>
+                  <a:srgbClr val="0F172A"/>
+                </a:solidFill>
+              </a:rPr>
+              <a:t>Keep prompts strict </a:t>
+            </a:r>
+            <a:r>
+              <a:rPr lang="en-US" dirty="0">
+                <a:solidFill>
+                  <a:srgbClr val="475569"/>
+                </a:solidFill>
+              </a:rPr>
+              <a:t>&amp; versioned</a:t>
+            </a:r>
+          </a:p>
+          <a:p>
+            <a:pPr marL="228600" indent="-228600">
+              <a:spcBef>
+                <a:spcPts val="400"/>
+              </a:spcBef>
+              <a:buFont typeface="Arial"/>
+              <a:buChar char="✓"/>
+            </a:pPr>
+            <a:r>
+              <a:rPr lang="en-US" sz="2000" b="1" dirty="0">
+                <a:solidFill>
+                  <a:srgbClr val="0F172A"/>
+                </a:solidFill>
+              </a:rPr>
+              <a:t>Read-only DB user </a:t>
+            </a:r>
+            <a:r>
+              <a:rPr lang="en-US" dirty="0">
+                <a:solidFill>
+                  <a:srgbClr val="475569"/>
+                </a:solidFill>
+              </a:rPr>
+              <a:t>for the pipeline</a:t>
+            </a:r>
+          </a:p>
+          <a:p>
+            <a:pPr marL="228600" indent="-228600">
+              <a:spcBef>
+                <a:spcPts val="400"/>
+              </a:spcBef>
+              <a:buFont typeface="Arial"/>
+              <a:buChar char="✓"/>
+            </a:pPr>
+            <a:r>
+              <a:rPr lang="en-US" sz="2000" b="1" dirty="0">
+                <a:solidFill>
+                  <a:srgbClr val="0F172A"/>
+                </a:solidFill>
+              </a:rPr>
+              <a:t>Log everything </a:t>
+            </a:r>
+            <a:r>
+              <a:rPr lang="en-US" dirty="0">
+                <a:solidFill>
+                  <a:srgbClr val="475569"/>
+                </a:solidFill>
+              </a:rPr>
+              <a:t>— prompt, SQL, result</a:t>
+            </a:r>
+          </a:p>
+          <a:p>
+            <a:pPr marL="228600" indent="-228600">
+              <a:spcBef>
+                <a:spcPts val="400"/>
+              </a:spcBef>
+              <a:buFont typeface="Arial"/>
+              <a:buChar char="✓"/>
+            </a:pPr>
+            <a:r>
+              <a:rPr lang="en-US" sz="2000" b="1" dirty="0">
+                <a:solidFill>
+                  <a:srgbClr val="0F172A"/>
+                </a:solidFill>
+              </a:rPr>
+              <a:t>Start small </a:t>
+            </a:r>
+            <a:r>
+              <a:rPr lang="en-US" dirty="0">
+                <a:solidFill>
+                  <a:srgbClr val="475569"/>
+                </a:solidFill>
+              </a:rPr>
+              <a:t>— one table, one user</a:t>
+            </a:r>
+          </a:p>
+        </p:txBody>
+      </p:sp>
+    </p:spTree>
+    <p:extLst>
+      <p:ext uri="{BB962C8B-B14F-4D97-AF65-F5344CB8AC3E}">
+        <p14:creationId xmlns:p14="http://schemas.microsoft.com/office/powerpoint/2010/main" val="3349061554"/>
+      </p:ext>
+    </p:extLst>
+  </p:cSld>
+  <p:clrMapOvr>
+    <a:masterClrMapping/>
+  </p:clrMapOvr>
+</p:sld>
+</file>
+
+<file path=ppt/slides/slide21.xml><?xml version="1.0" encoding="utf-8"?>
+<p:sld xmlns:a="http://schemas.openxmlformats.org/drawingml/2006/main" xmlns:r="http://schemas.openxmlformats.org/officeDocument/2006/relationships" xmlns:p="http://schemas.openxmlformats.org/presentationml/2006/main" showMasterSp="0">
+  <p:cSld>
+    <p:bg>
+      <p:bgPr>
+        <a:solidFill>
+          <a:srgbClr val="020919"/>
+        </a:solidFill>
+        <a:effectLst/>
+      </p:bgPr>
+    </p:bg>
+    <p:spTree>
+      <p:nvGrpSpPr>
+        <p:cNvPr id="1" name="">
+          <a:extLst>
+            <a:ext uri="{FF2B5EF4-FFF2-40B4-BE49-F238E27FC236}">
+              <a16:creationId xmlns:a16="http://schemas.microsoft.com/office/drawing/2014/main" id="{BDECA93E-8B46-57AD-0523-5CCDB5BA5518}"/>
+            </a:ext>
+          </a:extLst>
+        </p:cNvPr>
+        <p:cNvGrpSpPr/>
+        <p:nvPr/>
+      </p:nvGrpSpPr>
+      <p:grpSpPr>
+        <a:xfrm>
+          <a:off x="0" y="0"/>
+          <a:ext cx="0" cy="0"/>
+          <a:chOff x="0" y="0"/>
+          <a:chExt cx="0" cy="0"/>
+        </a:xfrm>
+      </p:grpSpPr>
+      <p:pic>
+        <p:nvPicPr>
+          <p:cNvPr id="12" name="Picture 11">
+            <a:extLst>
+              <a:ext uri="{FF2B5EF4-FFF2-40B4-BE49-F238E27FC236}">
+                <a16:creationId xmlns:a16="http://schemas.microsoft.com/office/drawing/2014/main" id="{657C1D50-F13C-5DD2-73AB-E9EAE524400E}"/>
+              </a:ext>
+            </a:extLst>
+          </p:cNvPr>
+          <p:cNvPicPr>
+            <a:picLocks noChangeAspect="1"/>
+          </p:cNvPicPr>
+          <p:nvPr/>
+        </p:nvPicPr>
+        <p:blipFill>
+          <a:blip r:embed="rId3"/>
+          <a:stretch>
+            <a:fillRect/>
+          </a:stretch>
+        </p:blipFill>
+        <p:spPr>
+          <a:xfrm>
+            <a:off x="7380552" y="225829"/>
+            <a:ext cx="4238095" cy="3228571"/>
+          </a:xfrm>
+          <a:prstGeom prst="rect">
+            <a:avLst/>
+          </a:prstGeom>
+        </p:spPr>
+      </p:pic>
+      <p:pic>
+        <p:nvPicPr>
+          <p:cNvPr id="14" name="Picture 13">
+            <a:extLst>
+              <a:ext uri="{FF2B5EF4-FFF2-40B4-BE49-F238E27FC236}">
+                <a16:creationId xmlns:a16="http://schemas.microsoft.com/office/drawing/2014/main" id="{E22A15BF-AFD1-E6A5-97B5-01FBF3C7BFB2}"/>
+              </a:ext>
+            </a:extLst>
+          </p:cNvPr>
+          <p:cNvPicPr>
+            <a:picLocks noChangeAspect="1"/>
+          </p:cNvPicPr>
+          <p:nvPr/>
+        </p:nvPicPr>
+        <p:blipFill>
+          <a:blip r:embed="rId4"/>
+          <a:stretch>
+            <a:fillRect/>
+          </a:stretch>
+        </p:blipFill>
+        <p:spPr>
+          <a:xfrm>
+            <a:off x="6715809" y="3454400"/>
+            <a:ext cx="5476190" cy="514286"/>
+          </a:xfrm>
+          <a:prstGeom prst="rect">
+            <a:avLst/>
+          </a:prstGeom>
+        </p:spPr>
+      </p:pic>
+      <p:pic>
+        <p:nvPicPr>
+          <p:cNvPr id="16" name="Picture 15">
+            <a:extLst>
+              <a:ext uri="{FF2B5EF4-FFF2-40B4-BE49-F238E27FC236}">
+                <a16:creationId xmlns:a16="http://schemas.microsoft.com/office/drawing/2014/main" id="{D4407F9E-34A8-5A57-5B28-901201418475}"/>
+              </a:ext>
+            </a:extLst>
+          </p:cNvPr>
+          <p:cNvPicPr>
+            <a:picLocks noChangeAspect="1"/>
+          </p:cNvPicPr>
+          <p:nvPr/>
+        </p:nvPicPr>
+        <p:blipFill>
+          <a:blip r:embed="rId5"/>
+          <a:stretch>
+            <a:fillRect/>
+          </a:stretch>
+        </p:blipFill>
+        <p:spPr>
+          <a:xfrm>
+            <a:off x="7651980" y="3981810"/>
+            <a:ext cx="3695238" cy="2876190"/>
+          </a:xfrm>
+          <a:prstGeom prst="rect">
+            <a:avLst/>
+          </a:prstGeom>
+        </p:spPr>
+      </p:pic>
+      <p:pic>
+        <p:nvPicPr>
+          <p:cNvPr id="7" name="Picture 6">
+            <a:extLst>
+              <a:ext uri="{FF2B5EF4-FFF2-40B4-BE49-F238E27FC236}">
+                <a16:creationId xmlns:a16="http://schemas.microsoft.com/office/drawing/2014/main" id="{AE0D13DE-2AE0-6C30-7149-45A6F819DC18}"/>
+              </a:ext>
+            </a:extLst>
+          </p:cNvPr>
+          <p:cNvPicPr>
+            <a:picLocks noChangeAspect="1"/>
+          </p:cNvPicPr>
+          <p:nvPr/>
+        </p:nvPicPr>
+        <p:blipFill>
+          <a:blip r:embed="rId6"/>
+          <a:stretch>
+            <a:fillRect/>
+          </a:stretch>
+        </p:blipFill>
+        <p:spPr>
+          <a:xfrm>
+            <a:off x="0" y="0"/>
+            <a:ext cx="6763313" cy="6858000"/>
+          </a:xfrm>
+          <a:prstGeom prst="rect">
+            <a:avLst/>
+          </a:prstGeom>
+        </p:spPr>
+      </p:pic>
+    </p:spTree>
+    <p:extLst>
+      <p:ext uri="{BB962C8B-B14F-4D97-AF65-F5344CB8AC3E}">
+        <p14:creationId xmlns:p14="http://schemas.microsoft.com/office/powerpoint/2010/main" val="2991348774"/>
+      </p:ext>
+    </p:extLst>
+  </p:cSld>
+  <p:clrMapOvr>
+    <a:masterClrMapping/>
+  </p:clrMapOvr>
+</p:sld>
+</file>
+
+<file path=ppt/slides/slide22.xml><?xml version="1.0" encoding="utf-8"?>
+<p:sld xmlns:a="http://schemas.openxmlformats.org/drawingml/2006/main" xmlns:r="http://schemas.openxmlformats.org/officeDocument/2006/relationships" xmlns:p="http://schemas.openxmlformats.org/presentationml/2006/main">
+  <p:cSld>
+    <p:spTree>
+      <p:nvGrpSpPr>
+        <p:cNvPr id="1" name=""/>
+        <p:cNvGrpSpPr/>
+        <p:nvPr/>
+      </p:nvGrpSpPr>
+      <p:grpSpPr>
+        <a:xfrm>
+          <a:off x="0" y="0"/>
+          <a:ext cx="0" cy="0"/>
+          <a:chOff x="0" y="0"/>
+          <a:chExt cx="0" cy="0"/>
+        </a:xfrm>
+      </p:grpSpPr>
+      <p:sp>
+        <p:nvSpPr>
+          <p:cNvPr id="1600" name="BG"/>
+          <p:cNvSpPr/>
+          <p:nvPr/>
+        </p:nvSpPr>
+        <p:spPr>
+          <a:xfrm>
+            <a:off x="76200" y="0"/>
+            <a:ext cx="12115800" cy="6858000"/>
+          </a:xfrm>
+          <a:prstGeom prst="rect">
+            <a:avLst/>
+          </a:prstGeom>
+          <a:solidFill>
+            <a:srgbClr val="0F172A"/>
+          </a:solidFill>
+          <a:ln>
+            <a:noFill/>
+          </a:ln>
+        </p:spPr>
+        <p:txBody>
+          <a:bodyPr/>
+          <a:lstStyle/>
+          <a:p>
+            <a:endParaRPr lang="en-US" dirty="0"/>
+          </a:p>
+        </p:txBody>
+      </p:sp>
+      <p:sp>
+        <p:nvSpPr>
+          <p:cNvPr id="1601" name="Bar"/>
+          <p:cNvSpPr/>
+          <p:nvPr/>
+        </p:nvSpPr>
+        <p:spPr>
+          <a:xfrm>
+            <a:off x="0" y="1016000"/>
+            <a:ext cx="76200" cy="4826000"/>
+          </a:xfrm>
+          <a:prstGeom prst="rect">
+            <a:avLst/>
+          </a:prstGeom>
+          <a:solidFill>
+            <a:srgbClr val="22D3EE"/>
+          </a:solidFill>
+          <a:ln>
+            <a:noFill/>
+          </a:ln>
+        </p:spPr>
+        <p:txBody>
+          <a:bodyPr/>
+          <a:lstStyle/>
+          <a:p>
+            <a:endParaRPr lang="en-US"/>
+          </a:p>
+        </p:txBody>
+      </p:sp>
+      <p:sp>
+        <p:nvSpPr>
+          <p:cNvPr id="1603" name="Q"/>
+          <p:cNvSpPr txBox="1"/>
+          <p:nvPr/>
+        </p:nvSpPr>
+        <p:spPr>
+          <a:xfrm>
+            <a:off x="762000" y="411504"/>
+            <a:ext cx="10668000" cy="2355623"/>
+          </a:xfrm>
+          <a:prstGeom prst="rect">
+            <a:avLst/>
+          </a:prstGeom>
+          <a:noFill/>
+        </p:spPr>
+        <p:txBody>
+          <a:bodyPr wrap="square" anchor="t"/>
+          <a:lstStyle/>
+          <a:p>
+            <a:pPr algn="l">
+              <a:lnSpc>
+                <a:spcPct val="105000"/>
+              </a:lnSpc>
+            </a:pPr>
+            <a:r>
+              <a:rPr lang="en-US" sz="6000" b="1" dirty="0">
+                <a:solidFill>
+                  <a:srgbClr val="FFFFFF"/>
+                </a:solidFill>
+              </a:rPr>
+              <a:t>Start  simple</a:t>
+            </a:r>
+          </a:p>
+          <a:p>
+            <a:pPr algn="l">
+              <a:lnSpc>
+                <a:spcPct val="105000"/>
+              </a:lnSpc>
+            </a:pPr>
+            <a:r>
+              <a:rPr lang="en-US" sz="6000" b="1" dirty="0">
+                <a:solidFill>
+                  <a:srgbClr val="FFFFFF"/>
+                </a:solidFill>
+              </a:rPr>
+              <a:t>Then evolve into a </a:t>
+            </a:r>
+            <a:r>
+              <a:rPr lang="en-US" sz="6000" b="1" i="1" dirty="0">
+                <a:solidFill>
+                  <a:srgbClr val="22D3EE"/>
+                </a:solidFill>
+              </a:rPr>
+              <a:t>product.</a:t>
+            </a:r>
+          </a:p>
+        </p:txBody>
+      </p:sp>
+      <p:grpSp>
+        <p:nvGrpSpPr>
+          <p:cNvPr id="3" name="Group 2">
+            <a:extLst>
+              <a:ext uri="{FF2B5EF4-FFF2-40B4-BE49-F238E27FC236}">
+                <a16:creationId xmlns:a16="http://schemas.microsoft.com/office/drawing/2014/main" id="{C86DDA9F-DD43-59A2-0129-A027E314CDEB}"/>
+              </a:ext>
+            </a:extLst>
+          </p:cNvPr>
+          <p:cNvGrpSpPr/>
+          <p:nvPr/>
+        </p:nvGrpSpPr>
+        <p:grpSpPr>
+          <a:xfrm>
+            <a:off x="743378" y="2838101"/>
+            <a:ext cx="10124672" cy="1524000"/>
+            <a:chOff x="762000" y="3624943"/>
+            <a:chExt cx="6634951" cy="1524000"/>
+          </a:xfrm>
+        </p:grpSpPr>
+        <p:sp>
+          <p:nvSpPr>
+            <p:cNvPr id="1610" name="B"/>
+            <p:cNvSpPr/>
+            <p:nvPr/>
+          </p:nvSpPr>
+          <p:spPr>
+            <a:xfrm>
+              <a:off x="762000" y="3624943"/>
+              <a:ext cx="3773409" cy="1524000"/>
+            </a:xfrm>
+            <a:prstGeom prst="roundRect">
+              <a:avLst>
+                <a:gd name="adj" fmla="val 6000"/>
+              </a:avLst>
+            </a:prstGeom>
+            <a:solidFill>
+              <a:schemeClr val="bg1">
+                <a:lumMod val="50000"/>
+              </a:schemeClr>
+            </a:solidFill>
+            <a:ln>
+              <a:noFill/>
+            </a:ln>
+          </p:spPr>
+          <p:txBody>
+            <a:bodyPr wrap="square" lIns="200000" tIns="200000" rIns="200000" bIns="200000" anchor="t"/>
+            <a:lstStyle/>
+            <a:p>
+              <a:pPr algn="l">
+                <a:spcBef>
+                  <a:spcPts val="300"/>
+                </a:spcBef>
+              </a:pPr>
+              <a:r>
+                <a:rPr lang="en-US" sz="2700" dirty="0">
+                  <a:solidFill>
+                    <a:srgbClr val="FFFFFF"/>
+                  </a:solidFill>
+                </a:rPr>
+                <a:t>Until now we learnt programming languages to talk with computers</a:t>
+              </a:r>
+              <a:endParaRPr lang="en-US" sz="2700" dirty="0">
+                <a:solidFill>
+                  <a:srgbClr val="94A3B8"/>
+                </a:solidFill>
+              </a:endParaRPr>
+            </a:p>
+          </p:txBody>
+        </p:sp>
+        <p:sp>
+          <p:nvSpPr>
+            <p:cNvPr id="1611" name="B"/>
+            <p:cNvSpPr/>
+            <p:nvPr/>
+          </p:nvSpPr>
+          <p:spPr>
+            <a:xfrm>
+              <a:off x="4371599" y="3624943"/>
+              <a:ext cx="3025352" cy="1524000"/>
+            </a:xfrm>
+            <a:prstGeom prst="roundRect">
+              <a:avLst>
+                <a:gd name="adj" fmla="val 6000"/>
+              </a:avLst>
+            </a:prstGeom>
+            <a:solidFill>
+              <a:schemeClr val="bg2"/>
+            </a:solidFill>
+            <a:ln>
+              <a:noFill/>
+            </a:ln>
+          </p:spPr>
+          <p:txBody>
+            <a:bodyPr wrap="square" lIns="200000" tIns="200000" rIns="200000" bIns="200000" anchor="t"/>
+            <a:lstStyle/>
+            <a:p>
+              <a:pPr algn="l"/>
+              <a:r>
+                <a:rPr lang="en-US" sz="2800" b="1" spc="300" dirty="0">
+                  <a:solidFill>
+                    <a:srgbClr val="1E293B"/>
+                  </a:solidFill>
+                </a:rPr>
+                <a:t>now they learnt</a:t>
+              </a:r>
+              <a:br>
+                <a:rPr lang="en-US" sz="2800" b="1" spc="300" dirty="0">
+                  <a:solidFill>
+                    <a:srgbClr val="1E293B"/>
+                  </a:solidFill>
+                </a:rPr>
+              </a:br>
+              <a:r>
+                <a:rPr lang="en-US" sz="2800" b="1" spc="300" dirty="0">
+                  <a:solidFill>
+                    <a:srgbClr val="1E293B"/>
+                  </a:solidFill>
+                </a:rPr>
+                <a:t>our language</a:t>
+              </a:r>
+              <a:endParaRPr lang="en-US" sz="2800" b="1" dirty="0">
+                <a:solidFill>
+                  <a:srgbClr val="1E293B"/>
+                </a:solidFill>
+              </a:endParaRPr>
+            </a:p>
+          </p:txBody>
+        </p:sp>
+      </p:grpSp>
+      <p:pic>
+        <p:nvPicPr>
+          <p:cNvPr id="5" name="Picture 4">
+            <a:extLst>
+              <a:ext uri="{FF2B5EF4-FFF2-40B4-BE49-F238E27FC236}">
+                <a16:creationId xmlns:a16="http://schemas.microsoft.com/office/drawing/2014/main" id="{95D01CF5-3779-C47E-5AA7-7E0126629325}"/>
+              </a:ext>
+            </a:extLst>
+          </p:cNvPr>
+          <p:cNvPicPr>
+            <a:picLocks noChangeAspect="1"/>
+          </p:cNvPicPr>
+          <p:nvPr/>
+        </p:nvPicPr>
+        <p:blipFill>
+          <a:blip r:embed="rId3"/>
+          <a:stretch>
+            <a:fillRect/>
+          </a:stretch>
+        </p:blipFill>
+        <p:spPr>
+          <a:xfrm>
+            <a:off x="9251318" y="4787580"/>
+            <a:ext cx="1735996" cy="1751683"/>
+          </a:xfrm>
+          <a:prstGeom prst="rect">
+            <a:avLst/>
+          </a:prstGeom>
+        </p:spPr>
+      </p:pic>
+      <p:sp>
+        <p:nvSpPr>
+          <p:cNvPr id="7" name="TextBox 6">
+            <a:extLst>
+              <a:ext uri="{FF2B5EF4-FFF2-40B4-BE49-F238E27FC236}">
+                <a16:creationId xmlns:a16="http://schemas.microsoft.com/office/drawing/2014/main" id="{ADAC7983-4AF8-14A4-A44D-2BB81412E54E}"/>
+              </a:ext>
+            </a:extLst>
+          </p:cNvPr>
+          <p:cNvSpPr txBox="1"/>
+          <p:nvPr/>
+        </p:nvSpPr>
+        <p:spPr>
+          <a:xfrm>
+            <a:off x="5884853" y="5092994"/>
+            <a:ext cx="2422352" cy="1200329"/>
+          </a:xfrm>
+          <a:prstGeom prst="rect">
+            <a:avLst/>
+          </a:prstGeom>
+          <a:noFill/>
+        </p:spPr>
+        <p:txBody>
+          <a:bodyPr wrap="square">
+            <a:spAutoFit/>
+          </a:bodyPr>
+          <a:lstStyle/>
+          <a:p>
+            <a:pPr algn="r"/>
+            <a:r>
+              <a:rPr lang="en-US" sz="2400" i="1" dirty="0">
+                <a:solidFill>
+                  <a:srgbClr val="94A3B8"/>
+                </a:solidFill>
+              </a:rPr>
+              <a:t>Download</a:t>
+            </a:r>
+            <a:br>
+              <a:rPr lang="en-US" sz="2400" i="1" dirty="0">
+                <a:solidFill>
+                  <a:srgbClr val="94A3B8"/>
+                </a:solidFill>
+              </a:rPr>
+            </a:br>
+            <a:r>
+              <a:rPr lang="en-US" sz="2400" i="1" dirty="0">
+                <a:solidFill>
+                  <a:srgbClr val="94A3B8"/>
+                </a:solidFill>
+              </a:rPr>
+              <a:t>Presentation</a:t>
+            </a:r>
+            <a:br>
+              <a:rPr lang="en-US" sz="2400" i="1" dirty="0">
+                <a:solidFill>
+                  <a:srgbClr val="94A3B8"/>
+                </a:solidFill>
+              </a:rPr>
+            </a:br>
+            <a:r>
+              <a:rPr lang="en-US" sz="2400" i="1" dirty="0">
+                <a:solidFill>
+                  <a:srgbClr val="94A3B8"/>
+                </a:solidFill>
+              </a:rPr>
+              <a:t>Demo projects</a:t>
+            </a:r>
+            <a:endParaRPr lang="tr-TR" sz="2400" i="1" dirty="0"/>
+          </a:p>
+        </p:txBody>
+      </p:sp>
+      <p:cxnSp>
+        <p:nvCxnSpPr>
+          <p:cNvPr id="9" name="Connector: Curved 8">
+            <a:extLst>
+              <a:ext uri="{FF2B5EF4-FFF2-40B4-BE49-F238E27FC236}">
+                <a16:creationId xmlns:a16="http://schemas.microsoft.com/office/drawing/2014/main" id="{E5D101DB-A4D3-4114-CE0B-9DA7CACA4509}"/>
+              </a:ext>
+            </a:extLst>
+          </p:cNvPr>
+          <p:cNvCxnSpPr>
+            <a:cxnSpLocks/>
+          </p:cNvCxnSpPr>
+          <p:nvPr/>
+        </p:nvCxnSpPr>
+        <p:spPr>
+          <a:xfrm flipV="1">
+            <a:off x="8251418" y="5192160"/>
+            <a:ext cx="957896" cy="649840"/>
+          </a:xfrm>
+          <a:prstGeom prst="curvedConnector3">
+            <a:avLst/>
+          </a:prstGeom>
+          <a:ln w="76200">
+            <a:tailEnd type="triangle"/>
+          </a:ln>
+        </p:spPr>
+        <p:style>
+          <a:lnRef idx="2">
+            <a:schemeClr val="accent1"/>
+          </a:lnRef>
+          <a:fillRef idx="0">
+            <a:schemeClr val="accent1"/>
+          </a:fillRef>
+          <a:effectRef idx="1">
+            <a:schemeClr val="accent1"/>
+          </a:effectRef>
+          <a:fontRef idx="minor">
+            <a:schemeClr val="tx1"/>
+          </a:fontRef>
+        </p:style>
+      </p:cxnSp>
+      <p:sp>
+        <p:nvSpPr>
+          <p:cNvPr id="2" name="SpeakerName">
+            <a:extLst>
+              <a:ext uri="{FF2B5EF4-FFF2-40B4-BE49-F238E27FC236}">
+                <a16:creationId xmlns:a16="http://schemas.microsoft.com/office/drawing/2014/main" id="{B67F7C9D-3984-DFAA-4F75-34BC31E06746}"/>
+              </a:ext>
+            </a:extLst>
+          </p:cNvPr>
+          <p:cNvSpPr txBox="1"/>
+          <p:nvPr/>
+        </p:nvSpPr>
+        <p:spPr>
+          <a:xfrm>
+            <a:off x="778693" y="5243714"/>
+            <a:ext cx="4094385" cy="1153029"/>
+          </a:xfrm>
+          <a:prstGeom prst="rect">
+            <a:avLst/>
+          </a:prstGeom>
+          <a:noFill/>
+        </p:spPr>
+        <p:txBody>
+          <a:bodyPr wrap="square" lIns="0" tIns="0" rIns="0" bIns="0" anchor="t"/>
+          <a:lstStyle/>
+          <a:p>
+            <a:pPr algn="l"/>
+            <a:r>
+              <a:rPr lang="en-US" sz="4000" b="1" dirty="0">
+                <a:solidFill>
+                  <a:schemeClr val="bg1"/>
+                </a:solidFill>
+              </a:rPr>
+              <a:t>Alper Ebicoglu</a:t>
+            </a:r>
+          </a:p>
+          <a:p>
+            <a:r>
+              <a:rPr lang="en-US" sz="2800" dirty="0">
+                <a:solidFill>
+                  <a:schemeClr val="bg1"/>
+                </a:solidFill>
+              </a:rPr>
+              <a:t>x.com/</a:t>
+            </a:r>
+            <a:r>
+              <a:rPr lang="en-US" sz="2800" dirty="0">
+                <a:solidFill>
+                  <a:srgbClr val="22D3EE"/>
+                </a:solidFill>
+              </a:rPr>
+              <a:t>alperebicoglu</a:t>
+            </a:r>
+          </a:p>
+        </p:txBody>
+      </p:sp>
+      <p:sp>
+        <p:nvSpPr>
+          <p:cNvPr id="13" name="Rectangle: Rounded Corners 12">
+            <a:extLst>
+              <a:ext uri="{FF2B5EF4-FFF2-40B4-BE49-F238E27FC236}">
+                <a16:creationId xmlns:a16="http://schemas.microsoft.com/office/drawing/2014/main" id="{17516DB6-9F60-477D-8214-F1524AF1287A}"/>
+              </a:ext>
+            </a:extLst>
+          </p:cNvPr>
+          <p:cNvSpPr/>
+          <p:nvPr/>
+        </p:nvSpPr>
+        <p:spPr>
+          <a:xfrm>
+            <a:off x="2897136" y="449382"/>
+            <a:ext cx="2826769" cy="999408"/>
+          </a:xfrm>
+          <a:prstGeom prst="roundRect">
+            <a:avLst/>
+          </a:prstGeom>
+          <a:noFill/>
+          <a:ln w="9525" cap="flat" cmpd="sng" algn="ctr">
+            <a:solidFill>
+              <a:schemeClr val="accent1"/>
+            </a:solidFill>
+            <a:prstDash val="solid"/>
+            <a:round/>
+            <a:headEnd type="none" w="med" len="med"/>
+            <a:tailEnd type="none" w="med" len="med"/>
+          </a:ln>
+        </p:spPr>
+        <p:style>
+          <a:lnRef idx="0">
+            <a:scrgbClr r="0" g="0" b="0"/>
+          </a:lnRef>
+          <a:fillRef idx="0">
+            <a:scrgbClr r="0" g="0" b="0"/>
+          </a:fillRef>
+          <a:effectRef idx="0">
+            <a:scrgbClr r="0" g="0" b="0"/>
+          </a:effectRef>
+          <a:fontRef idx="minor">
+            <a:schemeClr val="accent1"/>
+          </a:fontRef>
+        </p:style>
+        <p:txBody>
+          <a:bodyPr rtlCol="0" anchor="ctr"/>
+          <a:lstStyle/>
+          <a:p>
+            <a:pPr algn="ctr"/>
+            <a:endParaRPr lang="tr-TR" dirty="0"/>
+          </a:p>
+        </p:txBody>
+      </p:sp>
+      <p:sp>
+        <p:nvSpPr>
+          <p:cNvPr id="6" name="Rectangle: Rounded Corners 5">
+            <a:extLst>
+              <a:ext uri="{FF2B5EF4-FFF2-40B4-BE49-F238E27FC236}">
+                <a16:creationId xmlns:a16="http://schemas.microsoft.com/office/drawing/2014/main" id="{13B697C2-CD1F-7168-5C03-4D94888C954B}"/>
+              </a:ext>
+            </a:extLst>
+          </p:cNvPr>
+          <p:cNvSpPr/>
+          <p:nvPr/>
+        </p:nvSpPr>
+        <p:spPr>
+          <a:xfrm>
+            <a:off x="653927" y="5105523"/>
+            <a:ext cx="3953699" cy="1433739"/>
+          </a:xfrm>
+          <a:prstGeom prst="roundRect">
+            <a:avLst/>
+          </a:prstGeom>
+          <a:noFill/>
+          <a:ln w="9525" cap="flat" cmpd="sng" algn="ctr">
+            <a:solidFill>
+              <a:schemeClr val="accent1"/>
+            </a:solidFill>
+            <a:prstDash val="solid"/>
+            <a:round/>
+            <a:headEnd type="none" w="med" len="med"/>
+            <a:tailEnd type="none" w="med" len="med"/>
+          </a:ln>
+        </p:spPr>
+        <p:style>
+          <a:lnRef idx="0">
+            <a:scrgbClr r="0" g="0" b="0"/>
+          </a:lnRef>
+          <a:fillRef idx="0">
+            <a:scrgbClr r="0" g="0" b="0"/>
+          </a:fillRef>
+          <a:effectRef idx="0">
+            <a:scrgbClr r="0" g="0" b="0"/>
+          </a:effectRef>
+          <a:fontRef idx="minor">
+            <a:schemeClr val="accent1"/>
+          </a:fontRef>
+        </p:style>
+        <p:txBody>
+          <a:bodyPr rtlCol="0" anchor="ctr"/>
+          <a:lstStyle/>
+          <a:p>
+            <a:pPr algn="ctr"/>
+            <a:endParaRPr lang="tr-TR" dirty="0"/>
+          </a:p>
+        </p:txBody>
+      </p:sp>
+      <p:sp>
+        <p:nvSpPr>
+          <p:cNvPr id="8" name="Rectangle: Rounded Corners 7">
+            <a:extLst>
+              <a:ext uri="{FF2B5EF4-FFF2-40B4-BE49-F238E27FC236}">
+                <a16:creationId xmlns:a16="http://schemas.microsoft.com/office/drawing/2014/main" id="{3D0AE1AA-7E4C-A120-28E1-6595708F20F9}"/>
+              </a:ext>
+            </a:extLst>
+          </p:cNvPr>
+          <p:cNvSpPr/>
+          <p:nvPr/>
+        </p:nvSpPr>
+        <p:spPr>
+          <a:xfrm>
+            <a:off x="5884853" y="4643252"/>
+            <a:ext cx="5277952" cy="1995054"/>
+          </a:xfrm>
+          <a:prstGeom prst="roundRect">
+            <a:avLst/>
+          </a:prstGeom>
+          <a:noFill/>
+          <a:ln w="9525" cap="flat" cmpd="sng" algn="ctr">
+            <a:solidFill>
+              <a:schemeClr val="accent1"/>
+            </a:solidFill>
+            <a:prstDash val="solid"/>
+            <a:round/>
+            <a:headEnd type="none" w="med" len="med"/>
+            <a:tailEnd type="none" w="med" len="med"/>
+          </a:ln>
+        </p:spPr>
+        <p:style>
+          <a:lnRef idx="0">
+            <a:scrgbClr r="0" g="0" b="0"/>
+          </a:lnRef>
+          <a:fillRef idx="0">
+            <a:scrgbClr r="0" g="0" b="0"/>
+          </a:fillRef>
+          <a:effectRef idx="0">
+            <a:scrgbClr r="0" g="0" b="0"/>
+          </a:effectRef>
+          <a:fontRef idx="minor">
+            <a:schemeClr val="accent1"/>
+          </a:fontRef>
+        </p:style>
+        <p:txBody>
+          <a:bodyPr rtlCol="0" anchor="ctr"/>
+          <a:lstStyle/>
+          <a:p>
+            <a:pPr algn="ctr"/>
+            <a:endParaRPr lang="tr-TR" dirty="0"/>
+          </a:p>
+        </p:txBody>
+      </p:sp>
+    </p:spTree>
+    <p:extLst>
+      <p:ext uri="{BB962C8B-B14F-4D97-AF65-F5344CB8AC3E}">
+        <p14:creationId xmlns:p14="http://schemas.microsoft.com/office/powerpoint/2010/main" val="3469954536"/>
+      </p:ext>
+    </p:extLst>
+  </p:cSld>
+  <p:clrMapOvr>
+    <a:masterClrMapping/>
+  </p:clrMapOvr>
+</p:sld>
+</file>
+
+<file path=ppt/slides/slide3.xml><?xml version="1.0" encoding="utf-8"?>
+<p:sld xmlns:a="http://schemas.openxmlformats.org/drawingml/2006/main" xmlns:r="http://schemas.openxmlformats.org/officeDocument/2006/relationships" xmlns:p="http://schemas.openxmlformats.org/presentationml/2006/main" showMasterSp="0">
+  <p:cSld>
+    <p:bg>
+      <p:bgPr>
+        <a:pattFill prst="pct5">
+          <a:fgClr>
+            <a:srgbClr val="FAFBFC"/>
+          </a:fgClr>
+          <a:bgClr>
+            <a:schemeClr val="bg1"/>
+          </a:bgClr>
+        </a:pattFill>
+        <a:effectLst/>
+      </p:bgPr>
+    </p:bg>
+    <p:spTree>
+      <p:nvGrpSpPr>
+        <p:cNvPr id="1" name=""/>
+        <p:cNvGrpSpPr/>
+        <p:nvPr/>
+      </p:nvGrpSpPr>
+      <p:grpSpPr>
+        <a:xfrm>
+          <a:off x="0" y="0"/>
+          <a:ext cx="0" cy="0"/>
+          <a:chOff x="0" y="0"/>
+          <a:chExt cx="0" cy="0"/>
+        </a:xfrm>
+      </p:grpSpPr>
+      <p:pic>
+        <p:nvPicPr>
+          <p:cNvPr id="3" name="Picture 2">
+            <a:extLst>
+              <a:ext uri="{FF2B5EF4-FFF2-40B4-BE49-F238E27FC236}">
+                <a16:creationId xmlns:a16="http://schemas.microsoft.com/office/drawing/2014/main" id="{D8D5AF6E-89B6-877C-7960-D5F8849F6877}"/>
+              </a:ext>
+            </a:extLst>
+          </p:cNvPr>
+          <p:cNvPicPr>
+            <a:picLocks noChangeAspect="1"/>
+          </p:cNvPicPr>
+          <p:nvPr/>
+        </p:nvPicPr>
+        <p:blipFill>
+          <a:blip r:embed="rId3"/>
+          <a:srcRect l="9172" t="6988" r="8671" b="58988"/>
+          <a:stretch>
+            <a:fillRect/>
+          </a:stretch>
+        </p:blipFill>
+        <p:spPr>
+          <a:xfrm>
+            <a:off x="523415" y="1828800"/>
+            <a:ext cx="11051757" cy="2875631"/>
+          </a:xfrm>
+          <a:prstGeom prst="rect">
+            <a:avLst/>
+          </a:prstGeom>
+        </p:spPr>
+      </p:pic>
+    </p:spTree>
+    <p:extLst>
+      <p:ext uri="{BB962C8B-B14F-4D97-AF65-F5344CB8AC3E}">
+        <p14:creationId xmlns:p14="http://schemas.microsoft.com/office/powerpoint/2010/main" val="1413440985"/>
+      </p:ext>
+    </p:extLst>
+  </p:cSld>
+  <p:clrMapOvr>
+    <a:masterClrMapping/>
+  </p:clrMapOvr>
+</p:sld>
+</file>
+
 <file path=ppt/slides/slide4.xml><?xml version="1.0" encoding="utf-8"?>
 <p:sld xmlns:a="http://schemas.openxmlformats.org/drawingml/2006/main" xmlns:r="http://schemas.openxmlformats.org/officeDocument/2006/relationships" xmlns:p="http://schemas.openxmlformats.org/presentationml/2006/main">
   <p:cSld>
@@ -15783,6 +15634,74 @@
           </a:p>
         </p:txBody>
       </p:sp>
+      <p:sp>
+        <p:nvSpPr>
+          <p:cNvPr id="4" name="Arr1">
+            <a:extLst>
+              <a:ext uri="{FF2B5EF4-FFF2-40B4-BE49-F238E27FC236}">
+                <a16:creationId xmlns:a16="http://schemas.microsoft.com/office/drawing/2014/main" id="{CC055861-FBC1-3080-75B8-5020F7F83ED8}"/>
+              </a:ext>
+            </a:extLst>
+          </p:cNvPr>
+          <p:cNvSpPr/>
+          <p:nvPr/>
+        </p:nvSpPr>
+        <p:spPr>
+          <a:xfrm>
+            <a:off x="7505700" y="5308600"/>
+            <a:ext cx="520700" cy="419099"/>
+          </a:xfrm>
+          <a:prstGeom prst="rightArrow">
+            <a:avLst>
+              <a:gd name="adj1" fmla="val 50000"/>
+              <a:gd name="adj2" fmla="val 50000"/>
+            </a:avLst>
+          </a:prstGeom>
+          <a:solidFill>
+            <a:srgbClr val="CBD5E1"/>
+          </a:solidFill>
+          <a:ln>
+            <a:noFill/>
+          </a:ln>
+        </p:spPr>
+        <p:txBody>
+          <a:bodyPr/>
+          <a:lstStyle/>
+          <a:p>
+            <a:endParaRPr lang="en-US"/>
+          </a:p>
+        </p:txBody>
+      </p:sp>
+      <p:pic>
+        <p:nvPicPr>
+          <p:cNvPr id="7" name="Picture 6">
+            <a:extLst>
+              <a:ext uri="{FF2B5EF4-FFF2-40B4-BE49-F238E27FC236}">
+                <a16:creationId xmlns:a16="http://schemas.microsoft.com/office/drawing/2014/main" id="{1B3C8CEA-024D-81D9-D37C-BF326147FBB9}"/>
+              </a:ext>
+            </a:extLst>
+          </p:cNvPr>
+          <p:cNvPicPr>
+            <a:picLocks noChangeAspect="1"/>
+          </p:cNvPicPr>
+          <p:nvPr/>
+        </p:nvPicPr>
+        <p:blipFill>
+          <a:blip r:embed="rId3"/>
+          <a:stretch>
+            <a:fillRect/>
+          </a:stretch>
+        </p:blipFill>
+        <p:spPr>
+          <a:xfrm>
+            <a:off x="5725297" y="417260"/>
+            <a:ext cx="5969000" cy="1284196"/>
+          </a:xfrm>
+          <a:prstGeom prst="rect">
+            <a:avLst/>
+          </a:prstGeom>
+        </p:spPr>
+      </p:pic>
     </p:spTree>
     <p:extLst>
       <p:ext uri="{BB962C8B-B14F-4D97-AF65-F5344CB8AC3E}">
@@ -15793,6 +15712,130 @@
   <p:clrMapOvr>
     <a:masterClrMapping/>
   </p:clrMapOvr>
+  <p:timing>
+    <p:tnLst>
+      <p:par>
+        <p:cTn id="1" dur="indefinite" restart="never" nodeType="tmRoot">
+          <p:childTnLst>
+            <p:seq concurrent="1" nextAc="seek">
+              <p:cTn id="2" dur="indefinite" nodeType="mainSeq">
+                <p:childTnLst>
+                  <p:par>
+                    <p:cTn id="3" fill="hold">
+                      <p:stCondLst>
+                        <p:cond delay="indefinite"/>
+                        <p:cond evt="onBegin" delay="0">
+                          <p:tn val="2"/>
+                        </p:cond>
+                      </p:stCondLst>
+                      <p:childTnLst>
+                        <p:par>
+                          <p:cTn id="4" fill="hold">
+                            <p:stCondLst>
+                              <p:cond delay="0"/>
+                            </p:stCondLst>
+                            <p:childTnLst>
+                              <p:par>
+                                <p:cTn id="5" presetID="2" presetClass="entr" presetSubtype="2" fill="hold" nodeType="withEffect">
+                                  <p:stCondLst>
+                                    <p:cond delay="10000"/>
+                                  </p:stCondLst>
+                                  <p:childTnLst>
+                                    <p:set>
+                                      <p:cBhvr>
+                                        <p:cTn id="6" dur="1" fill="hold">
+                                          <p:stCondLst>
+                                            <p:cond delay="0"/>
+                                          </p:stCondLst>
+                                        </p:cTn>
+                                        <p:tgtEl>
+                                          <p:spTgt spid="7"/>
+                                        </p:tgtEl>
+                                        <p:attrNameLst>
+                                          <p:attrName>style.visibility</p:attrName>
+                                        </p:attrNameLst>
+                                      </p:cBhvr>
+                                      <p:to>
+                                        <p:strVal val="visible"/>
+                                      </p:to>
+                                    </p:set>
+                                    <p:anim calcmode="lin" valueType="num">
+                                      <p:cBhvr additive="base">
+                                        <p:cTn id="7" dur="1000" fill="hold"/>
+                                        <p:tgtEl>
+                                          <p:spTgt spid="7"/>
+                                        </p:tgtEl>
+                                        <p:attrNameLst>
+                                          <p:attrName>ppt_x</p:attrName>
+                                        </p:attrNameLst>
+                                      </p:cBhvr>
+                                      <p:tavLst>
+                                        <p:tav tm="0">
+                                          <p:val>
+                                            <p:strVal val="1+#ppt_w/2"/>
+                                          </p:val>
+                                        </p:tav>
+                                        <p:tav tm="100000">
+                                          <p:val>
+                                            <p:strVal val="#ppt_x"/>
+                                          </p:val>
+                                        </p:tav>
+                                      </p:tavLst>
+                                    </p:anim>
+                                    <p:anim calcmode="lin" valueType="num">
+                                      <p:cBhvr additive="base">
+                                        <p:cTn id="8" dur="1000" fill="hold"/>
+                                        <p:tgtEl>
+                                          <p:spTgt spid="7"/>
+                                        </p:tgtEl>
+                                        <p:attrNameLst>
+                                          <p:attrName>ppt_y</p:attrName>
+                                        </p:attrNameLst>
+                                      </p:cBhvr>
+                                      <p:tavLst>
+                                        <p:tav tm="0">
+                                          <p:val>
+                                            <p:strVal val="#ppt_y"/>
+                                          </p:val>
+                                        </p:tav>
+                                        <p:tav tm="100000">
+                                          <p:val>
+                                            <p:strVal val="#ppt_y"/>
+                                          </p:val>
+                                        </p:tav>
+                                      </p:tavLst>
+                                    </p:anim>
+                                  </p:childTnLst>
+                                </p:cTn>
+                              </p:par>
+                            </p:childTnLst>
+                          </p:cTn>
+                        </p:par>
+                      </p:childTnLst>
+                    </p:cTn>
+                  </p:par>
+                </p:childTnLst>
+              </p:cTn>
+              <p:prevCondLst>
+                <p:cond evt="onPrev" delay="0">
+                  <p:tgtEl>
+                    <p:sldTgt/>
+                  </p:tgtEl>
+                </p:cond>
+              </p:prevCondLst>
+              <p:nextCondLst>
+                <p:cond evt="onNext" delay="0">
+                  <p:tgtEl>
+                    <p:sldTgt/>
+                  </p:tgtEl>
+                </p:cond>
+              </p:nextCondLst>
+            </p:seq>
+          </p:childTnLst>
+        </p:cTn>
+      </p:par>
+    </p:tnLst>
+  </p:timing>
 </p:sld>
 </file>
 
@@ -15861,8 +15904,8 @@
         </p:nvSpPr>
         <p:spPr>
           <a:xfrm>
-            <a:off x="635000" y="1466850"/>
-            <a:ext cx="5334000" cy="4438650"/>
+            <a:off x="406400" y="1479550"/>
+            <a:ext cx="6667500" cy="4035600"/>
           </a:xfrm>
           <a:prstGeom prst="roundRect">
             <a:avLst>
@@ -15872,26 +15915,15 @@
           <a:solidFill>
             <a:srgbClr val="FFFFFF"/>
           </a:solidFill>
-          <a:ln w="12700">
+          <a:ln w="6350">
             <a:solidFill>
-              <a:srgbClr val="E2E8F0"/>
+              <a:srgbClr val="0F172A"/>
             </a:solidFill>
           </a:ln>
         </p:spPr>
         <p:txBody>
           <a:bodyPr wrap="square" lIns="240000" tIns="200000" rIns="240000" bIns="200000" anchor="t"/>
           <a:lstStyle/>
-          <a:p>
-            <a:pPr algn="l"/>
-            <a:r>
-              <a:rPr lang="en-US" b="1" spc="300" dirty="0">
-                <a:solidFill>
-                  <a:srgbClr val="0891B2"/>
-                </a:solidFill>
-              </a:rPr>
-              <a:t>STEP 1  ·  SCHEMA</a:t>
-            </a:r>
-          </a:p>
           <a:p>
             <a:pPr algn="l">
               <a:spcBef>
@@ -15899,12 +15931,12 @@
               </a:spcBef>
             </a:pPr>
             <a:r>
-              <a:rPr lang="en-US" sz="2800" b="1" dirty="0">
-                <a:solidFill>
-                  <a:srgbClr val="0F172A"/>
-                </a:solidFill>
-              </a:rPr>
-              <a:t>Teach the LLM your data</a:t>
+              <a:rPr lang="en-US" sz="3200" b="1" dirty="0">
+                <a:solidFill>
+                  <a:srgbClr val="0891B2"/>
+                </a:solidFill>
+              </a:rPr>
+              <a:t>TEACH THE AI YOUR DATA</a:t>
             </a:r>
           </a:p>
           <a:p>
@@ -15916,7 +15948,7 @@
               <a:buChar char="•"/>
             </a:pPr>
             <a:r>
-              <a:rPr lang="en-US" sz="2400" dirty="0">
+              <a:rPr lang="en-US" sz="2800" dirty="0">
                 <a:solidFill>
                   <a:srgbClr val="334155"/>
                 </a:solidFill>
@@ -15933,7 +15965,7 @@
               <a:buChar char="•"/>
             </a:pPr>
             <a:r>
-              <a:rPr lang="en-US" sz="2400" dirty="0">
+              <a:rPr lang="en-US" sz="2800" dirty="0">
                 <a:solidFill>
                   <a:srgbClr val="334155"/>
                 </a:solidFill>
@@ -15950,7 +15982,7 @@
               <a:buChar char="•"/>
             </a:pPr>
             <a:r>
-              <a:rPr lang="en-US" sz="2400" dirty="0">
+              <a:rPr lang="en-US" sz="2800" dirty="0">
                 <a:solidFill>
                   <a:srgbClr val="334155"/>
                 </a:solidFill>
@@ -15967,7 +15999,7 @@
               <a:buChar char="•"/>
             </a:pPr>
             <a:r>
-              <a:rPr lang="en-US" sz="2400" dirty="0">
+              <a:rPr lang="en-US" sz="2800" dirty="0">
                 <a:solidFill>
                   <a:srgbClr val="334155"/>
                 </a:solidFill>
@@ -15984,12 +16016,20 @@
               <a:buChar char="•"/>
             </a:pPr>
             <a:r>
-              <a:rPr lang="en-US" sz="2400" dirty="0">
+              <a:rPr lang="en-US" sz="2800" dirty="0">
                 <a:solidFill>
                   <a:srgbClr val="334155"/>
                 </a:solidFill>
               </a:rPr>
-              <a:t>Optional: sample values</a:t>
+              <a:t>Optional: </a:t>
+            </a:r>
+            <a:r>
+              <a:rPr lang="en-US" sz="2800" i="1" dirty="0">
+                <a:solidFill>
+                  <a:srgbClr val="334155"/>
+                </a:solidFill>
+              </a:rPr>
+              <a:t>sample values</a:t>
             </a:r>
           </a:p>
           <a:p>
@@ -16001,41 +16041,34 @@
               <a:buChar char="•"/>
             </a:pPr>
             <a:r>
-              <a:rPr lang="en-US" sz="2400" dirty="0">
+              <a:rPr lang="en-US" sz="2800" dirty="0">
                 <a:solidFill>
                   <a:srgbClr val="334155"/>
                 </a:solidFill>
               </a:rPr>
-              <a:t>Optional: extra DDL info</a:t>
+              <a:t>Optional: </a:t>
+            </a:r>
+            <a:r>
+              <a:rPr lang="en-US" sz="2800" i="1" dirty="0">
+                <a:solidFill>
+                  <a:srgbClr val="334155"/>
+                </a:solidFill>
+              </a:rPr>
+              <a:t>extra DDL info</a:t>
             </a:r>
             <a:br>
-              <a:rPr lang="en-US" sz="2400" dirty="0">
+              <a:rPr lang="en-US" sz="2800" dirty="0">
                 <a:solidFill>
                   <a:srgbClr val="334155"/>
                 </a:solidFill>
               </a:rPr>
             </a:br>
-            <a:endParaRPr lang="en-US" sz="2400" dirty="0">
+            <a:endParaRPr lang="en-US" sz="2800" dirty="0">
               <a:solidFill>
                 <a:srgbClr val="334155"/>
               </a:solidFill>
             </a:endParaRPr>
           </a:p>
-          <a:p>
-            <a:pPr>
-              <a:spcBef>
-                <a:spcPts val="800"/>
-              </a:spcBef>
-            </a:pPr>
-            <a:r>
-              <a:rPr lang="en-US" i="1" dirty="0">
-                <a:solidFill>
-                  <a:srgbClr val="64748B"/>
-                </a:solidFill>
-              </a:rPr>
-              <a:t>Without schema, the LLM is guessing!</a:t>
-            </a:r>
-          </a:p>
         </p:txBody>
       </p:sp>
       <p:sp>
@@ -16046,8 +16079,8 @@
         </p:nvSpPr>
         <p:spPr>
           <a:xfrm>
-            <a:off x="6223000" y="1466850"/>
-            <a:ext cx="5334000" cy="4438650"/>
+            <a:off x="6223000" y="1479550"/>
+            <a:ext cx="5562600" cy="4042800"/>
           </a:xfrm>
           <a:prstGeom prst="roundRect">
             <a:avLst>
@@ -16067,28 +16100,18 @@
           <a:p>
             <a:pPr algn="l"/>
             <a:r>
-              <a:rPr lang="en-US" b="1" spc="300" dirty="0">
+              <a:rPr lang="en-US" sz="3200" b="1" spc="300" dirty="0">
                 <a:solidFill>
                   <a:srgbClr val="22D3EE"/>
                 </a:solidFill>
               </a:rPr>
-              <a:t>STEP 2  ·  PROMPT</a:t>
-            </a:r>
-          </a:p>
-          <a:p>
-            <a:pPr algn="l">
-              <a:spcBef>
-                <a:spcPts val="400"/>
-              </a:spcBef>
-            </a:pPr>
-            <a:r>
-              <a:rPr lang="en-US" sz="2800" b="1" dirty="0">
-                <a:solidFill>
-                  <a:srgbClr val="FFFFFF"/>
-                </a:solidFill>
-              </a:rPr>
-              <a:t>Write the rules</a:t>
-            </a:r>
+              <a:t>WRITE THE RULES</a:t>
+            </a:r>
+            <a:endParaRPr lang="en-US" sz="3200" b="1" dirty="0">
+              <a:solidFill>
+                <a:srgbClr val="FFFFFF"/>
+              </a:solidFill>
+            </a:endParaRPr>
           </a:p>
           <a:p>
             <a:pPr>
@@ -16097,7 +16120,7 @@
               </a:spcBef>
             </a:pPr>
             <a:r>
-              <a:rPr lang="en-US" dirty="0">
+              <a:rPr lang="en-US" sz="2000" dirty="0">
                 <a:solidFill>
                   <a:srgbClr val="64748B"/>
                 </a:solidFill>
@@ -16113,7 +16136,7 @@
               </a:spcBef>
             </a:pPr>
             <a:r>
-              <a:rPr lang="en-US" sz="2000" dirty="0">
+              <a:rPr lang="en-US" sz="2400" dirty="0">
                 <a:solidFill>
                   <a:srgbClr val="E2E8F0"/>
                 </a:solidFill>
@@ -16129,7 +16152,7 @@
               </a:spcBef>
             </a:pPr>
             <a:r>
-              <a:rPr lang="en-US" sz="2000" dirty="0">
+              <a:rPr lang="en-US" sz="2400" dirty="0">
                 <a:solidFill>
                   <a:srgbClr val="22D3EE"/>
                 </a:solidFill>
@@ -16145,7 +16168,7 @@
               </a:spcBef>
             </a:pPr>
             <a:r>
-              <a:rPr lang="en-US" sz="2000" dirty="0">
+              <a:rPr lang="en-US" sz="2400" dirty="0">
                 <a:solidFill>
                   <a:srgbClr val="E2E8F0"/>
                 </a:solidFill>
@@ -16161,7 +16184,7 @@
               </a:spcBef>
             </a:pPr>
             <a:r>
-              <a:rPr lang="en-US" sz="2000" dirty="0">
+              <a:rPr lang="en-US" sz="2400" dirty="0">
                 <a:solidFill>
                   <a:srgbClr val="E2E8F0"/>
                 </a:solidFill>
@@ -16177,7 +16200,7 @@
               </a:spcBef>
             </a:pPr>
             <a:r>
-              <a:rPr lang="en-US" sz="2000" dirty="0">
+              <a:rPr lang="en-US" sz="2400" dirty="0">
                 <a:solidFill>
                   <a:srgbClr val="E2E8F0"/>
                 </a:solidFill>
@@ -16193,13 +16216,57 @@
               </a:spcBef>
             </a:pPr>
             <a:r>
-              <a:rPr lang="en-US" sz="2000" dirty="0">
+              <a:rPr lang="en-US" sz="2400" dirty="0">
                 <a:solidFill>
                   <a:srgbClr val="E2E8F0"/>
                 </a:solidFill>
                 <a:latin typeface="Consolas"/>
               </a:rPr>
               <a:t>• Use the schema above</a:t>
+            </a:r>
+          </a:p>
+        </p:txBody>
+      </p:sp>
+      <p:sp>
+        <p:nvSpPr>
+          <p:cNvPr id="4" name="TextBox 3">
+            <a:extLst>
+              <a:ext uri="{FF2B5EF4-FFF2-40B4-BE49-F238E27FC236}">
+                <a16:creationId xmlns:a16="http://schemas.microsoft.com/office/drawing/2014/main" id="{0260B58A-A411-8E7E-C1B6-7B7E005995DA}"/>
+              </a:ext>
+            </a:extLst>
+          </p:cNvPr>
+          <p:cNvSpPr txBox="1"/>
+          <p:nvPr/>
+        </p:nvSpPr>
+        <p:spPr>
+          <a:xfrm>
+            <a:off x="635000" y="5720834"/>
+            <a:ext cx="5588000" cy="400110"/>
+          </a:xfrm>
+          <a:prstGeom prst="rect">
+            <a:avLst/>
+          </a:prstGeom>
+          <a:noFill/>
+        </p:spPr>
+        <p:txBody>
+          <a:bodyPr wrap="square">
+            <a:spAutoFit/>
+          </a:bodyPr>
+          <a:lstStyle/>
+          <a:p>
+            <a:pPr>
+              <a:spcBef>
+                <a:spcPts val="800"/>
+              </a:spcBef>
+            </a:pPr>
+            <a:r>
+              <a:rPr lang="en-US" sz="2000" i="1" dirty="0">
+                <a:solidFill>
+                  <a:srgbClr val="64748B"/>
+                </a:solidFill>
+              </a:rPr>
+              <a:t>Without schema, the LLM will guess!</a:t>
             </a:r>
           </a:p>
         </p:txBody>

--- a/Presentation.pptx
+++ b/Presentation.pptx
@@ -218,7 +218,7 @@
           <a:p>
             <a:fld id="{BC660078-77E7-46A7-9649-B3FD62DAD7B9}" type="datetimeFigureOut">
               <a:rPr lang="tr-TR" smtClean="0"/>
-              <a:t>6.05.2026</a:t>
+              <a:t>8.05.2026</a:t>
             </a:fld>
             <a:endParaRPr lang="tr-TR"/>
           </a:p>
@@ -2380,8 +2380,21 @@
                   <a:srgbClr val="0F172A"/>
                 </a:solidFill>
               </a:rPr>
-              <a:t>How many of you have written SQL before? Or create a reporting screen?</a:t>
-            </a:r>
+              <a:t>How many of you create a reporting screen or written SQL before</a:t>
+            </a:r>
+            <a:r>
+              <a:rPr lang="en-US" sz="1200" b="1">
+                <a:solidFill>
+                  <a:srgbClr val="0F172A"/>
+                </a:solidFill>
+              </a:rPr>
+              <a:t>? </a:t>
+            </a:r>
+            <a:endParaRPr lang="en-US" sz="1200" b="1" dirty="0">
+              <a:solidFill>
+                <a:srgbClr val="0F172A"/>
+              </a:solidFill>
+            </a:endParaRPr>
           </a:p>
           <a:p>
             <a:endParaRPr lang="en-US" dirty="0"/>
@@ -3088,7 +3101,7 @@
           <a:p>
             <a:fld id="{3EF59CCF-2F75-48E0-B827-F930E918C137}" type="datetimeFigureOut">
               <a:rPr lang="tr-TR" smtClean="0"/>
-              <a:t>6.05.2026</a:t>
+              <a:t>8.05.2026</a:t>
             </a:fld>
             <a:endParaRPr lang="tr-TR"/>
           </a:p>
@@ -3288,7 +3301,7 @@
           <a:p>
             <a:fld id="{3EF59CCF-2F75-48E0-B827-F930E918C137}" type="datetimeFigureOut">
               <a:rPr lang="tr-TR" smtClean="0"/>
-              <a:t>6.05.2026</a:t>
+              <a:t>8.05.2026</a:t>
             </a:fld>
             <a:endParaRPr lang="tr-TR"/>
           </a:p>
@@ -3498,7 +3511,7 @@
           <a:p>
             <a:fld id="{3EF59CCF-2F75-48E0-B827-F930E918C137}" type="datetimeFigureOut">
               <a:rPr lang="tr-TR" smtClean="0"/>
-              <a:t>6.05.2026</a:t>
+              <a:t>8.05.2026</a:t>
             </a:fld>
             <a:endParaRPr lang="tr-TR"/>
           </a:p>
@@ -3698,7 +3711,7 @@
           <a:p>
             <a:fld id="{3EF59CCF-2F75-48E0-B827-F930E918C137}" type="datetimeFigureOut">
               <a:rPr lang="tr-TR" smtClean="0"/>
-              <a:t>6.05.2026</a:t>
+              <a:t>8.05.2026</a:t>
             </a:fld>
             <a:endParaRPr lang="tr-TR"/>
           </a:p>
@@ -3974,7 +3987,7 @@
           <a:p>
             <a:fld id="{3EF59CCF-2F75-48E0-B827-F930E918C137}" type="datetimeFigureOut">
               <a:rPr lang="tr-TR" smtClean="0"/>
-              <a:t>6.05.2026</a:t>
+              <a:t>8.05.2026</a:t>
             </a:fld>
             <a:endParaRPr lang="tr-TR"/>
           </a:p>
@@ -4242,7 +4255,7 @@
           <a:p>
             <a:fld id="{3EF59CCF-2F75-48E0-B827-F930E918C137}" type="datetimeFigureOut">
               <a:rPr lang="tr-TR" smtClean="0"/>
-              <a:t>6.05.2026</a:t>
+              <a:t>8.05.2026</a:t>
             </a:fld>
             <a:endParaRPr lang="tr-TR"/>
           </a:p>
@@ -4657,7 +4670,7 @@
           <a:p>
             <a:fld id="{3EF59CCF-2F75-48E0-B827-F930E918C137}" type="datetimeFigureOut">
               <a:rPr lang="tr-TR" smtClean="0"/>
-              <a:t>6.05.2026</a:t>
+              <a:t>8.05.2026</a:t>
             </a:fld>
             <a:endParaRPr lang="tr-TR"/>
           </a:p>
@@ -4799,7 +4812,7 @@
           <a:p>
             <a:fld id="{3EF59CCF-2F75-48E0-B827-F930E918C137}" type="datetimeFigureOut">
               <a:rPr lang="tr-TR" smtClean="0"/>
-              <a:t>6.05.2026</a:t>
+              <a:t>8.05.2026</a:t>
             </a:fld>
             <a:endParaRPr lang="tr-TR"/>
           </a:p>
@@ -4912,7 +4925,7 @@
           <a:p>
             <a:fld id="{3EF59CCF-2F75-48E0-B827-F930E918C137}" type="datetimeFigureOut">
               <a:rPr lang="tr-TR" smtClean="0"/>
-              <a:t>6.05.2026</a:t>
+              <a:t>8.05.2026</a:t>
             </a:fld>
             <a:endParaRPr lang="tr-TR"/>
           </a:p>
@@ -5225,7 +5238,7 @@
           <a:p>
             <a:fld id="{3EF59CCF-2F75-48E0-B827-F930E918C137}" type="datetimeFigureOut">
               <a:rPr lang="tr-TR" smtClean="0"/>
-              <a:t>6.05.2026</a:t>
+              <a:t>8.05.2026</a:t>
             </a:fld>
             <a:endParaRPr lang="tr-TR"/>
           </a:p>
@@ -5514,7 +5527,7 @@
           <a:p>
             <a:fld id="{3EF59CCF-2F75-48E0-B827-F930E918C137}" type="datetimeFigureOut">
               <a:rPr lang="tr-TR" smtClean="0"/>
-              <a:t>6.05.2026</a:t>
+              <a:t>8.05.2026</a:t>
             </a:fld>
             <a:endParaRPr lang="tr-TR"/>
           </a:p>
@@ -5760,7 +5773,7 @@
           <a:p>
             <a:fld id="{3EF59CCF-2F75-48E0-B827-F930E918C137}" type="datetimeFigureOut">
               <a:rPr lang="tr-TR" smtClean="0"/>
-              <a:t>6.05.2026</a:t>
+              <a:t>8.05.2026</a:t>
             </a:fld>
             <a:endParaRPr lang="tr-TR"/>
           </a:p>
@@ -13055,36 +13068,6 @@
           </p:txBody>
         </p:sp>
       </p:grpSp>
-      <p:pic>
-        <p:nvPicPr>
-          <p:cNvPr id="5" name="Picture 4">
-            <a:extLst>
-              <a:ext uri="{FF2B5EF4-FFF2-40B4-BE49-F238E27FC236}">
-                <a16:creationId xmlns:a16="http://schemas.microsoft.com/office/drawing/2014/main" id="{95D01CF5-3779-C47E-5AA7-7E0126629325}"/>
-              </a:ext>
-            </a:extLst>
-          </p:cNvPr>
-          <p:cNvPicPr>
-            <a:picLocks noChangeAspect="1"/>
-          </p:cNvPicPr>
-          <p:nvPr/>
-        </p:nvPicPr>
-        <p:blipFill>
-          <a:blip r:embed="rId3"/>
-          <a:stretch>
-            <a:fillRect/>
-          </a:stretch>
-        </p:blipFill>
-        <p:spPr>
-          <a:xfrm>
-            <a:off x="9251318" y="4787580"/>
-            <a:ext cx="1735996" cy="1751683"/>
-          </a:xfrm>
-          <a:prstGeom prst="rect">
-            <a:avLst/>
-          </a:prstGeom>
-        </p:spPr>
-      </p:pic>
       <p:sp>
         <p:nvSpPr>
           <p:cNvPr id="7" name="TextBox 6">
@@ -13375,8 +13358,8 @@
         </p:nvSpPr>
         <p:spPr>
           <a:xfrm>
-            <a:off x="5884853" y="4643252"/>
-            <a:ext cx="5277952" cy="1995054"/>
+            <a:off x="5884852" y="4643252"/>
+            <a:ext cx="5415325" cy="1995054"/>
           </a:xfrm>
           <a:prstGeom prst="roundRect">
             <a:avLst/>
@@ -13415,6 +13398,36 @@
           </a:p>
         </p:txBody>
       </p:sp>
+      <p:pic>
+        <p:nvPicPr>
+          <p:cNvPr id="10" name="Picture 9">
+            <a:extLst>
+              <a:ext uri="{FF2B5EF4-FFF2-40B4-BE49-F238E27FC236}">
+                <a16:creationId xmlns:a16="http://schemas.microsoft.com/office/drawing/2014/main" id="{D938F68E-AD3D-20B3-D1A3-233E8E7B77F5}"/>
+              </a:ext>
+            </a:extLst>
+          </p:cNvPr>
+          <p:cNvPicPr>
+            <a:picLocks noChangeAspect="1"/>
+          </p:cNvPicPr>
+          <p:nvPr/>
+        </p:nvPicPr>
+        <p:blipFill>
+          <a:blip r:embed="rId3"/>
+          <a:stretch>
+            <a:fillRect/>
+          </a:stretch>
+        </p:blipFill>
+        <p:spPr>
+          <a:xfrm>
+            <a:off x="9265759" y="4724017"/>
+            <a:ext cx="1783770" cy="1837823"/>
+          </a:xfrm>
+          <a:prstGeom prst="rect">
+            <a:avLst/>
+          </a:prstGeom>
+        </p:spPr>
+      </p:pic>
     </p:spTree>
     <p:extLst>
       <p:ext uri="{BB962C8B-B14F-4D97-AF65-F5344CB8AC3E}">
@@ -15724,9 +15737,6 @@
                     <p:cTn id="3" fill="hold">
                       <p:stCondLst>
                         <p:cond delay="indefinite"/>
-                        <p:cond evt="onBegin" delay="0">
-                          <p:tn val="2"/>
-                        </p:cond>
                       </p:stCondLst>
                       <p:childTnLst>
                         <p:par>
@@ -15736,9 +15746,9 @@
                             </p:stCondLst>
                             <p:childTnLst>
                               <p:par>
-                                <p:cTn id="5" presetID="2" presetClass="entr" presetSubtype="2" fill="hold" nodeType="withEffect">
+                                <p:cTn id="5" presetID="2" presetClass="entr" presetSubtype="2" fill="hold" nodeType="clickEffect">
                                   <p:stCondLst>
-                                    <p:cond delay="10000"/>
+                                    <p:cond delay="0"/>
                                   </p:stCondLst>
                                   <p:childTnLst>
                                     <p:set>
@@ -15761,7 +15771,7 @@
                                     </p:set>
                                     <p:anim calcmode="lin" valueType="num">
                                       <p:cBhvr additive="base">
-                                        <p:cTn id="7" dur="1000" fill="hold"/>
+                                        <p:cTn id="7" dur="500" fill="hold"/>
                                         <p:tgtEl>
                                           <p:spTgt spid="7"/>
                                         </p:tgtEl>
@@ -15784,7 +15794,7 @@
                                     </p:anim>
                                     <p:anim calcmode="lin" valueType="num">
                                       <p:cBhvr additive="base">
-                                        <p:cTn id="8" dur="1000" fill="hold"/>
+                                        <p:cTn id="8" dur="500" fill="hold"/>
                                         <p:tgtEl>
                                           <p:spTgt spid="7"/>
                                         </p:tgtEl>
@@ -16241,8 +16251,8 @@
         </p:nvSpPr>
         <p:spPr>
           <a:xfrm>
-            <a:off x="635000" y="5720834"/>
-            <a:ext cx="5588000" cy="400110"/>
+            <a:off x="406400" y="5720834"/>
+            <a:ext cx="11270938" cy="400110"/>
           </a:xfrm>
           <a:prstGeom prst="rect">
             <a:avLst/>
@@ -16255,7 +16265,7 @@
           </a:bodyPr>
           <a:lstStyle/>
           <a:p>
-            <a:pPr>
+            <a:pPr algn="ctr">
               <a:spcBef>
                 <a:spcPts val="800"/>
               </a:spcBef>

--- a/Presentation.pptx
+++ b/Presentation.pptx
@@ -218,7 +218,7 @@
           <a:p>
             <a:fld id="{BC660078-77E7-46A7-9649-B3FD62DAD7B9}" type="datetimeFigureOut">
               <a:rPr lang="tr-TR" smtClean="0"/>
-              <a:t>8.05.2026</a:t>
+              <a:t>14.05.2026</a:t>
             </a:fld>
             <a:endParaRPr lang="tr-TR"/>
           </a:p>
@@ -530,6 +530,37 @@
           <a:bodyPr/>
           <a:lstStyle/>
           <a:p>
+            <a:pPr marL="0" marR="0" lvl="0" indent="0" algn="l" defTabSz="914400" rtl="0" eaLnBrk="1" fontAlgn="auto" latinLnBrk="0" hangingPunct="1">
+              <a:lnSpc>
+                <a:spcPct val="100000"/>
+              </a:lnSpc>
+              <a:spcBef>
+                <a:spcPts val="0"/>
+              </a:spcBef>
+              <a:spcAft>
+                <a:spcPts val="0"/>
+              </a:spcAft>
+              <a:buClrTx/>
+              <a:buSzTx/>
+              <a:buFontTx/>
+              <a:buNone/>
+              <a:tabLst/>
+              <a:defRPr/>
+            </a:pPr>
+            <a:r>
+              <a:rPr lang="tr-TR" sz="1200" b="1" i="0" kern="1200" dirty="0">
+                <a:solidFill>
+                  <a:schemeClr val="tx1"/>
+                </a:solidFill>
+                <a:effectLst/>
+                <a:latin typeface="+mn-lt"/>
+                <a:ea typeface="+mn-ea"/>
+                <a:cs typeface="+mn-cs"/>
+              </a:rPr>
+              <a:t>From Natural Language to SQL: Building an AI-Powered Query Generator with .NET</a:t>
+            </a:r>
+          </a:p>
+          <a:p>
             <a:endParaRPr lang="en-US" dirty="0"/>
           </a:p>
         </p:txBody>
@@ -3101,7 +3132,7 @@
           <a:p>
             <a:fld id="{3EF59CCF-2F75-48E0-B827-F930E918C137}" type="datetimeFigureOut">
               <a:rPr lang="tr-TR" smtClean="0"/>
-              <a:t>8.05.2026</a:t>
+              <a:t>14.05.2026</a:t>
             </a:fld>
             <a:endParaRPr lang="tr-TR"/>
           </a:p>
@@ -3301,7 +3332,7 @@
           <a:p>
             <a:fld id="{3EF59CCF-2F75-48E0-B827-F930E918C137}" type="datetimeFigureOut">
               <a:rPr lang="tr-TR" smtClean="0"/>
-              <a:t>8.05.2026</a:t>
+              <a:t>14.05.2026</a:t>
             </a:fld>
             <a:endParaRPr lang="tr-TR"/>
           </a:p>
@@ -3511,7 +3542,7 @@
           <a:p>
             <a:fld id="{3EF59CCF-2F75-48E0-B827-F930E918C137}" type="datetimeFigureOut">
               <a:rPr lang="tr-TR" smtClean="0"/>
-              <a:t>8.05.2026</a:t>
+              <a:t>14.05.2026</a:t>
             </a:fld>
             <a:endParaRPr lang="tr-TR"/>
           </a:p>
@@ -3711,7 +3742,7 @@
           <a:p>
             <a:fld id="{3EF59CCF-2F75-48E0-B827-F930E918C137}" type="datetimeFigureOut">
               <a:rPr lang="tr-TR" smtClean="0"/>
-              <a:t>8.05.2026</a:t>
+              <a:t>14.05.2026</a:t>
             </a:fld>
             <a:endParaRPr lang="tr-TR"/>
           </a:p>
@@ -3987,7 +4018,7 @@
           <a:p>
             <a:fld id="{3EF59CCF-2F75-48E0-B827-F930E918C137}" type="datetimeFigureOut">
               <a:rPr lang="tr-TR" smtClean="0"/>
-              <a:t>8.05.2026</a:t>
+              <a:t>14.05.2026</a:t>
             </a:fld>
             <a:endParaRPr lang="tr-TR"/>
           </a:p>
@@ -4255,7 +4286,7 @@
           <a:p>
             <a:fld id="{3EF59CCF-2F75-48E0-B827-F930E918C137}" type="datetimeFigureOut">
               <a:rPr lang="tr-TR" smtClean="0"/>
-              <a:t>8.05.2026</a:t>
+              <a:t>14.05.2026</a:t>
             </a:fld>
             <a:endParaRPr lang="tr-TR"/>
           </a:p>
@@ -4670,7 +4701,7 @@
           <a:p>
             <a:fld id="{3EF59CCF-2F75-48E0-B827-F930E918C137}" type="datetimeFigureOut">
               <a:rPr lang="tr-TR" smtClean="0"/>
-              <a:t>8.05.2026</a:t>
+              <a:t>14.05.2026</a:t>
             </a:fld>
             <a:endParaRPr lang="tr-TR"/>
           </a:p>
@@ -4812,7 +4843,7 @@
           <a:p>
             <a:fld id="{3EF59CCF-2F75-48E0-B827-F930E918C137}" type="datetimeFigureOut">
               <a:rPr lang="tr-TR" smtClean="0"/>
-              <a:t>8.05.2026</a:t>
+              <a:t>14.05.2026</a:t>
             </a:fld>
             <a:endParaRPr lang="tr-TR"/>
           </a:p>
@@ -4925,7 +4956,7 @@
           <a:p>
             <a:fld id="{3EF59CCF-2F75-48E0-B827-F930E918C137}" type="datetimeFigureOut">
               <a:rPr lang="tr-TR" smtClean="0"/>
-              <a:t>8.05.2026</a:t>
+              <a:t>14.05.2026</a:t>
             </a:fld>
             <a:endParaRPr lang="tr-TR"/>
           </a:p>
@@ -5238,7 +5269,7 @@
           <a:p>
             <a:fld id="{3EF59CCF-2F75-48E0-B827-F930E918C137}" type="datetimeFigureOut">
               <a:rPr lang="tr-TR" smtClean="0"/>
-              <a:t>8.05.2026</a:t>
+              <a:t>14.05.2026</a:t>
             </a:fld>
             <a:endParaRPr lang="tr-TR"/>
           </a:p>
@@ -5527,7 +5558,7 @@
           <a:p>
             <a:fld id="{3EF59CCF-2F75-48E0-B827-F930E918C137}" type="datetimeFigureOut">
               <a:rPr lang="tr-TR" smtClean="0"/>
-              <a:t>8.05.2026</a:t>
+              <a:t>14.05.2026</a:t>
             </a:fld>
             <a:endParaRPr lang="tr-TR"/>
           </a:p>
@@ -5773,7 +5804,7 @@
           <a:p>
             <a:fld id="{3EF59CCF-2F75-48E0-B827-F930E918C137}" type="datetimeFigureOut">
               <a:rPr lang="tr-TR" smtClean="0"/>
-              <a:t>8.05.2026</a:t>
+              <a:t>14.05.2026</a:t>
             </a:fld>
             <a:endParaRPr lang="tr-TR"/>
           </a:p>
@@ -6429,7 +6460,7 @@
         <p:spPr>
           <a:xfrm>
             <a:off x="303275" y="451065"/>
-            <a:ext cx="3048000" cy="355600"/>
+            <a:ext cx="3315557" cy="537556"/>
           </a:xfrm>
           <a:prstGeom prst="roundRect">
             <a:avLst>
@@ -6454,7 +6485,7 @@
                   <a:srgbClr val="22D3EE"/>
                 </a:solidFill>
               </a:rPr>
-              <a:t>DOTNET KONF</a:t>
+              <a:t>DevDays Europe 2026</a:t>
             </a:r>
           </a:p>
         </p:txBody>
@@ -6642,7 +6673,7 @@
         </p:nvSpPr>
         <p:spPr>
           <a:xfrm>
-            <a:off x="8666747" y="1824122"/>
+            <a:off x="8700168" y="1273893"/>
             <a:ext cx="3454400" cy="449178"/>
           </a:xfrm>
           <a:prstGeom prst="rect">
@@ -6846,7 +6877,7 @@
         </p:spPr>
         <p:txBody>
           <a:bodyPr wrap="square" lIns="0" tIns="0" rIns="0" bIns="0" anchor="t">
-            <a:normAutofit fontScale="92500"/>
+            <a:normAutofit lnSpcReduction="10000"/>
           </a:bodyPr>
           <a:lstStyle/>
           <a:p>
@@ -6918,7 +6949,7 @@
         </p:spPr>
         <p:txBody>
           <a:bodyPr>
-            <a:normAutofit fontScale="90000"/>
+            <a:normAutofit/>
           </a:bodyPr>
           <a:lstStyle/>
           <a:p>
@@ -7354,10 +7385,10 @@
             <p:nvPr/>
           </p:nvPicPr>
           <p:blipFill>
-            <a:blip r:embed="rId3">
+            <a:blip>
               <a:extLst>
                 <a:ext uri="{96DAC541-7B7A-43D3-8B79-37D633B846F1}">
-                  <asvg:svgBlip xmlns:asvg="http://schemas.microsoft.com/office/drawing/2016/SVG/main" r:embed="rId4"/>
+                  <asvg:svgBlip xmlns:asvg="http://schemas.microsoft.com/office/drawing/2016/SVG/main" r:embed="rId3"/>
                 </a:ext>
               </a:extLst>
             </a:blip>
@@ -9987,10 +10018,10 @@
             <p:nvPr/>
           </p:nvPicPr>
           <p:blipFill>
-            <a:blip r:embed="rId3">
+            <a:blip>
               <a:extLst>
                 <a:ext uri="{96DAC541-7B7A-43D3-8B79-37D633B846F1}">
-                  <asvg:svgBlip xmlns:asvg="http://schemas.microsoft.com/office/drawing/2016/SVG/main" r:embed="rId4"/>
+                  <asvg:svgBlip xmlns:asvg="http://schemas.microsoft.com/office/drawing/2016/SVG/main" r:embed="rId3"/>
                 </a:ext>
               </a:extLst>
             </a:blip>
@@ -10063,7 +10094,7 @@
         </p:spPr>
         <p:txBody>
           <a:bodyPr>
-            <a:normAutofit fontScale="90000"/>
+            <a:normAutofit/>
           </a:bodyPr>
           <a:lstStyle/>
           <a:p>
@@ -16461,7 +16492,7 @@
         </p:spPr>
         <p:txBody>
           <a:bodyPr>
-            <a:normAutofit fontScale="77500" lnSpcReduction="20000"/>
+            <a:normAutofit fontScale="92500"/>
           </a:bodyPr>
           <a:lstStyle/>
           <a:p>
@@ -16559,10 +16590,10 @@
             <p:nvPr/>
           </p:nvPicPr>
           <p:blipFill>
-            <a:blip r:embed="rId3">
+            <a:blip>
               <a:extLst>
                 <a:ext uri="{96DAC541-7B7A-43D3-8B79-37D633B846F1}">
-                  <asvg:svgBlip xmlns:asvg="http://schemas.microsoft.com/office/drawing/2016/SVG/main" r:embed="rId4"/>
+                  <asvg:svgBlip xmlns:asvg="http://schemas.microsoft.com/office/drawing/2016/SVG/main" r:embed="rId3"/>
                 </a:ext>
               </a:extLst>
             </a:blip>

--- a/Presentation.pptx
+++ b/Presentation.pptx
@@ -5,7 +5,7 @@
     <p:sldMasterId id="2147483684" r:id="rId1"/>
   </p:sldMasterIdLst>
   <p:notesMasterIdLst>
-    <p:notesMasterId r:id="rId24"/>
+    <p:notesMasterId r:id="rId25"/>
   </p:notesMasterIdLst>
   <p:sldIdLst>
     <p:sldId id="328" r:id="rId2"/>
@@ -28,8 +28,9 @@
     <p:sldId id="321" r:id="rId19"/>
     <p:sldId id="322" r:id="rId20"/>
     <p:sldId id="323" r:id="rId21"/>
-    <p:sldId id="335" r:id="rId22"/>
-    <p:sldId id="324" r:id="rId23"/>
+    <p:sldId id="336" r:id="rId22"/>
+    <p:sldId id="335" r:id="rId23"/>
+    <p:sldId id="324" r:id="rId24"/>
   </p:sldIdLst>
   <p:sldSz cx="12192000" cy="6858000"/>
   <p:notesSz cx="6858000" cy="9144000"/>
@@ -530,37 +531,6 @@
           <a:bodyPr/>
           <a:lstStyle/>
           <a:p>
-            <a:pPr marL="0" marR="0" lvl="0" indent="0" algn="l" defTabSz="914400" rtl="0" eaLnBrk="1" fontAlgn="auto" latinLnBrk="0" hangingPunct="1">
-              <a:lnSpc>
-                <a:spcPct val="100000"/>
-              </a:lnSpc>
-              <a:spcBef>
-                <a:spcPts val="0"/>
-              </a:spcBef>
-              <a:spcAft>
-                <a:spcPts val="0"/>
-              </a:spcAft>
-              <a:buClrTx/>
-              <a:buSzTx/>
-              <a:buFontTx/>
-              <a:buNone/>
-              <a:tabLst/>
-              <a:defRPr/>
-            </a:pPr>
-            <a:r>
-              <a:rPr lang="tr-TR" sz="1200" b="1" i="0" kern="1200" dirty="0">
-                <a:solidFill>
-                  <a:schemeClr val="tx1"/>
-                </a:solidFill>
-                <a:effectLst/>
-                <a:latin typeface="+mn-lt"/>
-                <a:ea typeface="+mn-ea"/>
-                <a:cs typeface="+mn-cs"/>
-              </a:rPr>
-              <a:t>From Natural Language to SQL: Building an AI-Powered Query Generator with .NET</a:t>
-            </a:r>
-          </a:p>
-          <a:p>
             <a:endParaRPr lang="en-US" dirty="0"/>
           </a:p>
         </p:txBody>
@@ -1945,85 +1915,268 @@
           <a:bodyPr/>
           <a:lstStyle/>
           <a:p>
+            <a:pPr marL="171450" indent="-171450">
+              <a:buFontTx/>
+              <a:buChar char="-"/>
+            </a:pPr>
+            <a:r>
+              <a:rPr lang="en-US" b="1" dirty="0"/>
+              <a:t>Multi-tenancy &amp; permissions:</a:t>
+            </a:r>
             <a:r>
               <a:rPr lang="en-US" dirty="0"/>
-              <a:t>[HONEST] Don't skip past this. The audience trusts you more when you admit what's hard.</a:t>
-            </a:r>
-          </a:p>
-          <a:p>
+              <a:t> </a:t>
+            </a:r>
+          </a:p>
+          <a:p>
+            <a:pPr marL="628650" lvl="1" indent="-171450">
+              <a:buFontTx/>
+              <a:buChar char="-"/>
+            </a:pPr>
+            <a:r>
+              <a:rPr lang="en-US" dirty="0"/>
+              <a:t>Give each user separate </a:t>
+            </a:r>
+            <a:r>
+              <a:rPr lang="en-US" u="sng" dirty="0"/>
+              <a:t>connection string &amp; permissions </a:t>
+            </a:r>
+            <a:r>
+              <a:rPr lang="en-US" u="none" dirty="0"/>
+              <a:t>so you can configure their roles</a:t>
+            </a:r>
+          </a:p>
+          <a:p>
+            <a:pPr marL="628650" lvl="1" indent="-171450">
+              <a:buFontTx/>
+              <a:buChar char="-"/>
+            </a:pPr>
+            <a:r>
+              <a:rPr lang="en-US" dirty="0"/>
+              <a:t>Separate </a:t>
+            </a:r>
+            <a:r>
+              <a:rPr lang="en-US" u="sng" dirty="0"/>
+              <a:t>sub databases</a:t>
+            </a:r>
+            <a:r>
+              <a:rPr lang="en-US" dirty="0"/>
+              <a:t> for specific user groups</a:t>
+            </a:r>
+          </a:p>
+          <a:p>
+            <a:pPr marL="628650" lvl="1" indent="-171450">
+              <a:buFontTx/>
+              <a:buChar char="-"/>
+            </a:pPr>
+            <a:r>
+              <a:rPr lang="en-US" dirty="0"/>
+              <a:t>Create &amp; send only </a:t>
+            </a:r>
+            <a:r>
+              <a:rPr lang="en-US" u="sng" dirty="0"/>
+              <a:t>views</a:t>
+            </a:r>
+            <a:r>
+              <a:rPr lang="en-US" dirty="0"/>
+              <a:t> to AI</a:t>
+            </a:r>
+          </a:p>
+          <a:p>
+            <a:pPr marL="628650" lvl="1" indent="-171450">
+              <a:buFontTx/>
+              <a:buChar char="-"/>
+            </a:pPr>
+            <a:r>
+              <a:rPr lang="en-US" dirty="0"/>
+              <a:t>Add </a:t>
+            </a:r>
+            <a:r>
+              <a:rPr lang="en-US" u="sng" dirty="0" err="1"/>
+              <a:t>TenantId</a:t>
+            </a:r>
+            <a:r>
+              <a:rPr lang="en-US" dirty="0"/>
+              <a:t> to each select query</a:t>
+            </a:r>
+          </a:p>
+          <a:p>
+            <a:pPr marL="171450" marR="0" lvl="0" indent="-171450" algn="l" defTabSz="914400" rtl="0" eaLnBrk="1" fontAlgn="auto" latinLnBrk="0" hangingPunct="1">
+              <a:lnSpc>
+                <a:spcPct val="100000"/>
+              </a:lnSpc>
+              <a:spcBef>
+                <a:spcPts val="0"/>
+              </a:spcBef>
+              <a:spcAft>
+                <a:spcPts val="0"/>
+              </a:spcAft>
+              <a:buClrTx/>
+              <a:buSzTx/>
+              <a:buFontTx/>
+              <a:buChar char="-"/>
+              <a:tabLst/>
+              <a:defRPr/>
+            </a:pPr>
+            <a:r>
+              <a:rPr lang="en-US" sz="1200" b="1" dirty="0">
+                <a:solidFill>
+                  <a:srgbClr val="0F172A"/>
+                </a:solidFill>
+              </a:rPr>
+              <a:t>Hallucination:</a:t>
+            </a:r>
+          </a:p>
+          <a:p>
+            <a:pPr marL="628650" marR="0" lvl="1" indent="-171450" algn="l" defTabSz="914400" rtl="0" eaLnBrk="1" fontAlgn="auto" latinLnBrk="0" hangingPunct="1">
+              <a:lnSpc>
+                <a:spcPct val="100000"/>
+              </a:lnSpc>
+              <a:spcBef>
+                <a:spcPts val="0"/>
+              </a:spcBef>
+              <a:spcAft>
+                <a:spcPts val="0"/>
+              </a:spcAft>
+              <a:buClrTx/>
+              <a:buSzTx/>
+              <a:buFontTx/>
+              <a:buChar char="-"/>
+              <a:tabLst/>
+              <a:defRPr/>
+            </a:pPr>
+            <a:r>
+              <a:rPr lang="en-US" b="0" dirty="0">
+                <a:solidFill>
+                  <a:srgbClr val="0F172A"/>
+                </a:solidFill>
+              </a:rPr>
+              <a:t>Retry mechanism until it works</a:t>
+            </a:r>
             <a:endParaRPr lang="en-US" dirty="0"/>
           </a:p>
           <a:p>
+            <a:pPr marL="171450" lvl="0" indent="-171450">
+              <a:buFontTx/>
+              <a:buChar char="-"/>
+            </a:pPr>
+            <a:r>
+              <a:rPr lang="en-US" b="1" dirty="0"/>
+              <a:t>Ambigous questions:</a:t>
+            </a:r>
+          </a:p>
+          <a:p>
+            <a:pPr marL="628650" lvl="1" indent="-171450">
+              <a:buFontTx/>
+              <a:buChar char="-"/>
+            </a:pPr>
+            <a:r>
+              <a:rPr lang="tr-TR" dirty="0"/>
+              <a:t>Most production </a:t>
+            </a:r>
+            <a:r>
+              <a:rPr lang="tr-TR" u="sng" dirty="0"/>
+              <a:t>issues are not SQL errors</a:t>
+            </a:r>
+            <a:r>
+              <a:rPr lang="tr-TR" dirty="0"/>
+              <a:t>.</a:t>
+            </a:r>
             <a:r>
               <a:rPr lang="en-US" dirty="0"/>
-              <a:t>Challenges you will absolutely hit:</a:t>
-            </a:r>
-          </a:p>
-          <a:p>
+              <a:t> </a:t>
+            </a:r>
+          </a:p>
+          <a:p>
+            <a:pPr marL="171450" lvl="0" indent="-171450">
+              <a:buFontTx/>
+              <a:buChar char="-"/>
+            </a:pPr>
+            <a:r>
+              <a:rPr lang="en-US" sz="1200" b="1" dirty="0">
+                <a:solidFill>
+                  <a:srgbClr val="0F172A"/>
+                </a:solidFill>
+              </a:rPr>
+              <a:t>Cost &amp; Latency:</a:t>
+            </a:r>
+          </a:p>
+          <a:p>
+            <a:pPr marL="628650" lvl="1" indent="-171450">
+              <a:buFontTx/>
+              <a:buChar char="-"/>
+            </a:pPr>
             <a:r>
               <a:rPr lang="en-US" dirty="0"/>
-              <a:t>- Prompt tuning is iterative. Your first prompt will be wrong. Your tenth will still miss edge cases.</a:t>
-            </a:r>
-          </a:p>
-          <a:p>
+              <a:t>LLM latency + query latency compounds. Cache aggressively.</a:t>
+            </a:r>
+          </a:p>
+          <a:p>
+            <a:pPr marL="171450" indent="-171450">
+              <a:buFontTx/>
+              <a:buChar char="-"/>
+            </a:pPr>
+            <a:r>
+              <a:rPr lang="en-US" b="1" dirty="0"/>
+              <a:t>Prompt tuning:</a:t>
+            </a:r>
             <a:r>
               <a:rPr lang="en-US" dirty="0"/>
-              <a:t>- SQL safety is a moving target — you're not just blocking DROP, you're blocking creative joins that melt the DB.</a:t>
-            </a:r>
-          </a:p>
-          <a:p>
+              <a:t> </a:t>
+            </a:r>
+          </a:p>
+          <a:p>
+            <a:pPr marL="628650" lvl="1" indent="-171450">
+              <a:buFontTx/>
+              <a:buChar char="-"/>
+            </a:pPr>
             <a:r>
               <a:rPr lang="en-US" dirty="0"/>
-              <a:t>- Performance matters — LLM latency + query latency compounds. Cache aggressively.</a:t>
-            </a:r>
-          </a:p>
-          <a:p>
+              <a:t>Your first prompt may be wrong. Your 10</a:t>
+            </a:r>
+            <a:r>
+              <a:rPr lang="en-US" baseline="30000" dirty="0"/>
+              <a:t>th</a:t>
+            </a:r>
             <a:r>
               <a:rPr lang="en-US" dirty="0"/>
-              <a:t>- Edge cases are infinite. 'Show me sales' is easy. 'Compare this quarter to the same quarter two years ago, excluding returns' is not.</a:t>
-            </a:r>
-          </a:p>
-          <a:p>
+              <a:t> will still miss edge cases.</a:t>
+            </a:r>
+          </a:p>
+          <a:p>
+            <a:pPr marL="171450" lvl="0" indent="-171450">
+              <a:buFontTx/>
+              <a:buChar char="-"/>
+            </a:pPr>
+            <a:r>
+              <a:rPr lang="en-US" sz="1200" b="1" dirty="0"/>
+              <a:t>Confidential data </a:t>
+            </a:r>
+          </a:p>
+          <a:p>
+            <a:pPr marL="628650" lvl="1" indent="-171450">
+              <a:buFontTx/>
+              <a:buChar char="-"/>
+            </a:pPr>
+            <a:r>
+              <a:rPr lang="en-US" b="0" dirty="0"/>
+              <a:t>You’ll send only your </a:t>
+            </a:r>
+            <a:r>
+              <a:rPr lang="en-US" b="0" dirty="0" err="1"/>
+              <a:t>table,column</a:t>
+            </a:r>
+            <a:r>
+              <a:rPr lang="en-US" b="0" dirty="0"/>
+              <a:t> names not the data. But if still an issue, use local LLM</a:t>
+            </a:r>
+          </a:p>
+          <a:p>
+            <a:pPr marL="171450" lvl="0" indent="-171450">
+              <a:buFontTx/>
+              <a:buChar char="-"/>
+            </a:pPr>
             <a:endParaRPr lang="en-US" dirty="0"/>
-          </a:p>
-          <a:p>
-            <a:r>
-              <a:rPr lang="en-US" dirty="0"/>
-              <a:t>Best practices that actually work:</a:t>
-            </a:r>
-          </a:p>
-          <a:p>
-            <a:r>
-              <a:rPr lang="en-US" dirty="0"/>
-              <a:t>- Always validate SQL. Twice. Belt and suspenders.</a:t>
-            </a:r>
-          </a:p>
-          <a:p>
-            <a:r>
-              <a:rPr lang="en-US" dirty="0"/>
-              <a:t>- Keep prompts strict — don't try to be clever.</a:t>
-            </a:r>
-          </a:p>
-          <a:p>
-            <a:r>
-              <a:rPr lang="en-US" dirty="0"/>
-              <a:t>- Log every single query, prompt, and response. You'll need them when a user says 'that number looks wrong.'</a:t>
-            </a:r>
-          </a:p>
-          <a:p>
-            <a:r>
-              <a:rPr lang="en-US" dirty="0"/>
-              <a:t>- Start simple. Ship the ugly version first.</a:t>
-            </a:r>
-          </a:p>
-          <a:p>
-            <a:endParaRPr lang="en-US" dirty="0"/>
-          </a:p>
-          <a:p>
-            <a:r>
-              <a:rPr lang="en-US" dirty="0"/>
-              <a:t>[TRANSITION] 'Which brings me to the three things I want you to take home.'</a:t>
-            </a:r>
           </a:p>
         </p:txBody>
       </p:sp>
@@ -2036,6 +2189,329 @@
 </file>
 
 <file path=ppt/notesSlides/notesSlide21.xml><?xml version="1.0" encoding="utf-8"?>
+<p:notes xmlns:a="http://schemas.openxmlformats.org/drawingml/2006/main" xmlns:r="http://schemas.openxmlformats.org/officeDocument/2006/relationships" xmlns:p="http://schemas.openxmlformats.org/presentationml/2006/main">
+  <p:cSld>
+    <p:spTree>
+      <p:nvGrpSpPr>
+        <p:cNvPr id="1" name="">
+          <a:extLst>
+            <a:ext uri="{FF2B5EF4-FFF2-40B4-BE49-F238E27FC236}">
+              <a16:creationId xmlns:a16="http://schemas.microsoft.com/office/drawing/2014/main" id="{85FE6FE7-4DB1-C986-0D9D-A9F7F9D968C2}"/>
+            </a:ext>
+          </a:extLst>
+        </p:cNvPr>
+        <p:cNvGrpSpPr/>
+        <p:nvPr/>
+      </p:nvGrpSpPr>
+      <p:grpSpPr>
+        <a:xfrm>
+          <a:off x="0" y="0"/>
+          <a:ext cx="0" cy="0"/>
+          <a:chOff x="0" y="0"/>
+          <a:chExt cx="0" cy="0"/>
+        </a:xfrm>
+      </p:grpSpPr>
+      <p:sp>
+        <p:nvSpPr>
+          <p:cNvPr id="2" name="Slide Image Placeholder 1">
+            <a:extLst>
+              <a:ext uri="{FF2B5EF4-FFF2-40B4-BE49-F238E27FC236}">
+                <a16:creationId xmlns:a16="http://schemas.microsoft.com/office/drawing/2014/main" id="{68B0D34D-AE0E-95FA-F928-940DA519471C}"/>
+              </a:ext>
+            </a:extLst>
+          </p:cNvPr>
+          <p:cNvSpPr>
+            <a:spLocks noGrp="1" noRot="1" noChangeAspect="1"/>
+          </p:cNvSpPr>
+          <p:nvPr>
+            <p:ph type="sldImg"/>
+          </p:nvPr>
+        </p:nvSpPr>
+        <p:spPr/>
+      </p:sp>
+      <p:sp>
+        <p:nvSpPr>
+          <p:cNvPr id="3" name="Notes Placeholder 2">
+            <a:extLst>
+              <a:ext uri="{FF2B5EF4-FFF2-40B4-BE49-F238E27FC236}">
+                <a16:creationId xmlns:a16="http://schemas.microsoft.com/office/drawing/2014/main" id="{280C2184-F1D6-D5AB-4837-38DFF2D26EDC}"/>
+              </a:ext>
+            </a:extLst>
+          </p:cNvPr>
+          <p:cNvSpPr>
+            <a:spLocks noGrp="1"/>
+          </p:cNvSpPr>
+          <p:nvPr>
+            <p:ph type="body" idx="1"/>
+          </p:nvPr>
+        </p:nvSpPr>
+        <p:spPr/>
+        <p:txBody>
+          <a:bodyPr/>
+          <a:lstStyle/>
+          <a:p>
+            <a:pPr marL="171450" marR="0" lvl="0" indent="-171450" algn="l" defTabSz="914400" rtl="0" eaLnBrk="1" fontAlgn="auto" latinLnBrk="0" hangingPunct="1">
+              <a:lnSpc>
+                <a:spcPct val="100000"/>
+              </a:lnSpc>
+              <a:spcBef>
+                <a:spcPts val="0"/>
+              </a:spcBef>
+              <a:spcAft>
+                <a:spcPts val="0"/>
+              </a:spcAft>
+              <a:buClrTx/>
+              <a:buSzTx/>
+              <a:buFontTx/>
+              <a:buChar char="-"/>
+              <a:tabLst/>
+              <a:defRPr/>
+            </a:pPr>
+            <a:r>
+              <a:rPr lang="en-US" sz="1600" b="1" dirty="0">
+                <a:solidFill>
+                  <a:srgbClr val="0F172A"/>
+                </a:solidFill>
+              </a:rPr>
+              <a:t>Validate queries </a:t>
+            </a:r>
+          </a:p>
+          <a:p>
+            <a:pPr marL="628650" marR="0" lvl="1" indent="-171450" algn="l" defTabSz="914400" rtl="0" eaLnBrk="1" fontAlgn="auto" latinLnBrk="0" hangingPunct="1">
+              <a:lnSpc>
+                <a:spcPct val="100000"/>
+              </a:lnSpc>
+              <a:spcBef>
+                <a:spcPts val="0"/>
+              </a:spcBef>
+              <a:spcAft>
+                <a:spcPts val="0"/>
+              </a:spcAft>
+              <a:buClrTx/>
+              <a:buSzTx/>
+              <a:buFontTx/>
+              <a:buChar char="-"/>
+              <a:tabLst/>
+              <a:defRPr/>
+            </a:pPr>
+            <a:r>
+              <a:rPr lang="en-US" sz="1600" b="0" dirty="0"/>
+              <a:t>Block unsafe queries before execution.</a:t>
+            </a:r>
+            <a:r>
+              <a:rPr lang="en-US" sz="1600" dirty="0"/>
+              <a:t> Allow only SELECT </a:t>
+            </a:r>
+          </a:p>
+          <a:p>
+            <a:pPr marL="171450" lvl="0" indent="-171450">
+              <a:buFontTx/>
+              <a:buChar char="-"/>
+            </a:pPr>
+            <a:r>
+              <a:rPr lang="en-US" sz="1200" b="1" dirty="0">
+                <a:solidFill>
+                  <a:srgbClr val="0F172A"/>
+                </a:solidFill>
+              </a:rPr>
+              <a:t>Read-only DB user </a:t>
+            </a:r>
+          </a:p>
+          <a:p>
+            <a:pPr marL="628650" lvl="1" indent="-171450">
+              <a:buFontTx/>
+              <a:buChar char="-"/>
+            </a:pPr>
+            <a:r>
+              <a:rPr lang="en-US" sz="1200" b="0" dirty="0">
+                <a:solidFill>
+                  <a:srgbClr val="0F172A"/>
+                </a:solidFill>
+              </a:rPr>
+              <a:t>Set connection string read-only</a:t>
+            </a:r>
+          </a:p>
+          <a:p>
+            <a:pPr marL="171450" marR="0" lvl="0" indent="-171450" algn="l" defTabSz="914400" rtl="0" eaLnBrk="1" fontAlgn="auto" latinLnBrk="0" hangingPunct="1">
+              <a:lnSpc>
+                <a:spcPct val="100000"/>
+              </a:lnSpc>
+              <a:spcBef>
+                <a:spcPts val="0"/>
+              </a:spcBef>
+              <a:spcAft>
+                <a:spcPts val="0"/>
+              </a:spcAft>
+              <a:buClrTx/>
+              <a:buSzTx/>
+              <a:buFontTx/>
+              <a:buChar char="-"/>
+              <a:tabLst/>
+              <a:defRPr/>
+            </a:pPr>
+            <a:r>
+              <a:rPr lang="en-US" sz="1600" b="1" dirty="0"/>
+              <a:t>Human in the loop </a:t>
+            </a:r>
+          </a:p>
+          <a:p>
+            <a:pPr marL="628650" marR="0" lvl="1" indent="-171450" algn="l" defTabSz="914400" rtl="0" eaLnBrk="1" fontAlgn="auto" latinLnBrk="0" hangingPunct="1">
+              <a:lnSpc>
+                <a:spcPct val="100000"/>
+              </a:lnSpc>
+              <a:spcBef>
+                <a:spcPts val="0"/>
+              </a:spcBef>
+              <a:spcAft>
+                <a:spcPts val="0"/>
+              </a:spcAft>
+              <a:buClrTx/>
+              <a:buSzTx/>
+              <a:buFontTx/>
+              <a:buChar char="-"/>
+              <a:tabLst/>
+              <a:defRPr/>
+            </a:pPr>
+            <a:r>
+              <a:rPr lang="en-US" sz="1200" dirty="0">
+                <a:solidFill>
+                  <a:srgbClr val="475569"/>
+                </a:solidFill>
+              </a:rPr>
+              <a:t>First versions require human-approved queries</a:t>
+            </a:r>
+            <a:endParaRPr lang="en-US" b="1" dirty="0"/>
+          </a:p>
+          <a:p>
+            <a:pPr marL="171450" lvl="0" indent="-171450">
+              <a:buFontTx/>
+              <a:buChar char="-"/>
+            </a:pPr>
+            <a:r>
+              <a:rPr lang="en-US" sz="1200" b="1" dirty="0">
+                <a:solidFill>
+                  <a:srgbClr val="0F172A"/>
+                </a:solidFill>
+              </a:rPr>
+              <a:t>Enforce limits:</a:t>
+            </a:r>
+          </a:p>
+          <a:p>
+            <a:pPr marL="628650" lvl="1" indent="-171450">
+              <a:buFontTx/>
+              <a:buChar char="-"/>
+            </a:pPr>
+            <a:r>
+              <a:rPr lang="en-US" sz="1200" b="0" dirty="0">
+                <a:solidFill>
+                  <a:srgbClr val="0F172A"/>
+                </a:solidFill>
+              </a:rPr>
+              <a:t>Limit row count and set a timeout</a:t>
+            </a:r>
+            <a:endParaRPr lang="en-US" sz="1200" b="1" dirty="0">
+              <a:solidFill>
+                <a:srgbClr val="0F172A"/>
+              </a:solidFill>
+            </a:endParaRPr>
+          </a:p>
+          <a:p>
+            <a:pPr marL="171450" lvl="0" indent="-171450">
+              <a:buFontTx/>
+              <a:buChar char="-"/>
+            </a:pPr>
+            <a:r>
+              <a:rPr lang="en-US" sz="1200" b="1" dirty="0">
+                <a:solidFill>
+                  <a:srgbClr val="0F172A"/>
+                </a:solidFill>
+              </a:rPr>
+              <a:t>Log everything </a:t>
+            </a:r>
+          </a:p>
+          <a:p>
+            <a:pPr marL="628650" lvl="1" indent="-171450">
+              <a:buFontTx/>
+              <a:buChar char="-"/>
+            </a:pPr>
+            <a:r>
+              <a:rPr lang="en-US" sz="1200" b="0" dirty="0">
+                <a:solidFill>
+                  <a:srgbClr val="0F172A"/>
+                </a:solidFill>
+              </a:rPr>
+              <a:t>For debugging and improve the system </a:t>
+            </a:r>
+          </a:p>
+          <a:p>
+            <a:pPr marL="171450" lvl="0" indent="-171450">
+              <a:buFontTx/>
+              <a:buChar char="-"/>
+            </a:pPr>
+            <a:r>
+              <a:rPr lang="en-US" sz="1200" b="1" dirty="0">
+                <a:solidFill>
+                  <a:srgbClr val="0F172A"/>
+                </a:solidFill>
+              </a:rPr>
+              <a:t>Save working queries</a:t>
+            </a:r>
+          </a:p>
+          <a:p>
+            <a:pPr marL="628650" lvl="1" indent="-171450">
+              <a:buFontTx/>
+              <a:buChar char="-"/>
+            </a:pPr>
+            <a:r>
+              <a:rPr lang="en-US" sz="1200" b="0" dirty="0">
+                <a:solidFill>
+                  <a:srgbClr val="0F172A"/>
+                </a:solidFill>
+              </a:rPr>
+              <a:t>Save user queries and SQL so people can re-run, they can share the working queries</a:t>
+            </a:r>
+          </a:p>
+          <a:p>
+            <a:pPr marL="171450" lvl="0" indent="-171450">
+              <a:buFontTx/>
+              <a:buChar char="-"/>
+            </a:pPr>
+            <a:r>
+              <a:rPr lang="en-US" sz="1200" b="1" dirty="0">
+                <a:solidFill>
+                  <a:srgbClr val="0F172A"/>
+                </a:solidFill>
+              </a:rPr>
+              <a:t>Start small </a:t>
+            </a:r>
+            <a:endParaRPr lang="en-US" dirty="0"/>
+          </a:p>
+          <a:p>
+            <a:pPr marL="628650" lvl="1" indent="-171450">
+              <a:buFontTx/>
+              <a:buChar char="-"/>
+            </a:pPr>
+            <a:r>
+              <a:rPr lang="en-US" dirty="0"/>
+              <a:t>Ship the ugly version first.</a:t>
+            </a:r>
+          </a:p>
+        </p:txBody>
+      </p:sp>
+    </p:spTree>
+    <p:extLst>
+      <p:ext uri="{BB962C8B-B14F-4D97-AF65-F5344CB8AC3E}">
+        <p14:creationId xmlns:p14="http://schemas.microsoft.com/office/powerpoint/2010/main" val="4147032026"/>
+      </p:ext>
+    </p:extLst>
+  </p:cSld>
+  <p:clrMapOvr>
+    <a:masterClrMapping/>
+  </p:clrMapOvr>
+</p:notes>
+</file>
+
+<file path=ppt/notesSlides/notesSlide22.xml><?xml version="1.0" encoding="utf-8"?>
 <p:notes xmlns:a="http://schemas.openxmlformats.org/drawingml/2006/main" xmlns:r="http://schemas.openxmlformats.org/officeDocument/2006/relationships" xmlns:p="http://schemas.openxmlformats.org/presentationml/2006/main">
   <p:cSld>
     <p:spTree>
@@ -2114,7 +2590,7 @@
 </p:notes>
 </file>
 
-<file path=ppt/notesSlides/notesSlide22.xml><?xml version="1.0" encoding="utf-8"?>
+<file path=ppt/notesSlides/notesSlide23.xml><?xml version="1.0" encoding="utf-8"?>
 <p:notes xmlns:a="http://schemas.openxmlformats.org/drawingml/2006/main" xmlns:r="http://schemas.openxmlformats.org/officeDocument/2006/relationships" xmlns:p="http://schemas.openxmlformats.org/presentationml/2006/main">
   <p:cSld>
     <p:spTree>
@@ -12256,15 +12732,15 @@
           </a:bodyPr>
           <a:lstStyle/>
           <a:p>
-            <a:pPr algn="l"/>
-            <a:r>
-              <a:rPr lang="en-US" sz="4800" b="1" dirty="0">
-                <a:solidFill>
-                  <a:srgbClr val="0F172A"/>
-                </a:solidFill>
-              </a:rPr>
-              <a:t>What to Watch Out For</a:t>
-            </a:r>
+            <a:r>
+              <a:rPr lang="en-US" sz="4800" b="1" dirty="0"/>
+              <a:t>Challenges</a:t>
+            </a:r>
+            <a:endParaRPr lang="en-US" sz="4800" b="1" dirty="0">
+              <a:solidFill>
+                <a:srgbClr val="0F172A"/>
+              </a:solidFill>
+            </a:endParaRPr>
           </a:p>
         </p:txBody>
       </p:sp>
@@ -12276,8 +12752,8 @@
         </p:nvSpPr>
         <p:spPr>
           <a:xfrm>
-            <a:off x="635000" y="1804219"/>
-            <a:ext cx="5334000" cy="3859161"/>
+            <a:off x="635000" y="1654995"/>
+            <a:ext cx="10182817" cy="4270904"/>
           </a:xfrm>
           <a:prstGeom prst="roundRect">
             <a:avLst>
@@ -12299,67 +12775,262 @@
           <a:bodyPr wrap="square" lIns="240000" tIns="200000" rIns="240000" bIns="200000" anchor="t"/>
           <a:lstStyle/>
           <a:p>
-            <a:pPr algn="l"/>
-            <a:r>
-              <a:rPr lang="en-US" sz="2000" b="1" spc="300" dirty="0">
-                <a:solidFill>
-                  <a:srgbClr val="9F1239"/>
-                </a:solidFill>
-              </a:rPr>
-              <a:t>⚠  CHALLENGES</a:t>
-            </a:r>
-          </a:p>
-          <a:p>
-            <a:pPr algn="l">
+            <a:pPr>
+              <a:spcBef>
+                <a:spcPts val="700"/>
+              </a:spcBef>
+            </a:pPr>
+            <a:r>
+              <a:rPr lang="en-US" sz="3600" b="1" dirty="0">
+                <a:solidFill>
+                  <a:schemeClr val="accent5">
+                    <a:lumMod val="60000"/>
+                    <a:lumOff val="40000"/>
+                  </a:schemeClr>
+                </a:solidFill>
+              </a:rPr>
+              <a:t>⚠ </a:t>
+            </a:r>
+            <a:r>
+              <a:rPr lang="en-US" sz="3600" b="1" dirty="0">
+                <a:solidFill>
+                  <a:srgbClr val="0F172A"/>
+                </a:solidFill>
+              </a:rPr>
+              <a:t>Multi-tenancy &amp; permissions</a:t>
+            </a:r>
+            <a:r>
+              <a:rPr lang="en-US" sz="4000" b="1" dirty="0">
+                <a:solidFill>
+                  <a:srgbClr val="0F172A"/>
+                </a:solidFill>
+              </a:rPr>
+              <a:t> </a:t>
+            </a:r>
+            <a:r>
+              <a:rPr lang="en-US" sz="3200" dirty="0">
+                <a:solidFill>
+                  <a:srgbClr val="64748B"/>
+                </a:solidFill>
+              </a:rPr>
+              <a:t>row-level security</a:t>
+            </a:r>
+            <a:endParaRPr lang="en-US" sz="3600" b="1" dirty="0">
+              <a:solidFill>
+                <a:srgbClr val="0F172A"/>
+              </a:solidFill>
+            </a:endParaRPr>
+          </a:p>
+          <a:p>
+            <a:pPr>
               <a:spcBef>
                 <a:spcPts val="400"/>
               </a:spcBef>
             </a:pPr>
             <a:r>
+              <a:rPr lang="en-US" sz="3600" b="1" dirty="0">
+                <a:solidFill>
+                  <a:schemeClr val="accent5">
+                    <a:lumMod val="60000"/>
+                    <a:lumOff val="40000"/>
+                  </a:schemeClr>
+                </a:solidFill>
+              </a:rPr>
+              <a:t>⚠</a:t>
+            </a:r>
+            <a:r>
+              <a:rPr lang="en-US" sz="3600" b="1" dirty="0"/>
+              <a:t> </a:t>
+            </a:r>
+            <a:r>
+              <a:rPr lang="en-US" sz="3600" b="1" dirty="0">
+                <a:solidFill>
+                  <a:srgbClr val="0F172A"/>
+                </a:solidFill>
+              </a:rPr>
+              <a:t>Hallucination </a:t>
+            </a:r>
+            <a:r>
+              <a:rPr lang="en-US" sz="3200" dirty="0">
+                <a:solidFill>
+                  <a:srgbClr val="64748B"/>
+                </a:solidFill>
+              </a:rPr>
+              <a:t>tables, columns</a:t>
+            </a:r>
+          </a:p>
+          <a:p>
+            <a:pPr>
+              <a:spcBef>
+                <a:spcPts val="400"/>
+              </a:spcBef>
+            </a:pPr>
+            <a:r>
+              <a:rPr lang="en-US" sz="3600" b="1" dirty="0">
+                <a:solidFill>
+                  <a:schemeClr val="accent5">
+                    <a:lumMod val="60000"/>
+                    <a:lumOff val="40000"/>
+                  </a:schemeClr>
+                </a:solidFill>
+              </a:rPr>
+              <a:t>⚠</a:t>
+            </a:r>
+            <a:r>
+              <a:rPr lang="en-US" sz="3600" b="1" dirty="0"/>
+              <a:t> </a:t>
+            </a:r>
+            <a:r>
+              <a:rPr lang="en-US" sz="3600" b="1" dirty="0">
+                <a:solidFill>
+                  <a:srgbClr val="0F172A"/>
+                </a:solidFill>
+              </a:rPr>
+              <a:t>Ambiguous questions </a:t>
+            </a:r>
+            <a:r>
+              <a:rPr lang="en-US" sz="3200" dirty="0">
+                <a:solidFill>
+                  <a:srgbClr val="64748B"/>
+                </a:solidFill>
+              </a:rPr>
+              <a:t>“last month”, “best song”</a:t>
+            </a:r>
+          </a:p>
+          <a:p>
+            <a:pPr>
+              <a:spcBef>
+                <a:spcPts val="400"/>
+              </a:spcBef>
+            </a:pPr>
+            <a:r>
+              <a:rPr lang="en-US" sz="3600" b="1" dirty="0">
+                <a:solidFill>
+                  <a:schemeClr val="accent5">
+                    <a:lumMod val="60000"/>
+                    <a:lumOff val="40000"/>
+                  </a:schemeClr>
+                </a:solidFill>
+              </a:rPr>
+              <a:t>⚠</a:t>
+            </a:r>
+            <a:r>
+              <a:rPr lang="en-US" sz="3600" b="1" dirty="0"/>
+              <a:t> </a:t>
+            </a:r>
+            <a:r>
+              <a:rPr lang="en-US" sz="3600" b="1" dirty="0">
+                <a:solidFill>
+                  <a:srgbClr val="0F172A"/>
+                </a:solidFill>
+              </a:rPr>
+              <a:t>Cost &amp; Latency</a:t>
+            </a:r>
+            <a:r>
               <a:rPr lang="en-US" sz="3200" b="1" dirty="0">
                 <a:solidFill>
                   <a:srgbClr val="0F172A"/>
                 </a:solidFill>
               </a:rPr>
-              <a:t>It gets hard fast.</a:t>
-            </a:r>
-            <a:br>
-              <a:rPr lang="en-US" sz="3200" b="1" dirty="0">
+              <a:t> </a:t>
+            </a:r>
+            <a:r>
+              <a:rPr lang="en-US" sz="3200" dirty="0">
+                <a:solidFill>
+                  <a:srgbClr val="64748B"/>
+                </a:solidFill>
+              </a:rPr>
+              <a:t>cache aggressively</a:t>
+            </a:r>
+          </a:p>
+          <a:p>
+            <a:pPr>
+              <a:spcBef>
+                <a:spcPts val="400"/>
+              </a:spcBef>
+            </a:pPr>
+            <a:r>
+              <a:rPr lang="en-US" sz="3600" b="1" dirty="0">
+                <a:solidFill>
+                  <a:schemeClr val="accent5">
+                    <a:lumMod val="60000"/>
+                    <a:lumOff val="40000"/>
+                  </a:schemeClr>
+                </a:solidFill>
+              </a:rPr>
+              <a:t>⚠</a:t>
+            </a:r>
+            <a:r>
+              <a:rPr lang="en-US" sz="3600" b="1" dirty="0"/>
+              <a:t> </a:t>
+            </a:r>
+            <a:r>
+              <a:rPr lang="en-US" sz="3600" b="1" dirty="0">
                 <a:solidFill>
                   <a:srgbClr val="0F172A"/>
                 </a:solidFill>
               </a:rPr>
-            </a:br>
-            <a:endParaRPr lang="en-US" sz="3200" b="1" dirty="0">
+              <a:t>Prompt tuning </a:t>
+            </a:r>
+            <a:r>
+              <a:rPr lang="en-US" sz="3200" dirty="0">
+                <a:solidFill>
+                  <a:srgbClr val="64748B"/>
+                </a:solidFill>
+              </a:rPr>
+              <a:t>as schema grows</a:t>
+            </a:r>
+          </a:p>
+          <a:p>
+            <a:pPr>
+              <a:spcBef>
+                <a:spcPts val="400"/>
+              </a:spcBef>
+            </a:pPr>
+            <a:r>
+              <a:rPr lang="en-US" sz="2800" b="1" dirty="0">
+                <a:solidFill>
+                  <a:schemeClr val="accent5">
+                    <a:lumMod val="60000"/>
+                    <a:lumOff val="40000"/>
+                  </a:schemeClr>
+                </a:solidFill>
+              </a:rPr>
+              <a:t>❓</a:t>
+            </a:r>
+            <a:r>
+              <a:rPr lang="en-US" sz="3200" b="1" dirty="0"/>
+              <a:t> </a:t>
+            </a:r>
+            <a:r>
+              <a:rPr lang="en-US" sz="3600" b="1" dirty="0"/>
+              <a:t>Confidential data </a:t>
+            </a:r>
+            <a:r>
+              <a:rPr lang="en-US" sz="3200" dirty="0">
+                <a:solidFill>
+                  <a:srgbClr val="64748B"/>
+                </a:solidFill>
+              </a:rPr>
+              <a:t>send only schema or local LLM</a:t>
+            </a:r>
+            <a:endParaRPr lang="en-US" sz="2800" dirty="0">
               <a:solidFill>
-                <a:srgbClr val="0F172A"/>
+                <a:srgbClr val="64748B"/>
               </a:solidFill>
             </a:endParaRPr>
           </a:p>
           <a:p>
-            <a:pPr marL="228600" indent="-228600">
+            <a:pPr>
               <a:spcBef>
-                <a:spcPts val="700"/>
+                <a:spcPts val="400"/>
               </a:spcBef>
-              <a:buFont typeface="Arial"/>
-              <a:buChar char="•"/>
             </a:pPr>
-            <a:r>
-              <a:rPr lang="en-US" sz="2000" b="1" dirty="0">
-                <a:solidFill>
-                  <a:srgbClr val="0F172A"/>
-                </a:solidFill>
-              </a:rPr>
-              <a:t>Prompt drift </a:t>
-            </a:r>
-            <a:r>
-              <a:rPr lang="en-US" dirty="0">
-                <a:solidFill>
-                  <a:srgbClr val="64748B"/>
-                </a:solidFill>
-              </a:rPr>
-              <a:t>as schema grows</a:t>
-            </a:r>
+            <a:endParaRPr lang="en-US" sz="3200" dirty="0">
+              <a:solidFill>
+                <a:srgbClr val="64748B"/>
+              </a:solidFill>
+            </a:endParaRPr>
           </a:p>
           <a:p>
             <a:pPr marL="228600" indent="-228600">
@@ -12369,22 +13040,11 @@
               <a:buFont typeface="Arial"/>
               <a:buChar char="•"/>
             </a:pPr>
-            <a:r>
-              <a:rPr lang="en-US" sz="2000" b="1" dirty="0">
-                <a:solidFill>
-                  <a:srgbClr val="0F172A"/>
-                </a:solidFill>
-              </a:rPr>
-              <a:t>Ambiguous questions </a:t>
-            </a:r>
-            <a:r>
-              <a:rPr lang="en-US" dirty="0">
-                <a:solidFill>
-                  <a:srgbClr val="64748B"/>
-                </a:solidFill>
-              </a:rPr>
-              <a:t>("last month")</a:t>
-            </a:r>
+            <a:endParaRPr lang="en-US" sz="3200" dirty="0">
+              <a:solidFill>
+                <a:srgbClr val="64748B"/>
+              </a:solidFill>
+            </a:endParaRPr>
           </a:p>
           <a:p>
             <a:pPr marL="228600" indent="-228600">
@@ -12394,22 +13054,11 @@
               <a:buFont typeface="Arial"/>
               <a:buChar char="•"/>
             </a:pPr>
-            <a:r>
-              <a:rPr lang="en-US" sz="2000" b="1" dirty="0">
-                <a:solidFill>
-                  <a:srgbClr val="0F172A"/>
-                </a:solidFill>
-              </a:rPr>
-              <a:t>Cost &amp; latency </a:t>
-            </a:r>
-            <a:r>
-              <a:rPr lang="en-US" dirty="0">
-                <a:solidFill>
-                  <a:srgbClr val="64748B"/>
-                </a:solidFill>
-              </a:rPr>
-              <a:t>per query</a:t>
-            </a:r>
+            <a:endParaRPr lang="en-US" sz="3200" dirty="0">
+              <a:solidFill>
+                <a:srgbClr val="64748B"/>
+              </a:solidFill>
+            </a:endParaRPr>
           </a:p>
           <a:p>
             <a:pPr marL="228600" indent="-228600">
@@ -12419,60 +13068,106 @@
               <a:buFont typeface="Arial"/>
               <a:buChar char="•"/>
             </a:pPr>
-            <a:r>
-              <a:rPr lang="en-US" sz="2000" b="1" dirty="0">
-                <a:solidFill>
-                  <a:srgbClr val="0F172A"/>
-                </a:solidFill>
-              </a:rPr>
-              <a:t>Hallucinated columns </a:t>
-            </a:r>
-            <a:r>
-              <a:rPr lang="en-US" dirty="0">
-                <a:solidFill>
-                  <a:srgbClr val="64748B"/>
-                </a:solidFill>
-              </a:rPr>
-              <a:t>&amp; joins</a:t>
-            </a:r>
-          </a:p>
-          <a:p>
-            <a:pPr marL="228600" indent="-228600">
-              <a:spcBef>
-                <a:spcPts val="400"/>
-              </a:spcBef>
-              <a:buFont typeface="Arial"/>
-              <a:buChar char="•"/>
-            </a:pPr>
-            <a:r>
-              <a:rPr lang="en-US" sz="2000" b="1" dirty="0">
-                <a:solidFill>
-                  <a:srgbClr val="0F172A"/>
-                </a:solidFill>
-              </a:rPr>
-              <a:t>Permissions </a:t>
-            </a:r>
-            <a:r>
-              <a:rPr lang="en-US" dirty="0">
-                <a:solidFill>
-                  <a:srgbClr val="64748B"/>
-                </a:solidFill>
-              </a:rPr>
-              <a:t>&amp; row-level security</a:t>
-            </a:r>
-          </a:p>
-        </p:txBody>
-      </p:sp>
-      <p:sp>
-        <p:nvSpPr>
-          <p:cNvPr id="1501" name="BP"/>
+            <a:endParaRPr lang="en-US" sz="3200" dirty="0">
+              <a:solidFill>
+                <a:srgbClr val="64748B"/>
+              </a:solidFill>
+            </a:endParaRPr>
+          </a:p>
+        </p:txBody>
+      </p:sp>
+    </p:spTree>
+    <p:extLst>
+      <p:ext uri="{BB962C8B-B14F-4D97-AF65-F5344CB8AC3E}">
+        <p14:creationId xmlns:p14="http://schemas.microsoft.com/office/powerpoint/2010/main" val="3349061554"/>
+      </p:ext>
+    </p:extLst>
+  </p:cSld>
+  <p:clrMapOvr>
+    <a:masterClrMapping/>
+  </p:clrMapOvr>
+</p:sld>
+</file>
+
+<file path=ppt/slides/slide21.xml><?xml version="1.0" encoding="utf-8"?>
+<p:sld xmlns:a="http://schemas.openxmlformats.org/drawingml/2006/main" xmlns:r="http://schemas.openxmlformats.org/officeDocument/2006/relationships" xmlns:p="http://schemas.openxmlformats.org/presentationml/2006/main">
+  <p:cSld>
+    <p:spTree>
+      <p:nvGrpSpPr>
+        <p:cNvPr id="1" name="">
+          <a:extLst>
+            <a:ext uri="{FF2B5EF4-FFF2-40B4-BE49-F238E27FC236}">
+              <a16:creationId xmlns:a16="http://schemas.microsoft.com/office/drawing/2014/main" id="{004E1FFA-C6E2-1595-49D5-EA4DC238E627}"/>
+            </a:ext>
+          </a:extLst>
+        </p:cNvPr>
+        <p:cNvGrpSpPr/>
+        <p:nvPr/>
+      </p:nvGrpSpPr>
+      <p:grpSpPr>
+        <a:xfrm>
+          <a:off x="0" y="0"/>
+          <a:ext cx="0" cy="0"/>
+          <a:chOff x="0" y="0"/>
+          <a:chExt cx="0" cy="0"/>
+        </a:xfrm>
+      </p:grpSpPr>
+      <p:sp>
+        <p:nvSpPr>
+          <p:cNvPr id="2" name="Title 1">
+            <a:extLst>
+              <a:ext uri="{FF2B5EF4-FFF2-40B4-BE49-F238E27FC236}">
+                <a16:creationId xmlns:a16="http://schemas.microsoft.com/office/drawing/2014/main" id="{0190D4FD-0D7E-473D-F84A-E51D1F5389EA}"/>
+              </a:ext>
+            </a:extLst>
+          </p:cNvPr>
+          <p:cNvSpPr>
+            <a:spLocks noGrp="1"/>
+          </p:cNvSpPr>
+          <p:nvPr>
+            <p:ph type="title"/>
+          </p:nvPr>
+        </p:nvSpPr>
+        <p:spPr>
+          <a:xfrm>
+            <a:off x="725622" y="50104"/>
+            <a:ext cx="10515600" cy="954164"/>
+          </a:xfrm>
+        </p:spPr>
+        <p:txBody>
+          <a:bodyPr>
+            <a:normAutofit/>
+          </a:bodyPr>
+          <a:lstStyle/>
+          <a:p>
+            <a:r>
+              <a:rPr lang="en-US" sz="4800" b="1" dirty="0"/>
+              <a:t>Best Practices</a:t>
+            </a:r>
+            <a:endParaRPr lang="en-US" sz="4800" b="1" dirty="0">
+              <a:solidFill>
+                <a:srgbClr val="0F172A"/>
+              </a:solidFill>
+            </a:endParaRPr>
+          </a:p>
+        </p:txBody>
+      </p:sp>
+      <p:sp>
+        <p:nvSpPr>
+          <p:cNvPr id="1501" name="BP">
+            <a:extLst>
+              <a:ext uri="{FF2B5EF4-FFF2-40B4-BE49-F238E27FC236}">
+                <a16:creationId xmlns:a16="http://schemas.microsoft.com/office/drawing/2014/main" id="{1AE2789D-4499-7160-E5B7-4A14E5124A65}"/>
+              </a:ext>
+            </a:extLst>
+          </p:cNvPr>
           <p:cNvSpPr/>
           <p:nvPr/>
         </p:nvSpPr>
         <p:spPr>
           <a:xfrm>
-            <a:off x="6222999" y="1804219"/>
-            <a:ext cx="5472471" cy="3859161"/>
+            <a:off x="725622" y="954164"/>
+            <a:ext cx="10740756" cy="5305065"/>
           </a:xfrm>
           <a:prstGeom prst="roundRect">
             <a:avLst>
@@ -12494,166 +13189,261 @@
           <a:bodyPr wrap="square" lIns="240000" tIns="200000" rIns="240000" bIns="200000" anchor="t"/>
           <a:lstStyle/>
           <a:p>
-            <a:pPr algn="l"/>
-            <a:r>
-              <a:rPr lang="en-US" sz="2000" b="1" spc="300" dirty="0">
-                <a:solidFill>
-                  <a:srgbClr val="047857"/>
-                </a:solidFill>
-              </a:rPr>
-              <a:t>✓  BEST PRACTICES</a:t>
-            </a:r>
-          </a:p>
-          <a:p>
-            <a:pPr algn="l">
+            <a:pPr>
+              <a:spcBef>
+                <a:spcPts val="700"/>
+              </a:spcBef>
+              <a:buClr>
+                <a:srgbClr val="339933"/>
+              </a:buClr>
+            </a:pPr>
+            <a:r>
+              <a:rPr lang="en-US" sz="3600" b="1" dirty="0">
+                <a:solidFill>
+                  <a:srgbClr val="00B050"/>
+                </a:solidFill>
+              </a:rPr>
+              <a:t>✓</a:t>
+            </a:r>
+            <a:r>
+              <a:rPr lang="en-US" sz="4400" b="1" dirty="0"/>
+              <a:t> </a:t>
+            </a:r>
+            <a:r>
+              <a:rPr lang="en-US" sz="3600" b="1" dirty="0">
+                <a:solidFill>
+                  <a:srgbClr val="0F172A"/>
+                </a:solidFill>
+              </a:rPr>
+              <a:t>Validate queries </a:t>
+            </a:r>
+            <a:r>
+              <a:rPr lang="en-US" sz="3200" dirty="0">
+                <a:solidFill>
+                  <a:srgbClr val="475569"/>
+                </a:solidFill>
+              </a:rPr>
+              <a:t>block unsafe ones</a:t>
+            </a:r>
+          </a:p>
+          <a:p>
+            <a:pPr>
+              <a:spcBef>
+                <a:spcPts val="700"/>
+              </a:spcBef>
+              <a:buClr>
+                <a:srgbClr val="339933"/>
+              </a:buClr>
+            </a:pPr>
+            <a:r>
+              <a:rPr lang="en-US" sz="3600" b="1" dirty="0">
+                <a:solidFill>
+                  <a:srgbClr val="00B050"/>
+                </a:solidFill>
+              </a:rPr>
+              <a:t>✓</a:t>
+            </a:r>
+            <a:r>
+              <a:rPr lang="en-US" sz="4400" b="1" dirty="0">
+                <a:solidFill>
+                  <a:srgbClr val="00B050"/>
+                </a:solidFill>
+              </a:rPr>
+              <a:t> </a:t>
+            </a:r>
+            <a:r>
+              <a:rPr lang="en-US" sz="3600" b="1" dirty="0">
+                <a:solidFill>
+                  <a:srgbClr val="0F172A"/>
+                </a:solidFill>
+              </a:rPr>
+              <a:t>Read-only DB user </a:t>
+            </a:r>
+            <a:r>
+              <a:rPr lang="en-US" sz="3200" dirty="0">
+                <a:solidFill>
+                  <a:srgbClr val="475569"/>
+                </a:solidFill>
+              </a:rPr>
+              <a:t>for the connection string</a:t>
+            </a:r>
+          </a:p>
+          <a:p>
+            <a:pPr>
+              <a:spcBef>
+                <a:spcPts val="700"/>
+              </a:spcBef>
+              <a:buClr>
+                <a:srgbClr val="339933"/>
+              </a:buClr>
+            </a:pPr>
+            <a:r>
+              <a:rPr lang="en-US" sz="3600" b="1" dirty="0">
+                <a:solidFill>
+                  <a:srgbClr val="00B050"/>
+                </a:solidFill>
+              </a:rPr>
+              <a:t>✓</a:t>
+            </a:r>
+            <a:r>
+              <a:rPr lang="en-US" sz="4000" b="1" dirty="0">
+                <a:solidFill>
+                  <a:srgbClr val="00B050"/>
+                </a:solidFill>
+              </a:rPr>
+              <a:t> </a:t>
+            </a:r>
+            <a:r>
+              <a:rPr lang="en-US" sz="3600" b="1" dirty="0"/>
+              <a:t>Human in the loop </a:t>
+            </a:r>
+            <a:r>
+              <a:rPr lang="en-US" sz="3200" dirty="0">
+                <a:solidFill>
+                  <a:srgbClr val="475569"/>
+                </a:solidFill>
+              </a:rPr>
+              <a:t>approval before execution</a:t>
+            </a:r>
+          </a:p>
+          <a:p>
+            <a:pPr>
+              <a:spcBef>
+                <a:spcPts val="700"/>
+              </a:spcBef>
+              <a:buClr>
+                <a:srgbClr val="339933"/>
+              </a:buClr>
+            </a:pPr>
+            <a:r>
+              <a:rPr lang="en-US" sz="3600" b="1" dirty="0">
+                <a:solidFill>
+                  <a:srgbClr val="00B050"/>
+                </a:solidFill>
+              </a:rPr>
+              <a:t>✓</a:t>
+            </a:r>
+            <a:r>
+              <a:rPr lang="en-US" sz="3600" b="1" dirty="0"/>
+              <a:t> Enforce limits </a:t>
+            </a:r>
+            <a:r>
+              <a:rPr lang="en-US" sz="3200" dirty="0">
+                <a:solidFill>
+                  <a:srgbClr val="475569"/>
+                </a:solidFill>
+              </a:rPr>
+              <a:t>max 1000 records, max 30 seconds</a:t>
+            </a:r>
+          </a:p>
+          <a:p>
+            <a:pPr>
               <a:spcBef>
                 <a:spcPts val="400"/>
               </a:spcBef>
+              <a:buClr>
+                <a:srgbClr val="339933"/>
+              </a:buClr>
             </a:pPr>
             <a:r>
-              <a:rPr lang="en-US" sz="3200" b="1" dirty="0">
+              <a:rPr lang="en-US" sz="3600" b="1" dirty="0">
+                <a:solidFill>
+                  <a:srgbClr val="00B050"/>
+                </a:solidFill>
+              </a:rPr>
+              <a:t>✓ </a:t>
+            </a:r>
+            <a:r>
+              <a:rPr lang="en-US" sz="3600" b="1" dirty="0">
                 <a:solidFill>
                   <a:srgbClr val="0F172A"/>
                 </a:solidFill>
               </a:rPr>
-              <a:t>What actually works.</a:t>
-            </a:r>
-            <a:br>
-              <a:rPr lang="en-US" sz="3200" b="1" dirty="0">
-                <a:solidFill>
-                  <a:srgbClr val="0F172A"/>
-                </a:solidFill>
-              </a:rPr>
-            </a:br>
-            <a:endParaRPr lang="en-US" sz="3200" b="1" dirty="0">
-              <a:solidFill>
-                <a:srgbClr val="0F172A"/>
-              </a:solidFill>
-            </a:endParaRPr>
-          </a:p>
-          <a:p>
-            <a:pPr marL="228600" indent="-228600">
-              <a:spcBef>
-                <a:spcPts val="700"/>
-              </a:spcBef>
-              <a:buFont typeface="Arial"/>
-              <a:buChar char="✓"/>
-            </a:pPr>
-            <a:r>
-              <a:rPr lang="en-US" sz="2000" b="1" dirty="0">
-                <a:solidFill>
-                  <a:srgbClr val="0F172A"/>
-                </a:solidFill>
-              </a:rPr>
-              <a:t>Always validate </a:t>
-            </a:r>
-            <a:r>
-              <a:rPr lang="en-US" dirty="0">
+              <a:t>Log everything </a:t>
+            </a:r>
+            <a:r>
+              <a:rPr lang="en-US" sz="3200" dirty="0">
                 <a:solidFill>
                   <a:srgbClr val="475569"/>
                 </a:solidFill>
               </a:rPr>
-              <a:t>— never trust raw SQL</a:t>
-            </a:r>
-          </a:p>
-          <a:p>
-            <a:pPr marL="228600" indent="-228600">
+              <a:t>prompt, SQL, result</a:t>
+            </a:r>
+          </a:p>
+          <a:p>
+            <a:pPr>
               <a:spcBef>
                 <a:spcPts val="400"/>
               </a:spcBef>
-              <a:buFont typeface="Arial"/>
-              <a:buChar char="✓"/>
+              <a:buClr>
+                <a:srgbClr val="339933"/>
+              </a:buClr>
             </a:pPr>
             <a:r>
-              <a:rPr lang="en-US" sz="2000" b="1" dirty="0">
-                <a:solidFill>
-                  <a:srgbClr val="0F172A"/>
-                </a:solidFill>
-              </a:rPr>
-              <a:t>Keep prompts strict </a:t>
-            </a:r>
-            <a:r>
-              <a:rPr lang="en-US" dirty="0">
+              <a:rPr lang="en-US" sz="3600" b="1" dirty="0">
+                <a:solidFill>
+                  <a:srgbClr val="00B050"/>
+                </a:solidFill>
+              </a:rPr>
+              <a:t>✓ </a:t>
+            </a:r>
+            <a:r>
+              <a:rPr lang="en-US" sz="3600" b="1" dirty="0">
+                <a:solidFill>
+                  <a:srgbClr val="020919"/>
+                </a:solidFill>
+              </a:rPr>
+              <a:t>Save working queries </a:t>
+            </a:r>
+            <a:r>
+              <a:rPr lang="en-US" sz="3200" dirty="0">
                 <a:solidFill>
                   <a:srgbClr val="475569"/>
                 </a:solidFill>
               </a:rPr>
-              <a:t>&amp; versioned</a:t>
-            </a:r>
-          </a:p>
-          <a:p>
-            <a:pPr marL="228600" indent="-228600">
+              <a:t>set as public, private</a:t>
+            </a:r>
+          </a:p>
+          <a:p>
+            <a:pPr>
               <a:spcBef>
                 <a:spcPts val="400"/>
               </a:spcBef>
-              <a:buFont typeface="Arial"/>
-              <a:buChar char="✓"/>
+              <a:buClr>
+                <a:srgbClr val="339933"/>
+              </a:buClr>
             </a:pPr>
             <a:r>
-              <a:rPr lang="en-US" sz="2000" b="1" dirty="0">
+              <a:rPr lang="en-US" sz="3600" b="1" dirty="0">
+                <a:solidFill>
+                  <a:srgbClr val="00B050"/>
+                </a:solidFill>
+              </a:rPr>
+              <a:t>✓</a:t>
+            </a:r>
+            <a:r>
+              <a:rPr lang="en-US" sz="4000" b="1" dirty="0">
+                <a:solidFill>
+                  <a:srgbClr val="00B050"/>
+                </a:solidFill>
+              </a:rPr>
+              <a:t> </a:t>
+            </a:r>
+            <a:r>
+              <a:rPr lang="en-US" sz="3600" b="1" dirty="0">
                 <a:solidFill>
                   <a:srgbClr val="0F172A"/>
                 </a:solidFill>
               </a:rPr>
-              <a:t>Read-only DB user </a:t>
-            </a:r>
-            <a:r>
-              <a:rPr lang="en-US" dirty="0">
+              <a:t>Start small </a:t>
+            </a:r>
+            <a:r>
+              <a:rPr lang="en-US" sz="3200" dirty="0">
                 <a:solidFill>
                   <a:srgbClr val="475569"/>
                 </a:solidFill>
               </a:rPr>
-              <a:t>for the pipeline</a:t>
-            </a:r>
-          </a:p>
-          <a:p>
-            <a:pPr marL="228600" indent="-228600">
-              <a:spcBef>
-                <a:spcPts val="400"/>
-              </a:spcBef>
-              <a:buFont typeface="Arial"/>
-              <a:buChar char="✓"/>
-            </a:pPr>
-            <a:r>
-              <a:rPr lang="en-US" sz="2000" b="1" dirty="0">
-                <a:solidFill>
-                  <a:srgbClr val="0F172A"/>
-                </a:solidFill>
-              </a:rPr>
-              <a:t>Log everything </a:t>
-            </a:r>
-            <a:r>
-              <a:rPr lang="en-US" dirty="0">
-                <a:solidFill>
-                  <a:srgbClr val="475569"/>
-                </a:solidFill>
-              </a:rPr>
-              <a:t>— prompt, SQL, result</a:t>
-            </a:r>
-          </a:p>
-          <a:p>
-            <a:pPr marL="228600" indent="-228600">
-              <a:spcBef>
-                <a:spcPts val="400"/>
-              </a:spcBef>
-              <a:buFont typeface="Arial"/>
-              <a:buChar char="✓"/>
-            </a:pPr>
-            <a:r>
-              <a:rPr lang="en-US" sz="2000" b="1" dirty="0">
-                <a:solidFill>
-                  <a:srgbClr val="0F172A"/>
-                </a:solidFill>
-              </a:rPr>
-              <a:t>Start small </a:t>
-            </a:r>
-            <a:r>
-              <a:rPr lang="en-US" dirty="0">
-                <a:solidFill>
-                  <a:srgbClr val="475569"/>
-                </a:solidFill>
-              </a:rPr>
-              <a:t>— one table, one user</a:t>
+              <a:t>one table, one user</a:t>
             </a:r>
           </a:p>
         </p:txBody>
@@ -12661,7 +13451,7 @@
     </p:spTree>
     <p:extLst>
       <p:ext uri="{BB962C8B-B14F-4D97-AF65-F5344CB8AC3E}">
-        <p14:creationId xmlns:p14="http://schemas.microsoft.com/office/powerpoint/2010/main" val="3349061554"/>
+        <p14:creationId xmlns:p14="http://schemas.microsoft.com/office/powerpoint/2010/main" val="1673443688"/>
       </p:ext>
     </p:extLst>
   </p:cSld>
@@ -12671,7 +13461,7 @@
 </p:sld>
 </file>
 
-<file path=ppt/slides/slide21.xml><?xml version="1.0" encoding="utf-8"?>
+<file path=ppt/slides/slide22.xml><?xml version="1.0" encoding="utf-8"?>
 <p:sld xmlns:a="http://schemas.openxmlformats.org/drawingml/2006/main" xmlns:r="http://schemas.openxmlformats.org/officeDocument/2006/relationships" xmlns:p="http://schemas.openxmlformats.org/presentationml/2006/main" showMasterSp="0">
   <p:cSld>
     <p:bg>
@@ -12835,7 +13625,7 @@
 </p:sld>
 </file>
 
-<file path=ppt/slides/slide22.xml><?xml version="1.0" encoding="utf-8"?>
+<file path=ppt/slides/slide23.xml><?xml version="1.0" encoding="utf-8"?>
 <p:sld xmlns:a="http://schemas.openxmlformats.org/drawingml/2006/main" xmlns:r="http://schemas.openxmlformats.org/officeDocument/2006/relationships" xmlns:p="http://schemas.openxmlformats.org/presentationml/2006/main">
   <p:cSld>
     <p:spTree>
@@ -12910,65 +13700,6 @@
           </a:p>
         </p:txBody>
       </p:sp>
-      <p:sp>
-        <p:nvSpPr>
-          <p:cNvPr id="1603" name="Q"/>
-          <p:cNvSpPr txBox="1"/>
-          <p:nvPr/>
-        </p:nvSpPr>
-        <p:spPr>
-          <a:xfrm>
-            <a:off x="762000" y="411504"/>
-            <a:ext cx="10668000" cy="2355623"/>
-          </a:xfrm>
-          <a:prstGeom prst="rect">
-            <a:avLst/>
-          </a:prstGeom>
-          <a:noFill/>
-        </p:spPr>
-        <p:txBody>
-          <a:bodyPr wrap="square" anchor="t"/>
-          <a:lstStyle/>
-          <a:p>
-            <a:pPr algn="l">
-              <a:lnSpc>
-                <a:spcPct val="105000"/>
-              </a:lnSpc>
-            </a:pPr>
-            <a:r>
-              <a:rPr lang="en-US" sz="6000" b="1" dirty="0">
-                <a:solidFill>
-                  <a:srgbClr val="FFFFFF"/>
-                </a:solidFill>
-              </a:rPr>
-              <a:t>Start  simple</a:t>
-            </a:r>
-          </a:p>
-          <a:p>
-            <a:pPr algn="l">
-              <a:lnSpc>
-                <a:spcPct val="105000"/>
-              </a:lnSpc>
-            </a:pPr>
-            <a:r>
-              <a:rPr lang="en-US" sz="6000" b="1" dirty="0">
-                <a:solidFill>
-                  <a:srgbClr val="FFFFFF"/>
-                </a:solidFill>
-              </a:rPr>
-              <a:t>Then evolve into a </a:t>
-            </a:r>
-            <a:r>
-              <a:rPr lang="en-US" sz="6000" b="1" i="1" dirty="0">
-                <a:solidFill>
-                  <a:srgbClr val="22D3EE"/>
-                </a:solidFill>
-              </a:rPr>
-              <a:t>product.</a:t>
-            </a:r>
-          </a:p>
-        </p:txBody>
-      </p:sp>
       <p:grpSp>
         <p:nvGrpSpPr>
           <p:cNvPr id="3" name="Group 2">
@@ -12983,10 +13714,10 @@
         </p:nvGrpSpPr>
         <p:grpSpPr>
           <a:xfrm>
-            <a:off x="743378" y="2838101"/>
-            <a:ext cx="10124672" cy="1524000"/>
-            <a:chOff x="762000" y="3624943"/>
-            <a:chExt cx="6634951" cy="1524000"/>
+            <a:off x="653927" y="872676"/>
+            <a:ext cx="10564925" cy="3451838"/>
+            <a:chOff x="1024646" y="3624943"/>
+            <a:chExt cx="6372305" cy="1524000"/>
           </a:xfrm>
         </p:grpSpPr>
         <p:sp>
@@ -12997,8 +13728,8 @@
           </p:nvSpPr>
           <p:spPr>
             <a:xfrm>
-              <a:off x="762000" y="3624943"/>
-              <a:ext cx="3773409" cy="1524000"/>
+              <a:off x="1024646" y="3730833"/>
+              <a:ext cx="3914341" cy="1318039"/>
             </a:xfrm>
             <a:prstGeom prst="roundRect">
               <a:avLst>
@@ -13015,7 +13746,7 @@
             </a:ln>
           </p:spPr>
           <p:txBody>
-            <a:bodyPr wrap="square" lIns="200000" tIns="200000" rIns="200000" bIns="200000" anchor="t"/>
+            <a:bodyPr wrap="square" lIns="200000" tIns="200000" rIns="200000" bIns="200000" anchor="ctr"/>
             <a:lstStyle/>
             <a:p>
               <a:pPr algn="l">
@@ -13024,14 +13755,14 @@
                 </a:spcBef>
               </a:pPr>
               <a:r>
-                <a:rPr lang="en-US" sz="2700" dirty="0">
+                <a:rPr lang="en-US" sz="4000" dirty="0">
                   <a:solidFill>
                     <a:srgbClr val="FFFFFF"/>
                   </a:solidFill>
                 </a:rPr>
                 <a:t>Until now we learnt programming languages to talk with computers</a:t>
               </a:r>
-              <a:endParaRPr lang="en-US" sz="2700" dirty="0">
+              <a:endParaRPr lang="en-US" sz="4000" dirty="0">
                 <a:solidFill>
                   <a:srgbClr val="94A3B8"/>
                 </a:solidFill>
@@ -13047,8 +13778,8 @@
           </p:nvSpPr>
           <p:spPr>
             <a:xfrm>
-              <a:off x="4371599" y="3624943"/>
-              <a:ext cx="3025352" cy="1524000"/>
+              <a:off x="4723732" y="3624943"/>
+              <a:ext cx="2673219" cy="1524000"/>
             </a:xfrm>
             <a:prstGeom prst="roundRect">
               <a:avLst>
@@ -13063,12 +13794,12 @@
             </a:ln>
           </p:spPr>
           <p:txBody>
-            <a:bodyPr wrap="square" lIns="200000" tIns="200000" rIns="200000" bIns="200000" anchor="t"/>
+            <a:bodyPr wrap="square" lIns="200000" tIns="200000" rIns="200000" bIns="200000" anchor="ctr"/>
             <a:lstStyle/>
             <a:p>
               <a:pPr algn="l"/>
               <a:r>
-                <a:rPr lang="en-US" sz="2800" b="1" spc="300" dirty="0">
+                <a:rPr lang="en-US" sz="5000" b="1" spc="300" dirty="0">
                   <a:solidFill>
                     <a:srgbClr val="1E293B"/>
                   </a:solidFill>
@@ -13076,21 +13807,21 @@
                 <a:t>now they learnt</a:t>
               </a:r>
               <a:br>
-                <a:rPr lang="en-US" sz="2800" b="1" spc="300" dirty="0">
+                <a:rPr lang="en-US" sz="5000" b="1" spc="300" dirty="0">
                   <a:solidFill>
                     <a:srgbClr val="1E293B"/>
                   </a:solidFill>
                 </a:rPr>
               </a:br>
               <a:r>
-                <a:rPr lang="en-US" sz="2800" b="1" spc="300" dirty="0">
+                <a:rPr lang="en-US" sz="5000" b="1" spc="300" dirty="0">
                   <a:solidFill>
                     <a:srgbClr val="1E293B"/>
                   </a:solidFill>
                 </a:rPr>
                 <a:t>our language</a:t>
               </a:r>
-              <a:endParaRPr lang="en-US" sz="2800" b="1" dirty="0">
+              <a:endParaRPr lang="en-US" sz="5000" b="1" dirty="0">
                 <a:solidFill>
                   <a:srgbClr val="1E293B"/>
                 </a:solidFill>
@@ -13264,60 +13995,6 @@
               </a:rPr>
               <a:t>alperebicoglu</a:t>
             </a:r>
-          </a:p>
-        </p:txBody>
-      </p:sp>
-      <p:sp>
-        <p:nvSpPr>
-          <p:cNvPr id="13" name="Rectangle: Rounded Corners 12">
-            <a:extLst>
-              <a:ext uri="{FF2B5EF4-FFF2-40B4-BE49-F238E27FC236}">
-                <a16:creationId xmlns:a16="http://schemas.microsoft.com/office/drawing/2014/main" id="{17516DB6-9F60-477D-8214-F1524AF1287A}"/>
-              </a:ext>
-            </a:extLst>
-          </p:cNvPr>
-          <p:cNvSpPr/>
-          <p:nvPr/>
-        </p:nvSpPr>
-        <p:spPr>
-          <a:xfrm>
-            <a:off x="2897136" y="449382"/>
-            <a:ext cx="2826769" cy="999408"/>
-          </a:xfrm>
-          <a:prstGeom prst="roundRect">
-            <a:avLst/>
-          </a:prstGeom>
-          <a:noFill/>
-          <a:ln w="9525" cap="flat" cmpd="sng" algn="ctr">
-            <a:solidFill>
-              <a:schemeClr val="accent1"/>
-            </a:solidFill>
-            <a:prstDash val="solid"/>
-            <a:round/>
-            <a:headEnd type="none" w="med" len="med"/>
-            <a:tailEnd type="none" w="med" len="med"/>
-          </a:ln>
-        </p:spPr>
-        <p:style>
-          <a:lnRef idx="0">
-            <a:scrgbClr r="0" g="0" b="0"/>
-          </a:lnRef>
-          <a:fillRef idx="0">
-            <a:scrgbClr r="0" g="0" b="0"/>
-          </a:fillRef>
-          <a:effectRef idx="0">
-            <a:scrgbClr r="0" g="0" b="0"/>
-          </a:effectRef>
-          <a:fontRef idx="minor">
-            <a:schemeClr val="accent1"/>
-          </a:fontRef>
-        </p:style>
-        <p:txBody>
-          <a:bodyPr rtlCol="0" anchor="ctr"/>
-          <a:lstStyle/>
-          <a:p>
-            <a:pPr algn="ctr"/>
-            <a:endParaRPr lang="tr-TR" dirty="0"/>
           </a:p>
         </p:txBody>
       </p:sp>

--- a/Presentation.pptx
+++ b/Presentation.pptx
@@ -2675,48 +2675,6 @@
           <a:p>
             <a:endParaRPr lang="en-US" dirty="0"/>
           </a:p>
-          <a:p>
-            <a:r>
-              <a:rPr lang="en-US" dirty="0"/>
-              <a:t>[PAUSE 2s]</a:t>
-            </a:r>
-          </a:p>
-          <a:p>
-            <a:endParaRPr lang="en-US" dirty="0"/>
-          </a:p>
-          <a:p>
-            <a:r>
-              <a:rPr lang="en-US" dirty="0"/>
-              <a:t>[CLOSING LINE] 'Start simple. Then evolve into a product.'</a:t>
-            </a:r>
-          </a:p>
-          <a:p>
-            <a:endParaRPr lang="en-US" dirty="0"/>
-          </a:p>
-          <a:p>
-            <a:r>
-              <a:rPr lang="en-US" dirty="0"/>
-              <a:t>[PAUSE 3s]</a:t>
-            </a:r>
-          </a:p>
-          <a:p>
-            <a:endParaRPr lang="en-US" dirty="0"/>
-          </a:p>
-          <a:p>
-            <a:r>
-              <a:rPr lang="en-US" dirty="0"/>
-              <a:t>'Thank you — I'd love your questions.'</a:t>
-            </a:r>
-          </a:p>
-          <a:p>
-            <a:endParaRPr lang="en-US" dirty="0"/>
-          </a:p>
-          <a:p>
-            <a:r>
-              <a:rPr lang="en-US" dirty="0"/>
-              <a:t>[QA] Stay on this slide. Don't flip back to earlier slides unless someone asks. Repeat the question so the whole room hears it. If you don't know the answer: 'Great question, I don't know — find me after.' Better than faking it.</a:t>
-            </a:r>
-          </a:p>
         </p:txBody>
       </p:sp>
     </p:spTree>
@@ -3460,7 +3418,7 @@
 </file>
 
 <file path=ppt/slideLayouts/slideLayout1.xml><?xml version="1.0" encoding="utf-8"?>
-<p:sldLayout xmlns:a="http://schemas.openxmlformats.org/drawingml/2006/main" xmlns:r="http://schemas.openxmlformats.org/officeDocument/2006/relationships" xmlns:p="http://schemas.openxmlformats.org/presentationml/2006/main" type="title">
+<p:sldLayout xmlns:a="http://schemas.openxmlformats.org/drawingml/2006/main" xmlns:r="http://schemas.openxmlformats.org/officeDocument/2006/relationships" xmlns:p="http://schemas.openxmlformats.org/presentationml/2006/main" userDrawn="1">
   <p:cSld name="Title Slide">
     <p:spTree>
       <p:nvGrpSpPr>
@@ -3476,198 +3434,6 @@
           <a:chExt cx="0" cy="0"/>
         </a:xfrm>
       </p:grpSpPr>
-      <p:sp>
-        <p:nvSpPr>
-          <p:cNvPr id="2" name="Title 1">
-            <a:extLst>
-              <a:ext uri="{FF2B5EF4-FFF2-40B4-BE49-F238E27FC236}">
-                <a16:creationId xmlns:a16="http://schemas.microsoft.com/office/drawing/2014/main" id="{26E4A668-7820-8A4A-4103-128C3CDA4595}"/>
-              </a:ext>
-            </a:extLst>
-          </p:cNvPr>
-          <p:cNvSpPr>
-            <a:spLocks noGrp="1"/>
-          </p:cNvSpPr>
-          <p:nvPr>
-            <p:ph type="ctrTitle"/>
-          </p:nvPr>
-        </p:nvSpPr>
-        <p:spPr>
-          <a:xfrm>
-            <a:off x="1524000" y="1122363"/>
-            <a:ext cx="9144000" cy="2387600"/>
-          </a:xfrm>
-        </p:spPr>
-        <p:txBody>
-          <a:bodyPr anchor="b"/>
-          <a:lstStyle>
-            <a:lvl1pPr algn="ctr">
-              <a:defRPr sz="6000"/>
-            </a:lvl1pPr>
-          </a:lstStyle>
-          <a:p>
-            <a:r>
-              <a:rPr lang="en-US"/>
-              <a:t>Click to edit Master title style</a:t>
-            </a:r>
-            <a:endParaRPr lang="tr-TR"/>
-          </a:p>
-        </p:txBody>
-      </p:sp>
-      <p:sp>
-        <p:nvSpPr>
-          <p:cNvPr id="3" name="Subtitle 2">
-            <a:extLst>
-              <a:ext uri="{FF2B5EF4-FFF2-40B4-BE49-F238E27FC236}">
-                <a16:creationId xmlns:a16="http://schemas.microsoft.com/office/drawing/2014/main" id="{1849A3CB-1C8E-5F2F-7E0F-8020AFD5389E}"/>
-              </a:ext>
-            </a:extLst>
-          </p:cNvPr>
-          <p:cNvSpPr>
-            <a:spLocks noGrp="1"/>
-          </p:cNvSpPr>
-          <p:nvPr>
-            <p:ph type="subTitle" idx="1"/>
-          </p:nvPr>
-        </p:nvSpPr>
-        <p:spPr>
-          <a:xfrm>
-            <a:off x="1524000" y="3602038"/>
-            <a:ext cx="9144000" cy="1655762"/>
-          </a:xfrm>
-        </p:spPr>
-        <p:txBody>
-          <a:bodyPr/>
-          <a:lstStyle>
-            <a:lvl1pPr marL="0" indent="0" algn="ctr">
-              <a:buNone/>
-              <a:defRPr sz="2400"/>
-            </a:lvl1pPr>
-            <a:lvl2pPr marL="457200" indent="0" algn="ctr">
-              <a:buNone/>
-              <a:defRPr sz="2000"/>
-            </a:lvl2pPr>
-            <a:lvl3pPr marL="914400" indent="0" algn="ctr">
-              <a:buNone/>
-              <a:defRPr sz="1800"/>
-            </a:lvl3pPr>
-            <a:lvl4pPr marL="1371600" indent="0" algn="ctr">
-              <a:buNone/>
-              <a:defRPr sz="1600"/>
-            </a:lvl4pPr>
-            <a:lvl5pPr marL="1828800" indent="0" algn="ctr">
-              <a:buNone/>
-              <a:defRPr sz="1600"/>
-            </a:lvl5pPr>
-            <a:lvl6pPr marL="2286000" indent="0" algn="ctr">
-              <a:buNone/>
-              <a:defRPr sz="1600"/>
-            </a:lvl6pPr>
-            <a:lvl7pPr marL="2743200" indent="0" algn="ctr">
-              <a:buNone/>
-              <a:defRPr sz="1600"/>
-            </a:lvl7pPr>
-            <a:lvl8pPr marL="3200400" indent="0" algn="ctr">
-              <a:buNone/>
-              <a:defRPr sz="1600"/>
-            </a:lvl8pPr>
-            <a:lvl9pPr marL="3657600" indent="0" algn="ctr">
-              <a:buNone/>
-              <a:defRPr sz="1600"/>
-            </a:lvl9pPr>
-          </a:lstStyle>
-          <a:p>
-            <a:r>
-              <a:rPr lang="en-US"/>
-              <a:t>Click to edit Master subtitle style</a:t>
-            </a:r>
-            <a:endParaRPr lang="tr-TR"/>
-          </a:p>
-        </p:txBody>
-      </p:sp>
-      <p:sp>
-        <p:nvSpPr>
-          <p:cNvPr id="4" name="Date Placeholder 3">
-            <a:extLst>
-              <a:ext uri="{FF2B5EF4-FFF2-40B4-BE49-F238E27FC236}">
-                <a16:creationId xmlns:a16="http://schemas.microsoft.com/office/drawing/2014/main" id="{573CADC6-76DB-B80D-E8B5-277C2C2E2D5B}"/>
-              </a:ext>
-            </a:extLst>
-          </p:cNvPr>
-          <p:cNvSpPr>
-            <a:spLocks noGrp="1"/>
-          </p:cNvSpPr>
-          <p:nvPr>
-            <p:ph type="dt" sz="half" idx="10"/>
-          </p:nvPr>
-        </p:nvSpPr>
-        <p:spPr/>
-        <p:txBody>
-          <a:bodyPr/>
-          <a:lstStyle/>
-          <a:p>
-            <a:fld id="{3EF59CCF-2F75-48E0-B827-F930E918C137}" type="datetimeFigureOut">
-              <a:rPr lang="tr-TR" smtClean="0"/>
-              <a:t>14.05.2026</a:t>
-            </a:fld>
-            <a:endParaRPr lang="tr-TR"/>
-          </a:p>
-        </p:txBody>
-      </p:sp>
-      <p:sp>
-        <p:nvSpPr>
-          <p:cNvPr id="5" name="Footer Placeholder 4">
-            <a:extLst>
-              <a:ext uri="{FF2B5EF4-FFF2-40B4-BE49-F238E27FC236}">
-                <a16:creationId xmlns:a16="http://schemas.microsoft.com/office/drawing/2014/main" id="{103AF917-D7F4-8BDC-D92C-9643279394D4}"/>
-              </a:ext>
-            </a:extLst>
-          </p:cNvPr>
-          <p:cNvSpPr>
-            <a:spLocks noGrp="1"/>
-          </p:cNvSpPr>
-          <p:nvPr>
-            <p:ph type="ftr" sz="quarter" idx="11"/>
-          </p:nvPr>
-        </p:nvSpPr>
-        <p:spPr/>
-        <p:txBody>
-          <a:bodyPr/>
-          <a:lstStyle/>
-          <a:p>
-            <a:endParaRPr lang="tr-TR"/>
-          </a:p>
-        </p:txBody>
-      </p:sp>
-      <p:sp>
-        <p:nvSpPr>
-          <p:cNvPr id="6" name="Slide Number Placeholder 5">
-            <a:extLst>
-              <a:ext uri="{FF2B5EF4-FFF2-40B4-BE49-F238E27FC236}">
-                <a16:creationId xmlns:a16="http://schemas.microsoft.com/office/drawing/2014/main" id="{4006E976-38CC-1FA0-D8CD-0C979B05F761}"/>
-              </a:ext>
-            </a:extLst>
-          </p:cNvPr>
-          <p:cNvSpPr>
-            <a:spLocks noGrp="1"/>
-          </p:cNvSpPr>
-          <p:nvPr>
-            <p:ph type="sldNum" sz="quarter" idx="12"/>
-          </p:nvPr>
-        </p:nvSpPr>
-        <p:spPr/>
-        <p:txBody>
-          <a:bodyPr/>
-          <a:lstStyle/>
-          <a:p>
-            <a:fld id="{25F86283-E030-43E8-9698-621E2E587A4B}" type="slidenum">
-              <a:rPr lang="tr-TR" smtClean="0"/>
-              <a:t>‹#›</a:t>
-            </a:fld>
-            <a:endParaRPr lang="tr-TR"/>
-          </a:p>
-        </p:txBody>
-      </p:sp>
     </p:spTree>
     <p:extLst>
       <p:ext uri="{BB962C8B-B14F-4D97-AF65-F5344CB8AC3E}">
@@ -3681,418 +3447,8 @@
 </p:sldLayout>
 </file>
 
-<file path=ppt/slideLayouts/slideLayout10.xml><?xml version="1.0" encoding="utf-8"?>
-<p:sldLayout xmlns:a="http://schemas.openxmlformats.org/drawingml/2006/main" xmlns:r="http://schemas.openxmlformats.org/officeDocument/2006/relationships" xmlns:p="http://schemas.openxmlformats.org/presentationml/2006/main" type="vertTx">
-  <p:cSld name="Title and Vertical Text">
-    <p:spTree>
-      <p:nvGrpSpPr>
-        <p:cNvPr id="1" name=""/>
-        <p:cNvGrpSpPr/>
-        <p:nvPr/>
-      </p:nvGrpSpPr>
-      <p:grpSpPr>
-        <a:xfrm>
-          <a:off x="0" y="0"/>
-          <a:ext cx="0" cy="0"/>
-          <a:chOff x="0" y="0"/>
-          <a:chExt cx="0" cy="0"/>
-        </a:xfrm>
-      </p:grpSpPr>
-      <p:sp>
-        <p:nvSpPr>
-          <p:cNvPr id="2" name="Title 1">
-            <a:extLst>
-              <a:ext uri="{FF2B5EF4-FFF2-40B4-BE49-F238E27FC236}">
-                <a16:creationId xmlns:a16="http://schemas.microsoft.com/office/drawing/2014/main" id="{399C8888-A623-35ED-213E-A37F6BDE86C9}"/>
-              </a:ext>
-            </a:extLst>
-          </p:cNvPr>
-          <p:cNvSpPr>
-            <a:spLocks noGrp="1"/>
-          </p:cNvSpPr>
-          <p:nvPr>
-            <p:ph type="title"/>
-          </p:nvPr>
-        </p:nvSpPr>
-        <p:spPr/>
-        <p:txBody>
-          <a:bodyPr/>
-          <a:lstStyle/>
-          <a:p>
-            <a:r>
-              <a:rPr lang="en-US"/>
-              <a:t>Click to edit Master title style</a:t>
-            </a:r>
-            <a:endParaRPr lang="tr-TR"/>
-          </a:p>
-        </p:txBody>
-      </p:sp>
-      <p:sp>
-        <p:nvSpPr>
-          <p:cNvPr id="3" name="Vertical Text Placeholder 2">
-            <a:extLst>
-              <a:ext uri="{FF2B5EF4-FFF2-40B4-BE49-F238E27FC236}">
-                <a16:creationId xmlns:a16="http://schemas.microsoft.com/office/drawing/2014/main" id="{9EFA9139-209A-A01D-82F3-A8BCA77BC5DD}"/>
-              </a:ext>
-            </a:extLst>
-          </p:cNvPr>
-          <p:cNvSpPr>
-            <a:spLocks noGrp="1"/>
-          </p:cNvSpPr>
-          <p:nvPr>
-            <p:ph type="body" orient="vert" idx="1"/>
-          </p:nvPr>
-        </p:nvSpPr>
-        <p:spPr/>
-        <p:txBody>
-          <a:bodyPr vert="eaVert"/>
-          <a:lstStyle/>
-          <a:p>
-            <a:pPr lvl="0"/>
-            <a:r>
-              <a:rPr lang="en-US"/>
-              <a:t>Click to edit Master text styles</a:t>
-            </a:r>
-          </a:p>
-          <a:p>
-            <a:pPr lvl="1"/>
-            <a:r>
-              <a:rPr lang="en-US"/>
-              <a:t>Second level</a:t>
-            </a:r>
-          </a:p>
-          <a:p>
-            <a:pPr lvl="2"/>
-            <a:r>
-              <a:rPr lang="en-US"/>
-              <a:t>Third level</a:t>
-            </a:r>
-          </a:p>
-          <a:p>
-            <a:pPr lvl="3"/>
-            <a:r>
-              <a:rPr lang="en-US"/>
-              <a:t>Fourth level</a:t>
-            </a:r>
-          </a:p>
-          <a:p>
-            <a:pPr lvl="4"/>
-            <a:r>
-              <a:rPr lang="en-US"/>
-              <a:t>Fifth level</a:t>
-            </a:r>
-            <a:endParaRPr lang="tr-TR"/>
-          </a:p>
-        </p:txBody>
-      </p:sp>
-      <p:sp>
-        <p:nvSpPr>
-          <p:cNvPr id="4" name="Date Placeholder 3">
-            <a:extLst>
-              <a:ext uri="{FF2B5EF4-FFF2-40B4-BE49-F238E27FC236}">
-                <a16:creationId xmlns:a16="http://schemas.microsoft.com/office/drawing/2014/main" id="{0347F07A-463B-C7B5-5472-301379FCD042}"/>
-              </a:ext>
-            </a:extLst>
-          </p:cNvPr>
-          <p:cNvSpPr>
-            <a:spLocks noGrp="1"/>
-          </p:cNvSpPr>
-          <p:nvPr>
-            <p:ph type="dt" sz="half" idx="10"/>
-          </p:nvPr>
-        </p:nvSpPr>
-        <p:spPr/>
-        <p:txBody>
-          <a:bodyPr/>
-          <a:lstStyle/>
-          <a:p>
-            <a:fld id="{3EF59CCF-2F75-48E0-B827-F930E918C137}" type="datetimeFigureOut">
-              <a:rPr lang="tr-TR" smtClean="0"/>
-              <a:t>14.05.2026</a:t>
-            </a:fld>
-            <a:endParaRPr lang="tr-TR"/>
-          </a:p>
-        </p:txBody>
-      </p:sp>
-      <p:sp>
-        <p:nvSpPr>
-          <p:cNvPr id="5" name="Footer Placeholder 4">
-            <a:extLst>
-              <a:ext uri="{FF2B5EF4-FFF2-40B4-BE49-F238E27FC236}">
-                <a16:creationId xmlns:a16="http://schemas.microsoft.com/office/drawing/2014/main" id="{F1F97970-C865-4EA9-BD77-F90120B8CED7}"/>
-              </a:ext>
-            </a:extLst>
-          </p:cNvPr>
-          <p:cNvSpPr>
-            <a:spLocks noGrp="1"/>
-          </p:cNvSpPr>
-          <p:nvPr>
-            <p:ph type="ftr" sz="quarter" idx="11"/>
-          </p:nvPr>
-        </p:nvSpPr>
-        <p:spPr/>
-        <p:txBody>
-          <a:bodyPr/>
-          <a:lstStyle/>
-          <a:p>
-            <a:endParaRPr lang="tr-TR"/>
-          </a:p>
-        </p:txBody>
-      </p:sp>
-      <p:sp>
-        <p:nvSpPr>
-          <p:cNvPr id="6" name="Slide Number Placeholder 5">
-            <a:extLst>
-              <a:ext uri="{FF2B5EF4-FFF2-40B4-BE49-F238E27FC236}">
-                <a16:creationId xmlns:a16="http://schemas.microsoft.com/office/drawing/2014/main" id="{87F4E478-9DD2-5A8A-E300-876CD465242A}"/>
-              </a:ext>
-            </a:extLst>
-          </p:cNvPr>
-          <p:cNvSpPr>
-            <a:spLocks noGrp="1"/>
-          </p:cNvSpPr>
-          <p:nvPr>
-            <p:ph type="sldNum" sz="quarter" idx="12"/>
-          </p:nvPr>
-        </p:nvSpPr>
-        <p:spPr/>
-        <p:txBody>
-          <a:bodyPr/>
-          <a:lstStyle/>
-          <a:p>
-            <a:fld id="{25F86283-E030-43E8-9698-621E2E587A4B}" type="slidenum">
-              <a:rPr lang="tr-TR" smtClean="0"/>
-              <a:t>‹#›</a:t>
-            </a:fld>
-            <a:endParaRPr lang="tr-TR"/>
-          </a:p>
-        </p:txBody>
-      </p:sp>
-    </p:spTree>
-    <p:extLst>
-      <p:ext uri="{BB962C8B-B14F-4D97-AF65-F5344CB8AC3E}">
-        <p14:creationId xmlns:p14="http://schemas.microsoft.com/office/powerpoint/2010/main" val="642221152"/>
-      </p:ext>
-    </p:extLst>
-  </p:cSld>
-  <p:clrMapOvr>
-    <a:masterClrMapping/>
-  </p:clrMapOvr>
-</p:sldLayout>
-</file>
-
-<file path=ppt/slideLayouts/slideLayout11.xml><?xml version="1.0" encoding="utf-8"?>
-<p:sldLayout xmlns:a="http://schemas.openxmlformats.org/drawingml/2006/main" xmlns:r="http://schemas.openxmlformats.org/officeDocument/2006/relationships" xmlns:p="http://schemas.openxmlformats.org/presentationml/2006/main" type="vertTitleAndTx">
-  <p:cSld name="Vertical Title and Text">
-    <p:spTree>
-      <p:nvGrpSpPr>
-        <p:cNvPr id="1" name=""/>
-        <p:cNvGrpSpPr/>
-        <p:nvPr/>
-      </p:nvGrpSpPr>
-      <p:grpSpPr>
-        <a:xfrm>
-          <a:off x="0" y="0"/>
-          <a:ext cx="0" cy="0"/>
-          <a:chOff x="0" y="0"/>
-          <a:chExt cx="0" cy="0"/>
-        </a:xfrm>
-      </p:grpSpPr>
-      <p:sp>
-        <p:nvSpPr>
-          <p:cNvPr id="2" name="Vertical Title 1">
-            <a:extLst>
-              <a:ext uri="{FF2B5EF4-FFF2-40B4-BE49-F238E27FC236}">
-                <a16:creationId xmlns:a16="http://schemas.microsoft.com/office/drawing/2014/main" id="{5DDBE8A5-7C1E-E08E-7897-C746B10873F7}"/>
-              </a:ext>
-            </a:extLst>
-          </p:cNvPr>
-          <p:cNvSpPr>
-            <a:spLocks noGrp="1"/>
-          </p:cNvSpPr>
-          <p:nvPr>
-            <p:ph type="title" orient="vert"/>
-          </p:nvPr>
-        </p:nvSpPr>
-        <p:spPr>
-          <a:xfrm>
-            <a:off x="8724900" y="365125"/>
-            <a:ext cx="2628900" cy="5811838"/>
-          </a:xfrm>
-        </p:spPr>
-        <p:txBody>
-          <a:bodyPr vert="eaVert"/>
-          <a:lstStyle/>
-          <a:p>
-            <a:r>
-              <a:rPr lang="en-US"/>
-              <a:t>Click to edit Master title style</a:t>
-            </a:r>
-            <a:endParaRPr lang="tr-TR"/>
-          </a:p>
-        </p:txBody>
-      </p:sp>
-      <p:sp>
-        <p:nvSpPr>
-          <p:cNvPr id="3" name="Vertical Text Placeholder 2">
-            <a:extLst>
-              <a:ext uri="{FF2B5EF4-FFF2-40B4-BE49-F238E27FC236}">
-                <a16:creationId xmlns:a16="http://schemas.microsoft.com/office/drawing/2014/main" id="{AD2D3E72-F444-9496-C4DD-3BD97A07C572}"/>
-              </a:ext>
-            </a:extLst>
-          </p:cNvPr>
-          <p:cNvSpPr>
-            <a:spLocks noGrp="1"/>
-          </p:cNvSpPr>
-          <p:nvPr>
-            <p:ph type="body" orient="vert" idx="1"/>
-          </p:nvPr>
-        </p:nvSpPr>
-        <p:spPr>
-          <a:xfrm>
-            <a:off x="838200" y="365125"/>
-            <a:ext cx="7734300" cy="5811838"/>
-          </a:xfrm>
-        </p:spPr>
-        <p:txBody>
-          <a:bodyPr vert="eaVert"/>
-          <a:lstStyle/>
-          <a:p>
-            <a:pPr lvl="0"/>
-            <a:r>
-              <a:rPr lang="en-US"/>
-              <a:t>Click to edit Master text styles</a:t>
-            </a:r>
-          </a:p>
-          <a:p>
-            <a:pPr lvl="1"/>
-            <a:r>
-              <a:rPr lang="en-US"/>
-              <a:t>Second level</a:t>
-            </a:r>
-          </a:p>
-          <a:p>
-            <a:pPr lvl="2"/>
-            <a:r>
-              <a:rPr lang="en-US"/>
-              <a:t>Third level</a:t>
-            </a:r>
-          </a:p>
-          <a:p>
-            <a:pPr lvl="3"/>
-            <a:r>
-              <a:rPr lang="en-US"/>
-              <a:t>Fourth level</a:t>
-            </a:r>
-          </a:p>
-          <a:p>
-            <a:pPr lvl="4"/>
-            <a:r>
-              <a:rPr lang="en-US"/>
-              <a:t>Fifth level</a:t>
-            </a:r>
-            <a:endParaRPr lang="tr-TR"/>
-          </a:p>
-        </p:txBody>
-      </p:sp>
-      <p:sp>
-        <p:nvSpPr>
-          <p:cNvPr id="4" name="Date Placeholder 3">
-            <a:extLst>
-              <a:ext uri="{FF2B5EF4-FFF2-40B4-BE49-F238E27FC236}">
-                <a16:creationId xmlns:a16="http://schemas.microsoft.com/office/drawing/2014/main" id="{4945E509-79F7-F450-D395-0E6FB01EFDD0}"/>
-              </a:ext>
-            </a:extLst>
-          </p:cNvPr>
-          <p:cNvSpPr>
-            <a:spLocks noGrp="1"/>
-          </p:cNvSpPr>
-          <p:nvPr>
-            <p:ph type="dt" sz="half" idx="10"/>
-          </p:nvPr>
-        </p:nvSpPr>
-        <p:spPr/>
-        <p:txBody>
-          <a:bodyPr/>
-          <a:lstStyle/>
-          <a:p>
-            <a:fld id="{3EF59CCF-2F75-48E0-B827-F930E918C137}" type="datetimeFigureOut">
-              <a:rPr lang="tr-TR" smtClean="0"/>
-              <a:t>14.05.2026</a:t>
-            </a:fld>
-            <a:endParaRPr lang="tr-TR"/>
-          </a:p>
-        </p:txBody>
-      </p:sp>
-      <p:sp>
-        <p:nvSpPr>
-          <p:cNvPr id="5" name="Footer Placeholder 4">
-            <a:extLst>
-              <a:ext uri="{FF2B5EF4-FFF2-40B4-BE49-F238E27FC236}">
-                <a16:creationId xmlns:a16="http://schemas.microsoft.com/office/drawing/2014/main" id="{6518506B-FD6B-821D-547B-4DDD9E98D614}"/>
-              </a:ext>
-            </a:extLst>
-          </p:cNvPr>
-          <p:cNvSpPr>
-            <a:spLocks noGrp="1"/>
-          </p:cNvSpPr>
-          <p:nvPr>
-            <p:ph type="ftr" sz="quarter" idx="11"/>
-          </p:nvPr>
-        </p:nvSpPr>
-        <p:spPr/>
-        <p:txBody>
-          <a:bodyPr/>
-          <a:lstStyle/>
-          <a:p>
-            <a:endParaRPr lang="tr-TR"/>
-          </a:p>
-        </p:txBody>
-      </p:sp>
-      <p:sp>
-        <p:nvSpPr>
-          <p:cNvPr id="6" name="Slide Number Placeholder 5">
-            <a:extLst>
-              <a:ext uri="{FF2B5EF4-FFF2-40B4-BE49-F238E27FC236}">
-                <a16:creationId xmlns:a16="http://schemas.microsoft.com/office/drawing/2014/main" id="{DFBC1E9E-6227-96CD-F6BB-7C48811FCD21}"/>
-              </a:ext>
-            </a:extLst>
-          </p:cNvPr>
-          <p:cNvSpPr>
-            <a:spLocks noGrp="1"/>
-          </p:cNvSpPr>
-          <p:nvPr>
-            <p:ph type="sldNum" sz="quarter" idx="12"/>
-          </p:nvPr>
-        </p:nvSpPr>
-        <p:spPr/>
-        <p:txBody>
-          <a:bodyPr/>
-          <a:lstStyle/>
-          <a:p>
-            <a:fld id="{25F86283-E030-43E8-9698-621E2E587A4B}" type="slidenum">
-              <a:rPr lang="tr-TR" smtClean="0"/>
-              <a:t>‹#›</a:t>
-            </a:fld>
-            <a:endParaRPr lang="tr-TR"/>
-          </a:p>
-        </p:txBody>
-      </p:sp>
-    </p:spTree>
-    <p:extLst>
-      <p:ext uri="{BB962C8B-B14F-4D97-AF65-F5344CB8AC3E}">
-        <p14:creationId xmlns:p14="http://schemas.microsoft.com/office/powerpoint/2010/main" val="1436625235"/>
-      </p:ext>
-    </p:extLst>
-  </p:cSld>
-  <p:clrMapOvr>
-    <a:masterClrMapping/>
-  </p:clrMapOvr>
-</p:sldLayout>
-</file>
-
 <file path=ppt/slideLayouts/slideLayout2.xml><?xml version="1.0" encoding="utf-8"?>
-<p:sldLayout xmlns:a="http://schemas.openxmlformats.org/drawingml/2006/main" xmlns:r="http://schemas.openxmlformats.org/officeDocument/2006/relationships" xmlns:p="http://schemas.openxmlformats.org/presentationml/2006/main" type="obj">
+<p:sldLayout xmlns:a="http://schemas.openxmlformats.org/drawingml/2006/main" xmlns:r="http://schemas.openxmlformats.org/officeDocument/2006/relationships" xmlns:p="http://schemas.openxmlformats.org/presentationml/2006/main" userDrawn="1">
   <p:cSld name="Title and Content">
     <p:spTree>
       <p:nvGrpSpPr>
@@ -4108,176 +3464,6 @@
           <a:chExt cx="0" cy="0"/>
         </a:xfrm>
       </p:grpSpPr>
-      <p:sp>
-        <p:nvSpPr>
-          <p:cNvPr id="2" name="Title 1">
-            <a:extLst>
-              <a:ext uri="{FF2B5EF4-FFF2-40B4-BE49-F238E27FC236}">
-                <a16:creationId xmlns:a16="http://schemas.microsoft.com/office/drawing/2014/main" id="{6FF784EA-CDF2-A314-8B91-728E9C67C049}"/>
-              </a:ext>
-            </a:extLst>
-          </p:cNvPr>
-          <p:cNvSpPr>
-            <a:spLocks noGrp="1"/>
-          </p:cNvSpPr>
-          <p:nvPr>
-            <p:ph type="title"/>
-          </p:nvPr>
-        </p:nvSpPr>
-        <p:spPr/>
-        <p:txBody>
-          <a:bodyPr/>
-          <a:lstStyle/>
-          <a:p>
-            <a:r>
-              <a:rPr lang="en-US"/>
-              <a:t>Click to edit Master title style</a:t>
-            </a:r>
-            <a:endParaRPr lang="tr-TR"/>
-          </a:p>
-        </p:txBody>
-      </p:sp>
-      <p:sp>
-        <p:nvSpPr>
-          <p:cNvPr id="3" name="Content Placeholder 2">
-            <a:extLst>
-              <a:ext uri="{FF2B5EF4-FFF2-40B4-BE49-F238E27FC236}">
-                <a16:creationId xmlns:a16="http://schemas.microsoft.com/office/drawing/2014/main" id="{A5DDB4ED-5BD8-7B2F-230B-41DA4B1008F8}"/>
-              </a:ext>
-            </a:extLst>
-          </p:cNvPr>
-          <p:cNvSpPr>
-            <a:spLocks noGrp="1"/>
-          </p:cNvSpPr>
-          <p:nvPr>
-            <p:ph idx="1"/>
-          </p:nvPr>
-        </p:nvSpPr>
-        <p:spPr/>
-        <p:txBody>
-          <a:bodyPr/>
-          <a:lstStyle/>
-          <a:p>
-            <a:pPr lvl="0"/>
-            <a:r>
-              <a:rPr lang="en-US"/>
-              <a:t>Click to edit Master text styles</a:t>
-            </a:r>
-          </a:p>
-          <a:p>
-            <a:pPr lvl="1"/>
-            <a:r>
-              <a:rPr lang="en-US"/>
-              <a:t>Second level</a:t>
-            </a:r>
-          </a:p>
-          <a:p>
-            <a:pPr lvl="2"/>
-            <a:r>
-              <a:rPr lang="en-US"/>
-              <a:t>Third level</a:t>
-            </a:r>
-          </a:p>
-          <a:p>
-            <a:pPr lvl="3"/>
-            <a:r>
-              <a:rPr lang="en-US"/>
-              <a:t>Fourth level</a:t>
-            </a:r>
-          </a:p>
-          <a:p>
-            <a:pPr lvl="4"/>
-            <a:r>
-              <a:rPr lang="en-US"/>
-              <a:t>Fifth level</a:t>
-            </a:r>
-            <a:endParaRPr lang="tr-TR"/>
-          </a:p>
-        </p:txBody>
-      </p:sp>
-      <p:sp>
-        <p:nvSpPr>
-          <p:cNvPr id="4" name="Date Placeholder 3">
-            <a:extLst>
-              <a:ext uri="{FF2B5EF4-FFF2-40B4-BE49-F238E27FC236}">
-                <a16:creationId xmlns:a16="http://schemas.microsoft.com/office/drawing/2014/main" id="{C94911EF-0B06-7947-9DDD-F75EAE1E68C9}"/>
-              </a:ext>
-            </a:extLst>
-          </p:cNvPr>
-          <p:cNvSpPr>
-            <a:spLocks noGrp="1"/>
-          </p:cNvSpPr>
-          <p:nvPr>
-            <p:ph type="dt" sz="half" idx="10"/>
-          </p:nvPr>
-        </p:nvSpPr>
-        <p:spPr/>
-        <p:txBody>
-          <a:bodyPr/>
-          <a:lstStyle/>
-          <a:p>
-            <a:fld id="{3EF59CCF-2F75-48E0-B827-F930E918C137}" type="datetimeFigureOut">
-              <a:rPr lang="tr-TR" smtClean="0"/>
-              <a:t>14.05.2026</a:t>
-            </a:fld>
-            <a:endParaRPr lang="tr-TR"/>
-          </a:p>
-        </p:txBody>
-      </p:sp>
-      <p:sp>
-        <p:nvSpPr>
-          <p:cNvPr id="5" name="Footer Placeholder 4">
-            <a:extLst>
-              <a:ext uri="{FF2B5EF4-FFF2-40B4-BE49-F238E27FC236}">
-                <a16:creationId xmlns:a16="http://schemas.microsoft.com/office/drawing/2014/main" id="{19485DB6-DF7E-9B25-7163-08A55C6DEF26}"/>
-              </a:ext>
-            </a:extLst>
-          </p:cNvPr>
-          <p:cNvSpPr>
-            <a:spLocks noGrp="1"/>
-          </p:cNvSpPr>
-          <p:nvPr>
-            <p:ph type="ftr" sz="quarter" idx="11"/>
-          </p:nvPr>
-        </p:nvSpPr>
-        <p:spPr/>
-        <p:txBody>
-          <a:bodyPr/>
-          <a:lstStyle/>
-          <a:p>
-            <a:endParaRPr lang="tr-TR"/>
-          </a:p>
-        </p:txBody>
-      </p:sp>
-      <p:sp>
-        <p:nvSpPr>
-          <p:cNvPr id="6" name="Slide Number Placeholder 5">
-            <a:extLst>
-              <a:ext uri="{FF2B5EF4-FFF2-40B4-BE49-F238E27FC236}">
-                <a16:creationId xmlns:a16="http://schemas.microsoft.com/office/drawing/2014/main" id="{A9A487D7-4C0B-B815-A0A2-20D99AF62075}"/>
-              </a:ext>
-            </a:extLst>
-          </p:cNvPr>
-          <p:cNvSpPr>
-            <a:spLocks noGrp="1"/>
-          </p:cNvSpPr>
-          <p:nvPr>
-            <p:ph type="sldNum" sz="quarter" idx="12"/>
-          </p:nvPr>
-        </p:nvSpPr>
-        <p:spPr/>
-        <p:txBody>
-          <a:bodyPr/>
-          <a:lstStyle/>
-          <a:p>
-            <a:fld id="{25F86283-E030-43E8-9698-621E2E587A4B}" type="slidenum">
-              <a:rPr lang="tr-TR" smtClean="0"/>
-              <a:t>‹#›</a:t>
-            </a:fld>
-            <a:endParaRPr lang="tr-TR"/>
-          </a:p>
-        </p:txBody>
-      </p:sp>
     </p:spTree>
     <p:extLst>
       <p:ext uri="{BB962C8B-B14F-4D97-AF65-F5344CB8AC3E}">
@@ -4292,7 +3478,7 @@
 </file>
 
 <file path=ppt/slideLayouts/slideLayout3.xml><?xml version="1.0" encoding="utf-8"?>
-<p:sldLayout xmlns:a="http://schemas.openxmlformats.org/drawingml/2006/main" xmlns:r="http://schemas.openxmlformats.org/officeDocument/2006/relationships" xmlns:p="http://schemas.openxmlformats.org/presentationml/2006/main" type="secHead">
+<p:sldLayout xmlns:a="http://schemas.openxmlformats.org/drawingml/2006/main" xmlns:r="http://schemas.openxmlformats.org/officeDocument/2006/relationships" xmlns:p="http://schemas.openxmlformats.org/presentationml/2006/main" userDrawn="1">
   <p:cSld name="Section Header">
     <p:spTree>
       <p:nvGrpSpPr>
@@ -4308,252 +3494,6 @@
           <a:chExt cx="0" cy="0"/>
         </a:xfrm>
       </p:grpSpPr>
-      <p:sp>
-        <p:nvSpPr>
-          <p:cNvPr id="2" name="Title 1">
-            <a:extLst>
-              <a:ext uri="{FF2B5EF4-FFF2-40B4-BE49-F238E27FC236}">
-                <a16:creationId xmlns:a16="http://schemas.microsoft.com/office/drawing/2014/main" id="{1D09DCC4-B41F-B311-79C2-28D722B4B2D3}"/>
-              </a:ext>
-            </a:extLst>
-          </p:cNvPr>
-          <p:cNvSpPr>
-            <a:spLocks noGrp="1"/>
-          </p:cNvSpPr>
-          <p:nvPr>
-            <p:ph type="title"/>
-          </p:nvPr>
-        </p:nvSpPr>
-        <p:spPr>
-          <a:xfrm>
-            <a:off x="831850" y="1709738"/>
-            <a:ext cx="10515600" cy="2852737"/>
-          </a:xfrm>
-        </p:spPr>
-        <p:txBody>
-          <a:bodyPr anchor="b"/>
-          <a:lstStyle>
-            <a:lvl1pPr>
-              <a:defRPr sz="6000"/>
-            </a:lvl1pPr>
-          </a:lstStyle>
-          <a:p>
-            <a:r>
-              <a:rPr lang="en-US"/>
-              <a:t>Click to edit Master title style</a:t>
-            </a:r>
-            <a:endParaRPr lang="tr-TR"/>
-          </a:p>
-        </p:txBody>
-      </p:sp>
-      <p:sp>
-        <p:nvSpPr>
-          <p:cNvPr id="3" name="Text Placeholder 2">
-            <a:extLst>
-              <a:ext uri="{FF2B5EF4-FFF2-40B4-BE49-F238E27FC236}">
-                <a16:creationId xmlns:a16="http://schemas.microsoft.com/office/drawing/2014/main" id="{03008651-0BA3-BCF8-ABEC-224E7B0870C9}"/>
-              </a:ext>
-            </a:extLst>
-          </p:cNvPr>
-          <p:cNvSpPr>
-            <a:spLocks noGrp="1"/>
-          </p:cNvSpPr>
-          <p:nvPr>
-            <p:ph type="body" idx="1"/>
-          </p:nvPr>
-        </p:nvSpPr>
-        <p:spPr>
-          <a:xfrm>
-            <a:off x="831850" y="4589463"/>
-            <a:ext cx="10515600" cy="1500187"/>
-          </a:xfrm>
-        </p:spPr>
-        <p:txBody>
-          <a:bodyPr/>
-          <a:lstStyle>
-            <a:lvl1pPr marL="0" indent="0">
-              <a:buNone/>
-              <a:defRPr sz="2400">
-                <a:solidFill>
-                  <a:schemeClr val="tx1">
-                    <a:tint val="82000"/>
-                  </a:schemeClr>
-                </a:solidFill>
-              </a:defRPr>
-            </a:lvl1pPr>
-            <a:lvl2pPr marL="457200" indent="0">
-              <a:buNone/>
-              <a:defRPr sz="2000">
-                <a:solidFill>
-                  <a:schemeClr val="tx1">
-                    <a:tint val="82000"/>
-                  </a:schemeClr>
-                </a:solidFill>
-              </a:defRPr>
-            </a:lvl2pPr>
-            <a:lvl3pPr marL="914400" indent="0">
-              <a:buNone/>
-              <a:defRPr sz="1800">
-                <a:solidFill>
-                  <a:schemeClr val="tx1">
-                    <a:tint val="82000"/>
-                  </a:schemeClr>
-                </a:solidFill>
-              </a:defRPr>
-            </a:lvl3pPr>
-            <a:lvl4pPr marL="1371600" indent="0">
-              <a:buNone/>
-              <a:defRPr sz="1600">
-                <a:solidFill>
-                  <a:schemeClr val="tx1">
-                    <a:tint val="82000"/>
-                  </a:schemeClr>
-                </a:solidFill>
-              </a:defRPr>
-            </a:lvl4pPr>
-            <a:lvl5pPr marL="1828800" indent="0">
-              <a:buNone/>
-              <a:defRPr sz="1600">
-                <a:solidFill>
-                  <a:schemeClr val="tx1">
-                    <a:tint val="82000"/>
-                  </a:schemeClr>
-                </a:solidFill>
-              </a:defRPr>
-            </a:lvl5pPr>
-            <a:lvl6pPr marL="2286000" indent="0">
-              <a:buNone/>
-              <a:defRPr sz="1600">
-                <a:solidFill>
-                  <a:schemeClr val="tx1">
-                    <a:tint val="82000"/>
-                  </a:schemeClr>
-                </a:solidFill>
-              </a:defRPr>
-            </a:lvl6pPr>
-            <a:lvl7pPr marL="2743200" indent="0">
-              <a:buNone/>
-              <a:defRPr sz="1600">
-                <a:solidFill>
-                  <a:schemeClr val="tx1">
-                    <a:tint val="82000"/>
-                  </a:schemeClr>
-                </a:solidFill>
-              </a:defRPr>
-            </a:lvl7pPr>
-            <a:lvl8pPr marL="3200400" indent="0">
-              <a:buNone/>
-              <a:defRPr sz="1600">
-                <a:solidFill>
-                  <a:schemeClr val="tx1">
-                    <a:tint val="82000"/>
-                  </a:schemeClr>
-                </a:solidFill>
-              </a:defRPr>
-            </a:lvl8pPr>
-            <a:lvl9pPr marL="3657600" indent="0">
-              <a:buNone/>
-              <a:defRPr sz="1600">
-                <a:solidFill>
-                  <a:schemeClr val="tx1">
-                    <a:tint val="82000"/>
-                  </a:schemeClr>
-                </a:solidFill>
-              </a:defRPr>
-            </a:lvl9pPr>
-          </a:lstStyle>
-          <a:p>
-            <a:pPr lvl="0"/>
-            <a:r>
-              <a:rPr lang="en-US"/>
-              <a:t>Click to edit Master text styles</a:t>
-            </a:r>
-          </a:p>
-        </p:txBody>
-      </p:sp>
-      <p:sp>
-        <p:nvSpPr>
-          <p:cNvPr id="4" name="Date Placeholder 3">
-            <a:extLst>
-              <a:ext uri="{FF2B5EF4-FFF2-40B4-BE49-F238E27FC236}">
-                <a16:creationId xmlns:a16="http://schemas.microsoft.com/office/drawing/2014/main" id="{7AF281D8-3A7D-3F81-FB3C-A03503404BB0}"/>
-              </a:ext>
-            </a:extLst>
-          </p:cNvPr>
-          <p:cNvSpPr>
-            <a:spLocks noGrp="1"/>
-          </p:cNvSpPr>
-          <p:nvPr>
-            <p:ph type="dt" sz="half" idx="10"/>
-          </p:nvPr>
-        </p:nvSpPr>
-        <p:spPr/>
-        <p:txBody>
-          <a:bodyPr/>
-          <a:lstStyle/>
-          <a:p>
-            <a:fld id="{3EF59CCF-2F75-48E0-B827-F930E918C137}" type="datetimeFigureOut">
-              <a:rPr lang="tr-TR" smtClean="0"/>
-              <a:t>14.05.2026</a:t>
-            </a:fld>
-            <a:endParaRPr lang="tr-TR"/>
-          </a:p>
-        </p:txBody>
-      </p:sp>
-      <p:sp>
-        <p:nvSpPr>
-          <p:cNvPr id="5" name="Footer Placeholder 4">
-            <a:extLst>
-              <a:ext uri="{FF2B5EF4-FFF2-40B4-BE49-F238E27FC236}">
-                <a16:creationId xmlns:a16="http://schemas.microsoft.com/office/drawing/2014/main" id="{3688AA5C-4342-D1C9-194A-B8924187965C}"/>
-              </a:ext>
-            </a:extLst>
-          </p:cNvPr>
-          <p:cNvSpPr>
-            <a:spLocks noGrp="1"/>
-          </p:cNvSpPr>
-          <p:nvPr>
-            <p:ph type="ftr" sz="quarter" idx="11"/>
-          </p:nvPr>
-        </p:nvSpPr>
-        <p:spPr/>
-        <p:txBody>
-          <a:bodyPr/>
-          <a:lstStyle/>
-          <a:p>
-            <a:endParaRPr lang="tr-TR"/>
-          </a:p>
-        </p:txBody>
-      </p:sp>
-      <p:sp>
-        <p:nvSpPr>
-          <p:cNvPr id="6" name="Slide Number Placeholder 5">
-            <a:extLst>
-              <a:ext uri="{FF2B5EF4-FFF2-40B4-BE49-F238E27FC236}">
-                <a16:creationId xmlns:a16="http://schemas.microsoft.com/office/drawing/2014/main" id="{CCABE101-D0F2-8A6D-AC9A-A5E7216C9827}"/>
-              </a:ext>
-            </a:extLst>
-          </p:cNvPr>
-          <p:cNvSpPr>
-            <a:spLocks noGrp="1"/>
-          </p:cNvSpPr>
-          <p:nvPr>
-            <p:ph type="sldNum" sz="quarter" idx="12"/>
-          </p:nvPr>
-        </p:nvSpPr>
-        <p:spPr/>
-        <p:txBody>
-          <a:bodyPr/>
-          <a:lstStyle/>
-          <a:p>
-            <a:fld id="{25F86283-E030-43E8-9698-621E2E587A4B}" type="slidenum">
-              <a:rPr lang="tr-TR" smtClean="0"/>
-              <a:t>‹#›</a:t>
-            </a:fld>
-            <a:endParaRPr lang="tr-TR"/>
-          </a:p>
-        </p:txBody>
-      </p:sp>
     </p:spTree>
     <p:extLst>
       <p:ext uri="{BB962C8B-B14F-4D97-AF65-F5344CB8AC3E}">
@@ -4568,689 +3508,6 @@
 </file>
 
 <file path=ppt/slideLayouts/slideLayout4.xml><?xml version="1.0" encoding="utf-8"?>
-<p:sldLayout xmlns:a="http://schemas.openxmlformats.org/drawingml/2006/main" xmlns:r="http://schemas.openxmlformats.org/officeDocument/2006/relationships" xmlns:p="http://schemas.openxmlformats.org/presentationml/2006/main" type="twoObj">
-  <p:cSld name="Two Content">
-    <p:spTree>
-      <p:nvGrpSpPr>
-        <p:cNvPr id="1" name=""/>
-        <p:cNvGrpSpPr/>
-        <p:nvPr/>
-      </p:nvGrpSpPr>
-      <p:grpSpPr>
-        <a:xfrm>
-          <a:off x="0" y="0"/>
-          <a:ext cx="0" cy="0"/>
-          <a:chOff x="0" y="0"/>
-          <a:chExt cx="0" cy="0"/>
-        </a:xfrm>
-      </p:grpSpPr>
-      <p:sp>
-        <p:nvSpPr>
-          <p:cNvPr id="2" name="Title 1">
-            <a:extLst>
-              <a:ext uri="{FF2B5EF4-FFF2-40B4-BE49-F238E27FC236}">
-                <a16:creationId xmlns:a16="http://schemas.microsoft.com/office/drawing/2014/main" id="{5A36B5E5-CF30-49C0-2511-08B3A156AD92}"/>
-              </a:ext>
-            </a:extLst>
-          </p:cNvPr>
-          <p:cNvSpPr>
-            <a:spLocks noGrp="1"/>
-          </p:cNvSpPr>
-          <p:nvPr>
-            <p:ph type="title"/>
-          </p:nvPr>
-        </p:nvSpPr>
-        <p:spPr/>
-        <p:txBody>
-          <a:bodyPr/>
-          <a:lstStyle/>
-          <a:p>
-            <a:r>
-              <a:rPr lang="en-US"/>
-              <a:t>Click to edit Master title style</a:t>
-            </a:r>
-            <a:endParaRPr lang="tr-TR"/>
-          </a:p>
-        </p:txBody>
-      </p:sp>
-      <p:sp>
-        <p:nvSpPr>
-          <p:cNvPr id="3" name="Content Placeholder 2">
-            <a:extLst>
-              <a:ext uri="{FF2B5EF4-FFF2-40B4-BE49-F238E27FC236}">
-                <a16:creationId xmlns:a16="http://schemas.microsoft.com/office/drawing/2014/main" id="{26B31D83-C97A-AF38-42B5-644B19337A5C}"/>
-              </a:ext>
-            </a:extLst>
-          </p:cNvPr>
-          <p:cNvSpPr>
-            <a:spLocks noGrp="1"/>
-          </p:cNvSpPr>
-          <p:nvPr>
-            <p:ph sz="half" idx="1"/>
-          </p:nvPr>
-        </p:nvSpPr>
-        <p:spPr>
-          <a:xfrm>
-            <a:off x="838200" y="1825625"/>
-            <a:ext cx="5181600" cy="4351338"/>
-          </a:xfrm>
-        </p:spPr>
-        <p:txBody>
-          <a:bodyPr/>
-          <a:lstStyle/>
-          <a:p>
-            <a:pPr lvl="0"/>
-            <a:r>
-              <a:rPr lang="en-US"/>
-              <a:t>Click to edit Master text styles</a:t>
-            </a:r>
-          </a:p>
-          <a:p>
-            <a:pPr lvl="1"/>
-            <a:r>
-              <a:rPr lang="en-US"/>
-              <a:t>Second level</a:t>
-            </a:r>
-          </a:p>
-          <a:p>
-            <a:pPr lvl="2"/>
-            <a:r>
-              <a:rPr lang="en-US"/>
-              <a:t>Third level</a:t>
-            </a:r>
-          </a:p>
-          <a:p>
-            <a:pPr lvl="3"/>
-            <a:r>
-              <a:rPr lang="en-US"/>
-              <a:t>Fourth level</a:t>
-            </a:r>
-          </a:p>
-          <a:p>
-            <a:pPr lvl="4"/>
-            <a:r>
-              <a:rPr lang="en-US"/>
-              <a:t>Fifth level</a:t>
-            </a:r>
-            <a:endParaRPr lang="tr-TR"/>
-          </a:p>
-        </p:txBody>
-      </p:sp>
-      <p:sp>
-        <p:nvSpPr>
-          <p:cNvPr id="4" name="Content Placeholder 3">
-            <a:extLst>
-              <a:ext uri="{FF2B5EF4-FFF2-40B4-BE49-F238E27FC236}">
-                <a16:creationId xmlns:a16="http://schemas.microsoft.com/office/drawing/2014/main" id="{272F6F4F-DC33-347D-99DB-F6373935D2EA}"/>
-              </a:ext>
-            </a:extLst>
-          </p:cNvPr>
-          <p:cNvSpPr>
-            <a:spLocks noGrp="1"/>
-          </p:cNvSpPr>
-          <p:nvPr>
-            <p:ph sz="half" idx="2"/>
-          </p:nvPr>
-        </p:nvSpPr>
-        <p:spPr>
-          <a:xfrm>
-            <a:off x="6172200" y="1825625"/>
-            <a:ext cx="5181600" cy="4351338"/>
-          </a:xfrm>
-        </p:spPr>
-        <p:txBody>
-          <a:bodyPr/>
-          <a:lstStyle/>
-          <a:p>
-            <a:pPr lvl="0"/>
-            <a:r>
-              <a:rPr lang="en-US"/>
-              <a:t>Click to edit Master text styles</a:t>
-            </a:r>
-          </a:p>
-          <a:p>
-            <a:pPr lvl="1"/>
-            <a:r>
-              <a:rPr lang="en-US"/>
-              <a:t>Second level</a:t>
-            </a:r>
-          </a:p>
-          <a:p>
-            <a:pPr lvl="2"/>
-            <a:r>
-              <a:rPr lang="en-US"/>
-              <a:t>Third level</a:t>
-            </a:r>
-          </a:p>
-          <a:p>
-            <a:pPr lvl="3"/>
-            <a:r>
-              <a:rPr lang="en-US"/>
-              <a:t>Fourth level</a:t>
-            </a:r>
-          </a:p>
-          <a:p>
-            <a:pPr lvl="4"/>
-            <a:r>
-              <a:rPr lang="en-US"/>
-              <a:t>Fifth level</a:t>
-            </a:r>
-            <a:endParaRPr lang="tr-TR"/>
-          </a:p>
-        </p:txBody>
-      </p:sp>
-      <p:sp>
-        <p:nvSpPr>
-          <p:cNvPr id="5" name="Date Placeholder 4">
-            <a:extLst>
-              <a:ext uri="{FF2B5EF4-FFF2-40B4-BE49-F238E27FC236}">
-                <a16:creationId xmlns:a16="http://schemas.microsoft.com/office/drawing/2014/main" id="{88DB5C53-F985-18A5-A9F4-F99EEDD1D86A}"/>
-              </a:ext>
-            </a:extLst>
-          </p:cNvPr>
-          <p:cNvSpPr>
-            <a:spLocks noGrp="1"/>
-          </p:cNvSpPr>
-          <p:nvPr>
-            <p:ph type="dt" sz="half" idx="10"/>
-          </p:nvPr>
-        </p:nvSpPr>
-        <p:spPr/>
-        <p:txBody>
-          <a:bodyPr/>
-          <a:lstStyle/>
-          <a:p>
-            <a:fld id="{3EF59CCF-2F75-48E0-B827-F930E918C137}" type="datetimeFigureOut">
-              <a:rPr lang="tr-TR" smtClean="0"/>
-              <a:t>14.05.2026</a:t>
-            </a:fld>
-            <a:endParaRPr lang="tr-TR"/>
-          </a:p>
-        </p:txBody>
-      </p:sp>
-      <p:sp>
-        <p:nvSpPr>
-          <p:cNvPr id="6" name="Footer Placeholder 5">
-            <a:extLst>
-              <a:ext uri="{FF2B5EF4-FFF2-40B4-BE49-F238E27FC236}">
-                <a16:creationId xmlns:a16="http://schemas.microsoft.com/office/drawing/2014/main" id="{CB3DF2EC-6BCA-192E-89E4-81A3660A56B9}"/>
-              </a:ext>
-            </a:extLst>
-          </p:cNvPr>
-          <p:cNvSpPr>
-            <a:spLocks noGrp="1"/>
-          </p:cNvSpPr>
-          <p:nvPr>
-            <p:ph type="ftr" sz="quarter" idx="11"/>
-          </p:nvPr>
-        </p:nvSpPr>
-        <p:spPr/>
-        <p:txBody>
-          <a:bodyPr/>
-          <a:lstStyle/>
-          <a:p>
-            <a:endParaRPr lang="tr-TR"/>
-          </a:p>
-        </p:txBody>
-      </p:sp>
-      <p:sp>
-        <p:nvSpPr>
-          <p:cNvPr id="7" name="Slide Number Placeholder 6">
-            <a:extLst>
-              <a:ext uri="{FF2B5EF4-FFF2-40B4-BE49-F238E27FC236}">
-                <a16:creationId xmlns:a16="http://schemas.microsoft.com/office/drawing/2014/main" id="{EBF4955E-3D13-74E3-945B-29C90C29D06B}"/>
-              </a:ext>
-            </a:extLst>
-          </p:cNvPr>
-          <p:cNvSpPr>
-            <a:spLocks noGrp="1"/>
-          </p:cNvSpPr>
-          <p:nvPr>
-            <p:ph type="sldNum" sz="quarter" idx="12"/>
-          </p:nvPr>
-        </p:nvSpPr>
-        <p:spPr/>
-        <p:txBody>
-          <a:bodyPr/>
-          <a:lstStyle/>
-          <a:p>
-            <a:fld id="{25F86283-E030-43E8-9698-621E2E587A4B}" type="slidenum">
-              <a:rPr lang="tr-TR" smtClean="0"/>
-              <a:t>‹#›</a:t>
-            </a:fld>
-            <a:endParaRPr lang="tr-TR"/>
-          </a:p>
-        </p:txBody>
-      </p:sp>
-    </p:spTree>
-    <p:extLst>
-      <p:ext uri="{BB962C8B-B14F-4D97-AF65-F5344CB8AC3E}">
-        <p14:creationId xmlns:p14="http://schemas.microsoft.com/office/powerpoint/2010/main" val="951125115"/>
-      </p:ext>
-    </p:extLst>
-  </p:cSld>
-  <p:clrMapOvr>
-    <a:masterClrMapping/>
-  </p:clrMapOvr>
-</p:sldLayout>
-</file>
-
-<file path=ppt/slideLayouts/slideLayout5.xml><?xml version="1.0" encoding="utf-8"?>
-<p:sldLayout xmlns:a="http://schemas.openxmlformats.org/drawingml/2006/main" xmlns:r="http://schemas.openxmlformats.org/officeDocument/2006/relationships" xmlns:p="http://schemas.openxmlformats.org/presentationml/2006/main" type="twoTxTwoObj">
-  <p:cSld name="Comparison">
-    <p:spTree>
-      <p:nvGrpSpPr>
-        <p:cNvPr id="1" name=""/>
-        <p:cNvGrpSpPr/>
-        <p:nvPr/>
-      </p:nvGrpSpPr>
-      <p:grpSpPr>
-        <a:xfrm>
-          <a:off x="0" y="0"/>
-          <a:ext cx="0" cy="0"/>
-          <a:chOff x="0" y="0"/>
-          <a:chExt cx="0" cy="0"/>
-        </a:xfrm>
-      </p:grpSpPr>
-      <p:sp>
-        <p:nvSpPr>
-          <p:cNvPr id="2" name="Title 1">
-            <a:extLst>
-              <a:ext uri="{FF2B5EF4-FFF2-40B4-BE49-F238E27FC236}">
-                <a16:creationId xmlns:a16="http://schemas.microsoft.com/office/drawing/2014/main" id="{401DAFCE-4360-3529-85C2-D60FC5E11E78}"/>
-              </a:ext>
-            </a:extLst>
-          </p:cNvPr>
-          <p:cNvSpPr>
-            <a:spLocks noGrp="1"/>
-          </p:cNvSpPr>
-          <p:nvPr>
-            <p:ph type="title"/>
-          </p:nvPr>
-        </p:nvSpPr>
-        <p:spPr>
-          <a:xfrm>
-            <a:off x="839788" y="365125"/>
-            <a:ext cx="10515600" cy="1325563"/>
-          </a:xfrm>
-        </p:spPr>
-        <p:txBody>
-          <a:bodyPr/>
-          <a:lstStyle/>
-          <a:p>
-            <a:r>
-              <a:rPr lang="en-US"/>
-              <a:t>Click to edit Master title style</a:t>
-            </a:r>
-            <a:endParaRPr lang="tr-TR"/>
-          </a:p>
-        </p:txBody>
-      </p:sp>
-      <p:sp>
-        <p:nvSpPr>
-          <p:cNvPr id="3" name="Text Placeholder 2">
-            <a:extLst>
-              <a:ext uri="{FF2B5EF4-FFF2-40B4-BE49-F238E27FC236}">
-                <a16:creationId xmlns:a16="http://schemas.microsoft.com/office/drawing/2014/main" id="{D0186F6A-F01D-451D-9D1C-C244C18E87EF}"/>
-              </a:ext>
-            </a:extLst>
-          </p:cNvPr>
-          <p:cNvSpPr>
-            <a:spLocks noGrp="1"/>
-          </p:cNvSpPr>
-          <p:nvPr>
-            <p:ph type="body" idx="1"/>
-          </p:nvPr>
-        </p:nvSpPr>
-        <p:spPr>
-          <a:xfrm>
-            <a:off x="839788" y="1681163"/>
-            <a:ext cx="5157787" cy="823912"/>
-          </a:xfrm>
-        </p:spPr>
-        <p:txBody>
-          <a:bodyPr anchor="b"/>
-          <a:lstStyle>
-            <a:lvl1pPr marL="0" indent="0">
-              <a:buNone/>
-              <a:defRPr sz="2400" b="1"/>
-            </a:lvl1pPr>
-            <a:lvl2pPr marL="457200" indent="0">
-              <a:buNone/>
-              <a:defRPr sz="2000" b="1"/>
-            </a:lvl2pPr>
-            <a:lvl3pPr marL="914400" indent="0">
-              <a:buNone/>
-              <a:defRPr sz="1800" b="1"/>
-            </a:lvl3pPr>
-            <a:lvl4pPr marL="1371600" indent="0">
-              <a:buNone/>
-              <a:defRPr sz="1600" b="1"/>
-            </a:lvl4pPr>
-            <a:lvl5pPr marL="1828800" indent="0">
-              <a:buNone/>
-              <a:defRPr sz="1600" b="1"/>
-            </a:lvl5pPr>
-            <a:lvl6pPr marL="2286000" indent="0">
-              <a:buNone/>
-              <a:defRPr sz="1600" b="1"/>
-            </a:lvl6pPr>
-            <a:lvl7pPr marL="2743200" indent="0">
-              <a:buNone/>
-              <a:defRPr sz="1600" b="1"/>
-            </a:lvl7pPr>
-            <a:lvl8pPr marL="3200400" indent="0">
-              <a:buNone/>
-              <a:defRPr sz="1600" b="1"/>
-            </a:lvl8pPr>
-            <a:lvl9pPr marL="3657600" indent="0">
-              <a:buNone/>
-              <a:defRPr sz="1600" b="1"/>
-            </a:lvl9pPr>
-          </a:lstStyle>
-          <a:p>
-            <a:pPr lvl="0"/>
-            <a:r>
-              <a:rPr lang="en-US"/>
-              <a:t>Click to edit Master text styles</a:t>
-            </a:r>
-          </a:p>
-        </p:txBody>
-      </p:sp>
-      <p:sp>
-        <p:nvSpPr>
-          <p:cNvPr id="4" name="Content Placeholder 3">
-            <a:extLst>
-              <a:ext uri="{FF2B5EF4-FFF2-40B4-BE49-F238E27FC236}">
-                <a16:creationId xmlns:a16="http://schemas.microsoft.com/office/drawing/2014/main" id="{0051DA4F-D891-8A45-3D20-4FE7739144FE}"/>
-              </a:ext>
-            </a:extLst>
-          </p:cNvPr>
-          <p:cNvSpPr>
-            <a:spLocks noGrp="1"/>
-          </p:cNvSpPr>
-          <p:nvPr>
-            <p:ph sz="half" idx="2"/>
-          </p:nvPr>
-        </p:nvSpPr>
-        <p:spPr>
-          <a:xfrm>
-            <a:off x="839788" y="2505075"/>
-            <a:ext cx="5157787" cy="3684588"/>
-          </a:xfrm>
-        </p:spPr>
-        <p:txBody>
-          <a:bodyPr/>
-          <a:lstStyle/>
-          <a:p>
-            <a:pPr lvl="0"/>
-            <a:r>
-              <a:rPr lang="en-US"/>
-              <a:t>Click to edit Master text styles</a:t>
-            </a:r>
-          </a:p>
-          <a:p>
-            <a:pPr lvl="1"/>
-            <a:r>
-              <a:rPr lang="en-US"/>
-              <a:t>Second level</a:t>
-            </a:r>
-          </a:p>
-          <a:p>
-            <a:pPr lvl="2"/>
-            <a:r>
-              <a:rPr lang="en-US"/>
-              <a:t>Third level</a:t>
-            </a:r>
-          </a:p>
-          <a:p>
-            <a:pPr lvl="3"/>
-            <a:r>
-              <a:rPr lang="en-US"/>
-              <a:t>Fourth level</a:t>
-            </a:r>
-          </a:p>
-          <a:p>
-            <a:pPr lvl="4"/>
-            <a:r>
-              <a:rPr lang="en-US"/>
-              <a:t>Fifth level</a:t>
-            </a:r>
-            <a:endParaRPr lang="tr-TR"/>
-          </a:p>
-        </p:txBody>
-      </p:sp>
-      <p:sp>
-        <p:nvSpPr>
-          <p:cNvPr id="5" name="Text Placeholder 4">
-            <a:extLst>
-              <a:ext uri="{FF2B5EF4-FFF2-40B4-BE49-F238E27FC236}">
-                <a16:creationId xmlns:a16="http://schemas.microsoft.com/office/drawing/2014/main" id="{60A51488-DD92-854E-AD1E-96FF4EA716FA}"/>
-              </a:ext>
-            </a:extLst>
-          </p:cNvPr>
-          <p:cNvSpPr>
-            <a:spLocks noGrp="1"/>
-          </p:cNvSpPr>
-          <p:nvPr>
-            <p:ph type="body" sz="quarter" idx="3"/>
-          </p:nvPr>
-        </p:nvSpPr>
-        <p:spPr>
-          <a:xfrm>
-            <a:off x="6172200" y="1681163"/>
-            <a:ext cx="5183188" cy="823912"/>
-          </a:xfrm>
-        </p:spPr>
-        <p:txBody>
-          <a:bodyPr anchor="b"/>
-          <a:lstStyle>
-            <a:lvl1pPr marL="0" indent="0">
-              <a:buNone/>
-              <a:defRPr sz="2400" b="1"/>
-            </a:lvl1pPr>
-            <a:lvl2pPr marL="457200" indent="0">
-              <a:buNone/>
-              <a:defRPr sz="2000" b="1"/>
-            </a:lvl2pPr>
-            <a:lvl3pPr marL="914400" indent="0">
-              <a:buNone/>
-              <a:defRPr sz="1800" b="1"/>
-            </a:lvl3pPr>
-            <a:lvl4pPr marL="1371600" indent="0">
-              <a:buNone/>
-              <a:defRPr sz="1600" b="1"/>
-            </a:lvl4pPr>
-            <a:lvl5pPr marL="1828800" indent="0">
-              <a:buNone/>
-              <a:defRPr sz="1600" b="1"/>
-            </a:lvl5pPr>
-            <a:lvl6pPr marL="2286000" indent="0">
-              <a:buNone/>
-              <a:defRPr sz="1600" b="1"/>
-            </a:lvl6pPr>
-            <a:lvl7pPr marL="2743200" indent="0">
-              <a:buNone/>
-              <a:defRPr sz="1600" b="1"/>
-            </a:lvl7pPr>
-            <a:lvl8pPr marL="3200400" indent="0">
-              <a:buNone/>
-              <a:defRPr sz="1600" b="1"/>
-            </a:lvl8pPr>
-            <a:lvl9pPr marL="3657600" indent="0">
-              <a:buNone/>
-              <a:defRPr sz="1600" b="1"/>
-            </a:lvl9pPr>
-          </a:lstStyle>
-          <a:p>
-            <a:pPr lvl="0"/>
-            <a:r>
-              <a:rPr lang="en-US"/>
-              <a:t>Click to edit Master text styles</a:t>
-            </a:r>
-          </a:p>
-        </p:txBody>
-      </p:sp>
-      <p:sp>
-        <p:nvSpPr>
-          <p:cNvPr id="6" name="Content Placeholder 5">
-            <a:extLst>
-              <a:ext uri="{FF2B5EF4-FFF2-40B4-BE49-F238E27FC236}">
-                <a16:creationId xmlns:a16="http://schemas.microsoft.com/office/drawing/2014/main" id="{036D5DA0-F756-BF63-C4FA-25F46285D90F}"/>
-              </a:ext>
-            </a:extLst>
-          </p:cNvPr>
-          <p:cNvSpPr>
-            <a:spLocks noGrp="1"/>
-          </p:cNvSpPr>
-          <p:nvPr>
-            <p:ph sz="quarter" idx="4"/>
-          </p:nvPr>
-        </p:nvSpPr>
-        <p:spPr>
-          <a:xfrm>
-            <a:off x="6172200" y="2505075"/>
-            <a:ext cx="5183188" cy="3684588"/>
-          </a:xfrm>
-        </p:spPr>
-        <p:txBody>
-          <a:bodyPr/>
-          <a:lstStyle/>
-          <a:p>
-            <a:pPr lvl="0"/>
-            <a:r>
-              <a:rPr lang="en-US"/>
-              <a:t>Click to edit Master text styles</a:t>
-            </a:r>
-          </a:p>
-          <a:p>
-            <a:pPr lvl="1"/>
-            <a:r>
-              <a:rPr lang="en-US"/>
-              <a:t>Second level</a:t>
-            </a:r>
-          </a:p>
-          <a:p>
-            <a:pPr lvl="2"/>
-            <a:r>
-              <a:rPr lang="en-US"/>
-              <a:t>Third level</a:t>
-            </a:r>
-          </a:p>
-          <a:p>
-            <a:pPr lvl="3"/>
-            <a:r>
-              <a:rPr lang="en-US"/>
-              <a:t>Fourth level</a:t>
-            </a:r>
-          </a:p>
-          <a:p>
-            <a:pPr lvl="4"/>
-            <a:r>
-              <a:rPr lang="en-US"/>
-              <a:t>Fifth level</a:t>
-            </a:r>
-            <a:endParaRPr lang="tr-TR"/>
-          </a:p>
-        </p:txBody>
-      </p:sp>
-      <p:sp>
-        <p:nvSpPr>
-          <p:cNvPr id="7" name="Date Placeholder 6">
-            <a:extLst>
-              <a:ext uri="{FF2B5EF4-FFF2-40B4-BE49-F238E27FC236}">
-                <a16:creationId xmlns:a16="http://schemas.microsoft.com/office/drawing/2014/main" id="{5C8580AF-DDF0-5735-7FA1-BA2164904339}"/>
-              </a:ext>
-            </a:extLst>
-          </p:cNvPr>
-          <p:cNvSpPr>
-            <a:spLocks noGrp="1"/>
-          </p:cNvSpPr>
-          <p:nvPr>
-            <p:ph type="dt" sz="half" idx="10"/>
-          </p:nvPr>
-        </p:nvSpPr>
-        <p:spPr/>
-        <p:txBody>
-          <a:bodyPr/>
-          <a:lstStyle/>
-          <a:p>
-            <a:fld id="{3EF59CCF-2F75-48E0-B827-F930E918C137}" type="datetimeFigureOut">
-              <a:rPr lang="tr-TR" smtClean="0"/>
-              <a:t>14.05.2026</a:t>
-            </a:fld>
-            <a:endParaRPr lang="tr-TR"/>
-          </a:p>
-        </p:txBody>
-      </p:sp>
-      <p:sp>
-        <p:nvSpPr>
-          <p:cNvPr id="8" name="Footer Placeholder 7">
-            <a:extLst>
-              <a:ext uri="{FF2B5EF4-FFF2-40B4-BE49-F238E27FC236}">
-                <a16:creationId xmlns:a16="http://schemas.microsoft.com/office/drawing/2014/main" id="{321F4271-D40F-CA31-8B0B-FE6CC8A489D4}"/>
-              </a:ext>
-            </a:extLst>
-          </p:cNvPr>
-          <p:cNvSpPr>
-            <a:spLocks noGrp="1"/>
-          </p:cNvSpPr>
-          <p:nvPr>
-            <p:ph type="ftr" sz="quarter" idx="11"/>
-          </p:nvPr>
-        </p:nvSpPr>
-        <p:spPr/>
-        <p:txBody>
-          <a:bodyPr/>
-          <a:lstStyle/>
-          <a:p>
-            <a:endParaRPr lang="tr-TR"/>
-          </a:p>
-        </p:txBody>
-      </p:sp>
-      <p:sp>
-        <p:nvSpPr>
-          <p:cNvPr id="9" name="Slide Number Placeholder 8">
-            <a:extLst>
-              <a:ext uri="{FF2B5EF4-FFF2-40B4-BE49-F238E27FC236}">
-                <a16:creationId xmlns:a16="http://schemas.microsoft.com/office/drawing/2014/main" id="{26EDE1E1-DCF0-0C8F-541D-DD492121D5C6}"/>
-              </a:ext>
-            </a:extLst>
-          </p:cNvPr>
-          <p:cNvSpPr>
-            <a:spLocks noGrp="1"/>
-          </p:cNvSpPr>
-          <p:nvPr>
-            <p:ph type="sldNum" sz="quarter" idx="12"/>
-          </p:nvPr>
-        </p:nvSpPr>
-        <p:spPr/>
-        <p:txBody>
-          <a:bodyPr/>
-          <a:lstStyle/>
-          <a:p>
-            <a:fld id="{25F86283-E030-43E8-9698-621E2E587A4B}" type="slidenum">
-              <a:rPr lang="tr-TR" smtClean="0"/>
-              <a:t>‹#›</a:t>
-            </a:fld>
-            <a:endParaRPr lang="tr-TR"/>
-          </a:p>
-        </p:txBody>
-      </p:sp>
-    </p:spTree>
-    <p:extLst>
-      <p:ext uri="{BB962C8B-B14F-4D97-AF65-F5344CB8AC3E}">
-        <p14:creationId xmlns:p14="http://schemas.microsoft.com/office/powerpoint/2010/main" val="2944349424"/>
-      </p:ext>
-    </p:extLst>
-  </p:cSld>
-  <p:clrMapOvr>
-    <a:masterClrMapping/>
-  </p:clrMapOvr>
-</p:sldLayout>
-</file>
-
-<file path=ppt/slideLayouts/slideLayout6.xml><?xml version="1.0" encoding="utf-8"?>
 <p:sldLayout xmlns:a="http://schemas.openxmlformats.org/drawingml/2006/main" xmlns:r="http://schemas.openxmlformats.org/officeDocument/2006/relationships" xmlns:p="http://schemas.openxmlformats.org/presentationml/2006/main" type="titleOnly">
   <p:cSld name="Title Only">
     <p:spTree>
@@ -5289,93 +3546,10 @@
           <a:lstStyle/>
           <a:p>
             <a:r>
-              <a:rPr lang="en-US"/>
+              <a:rPr lang="en-US" dirty="0"/>
               <a:t>Click to edit Master title style</a:t>
             </a:r>
-            <a:endParaRPr lang="tr-TR"/>
-          </a:p>
-        </p:txBody>
-      </p:sp>
-      <p:sp>
-        <p:nvSpPr>
-          <p:cNvPr id="3" name="Date Placeholder 2">
-            <a:extLst>
-              <a:ext uri="{FF2B5EF4-FFF2-40B4-BE49-F238E27FC236}">
-                <a16:creationId xmlns:a16="http://schemas.microsoft.com/office/drawing/2014/main" id="{D36DACA6-FDEE-7F72-D51C-BDC0D5888987}"/>
-              </a:ext>
-            </a:extLst>
-          </p:cNvPr>
-          <p:cNvSpPr>
-            <a:spLocks noGrp="1"/>
-          </p:cNvSpPr>
-          <p:nvPr>
-            <p:ph type="dt" sz="half" idx="10"/>
-          </p:nvPr>
-        </p:nvSpPr>
-        <p:spPr/>
-        <p:txBody>
-          <a:bodyPr/>
-          <a:lstStyle/>
-          <a:p>
-            <a:fld id="{3EF59CCF-2F75-48E0-B827-F930E918C137}" type="datetimeFigureOut">
-              <a:rPr lang="tr-TR" smtClean="0"/>
-              <a:t>14.05.2026</a:t>
-            </a:fld>
-            <a:endParaRPr lang="tr-TR"/>
-          </a:p>
-        </p:txBody>
-      </p:sp>
-      <p:sp>
-        <p:nvSpPr>
-          <p:cNvPr id="4" name="Footer Placeholder 3">
-            <a:extLst>
-              <a:ext uri="{FF2B5EF4-FFF2-40B4-BE49-F238E27FC236}">
-                <a16:creationId xmlns:a16="http://schemas.microsoft.com/office/drawing/2014/main" id="{B75F510D-AF43-9AB9-943B-8B04D96413B2}"/>
-              </a:ext>
-            </a:extLst>
-          </p:cNvPr>
-          <p:cNvSpPr>
-            <a:spLocks noGrp="1"/>
-          </p:cNvSpPr>
-          <p:nvPr>
-            <p:ph type="ftr" sz="quarter" idx="11"/>
-          </p:nvPr>
-        </p:nvSpPr>
-        <p:spPr/>
-        <p:txBody>
-          <a:bodyPr/>
-          <a:lstStyle/>
-          <a:p>
-            <a:endParaRPr lang="tr-TR"/>
-          </a:p>
-        </p:txBody>
-      </p:sp>
-      <p:sp>
-        <p:nvSpPr>
-          <p:cNvPr id="5" name="Slide Number Placeholder 4">
-            <a:extLst>
-              <a:ext uri="{FF2B5EF4-FFF2-40B4-BE49-F238E27FC236}">
-                <a16:creationId xmlns:a16="http://schemas.microsoft.com/office/drawing/2014/main" id="{025D72D5-3121-A953-13E1-BB6B5BEE2640}"/>
-              </a:ext>
-            </a:extLst>
-          </p:cNvPr>
-          <p:cNvSpPr>
-            <a:spLocks noGrp="1"/>
-          </p:cNvSpPr>
-          <p:nvPr>
-            <p:ph type="sldNum" sz="quarter" idx="12"/>
-          </p:nvPr>
-        </p:nvSpPr>
-        <p:spPr/>
-        <p:txBody>
-          <a:bodyPr/>
-          <a:lstStyle/>
-          <a:p>
-            <a:fld id="{25F86283-E030-43E8-9698-621E2E587A4B}" type="slidenum">
-              <a:rPr lang="tr-TR" smtClean="0"/>
-              <a:t>‹#›</a:t>
-            </a:fld>
-            <a:endParaRPr lang="tr-TR"/>
+            <a:endParaRPr lang="tr-TR" dirty="0"/>
           </a:p>
         </p:txBody>
       </p:sp>
@@ -5392,7 +3566,7 @@
 </p:sldLayout>
 </file>
 
-<file path=ppt/slideLayouts/slideLayout7.xml><?xml version="1.0" encoding="utf-8"?>
+<file path=ppt/slideLayouts/slideLayout5.xml><?xml version="1.0" encoding="utf-8"?>
 <p:sldLayout xmlns:a="http://schemas.openxmlformats.org/drawingml/2006/main" xmlns:r="http://schemas.openxmlformats.org/officeDocument/2006/relationships" xmlns:p="http://schemas.openxmlformats.org/presentationml/2006/main" type="blank">
   <p:cSld name="Blank">
     <p:spTree>
@@ -5409,695 +3583,10 @@
           <a:chExt cx="0" cy="0"/>
         </a:xfrm>
       </p:grpSpPr>
-      <p:sp>
-        <p:nvSpPr>
-          <p:cNvPr id="2" name="Date Placeholder 1">
-            <a:extLst>
-              <a:ext uri="{FF2B5EF4-FFF2-40B4-BE49-F238E27FC236}">
-                <a16:creationId xmlns:a16="http://schemas.microsoft.com/office/drawing/2014/main" id="{ABF3533E-79AA-F494-5B16-80AC9FA67A8D}"/>
-              </a:ext>
-            </a:extLst>
-          </p:cNvPr>
-          <p:cNvSpPr>
-            <a:spLocks noGrp="1"/>
-          </p:cNvSpPr>
-          <p:nvPr>
-            <p:ph type="dt" sz="half" idx="10"/>
-          </p:nvPr>
-        </p:nvSpPr>
-        <p:spPr/>
-        <p:txBody>
-          <a:bodyPr/>
-          <a:lstStyle/>
-          <a:p>
-            <a:fld id="{3EF59CCF-2F75-48E0-B827-F930E918C137}" type="datetimeFigureOut">
-              <a:rPr lang="tr-TR" smtClean="0"/>
-              <a:t>14.05.2026</a:t>
-            </a:fld>
-            <a:endParaRPr lang="tr-TR"/>
-          </a:p>
-        </p:txBody>
-      </p:sp>
-      <p:sp>
-        <p:nvSpPr>
-          <p:cNvPr id="3" name="Footer Placeholder 2">
-            <a:extLst>
-              <a:ext uri="{FF2B5EF4-FFF2-40B4-BE49-F238E27FC236}">
-                <a16:creationId xmlns:a16="http://schemas.microsoft.com/office/drawing/2014/main" id="{62ED0A2C-F8A5-BE29-11EA-CA93E3C8FBCB}"/>
-              </a:ext>
-            </a:extLst>
-          </p:cNvPr>
-          <p:cNvSpPr>
-            <a:spLocks noGrp="1"/>
-          </p:cNvSpPr>
-          <p:nvPr>
-            <p:ph type="ftr" sz="quarter" idx="11"/>
-          </p:nvPr>
-        </p:nvSpPr>
-        <p:spPr/>
-        <p:txBody>
-          <a:bodyPr/>
-          <a:lstStyle/>
-          <a:p>
-            <a:endParaRPr lang="tr-TR"/>
-          </a:p>
-        </p:txBody>
-      </p:sp>
-      <p:sp>
-        <p:nvSpPr>
-          <p:cNvPr id="4" name="Slide Number Placeholder 3">
-            <a:extLst>
-              <a:ext uri="{FF2B5EF4-FFF2-40B4-BE49-F238E27FC236}">
-                <a16:creationId xmlns:a16="http://schemas.microsoft.com/office/drawing/2014/main" id="{81D23C4C-67E4-75FD-7BAF-CBD91412F690}"/>
-              </a:ext>
-            </a:extLst>
-          </p:cNvPr>
-          <p:cNvSpPr>
-            <a:spLocks noGrp="1"/>
-          </p:cNvSpPr>
-          <p:nvPr>
-            <p:ph type="sldNum" sz="quarter" idx="12"/>
-          </p:nvPr>
-        </p:nvSpPr>
-        <p:spPr/>
-        <p:txBody>
-          <a:bodyPr/>
-          <a:lstStyle/>
-          <a:p>
-            <a:fld id="{25F86283-E030-43E8-9698-621E2E587A4B}" type="slidenum">
-              <a:rPr lang="tr-TR" smtClean="0"/>
-              <a:t>‹#›</a:t>
-            </a:fld>
-            <a:endParaRPr lang="tr-TR"/>
-          </a:p>
-        </p:txBody>
-      </p:sp>
     </p:spTree>
     <p:extLst>
       <p:ext uri="{BB962C8B-B14F-4D97-AF65-F5344CB8AC3E}">
         <p14:creationId xmlns:p14="http://schemas.microsoft.com/office/powerpoint/2010/main" val="3537297225"/>
-      </p:ext>
-    </p:extLst>
-  </p:cSld>
-  <p:clrMapOvr>
-    <a:masterClrMapping/>
-  </p:clrMapOvr>
-</p:sldLayout>
-</file>
-
-<file path=ppt/slideLayouts/slideLayout8.xml><?xml version="1.0" encoding="utf-8"?>
-<p:sldLayout xmlns:a="http://schemas.openxmlformats.org/drawingml/2006/main" xmlns:r="http://schemas.openxmlformats.org/officeDocument/2006/relationships" xmlns:p="http://schemas.openxmlformats.org/presentationml/2006/main" type="objTx">
-  <p:cSld name="Content with Caption">
-    <p:spTree>
-      <p:nvGrpSpPr>
-        <p:cNvPr id="1" name=""/>
-        <p:cNvGrpSpPr/>
-        <p:nvPr/>
-      </p:nvGrpSpPr>
-      <p:grpSpPr>
-        <a:xfrm>
-          <a:off x="0" y="0"/>
-          <a:ext cx="0" cy="0"/>
-          <a:chOff x="0" y="0"/>
-          <a:chExt cx="0" cy="0"/>
-        </a:xfrm>
-      </p:grpSpPr>
-      <p:sp>
-        <p:nvSpPr>
-          <p:cNvPr id="2" name="Title 1">
-            <a:extLst>
-              <a:ext uri="{FF2B5EF4-FFF2-40B4-BE49-F238E27FC236}">
-                <a16:creationId xmlns:a16="http://schemas.microsoft.com/office/drawing/2014/main" id="{328D7AFE-9199-4B99-6229-31F59F695EF1}"/>
-              </a:ext>
-            </a:extLst>
-          </p:cNvPr>
-          <p:cNvSpPr>
-            <a:spLocks noGrp="1"/>
-          </p:cNvSpPr>
-          <p:nvPr>
-            <p:ph type="title"/>
-          </p:nvPr>
-        </p:nvSpPr>
-        <p:spPr>
-          <a:xfrm>
-            <a:off x="839788" y="457200"/>
-            <a:ext cx="3932237" cy="1600200"/>
-          </a:xfrm>
-        </p:spPr>
-        <p:txBody>
-          <a:bodyPr anchor="b"/>
-          <a:lstStyle>
-            <a:lvl1pPr>
-              <a:defRPr sz="3200"/>
-            </a:lvl1pPr>
-          </a:lstStyle>
-          <a:p>
-            <a:r>
-              <a:rPr lang="en-US"/>
-              <a:t>Click to edit Master title style</a:t>
-            </a:r>
-            <a:endParaRPr lang="tr-TR"/>
-          </a:p>
-        </p:txBody>
-      </p:sp>
-      <p:sp>
-        <p:nvSpPr>
-          <p:cNvPr id="3" name="Content Placeholder 2">
-            <a:extLst>
-              <a:ext uri="{FF2B5EF4-FFF2-40B4-BE49-F238E27FC236}">
-                <a16:creationId xmlns:a16="http://schemas.microsoft.com/office/drawing/2014/main" id="{6096E8B0-4AA1-2AB8-7AE0-2EA8800C309F}"/>
-              </a:ext>
-            </a:extLst>
-          </p:cNvPr>
-          <p:cNvSpPr>
-            <a:spLocks noGrp="1"/>
-          </p:cNvSpPr>
-          <p:nvPr>
-            <p:ph idx="1"/>
-          </p:nvPr>
-        </p:nvSpPr>
-        <p:spPr>
-          <a:xfrm>
-            <a:off x="5183188" y="987425"/>
-            <a:ext cx="6172200" cy="4873625"/>
-          </a:xfrm>
-        </p:spPr>
-        <p:txBody>
-          <a:bodyPr/>
-          <a:lstStyle>
-            <a:lvl1pPr>
-              <a:defRPr sz="3200"/>
-            </a:lvl1pPr>
-            <a:lvl2pPr>
-              <a:defRPr sz="2800"/>
-            </a:lvl2pPr>
-            <a:lvl3pPr>
-              <a:defRPr sz="2400"/>
-            </a:lvl3pPr>
-            <a:lvl4pPr>
-              <a:defRPr sz="2000"/>
-            </a:lvl4pPr>
-            <a:lvl5pPr>
-              <a:defRPr sz="2000"/>
-            </a:lvl5pPr>
-            <a:lvl6pPr>
-              <a:defRPr sz="2000"/>
-            </a:lvl6pPr>
-            <a:lvl7pPr>
-              <a:defRPr sz="2000"/>
-            </a:lvl7pPr>
-            <a:lvl8pPr>
-              <a:defRPr sz="2000"/>
-            </a:lvl8pPr>
-            <a:lvl9pPr>
-              <a:defRPr sz="2000"/>
-            </a:lvl9pPr>
-          </a:lstStyle>
-          <a:p>
-            <a:pPr lvl="0"/>
-            <a:r>
-              <a:rPr lang="en-US"/>
-              <a:t>Click to edit Master text styles</a:t>
-            </a:r>
-          </a:p>
-          <a:p>
-            <a:pPr lvl="1"/>
-            <a:r>
-              <a:rPr lang="en-US"/>
-              <a:t>Second level</a:t>
-            </a:r>
-          </a:p>
-          <a:p>
-            <a:pPr lvl="2"/>
-            <a:r>
-              <a:rPr lang="en-US"/>
-              <a:t>Third level</a:t>
-            </a:r>
-          </a:p>
-          <a:p>
-            <a:pPr lvl="3"/>
-            <a:r>
-              <a:rPr lang="en-US"/>
-              <a:t>Fourth level</a:t>
-            </a:r>
-          </a:p>
-          <a:p>
-            <a:pPr lvl="4"/>
-            <a:r>
-              <a:rPr lang="en-US"/>
-              <a:t>Fifth level</a:t>
-            </a:r>
-            <a:endParaRPr lang="tr-TR"/>
-          </a:p>
-        </p:txBody>
-      </p:sp>
-      <p:sp>
-        <p:nvSpPr>
-          <p:cNvPr id="4" name="Text Placeholder 3">
-            <a:extLst>
-              <a:ext uri="{FF2B5EF4-FFF2-40B4-BE49-F238E27FC236}">
-                <a16:creationId xmlns:a16="http://schemas.microsoft.com/office/drawing/2014/main" id="{14647DDB-79DD-4362-7368-01805DD73D0D}"/>
-              </a:ext>
-            </a:extLst>
-          </p:cNvPr>
-          <p:cNvSpPr>
-            <a:spLocks noGrp="1"/>
-          </p:cNvSpPr>
-          <p:nvPr>
-            <p:ph type="body" sz="half" idx="2"/>
-          </p:nvPr>
-        </p:nvSpPr>
-        <p:spPr>
-          <a:xfrm>
-            <a:off x="839788" y="2057400"/>
-            <a:ext cx="3932237" cy="3811588"/>
-          </a:xfrm>
-        </p:spPr>
-        <p:txBody>
-          <a:bodyPr/>
-          <a:lstStyle>
-            <a:lvl1pPr marL="0" indent="0">
-              <a:buNone/>
-              <a:defRPr sz="1600"/>
-            </a:lvl1pPr>
-            <a:lvl2pPr marL="457200" indent="0">
-              <a:buNone/>
-              <a:defRPr sz="1400"/>
-            </a:lvl2pPr>
-            <a:lvl3pPr marL="914400" indent="0">
-              <a:buNone/>
-              <a:defRPr sz="1200"/>
-            </a:lvl3pPr>
-            <a:lvl4pPr marL="1371600" indent="0">
-              <a:buNone/>
-              <a:defRPr sz="1000"/>
-            </a:lvl4pPr>
-            <a:lvl5pPr marL="1828800" indent="0">
-              <a:buNone/>
-              <a:defRPr sz="1000"/>
-            </a:lvl5pPr>
-            <a:lvl6pPr marL="2286000" indent="0">
-              <a:buNone/>
-              <a:defRPr sz="1000"/>
-            </a:lvl6pPr>
-            <a:lvl7pPr marL="2743200" indent="0">
-              <a:buNone/>
-              <a:defRPr sz="1000"/>
-            </a:lvl7pPr>
-            <a:lvl8pPr marL="3200400" indent="0">
-              <a:buNone/>
-              <a:defRPr sz="1000"/>
-            </a:lvl8pPr>
-            <a:lvl9pPr marL="3657600" indent="0">
-              <a:buNone/>
-              <a:defRPr sz="1000"/>
-            </a:lvl9pPr>
-          </a:lstStyle>
-          <a:p>
-            <a:pPr lvl="0"/>
-            <a:r>
-              <a:rPr lang="en-US"/>
-              <a:t>Click to edit Master text styles</a:t>
-            </a:r>
-          </a:p>
-        </p:txBody>
-      </p:sp>
-      <p:sp>
-        <p:nvSpPr>
-          <p:cNvPr id="5" name="Date Placeholder 4">
-            <a:extLst>
-              <a:ext uri="{FF2B5EF4-FFF2-40B4-BE49-F238E27FC236}">
-                <a16:creationId xmlns:a16="http://schemas.microsoft.com/office/drawing/2014/main" id="{4E3BFDDE-F648-F670-FC83-45FB6643C8E2}"/>
-              </a:ext>
-            </a:extLst>
-          </p:cNvPr>
-          <p:cNvSpPr>
-            <a:spLocks noGrp="1"/>
-          </p:cNvSpPr>
-          <p:nvPr>
-            <p:ph type="dt" sz="half" idx="10"/>
-          </p:nvPr>
-        </p:nvSpPr>
-        <p:spPr/>
-        <p:txBody>
-          <a:bodyPr/>
-          <a:lstStyle/>
-          <a:p>
-            <a:fld id="{3EF59CCF-2F75-48E0-B827-F930E918C137}" type="datetimeFigureOut">
-              <a:rPr lang="tr-TR" smtClean="0"/>
-              <a:t>14.05.2026</a:t>
-            </a:fld>
-            <a:endParaRPr lang="tr-TR"/>
-          </a:p>
-        </p:txBody>
-      </p:sp>
-      <p:sp>
-        <p:nvSpPr>
-          <p:cNvPr id="6" name="Footer Placeholder 5">
-            <a:extLst>
-              <a:ext uri="{FF2B5EF4-FFF2-40B4-BE49-F238E27FC236}">
-                <a16:creationId xmlns:a16="http://schemas.microsoft.com/office/drawing/2014/main" id="{F8F6594F-6295-65C2-9F7E-10C6F06A11CA}"/>
-              </a:ext>
-            </a:extLst>
-          </p:cNvPr>
-          <p:cNvSpPr>
-            <a:spLocks noGrp="1"/>
-          </p:cNvSpPr>
-          <p:nvPr>
-            <p:ph type="ftr" sz="quarter" idx="11"/>
-          </p:nvPr>
-        </p:nvSpPr>
-        <p:spPr/>
-        <p:txBody>
-          <a:bodyPr/>
-          <a:lstStyle/>
-          <a:p>
-            <a:endParaRPr lang="tr-TR"/>
-          </a:p>
-        </p:txBody>
-      </p:sp>
-      <p:sp>
-        <p:nvSpPr>
-          <p:cNvPr id="7" name="Slide Number Placeholder 6">
-            <a:extLst>
-              <a:ext uri="{FF2B5EF4-FFF2-40B4-BE49-F238E27FC236}">
-                <a16:creationId xmlns:a16="http://schemas.microsoft.com/office/drawing/2014/main" id="{18AD7D61-B07D-E080-7E94-03E2BB8FCCBD}"/>
-              </a:ext>
-            </a:extLst>
-          </p:cNvPr>
-          <p:cNvSpPr>
-            <a:spLocks noGrp="1"/>
-          </p:cNvSpPr>
-          <p:nvPr>
-            <p:ph type="sldNum" sz="quarter" idx="12"/>
-          </p:nvPr>
-        </p:nvSpPr>
-        <p:spPr/>
-        <p:txBody>
-          <a:bodyPr/>
-          <a:lstStyle/>
-          <a:p>
-            <a:fld id="{25F86283-E030-43E8-9698-621E2E587A4B}" type="slidenum">
-              <a:rPr lang="tr-TR" smtClean="0"/>
-              <a:t>‹#›</a:t>
-            </a:fld>
-            <a:endParaRPr lang="tr-TR"/>
-          </a:p>
-        </p:txBody>
-      </p:sp>
-    </p:spTree>
-    <p:extLst>
-      <p:ext uri="{BB962C8B-B14F-4D97-AF65-F5344CB8AC3E}">
-        <p14:creationId xmlns:p14="http://schemas.microsoft.com/office/powerpoint/2010/main" val="3946670451"/>
-      </p:ext>
-    </p:extLst>
-  </p:cSld>
-  <p:clrMapOvr>
-    <a:masterClrMapping/>
-  </p:clrMapOvr>
-</p:sldLayout>
-</file>
-
-<file path=ppt/slideLayouts/slideLayout9.xml><?xml version="1.0" encoding="utf-8"?>
-<p:sldLayout xmlns:a="http://schemas.openxmlformats.org/drawingml/2006/main" xmlns:r="http://schemas.openxmlformats.org/officeDocument/2006/relationships" xmlns:p="http://schemas.openxmlformats.org/presentationml/2006/main" type="picTx">
-  <p:cSld name="Picture with Caption">
-    <p:spTree>
-      <p:nvGrpSpPr>
-        <p:cNvPr id="1" name=""/>
-        <p:cNvGrpSpPr/>
-        <p:nvPr/>
-      </p:nvGrpSpPr>
-      <p:grpSpPr>
-        <a:xfrm>
-          <a:off x="0" y="0"/>
-          <a:ext cx="0" cy="0"/>
-          <a:chOff x="0" y="0"/>
-          <a:chExt cx="0" cy="0"/>
-        </a:xfrm>
-      </p:grpSpPr>
-      <p:sp>
-        <p:nvSpPr>
-          <p:cNvPr id="2" name="Title 1">
-            <a:extLst>
-              <a:ext uri="{FF2B5EF4-FFF2-40B4-BE49-F238E27FC236}">
-                <a16:creationId xmlns:a16="http://schemas.microsoft.com/office/drawing/2014/main" id="{BF802E56-AA67-3DBD-311B-635721F9030C}"/>
-              </a:ext>
-            </a:extLst>
-          </p:cNvPr>
-          <p:cNvSpPr>
-            <a:spLocks noGrp="1"/>
-          </p:cNvSpPr>
-          <p:nvPr>
-            <p:ph type="title"/>
-          </p:nvPr>
-        </p:nvSpPr>
-        <p:spPr>
-          <a:xfrm>
-            <a:off x="839788" y="457200"/>
-            <a:ext cx="3932237" cy="1600200"/>
-          </a:xfrm>
-        </p:spPr>
-        <p:txBody>
-          <a:bodyPr anchor="b"/>
-          <a:lstStyle>
-            <a:lvl1pPr>
-              <a:defRPr sz="3200"/>
-            </a:lvl1pPr>
-          </a:lstStyle>
-          <a:p>
-            <a:r>
-              <a:rPr lang="en-US"/>
-              <a:t>Click to edit Master title style</a:t>
-            </a:r>
-            <a:endParaRPr lang="tr-TR"/>
-          </a:p>
-        </p:txBody>
-      </p:sp>
-      <p:sp>
-        <p:nvSpPr>
-          <p:cNvPr id="3" name="Picture Placeholder 2">
-            <a:extLst>
-              <a:ext uri="{FF2B5EF4-FFF2-40B4-BE49-F238E27FC236}">
-                <a16:creationId xmlns:a16="http://schemas.microsoft.com/office/drawing/2014/main" id="{D5F95AD3-6D8E-9C5F-1135-7EF1ADB47042}"/>
-              </a:ext>
-            </a:extLst>
-          </p:cNvPr>
-          <p:cNvSpPr>
-            <a:spLocks noGrp="1"/>
-          </p:cNvSpPr>
-          <p:nvPr>
-            <p:ph type="pic" idx="1"/>
-          </p:nvPr>
-        </p:nvSpPr>
-        <p:spPr>
-          <a:xfrm>
-            <a:off x="5183188" y="987425"/>
-            <a:ext cx="6172200" cy="4873625"/>
-          </a:xfrm>
-        </p:spPr>
-        <p:txBody>
-          <a:bodyPr/>
-          <a:lstStyle>
-            <a:lvl1pPr marL="0" indent="0">
-              <a:buNone/>
-              <a:defRPr sz="3200"/>
-            </a:lvl1pPr>
-            <a:lvl2pPr marL="457200" indent="0">
-              <a:buNone/>
-              <a:defRPr sz="2800"/>
-            </a:lvl2pPr>
-            <a:lvl3pPr marL="914400" indent="0">
-              <a:buNone/>
-              <a:defRPr sz="2400"/>
-            </a:lvl3pPr>
-            <a:lvl4pPr marL="1371600" indent="0">
-              <a:buNone/>
-              <a:defRPr sz="2000"/>
-            </a:lvl4pPr>
-            <a:lvl5pPr marL="1828800" indent="0">
-              <a:buNone/>
-              <a:defRPr sz="2000"/>
-            </a:lvl5pPr>
-            <a:lvl6pPr marL="2286000" indent="0">
-              <a:buNone/>
-              <a:defRPr sz="2000"/>
-            </a:lvl6pPr>
-            <a:lvl7pPr marL="2743200" indent="0">
-              <a:buNone/>
-              <a:defRPr sz="2000"/>
-            </a:lvl7pPr>
-            <a:lvl8pPr marL="3200400" indent="0">
-              <a:buNone/>
-              <a:defRPr sz="2000"/>
-            </a:lvl8pPr>
-            <a:lvl9pPr marL="3657600" indent="0">
-              <a:buNone/>
-              <a:defRPr sz="2000"/>
-            </a:lvl9pPr>
-          </a:lstStyle>
-          <a:p>
-            <a:endParaRPr lang="tr-TR"/>
-          </a:p>
-        </p:txBody>
-      </p:sp>
-      <p:sp>
-        <p:nvSpPr>
-          <p:cNvPr id="4" name="Text Placeholder 3">
-            <a:extLst>
-              <a:ext uri="{FF2B5EF4-FFF2-40B4-BE49-F238E27FC236}">
-                <a16:creationId xmlns:a16="http://schemas.microsoft.com/office/drawing/2014/main" id="{7BC28BCE-E549-CD71-E3A8-9C90152AA53B}"/>
-              </a:ext>
-            </a:extLst>
-          </p:cNvPr>
-          <p:cNvSpPr>
-            <a:spLocks noGrp="1"/>
-          </p:cNvSpPr>
-          <p:nvPr>
-            <p:ph type="body" sz="half" idx="2"/>
-          </p:nvPr>
-        </p:nvSpPr>
-        <p:spPr>
-          <a:xfrm>
-            <a:off x="839788" y="2057400"/>
-            <a:ext cx="3932237" cy="3811588"/>
-          </a:xfrm>
-        </p:spPr>
-        <p:txBody>
-          <a:bodyPr/>
-          <a:lstStyle>
-            <a:lvl1pPr marL="0" indent="0">
-              <a:buNone/>
-              <a:defRPr sz="1600"/>
-            </a:lvl1pPr>
-            <a:lvl2pPr marL="457200" indent="0">
-              <a:buNone/>
-              <a:defRPr sz="1400"/>
-            </a:lvl2pPr>
-            <a:lvl3pPr marL="914400" indent="0">
-              <a:buNone/>
-              <a:defRPr sz="1200"/>
-            </a:lvl3pPr>
-            <a:lvl4pPr marL="1371600" indent="0">
-              <a:buNone/>
-              <a:defRPr sz="1000"/>
-            </a:lvl4pPr>
-            <a:lvl5pPr marL="1828800" indent="0">
-              <a:buNone/>
-              <a:defRPr sz="1000"/>
-            </a:lvl5pPr>
-            <a:lvl6pPr marL="2286000" indent="0">
-              <a:buNone/>
-              <a:defRPr sz="1000"/>
-            </a:lvl6pPr>
-            <a:lvl7pPr marL="2743200" indent="0">
-              <a:buNone/>
-              <a:defRPr sz="1000"/>
-            </a:lvl7pPr>
-            <a:lvl8pPr marL="3200400" indent="0">
-              <a:buNone/>
-              <a:defRPr sz="1000"/>
-            </a:lvl8pPr>
-            <a:lvl9pPr marL="3657600" indent="0">
-              <a:buNone/>
-              <a:defRPr sz="1000"/>
-            </a:lvl9pPr>
-          </a:lstStyle>
-          <a:p>
-            <a:pPr lvl="0"/>
-            <a:r>
-              <a:rPr lang="en-US"/>
-              <a:t>Click to edit Master text styles</a:t>
-            </a:r>
-          </a:p>
-        </p:txBody>
-      </p:sp>
-      <p:sp>
-        <p:nvSpPr>
-          <p:cNvPr id="5" name="Date Placeholder 4">
-            <a:extLst>
-              <a:ext uri="{FF2B5EF4-FFF2-40B4-BE49-F238E27FC236}">
-                <a16:creationId xmlns:a16="http://schemas.microsoft.com/office/drawing/2014/main" id="{56CAFBE0-8FD6-DED4-0EED-4DBA9FF019FD}"/>
-              </a:ext>
-            </a:extLst>
-          </p:cNvPr>
-          <p:cNvSpPr>
-            <a:spLocks noGrp="1"/>
-          </p:cNvSpPr>
-          <p:nvPr>
-            <p:ph type="dt" sz="half" idx="10"/>
-          </p:nvPr>
-        </p:nvSpPr>
-        <p:spPr/>
-        <p:txBody>
-          <a:bodyPr/>
-          <a:lstStyle/>
-          <a:p>
-            <a:fld id="{3EF59CCF-2F75-48E0-B827-F930E918C137}" type="datetimeFigureOut">
-              <a:rPr lang="tr-TR" smtClean="0"/>
-              <a:t>14.05.2026</a:t>
-            </a:fld>
-            <a:endParaRPr lang="tr-TR"/>
-          </a:p>
-        </p:txBody>
-      </p:sp>
-      <p:sp>
-        <p:nvSpPr>
-          <p:cNvPr id="6" name="Footer Placeholder 5">
-            <a:extLst>
-              <a:ext uri="{FF2B5EF4-FFF2-40B4-BE49-F238E27FC236}">
-                <a16:creationId xmlns:a16="http://schemas.microsoft.com/office/drawing/2014/main" id="{BCD7EB54-93F5-4DEF-EB51-550B04FF54C6}"/>
-              </a:ext>
-            </a:extLst>
-          </p:cNvPr>
-          <p:cNvSpPr>
-            <a:spLocks noGrp="1"/>
-          </p:cNvSpPr>
-          <p:nvPr>
-            <p:ph type="ftr" sz="quarter" idx="11"/>
-          </p:nvPr>
-        </p:nvSpPr>
-        <p:spPr/>
-        <p:txBody>
-          <a:bodyPr/>
-          <a:lstStyle/>
-          <a:p>
-            <a:endParaRPr lang="tr-TR"/>
-          </a:p>
-        </p:txBody>
-      </p:sp>
-      <p:sp>
-        <p:nvSpPr>
-          <p:cNvPr id="7" name="Slide Number Placeholder 6">
-            <a:extLst>
-              <a:ext uri="{FF2B5EF4-FFF2-40B4-BE49-F238E27FC236}">
-                <a16:creationId xmlns:a16="http://schemas.microsoft.com/office/drawing/2014/main" id="{6C0B9F31-E1A5-9596-FBCA-39DBD706F75F}"/>
-              </a:ext>
-            </a:extLst>
-          </p:cNvPr>
-          <p:cNvSpPr>
-            <a:spLocks noGrp="1"/>
-          </p:cNvSpPr>
-          <p:nvPr>
-            <p:ph type="sldNum" sz="quarter" idx="12"/>
-          </p:nvPr>
-        </p:nvSpPr>
-        <p:spPr/>
-        <p:txBody>
-          <a:bodyPr/>
-          <a:lstStyle/>
-          <a:p>
-            <a:fld id="{25F86283-E030-43E8-9698-621E2E587A4B}" type="slidenum">
-              <a:rPr lang="tr-TR" smtClean="0"/>
-              <a:t>‹#›</a:t>
-            </a:fld>
-            <a:endParaRPr lang="tr-TR"/>
-          </a:p>
-        </p:txBody>
-      </p:sp>
-    </p:spTree>
-    <p:extLst>
-      <p:ext uri="{BB962C8B-B14F-4D97-AF65-F5344CB8AC3E}">
-        <p14:creationId xmlns:p14="http://schemas.microsoft.com/office/powerpoint/2010/main" val="949987405"/>
       </p:ext>
     </p:extLst>
   </p:cSld>
@@ -6241,143 +3730,6 @@
       </p:sp>
       <p:sp>
         <p:nvSpPr>
-          <p:cNvPr id="4" name="Date Placeholder 3">
-            <a:extLst>
-              <a:ext uri="{FF2B5EF4-FFF2-40B4-BE49-F238E27FC236}">
-                <a16:creationId xmlns:a16="http://schemas.microsoft.com/office/drawing/2014/main" id="{617D1F98-55B7-9A51-0154-752A6A1687DA}"/>
-              </a:ext>
-            </a:extLst>
-          </p:cNvPr>
-          <p:cNvSpPr>
-            <a:spLocks noGrp="1"/>
-          </p:cNvSpPr>
-          <p:nvPr>
-            <p:ph type="dt" sz="half" idx="2"/>
-          </p:nvPr>
-        </p:nvSpPr>
-        <p:spPr>
-          <a:xfrm>
-            <a:off x="838200" y="6356350"/>
-            <a:ext cx="2743200" cy="365125"/>
-          </a:xfrm>
-          <a:prstGeom prst="rect">
-            <a:avLst/>
-          </a:prstGeom>
-        </p:spPr>
-        <p:txBody>
-          <a:bodyPr vert="horz" lIns="91440" tIns="45720" rIns="91440" bIns="45720" rtlCol="0" anchor="ctr"/>
-          <a:lstStyle>
-            <a:lvl1pPr algn="l">
-              <a:defRPr sz="1200">
-                <a:solidFill>
-                  <a:schemeClr val="tx1">
-                    <a:tint val="82000"/>
-                  </a:schemeClr>
-                </a:solidFill>
-              </a:defRPr>
-            </a:lvl1pPr>
-          </a:lstStyle>
-          <a:p>
-            <a:fld id="{3EF59CCF-2F75-48E0-B827-F930E918C137}" type="datetimeFigureOut">
-              <a:rPr lang="tr-TR" smtClean="0"/>
-              <a:t>14.05.2026</a:t>
-            </a:fld>
-            <a:endParaRPr lang="tr-TR"/>
-          </a:p>
-        </p:txBody>
-      </p:sp>
-      <p:sp>
-        <p:nvSpPr>
-          <p:cNvPr id="5" name="Footer Placeholder 4">
-            <a:extLst>
-              <a:ext uri="{FF2B5EF4-FFF2-40B4-BE49-F238E27FC236}">
-                <a16:creationId xmlns:a16="http://schemas.microsoft.com/office/drawing/2014/main" id="{08AA37BB-55F0-1E88-2CB1-D47229C910C4}"/>
-              </a:ext>
-            </a:extLst>
-          </p:cNvPr>
-          <p:cNvSpPr>
-            <a:spLocks noGrp="1"/>
-          </p:cNvSpPr>
-          <p:nvPr>
-            <p:ph type="ftr" sz="quarter" idx="3"/>
-          </p:nvPr>
-        </p:nvSpPr>
-        <p:spPr>
-          <a:xfrm>
-            <a:off x="4038600" y="6356350"/>
-            <a:ext cx="4114800" cy="365125"/>
-          </a:xfrm>
-          <a:prstGeom prst="rect">
-            <a:avLst/>
-          </a:prstGeom>
-        </p:spPr>
-        <p:txBody>
-          <a:bodyPr vert="horz" lIns="91440" tIns="45720" rIns="91440" bIns="45720" rtlCol="0" anchor="ctr"/>
-          <a:lstStyle>
-            <a:lvl1pPr algn="ctr">
-              <a:defRPr sz="1200">
-                <a:solidFill>
-                  <a:schemeClr val="tx1">
-                    <a:tint val="82000"/>
-                  </a:schemeClr>
-                </a:solidFill>
-              </a:defRPr>
-            </a:lvl1pPr>
-          </a:lstStyle>
-          <a:p>
-            <a:endParaRPr lang="tr-TR"/>
-          </a:p>
-        </p:txBody>
-      </p:sp>
-      <p:sp>
-        <p:nvSpPr>
-          <p:cNvPr id="6" name="Slide Number Placeholder 5">
-            <a:extLst>
-              <a:ext uri="{FF2B5EF4-FFF2-40B4-BE49-F238E27FC236}">
-                <a16:creationId xmlns:a16="http://schemas.microsoft.com/office/drawing/2014/main" id="{712FFEB3-CD35-26D7-5BD0-357AAFB5AC7E}"/>
-              </a:ext>
-            </a:extLst>
-          </p:cNvPr>
-          <p:cNvSpPr>
-            <a:spLocks noGrp="1"/>
-          </p:cNvSpPr>
-          <p:nvPr>
-            <p:ph type="sldNum" sz="quarter" idx="4"/>
-          </p:nvPr>
-        </p:nvSpPr>
-        <p:spPr>
-          <a:xfrm>
-            <a:off x="8610600" y="6356350"/>
-            <a:ext cx="2743200" cy="365125"/>
-          </a:xfrm>
-          <a:prstGeom prst="rect">
-            <a:avLst/>
-          </a:prstGeom>
-        </p:spPr>
-        <p:txBody>
-          <a:bodyPr vert="horz" lIns="91440" tIns="45720" rIns="91440" bIns="45720" rtlCol="0" anchor="ctr"/>
-          <a:lstStyle>
-            <a:lvl1pPr algn="r">
-              <a:defRPr sz="1200">
-                <a:solidFill>
-                  <a:schemeClr val="tx1">
-                    <a:tint val="82000"/>
-                  </a:schemeClr>
-                </a:solidFill>
-              </a:defRPr>
-            </a:lvl1pPr>
-          </a:lstStyle>
-          <a:p>
-            <a:fld id="{25F86283-E030-43E8-9698-621E2E587A4B}" type="slidenum">
-              <a:rPr lang="tr-TR" smtClean="0"/>
-              <a:t>‹#›</a:t>
-            </a:fld>
-            <a:endParaRPr lang="tr-TR"/>
-          </a:p>
-        </p:txBody>
-      </p:sp>
-      <p:sp>
-        <p:nvSpPr>
           <p:cNvPr id="900" name="AccentBar"/>
           <p:cNvSpPr/>
           <p:nvPr userDrawn="1"/>
@@ -6443,7 +3795,7 @@
         <p:spPr>
           <a:xfrm>
             <a:off x="457200" y="6477000"/>
-            <a:ext cx="5486400" cy="254000"/>
+            <a:ext cx="2590800" cy="254000"/>
           </a:xfrm>
           <a:prstGeom prst="rect">
             <a:avLst/>
@@ -6456,34 +3808,48 @@
           <a:p>
             <a:pPr algn="l"/>
             <a:r>
+              <a:rPr lang="en-US" sz="900" b="1" dirty="0">
+                <a:solidFill>
+                  <a:srgbClr val="94A3B8"/>
+                </a:solidFill>
+              </a:rPr>
+              <a:t>CHAT WITH YOUR DATA</a:t>
+            </a:r>
+            <a:r>
               <a:rPr lang="en-US" sz="900" dirty="0">
                 <a:solidFill>
                   <a:srgbClr val="94A3B8"/>
                 </a:solidFill>
               </a:rPr>
-              <a:t>Building AI-Powered Reporting with .NET  ·  x.com/alperebicoglu</a:t>
+              <a:t>  ·  x.com/alperebicoglu</a:t>
             </a:r>
           </a:p>
         </p:txBody>
       </p:sp>
       <p:pic>
         <p:nvPicPr>
-          <p:cNvPr id="903" name="QR_Twitter"/>
+          <p:cNvPr id="8" name="Picture 7">
+            <a:extLst>
+              <a:ext uri="{FF2B5EF4-FFF2-40B4-BE49-F238E27FC236}">
+                <a16:creationId xmlns:a16="http://schemas.microsoft.com/office/drawing/2014/main" id="{A7FED691-C0E0-6840-99E9-4DBDDDE0DA22}"/>
+              </a:ext>
+            </a:extLst>
+          </p:cNvPr>
           <p:cNvPicPr>
             <a:picLocks noChangeAspect="1"/>
           </p:cNvPicPr>
-          <p:nvPr/>
+          <p:nvPr userDrawn="1"/>
         </p:nvPicPr>
         <p:blipFill>
-          <a:blip r:embed="rId13"/>
+          <a:blip r:embed="rId7"/>
           <a:stretch>
             <a:fillRect/>
           </a:stretch>
         </p:blipFill>
         <p:spPr>
           <a:xfrm>
-            <a:off x="11480800" y="6121400"/>
-            <a:ext cx="609600" cy="609600"/>
+            <a:off x="11506200" y="6162963"/>
+            <a:ext cx="609600" cy="628073"/>
           </a:xfrm>
           <a:prstGeom prst="rect">
             <a:avLst/>
@@ -6502,14 +3868,8 @@
     <p:sldLayoutId id="2147483685" r:id="rId1"/>
     <p:sldLayoutId id="2147483686" r:id="rId2"/>
     <p:sldLayoutId id="2147483687" r:id="rId3"/>
-    <p:sldLayoutId id="2147483688" r:id="rId4"/>
-    <p:sldLayoutId id="2147483689" r:id="rId5"/>
-    <p:sldLayoutId id="2147483690" r:id="rId6"/>
-    <p:sldLayoutId id="2147483691" r:id="rId7"/>
-    <p:sldLayoutId id="2147483692" r:id="rId8"/>
-    <p:sldLayoutId id="2147483693" r:id="rId9"/>
-    <p:sldLayoutId id="2147483694" r:id="rId10"/>
-    <p:sldLayoutId id="2147483695" r:id="rId11"/>
+    <p:sldLayoutId id="2147483690" r:id="rId4"/>
+    <p:sldLayoutId id="2147483691" r:id="rId5"/>
   </p:sldLayoutIdLst>
   <p:txStyles>
     <p:titleStyle>
@@ -6973,7 +4333,7 @@
             <a:spLocks noGrp="1"/>
           </p:cNvSpPr>
           <p:nvPr>
-            <p:ph type="title"/>
+            <p:ph type="title" idx="4294967295"/>
           </p:nvPr>
         </p:nvSpPr>
         <p:spPr>
@@ -6984,7 +4344,7 @@
         </p:spPr>
         <p:txBody>
           <a:bodyPr wrap="square" lIns="0" tIns="0" rIns="0" bIns="0" anchor="t">
-            <a:normAutofit fontScale="90000"/>
+            <a:normAutofit/>
           </a:bodyPr>
           <a:lstStyle/>
           <a:p>
@@ -7342,7 +4702,7 @@
             <a:spLocks noGrp="1"/>
           </p:cNvSpPr>
           <p:nvPr>
-            <p:ph type="subTitle" idx="1"/>
+            <p:ph type="subTitle" idx="4294967295"/>
           </p:nvPr>
         </p:nvSpPr>
         <p:spPr>
@@ -8409,7 +5769,7 @@
         </p:nvSpPr>
         <p:spPr>
           <a:xfrm>
-            <a:off x="1016000" y="719117"/>
+            <a:off x="1046479" y="1283195"/>
             <a:ext cx="10160000" cy="3193143"/>
           </a:xfrm>
           <a:prstGeom prst="rect">
@@ -8476,7 +5836,7 @@
         </p:nvSpPr>
         <p:spPr>
           <a:xfrm>
-            <a:off x="1016000" y="5759533"/>
+            <a:off x="1046479" y="4594612"/>
             <a:ext cx="10160000" cy="508000"/>
           </a:xfrm>
           <a:prstGeom prst="rect">
@@ -10008,8 +7368,8 @@
         </p:nvSpPr>
         <p:spPr>
           <a:xfrm>
-            <a:off x="73026" y="1270000"/>
-            <a:ext cx="12118974" cy="4318000"/>
+            <a:off x="73026" y="826718"/>
+            <a:ext cx="12118974" cy="4761282"/>
           </a:xfrm>
           <a:prstGeom prst="rect">
             <a:avLst/>
@@ -10037,8 +7397,8 @@
         </p:nvSpPr>
         <p:spPr>
           <a:xfrm>
-            <a:off x="1016000" y="2603500"/>
-            <a:ext cx="10160000" cy="2032000"/>
+            <a:off x="1016000" y="2907526"/>
+            <a:ext cx="7752219" cy="2172474"/>
           </a:xfrm>
           <a:prstGeom prst="rect">
             <a:avLst/>
@@ -10055,7 +7415,7 @@
               </a:lnSpc>
             </a:pPr>
             <a:r>
-              <a:rPr lang="en-US" sz="7200" b="1" dirty="0">
+              <a:rPr lang="en-US" sz="6600" b="1" dirty="0">
                 <a:solidFill>
                   <a:srgbClr val="FFFFFF"/>
                 </a:solidFill>
@@ -10063,14 +7423,14 @@
               <a:t>Let's turn this </a:t>
             </a:r>
             <a:br>
-              <a:rPr lang="en-US" sz="7200" b="1" dirty="0">
+              <a:rPr lang="en-US" sz="6600" b="1" dirty="0">
                 <a:solidFill>
                   <a:srgbClr val="FFFFFF"/>
                 </a:solidFill>
               </a:rPr>
             </a:br>
             <a:r>
-              <a:rPr lang="en-US" sz="7200" b="1" dirty="0">
+              <a:rPr lang="en-US" sz="6600" b="1" dirty="0">
                 <a:solidFill>
                   <a:srgbClr val="FFFFFF"/>
                 </a:solidFill>
@@ -10078,7 +7438,7 @@
               <a:t>into a </a:t>
             </a:r>
             <a:r>
-              <a:rPr lang="en-US" sz="7200" b="1" i="1" dirty="0">
+              <a:rPr lang="en-US" sz="6600" b="1" i="1" dirty="0">
                 <a:solidFill>
                   <a:srgbClr val="22D3EE"/>
                 </a:solidFill>
@@ -10086,7 +7446,7 @@
               <a:t>real  </a:t>
             </a:r>
             <a:r>
-              <a:rPr lang="en-US" sz="7200" b="1" dirty="0">
+              <a:rPr lang="en-US" sz="6600" b="1" dirty="0">
                 <a:solidFill>
                   <a:srgbClr val="22D3EE"/>
                 </a:solidFill>
@@ -10188,7 +7548,7 @@
         </p:nvSpPr>
         <p:spPr>
           <a:xfrm>
-            <a:off x="1016000" y="1869690"/>
+            <a:off x="1016000" y="1355339"/>
             <a:ext cx="6184900" cy="558799"/>
           </a:xfrm>
           <a:prstGeom prst="rect">
@@ -10393,7 +7753,7 @@
         </p:nvSpPr>
         <p:spPr>
           <a:xfrm>
-            <a:off x="1095581" y="1784351"/>
+            <a:off x="1095581" y="1270000"/>
             <a:ext cx="4860000" cy="76200"/>
           </a:xfrm>
           <a:prstGeom prst="rect">
@@ -10416,10 +7776,10 @@
       </p:sp>
       <p:grpSp>
         <p:nvGrpSpPr>
-          <p:cNvPr id="5" name="Group 4">
+          <p:cNvPr id="8" name="Group 7">
             <a:extLst>
               <a:ext uri="{FF2B5EF4-FFF2-40B4-BE49-F238E27FC236}">
-                <a16:creationId xmlns:a16="http://schemas.microsoft.com/office/drawing/2014/main" id="{75D02981-EC00-CA24-9A53-841C69148F8E}"/>
+                <a16:creationId xmlns:a16="http://schemas.microsoft.com/office/drawing/2014/main" id="{9CA86898-2F04-314A-AD0D-C467D9C91776}"/>
               </a:ext>
             </a:extLst>
           </p:cNvPr>
@@ -10428,10 +7788,10 @@
         </p:nvGrpSpPr>
         <p:grpSpPr>
           <a:xfrm>
-            <a:off x="6813036" y="1822451"/>
-            <a:ext cx="1651000" cy="457200"/>
-            <a:chOff x="889000" y="1429656"/>
-            <a:chExt cx="1651000" cy="457200"/>
+            <a:off x="1016000" y="1909532"/>
+            <a:ext cx="2305137" cy="457200"/>
+            <a:chOff x="6898982" y="1781651"/>
+            <a:chExt cx="2305137" cy="457200"/>
           </a:xfrm>
         </p:grpSpPr>
         <p:sp>
@@ -10448,8 +7808,8 @@
           </p:nvSpPr>
           <p:spPr>
             <a:xfrm>
-              <a:off x="889000" y="1429656"/>
-              <a:ext cx="1651000" cy="457200"/>
+              <a:off x="6898982" y="1781651"/>
+              <a:ext cx="2305137" cy="457200"/>
             </a:xfrm>
             <a:prstGeom prst="roundRect">
               <a:avLst>
@@ -10467,14 +7827,14 @@
             <a:bodyPr wrap="square" lIns="91440" tIns="0" rIns="91440" bIns="0" anchor="ctr"/>
             <a:lstStyle/>
             <a:p>
-              <a:pPr algn="ctr"/>
+              <a:pPr algn="r"/>
               <a:r>
                 <a:rPr lang="en-US" b="1" spc="300" dirty="0">
                   <a:solidFill>
                     <a:srgbClr val="FFFFFF"/>
                   </a:solidFill>
                 </a:rPr>
-                <a:t>    LIVE</a:t>
+                <a:t>    LIVE DEMO</a:t>
               </a:r>
             </a:p>
           </p:txBody>
@@ -10507,7 +7867,7 @@
           </p:blipFill>
           <p:spPr>
             <a:xfrm>
-              <a:off x="1137503" y="1476895"/>
+              <a:off x="7137470" y="1831590"/>
               <a:ext cx="394735" cy="394735"/>
             </a:xfrm>
             <a:prstGeom prst="rect">
@@ -14108,10 +11468,10 @@
       </p:sp>
       <p:pic>
         <p:nvPicPr>
-          <p:cNvPr id="10" name="Picture 9">
+          <p:cNvPr id="5" name="Picture 4">
             <a:extLst>
               <a:ext uri="{FF2B5EF4-FFF2-40B4-BE49-F238E27FC236}">
-                <a16:creationId xmlns:a16="http://schemas.microsoft.com/office/drawing/2014/main" id="{D938F68E-AD3D-20B3-D1A3-233E8E7B77F5}"/>
+                <a16:creationId xmlns:a16="http://schemas.microsoft.com/office/drawing/2014/main" id="{183C2402-DE54-31FF-8824-B62F72823255}"/>
               </a:ext>
             </a:extLst>
           </p:cNvPr>
@@ -14128,8 +11488,8 @@
         </p:blipFill>
         <p:spPr>
           <a:xfrm>
-            <a:off x="9265759" y="4724017"/>
-            <a:ext cx="1783770" cy="1837823"/>
+            <a:off x="9310566" y="4739254"/>
+            <a:ext cx="1803902" cy="1853154"/>
           </a:xfrm>
           <a:prstGeom prst="rect">
             <a:avLst/>
@@ -14253,7 +11613,7 @@
             <a:spLocks noGrp="1"/>
           </p:cNvSpPr>
           <p:nvPr>
-            <p:ph type="title"/>
+            <p:ph type="title" idx="4294967295"/>
           </p:nvPr>
         </p:nvSpPr>
         <p:spPr>
@@ -14762,10 +12122,15 @@
             <a:spLocks noGrp="1"/>
           </p:cNvSpPr>
           <p:nvPr>
-            <p:ph type="title"/>
+            <p:ph type="title" idx="4294967295"/>
           </p:nvPr>
         </p:nvSpPr>
-        <p:spPr/>
+        <p:spPr>
+          <a:xfrm>
+            <a:off x="838200" y="365125"/>
+            <a:ext cx="10515600" cy="1325563"/>
+          </a:xfrm>
+        </p:spPr>
         <p:txBody>
           <a:bodyPr>
             <a:normAutofit/>
@@ -17108,12 +14473,19 @@
             <a:spLocks noGrp="1"/>
           </p:cNvSpPr>
           <p:nvPr>
-            <p:ph type="title"/>
+            <p:ph type="title" idx="4294967295"/>
           </p:nvPr>
         </p:nvSpPr>
-        <p:spPr/>
-        <p:txBody>
-          <a:bodyPr/>
+        <p:spPr>
+          <a:xfrm>
+            <a:off x="831850" y="2330062"/>
+            <a:ext cx="10515600" cy="2852737"/>
+          </a:xfrm>
+        </p:spPr>
+        <p:txBody>
+          <a:bodyPr>
+            <a:normAutofit/>
+          </a:bodyPr>
           <a:lstStyle/>
           <a:p>
             <a:pPr algn="l">
@@ -17122,7 +14494,7 @@
               </a:lnSpc>
             </a:pPr>
             <a:r>
-              <a:rPr lang="en-US" sz="8000" b="1" dirty="0">
+              <a:rPr lang="en-US" sz="11500" b="1" dirty="0">
                 <a:solidFill>
                   <a:srgbClr val="FFFFFF"/>
                 </a:solidFill>
@@ -17135,7 +14507,7 @@
               <a:buNone/>
             </a:pPr>
             <a:r>
-              <a:rPr lang="en-US" sz="2800" dirty="0">
+              <a:rPr lang="en-US" sz="4000" dirty="0">
                 <a:solidFill>
                   <a:srgbClr val="94A3B8"/>
                 </a:solidFill>
@@ -17158,7 +14530,7 @@
             <a:spLocks noGrp="1"/>
           </p:cNvSpPr>
           <p:nvPr>
-            <p:ph type="body" idx="1"/>
+            <p:ph type="body" idx="4294967295"/>
           </p:nvPr>
         </p:nvSpPr>
         <p:spPr>
@@ -17201,7 +14573,7 @@
         </p:nvGrpSpPr>
         <p:grpSpPr>
           <a:xfrm>
-            <a:off x="4030325" y="3357368"/>
+            <a:off x="4744310" y="3392369"/>
             <a:ext cx="1651000" cy="457200"/>
             <a:chOff x="889000" y="1429656"/>
             <a:chExt cx="1651000" cy="457200"/>

--- a/Presentation.pptx
+++ b/Presentation.pptx
@@ -219,7 +219,7 @@
           <a:p>
             <a:fld id="{BC660078-77E7-46A7-9649-B3FD62DAD7B9}" type="datetimeFigureOut">
               <a:rPr lang="tr-TR" smtClean="0"/>
-              <a:t>14.05.2026</a:t>
+              <a:t>17.05.2026</a:t>
             </a:fld>
             <a:endParaRPr lang="tr-TR"/>
           </a:p>
@@ -5221,10 +5221,10 @@
             <p:nvPr/>
           </p:nvPicPr>
           <p:blipFill>
-            <a:blip>
+            <a:blip r:embed="rId3">
               <a:extLst>
                 <a:ext uri="{96DAC541-7B7A-43D3-8B79-37D633B846F1}">
-                  <asvg:svgBlip xmlns:asvg="http://schemas.microsoft.com/office/drawing/2016/SVG/main" r:embed="rId3"/>
+                  <asvg:svgBlip xmlns:asvg="http://schemas.microsoft.com/office/drawing/2016/SVG/main" r:embed="rId4"/>
                 </a:ext>
               </a:extLst>
             </a:blip>
@@ -5769,8 +5769,8 @@
         </p:nvSpPr>
         <p:spPr>
           <a:xfrm>
-            <a:off x="1046479" y="1283195"/>
-            <a:ext cx="10160000" cy="3193143"/>
+            <a:off x="1445740" y="-1"/>
+            <a:ext cx="10379675" cy="6857999"/>
           </a:xfrm>
           <a:prstGeom prst="rect">
             <a:avLst/>
@@ -5778,7 +5778,7 @@
           <a:noFill/>
         </p:spPr>
         <p:txBody>
-          <a:bodyPr wrap="square" anchor="t"/>
+          <a:bodyPr wrap="square" anchor="ctr"/>
           <a:lstStyle/>
           <a:p>
             <a:pPr algn="l">
@@ -5824,38 +5824,6 @@
                 </a:solidFill>
               </a:rPr>
               <a:t>magic.</a:t>
-            </a:r>
-          </a:p>
-        </p:txBody>
-      </p:sp>
-      <p:sp>
-        <p:nvSpPr>
-          <p:cNvPr id="703" name="Sub"/>
-          <p:cNvSpPr txBox="1"/>
-          <p:nvPr/>
-        </p:nvSpPr>
-        <p:spPr>
-          <a:xfrm>
-            <a:off x="1046479" y="4594612"/>
-            <a:ext cx="10160000" cy="508000"/>
-          </a:xfrm>
-          <a:prstGeom prst="rect">
-            <a:avLst/>
-          </a:prstGeom>
-          <a:noFill/>
-        </p:spPr>
-        <p:txBody>
-          <a:bodyPr wrap="square" anchor="t"/>
-          <a:lstStyle/>
-          <a:p>
-            <a:pPr algn="l"/>
-            <a:r>
-              <a:rPr lang="en-US" sz="2800" dirty="0">
-                <a:solidFill>
-                  <a:srgbClr val="94A3B8"/>
-                </a:solidFill>
-              </a:rPr>
-              <a:t>Every stage is inspectable, testable, replaceable.</a:t>
             </a:r>
           </a:p>
         </p:txBody>
@@ -7398,7 +7366,7 @@
         <p:spPr>
           <a:xfrm>
             <a:off x="1016000" y="2907526"/>
-            <a:ext cx="7752219" cy="2172474"/>
+            <a:ext cx="10722919" cy="2172474"/>
           </a:xfrm>
           <a:prstGeom prst="rect">
             <a:avLst/>
@@ -7789,7 +7757,7 @@
         <p:grpSpPr>
           <a:xfrm>
             <a:off x="1016000" y="1909532"/>
-            <a:ext cx="2305137" cy="457200"/>
+            <a:ext cx="2592173" cy="457200"/>
             <a:chOff x="6898982" y="1781651"/>
             <a:chExt cx="2305137" cy="457200"/>
           </a:xfrm>
@@ -7834,7 +7802,7 @@
                     <a:srgbClr val="FFFFFF"/>
                   </a:solidFill>
                 </a:rPr>
-                <a:t>    LIVE DEMO</a:t>
+                <a:t>     LIVE DEMO</a:t>
               </a:r>
             </a:p>
           </p:txBody>
@@ -7854,10 +7822,10 @@
             <p:nvPr/>
           </p:nvPicPr>
           <p:blipFill>
-            <a:blip>
+            <a:blip r:embed="rId3">
               <a:extLst>
                 <a:ext uri="{96DAC541-7B7A-43D3-8B79-37D633B846F1}">
-                  <asvg:svgBlip xmlns:asvg="http://schemas.microsoft.com/office/drawing/2016/SVG/main" r:embed="rId3"/>
+                  <asvg:svgBlip xmlns:asvg="http://schemas.microsoft.com/office/drawing/2016/SVG/main" r:embed="rId4"/>
                 </a:ext>
               </a:extLst>
             </a:blip>
@@ -10082,8 +10050,8 @@
         </p:nvSpPr>
         <p:spPr>
           <a:xfrm>
-            <a:off x="635000" y="291383"/>
-            <a:ext cx="10515600" cy="1325563"/>
+            <a:off x="486033" y="180245"/>
+            <a:ext cx="10515600" cy="1006003"/>
           </a:xfrm>
         </p:spPr>
         <p:txBody>
@@ -10112,8 +10080,8 @@
         </p:nvSpPr>
         <p:spPr>
           <a:xfrm>
-            <a:off x="635000" y="1654995"/>
-            <a:ext cx="10182817" cy="4270904"/>
+            <a:off x="486033" y="1309816"/>
+            <a:ext cx="11219934" cy="4593946"/>
           </a:xfrm>
           <a:prstGeom prst="roundRect">
             <a:avLst>
@@ -10132,7 +10100,7 @@
           </a:ln>
         </p:spPr>
         <p:txBody>
-          <a:bodyPr wrap="square" lIns="240000" tIns="200000" rIns="240000" bIns="200000" anchor="t"/>
+          <a:bodyPr wrap="square" lIns="240000" tIns="200000" rIns="240000" bIns="200000" anchor="ctr"/>
           <a:lstStyle/>
           <a:p>
             <a:pPr>
@@ -10374,65 +10342,6 @@
               </a:rPr>
               <a:t>send only schema or local LLM</a:t>
             </a:r>
-            <a:endParaRPr lang="en-US" sz="2800" dirty="0">
-              <a:solidFill>
-                <a:srgbClr val="64748B"/>
-              </a:solidFill>
-            </a:endParaRPr>
-          </a:p>
-          <a:p>
-            <a:pPr>
-              <a:spcBef>
-                <a:spcPts val="400"/>
-              </a:spcBef>
-            </a:pPr>
-            <a:endParaRPr lang="en-US" sz="3200" dirty="0">
-              <a:solidFill>
-                <a:srgbClr val="64748B"/>
-              </a:solidFill>
-            </a:endParaRPr>
-          </a:p>
-          <a:p>
-            <a:pPr marL="228600" indent="-228600">
-              <a:spcBef>
-                <a:spcPts val="400"/>
-              </a:spcBef>
-              <a:buFont typeface="Arial"/>
-              <a:buChar char="•"/>
-            </a:pPr>
-            <a:endParaRPr lang="en-US" sz="3200" dirty="0">
-              <a:solidFill>
-                <a:srgbClr val="64748B"/>
-              </a:solidFill>
-            </a:endParaRPr>
-          </a:p>
-          <a:p>
-            <a:pPr marL="228600" indent="-228600">
-              <a:spcBef>
-                <a:spcPts val="400"/>
-              </a:spcBef>
-              <a:buFont typeface="Arial"/>
-              <a:buChar char="•"/>
-            </a:pPr>
-            <a:endParaRPr lang="en-US" sz="3200" dirty="0">
-              <a:solidFill>
-                <a:srgbClr val="64748B"/>
-              </a:solidFill>
-            </a:endParaRPr>
-          </a:p>
-          <a:p>
-            <a:pPr marL="228600" indent="-228600">
-              <a:spcBef>
-                <a:spcPts val="400"/>
-              </a:spcBef>
-              <a:buFont typeface="Arial"/>
-              <a:buChar char="•"/>
-            </a:pPr>
-            <a:endParaRPr lang="en-US" sz="3200" dirty="0">
-              <a:solidFill>
-                <a:srgbClr val="64748B"/>
-              </a:solidFill>
-            </a:endParaRPr>
           </a:p>
         </p:txBody>
       </p:sp>
@@ -10490,7 +10399,7 @@
         </p:nvSpPr>
         <p:spPr>
           <a:xfrm>
-            <a:off x="725622" y="50104"/>
+            <a:off x="527914" y="102902"/>
             <a:ext cx="10515600" cy="954164"/>
           </a:xfrm>
         </p:spPr>
@@ -10526,8 +10435,8 @@
         </p:nvSpPr>
         <p:spPr>
           <a:xfrm>
-            <a:off x="725622" y="954164"/>
-            <a:ext cx="10740756" cy="5305065"/>
+            <a:off x="430427" y="1057066"/>
+            <a:ext cx="11331146" cy="4878225"/>
           </a:xfrm>
           <a:prstGeom prst="roundRect">
             <a:avLst>
@@ -10546,7 +10455,7 @@
           </a:ln>
         </p:spPr>
         <p:txBody>
-          <a:bodyPr wrap="square" lIns="240000" tIns="200000" rIns="240000" bIns="200000" anchor="t"/>
+          <a:bodyPr wrap="square" lIns="240000" tIns="200000" rIns="240000" bIns="200000" anchor="ctr"/>
           <a:lstStyle/>
           <a:p>
             <a:pPr>
@@ -14479,7 +14388,7 @@
         <p:spPr>
           <a:xfrm>
             <a:off x="831850" y="2330062"/>
-            <a:ext cx="10515600" cy="2852737"/>
+            <a:ext cx="10515600" cy="2958630"/>
           </a:xfrm>
         </p:spPr>
         <p:txBody>
@@ -14536,7 +14445,7 @@
         <p:spPr>
           <a:xfrm>
             <a:off x="831850" y="2050663"/>
-            <a:ext cx="5016500" cy="558799"/>
+            <a:ext cx="5989080" cy="558799"/>
           </a:xfrm>
         </p:spPr>
         <p:txBody>
@@ -14573,7 +14482,7 @@
         </p:nvGrpSpPr>
         <p:grpSpPr>
           <a:xfrm>
-            <a:off x="4744310" y="3392369"/>
+            <a:off x="5270500" y="3440924"/>
             <a:ext cx="1651000" cy="457200"/>
             <a:chOff x="889000" y="1429656"/>
             <a:chExt cx="1651000" cy="457200"/>
@@ -14639,10 +14548,10 @@
             <p:nvPr/>
           </p:nvPicPr>
           <p:blipFill>
-            <a:blip>
+            <a:blip r:embed="rId3">
               <a:extLst>
                 <a:ext uri="{96DAC541-7B7A-43D3-8B79-37D633B846F1}">
-                  <asvg:svgBlip xmlns:asvg="http://schemas.microsoft.com/office/drawing/2016/SVG/main" r:embed="rId3"/>
+                  <asvg:svgBlip xmlns:asvg="http://schemas.microsoft.com/office/drawing/2016/SVG/main" r:embed="rId4"/>
                 </a:ext>
               </a:extLst>
             </a:blip>

--- a/Presentation.pptx
+++ b/Presentation.pptx
@@ -219,7 +219,7 @@
           <a:p>
             <a:fld id="{BC660078-77E7-46A7-9649-B3FD62DAD7B9}" type="datetimeFigureOut">
               <a:rPr lang="tr-TR" smtClean="0"/>
-              <a:t>17.05.2026</a:t>
+              <a:t>20.05.2026</a:t>
             </a:fld>
             <a:endParaRPr lang="tr-TR"/>
           </a:p>
@@ -2634,45 +2634,6 @@
           <a:bodyPr/>
           <a:lstStyle/>
           <a:p>
-            <a:r>
-              <a:rPr lang="en-US" dirty="0"/>
-              <a:t>[CLOSING] Speak slowly. Make eye contact with different sections of the room.</a:t>
-            </a:r>
-          </a:p>
-          <a:p>
-            <a:endParaRPr lang="en-US" dirty="0"/>
-          </a:p>
-          <a:p>
-            <a:r>
-              <a:rPr lang="en-US" dirty="0"/>
-              <a:t>Four takeaways — the reason you came today:</a:t>
-            </a:r>
-          </a:p>
-          <a:p>
-            <a:r>
-              <a:rPr lang="en-US" dirty="0"/>
-              <a:t>- LLMs can unlock data. Not in a hype way — in a boring, pipeline-shaped, shippable way.</a:t>
-            </a:r>
-          </a:p>
-          <a:p>
-            <a:r>
-              <a:rPr lang="en-US" dirty="0"/>
-              <a:t>- Start small. A console app. One table. One query. Prove the pattern before you build the Blazor version.</a:t>
-            </a:r>
-          </a:p>
-          <a:p>
-            <a:r>
-              <a:rPr lang="en-US" dirty="0"/>
-              <a:t>- Scale to real apps. When the pattern works, wrap it in the UX your users actually want.</a:t>
-            </a:r>
-          </a:p>
-          <a:p>
-            <a:r>
-              <a:rPr lang="en-US" dirty="0"/>
-              <a:t>- Focus on UX. The LLM is replaceable. The trust you build with users is not.</a:t>
-            </a:r>
-          </a:p>
-          <a:p>
             <a:endParaRPr lang="en-US" dirty="0"/>
           </a:p>
         </p:txBody>
@@ -2831,7 +2792,7 @@
               <a:defRPr/>
             </a:pPr>
             <a:r>
-              <a:rPr lang="en-US" sz="1200" b="1" dirty="0">
+              <a:rPr lang="en-US" sz="1200" b="0" dirty="0">
                 <a:solidFill>
                   <a:srgbClr val="0F172A"/>
                 </a:solidFill>
@@ -2840,38 +2801,31 @@
               <a:t> </a:t>
             </a:r>
             <a:r>
-              <a:rPr lang="en-US" sz="1200" b="1" dirty="0">
+              <a:rPr lang="en-US" sz="1200" b="0" dirty="0">
                 <a:solidFill>
                   <a:srgbClr val="0F172A"/>
                 </a:solidFill>
               </a:rPr>
-              <a:t>How many of you create a reporting screen or written SQL before</a:t>
-            </a:r>
-            <a:r>
-              <a:rPr lang="en-US" sz="1200" b="1">
+              <a:t>How many of you create a reporting screen or written SQL before? </a:t>
+            </a:r>
+          </a:p>
+          <a:p>
+            <a:r>
+              <a:rPr lang="en-US" sz="1200" b="0" dirty="0">
                 <a:solidFill>
                   <a:srgbClr val="0F172A"/>
                 </a:solidFill>
-              </a:rPr>
-              <a:t>? </a:t>
-            </a:r>
-            <a:endParaRPr lang="en-US" sz="1200" b="1" dirty="0">
-              <a:solidFill>
-                <a:srgbClr val="0F172A"/>
-              </a:solidFill>
-            </a:endParaRPr>
-          </a:p>
-          <a:p>
-            <a:endParaRPr lang="en-US" dirty="0"/>
-          </a:p>
-          <a:p>
-            <a:r>
-              <a:rPr lang="en-US" b="1" dirty="0"/>
+                <a:sym typeface="Wingdings" panose="05000000000000000000" pitchFamily="2" charset="2"/>
+              </a:rPr>
+              <a:t> </a:t>
+            </a:r>
+            <a:r>
+              <a:rPr lang="en-US" b="0" dirty="0"/>
               <a:t>We, developers are the bottleneck. And today we are going to remove ourselves.</a:t>
             </a:r>
           </a:p>
           <a:p>
-            <a:endParaRPr lang="en-US" dirty="0"/>
+            <a:endParaRPr lang="en-US" b="0" dirty="0"/>
           </a:p>
         </p:txBody>
       </p:sp>
@@ -3766,7 +3720,7 @@
         <p:spPr>
           <a:xfrm>
             <a:off x="457200" y="6400800"/>
-            <a:ext cx="8229600" cy="12700"/>
+            <a:ext cx="10944000" cy="12700"/>
           </a:xfrm>
           <a:prstGeom prst="rect">
             <a:avLst/>
@@ -3783,46 +3737,6 @@
           <a:lstStyle/>
           <a:p>
             <a:endParaRPr lang="en-US"/>
-          </a:p>
-        </p:txBody>
-      </p:sp>
-      <p:sp>
-        <p:nvSpPr>
-          <p:cNvPr id="902" name="FooterBrand"/>
-          <p:cNvSpPr txBox="1"/>
-          <p:nvPr userDrawn="1"/>
-        </p:nvSpPr>
-        <p:spPr>
-          <a:xfrm>
-            <a:off x="457200" y="6477000"/>
-            <a:ext cx="2590800" cy="254000"/>
-          </a:xfrm>
-          <a:prstGeom prst="rect">
-            <a:avLst/>
-          </a:prstGeom>
-          <a:noFill/>
-        </p:spPr>
-        <p:txBody>
-          <a:bodyPr wrap="square" rtlCol="0" anchor="ctr"/>
-          <a:lstStyle/>
-          <a:p>
-            <a:pPr algn="l"/>
-            <a:r>
-              <a:rPr lang="en-US" sz="900" b="1" dirty="0">
-                <a:solidFill>
-                  <a:srgbClr val="94A3B8"/>
-                </a:solidFill>
-              </a:rPr>
-              <a:t>CHAT WITH YOUR DATA</a:t>
-            </a:r>
-            <a:r>
-              <a:rPr lang="en-US" sz="900" dirty="0">
-                <a:solidFill>
-                  <a:srgbClr val="94A3B8"/>
-                </a:solidFill>
-              </a:rPr>
-              <a:t>  ·  x.com/alperebicoglu</a:t>
-            </a:r>
           </a:p>
         </p:txBody>
       </p:sp>
@@ -3856,6 +3770,229 @@
           </a:prstGeom>
         </p:spPr>
       </p:pic>
+      <p:grpSp>
+        <p:nvGrpSpPr>
+          <p:cNvPr id="18" name="Group 17">
+            <a:extLst>
+              <a:ext uri="{FF2B5EF4-FFF2-40B4-BE49-F238E27FC236}">
+                <a16:creationId xmlns:a16="http://schemas.microsoft.com/office/drawing/2014/main" id="{1CE886C5-2598-F494-A9A1-5E24B33FE50D}"/>
+              </a:ext>
+            </a:extLst>
+          </p:cNvPr>
+          <p:cNvGrpSpPr/>
+          <p:nvPr userDrawn="1"/>
+        </p:nvGrpSpPr>
+        <p:grpSpPr>
+          <a:xfrm>
+            <a:off x="1378291" y="6469052"/>
+            <a:ext cx="10702016" cy="262113"/>
+            <a:chOff x="654270" y="6494874"/>
+            <a:chExt cx="10702016" cy="262113"/>
+          </a:xfrm>
+        </p:grpSpPr>
+        <p:sp>
+          <p:nvSpPr>
+            <p:cNvPr id="902" name="FooterBrand"/>
+            <p:cNvSpPr txBox="1"/>
+            <p:nvPr userDrawn="1"/>
+          </p:nvSpPr>
+          <p:spPr>
+            <a:xfrm>
+              <a:off x="891486" y="6511337"/>
+              <a:ext cx="10464800" cy="219075"/>
+            </a:xfrm>
+            <a:prstGeom prst="rect">
+              <a:avLst/>
+            </a:prstGeom>
+            <a:noFill/>
+          </p:spPr>
+          <p:txBody>
+            <a:bodyPr wrap="square" rtlCol="0" anchor="ctr"/>
+            <a:lstStyle/>
+            <a:p>
+              <a:pPr algn="l"/>
+              <a:r>
+                <a:rPr lang="en-US" sz="900" b="0" dirty="0">
+                  <a:solidFill>
+                    <a:srgbClr val="94A3B8"/>
+                  </a:solidFill>
+                </a:rPr>
+                <a:t>x.com/</a:t>
+              </a:r>
+              <a:r>
+                <a:rPr lang="en-US" sz="900" b="0" kern="1200" dirty="0">
+                  <a:solidFill>
+                    <a:srgbClr val="94A3B8"/>
+                  </a:solidFill>
+                  <a:latin typeface="+mn-lt"/>
+                  <a:ea typeface="+mn-ea"/>
+                  <a:cs typeface="+mn-cs"/>
+                </a:rPr>
+                <a:t>alperebicoglu              linkedin.com/in/ebicoglu            </a:t>
+              </a:r>
+              <a:r>
+                <a:rPr lang="en-US" sz="900" b="0" dirty="0">
+                  <a:solidFill>
+                    <a:srgbClr val="94A3B8"/>
+                  </a:solidFill>
+                </a:rPr>
+                <a:t>github.com/ebicoglu/chat-with-your-data-conference</a:t>
+              </a:r>
+            </a:p>
+          </p:txBody>
+        </p:sp>
+        <p:pic>
+          <p:nvPicPr>
+            <p:cNvPr id="5" name="Picture 4">
+              <a:extLst>
+                <a:ext uri="{FF2B5EF4-FFF2-40B4-BE49-F238E27FC236}">
+                  <a16:creationId xmlns:a16="http://schemas.microsoft.com/office/drawing/2014/main" id="{E8725AAA-9B52-3C9A-A7D9-C2C142FC2ADC}"/>
+                </a:ext>
+              </a:extLst>
+            </p:cNvPr>
+            <p:cNvPicPr>
+              <a:picLocks noChangeAspect="1"/>
+            </p:cNvPicPr>
+            <p:nvPr userDrawn="1"/>
+          </p:nvPicPr>
+          <p:blipFill>
+            <a:blip r:embed="rId8">
+              <a:extLst>
+                <a:ext uri="{28A0092B-C50C-407E-A947-70E740481C1C}">
+                  <a14:useLocalDpi xmlns:a14="http://schemas.microsoft.com/office/drawing/2010/main" val="0"/>
+                </a:ext>
+              </a:extLst>
+            </a:blip>
+            <a:stretch>
+              <a:fillRect/>
+            </a:stretch>
+          </p:blipFill>
+          <p:spPr>
+            <a:xfrm>
+              <a:off x="654270" y="6504987"/>
+              <a:ext cx="350609" cy="252000"/>
+            </a:xfrm>
+            <a:prstGeom prst="rect">
+              <a:avLst/>
+            </a:prstGeom>
+          </p:spPr>
+        </p:pic>
+        <p:pic>
+          <p:nvPicPr>
+            <p:cNvPr id="15" name="Picture 14">
+              <a:extLst>
+                <a:ext uri="{FF2B5EF4-FFF2-40B4-BE49-F238E27FC236}">
+                  <a16:creationId xmlns:a16="http://schemas.microsoft.com/office/drawing/2014/main" id="{40A8F75C-9B58-C600-54B5-CE0E5D0DA8D8}"/>
+                </a:ext>
+              </a:extLst>
+            </p:cNvPr>
+            <p:cNvPicPr>
+              <a:picLocks noChangeAspect="1"/>
+            </p:cNvPicPr>
+            <p:nvPr userDrawn="1"/>
+          </p:nvPicPr>
+          <p:blipFill>
+            <a:blip r:embed="rId9">
+              <a:extLst>
+                <a:ext uri="{28A0092B-C50C-407E-A947-70E740481C1C}">
+                  <a14:useLocalDpi xmlns:a14="http://schemas.microsoft.com/office/drawing/2010/main" val="0"/>
+                </a:ext>
+              </a:extLst>
+            </a:blip>
+            <a:stretch>
+              <a:fillRect/>
+            </a:stretch>
+          </p:blipFill>
+          <p:spPr>
+            <a:xfrm>
+              <a:off x="3917931" y="6511337"/>
+              <a:ext cx="216000" cy="216000"/>
+            </a:xfrm>
+            <a:prstGeom prst="rect">
+              <a:avLst/>
+            </a:prstGeom>
+          </p:spPr>
+        </p:pic>
+        <p:pic>
+          <p:nvPicPr>
+            <p:cNvPr id="17" name="Picture 16">
+              <a:extLst>
+                <a:ext uri="{FF2B5EF4-FFF2-40B4-BE49-F238E27FC236}">
+                  <a16:creationId xmlns:a16="http://schemas.microsoft.com/office/drawing/2014/main" id="{DF4FC347-DD64-638C-015A-7C22311CC7D4}"/>
+                </a:ext>
+              </a:extLst>
+            </p:cNvPr>
+            <p:cNvPicPr>
+              <a:picLocks noChangeAspect="1"/>
+            </p:cNvPicPr>
+            <p:nvPr userDrawn="1"/>
+          </p:nvPicPr>
+          <p:blipFill>
+            <a:blip r:embed="rId10">
+              <a:extLst>
+                <a:ext uri="{28A0092B-C50C-407E-A947-70E740481C1C}">
+                  <a14:useLocalDpi xmlns:a14="http://schemas.microsoft.com/office/drawing/2010/main" val="0"/>
+                </a:ext>
+              </a:extLst>
+            </a:blip>
+            <a:stretch>
+              <a:fillRect/>
+            </a:stretch>
+          </p:blipFill>
+          <p:spPr>
+            <a:xfrm>
+              <a:off x="2198158" y="6494874"/>
+              <a:ext cx="252000" cy="252000"/>
+            </a:xfrm>
+            <a:prstGeom prst="rect">
+              <a:avLst/>
+            </a:prstGeom>
+          </p:spPr>
+        </p:pic>
+      </p:grpSp>
+      <p:sp>
+        <p:nvSpPr>
+          <p:cNvPr id="20" name="TextBox 19">
+            <a:extLst>
+              <a:ext uri="{FF2B5EF4-FFF2-40B4-BE49-F238E27FC236}">
+                <a16:creationId xmlns:a16="http://schemas.microsoft.com/office/drawing/2014/main" id="{0D6E01B1-894A-0EF4-9580-4FE31CF0E02C}"/>
+              </a:ext>
+            </a:extLst>
+          </p:cNvPr>
+          <p:cNvSpPr txBox="1"/>
+          <p:nvPr userDrawn="1"/>
+        </p:nvSpPr>
+        <p:spPr>
+          <a:xfrm>
+            <a:off x="408843" y="6476999"/>
+            <a:ext cx="1959137" cy="246221"/>
+          </a:xfrm>
+          <a:prstGeom prst="rect">
+            <a:avLst/>
+          </a:prstGeom>
+          <a:noFill/>
+        </p:spPr>
+        <p:txBody>
+          <a:bodyPr wrap="square">
+            <a:spAutoFit/>
+          </a:bodyPr>
+          <a:lstStyle/>
+          <a:p>
+            <a:r>
+              <a:rPr lang="en-US" sz="1000" b="0" kern="1200" dirty="0">
+                <a:solidFill>
+                  <a:srgbClr val="94A3B8"/>
+                </a:solidFill>
+                <a:latin typeface="+mn-lt"/>
+                <a:ea typeface="+mn-ea"/>
+                <a:cs typeface="+mn-cs"/>
+              </a:rPr>
+              <a:t>Alper Ebicoglu</a:t>
+            </a:r>
+            <a:endParaRPr lang="en-US" sz="1000" dirty="0"/>
+          </a:p>
+        </p:txBody>
+      </p:sp>
     </p:spTree>
     <p:extLst>
       <p:ext uri="{BB962C8B-B14F-4D97-AF65-F5344CB8AC3E}">
@@ -4296,7 +4433,7 @@
         <p:spPr>
           <a:xfrm>
             <a:off x="303275" y="451065"/>
-            <a:ext cx="3315557" cy="537556"/>
+            <a:ext cx="3721718" cy="537556"/>
           </a:xfrm>
           <a:prstGeom prst="roundRect">
             <a:avLst>
@@ -4509,7 +4646,7 @@
         </p:nvSpPr>
         <p:spPr>
           <a:xfrm>
-            <a:off x="8700168" y="1273893"/>
+            <a:off x="8666747" y="1845511"/>
             <a:ext cx="3454400" cy="449178"/>
           </a:xfrm>
           <a:prstGeom prst="rect">
@@ -4708,7 +4845,7 @@
         <p:spPr>
           <a:xfrm>
             <a:off x="343903" y="5361379"/>
-            <a:ext cx="4744453" cy="508000"/>
+            <a:ext cx="5256797" cy="508000"/>
           </a:xfrm>
         </p:spPr>
         <p:txBody>
@@ -4785,7 +4922,7 @@
         </p:spPr>
         <p:txBody>
           <a:bodyPr>
-            <a:normAutofit/>
+            <a:normAutofit fontScale="90000"/>
           </a:bodyPr>
           <a:lstStyle/>
           <a:p>
@@ -5221,10 +5358,10 @@
             <p:nvPr/>
           </p:nvPicPr>
           <p:blipFill>
-            <a:blip r:embed="rId3">
+            <a:blip>
               <a:extLst>
                 <a:ext uri="{96DAC541-7B7A-43D3-8B79-37D633B846F1}">
-                  <asvg:svgBlip xmlns:asvg="http://schemas.microsoft.com/office/drawing/2016/SVG/main" r:embed="rId4"/>
+                  <asvg:svgBlip xmlns:asvg="http://schemas.microsoft.com/office/drawing/2016/SVG/main" r:embed="rId3"/>
                 </a:ext>
               </a:extLst>
             </a:blip>
@@ -7822,10 +7959,10 @@
             <p:nvPr/>
           </p:nvPicPr>
           <p:blipFill>
-            <a:blip r:embed="rId3">
+            <a:blip>
               <a:extLst>
                 <a:ext uri="{96DAC541-7B7A-43D3-8B79-37D633B846F1}">
-                  <asvg:svgBlip xmlns:asvg="http://schemas.microsoft.com/office/drawing/2016/SVG/main" r:embed="rId4"/>
+                  <asvg:svgBlip xmlns:asvg="http://schemas.microsoft.com/office/drawing/2016/SVG/main" r:embed="rId3"/>
                 </a:ext>
               </a:extLst>
             </a:blip>
@@ -7898,7 +8035,7 @@
         </p:spPr>
         <p:txBody>
           <a:bodyPr>
-            <a:normAutofit/>
+            <a:normAutofit fontScale="90000"/>
           </a:bodyPr>
           <a:lstStyle/>
           <a:p>
@@ -10002,6 +10139,37 @@
           </a:prstGeom>
         </p:spPr>
       </p:pic>
+      <p:pic>
+        <p:nvPicPr>
+          <p:cNvPr id="41" name="Picture 40">
+            <a:extLst>
+              <a:ext uri="{FF2B5EF4-FFF2-40B4-BE49-F238E27FC236}">
+                <a16:creationId xmlns:a16="http://schemas.microsoft.com/office/drawing/2014/main" id="{7D7786E9-AA5F-3ADF-D26C-1E2338F1F366}"/>
+              </a:ext>
+            </a:extLst>
+          </p:cNvPr>
+          <p:cNvPicPr>
+            <a:picLocks noChangeAspect="1"/>
+          </p:cNvPicPr>
+          <p:nvPr/>
+        </p:nvPicPr>
+        <p:blipFill>
+          <a:blip r:embed="rId4"/>
+          <a:srcRect l="3966" r="10169"/>
+          <a:stretch>
+            <a:fillRect/>
+          </a:stretch>
+        </p:blipFill>
+        <p:spPr>
+          <a:xfrm>
+            <a:off x="-1" y="-9975"/>
+            <a:ext cx="12192001" cy="7153664"/>
+          </a:xfrm>
+          <a:prstGeom prst="rect">
+            <a:avLst/>
+          </a:prstGeom>
+        </p:spPr>
+      </p:pic>
     </p:spTree>
     <p:extLst>
       <p:ext uri="{BB962C8B-B14F-4D97-AF65-F5344CB8AC3E}">
@@ -10012,6 +10180,97 @@
   <p:clrMapOvr>
     <a:masterClrMapping/>
   </p:clrMapOvr>
+  <mc:AlternateContent xmlns:mc="http://schemas.openxmlformats.org/markup-compatibility/2006">
+    <mc:Choice xmlns:p14="http://schemas.microsoft.com/office/powerpoint/2010/main" Requires="p14">
+      <p:transition p14:dur="0" advClick="0"/>
+    </mc:Choice>
+    <mc:Fallback>
+      <p:transition advClick="0"/>
+    </mc:Fallback>
+  </mc:AlternateContent>
+  <p:timing>
+    <p:tnLst>
+      <p:par>
+        <p:cTn id="1" dur="indefinite" restart="never" nodeType="tmRoot">
+          <p:childTnLst>
+            <p:seq concurrent="1" nextAc="seek">
+              <p:cTn id="2" dur="indefinite" nodeType="mainSeq">
+                <p:childTnLst>
+                  <p:par>
+                    <p:cTn id="3" fill="hold">
+                      <p:stCondLst>
+                        <p:cond delay="indefinite"/>
+                      </p:stCondLst>
+                      <p:childTnLst>
+                        <p:par>
+                          <p:cTn id="4" fill="hold">
+                            <p:stCondLst>
+                              <p:cond delay="0"/>
+                            </p:stCondLst>
+                            <p:childTnLst>
+                              <p:par>
+                                <p:cTn id="5" presetID="10" presetClass="entr" presetSubtype="0" fill="hold" nodeType="clickEffect">
+                                  <p:stCondLst>
+                                    <p:cond delay="0"/>
+                                  </p:stCondLst>
+                                  <p:childTnLst>
+                                    <p:set>
+                                      <p:cBhvr>
+                                        <p:cTn id="6" dur="1" fill="hold">
+                                          <p:stCondLst>
+                                            <p:cond delay="0"/>
+                                          </p:stCondLst>
+                                        </p:cTn>
+                                        <p:tgtEl>
+                                          <p:spTgt spid="41"/>
+                                        </p:tgtEl>
+                                        <p:attrNameLst>
+                                          <p:attrName>style.visibility</p:attrName>
+                                        </p:attrNameLst>
+                                      </p:cBhvr>
+                                      <p:to>
+                                        <p:strVal val="visible"/>
+                                      </p:to>
+                                    </p:set>
+                                    <p:animEffect transition="in" filter="fade">
+                                      <p:cBhvr>
+                                        <p:cTn id="7" dur="500"/>
+                                        <p:tgtEl>
+                                          <p:spTgt spid="41"/>
+                                        </p:tgtEl>
+                                      </p:cBhvr>
+                                    </p:animEffect>
+                                  </p:childTnLst>
+                                </p:cTn>
+                              </p:par>
+                            </p:childTnLst>
+                          </p:cTn>
+                        </p:par>
+                      </p:childTnLst>
+                    </p:cTn>
+                  </p:par>
+                </p:childTnLst>
+              </p:cTn>
+              <p:prevCondLst>
+                <p:cond evt="onPrev" delay="0">
+                  <p:tgtEl>
+                    <p:sldTgt/>
+                  </p:tgtEl>
+                </p:cond>
+              </p:prevCondLst>
+              <p:nextCondLst>
+                <p:cond evt="onNext" delay="0">
+                  <p:tgtEl>
+                    <p:sldTgt/>
+                  </p:tgtEl>
+                </p:cond>
+              </p:nextCondLst>
+            </p:seq>
+          </p:childTnLst>
+        </p:cTn>
+      </p:par>
+    </p:tnLst>
+  </p:timing>
 </p:sld>
 </file>
 
@@ -10184,8 +10443,21 @@
                   <a:srgbClr val="64748B"/>
                 </a:solidFill>
               </a:rPr>
-              <a:t>tables, columns</a:t>
-            </a:r>
+              <a:t>only tables ➡ </a:t>
+            </a:r>
+            <a:r>
+              <a:rPr lang="en-US" sz="3200" i="1" dirty="0">
+                <a:solidFill>
+                  <a:srgbClr val="64748B"/>
+                </a:solidFill>
+              </a:rPr>
+              <a:t>MCP (all others)</a:t>
+            </a:r>
+            <a:endParaRPr lang="en-US" sz="3200" dirty="0">
+              <a:solidFill>
+                <a:srgbClr val="64748B"/>
+              </a:solidFill>
+            </a:endParaRPr>
           </a:p>
           <a:p>
             <a:pPr>
@@ -10316,7 +10588,7 @@
               </a:spcBef>
             </a:pPr>
             <a:r>
-              <a:rPr lang="en-US" sz="2800" b="1" dirty="0">
+              <a:rPr lang="en-US" sz="3600" b="1" dirty="0">
                 <a:solidFill>
                   <a:schemeClr val="accent5">
                     <a:lumMod val="60000"/>
@@ -10324,15 +10596,19 @@
                   </a:schemeClr>
                 </a:solidFill>
               </a:rPr>
-              <a:t>❓</a:t>
+              <a:t>⚠</a:t>
             </a:r>
             <a:r>
               <a:rPr lang="en-US" sz="3200" b="1" dirty="0"/>
               <a:t> </a:t>
             </a:r>
             <a:r>
-              <a:rPr lang="en-US" sz="3600" b="1" dirty="0"/>
-              <a:t>Confidential data </a:t>
+              <a:rPr lang="en-US" sz="3600" b="1" dirty="0">
+                <a:solidFill>
+                  <a:srgbClr val="0F172A"/>
+                </a:solidFill>
+              </a:rPr>
+              <a:t>Privacy Concerns </a:t>
             </a:r>
             <a:r>
               <a:rPr lang="en-US" sz="3200" dirty="0">
@@ -10340,8 +10616,21 @@
                   <a:srgbClr val="64748B"/>
                 </a:solidFill>
               </a:rPr>
-              <a:t>send only schema or local LLM</a:t>
-            </a:r>
+              <a:t>only schema or </a:t>
+            </a:r>
+            <a:r>
+              <a:rPr lang="en-US" sz="3200" dirty="0" err="1">
+                <a:solidFill>
+                  <a:srgbClr val="64748B"/>
+                </a:solidFill>
+              </a:rPr>
+              <a:t>Ollama</a:t>
+            </a:r>
+            <a:endParaRPr lang="en-US" sz="3200" dirty="0">
+              <a:solidFill>
+                <a:srgbClr val="64748B"/>
+              </a:solidFill>
+            </a:endParaRPr>
           </a:p>
         </p:txBody>
       </p:sp>
@@ -11068,7 +11357,7 @@
             <a:p>
               <a:pPr algn="l"/>
               <a:r>
-                <a:rPr lang="en-US" sz="5000" b="1" spc="300" dirty="0">
+                <a:rPr lang="en-US" sz="5400" b="1" spc="300" dirty="0">
                   <a:solidFill>
                     <a:srgbClr val="1E293B"/>
                   </a:solidFill>
@@ -11076,21 +11365,21 @@
                 <a:t>now they learnt</a:t>
               </a:r>
               <a:br>
-                <a:rPr lang="en-US" sz="5000" b="1" spc="300" dirty="0">
+                <a:rPr lang="en-US" sz="5400" b="1" spc="300" dirty="0">
                   <a:solidFill>
                     <a:srgbClr val="1E293B"/>
                   </a:solidFill>
                 </a:rPr>
               </a:br>
               <a:r>
-                <a:rPr lang="en-US" sz="5000" b="1" spc="300" dirty="0">
+                <a:rPr lang="en-US" sz="5400" b="1" spc="300" dirty="0">
                   <a:solidFill>
                     <a:srgbClr val="1E293B"/>
                   </a:solidFill>
                 </a:rPr>
                 <a:t>our language</a:t>
               </a:r>
-              <a:endParaRPr lang="en-US" sz="5000" b="1" dirty="0">
+              <a:endParaRPr lang="en-US" sz="5400" b="1" dirty="0">
                 <a:solidFill>
                   <a:srgbClr val="1E293B"/>
                 </a:solidFill>
@@ -11164,7 +11453,7 @@
                   <a:srgbClr val="94A3B8"/>
                 </a:solidFill>
               </a:rPr>
-              <a:t>Demo projects</a:t>
+              <a:t>Demo Project</a:t>
             </a:r>
             <a:endParaRPr lang="tr-TR" sz="2400" i="1" dirty="0"/>
           </a:p>
@@ -14548,10 +14837,10 @@
             <p:nvPr/>
           </p:nvPicPr>
           <p:blipFill>
-            <a:blip r:embed="rId3">
+            <a:blip>
               <a:extLst>
                 <a:ext uri="{96DAC541-7B7A-43D3-8B79-37D633B846F1}">
-                  <asvg:svgBlip xmlns:asvg="http://schemas.microsoft.com/office/drawing/2016/SVG/main" r:embed="rId4"/>
+                  <asvg:svgBlip xmlns:asvg="http://schemas.microsoft.com/office/drawing/2016/SVG/main" r:embed="rId3"/>
                 </a:ext>
               </a:extLst>
             </a:blip>
